--- a/docs/QI_경진대회_발표_BCG.pptx
+++ b/docs/QI_경진대회_발표_BCG.pptx
@@ -119,14 +119,14 @@
   <p:extLst>
     <p:ext uri="{521415D9-36F7-43E2-AB2F-B90AF26B5E84}">
       <p14:sectionLst xmlns:p14="http://schemas.microsoft.com/office/powerpoint/2010/main">
-        <p14:section name="도입" id="{e80f0de2-a199-e516-a16b-d9d01699f847}">
+        <p14:section name="도입" id="{2509124e-79aa-de03-e504-384aa91c557e}">
           <p14:sldIdLst>
             <p14:sldId id="256"/>
             <p14:sldId id="257"/>
             <p14:sldId id="258"/>
           </p14:sldIdLst>
         </p14:section>
-        <p14:section name="Plan" id="{ef813306-d0e8-6afb-c796-8cd4cd474398}">
+        <p14:section name="Plan" id="{541d466c-51fd-750a-58d8-462dbc63cd62}">
           <p14:sldIdLst>
             <p14:sldId id="259"/>
             <p14:sldId id="260"/>
@@ -134,18 +134,18 @@
             <p14:sldId id="262"/>
           </p14:sldIdLst>
         </p14:section>
-        <p14:section name="Do" id="{85ca8f54-666c-4dc8-f95e-4e4b0d9ef6ca}">
+        <p14:section name="Do" id="{a5932ea1-d84b-4921-3a85-63ede1666a02}">
           <p14:sldIdLst>
             <p14:sldId id="263"/>
           </p14:sldIdLst>
         </p14:section>
-        <p14:section name="Check" id="{76b522da-b4fc-0cd2-4393-e01d5a4177b5}">
+        <p14:section name="Check" id="{94bed21a-394a-65e3-5873-cb76f6962255}">
           <p14:sldIdLst>
             <p14:sldId id="264"/>
             <p14:sldId id="265"/>
           </p14:sldIdLst>
         </p14:section>
-        <p14:section name="Act" id="{8bbb4691-f773-71ea-9a8a-eb5737e05dc6}">
+        <p14:section name="Act" id="{5bc71ca4-c2b5-6290-15b7-7520b87a9a07}">
           <p14:sldIdLst>
             <p14:sldId id="266"/>
             <p14:sldId id="267"/>
@@ -1468,7 +1468,8 @@
               <a:t>[도입부 30초]
 - "작년 11월, 신규 입사자가 한꺼번에 17명 들어왔습니다. 그달 교육일지 7건이 누락됐습니다."
 - "종이로는 누가 빠졌는지 볼 방법이 없었기 때문입니다."
-- "올해 6월, 그보다 많은 24건이 몰렸지만 누락은 0건이었습니다. 무엇이 달라졌는지 말씀드리겠습니다."</a:t>
+- "올해 6월, 그보다 많은 24건이 몰렸지만 누락은 0건이었습니다. 무엇이 달라졌는지 말씀드리겠습니다."
+- 오른쪽 수치는 읽지 말고 손으로만 가리키기 — 근거는 9 · 10장에서</a:t>
             </a:r>
             <a:endParaRPr lang="en-US" dirty="0"/>
           </a:p>
@@ -2992,7 +2993,7 @@
         <p:spPr>
           <a:xfrm>
             <a:off x="609600" y="2286000"/>
-            <a:ext cx="7239000" cy="1238250"/>
+            <a:ext cx="7048500" cy="1238250"/>
           </a:xfrm>
           <a:prstGeom prst="rect">
             <a:avLst/>
@@ -3053,8 +3054,8 @@
         </p:nvSpPr>
         <p:spPr>
           <a:xfrm>
-            <a:off x="609600" y="3771900"/>
-            <a:ext cx="7239000" cy="476250"/>
+            <a:off x="609600" y="3733800"/>
+            <a:ext cx="6667500" cy="419100"/>
           </a:xfrm>
           <a:prstGeom prst="rect">
             <a:avLst/>
@@ -3070,7 +3071,7 @@
               <a:buNone/>
             </a:pPr>
             <a:r>
-              <a:rPr lang="en-US" sz="1400" dirty="0">
+              <a:rPr lang="en-US" sz="1300" dirty="0">
                 <a:solidFill>
                   <a:srgbClr val="5B636E"/>
                 </a:solidFill>
@@ -3080,7 +3081,7 @@
               </a:rPr>
               <a:t>Development of an AI-integrated occupational safety and health platform for improved work efficiency</a:t>
             </a:r>
-            <a:endParaRPr lang="en-US" sz="1400" dirty="0"/>
+            <a:endParaRPr lang="en-US" sz="1300" dirty="0"/>
           </a:p>
         </p:txBody>
       </p:sp>
@@ -3092,8 +3093,8 @@
         </p:nvSpPr>
         <p:spPr>
           <a:xfrm>
-            <a:off x="609600" y="4343400"/>
-            <a:ext cx="7239000" cy="247650"/>
+            <a:off x="609600" y="4953000"/>
+            <a:ext cx="6667500" cy="228600"/>
           </a:xfrm>
           <a:prstGeom prst="rect">
             <a:avLst/>
@@ -3117,7 +3118,7 @@
                 <a:ea typeface="Pretendard" pitchFamily="34" charset="-122"/>
                 <a:cs typeface="Pretendard" pitchFamily="34" charset="-120"/>
               </a:rPr>
-              <a:t>총무-안전보건팀 (Safety First)  ·  발표 장은선  ·  팀장 김광현  ·  팀원 장종문</a:t>
+              <a:t>총무-안전보건팀 (Safety First)</a:t>
             </a:r>
             <a:endParaRPr lang="en-US" sz="1500" dirty="0"/>
           </a:p>
@@ -3126,541 +3127,52 @@
       <p:sp>
         <p:nvSpPr>
           <p:cNvPr id="6" name="o5"/>
+          <p:cNvSpPr txBox="1"/>
+          <p:nvPr/>
+        </p:nvSpPr>
+        <p:spPr>
+          <a:xfrm>
+            <a:off x="609600" y="5257800"/>
+            <a:ext cx="6667500" cy="228600"/>
+          </a:xfrm>
+          <a:prstGeom prst="rect">
+            <a:avLst/>
+          </a:prstGeom>
+          <a:noFill/>
+          <a:ln/>
+        </p:spPr>
+        <p:txBody>
+          <a:bodyPr wrap="square" lIns="0" tIns="0" rIns="0" bIns="0" rtlCol="0" anchor="t"/>
+          <a:lstStyle/>
+          <a:p>
+            <a:pPr indent="0" marL="0">
+              <a:buNone/>
+            </a:pPr>
+            <a:r>
+              <a:rPr lang="en-US" sz="1500" b="1" dirty="0">
+                <a:solidFill>
+                  <a:srgbClr val="5B636E"/>
+                </a:solidFill>
+                <a:latin typeface="Pretendard" pitchFamily="34" charset="0"/>
+                <a:ea typeface="Pretendard" pitchFamily="34" charset="-122"/>
+                <a:cs typeface="Pretendard" pitchFamily="34" charset="-120"/>
+              </a:rPr>
+              <a:t>발표 장은선  ·  팀장 김광현  ·  팀원 장종문</a:t>
+            </a:r>
+            <a:endParaRPr lang="en-US" sz="1500" dirty="0"/>
+          </a:p>
+        </p:txBody>
+      </p:sp>
+      <p:sp>
+        <p:nvSpPr>
+          <p:cNvPr id="7" name="o6"/>
           <p:cNvSpPr/>
           <p:nvPr/>
         </p:nvSpPr>
         <p:spPr>
           <a:xfrm>
-            <a:off x="8046720" y="2381250"/>
-            <a:ext cx="3535680" cy="0"/>
-          </a:xfrm>
-          <a:prstGeom prst="line">
-            <a:avLst/>
-          </a:prstGeom>
-          <a:noFill/>
-          <a:ln w="9525">
-            <a:solidFill>
-              <a:srgbClr val="D6DAD8"/>
-            </a:solidFill>
-            <a:prstDash val="solid"/>
-          </a:ln>
-        </p:spPr>
-      </p:sp>
-      <p:sp>
-        <p:nvSpPr>
-          <p:cNvPr id="7" name="o6"/>
-          <p:cNvSpPr txBox="1"/>
-          <p:nvPr/>
-        </p:nvSpPr>
-        <p:spPr>
-          <a:xfrm>
-            <a:off x="8046720" y="2457450"/>
-            <a:ext cx="3535680" cy="133350"/>
-          </a:xfrm>
-          <a:prstGeom prst="rect">
-            <a:avLst/>
-          </a:prstGeom>
-          <a:noFill/>
-          <a:ln/>
-        </p:spPr>
-        <p:txBody>
-          <a:bodyPr wrap="square" lIns="0" tIns="0" rIns="0" bIns="0" rtlCol="0" anchor="t"/>
-          <a:lstStyle/>
-          <a:p>
-            <a:pPr indent="0" marL="0">
-              <a:buNone/>
-            </a:pPr>
-            <a:r>
-              <a:rPr lang="en-US" sz="800" b="1" spc="120" kern="0" dirty="0">
-                <a:solidFill>
-                  <a:srgbClr val="177B57"/>
-                </a:solidFill>
-                <a:latin typeface="IBM Plex Mono" pitchFamily="34" charset="0"/>
-                <a:ea typeface="IBM Plex Mono" pitchFamily="34" charset="-122"/>
-                <a:cs typeface="IBM Plex Mono" pitchFamily="34" charset="-120"/>
-              </a:rPr>
-              <a:t>PREPARED FOR</a:t>
-            </a:r>
-            <a:endParaRPr lang="en-US" sz="800" dirty="0"/>
-          </a:p>
-        </p:txBody>
-      </p:sp>
-      <p:sp>
-        <p:nvSpPr>
-          <p:cNvPr id="8" name="o7"/>
-          <p:cNvSpPr txBox="1"/>
-          <p:nvPr/>
-        </p:nvSpPr>
-        <p:spPr>
-          <a:xfrm>
-            <a:off x="8046720" y="2609850"/>
-            <a:ext cx="3535680" cy="190500"/>
-          </a:xfrm>
-          <a:prstGeom prst="rect">
-            <a:avLst/>
-          </a:prstGeom>
-          <a:noFill/>
-          <a:ln/>
-        </p:spPr>
-        <p:txBody>
-          <a:bodyPr wrap="square" lIns="0" tIns="0" rIns="0" bIns="0" rtlCol="0" anchor="t"/>
-          <a:lstStyle/>
-          <a:p>
-            <a:pPr indent="0" marL="0">
-              <a:buNone/>
-            </a:pPr>
-            <a:r>
-              <a:rPr lang="en-US" sz="1200" dirty="0">
-                <a:solidFill>
-                  <a:srgbClr val="1A1A1A"/>
-                </a:solidFill>
-                <a:latin typeface="Pretendard" pitchFamily="34" charset="0"/>
-                <a:ea typeface="Pretendard" pitchFamily="34" charset="-122"/>
-                <a:cs typeface="Pretendard" pitchFamily="34" charset="-120"/>
-              </a:rPr>
-              <a:t>2026 QI 경진대회 심사위원회</a:t>
-            </a:r>
-            <a:endParaRPr lang="en-US" sz="1200" dirty="0"/>
-          </a:p>
-        </p:txBody>
-      </p:sp>
-      <p:sp>
-        <p:nvSpPr>
-          <p:cNvPr id="9" name="o8"/>
-          <p:cNvSpPr/>
-          <p:nvPr/>
-        </p:nvSpPr>
-        <p:spPr>
-          <a:xfrm>
-            <a:off x="8046720" y="2857500"/>
-            <a:ext cx="3535680" cy="0"/>
-          </a:xfrm>
-          <a:prstGeom prst="line">
-            <a:avLst/>
-          </a:prstGeom>
-          <a:noFill/>
-          <a:ln w="9525">
-            <a:solidFill>
-              <a:srgbClr val="D6DAD8"/>
-            </a:solidFill>
-            <a:prstDash val="solid"/>
-          </a:ln>
-        </p:spPr>
-      </p:sp>
-      <p:sp>
-        <p:nvSpPr>
-          <p:cNvPr id="10" name="o9"/>
-          <p:cNvSpPr txBox="1"/>
-          <p:nvPr/>
-        </p:nvSpPr>
-        <p:spPr>
-          <a:xfrm>
-            <a:off x="8046720" y="2933700"/>
-            <a:ext cx="3535680" cy="133350"/>
-          </a:xfrm>
-          <a:prstGeom prst="rect">
-            <a:avLst/>
-          </a:prstGeom>
-          <a:noFill/>
-          <a:ln/>
-        </p:spPr>
-        <p:txBody>
-          <a:bodyPr wrap="square" lIns="0" tIns="0" rIns="0" bIns="0" rtlCol="0" anchor="t"/>
-          <a:lstStyle/>
-          <a:p>
-            <a:pPr indent="0" marL="0">
-              <a:buNone/>
-            </a:pPr>
-            <a:r>
-              <a:rPr lang="en-US" sz="800" b="1" spc="120" kern="0" dirty="0">
-                <a:solidFill>
-                  <a:srgbClr val="177B57"/>
-                </a:solidFill>
-                <a:latin typeface="IBM Plex Mono" pitchFamily="34" charset="0"/>
-                <a:ea typeface="IBM Plex Mono" pitchFamily="34" charset="-122"/>
-                <a:cs typeface="IBM Plex Mono" pitchFamily="34" charset="-120"/>
-              </a:rPr>
-              <a:t>ORGANIZATION</a:t>
-            </a:r>
-            <a:endParaRPr lang="en-US" sz="800" dirty="0"/>
-          </a:p>
-        </p:txBody>
-      </p:sp>
-      <p:sp>
-        <p:nvSpPr>
-          <p:cNvPr id="11" name="o10"/>
-          <p:cNvSpPr txBox="1"/>
-          <p:nvPr/>
-        </p:nvSpPr>
-        <p:spPr>
-          <a:xfrm>
-            <a:off x="8046720" y="3086100"/>
-            <a:ext cx="3535680" cy="190500"/>
-          </a:xfrm>
-          <a:prstGeom prst="rect">
-            <a:avLst/>
-          </a:prstGeom>
-          <a:noFill/>
-          <a:ln/>
-        </p:spPr>
-        <p:txBody>
-          <a:bodyPr wrap="square" lIns="0" tIns="0" rIns="0" bIns="0" rtlCol="0" anchor="t"/>
-          <a:lstStyle/>
-          <a:p>
-            <a:pPr indent="0" marL="0">
-              <a:buNone/>
-            </a:pPr>
-            <a:r>
-              <a:rPr lang="en-US" sz="1200" dirty="0">
-                <a:solidFill>
-                  <a:srgbClr val="1A1A1A"/>
-                </a:solidFill>
-                <a:latin typeface="Pretendard" pitchFamily="34" charset="0"/>
-                <a:ea typeface="Pretendard" pitchFamily="34" charset="-122"/>
-                <a:cs typeface="Pretendard" pitchFamily="34" charset="-120"/>
-              </a:rPr>
-              <a:t>인당의료재단 부민병원</a:t>
-            </a:r>
-            <a:endParaRPr lang="en-US" sz="1200" dirty="0"/>
-          </a:p>
-        </p:txBody>
-      </p:sp>
-      <p:sp>
-        <p:nvSpPr>
-          <p:cNvPr id="12" name="o11"/>
-          <p:cNvSpPr/>
-          <p:nvPr/>
-        </p:nvSpPr>
-        <p:spPr>
-          <a:xfrm>
-            <a:off x="8046720" y="3333750"/>
-            <a:ext cx="3535680" cy="0"/>
-          </a:xfrm>
-          <a:prstGeom prst="line">
-            <a:avLst/>
-          </a:prstGeom>
-          <a:noFill/>
-          <a:ln w="9525">
-            <a:solidFill>
-              <a:srgbClr val="D6DAD8"/>
-            </a:solidFill>
-            <a:prstDash val="solid"/>
-          </a:ln>
-        </p:spPr>
-      </p:sp>
-      <p:sp>
-        <p:nvSpPr>
-          <p:cNvPr id="13" name="o12"/>
-          <p:cNvSpPr txBox="1"/>
-          <p:nvPr/>
-        </p:nvSpPr>
-        <p:spPr>
-          <a:xfrm>
-            <a:off x="8046720" y="3409950"/>
-            <a:ext cx="3535680" cy="133350"/>
-          </a:xfrm>
-          <a:prstGeom prst="rect">
-            <a:avLst/>
-          </a:prstGeom>
-          <a:noFill/>
-          <a:ln/>
-        </p:spPr>
-        <p:txBody>
-          <a:bodyPr wrap="square" lIns="0" tIns="0" rIns="0" bIns="0" rtlCol="0" anchor="t"/>
-          <a:lstStyle/>
-          <a:p>
-            <a:pPr indent="0" marL="0">
-              <a:buNone/>
-            </a:pPr>
-            <a:r>
-              <a:rPr lang="en-US" sz="800" b="1" spc="120" kern="0" dirty="0">
-                <a:solidFill>
-                  <a:srgbClr val="177B57"/>
-                </a:solidFill>
-                <a:latin typeface="IBM Plex Mono" pitchFamily="34" charset="0"/>
-                <a:ea typeface="IBM Plex Mono" pitchFamily="34" charset="-122"/>
-                <a:cs typeface="IBM Plex Mono" pitchFamily="34" charset="-120"/>
-              </a:rPr>
-              <a:t>TEAM</a:t>
-            </a:r>
-            <a:endParaRPr lang="en-US" sz="800" dirty="0"/>
-          </a:p>
-        </p:txBody>
-      </p:sp>
-      <p:sp>
-        <p:nvSpPr>
-          <p:cNvPr id="14" name="o13"/>
-          <p:cNvSpPr txBox="1"/>
-          <p:nvPr/>
-        </p:nvSpPr>
-        <p:spPr>
-          <a:xfrm>
-            <a:off x="8046720" y="3562350"/>
-            <a:ext cx="3535680" cy="190500"/>
-          </a:xfrm>
-          <a:prstGeom prst="rect">
-            <a:avLst/>
-          </a:prstGeom>
-          <a:noFill/>
-          <a:ln/>
-        </p:spPr>
-        <p:txBody>
-          <a:bodyPr wrap="square" lIns="0" tIns="0" rIns="0" bIns="0" rtlCol="0" anchor="t"/>
-          <a:lstStyle/>
-          <a:p>
-            <a:pPr indent="0" marL="0">
-              <a:buNone/>
-            </a:pPr>
-            <a:r>
-              <a:rPr lang="en-US" sz="1200" dirty="0">
-                <a:solidFill>
-                  <a:srgbClr val="1A1A1A"/>
-                </a:solidFill>
-                <a:latin typeface="Pretendard" pitchFamily="34" charset="0"/>
-                <a:ea typeface="Pretendard" pitchFamily="34" charset="-122"/>
-                <a:cs typeface="Pretendard" pitchFamily="34" charset="-120"/>
-              </a:rPr>
-              <a:t>총무-안전보건팀 (Safety First)</a:t>
-            </a:r>
-            <a:endParaRPr lang="en-US" sz="1200" dirty="0"/>
-          </a:p>
-        </p:txBody>
-      </p:sp>
-      <p:sp>
-        <p:nvSpPr>
-          <p:cNvPr id="15" name="o14"/>
-          <p:cNvSpPr/>
-          <p:nvPr/>
-        </p:nvSpPr>
-        <p:spPr>
-          <a:xfrm>
-            <a:off x="8046720" y="3810000"/>
-            <a:ext cx="3535680" cy="0"/>
-          </a:xfrm>
-          <a:prstGeom prst="line">
-            <a:avLst/>
-          </a:prstGeom>
-          <a:noFill/>
-          <a:ln w="9525">
-            <a:solidFill>
-              <a:srgbClr val="D6DAD8"/>
-            </a:solidFill>
-            <a:prstDash val="solid"/>
-          </a:ln>
-        </p:spPr>
-      </p:sp>
-      <p:sp>
-        <p:nvSpPr>
-          <p:cNvPr id="16" name="o15"/>
-          <p:cNvSpPr txBox="1"/>
-          <p:nvPr/>
-        </p:nvSpPr>
-        <p:spPr>
-          <a:xfrm>
-            <a:off x="8046720" y="3886200"/>
-            <a:ext cx="3535680" cy="133350"/>
-          </a:xfrm>
-          <a:prstGeom prst="rect">
-            <a:avLst/>
-          </a:prstGeom>
-          <a:noFill/>
-          <a:ln/>
-        </p:spPr>
-        <p:txBody>
-          <a:bodyPr wrap="square" lIns="0" tIns="0" rIns="0" bIns="0" rtlCol="0" anchor="t"/>
-          <a:lstStyle/>
-          <a:p>
-            <a:pPr indent="0" marL="0">
-              <a:buNone/>
-            </a:pPr>
-            <a:r>
-              <a:rPr lang="en-US" sz="800" b="1" spc="120" kern="0" dirty="0">
-                <a:solidFill>
-                  <a:srgbClr val="177B57"/>
-                </a:solidFill>
-                <a:latin typeface="IBM Plex Mono" pitchFamily="34" charset="0"/>
-                <a:ea typeface="IBM Plex Mono" pitchFamily="34" charset="-122"/>
-                <a:cs typeface="IBM Plex Mono" pitchFamily="34" charset="-120"/>
-              </a:rPr>
-              <a:t>PERIOD</a:t>
-            </a:r>
-            <a:endParaRPr lang="en-US" sz="800" dirty="0"/>
-          </a:p>
-        </p:txBody>
-      </p:sp>
-      <p:sp>
-        <p:nvSpPr>
-          <p:cNvPr id="17" name="o16"/>
-          <p:cNvSpPr txBox="1"/>
-          <p:nvPr/>
-        </p:nvSpPr>
-        <p:spPr>
-          <a:xfrm>
-            <a:off x="8046720" y="4038600"/>
-            <a:ext cx="3535680" cy="190500"/>
-          </a:xfrm>
-          <a:prstGeom prst="rect">
-            <a:avLst/>
-          </a:prstGeom>
-          <a:noFill/>
-          <a:ln/>
-        </p:spPr>
-        <p:txBody>
-          <a:bodyPr wrap="square" lIns="0" tIns="0" rIns="0" bIns="0" rtlCol="0" anchor="t"/>
-          <a:lstStyle/>
-          <a:p>
-            <a:pPr indent="0" marL="0">
-              <a:buNone/>
-            </a:pPr>
-            <a:r>
-              <a:rPr lang="en-US" sz="1200" dirty="0">
-                <a:solidFill>
-                  <a:srgbClr val="1A1A1A"/>
-                </a:solidFill>
-                <a:latin typeface="Pretendard" pitchFamily="34" charset="0"/>
-                <a:ea typeface="Pretendard" pitchFamily="34" charset="-122"/>
-                <a:cs typeface="Pretendard" pitchFamily="34" charset="-120"/>
-              </a:rPr>
-              <a:t>2026.01 – 2026.10</a:t>
-            </a:r>
-            <a:endParaRPr lang="en-US" sz="1200" dirty="0"/>
-          </a:p>
-        </p:txBody>
-      </p:sp>
-      <p:sp>
-        <p:nvSpPr>
-          <p:cNvPr id="18" name="o17"/>
-          <p:cNvSpPr/>
-          <p:nvPr/>
-        </p:nvSpPr>
-        <p:spPr>
-          <a:xfrm>
-            <a:off x="8046720" y="4286250"/>
-            <a:ext cx="3535680" cy="0"/>
-          </a:xfrm>
-          <a:prstGeom prst="line">
-            <a:avLst/>
-          </a:prstGeom>
-          <a:noFill/>
-          <a:ln w="9525">
-            <a:solidFill>
-              <a:srgbClr val="D6DAD8"/>
-            </a:solidFill>
-            <a:prstDash val="solid"/>
-          </a:ln>
-        </p:spPr>
-      </p:sp>
-      <p:sp>
-        <p:nvSpPr>
-          <p:cNvPr id="19" name="o18"/>
-          <p:cNvSpPr txBox="1"/>
-          <p:nvPr/>
-        </p:nvSpPr>
-        <p:spPr>
-          <a:xfrm>
-            <a:off x="8046720" y="4362450"/>
-            <a:ext cx="3535680" cy="133350"/>
-          </a:xfrm>
-          <a:prstGeom prst="rect">
-            <a:avLst/>
-          </a:prstGeom>
-          <a:noFill/>
-          <a:ln/>
-        </p:spPr>
-        <p:txBody>
-          <a:bodyPr wrap="square" lIns="0" tIns="0" rIns="0" bIns="0" rtlCol="0" anchor="t"/>
-          <a:lstStyle/>
-          <a:p>
-            <a:pPr indent="0" marL="0">
-              <a:buNone/>
-            </a:pPr>
-            <a:r>
-              <a:rPr lang="en-US" sz="800" b="1" spc="120" kern="0" dirty="0">
-                <a:solidFill>
-                  <a:srgbClr val="177B57"/>
-                </a:solidFill>
-                <a:latin typeface="IBM Plex Mono" pitchFamily="34" charset="0"/>
-                <a:ea typeface="IBM Plex Mono" pitchFamily="34" charset="-122"/>
-                <a:cs typeface="IBM Plex Mono" pitchFamily="34" charset="-120"/>
-              </a:rPr>
-              <a:t>TOPIC CODE</a:t>
-            </a:r>
-            <a:endParaRPr lang="en-US" sz="800" dirty="0"/>
-          </a:p>
-        </p:txBody>
-      </p:sp>
-      <p:sp>
-        <p:nvSpPr>
-          <p:cNvPr id="20" name="o19"/>
-          <p:cNvSpPr txBox="1"/>
-          <p:nvPr/>
-        </p:nvSpPr>
-        <p:spPr>
-          <a:xfrm>
-            <a:off x="8046720" y="4514850"/>
-            <a:ext cx="3535680" cy="190500"/>
-          </a:xfrm>
-          <a:prstGeom prst="rect">
-            <a:avLst/>
-          </a:prstGeom>
-          <a:noFill/>
-          <a:ln/>
-        </p:spPr>
-        <p:txBody>
-          <a:bodyPr wrap="square" lIns="0" tIns="0" rIns="0" bIns="0" rtlCol="0" anchor="t"/>
-          <a:lstStyle/>
-          <a:p>
-            <a:pPr indent="0" marL="0">
-              <a:buNone/>
-            </a:pPr>
-            <a:r>
-              <a:rPr lang="en-US" sz="1200" dirty="0">
-                <a:solidFill>
-                  <a:srgbClr val="1A1A1A"/>
-                </a:solidFill>
-                <a:latin typeface="Pretendard" pitchFamily="34" charset="0"/>
-                <a:ea typeface="Pretendard" pitchFamily="34" charset="-122"/>
-                <a:cs typeface="Pretendard" pitchFamily="34" charset="-120"/>
-              </a:rPr>
-              <a:t>QI-2026 · 행정지원업무개선</a:t>
-            </a:r>
-            <a:endParaRPr lang="en-US" sz="1200" dirty="0"/>
-          </a:p>
-        </p:txBody>
-      </p:sp>
-      <p:sp>
-        <p:nvSpPr>
-          <p:cNvPr id="21" name="o20"/>
-          <p:cNvSpPr/>
-          <p:nvPr/>
-        </p:nvSpPr>
-        <p:spPr>
-          <a:xfrm>
-            <a:off x="8046720" y="4762500"/>
-            <a:ext cx="3535680" cy="0"/>
-          </a:xfrm>
-          <a:prstGeom prst="line">
-            <a:avLst/>
-          </a:prstGeom>
-          <a:noFill/>
-          <a:ln w="9525">
-            <a:solidFill>
-              <a:srgbClr val="D6DAD8"/>
-            </a:solidFill>
-            <a:prstDash val="solid"/>
-          </a:ln>
-        </p:spPr>
-      </p:sp>
-      <p:sp>
-        <p:nvSpPr>
-          <p:cNvPr id="22" name="o21"/>
-          <p:cNvSpPr/>
-          <p:nvPr/>
-        </p:nvSpPr>
-        <p:spPr>
-          <a:xfrm>
             <a:off x="609600" y="6076950"/>
-            <a:ext cx="10972800" cy="0"/>
+            <a:ext cx="7010400" cy="0"/>
           </a:xfrm>
           <a:prstGeom prst="line">
             <a:avLst/>
@@ -3676,14 +3188,14 @@
       </p:sp>
       <p:sp>
         <p:nvSpPr>
-          <p:cNvPr id="23" name="o22"/>
+          <p:cNvPr id="8" name="o7"/>
           <p:cNvSpPr txBox="1"/>
           <p:nvPr/>
         </p:nvSpPr>
         <p:spPr>
           <a:xfrm>
             <a:off x="609600" y="6143625"/>
-            <a:ext cx="8572500" cy="133350"/>
+            <a:ext cx="5715000" cy="133350"/>
           </a:xfrm>
           <a:prstGeom prst="rect">
             <a:avLst/>
@@ -3707,11 +3219,572 @@
                 <a:ea typeface="IBM Plex Mono" pitchFamily="34" charset="-122"/>
                 <a:cs typeface="IBM Plex Mono" pitchFamily="34" charset="-120"/>
               </a:rPr>
-              <a:t>인당의료재단 부민병원  ·  2026  ·  Internal — QI 경진대회 발표용</a:t>
+              <a:t>인당의료재단 부민병원</a:t>
             </a:r>
             <a:endParaRPr lang="en-US" sz="800" dirty="0"/>
           </a:p>
         </p:txBody>
+      </p:sp>
+      <p:sp>
+        <p:nvSpPr>
+          <p:cNvPr id="9" name="o8"/>
+          <p:cNvSpPr/>
+          <p:nvPr/>
+        </p:nvSpPr>
+        <p:spPr>
+          <a:xfrm>
+            <a:off x="8001000" y="0"/>
+            <a:ext cx="4191000" cy="6858000"/>
+          </a:xfrm>
+          <a:prstGeom prst="rect">
+            <a:avLst/>
+          </a:prstGeom>
+          <a:solidFill>
+            <a:srgbClr val="F2F4F3"/>
+          </a:solidFill>
+          <a:ln/>
+        </p:spPr>
+      </p:sp>
+      <p:sp>
+        <p:nvSpPr>
+          <p:cNvPr id="10" name="o9"/>
+          <p:cNvSpPr txBox="1"/>
+          <p:nvPr/>
+        </p:nvSpPr>
+        <p:spPr>
+          <a:xfrm>
+            <a:off x="8382000" y="571500"/>
+            <a:ext cx="3429000" cy="152400"/>
+          </a:xfrm>
+          <a:prstGeom prst="rect">
+            <a:avLst/>
+          </a:prstGeom>
+          <a:noFill/>
+          <a:ln/>
+        </p:spPr>
+        <p:txBody>
+          <a:bodyPr wrap="square" lIns="0" tIns="0" rIns="0" bIns="0" rtlCol="0" anchor="t"/>
+          <a:lstStyle/>
+          <a:p>
+            <a:pPr indent="0" marL="0">
+              <a:buNone/>
+            </a:pPr>
+            <a:r>
+              <a:rPr lang="en-US" sz="900" b="1" spc="120" kern="0" dirty="0">
+                <a:solidFill>
+                  <a:srgbClr val="177B57"/>
+                </a:solidFill>
+                <a:latin typeface="IBM Plex Mono" pitchFamily="34" charset="0"/>
+                <a:ea typeface="IBM Plex Mono" pitchFamily="34" charset="-122"/>
+                <a:cs typeface="IBM Plex Mono" pitchFamily="34" charset="-120"/>
+              </a:rPr>
+              <a:t>RESULTS AT A GLANCE</a:t>
+            </a:r>
+            <a:endParaRPr lang="en-US" sz="900" dirty="0"/>
+          </a:p>
+        </p:txBody>
+      </p:sp>
+      <p:sp>
+        <p:nvSpPr>
+          <p:cNvPr id="11" name="o10"/>
+          <p:cNvSpPr txBox="1"/>
+          <p:nvPr/>
+        </p:nvSpPr>
+        <p:spPr>
+          <a:xfrm>
+            <a:off x="8382000" y="762000"/>
+            <a:ext cx="3429000" cy="190500"/>
+          </a:xfrm>
+          <a:prstGeom prst="rect">
+            <a:avLst/>
+          </a:prstGeom>
+          <a:noFill/>
+          <a:ln/>
+        </p:spPr>
+        <p:txBody>
+          <a:bodyPr wrap="square" lIns="0" tIns="0" rIns="0" bIns="0" rtlCol="0" anchor="t"/>
+          <a:lstStyle/>
+          <a:p>
+            <a:pPr indent="0" marL="0">
+              <a:buNone/>
+            </a:pPr>
+            <a:r>
+              <a:rPr lang="en-US" sz="1200" b="1" dirty="0">
+                <a:solidFill>
+                  <a:srgbClr val="1A1A1A"/>
+                </a:solidFill>
+                <a:latin typeface="Pretendard" pitchFamily="34" charset="0"/>
+                <a:ea typeface="Pretendard" pitchFamily="34" charset="-122"/>
+                <a:cs typeface="Pretendard" pitchFamily="34" charset="-120"/>
+              </a:rPr>
+              <a:t>개선 전(2025) → 개선 후(2026.05–07)</a:t>
+            </a:r>
+            <a:endParaRPr lang="en-US" sz="1200" dirty="0"/>
+          </a:p>
+        </p:txBody>
+      </p:sp>
+      <p:sp>
+        <p:nvSpPr>
+          <p:cNvPr id="12" name="o11"/>
+          <p:cNvSpPr/>
+          <p:nvPr/>
+        </p:nvSpPr>
+        <p:spPr>
+          <a:xfrm>
+            <a:off x="8382000" y="1333500"/>
+            <a:ext cx="3429000" cy="0"/>
+          </a:xfrm>
+          <a:prstGeom prst="line">
+            <a:avLst/>
+          </a:prstGeom>
+          <a:noFill/>
+          <a:ln w="12700">
+            <a:solidFill>
+              <a:srgbClr val="D6DAD8"/>
+            </a:solidFill>
+            <a:prstDash val="solid"/>
+          </a:ln>
+        </p:spPr>
+      </p:sp>
+      <p:sp>
+        <p:nvSpPr>
+          <p:cNvPr id="13" name="o12"/>
+          <p:cNvSpPr/>
+          <p:nvPr/>
+        </p:nvSpPr>
+        <p:spPr>
+          <a:xfrm>
+            <a:off x="8382000" y="1485900"/>
+            <a:ext cx="91440" cy="1066800"/>
+          </a:xfrm>
+          <a:prstGeom prst="rect">
+            <a:avLst/>
+          </a:prstGeom>
+          <a:solidFill>
+            <a:srgbClr val="177B57"/>
+          </a:solidFill>
+          <a:ln/>
+        </p:spPr>
+      </p:sp>
+      <p:sp>
+        <p:nvSpPr>
+          <p:cNvPr id="14" name="o13"/>
+          <p:cNvSpPr txBox="1"/>
+          <p:nvPr/>
+        </p:nvSpPr>
+        <p:spPr>
+          <a:xfrm>
+            <a:off x="8629650" y="1485900"/>
+            <a:ext cx="3048000" cy="171450"/>
+          </a:xfrm>
+          <a:prstGeom prst="rect">
+            <a:avLst/>
+          </a:prstGeom>
+          <a:noFill/>
+          <a:ln/>
+        </p:spPr>
+        <p:txBody>
+          <a:bodyPr wrap="square" lIns="0" tIns="0" rIns="0" bIns="0" rtlCol="0" anchor="t"/>
+          <a:lstStyle/>
+          <a:p>
+            <a:pPr indent="0" marL="0">
+              <a:buNone/>
+            </a:pPr>
+            <a:r>
+              <a:rPr lang="en-US" sz="1200" dirty="0">
+                <a:solidFill>
+                  <a:srgbClr val="5B636E"/>
+                </a:solidFill>
+                <a:latin typeface="Pretendard" pitchFamily="34" charset="0"/>
+                <a:ea typeface="Pretendard" pitchFamily="34" charset="-122"/>
+                <a:cs typeface="Pretendard" pitchFamily="34" charset="-120"/>
+              </a:rPr>
+              <a:t>특별교육 행정시간</a:t>
+            </a:r>
+            <a:endParaRPr lang="en-US" sz="1200" dirty="0"/>
+          </a:p>
+        </p:txBody>
+      </p:sp>
+      <p:sp>
+        <p:nvSpPr>
+          <p:cNvPr id="15" name="o14"/>
+          <p:cNvSpPr txBox="1"/>
+          <p:nvPr/>
+        </p:nvSpPr>
+        <p:spPr>
+          <a:xfrm>
+            <a:off x="8629650" y="1714500"/>
+            <a:ext cx="3143250" cy="571500"/>
+          </a:xfrm>
+          <a:prstGeom prst="rect">
+            <a:avLst/>
+          </a:prstGeom>
+          <a:noFill/>
+          <a:ln/>
+        </p:spPr>
+        <p:txBody>
+          <a:bodyPr wrap="square" lIns="0" tIns="0" rIns="0" bIns="0" rtlCol="0" anchor="t"/>
+          <a:lstStyle/>
+          <a:p>
+            <a:pPr indent="0" marL="0">
+              <a:buNone/>
+            </a:pPr>
+            <a:r>
+              <a:rPr lang="en-US" sz="4000" b="1" dirty="0">
+                <a:solidFill>
+                  <a:srgbClr val="177B57"/>
+                </a:solidFill>
+                <a:latin typeface="IBM Plex Sans" pitchFamily="34" charset="0"/>
+                <a:ea typeface="IBM Plex Sans" pitchFamily="34" charset="-122"/>
+                <a:cs typeface="IBM Plex Sans" pitchFamily="34" charset="-120"/>
+              </a:rPr>
+              <a:t>−93%</a:t>
+            </a:r>
+            <a:endParaRPr lang="en-US" sz="4000" dirty="0"/>
+          </a:p>
+        </p:txBody>
+      </p:sp>
+      <p:sp>
+        <p:nvSpPr>
+          <p:cNvPr id="16" name="o15"/>
+          <p:cNvSpPr txBox="1"/>
+          <p:nvPr/>
+        </p:nvSpPr>
+        <p:spPr>
+          <a:xfrm>
+            <a:off x="8629650" y="2343150"/>
+            <a:ext cx="3048000" cy="152400"/>
+          </a:xfrm>
+          <a:prstGeom prst="rect">
+            <a:avLst/>
+          </a:prstGeom>
+          <a:noFill/>
+          <a:ln/>
+        </p:spPr>
+        <p:txBody>
+          <a:bodyPr wrap="square" lIns="0" tIns="0" rIns="0" bIns="0" rtlCol="0" anchor="t"/>
+          <a:lstStyle/>
+          <a:p>
+            <a:pPr indent="0" marL="0">
+              <a:buNone/>
+            </a:pPr>
+            <a:r>
+              <a:rPr lang="en-US" sz="900" dirty="0">
+                <a:solidFill>
+                  <a:srgbClr val="5B636E"/>
+                </a:solidFill>
+                <a:latin typeface="IBM Plex Mono" pitchFamily="34" charset="0"/>
+                <a:ea typeface="IBM Plex Mono" pitchFamily="34" charset="-122"/>
+                <a:cs typeface="IBM Plex Mono" pitchFamily="34" charset="-120"/>
+              </a:rPr>
+              <a:t>33:48 → 2:22 (분:초)</a:t>
+            </a:r>
+            <a:endParaRPr lang="en-US" sz="900" dirty="0"/>
+          </a:p>
+        </p:txBody>
+      </p:sp>
+      <p:sp>
+        <p:nvSpPr>
+          <p:cNvPr id="17" name="o16"/>
+          <p:cNvSpPr/>
+          <p:nvPr/>
+        </p:nvSpPr>
+        <p:spPr>
+          <a:xfrm>
+            <a:off x="8382000" y="2857500"/>
+            <a:ext cx="3429000" cy="0"/>
+          </a:xfrm>
+          <a:prstGeom prst="line">
+            <a:avLst/>
+          </a:prstGeom>
+          <a:noFill/>
+          <a:ln w="12700">
+            <a:solidFill>
+              <a:srgbClr val="D6DAD8"/>
+            </a:solidFill>
+            <a:prstDash val="solid"/>
+          </a:ln>
+        </p:spPr>
+      </p:sp>
+      <p:sp>
+        <p:nvSpPr>
+          <p:cNvPr id="18" name="o17"/>
+          <p:cNvSpPr txBox="1"/>
+          <p:nvPr/>
+        </p:nvSpPr>
+        <p:spPr>
+          <a:xfrm>
+            <a:off x="8382000" y="3009900"/>
+            <a:ext cx="3048000" cy="171450"/>
+          </a:xfrm>
+          <a:prstGeom prst="rect">
+            <a:avLst/>
+          </a:prstGeom>
+          <a:noFill/>
+          <a:ln/>
+        </p:spPr>
+        <p:txBody>
+          <a:bodyPr wrap="square" lIns="0" tIns="0" rIns="0" bIns="0" rtlCol="0" anchor="t"/>
+          <a:lstStyle/>
+          <a:p>
+            <a:pPr indent="0" marL="0">
+              <a:buNone/>
+            </a:pPr>
+            <a:r>
+              <a:rPr lang="en-US" sz="1200" dirty="0">
+                <a:solidFill>
+                  <a:srgbClr val="5B636E"/>
+                </a:solidFill>
+                <a:latin typeface="Pretendard" pitchFamily="34" charset="0"/>
+                <a:ea typeface="Pretendard" pitchFamily="34" charset="-122"/>
+                <a:cs typeface="Pretendard" pitchFamily="34" charset="-120"/>
+              </a:rPr>
+              <a:t>법정교육 누락</a:t>
+            </a:r>
+            <a:endParaRPr lang="en-US" sz="1200" dirty="0"/>
+          </a:p>
+        </p:txBody>
+      </p:sp>
+      <p:sp>
+        <p:nvSpPr>
+          <p:cNvPr id="19" name="o18"/>
+          <p:cNvSpPr txBox="1"/>
+          <p:nvPr/>
+        </p:nvSpPr>
+        <p:spPr>
+          <a:xfrm>
+            <a:off x="8382000" y="3238500"/>
+            <a:ext cx="3143250" cy="571500"/>
+          </a:xfrm>
+          <a:prstGeom prst="rect">
+            <a:avLst/>
+          </a:prstGeom>
+          <a:noFill/>
+          <a:ln/>
+        </p:spPr>
+        <p:txBody>
+          <a:bodyPr wrap="square" lIns="0" tIns="0" rIns="0" bIns="0" rtlCol="0" anchor="t"/>
+          <a:lstStyle/>
+          <a:p>
+            <a:pPr indent="0" marL="0">
+              <a:buNone/>
+            </a:pPr>
+            <a:r>
+              <a:rPr lang="en-US" sz="4000" b="1" dirty="0">
+                <a:solidFill>
+                  <a:srgbClr val="1A1A1A"/>
+                </a:solidFill>
+                <a:latin typeface="IBM Plex Sans" pitchFamily="34" charset="0"/>
+                <a:ea typeface="IBM Plex Sans" pitchFamily="34" charset="-122"/>
+                <a:cs typeface="IBM Plex Sans" pitchFamily="34" charset="-120"/>
+              </a:rPr>
+              <a:t>18 → 0건</a:t>
+            </a:r>
+            <a:endParaRPr lang="en-US" sz="4000" dirty="0"/>
+          </a:p>
+        </p:txBody>
+      </p:sp>
+      <p:sp>
+        <p:nvSpPr>
+          <p:cNvPr id="20" name="o19"/>
+          <p:cNvSpPr txBox="1"/>
+          <p:nvPr/>
+        </p:nvSpPr>
+        <p:spPr>
+          <a:xfrm>
+            <a:off x="8382000" y="3867150"/>
+            <a:ext cx="3048000" cy="152400"/>
+          </a:xfrm>
+          <a:prstGeom prst="rect">
+            <a:avLst/>
+          </a:prstGeom>
+          <a:noFill/>
+          <a:ln/>
+        </p:spPr>
+        <p:txBody>
+          <a:bodyPr wrap="square" lIns="0" tIns="0" rIns="0" bIns="0" rtlCol="0" anchor="t"/>
+          <a:lstStyle/>
+          <a:p>
+            <a:pPr indent="0" marL="0">
+              <a:buNone/>
+            </a:pPr>
+            <a:r>
+              <a:rPr lang="en-US" sz="900" dirty="0">
+                <a:solidFill>
+                  <a:srgbClr val="5B636E"/>
+                </a:solidFill>
+                <a:latin typeface="IBM Plex Mono" pitchFamily="34" charset="0"/>
+                <a:ea typeface="IBM Plex Mono" pitchFamily="34" charset="-122"/>
+                <a:cs typeface="IBM Plex Mono" pitchFamily="34" charset="-120"/>
+              </a:rPr>
+              <a:t>준수율 83% → 100%</a:t>
+            </a:r>
+            <a:endParaRPr lang="en-US" sz="900" dirty="0"/>
+          </a:p>
+        </p:txBody>
+      </p:sp>
+      <p:sp>
+        <p:nvSpPr>
+          <p:cNvPr id="21" name="o20"/>
+          <p:cNvSpPr/>
+          <p:nvPr/>
+        </p:nvSpPr>
+        <p:spPr>
+          <a:xfrm>
+            <a:off x="8382000" y="4381500"/>
+            <a:ext cx="3429000" cy="0"/>
+          </a:xfrm>
+          <a:prstGeom prst="line">
+            <a:avLst/>
+          </a:prstGeom>
+          <a:noFill/>
+          <a:ln w="12700">
+            <a:solidFill>
+              <a:srgbClr val="D6DAD8"/>
+            </a:solidFill>
+            <a:prstDash val="solid"/>
+          </a:ln>
+        </p:spPr>
+      </p:sp>
+      <p:sp>
+        <p:nvSpPr>
+          <p:cNvPr id="22" name="o21"/>
+          <p:cNvSpPr txBox="1"/>
+          <p:nvPr/>
+        </p:nvSpPr>
+        <p:spPr>
+          <a:xfrm>
+            <a:off x="8382000" y="4533900"/>
+            <a:ext cx="3048000" cy="171450"/>
+          </a:xfrm>
+          <a:prstGeom prst="rect">
+            <a:avLst/>
+          </a:prstGeom>
+          <a:noFill/>
+          <a:ln/>
+        </p:spPr>
+        <p:txBody>
+          <a:bodyPr wrap="square" lIns="0" tIns="0" rIns="0" bIns="0" rtlCol="0" anchor="t"/>
+          <a:lstStyle/>
+          <a:p>
+            <a:pPr indent="0" marL="0">
+              <a:buNone/>
+            </a:pPr>
+            <a:r>
+              <a:rPr lang="en-US" sz="1200" dirty="0">
+                <a:solidFill>
+                  <a:srgbClr val="5B636E"/>
+                </a:solidFill>
+                <a:latin typeface="Pretendard" pitchFamily="34" charset="0"/>
+                <a:ea typeface="Pretendard" pitchFamily="34" charset="-122"/>
+                <a:cs typeface="Pretendard" pitchFamily="34" charset="-120"/>
+              </a:rPr>
+              <a:t>종이 출력</a:t>
+            </a:r>
+            <a:endParaRPr lang="en-US" sz="1200" dirty="0"/>
+          </a:p>
+        </p:txBody>
+      </p:sp>
+      <p:sp>
+        <p:nvSpPr>
+          <p:cNvPr id="23" name="o22"/>
+          <p:cNvSpPr txBox="1"/>
+          <p:nvPr/>
+        </p:nvSpPr>
+        <p:spPr>
+          <a:xfrm>
+            <a:off x="8382000" y="4762500"/>
+            <a:ext cx="3143250" cy="571500"/>
+          </a:xfrm>
+          <a:prstGeom prst="rect">
+            <a:avLst/>
+          </a:prstGeom>
+          <a:noFill/>
+          <a:ln/>
+        </p:spPr>
+        <p:txBody>
+          <a:bodyPr wrap="square" lIns="0" tIns="0" rIns="0" bIns="0" rtlCol="0" anchor="t"/>
+          <a:lstStyle/>
+          <a:p>
+            <a:pPr indent="0" marL="0">
+              <a:buNone/>
+            </a:pPr>
+            <a:r>
+              <a:rPr lang="en-US" sz="4000" b="1" dirty="0">
+                <a:solidFill>
+                  <a:srgbClr val="1A1A1A"/>
+                </a:solidFill>
+                <a:latin typeface="IBM Plex Sans" pitchFamily="34" charset="0"/>
+                <a:ea typeface="IBM Plex Sans" pitchFamily="34" charset="-122"/>
+                <a:cs typeface="IBM Plex Sans" pitchFamily="34" charset="-120"/>
+              </a:rPr>
+              <a:t>94 → 0건</a:t>
+            </a:r>
+            <a:endParaRPr lang="en-US" sz="4000" dirty="0"/>
+          </a:p>
+        </p:txBody>
+      </p:sp>
+      <p:sp>
+        <p:nvSpPr>
+          <p:cNvPr id="24" name="o23"/>
+          <p:cNvSpPr txBox="1"/>
+          <p:nvPr/>
+        </p:nvSpPr>
+        <p:spPr>
+          <a:xfrm>
+            <a:off x="8382000" y="5391150"/>
+            <a:ext cx="3048000" cy="152400"/>
+          </a:xfrm>
+          <a:prstGeom prst="rect">
+            <a:avLst/>
+          </a:prstGeom>
+          <a:noFill/>
+          <a:ln/>
+        </p:spPr>
+        <p:txBody>
+          <a:bodyPr wrap="square" lIns="0" tIns="0" rIns="0" bIns="0" rtlCol="0" anchor="t"/>
+          <a:lstStyle/>
+          <a:p>
+            <a:pPr indent="0" marL="0">
+              <a:buNone/>
+            </a:pPr>
+            <a:r>
+              <a:rPr lang="en-US" sz="900" dirty="0">
+                <a:solidFill>
+                  <a:srgbClr val="5B636E"/>
+                </a:solidFill>
+                <a:latin typeface="IBM Plex Mono" pitchFamily="34" charset="0"/>
+                <a:ea typeface="IBM Plex Mono" pitchFamily="34" charset="-122"/>
+                <a:cs typeface="IBM Plex Mono" pitchFamily="34" charset="-120"/>
+              </a:rPr>
+              <a:t>페이퍼리스 0% → 100%</a:t>
+            </a:r>
+            <a:endParaRPr lang="en-US" sz="900" dirty="0"/>
+          </a:p>
+        </p:txBody>
+      </p:sp>
+      <p:sp>
+        <p:nvSpPr>
+          <p:cNvPr id="25" name="o24"/>
+          <p:cNvSpPr/>
+          <p:nvPr/>
+        </p:nvSpPr>
+        <p:spPr>
+          <a:xfrm>
+            <a:off x="8382000" y="5905500"/>
+            <a:ext cx="3429000" cy="0"/>
+          </a:xfrm>
+          <a:prstGeom prst="line">
+            <a:avLst/>
+          </a:prstGeom>
+          <a:noFill/>
+          <a:ln w="12700">
+            <a:solidFill>
+              <a:srgbClr val="D6DAD8"/>
+            </a:solidFill>
+            <a:prstDash val="solid"/>
+          </a:ln>
+        </p:spPr>
       </p:sp>
     </p:spTree>
   </p:cSld>
@@ -3740,7 +3813,7 @@
       </p:grpSpPr>
       <p:sp>
         <p:nvSpPr>
-          <p:cNvPr id="2" name="o505"/>
+          <p:cNvPr id="2" name="o507"/>
           <p:cNvSpPr txBox="1"/>
           <p:nvPr/>
         </p:nvSpPr>
@@ -3779,7 +3852,7 @@
       </p:sp>
       <p:sp>
         <p:nvSpPr>
-          <p:cNvPr id="3" name="o506"/>
+          <p:cNvPr id="3" name="o508"/>
           <p:cNvSpPr txBox="1"/>
           <p:nvPr/>
         </p:nvSpPr>
@@ -3821,7 +3894,7 @@
       </p:sp>
       <p:sp>
         <p:nvSpPr>
-          <p:cNvPr id="4" name="o507"/>
+          <p:cNvPr id="4" name="o509"/>
           <p:cNvSpPr txBox="1"/>
           <p:nvPr/>
         </p:nvSpPr>
@@ -3860,7 +3933,7 @@
       </p:sp>
       <p:sp>
         <p:nvSpPr>
-          <p:cNvPr id="5" name="o508"/>
+          <p:cNvPr id="5" name="o510"/>
           <p:cNvSpPr/>
           <p:nvPr/>
         </p:nvSpPr>
@@ -3883,7 +3956,7 @@
       </p:sp>
       <p:sp>
         <p:nvSpPr>
-          <p:cNvPr id="6" name="o509"/>
+          <p:cNvPr id="6" name="o511"/>
           <p:cNvSpPr txBox="1"/>
           <p:nvPr/>
         </p:nvSpPr>
@@ -3922,7 +3995,7 @@
       </p:sp>
       <p:sp>
         <p:nvSpPr>
-          <p:cNvPr id="7" name="o510"/>
+          <p:cNvPr id="7" name="o512"/>
           <p:cNvSpPr txBox="1"/>
           <p:nvPr/>
         </p:nvSpPr>
@@ -3961,7 +4034,7 @@
       </p:sp>
       <p:sp>
         <p:nvSpPr>
-          <p:cNvPr id="8" name="o511"/>
+          <p:cNvPr id="8" name="o513"/>
           <p:cNvSpPr txBox="1"/>
           <p:nvPr/>
         </p:nvSpPr>
@@ -4000,7 +4073,7 @@
       </p:sp>
       <p:sp>
         <p:nvSpPr>
-          <p:cNvPr id="9" name="o512"/>
+          <p:cNvPr id="9" name="o514"/>
           <p:cNvSpPr txBox="1"/>
           <p:nvPr/>
         </p:nvSpPr>
@@ -4039,7 +4112,7 @@
       </p:sp>
       <p:sp>
         <p:nvSpPr>
-          <p:cNvPr id="10" name="o513"/>
+          <p:cNvPr id="10" name="o515"/>
           <p:cNvSpPr/>
           <p:nvPr/>
         </p:nvSpPr>
@@ -4059,7 +4132,7 @@
       </p:sp>
       <p:sp>
         <p:nvSpPr>
-          <p:cNvPr id="11" name="o514"/>
+          <p:cNvPr id="11" name="o516"/>
           <p:cNvSpPr txBox="1"/>
           <p:nvPr/>
         </p:nvSpPr>
@@ -4098,7 +4171,7 @@
       </p:sp>
       <p:sp>
         <p:nvSpPr>
-          <p:cNvPr id="12" name="o515"/>
+          <p:cNvPr id="12" name="o517"/>
           <p:cNvSpPr txBox="1"/>
           <p:nvPr/>
         </p:nvSpPr>
@@ -4137,7 +4210,7 @@
       </p:sp>
       <p:sp>
         <p:nvSpPr>
-          <p:cNvPr id="13" name="o516"/>
+          <p:cNvPr id="13" name="o518"/>
           <p:cNvSpPr/>
           <p:nvPr/>
         </p:nvSpPr>
@@ -4160,7 +4233,7 @@
       </p:sp>
       <p:sp>
         <p:nvSpPr>
-          <p:cNvPr id="14" name="o517"/>
+          <p:cNvPr id="14" name="o519"/>
           <p:cNvSpPr/>
           <p:nvPr/>
         </p:nvSpPr>
@@ -4185,7 +4258,7 @@
       </p:sp>
       <p:sp>
         <p:nvSpPr>
-          <p:cNvPr id="15" name="o518"/>
+          <p:cNvPr id="15" name="o520"/>
           <p:cNvSpPr txBox="1"/>
           <p:nvPr/>
         </p:nvSpPr>
@@ -4224,7 +4297,7 @@
       </p:sp>
       <p:sp>
         <p:nvSpPr>
-          <p:cNvPr id="16" name="o519"/>
+          <p:cNvPr id="16" name="o521"/>
           <p:cNvSpPr txBox="1"/>
           <p:nvPr/>
         </p:nvSpPr>
@@ -4263,7 +4336,7 @@
       </p:sp>
       <p:sp>
         <p:nvSpPr>
-          <p:cNvPr id="17" name="o520"/>
+          <p:cNvPr id="17" name="o522"/>
           <p:cNvSpPr/>
           <p:nvPr/>
         </p:nvSpPr>
@@ -4286,7 +4359,7 @@
       </p:sp>
       <p:sp>
         <p:nvSpPr>
-          <p:cNvPr id="18" name="o521"/>
+          <p:cNvPr id="18" name="o523"/>
           <p:cNvSpPr/>
           <p:nvPr/>
         </p:nvSpPr>
@@ -4311,7 +4384,7 @@
       </p:sp>
       <p:sp>
         <p:nvSpPr>
-          <p:cNvPr id="19" name="o522"/>
+          <p:cNvPr id="19" name="o524"/>
           <p:cNvSpPr txBox="1"/>
           <p:nvPr/>
         </p:nvSpPr>
@@ -4350,7 +4423,7 @@
       </p:sp>
       <p:sp>
         <p:nvSpPr>
-          <p:cNvPr id="20" name="o523"/>
+          <p:cNvPr id="20" name="o525"/>
           <p:cNvSpPr txBox="1"/>
           <p:nvPr/>
         </p:nvSpPr>
@@ -4389,7 +4462,7 @@
       </p:sp>
       <p:sp>
         <p:nvSpPr>
-          <p:cNvPr id="21" name="o524"/>
+          <p:cNvPr id="21" name="o526"/>
           <p:cNvSpPr/>
           <p:nvPr/>
         </p:nvSpPr>
@@ -4412,7 +4485,7 @@
       </p:sp>
       <p:sp>
         <p:nvSpPr>
-          <p:cNvPr id="22" name="o525"/>
+          <p:cNvPr id="22" name="o527"/>
           <p:cNvSpPr/>
           <p:nvPr/>
         </p:nvSpPr>
@@ -4437,7 +4510,7 @@
       </p:sp>
       <p:sp>
         <p:nvSpPr>
-          <p:cNvPr id="23" name="o526"/>
+          <p:cNvPr id="23" name="o528"/>
           <p:cNvSpPr txBox="1"/>
           <p:nvPr/>
         </p:nvSpPr>
@@ -4476,7 +4549,7 @@
       </p:sp>
       <p:sp>
         <p:nvSpPr>
-          <p:cNvPr id="24" name="o527"/>
+          <p:cNvPr id="24" name="o529"/>
           <p:cNvSpPr txBox="1"/>
           <p:nvPr/>
         </p:nvSpPr>
@@ -4515,7 +4588,7 @@
       </p:sp>
       <p:sp>
         <p:nvSpPr>
-          <p:cNvPr id="25" name="o528"/>
+          <p:cNvPr id="25" name="o530"/>
           <p:cNvSpPr/>
           <p:nvPr/>
         </p:nvSpPr>
@@ -4538,7 +4611,7 @@
       </p:sp>
       <p:sp>
         <p:nvSpPr>
-          <p:cNvPr id="26" name="o529"/>
+          <p:cNvPr id="26" name="o531"/>
           <p:cNvSpPr/>
           <p:nvPr/>
         </p:nvSpPr>
@@ -4563,7 +4636,7 @@
       </p:sp>
       <p:sp>
         <p:nvSpPr>
-          <p:cNvPr id="27" name="o530"/>
+          <p:cNvPr id="27" name="o532"/>
           <p:cNvSpPr txBox="1"/>
           <p:nvPr/>
         </p:nvSpPr>
@@ -4602,7 +4675,7 @@
       </p:sp>
       <p:sp>
         <p:nvSpPr>
-          <p:cNvPr id="28" name="o531"/>
+          <p:cNvPr id="28" name="o533"/>
           <p:cNvSpPr txBox="1"/>
           <p:nvPr/>
         </p:nvSpPr>
@@ -4641,7 +4714,7 @@
       </p:sp>
       <p:sp>
         <p:nvSpPr>
-          <p:cNvPr id="29" name="o532"/>
+          <p:cNvPr id="29" name="o534"/>
           <p:cNvSpPr/>
           <p:nvPr/>
         </p:nvSpPr>
@@ -4664,7 +4737,7 @@
       </p:sp>
       <p:sp>
         <p:nvSpPr>
-          <p:cNvPr id="30" name="o533"/>
+          <p:cNvPr id="30" name="o535"/>
           <p:cNvSpPr/>
           <p:nvPr/>
         </p:nvSpPr>
@@ -4689,7 +4762,7 @@
       </p:sp>
       <p:sp>
         <p:nvSpPr>
-          <p:cNvPr id="31" name="o534"/>
+          <p:cNvPr id="31" name="o536"/>
           <p:cNvSpPr txBox="1"/>
           <p:nvPr/>
         </p:nvSpPr>
@@ -4728,7 +4801,7 @@
       </p:sp>
       <p:sp>
         <p:nvSpPr>
-          <p:cNvPr id="32" name="o535"/>
+          <p:cNvPr id="32" name="o537"/>
           <p:cNvSpPr txBox="1"/>
           <p:nvPr/>
         </p:nvSpPr>
@@ -4767,7 +4840,7 @@
       </p:sp>
       <p:sp>
         <p:nvSpPr>
-          <p:cNvPr id="33" name="o536"/>
+          <p:cNvPr id="33" name="o538"/>
           <p:cNvSpPr/>
           <p:nvPr/>
         </p:nvSpPr>
@@ -4790,7 +4863,7 @@
       </p:sp>
       <p:sp>
         <p:nvSpPr>
-          <p:cNvPr id="34" name="o537"/>
+          <p:cNvPr id="34" name="o539"/>
           <p:cNvSpPr/>
           <p:nvPr/>
         </p:nvSpPr>
@@ -4815,7 +4888,7 @@
       </p:sp>
       <p:sp>
         <p:nvSpPr>
-          <p:cNvPr id="35" name="o538"/>
+          <p:cNvPr id="35" name="o540"/>
           <p:cNvSpPr txBox="1"/>
           <p:nvPr/>
         </p:nvSpPr>
@@ -4854,7 +4927,7 @@
       </p:sp>
       <p:sp>
         <p:nvSpPr>
-          <p:cNvPr id="36" name="o539"/>
+          <p:cNvPr id="36" name="o541"/>
           <p:cNvSpPr txBox="1"/>
           <p:nvPr/>
         </p:nvSpPr>
@@ -4893,7 +4966,7 @@
       </p:sp>
       <p:sp>
         <p:nvSpPr>
-          <p:cNvPr id="37" name="o540"/>
+          <p:cNvPr id="37" name="o542"/>
           <p:cNvSpPr/>
           <p:nvPr/>
         </p:nvSpPr>
@@ -4916,7 +4989,7 @@
       </p:sp>
       <p:sp>
         <p:nvSpPr>
-          <p:cNvPr id="38" name="o541"/>
+          <p:cNvPr id="38" name="o543"/>
           <p:cNvSpPr/>
           <p:nvPr/>
         </p:nvSpPr>
@@ -4936,7 +5009,7 @@
       </p:sp>
       <p:sp>
         <p:nvSpPr>
-          <p:cNvPr id="39" name="o542"/>
+          <p:cNvPr id="39" name="o544"/>
           <p:cNvSpPr txBox="1"/>
           <p:nvPr/>
         </p:nvSpPr>
@@ -4975,7 +5048,7 @@
       </p:sp>
       <p:sp>
         <p:nvSpPr>
-          <p:cNvPr id="40" name="o543"/>
+          <p:cNvPr id="40" name="o545"/>
           <p:cNvSpPr txBox="1"/>
           <p:nvPr/>
         </p:nvSpPr>
@@ -5014,7 +5087,7 @@
       </p:sp>
       <p:sp>
         <p:nvSpPr>
-          <p:cNvPr id="41" name="o544"/>
+          <p:cNvPr id="41" name="o546"/>
           <p:cNvSpPr/>
           <p:nvPr/>
         </p:nvSpPr>
@@ -5037,7 +5110,7 @@
       </p:sp>
       <p:sp>
         <p:nvSpPr>
-          <p:cNvPr id="42" name="o545"/>
+          <p:cNvPr id="42" name="o547"/>
           <p:cNvSpPr/>
           <p:nvPr/>
         </p:nvSpPr>
@@ -5057,7 +5130,7 @@
       </p:sp>
       <p:sp>
         <p:nvSpPr>
-          <p:cNvPr id="43" name="o546"/>
+          <p:cNvPr id="43" name="o548"/>
           <p:cNvSpPr txBox="1"/>
           <p:nvPr/>
         </p:nvSpPr>
@@ -5096,7 +5169,7 @@
       </p:sp>
       <p:sp>
         <p:nvSpPr>
-          <p:cNvPr id="44" name="o547"/>
+          <p:cNvPr id="44" name="o549"/>
           <p:cNvSpPr txBox="1"/>
           <p:nvPr/>
         </p:nvSpPr>
@@ -5135,7 +5208,7 @@
       </p:sp>
       <p:sp>
         <p:nvSpPr>
-          <p:cNvPr id="45" name="o548"/>
+          <p:cNvPr id="45" name="o550"/>
           <p:cNvSpPr/>
           <p:nvPr/>
         </p:nvSpPr>
@@ -5158,7 +5231,7 @@
       </p:sp>
       <p:sp>
         <p:nvSpPr>
-          <p:cNvPr id="46" name="o549"/>
+          <p:cNvPr id="46" name="o551"/>
           <p:cNvSpPr/>
           <p:nvPr/>
         </p:nvSpPr>
@@ -5178,7 +5251,7 @@
       </p:sp>
       <p:sp>
         <p:nvSpPr>
-          <p:cNvPr id="47" name="o550"/>
+          <p:cNvPr id="47" name="o552"/>
           <p:cNvSpPr/>
           <p:nvPr/>
         </p:nvSpPr>
@@ -5198,7 +5271,7 @@
       </p:sp>
       <p:sp>
         <p:nvSpPr>
-          <p:cNvPr id="48" name="o551"/>
+          <p:cNvPr id="48" name="o553"/>
           <p:cNvSpPr txBox="1"/>
           <p:nvPr/>
         </p:nvSpPr>
@@ -5240,7 +5313,7 @@
       </p:sp>
       <p:sp>
         <p:nvSpPr>
-          <p:cNvPr id="49" name="o552"/>
+          <p:cNvPr id="49" name="o554"/>
           <p:cNvSpPr/>
           <p:nvPr/>
         </p:nvSpPr>
@@ -5265,7 +5338,7 @@
       </p:sp>
       <p:sp>
         <p:nvSpPr>
-          <p:cNvPr id="50" name="o553"/>
+          <p:cNvPr id="50" name="o555"/>
           <p:cNvSpPr txBox="1"/>
           <p:nvPr/>
         </p:nvSpPr>
@@ -5304,7 +5377,7 @@
       </p:sp>
       <p:sp>
         <p:nvSpPr>
-          <p:cNvPr id="51" name="o554"/>
+          <p:cNvPr id="51" name="o556"/>
           <p:cNvSpPr txBox="1"/>
           <p:nvPr/>
         </p:nvSpPr>
@@ -5343,7 +5416,7 @@
       </p:sp>
       <p:sp>
         <p:nvSpPr>
-          <p:cNvPr id="52" name="o555"/>
+          <p:cNvPr id="52" name="o557"/>
           <p:cNvSpPr txBox="1"/>
           <p:nvPr/>
         </p:nvSpPr>
@@ -5382,7 +5455,7 @@
       </p:sp>
       <p:sp>
         <p:nvSpPr>
-          <p:cNvPr id="53" name="o556"/>
+          <p:cNvPr id="53" name="o558"/>
           <p:cNvSpPr/>
           <p:nvPr/>
         </p:nvSpPr>
@@ -5407,7 +5480,7 @@
       </p:sp>
       <p:sp>
         <p:nvSpPr>
-          <p:cNvPr id="54" name="o557"/>
+          <p:cNvPr id="54" name="o559"/>
           <p:cNvSpPr txBox="1"/>
           <p:nvPr/>
         </p:nvSpPr>
@@ -5446,7 +5519,7 @@
       </p:sp>
       <p:sp>
         <p:nvSpPr>
-          <p:cNvPr id="55" name="o558"/>
+          <p:cNvPr id="55" name="o560"/>
           <p:cNvSpPr txBox="1"/>
           <p:nvPr/>
         </p:nvSpPr>
@@ -5485,7 +5558,7 @@
       </p:sp>
       <p:sp>
         <p:nvSpPr>
-          <p:cNvPr id="56" name="o559"/>
+          <p:cNvPr id="56" name="o561"/>
           <p:cNvSpPr txBox="1"/>
           <p:nvPr/>
         </p:nvSpPr>
@@ -5524,7 +5597,7 @@
       </p:sp>
       <p:sp>
         <p:nvSpPr>
-          <p:cNvPr id="57" name="o560"/>
+          <p:cNvPr id="57" name="o562"/>
           <p:cNvSpPr txBox="1"/>
           <p:nvPr/>
         </p:nvSpPr>
@@ -5563,7 +5636,7 @@
       </p:sp>
       <p:sp>
         <p:nvSpPr>
-          <p:cNvPr id="58" name="o561"/>
+          <p:cNvPr id="58" name="o563"/>
           <p:cNvSpPr/>
           <p:nvPr/>
         </p:nvSpPr>
@@ -5583,7 +5656,7 @@
       </p:sp>
       <p:sp>
         <p:nvSpPr>
-          <p:cNvPr id="59" name="o562"/>
+          <p:cNvPr id="59" name="o564"/>
           <p:cNvSpPr txBox="1"/>
           <p:nvPr/>
         </p:nvSpPr>
@@ -5622,7 +5695,7 @@
       </p:sp>
       <p:sp>
         <p:nvSpPr>
-          <p:cNvPr id="60" name="o563"/>
+          <p:cNvPr id="60" name="o565"/>
           <p:cNvSpPr txBox="1"/>
           <p:nvPr/>
         </p:nvSpPr>
@@ -5661,7 +5734,7 @@
       </p:sp>
       <p:sp>
         <p:nvSpPr>
-          <p:cNvPr id="61" name="o564"/>
+          <p:cNvPr id="61" name="o566"/>
           <p:cNvSpPr txBox="1"/>
           <p:nvPr/>
         </p:nvSpPr>
@@ -5700,7 +5773,7 @@
       </p:sp>
       <p:sp>
         <p:nvSpPr>
-          <p:cNvPr id="62" name="o565"/>
+          <p:cNvPr id="62" name="o567"/>
           <p:cNvSpPr/>
           <p:nvPr/>
         </p:nvSpPr>
@@ -5723,7 +5796,7 @@
       </p:sp>
       <p:sp>
         <p:nvSpPr>
-          <p:cNvPr id="63" name="o566"/>
+          <p:cNvPr id="63" name="o568"/>
           <p:cNvSpPr txBox="1"/>
           <p:nvPr/>
         </p:nvSpPr>
@@ -5762,7 +5835,7 @@
       </p:sp>
       <p:sp>
         <p:nvSpPr>
-          <p:cNvPr id="64" name="o567"/>
+          <p:cNvPr id="64" name="o569"/>
           <p:cNvSpPr txBox="1"/>
           <p:nvPr/>
         </p:nvSpPr>
@@ -5801,7 +5874,7 @@
       </p:sp>
       <p:sp>
         <p:nvSpPr>
-          <p:cNvPr id="65" name="o568"/>
+          <p:cNvPr id="65" name="o570"/>
           <p:cNvSpPr txBox="1"/>
           <p:nvPr/>
         </p:nvSpPr>
@@ -5840,7 +5913,7 @@
       </p:sp>
       <p:sp>
         <p:nvSpPr>
-          <p:cNvPr id="66" name="o569"/>
+          <p:cNvPr id="66" name="o571"/>
           <p:cNvSpPr/>
           <p:nvPr/>
         </p:nvSpPr>
@@ -5863,7 +5936,7 @@
       </p:sp>
       <p:sp>
         <p:nvSpPr>
-          <p:cNvPr id="67" name="o570"/>
+          <p:cNvPr id="67" name="o572"/>
           <p:cNvSpPr txBox="1"/>
           <p:nvPr/>
         </p:nvSpPr>
@@ -5902,7 +5975,7 @@
       </p:sp>
       <p:sp>
         <p:nvSpPr>
-          <p:cNvPr id="68" name="o571"/>
+          <p:cNvPr id="68" name="o573"/>
           <p:cNvSpPr txBox="1"/>
           <p:nvPr/>
         </p:nvSpPr>
@@ -5941,7 +6014,7 @@
       </p:sp>
       <p:sp>
         <p:nvSpPr>
-          <p:cNvPr id="69" name="o572"/>
+          <p:cNvPr id="69" name="o574"/>
           <p:cNvSpPr txBox="1"/>
           <p:nvPr/>
         </p:nvSpPr>
@@ -5980,7 +6053,7 @@
       </p:sp>
       <p:sp>
         <p:nvSpPr>
-          <p:cNvPr id="70" name="o573"/>
+          <p:cNvPr id="70" name="o575"/>
           <p:cNvSpPr/>
           <p:nvPr/>
         </p:nvSpPr>
@@ -6003,7 +6076,7 @@
       </p:sp>
       <p:sp>
         <p:nvSpPr>
-          <p:cNvPr id="71" name="o574"/>
+          <p:cNvPr id="71" name="o576"/>
           <p:cNvSpPr txBox="1"/>
           <p:nvPr/>
         </p:nvSpPr>
@@ -6042,7 +6115,7 @@
       </p:sp>
       <p:sp>
         <p:nvSpPr>
-          <p:cNvPr id="72" name="o575"/>
+          <p:cNvPr id="72" name="o577"/>
           <p:cNvSpPr txBox="1"/>
           <p:nvPr/>
         </p:nvSpPr>
@@ -6081,7 +6154,7 @@
       </p:sp>
       <p:sp>
         <p:nvSpPr>
-          <p:cNvPr id="73" name="o576"/>
+          <p:cNvPr id="73" name="o578"/>
           <p:cNvSpPr txBox="1"/>
           <p:nvPr/>
         </p:nvSpPr>
@@ -6120,7 +6193,7 @@
       </p:sp>
       <p:sp>
         <p:nvSpPr>
-          <p:cNvPr id="74" name="o577"/>
+          <p:cNvPr id="74" name="o579"/>
           <p:cNvSpPr/>
           <p:nvPr/>
         </p:nvSpPr>
@@ -6143,7 +6216,7 @@
       </p:sp>
       <p:sp>
         <p:nvSpPr>
-          <p:cNvPr id="75" name="o578"/>
+          <p:cNvPr id="75" name="o580"/>
           <p:cNvSpPr txBox="1"/>
           <p:nvPr/>
         </p:nvSpPr>
@@ -6182,7 +6255,7 @@
       </p:sp>
       <p:sp>
         <p:nvSpPr>
-          <p:cNvPr id="76" name="o579"/>
+          <p:cNvPr id="76" name="o581"/>
           <p:cNvSpPr txBox="1"/>
           <p:nvPr/>
         </p:nvSpPr>
@@ -6221,7 +6294,7 @@
       </p:sp>
       <p:sp>
         <p:nvSpPr>
-          <p:cNvPr id="77" name="o580"/>
+          <p:cNvPr id="77" name="o582"/>
           <p:cNvSpPr txBox="1"/>
           <p:nvPr/>
         </p:nvSpPr>
@@ -6260,7 +6333,7 @@
       </p:sp>
       <p:sp>
         <p:nvSpPr>
-          <p:cNvPr id="78" name="o581"/>
+          <p:cNvPr id="78" name="o583"/>
           <p:cNvSpPr/>
           <p:nvPr/>
         </p:nvSpPr>
@@ -6283,7 +6356,7 @@
       </p:sp>
       <p:sp>
         <p:nvSpPr>
-          <p:cNvPr id="79" name="o582"/>
+          <p:cNvPr id="79" name="o584"/>
           <p:cNvSpPr txBox="1"/>
           <p:nvPr/>
         </p:nvSpPr>
@@ -6322,7 +6395,7 @@
       </p:sp>
       <p:sp>
         <p:nvSpPr>
-          <p:cNvPr id="80" name="o583"/>
+          <p:cNvPr id="80" name="o585"/>
           <p:cNvSpPr txBox="1"/>
           <p:nvPr/>
         </p:nvSpPr>
@@ -6361,7 +6434,7 @@
       </p:sp>
       <p:sp>
         <p:nvSpPr>
-          <p:cNvPr id="81" name="o584"/>
+          <p:cNvPr id="81" name="o586"/>
           <p:cNvSpPr txBox="1"/>
           <p:nvPr/>
         </p:nvSpPr>
@@ -6400,7 +6473,7 @@
       </p:sp>
       <p:sp>
         <p:nvSpPr>
-          <p:cNvPr id="82" name="o585"/>
+          <p:cNvPr id="82" name="o587"/>
           <p:cNvSpPr/>
           <p:nvPr/>
         </p:nvSpPr>
@@ -6423,7 +6496,7 @@
       </p:sp>
       <p:sp>
         <p:nvSpPr>
-          <p:cNvPr id="83" name="o586"/>
+          <p:cNvPr id="83" name="o588"/>
           <p:cNvSpPr/>
           <p:nvPr/>
         </p:nvSpPr>
@@ -6446,7 +6519,7 @@
       </p:sp>
       <p:sp>
         <p:nvSpPr>
-          <p:cNvPr id="84" name="o587"/>
+          <p:cNvPr id="84" name="o589"/>
           <p:cNvSpPr txBox="1"/>
           <p:nvPr/>
         </p:nvSpPr>
@@ -6510,7 +6583,7 @@
       </p:grpSpPr>
       <p:sp>
         <p:nvSpPr>
-          <p:cNvPr id="2" name="o588"/>
+          <p:cNvPr id="2" name="o590"/>
           <p:cNvSpPr txBox="1"/>
           <p:nvPr/>
         </p:nvSpPr>
@@ -6549,7 +6622,7 @@
       </p:sp>
       <p:sp>
         <p:nvSpPr>
-          <p:cNvPr id="3" name="o589"/>
+          <p:cNvPr id="3" name="o591"/>
           <p:cNvSpPr txBox="1"/>
           <p:nvPr/>
         </p:nvSpPr>
@@ -6591,7 +6664,7 @@
       </p:sp>
       <p:sp>
         <p:nvSpPr>
-          <p:cNvPr id="4" name="o590"/>
+          <p:cNvPr id="4" name="o592"/>
           <p:cNvSpPr txBox="1"/>
           <p:nvPr/>
         </p:nvSpPr>
@@ -6630,7 +6703,7 @@
       </p:sp>
       <p:sp>
         <p:nvSpPr>
-          <p:cNvPr id="5" name="o591"/>
+          <p:cNvPr id="5" name="o593"/>
           <p:cNvSpPr/>
           <p:nvPr/>
         </p:nvSpPr>
@@ -6653,7 +6726,7 @@
       </p:sp>
       <p:sp>
         <p:nvSpPr>
-          <p:cNvPr id="6" name="o592"/>
+          <p:cNvPr id="6" name="o594"/>
           <p:cNvSpPr txBox="1"/>
           <p:nvPr/>
         </p:nvSpPr>
@@ -6692,7 +6765,7 @@
       </p:sp>
       <p:sp>
         <p:nvSpPr>
-          <p:cNvPr id="7" name="o593"/>
+          <p:cNvPr id="7" name="o595"/>
           <p:cNvSpPr txBox="1"/>
           <p:nvPr/>
         </p:nvSpPr>
@@ -6731,7 +6804,7 @@
       </p:sp>
       <p:sp>
         <p:nvSpPr>
-          <p:cNvPr id="8" name="o594"/>
+          <p:cNvPr id="8" name="o596"/>
           <p:cNvSpPr txBox="1"/>
           <p:nvPr/>
         </p:nvSpPr>
@@ -6770,7 +6843,7 @@
       </p:sp>
       <p:sp>
         <p:nvSpPr>
-          <p:cNvPr id="9" name="o595"/>
+          <p:cNvPr id="9" name="o597"/>
           <p:cNvSpPr txBox="1"/>
           <p:nvPr/>
         </p:nvSpPr>
@@ -6809,7 +6882,7 @@
       </p:sp>
       <p:sp>
         <p:nvSpPr>
-          <p:cNvPr id="10" name="o596"/>
+          <p:cNvPr id="10" name="o598"/>
           <p:cNvSpPr/>
           <p:nvPr/>
         </p:nvSpPr>
@@ -6834,7 +6907,7 @@
       </p:sp>
       <p:sp>
         <p:nvSpPr>
-          <p:cNvPr id="11" name="o597"/>
+          <p:cNvPr id="11" name="o599"/>
           <p:cNvSpPr/>
           <p:nvPr/>
         </p:nvSpPr>
@@ -6859,7 +6932,7 @@
       </p:sp>
       <p:sp>
         <p:nvSpPr>
-          <p:cNvPr id="12" name="o598"/>
+          <p:cNvPr id="12" name="o600"/>
           <p:cNvSpPr txBox="1"/>
           <p:nvPr/>
         </p:nvSpPr>
@@ -6898,7 +6971,7 @@
       </p:sp>
       <p:sp>
         <p:nvSpPr>
-          <p:cNvPr id="13" name="o599"/>
+          <p:cNvPr id="13" name="o601"/>
           <p:cNvSpPr txBox="1"/>
           <p:nvPr/>
         </p:nvSpPr>
@@ -6937,7 +7010,7 @@
       </p:sp>
       <p:sp>
         <p:nvSpPr>
-          <p:cNvPr id="14" name="o600"/>
+          <p:cNvPr id="14" name="o602"/>
           <p:cNvSpPr txBox="1"/>
           <p:nvPr/>
         </p:nvSpPr>
@@ -6976,7 +7049,7 @@
       </p:sp>
       <p:sp>
         <p:nvSpPr>
-          <p:cNvPr id="15" name="o601"/>
+          <p:cNvPr id="15" name="o603"/>
           <p:cNvSpPr/>
           <p:nvPr/>
         </p:nvSpPr>
@@ -7000,7 +7073,7 @@
       </p:sp>
       <p:sp>
         <p:nvSpPr>
-          <p:cNvPr id="16" name="o602"/>
+          <p:cNvPr id="16" name="o604"/>
           <p:cNvSpPr/>
           <p:nvPr/>
         </p:nvSpPr>
@@ -7025,7 +7098,7 @@
       </p:sp>
       <p:sp>
         <p:nvSpPr>
-          <p:cNvPr id="17" name="o603"/>
+          <p:cNvPr id="17" name="o605"/>
           <p:cNvSpPr/>
           <p:nvPr/>
         </p:nvSpPr>
@@ -7050,7 +7123,7 @@
       </p:sp>
       <p:sp>
         <p:nvSpPr>
-          <p:cNvPr id="18" name="o604"/>
+          <p:cNvPr id="18" name="o606"/>
           <p:cNvSpPr txBox="1"/>
           <p:nvPr/>
         </p:nvSpPr>
@@ -7089,7 +7162,7 @@
       </p:sp>
       <p:sp>
         <p:nvSpPr>
-          <p:cNvPr id="19" name="o605"/>
+          <p:cNvPr id="19" name="o607"/>
           <p:cNvSpPr txBox="1"/>
           <p:nvPr/>
         </p:nvSpPr>
@@ -7128,7 +7201,7 @@
       </p:sp>
       <p:sp>
         <p:nvSpPr>
-          <p:cNvPr id="20" name="o606"/>
+          <p:cNvPr id="20" name="o608"/>
           <p:cNvSpPr txBox="1"/>
           <p:nvPr/>
         </p:nvSpPr>
@@ -7167,7 +7240,7 @@
       </p:sp>
       <p:sp>
         <p:nvSpPr>
-          <p:cNvPr id="21" name="o607"/>
+          <p:cNvPr id="21" name="o609"/>
           <p:cNvSpPr/>
           <p:nvPr/>
         </p:nvSpPr>
@@ -7191,7 +7264,7 @@
       </p:sp>
       <p:sp>
         <p:nvSpPr>
-          <p:cNvPr id="22" name="o608"/>
+          <p:cNvPr id="22" name="o610"/>
           <p:cNvSpPr/>
           <p:nvPr/>
         </p:nvSpPr>
@@ -7216,7 +7289,7 @@
       </p:sp>
       <p:sp>
         <p:nvSpPr>
-          <p:cNvPr id="23" name="o609"/>
+          <p:cNvPr id="23" name="o611"/>
           <p:cNvSpPr/>
           <p:nvPr/>
         </p:nvSpPr>
@@ -7241,7 +7314,7 @@
       </p:sp>
       <p:sp>
         <p:nvSpPr>
-          <p:cNvPr id="24" name="o610"/>
+          <p:cNvPr id="24" name="o612"/>
           <p:cNvSpPr txBox="1"/>
           <p:nvPr/>
         </p:nvSpPr>
@@ -7280,7 +7353,7 @@
       </p:sp>
       <p:sp>
         <p:nvSpPr>
-          <p:cNvPr id="25" name="o611"/>
+          <p:cNvPr id="25" name="o613"/>
           <p:cNvSpPr txBox="1"/>
           <p:nvPr/>
         </p:nvSpPr>
@@ -7319,7 +7392,7 @@
       </p:sp>
       <p:sp>
         <p:nvSpPr>
-          <p:cNvPr id="26" name="o612"/>
+          <p:cNvPr id="26" name="o614"/>
           <p:cNvSpPr txBox="1"/>
           <p:nvPr/>
         </p:nvSpPr>
@@ -7358,7 +7431,7 @@
       </p:sp>
       <p:sp>
         <p:nvSpPr>
-          <p:cNvPr id="27" name="o613"/>
+          <p:cNvPr id="27" name="o615"/>
           <p:cNvSpPr/>
           <p:nvPr/>
         </p:nvSpPr>
@@ -7382,7 +7455,7 @@
       </p:sp>
       <p:sp>
         <p:nvSpPr>
-          <p:cNvPr id="28" name="o614"/>
+          <p:cNvPr id="28" name="o616"/>
           <p:cNvSpPr/>
           <p:nvPr/>
         </p:nvSpPr>
@@ -7407,7 +7480,7 @@
       </p:sp>
       <p:sp>
         <p:nvSpPr>
-          <p:cNvPr id="29" name="o615"/>
+          <p:cNvPr id="29" name="o617"/>
           <p:cNvSpPr/>
           <p:nvPr/>
         </p:nvSpPr>
@@ -7432,7 +7505,7 @@
       </p:sp>
       <p:sp>
         <p:nvSpPr>
-          <p:cNvPr id="30" name="o616"/>
+          <p:cNvPr id="30" name="o618"/>
           <p:cNvSpPr txBox="1"/>
           <p:nvPr/>
         </p:nvSpPr>
@@ -7471,7 +7544,7 @@
       </p:sp>
       <p:sp>
         <p:nvSpPr>
-          <p:cNvPr id="31" name="o617"/>
+          <p:cNvPr id="31" name="o619"/>
           <p:cNvSpPr txBox="1"/>
           <p:nvPr/>
         </p:nvSpPr>
@@ -7510,7 +7583,7 @@
       </p:sp>
       <p:sp>
         <p:nvSpPr>
-          <p:cNvPr id="32" name="o618"/>
+          <p:cNvPr id="32" name="o620"/>
           <p:cNvSpPr txBox="1"/>
           <p:nvPr/>
         </p:nvSpPr>
@@ -7549,7 +7622,7 @@
       </p:sp>
       <p:sp>
         <p:nvSpPr>
-          <p:cNvPr id="33" name="o619"/>
+          <p:cNvPr id="33" name="o621"/>
           <p:cNvSpPr/>
           <p:nvPr/>
         </p:nvSpPr>
@@ -7569,7 +7642,7 @@
       </p:sp>
       <p:sp>
         <p:nvSpPr>
-          <p:cNvPr id="34" name="o620"/>
+          <p:cNvPr id="34" name="o622"/>
           <p:cNvSpPr txBox="1"/>
           <p:nvPr/>
         </p:nvSpPr>
@@ -7608,7 +7681,7 @@
       </p:sp>
       <p:sp>
         <p:nvSpPr>
-          <p:cNvPr id="35" name="o621"/>
+          <p:cNvPr id="35" name="o623"/>
           <p:cNvSpPr txBox="1"/>
           <p:nvPr/>
         </p:nvSpPr>
@@ -7647,7 +7720,7 @@
       </p:sp>
       <p:sp>
         <p:nvSpPr>
-          <p:cNvPr id="36" name="o622"/>
+          <p:cNvPr id="36" name="o624"/>
           <p:cNvSpPr txBox="1"/>
           <p:nvPr/>
         </p:nvSpPr>
@@ -7686,7 +7759,7 @@
       </p:sp>
       <p:sp>
         <p:nvSpPr>
-          <p:cNvPr id="37" name="o623"/>
+          <p:cNvPr id="37" name="o625"/>
           <p:cNvSpPr txBox="1"/>
           <p:nvPr/>
         </p:nvSpPr>
@@ -7725,7 +7798,7 @@
       </p:sp>
       <p:sp>
         <p:nvSpPr>
-          <p:cNvPr id="38" name="o624"/>
+          <p:cNvPr id="38" name="o626"/>
           <p:cNvSpPr/>
           <p:nvPr/>
         </p:nvSpPr>
@@ -7748,7 +7821,7 @@
       </p:sp>
       <p:sp>
         <p:nvSpPr>
-          <p:cNvPr id="39" name="o625"/>
+          <p:cNvPr id="39" name="o627"/>
           <p:cNvSpPr txBox="1"/>
           <p:nvPr/>
         </p:nvSpPr>
@@ -7787,7 +7860,7 @@
       </p:sp>
       <p:sp>
         <p:nvSpPr>
-          <p:cNvPr id="40" name="o626"/>
+          <p:cNvPr id="40" name="o628"/>
           <p:cNvSpPr txBox="1"/>
           <p:nvPr/>
         </p:nvSpPr>
@@ -7826,7 +7899,7 @@
       </p:sp>
       <p:sp>
         <p:nvSpPr>
-          <p:cNvPr id="41" name="o627"/>
+          <p:cNvPr id="41" name="o629"/>
           <p:cNvSpPr txBox="1"/>
           <p:nvPr/>
         </p:nvSpPr>
@@ -7865,7 +7938,7 @@
       </p:sp>
       <p:sp>
         <p:nvSpPr>
-          <p:cNvPr id="42" name="o628"/>
+          <p:cNvPr id="42" name="o630"/>
           <p:cNvSpPr txBox="1"/>
           <p:nvPr/>
         </p:nvSpPr>
@@ -7904,7 +7977,7 @@
       </p:sp>
       <p:sp>
         <p:nvSpPr>
-          <p:cNvPr id="43" name="o629"/>
+          <p:cNvPr id="43" name="o631"/>
           <p:cNvSpPr/>
           <p:nvPr/>
         </p:nvSpPr>
@@ -7927,7 +8000,7 @@
       </p:sp>
       <p:sp>
         <p:nvSpPr>
-          <p:cNvPr id="44" name="o630"/>
+          <p:cNvPr id="44" name="o632"/>
           <p:cNvSpPr txBox="1"/>
           <p:nvPr/>
         </p:nvSpPr>
@@ -7966,7 +8039,7 @@
       </p:sp>
       <p:sp>
         <p:nvSpPr>
-          <p:cNvPr id="45" name="o631"/>
+          <p:cNvPr id="45" name="o633"/>
           <p:cNvSpPr txBox="1"/>
           <p:nvPr/>
         </p:nvSpPr>
@@ -8005,7 +8078,7 @@
       </p:sp>
       <p:sp>
         <p:nvSpPr>
-          <p:cNvPr id="46" name="o632"/>
+          <p:cNvPr id="46" name="o634"/>
           <p:cNvSpPr txBox="1"/>
           <p:nvPr/>
         </p:nvSpPr>
@@ -8044,7 +8117,7 @@
       </p:sp>
       <p:sp>
         <p:nvSpPr>
-          <p:cNvPr id="47" name="o633"/>
+          <p:cNvPr id="47" name="o635"/>
           <p:cNvSpPr txBox="1"/>
           <p:nvPr/>
         </p:nvSpPr>
@@ -8083,7 +8156,7 @@
       </p:sp>
       <p:sp>
         <p:nvSpPr>
-          <p:cNvPr id="48" name="o634"/>
+          <p:cNvPr id="48" name="o636"/>
           <p:cNvSpPr/>
           <p:nvPr/>
         </p:nvSpPr>
@@ -8106,7 +8179,7 @@
       </p:sp>
       <p:sp>
         <p:nvSpPr>
-          <p:cNvPr id="49" name="o635"/>
+          <p:cNvPr id="49" name="o637"/>
           <p:cNvSpPr txBox="1"/>
           <p:nvPr/>
         </p:nvSpPr>
@@ -8145,7 +8218,7 @@
       </p:sp>
       <p:sp>
         <p:nvSpPr>
-          <p:cNvPr id="50" name="o636"/>
+          <p:cNvPr id="50" name="o638"/>
           <p:cNvSpPr txBox="1"/>
           <p:nvPr/>
         </p:nvSpPr>
@@ -8184,7 +8257,7 @@
       </p:sp>
       <p:sp>
         <p:nvSpPr>
-          <p:cNvPr id="51" name="o637"/>
+          <p:cNvPr id="51" name="o639"/>
           <p:cNvSpPr txBox="1"/>
           <p:nvPr/>
         </p:nvSpPr>
@@ -8223,7 +8296,7 @@
       </p:sp>
       <p:sp>
         <p:nvSpPr>
-          <p:cNvPr id="52" name="o638"/>
+          <p:cNvPr id="52" name="o640"/>
           <p:cNvSpPr txBox="1"/>
           <p:nvPr/>
         </p:nvSpPr>
@@ -8262,7 +8335,7 @@
       </p:sp>
       <p:sp>
         <p:nvSpPr>
-          <p:cNvPr id="53" name="o639"/>
+          <p:cNvPr id="53" name="o641"/>
           <p:cNvSpPr/>
           <p:nvPr/>
         </p:nvSpPr>
@@ -8285,7 +8358,7 @@
       </p:sp>
       <p:sp>
         <p:nvSpPr>
-          <p:cNvPr id="54" name="o640"/>
+          <p:cNvPr id="54" name="o642"/>
           <p:cNvSpPr txBox="1"/>
           <p:nvPr/>
         </p:nvSpPr>
@@ -8324,7 +8397,7 @@
       </p:sp>
       <p:sp>
         <p:nvSpPr>
-          <p:cNvPr id="55" name="o641"/>
+          <p:cNvPr id="55" name="o643"/>
           <p:cNvSpPr txBox="1"/>
           <p:nvPr/>
         </p:nvSpPr>
@@ -8363,7 +8436,7 @@
       </p:sp>
       <p:sp>
         <p:nvSpPr>
-          <p:cNvPr id="56" name="o642"/>
+          <p:cNvPr id="56" name="o644"/>
           <p:cNvSpPr txBox="1"/>
           <p:nvPr/>
         </p:nvSpPr>
@@ -8402,7 +8475,7 @@
       </p:sp>
       <p:sp>
         <p:nvSpPr>
-          <p:cNvPr id="57" name="o643"/>
+          <p:cNvPr id="57" name="o645"/>
           <p:cNvSpPr txBox="1"/>
           <p:nvPr/>
         </p:nvSpPr>
@@ -8441,7 +8514,7 @@
       </p:sp>
       <p:sp>
         <p:nvSpPr>
-          <p:cNvPr id="58" name="o644"/>
+          <p:cNvPr id="58" name="o646"/>
           <p:cNvSpPr/>
           <p:nvPr/>
         </p:nvSpPr>
@@ -8464,7 +8537,7 @@
       </p:sp>
       <p:sp>
         <p:nvSpPr>
-          <p:cNvPr id="59" name="o645"/>
+          <p:cNvPr id="59" name="o647"/>
           <p:cNvSpPr/>
           <p:nvPr/>
         </p:nvSpPr>
@@ -8487,7 +8560,7 @@
       </p:sp>
       <p:sp>
         <p:nvSpPr>
-          <p:cNvPr id="60" name="o646"/>
+          <p:cNvPr id="60" name="o648"/>
           <p:cNvSpPr/>
           <p:nvPr/>
         </p:nvSpPr>
@@ -8512,7 +8585,7 @@
       </p:sp>
       <p:sp>
         <p:nvSpPr>
-          <p:cNvPr id="61" name="o647"/>
+          <p:cNvPr id="61" name="o649"/>
           <p:cNvSpPr txBox="1"/>
           <p:nvPr/>
         </p:nvSpPr>
@@ -8551,7 +8624,7 @@
       </p:sp>
       <p:sp>
         <p:nvSpPr>
-          <p:cNvPr id="62" name="o648"/>
+          <p:cNvPr id="62" name="o650"/>
           <p:cNvSpPr txBox="1"/>
           <p:nvPr/>
         </p:nvSpPr>
@@ -8590,7 +8663,7 @@
       </p:sp>
       <p:sp>
         <p:nvSpPr>
-          <p:cNvPr id="63" name="o649"/>
+          <p:cNvPr id="63" name="o651"/>
           <p:cNvSpPr txBox="1"/>
           <p:nvPr/>
         </p:nvSpPr>
@@ -8629,7 +8702,7 @@
       </p:sp>
       <p:sp>
         <p:nvSpPr>
-          <p:cNvPr id="64" name="o650"/>
+          <p:cNvPr id="64" name="o652"/>
           <p:cNvSpPr/>
           <p:nvPr/>
         </p:nvSpPr>
@@ -8649,7 +8722,7 @@
       </p:sp>
       <p:sp>
         <p:nvSpPr>
-          <p:cNvPr id="65" name="o651"/>
+          <p:cNvPr id="65" name="o653"/>
           <p:cNvSpPr/>
           <p:nvPr/>
         </p:nvSpPr>
@@ -8669,7 +8742,7 @@
       </p:sp>
       <p:sp>
         <p:nvSpPr>
-          <p:cNvPr id="66" name="o652"/>
+          <p:cNvPr id="66" name="o654"/>
           <p:cNvSpPr txBox="1"/>
           <p:nvPr/>
         </p:nvSpPr>
@@ -8796,7 +8869,7 @@
       </p:grpSpPr>
       <p:sp>
         <p:nvSpPr>
-          <p:cNvPr id="2" name="o653"/>
+          <p:cNvPr id="2" name="o655"/>
           <p:cNvSpPr txBox="1"/>
           <p:nvPr/>
         </p:nvSpPr>
@@ -8835,7 +8908,7 @@
       </p:sp>
       <p:sp>
         <p:nvSpPr>
-          <p:cNvPr id="3" name="o654"/>
+          <p:cNvPr id="3" name="o656"/>
           <p:cNvSpPr txBox="1"/>
           <p:nvPr/>
         </p:nvSpPr>
@@ -8877,7 +8950,7 @@
       </p:sp>
       <p:sp>
         <p:nvSpPr>
-          <p:cNvPr id="4" name="o655"/>
+          <p:cNvPr id="4" name="o657"/>
           <p:cNvSpPr txBox="1"/>
           <p:nvPr/>
         </p:nvSpPr>
@@ -8916,7 +8989,7 @@
       </p:sp>
       <p:sp>
         <p:nvSpPr>
-          <p:cNvPr id="5" name="o656"/>
+          <p:cNvPr id="5" name="o658"/>
           <p:cNvSpPr/>
           <p:nvPr/>
         </p:nvSpPr>
@@ -8939,7 +9012,7 @@
       </p:sp>
       <p:sp>
         <p:nvSpPr>
-          <p:cNvPr id="6" name="o657"/>
+          <p:cNvPr id="6" name="o659"/>
           <p:cNvSpPr txBox="1"/>
           <p:nvPr/>
         </p:nvSpPr>
@@ -8978,7 +9051,7 @@
       </p:sp>
       <p:sp>
         <p:nvSpPr>
-          <p:cNvPr id="7" name="o658"/>
+          <p:cNvPr id="7" name="o660"/>
           <p:cNvSpPr txBox="1"/>
           <p:nvPr/>
         </p:nvSpPr>
@@ -9017,7 +9090,7 @@
       </p:sp>
       <p:sp>
         <p:nvSpPr>
-          <p:cNvPr id="8" name="o659"/>
+          <p:cNvPr id="8" name="o661"/>
           <p:cNvSpPr/>
           <p:nvPr/>
         </p:nvSpPr>
@@ -9042,7 +9115,7 @@
       </p:sp>
       <p:sp>
         <p:nvSpPr>
-          <p:cNvPr id="9" name="o660"/>
+          <p:cNvPr id="9" name="o662"/>
           <p:cNvSpPr txBox="1"/>
           <p:nvPr/>
         </p:nvSpPr>
@@ -9081,7 +9154,7 @@
       </p:sp>
       <p:sp>
         <p:nvSpPr>
-          <p:cNvPr id="10" name="o661"/>
+          <p:cNvPr id="10" name="o663"/>
           <p:cNvSpPr txBox="1"/>
           <p:nvPr/>
         </p:nvSpPr>
@@ -9120,7 +9193,7 @@
       </p:sp>
       <p:sp>
         <p:nvSpPr>
-          <p:cNvPr id="11" name="o662"/>
+          <p:cNvPr id="11" name="o664"/>
           <p:cNvSpPr txBox="1"/>
           <p:nvPr/>
         </p:nvSpPr>
@@ -9159,7 +9232,7 @@
       </p:sp>
       <p:sp>
         <p:nvSpPr>
-          <p:cNvPr id="12" name="o663"/>
+          <p:cNvPr id="12" name="o665"/>
           <p:cNvSpPr/>
           <p:nvPr/>
         </p:nvSpPr>
@@ -9184,7 +9257,7 @@
       </p:sp>
       <p:sp>
         <p:nvSpPr>
-          <p:cNvPr id="13" name="o664"/>
+          <p:cNvPr id="13" name="o666"/>
           <p:cNvSpPr/>
           <p:nvPr/>
         </p:nvSpPr>
@@ -9204,7 +9277,7 @@
       </p:sp>
       <p:sp>
         <p:nvSpPr>
-          <p:cNvPr id="14" name="o665"/>
+          <p:cNvPr id="14" name="o667"/>
           <p:cNvSpPr txBox="1"/>
           <p:nvPr/>
         </p:nvSpPr>
@@ -9243,7 +9316,7 @@
       </p:sp>
       <p:sp>
         <p:nvSpPr>
-          <p:cNvPr id="15" name="o666"/>
+          <p:cNvPr id="15" name="o668"/>
           <p:cNvSpPr txBox="1"/>
           <p:nvPr/>
         </p:nvSpPr>
@@ -9282,7 +9355,7 @@
       </p:sp>
       <p:sp>
         <p:nvSpPr>
-          <p:cNvPr id="16" name="o667"/>
+          <p:cNvPr id="16" name="o669"/>
           <p:cNvSpPr txBox="1"/>
           <p:nvPr/>
         </p:nvSpPr>
@@ -9321,7 +9394,7 @@
       </p:sp>
       <p:sp>
         <p:nvSpPr>
-          <p:cNvPr id="17" name="o668"/>
+          <p:cNvPr id="17" name="o670"/>
           <p:cNvSpPr/>
           <p:nvPr/>
         </p:nvSpPr>
@@ -9346,7 +9419,7 @@
       </p:sp>
       <p:sp>
         <p:nvSpPr>
-          <p:cNvPr id="18" name="o669"/>
+          <p:cNvPr id="18" name="o671"/>
           <p:cNvSpPr txBox="1"/>
           <p:nvPr/>
         </p:nvSpPr>
@@ -9385,7 +9458,7 @@
       </p:sp>
       <p:sp>
         <p:nvSpPr>
-          <p:cNvPr id="19" name="o670"/>
+          <p:cNvPr id="19" name="o672"/>
           <p:cNvSpPr txBox="1"/>
           <p:nvPr/>
         </p:nvSpPr>
@@ -9424,7 +9497,7 @@
       </p:sp>
       <p:sp>
         <p:nvSpPr>
-          <p:cNvPr id="20" name="o671"/>
+          <p:cNvPr id="20" name="o673"/>
           <p:cNvSpPr txBox="1"/>
           <p:nvPr/>
         </p:nvSpPr>
@@ -9463,7 +9536,7 @@
       </p:sp>
       <p:sp>
         <p:nvSpPr>
-          <p:cNvPr id="21" name="o672"/>
+          <p:cNvPr id="21" name="o674"/>
           <p:cNvSpPr/>
           <p:nvPr/>
         </p:nvSpPr>
@@ -9483,7 +9556,7 @@
       </p:sp>
       <p:sp>
         <p:nvSpPr>
-          <p:cNvPr id="22" name="o673"/>
+          <p:cNvPr id="22" name="o675"/>
           <p:cNvSpPr txBox="1"/>
           <p:nvPr/>
         </p:nvSpPr>
@@ -9522,7 +9595,7 @@
       </p:sp>
       <p:sp>
         <p:nvSpPr>
-          <p:cNvPr id="23" name="o674"/>
+          <p:cNvPr id="23" name="o676"/>
           <p:cNvSpPr txBox="1"/>
           <p:nvPr/>
         </p:nvSpPr>
@@ -9561,7 +9634,7 @@
       </p:sp>
       <p:sp>
         <p:nvSpPr>
-          <p:cNvPr id="24" name="o675"/>
+          <p:cNvPr id="24" name="o677"/>
           <p:cNvSpPr txBox="1"/>
           <p:nvPr/>
         </p:nvSpPr>
@@ -9600,7 +9673,7 @@
       </p:sp>
       <p:sp>
         <p:nvSpPr>
-          <p:cNvPr id="25" name="o676"/>
+          <p:cNvPr id="25" name="o678"/>
           <p:cNvSpPr txBox="1"/>
           <p:nvPr/>
         </p:nvSpPr>
@@ -9639,7 +9712,7 @@
       </p:sp>
       <p:sp>
         <p:nvSpPr>
-          <p:cNvPr id="26" name="o677"/>
+          <p:cNvPr id="26" name="o679"/>
           <p:cNvSpPr/>
           <p:nvPr/>
         </p:nvSpPr>
@@ -9662,7 +9735,7 @@
       </p:sp>
       <p:sp>
         <p:nvSpPr>
-          <p:cNvPr id="27" name="o678"/>
+          <p:cNvPr id="27" name="o680"/>
           <p:cNvSpPr txBox="1"/>
           <p:nvPr/>
         </p:nvSpPr>
@@ -9701,7 +9774,7 @@
       </p:sp>
       <p:sp>
         <p:nvSpPr>
-          <p:cNvPr id="28" name="o679"/>
+          <p:cNvPr id="28" name="o681"/>
           <p:cNvSpPr txBox="1"/>
           <p:nvPr/>
         </p:nvSpPr>
@@ -9740,7 +9813,7 @@
       </p:sp>
       <p:sp>
         <p:nvSpPr>
-          <p:cNvPr id="29" name="o680"/>
+          <p:cNvPr id="29" name="o682"/>
           <p:cNvSpPr txBox="1"/>
           <p:nvPr/>
         </p:nvSpPr>
@@ -9779,7 +9852,7 @@
       </p:sp>
       <p:sp>
         <p:nvSpPr>
-          <p:cNvPr id="30" name="o681"/>
+          <p:cNvPr id="30" name="o683"/>
           <p:cNvSpPr txBox="1"/>
           <p:nvPr/>
         </p:nvSpPr>
@@ -9818,7 +9891,7 @@
       </p:sp>
       <p:sp>
         <p:nvSpPr>
-          <p:cNvPr id="31" name="o682"/>
+          <p:cNvPr id="31" name="o684"/>
           <p:cNvSpPr/>
           <p:nvPr/>
         </p:nvSpPr>
@@ -9841,7 +9914,7 @@
       </p:sp>
       <p:sp>
         <p:nvSpPr>
-          <p:cNvPr id="32" name="o683"/>
+          <p:cNvPr id="32" name="o685"/>
           <p:cNvSpPr txBox="1"/>
           <p:nvPr/>
         </p:nvSpPr>
@@ -9880,7 +9953,7 @@
       </p:sp>
       <p:sp>
         <p:nvSpPr>
-          <p:cNvPr id="33" name="o684"/>
+          <p:cNvPr id="33" name="o686"/>
           <p:cNvSpPr txBox="1"/>
           <p:nvPr/>
         </p:nvSpPr>
@@ -9919,7 +9992,7 @@
       </p:sp>
       <p:sp>
         <p:nvSpPr>
-          <p:cNvPr id="34" name="o685"/>
+          <p:cNvPr id="34" name="o687"/>
           <p:cNvSpPr txBox="1"/>
           <p:nvPr/>
         </p:nvSpPr>
@@ -9958,7 +10031,7 @@
       </p:sp>
       <p:sp>
         <p:nvSpPr>
-          <p:cNvPr id="35" name="o686"/>
+          <p:cNvPr id="35" name="o688"/>
           <p:cNvSpPr txBox="1"/>
           <p:nvPr/>
         </p:nvSpPr>
@@ -9997,7 +10070,7 @@
       </p:sp>
       <p:sp>
         <p:nvSpPr>
-          <p:cNvPr id="36" name="o687"/>
+          <p:cNvPr id="36" name="o689"/>
           <p:cNvSpPr/>
           <p:nvPr/>
         </p:nvSpPr>
@@ -10020,7 +10093,7 @@
       </p:sp>
       <p:sp>
         <p:nvSpPr>
-          <p:cNvPr id="37" name="o688"/>
+          <p:cNvPr id="37" name="o690"/>
           <p:cNvSpPr txBox="1"/>
           <p:nvPr/>
         </p:nvSpPr>
@@ -10059,7 +10132,7 @@
       </p:sp>
       <p:sp>
         <p:nvSpPr>
-          <p:cNvPr id="38" name="o689"/>
+          <p:cNvPr id="38" name="o691"/>
           <p:cNvSpPr txBox="1"/>
           <p:nvPr/>
         </p:nvSpPr>
@@ -10098,7 +10171,7 @@
       </p:sp>
       <p:sp>
         <p:nvSpPr>
-          <p:cNvPr id="39" name="o690"/>
+          <p:cNvPr id="39" name="o692"/>
           <p:cNvSpPr txBox="1"/>
           <p:nvPr/>
         </p:nvSpPr>
@@ -10137,7 +10210,7 @@
       </p:sp>
       <p:sp>
         <p:nvSpPr>
-          <p:cNvPr id="40" name="o691"/>
+          <p:cNvPr id="40" name="o693"/>
           <p:cNvSpPr txBox="1"/>
           <p:nvPr/>
         </p:nvSpPr>
@@ -10176,7 +10249,7 @@
       </p:sp>
       <p:sp>
         <p:nvSpPr>
-          <p:cNvPr id="41" name="o692"/>
+          <p:cNvPr id="41" name="o694"/>
           <p:cNvSpPr/>
           <p:nvPr/>
         </p:nvSpPr>
@@ -10199,7 +10272,7 @@
       </p:sp>
       <p:sp>
         <p:nvSpPr>
-          <p:cNvPr id="42" name="o693"/>
+          <p:cNvPr id="42" name="o695"/>
           <p:cNvSpPr txBox="1"/>
           <p:nvPr/>
         </p:nvSpPr>
@@ -10238,7 +10311,7 @@
       </p:sp>
       <p:sp>
         <p:nvSpPr>
-          <p:cNvPr id="43" name="o694"/>
+          <p:cNvPr id="43" name="o696"/>
           <p:cNvSpPr txBox="1"/>
           <p:nvPr/>
         </p:nvSpPr>
@@ -10277,7 +10350,7 @@
       </p:sp>
       <p:sp>
         <p:nvSpPr>
-          <p:cNvPr id="44" name="o695"/>
+          <p:cNvPr id="44" name="o697"/>
           <p:cNvSpPr txBox="1"/>
           <p:nvPr/>
         </p:nvSpPr>
@@ -10316,7 +10389,7 @@
       </p:sp>
       <p:sp>
         <p:nvSpPr>
-          <p:cNvPr id="45" name="o696"/>
+          <p:cNvPr id="45" name="o698"/>
           <p:cNvSpPr txBox="1"/>
           <p:nvPr/>
         </p:nvSpPr>
@@ -10355,7 +10428,7 @@
       </p:sp>
       <p:sp>
         <p:nvSpPr>
-          <p:cNvPr id="46" name="o697"/>
+          <p:cNvPr id="46" name="o699"/>
           <p:cNvSpPr/>
           <p:nvPr/>
         </p:nvSpPr>
@@ -10378,7 +10451,7 @@
       </p:sp>
       <p:sp>
         <p:nvSpPr>
-          <p:cNvPr id="47" name="o698"/>
+          <p:cNvPr id="47" name="o700"/>
           <p:cNvSpPr/>
           <p:nvPr/>
         </p:nvSpPr>
@@ -10401,7 +10474,7 @@
       </p:sp>
       <p:sp>
         <p:nvSpPr>
-          <p:cNvPr id="48" name="o699"/>
+          <p:cNvPr id="48" name="o701"/>
           <p:cNvSpPr/>
           <p:nvPr/>
         </p:nvSpPr>
@@ -10421,7 +10494,7 @@
       </p:sp>
       <p:sp>
         <p:nvSpPr>
-          <p:cNvPr id="49" name="o700"/>
+          <p:cNvPr id="49" name="o702"/>
           <p:cNvSpPr/>
           <p:nvPr/>
         </p:nvSpPr>
@@ -10441,7 +10514,7 @@
       </p:sp>
       <p:sp>
         <p:nvSpPr>
-          <p:cNvPr id="50" name="o701"/>
+          <p:cNvPr id="50" name="o703"/>
           <p:cNvSpPr txBox="1"/>
           <p:nvPr/>
         </p:nvSpPr>
@@ -10480,7 +10553,7 @@
       </p:sp>
       <p:sp>
         <p:nvSpPr>
-          <p:cNvPr id="51" name="o702"/>
+          <p:cNvPr id="51" name="o704"/>
           <p:cNvSpPr txBox="1"/>
           <p:nvPr/>
         </p:nvSpPr>
@@ -10542,7 +10615,7 @@
       </p:sp>
       <p:sp>
         <p:nvSpPr>
-          <p:cNvPr id="52" name="o703"/>
+          <p:cNvPr id="52" name="o705"/>
           <p:cNvSpPr txBox="1"/>
           <p:nvPr/>
         </p:nvSpPr>
@@ -10606,7 +10679,7 @@
       </p:grpSpPr>
       <p:sp>
         <p:nvSpPr>
-          <p:cNvPr id="2" name="o704"/>
+          <p:cNvPr id="2" name="o706"/>
           <p:cNvSpPr txBox="1"/>
           <p:nvPr/>
         </p:nvSpPr>
@@ -10645,7 +10718,7 @@
       </p:sp>
       <p:sp>
         <p:nvSpPr>
-          <p:cNvPr id="3" name="o705"/>
+          <p:cNvPr id="3" name="o707"/>
           <p:cNvSpPr txBox="1"/>
           <p:nvPr/>
         </p:nvSpPr>
@@ -10684,7 +10757,7 @@
       </p:sp>
       <p:sp>
         <p:nvSpPr>
-          <p:cNvPr id="4" name="o706"/>
+          <p:cNvPr id="4" name="o708"/>
           <p:cNvSpPr txBox="1"/>
           <p:nvPr/>
         </p:nvSpPr>
@@ -10723,7 +10796,7 @@
       </p:sp>
       <p:sp>
         <p:nvSpPr>
-          <p:cNvPr id="5" name="o707"/>
+          <p:cNvPr id="5" name="o709"/>
           <p:cNvSpPr/>
           <p:nvPr/>
         </p:nvSpPr>
@@ -10746,7 +10819,7 @@
       </p:sp>
       <p:sp>
         <p:nvSpPr>
-          <p:cNvPr id="6" name="o708"/>
+          <p:cNvPr id="6" name="o710"/>
           <p:cNvSpPr txBox="1"/>
           <p:nvPr/>
         </p:nvSpPr>
@@ -10785,7 +10858,7 @@
       </p:sp>
       <p:sp>
         <p:nvSpPr>
-          <p:cNvPr id="7" name="o709"/>
+          <p:cNvPr id="7" name="o711"/>
           <p:cNvSpPr txBox="1"/>
           <p:nvPr/>
         </p:nvSpPr>
@@ -10824,7 +10897,7 @@
       </p:sp>
       <p:sp>
         <p:nvSpPr>
-          <p:cNvPr id="8" name="o710"/>
+          <p:cNvPr id="8" name="o712"/>
           <p:cNvSpPr/>
           <p:nvPr/>
         </p:nvSpPr>
@@ -10847,7 +10920,7 @@
       </p:sp>
       <p:sp>
         <p:nvSpPr>
-          <p:cNvPr id="9" name="o711"/>
+          <p:cNvPr id="9" name="o713"/>
           <p:cNvSpPr txBox="1"/>
           <p:nvPr/>
         </p:nvSpPr>
@@ -10886,7 +10959,7 @@
       </p:sp>
       <p:sp>
         <p:nvSpPr>
-          <p:cNvPr id="10" name="o712"/>
+          <p:cNvPr id="10" name="o714"/>
           <p:cNvSpPr txBox="1"/>
           <p:nvPr/>
         </p:nvSpPr>
@@ -10925,7 +10998,7 @@
       </p:sp>
       <p:sp>
         <p:nvSpPr>
-          <p:cNvPr id="11" name="o713"/>
+          <p:cNvPr id="11" name="o715"/>
           <p:cNvSpPr/>
           <p:nvPr/>
         </p:nvSpPr>
@@ -10948,7 +11021,7 @@
       </p:sp>
       <p:sp>
         <p:nvSpPr>
-          <p:cNvPr id="12" name="o714"/>
+          <p:cNvPr id="12" name="o716"/>
           <p:cNvSpPr txBox="1"/>
           <p:nvPr/>
         </p:nvSpPr>
@@ -10987,7 +11060,7 @@
       </p:sp>
       <p:sp>
         <p:nvSpPr>
-          <p:cNvPr id="13" name="o715"/>
+          <p:cNvPr id="13" name="o717"/>
           <p:cNvSpPr txBox="1"/>
           <p:nvPr/>
         </p:nvSpPr>
@@ -11026,7 +11099,7 @@
       </p:sp>
       <p:sp>
         <p:nvSpPr>
-          <p:cNvPr id="14" name="o716"/>
+          <p:cNvPr id="14" name="o718"/>
           <p:cNvSpPr/>
           <p:nvPr/>
         </p:nvSpPr>
@@ -11049,7 +11122,7 @@
       </p:sp>
       <p:sp>
         <p:nvSpPr>
-          <p:cNvPr id="15" name="o717"/>
+          <p:cNvPr id="15" name="o719"/>
           <p:cNvSpPr/>
           <p:nvPr/>
         </p:nvSpPr>
@@ -11072,7 +11145,7 @@
       </p:sp>
       <p:sp>
         <p:nvSpPr>
-          <p:cNvPr id="16" name="o718"/>
+          <p:cNvPr id="16" name="o720"/>
           <p:cNvSpPr txBox="1"/>
           <p:nvPr/>
         </p:nvSpPr>
@@ -11136,7 +11209,7 @@
       </p:grpSpPr>
       <p:sp>
         <p:nvSpPr>
-          <p:cNvPr id="2" name="o23"/>
+          <p:cNvPr id="2" name="o25"/>
           <p:cNvSpPr txBox="1"/>
           <p:nvPr/>
         </p:nvSpPr>
@@ -11175,7 +11248,7 @@
       </p:sp>
       <p:sp>
         <p:nvSpPr>
-          <p:cNvPr id="3" name="o24"/>
+          <p:cNvPr id="3" name="o26"/>
           <p:cNvSpPr txBox="1"/>
           <p:nvPr/>
         </p:nvSpPr>
@@ -11217,7 +11290,7 @@
       </p:sp>
       <p:sp>
         <p:nvSpPr>
-          <p:cNvPr id="4" name="o25"/>
+          <p:cNvPr id="4" name="o27"/>
           <p:cNvSpPr txBox="1"/>
           <p:nvPr/>
         </p:nvSpPr>
@@ -11256,7 +11329,7 @@
       </p:sp>
       <p:sp>
         <p:nvSpPr>
-          <p:cNvPr id="5" name="o26"/>
+          <p:cNvPr id="5" name="o28"/>
           <p:cNvSpPr/>
           <p:nvPr/>
         </p:nvSpPr>
@@ -11279,7 +11352,7 @@
       </p:sp>
       <p:sp>
         <p:nvSpPr>
-          <p:cNvPr id="6" name="o27"/>
+          <p:cNvPr id="6" name="o29"/>
           <p:cNvSpPr txBox="1"/>
           <p:nvPr/>
         </p:nvSpPr>
@@ -11318,7 +11391,7 @@
       </p:sp>
       <p:sp>
         <p:nvSpPr>
-          <p:cNvPr id="7" name="o28"/>
+          <p:cNvPr id="7" name="o30"/>
           <p:cNvSpPr txBox="1"/>
           <p:nvPr/>
         </p:nvSpPr>
@@ -11357,7 +11430,7 @@
       </p:sp>
       <p:sp>
         <p:nvSpPr>
-          <p:cNvPr id="8" name="o29"/>
+          <p:cNvPr id="8" name="o31"/>
           <p:cNvSpPr/>
           <p:nvPr/>
         </p:nvSpPr>
@@ -11380,7 +11453,7 @@
       </p:sp>
       <p:sp>
         <p:nvSpPr>
-          <p:cNvPr id="9" name="o30"/>
+          <p:cNvPr id="9" name="o32"/>
           <p:cNvSpPr/>
           <p:nvPr/>
         </p:nvSpPr>
@@ -11400,7 +11473,7 @@
       </p:sp>
       <p:sp>
         <p:nvSpPr>
-          <p:cNvPr id="10" name="o31"/>
+          <p:cNvPr id="10" name="o33"/>
           <p:cNvSpPr txBox="1"/>
           <p:nvPr/>
         </p:nvSpPr>
@@ -11439,7 +11512,7 @@
       </p:sp>
       <p:sp>
         <p:nvSpPr>
-          <p:cNvPr id="11" name="o32"/>
+          <p:cNvPr id="11" name="o34"/>
           <p:cNvSpPr txBox="1"/>
           <p:nvPr/>
         </p:nvSpPr>
@@ -11478,7 +11551,7 @@
       </p:sp>
       <p:sp>
         <p:nvSpPr>
-          <p:cNvPr id="12" name="o33"/>
+          <p:cNvPr id="12" name="o35"/>
           <p:cNvSpPr txBox="1"/>
           <p:nvPr/>
         </p:nvSpPr>
@@ -11517,7 +11590,7 @@
       </p:sp>
       <p:sp>
         <p:nvSpPr>
-          <p:cNvPr id="13" name="o34"/>
+          <p:cNvPr id="13" name="o36"/>
           <p:cNvSpPr txBox="1"/>
           <p:nvPr/>
         </p:nvSpPr>
@@ -11556,7 +11629,7 @@
       </p:sp>
       <p:sp>
         <p:nvSpPr>
-          <p:cNvPr id="14" name="o35"/>
+          <p:cNvPr id="14" name="o37"/>
           <p:cNvSpPr/>
           <p:nvPr/>
         </p:nvSpPr>
@@ -11579,7 +11652,7 @@
       </p:sp>
       <p:sp>
         <p:nvSpPr>
-          <p:cNvPr id="15" name="o36"/>
+          <p:cNvPr id="15" name="o38"/>
           <p:cNvSpPr txBox="1"/>
           <p:nvPr/>
         </p:nvSpPr>
@@ -11618,7 +11691,7 @@
       </p:sp>
       <p:sp>
         <p:nvSpPr>
-          <p:cNvPr id="16" name="o37"/>
+          <p:cNvPr id="16" name="o39"/>
           <p:cNvSpPr txBox="1"/>
           <p:nvPr/>
         </p:nvSpPr>
@@ -11657,7 +11730,7 @@
       </p:sp>
       <p:sp>
         <p:nvSpPr>
-          <p:cNvPr id="17" name="o38"/>
+          <p:cNvPr id="17" name="o40"/>
           <p:cNvSpPr txBox="1"/>
           <p:nvPr/>
         </p:nvSpPr>
@@ -11696,7 +11769,7 @@
       </p:sp>
       <p:sp>
         <p:nvSpPr>
-          <p:cNvPr id="18" name="o39"/>
+          <p:cNvPr id="18" name="o41"/>
           <p:cNvSpPr txBox="1"/>
           <p:nvPr/>
         </p:nvSpPr>
@@ -11735,7 +11808,7 @@
       </p:sp>
       <p:sp>
         <p:nvSpPr>
-          <p:cNvPr id="19" name="o40"/>
+          <p:cNvPr id="19" name="o42"/>
           <p:cNvSpPr/>
           <p:nvPr/>
         </p:nvSpPr>
@@ -11758,7 +11831,7 @@
       </p:sp>
       <p:sp>
         <p:nvSpPr>
-          <p:cNvPr id="20" name="o41"/>
+          <p:cNvPr id="20" name="o43"/>
           <p:cNvSpPr txBox="1"/>
           <p:nvPr/>
         </p:nvSpPr>
@@ -11797,7 +11870,7 @@
       </p:sp>
       <p:sp>
         <p:nvSpPr>
-          <p:cNvPr id="21" name="o42"/>
+          <p:cNvPr id="21" name="o44"/>
           <p:cNvSpPr txBox="1"/>
           <p:nvPr/>
         </p:nvSpPr>
@@ -11836,7 +11909,7 @@
       </p:sp>
       <p:sp>
         <p:nvSpPr>
-          <p:cNvPr id="22" name="o43"/>
+          <p:cNvPr id="22" name="o45"/>
           <p:cNvSpPr txBox="1"/>
           <p:nvPr/>
         </p:nvSpPr>
@@ -11875,7 +11948,7 @@
       </p:sp>
       <p:sp>
         <p:nvSpPr>
-          <p:cNvPr id="23" name="o44"/>
+          <p:cNvPr id="23" name="o46"/>
           <p:cNvSpPr txBox="1"/>
           <p:nvPr/>
         </p:nvSpPr>
@@ -11914,7 +11987,7 @@
       </p:sp>
       <p:sp>
         <p:nvSpPr>
-          <p:cNvPr id="24" name="o45"/>
+          <p:cNvPr id="24" name="o47"/>
           <p:cNvSpPr/>
           <p:nvPr/>
         </p:nvSpPr>
@@ -11937,7 +12010,7 @@
       </p:sp>
       <p:sp>
         <p:nvSpPr>
-          <p:cNvPr id="25" name="o46"/>
+          <p:cNvPr id="25" name="o48"/>
           <p:cNvSpPr txBox="1"/>
           <p:nvPr/>
         </p:nvSpPr>
@@ -11976,7 +12049,7 @@
       </p:sp>
       <p:sp>
         <p:nvSpPr>
-          <p:cNvPr id="26" name="o47"/>
+          <p:cNvPr id="26" name="o49"/>
           <p:cNvSpPr txBox="1"/>
           <p:nvPr/>
         </p:nvSpPr>
@@ -12015,7 +12088,7 @@
       </p:sp>
       <p:sp>
         <p:nvSpPr>
-          <p:cNvPr id="27" name="o48"/>
+          <p:cNvPr id="27" name="o50"/>
           <p:cNvSpPr txBox="1"/>
           <p:nvPr/>
         </p:nvSpPr>
@@ -12054,7 +12127,7 @@
       </p:sp>
       <p:sp>
         <p:nvSpPr>
-          <p:cNvPr id="28" name="o49"/>
+          <p:cNvPr id="28" name="o51"/>
           <p:cNvSpPr txBox="1"/>
           <p:nvPr/>
         </p:nvSpPr>
@@ -12093,7 +12166,7 @@
       </p:sp>
       <p:sp>
         <p:nvSpPr>
-          <p:cNvPr id="29" name="o50"/>
+          <p:cNvPr id="29" name="o52"/>
           <p:cNvSpPr/>
           <p:nvPr/>
         </p:nvSpPr>
@@ -12116,7 +12189,7 @@
       </p:sp>
       <p:sp>
         <p:nvSpPr>
-          <p:cNvPr id="30" name="o51"/>
+          <p:cNvPr id="30" name="o53"/>
           <p:cNvSpPr/>
           <p:nvPr/>
         </p:nvSpPr>
@@ -12136,7 +12209,7 @@
       </p:sp>
       <p:sp>
         <p:nvSpPr>
-          <p:cNvPr id="31" name="o52"/>
+          <p:cNvPr id="31" name="o54"/>
           <p:cNvSpPr txBox="1"/>
           <p:nvPr/>
         </p:nvSpPr>
@@ -12175,7 +12248,7 @@
       </p:sp>
       <p:sp>
         <p:nvSpPr>
-          <p:cNvPr id="32" name="o53"/>
+          <p:cNvPr id="32" name="o55"/>
           <p:cNvSpPr txBox="1"/>
           <p:nvPr/>
         </p:nvSpPr>
@@ -12217,7 +12290,7 @@
       </p:sp>
       <p:sp>
         <p:nvSpPr>
-          <p:cNvPr id="33" name="o54"/>
+          <p:cNvPr id="33" name="o56"/>
           <p:cNvSpPr/>
           <p:nvPr/>
         </p:nvSpPr>
@@ -12240,7 +12313,7 @@
       </p:sp>
       <p:sp>
         <p:nvSpPr>
-          <p:cNvPr id="34" name="o55"/>
+          <p:cNvPr id="34" name="o57"/>
           <p:cNvSpPr txBox="1"/>
           <p:nvPr/>
         </p:nvSpPr>
@@ -12279,7 +12352,7 @@
       </p:sp>
       <p:sp>
         <p:nvSpPr>
-          <p:cNvPr id="35" name="o56"/>
+          <p:cNvPr id="35" name="o58"/>
           <p:cNvSpPr txBox="1"/>
           <p:nvPr/>
         </p:nvSpPr>
@@ -12318,7 +12391,7 @@
       </p:sp>
       <p:sp>
         <p:nvSpPr>
-          <p:cNvPr id="36" name="o57"/>
+          <p:cNvPr id="36" name="o59"/>
           <p:cNvSpPr/>
           <p:nvPr/>
         </p:nvSpPr>
@@ -12341,7 +12414,7 @@
       </p:sp>
       <p:sp>
         <p:nvSpPr>
-          <p:cNvPr id="37" name="o58"/>
+          <p:cNvPr id="37" name="o60"/>
           <p:cNvSpPr txBox="1"/>
           <p:nvPr/>
         </p:nvSpPr>
@@ -12380,7 +12453,7 @@
       </p:sp>
       <p:sp>
         <p:nvSpPr>
-          <p:cNvPr id="38" name="o59"/>
+          <p:cNvPr id="38" name="o61"/>
           <p:cNvSpPr txBox="1"/>
           <p:nvPr/>
         </p:nvSpPr>
@@ -12419,7 +12492,7 @@
       </p:sp>
       <p:sp>
         <p:nvSpPr>
-          <p:cNvPr id="39" name="o60"/>
+          <p:cNvPr id="39" name="o62"/>
           <p:cNvSpPr/>
           <p:nvPr/>
         </p:nvSpPr>
@@ -12442,7 +12515,7 @@
       </p:sp>
       <p:sp>
         <p:nvSpPr>
-          <p:cNvPr id="40" name="o61"/>
+          <p:cNvPr id="40" name="o63"/>
           <p:cNvSpPr txBox="1"/>
           <p:nvPr/>
         </p:nvSpPr>
@@ -12481,7 +12554,7 @@
       </p:sp>
       <p:sp>
         <p:nvSpPr>
-          <p:cNvPr id="41" name="o62"/>
+          <p:cNvPr id="41" name="o64"/>
           <p:cNvSpPr txBox="1"/>
           <p:nvPr/>
         </p:nvSpPr>
@@ -12545,7 +12618,7 @@
       </p:grpSpPr>
       <p:sp>
         <p:nvSpPr>
-          <p:cNvPr id="2" name="o63"/>
+          <p:cNvPr id="2" name="o65"/>
           <p:cNvSpPr txBox="1"/>
           <p:nvPr/>
         </p:nvSpPr>
@@ -12584,7 +12657,7 @@
       </p:sp>
       <p:sp>
         <p:nvSpPr>
-          <p:cNvPr id="3" name="o64"/>
+          <p:cNvPr id="3" name="o66"/>
           <p:cNvSpPr txBox="1"/>
           <p:nvPr/>
         </p:nvSpPr>
@@ -12626,7 +12699,7 @@
       </p:sp>
       <p:sp>
         <p:nvSpPr>
-          <p:cNvPr id="4" name="o65"/>
+          <p:cNvPr id="4" name="o67"/>
           <p:cNvSpPr txBox="1"/>
           <p:nvPr/>
         </p:nvSpPr>
@@ -12665,7 +12738,7 @@
       </p:sp>
       <p:sp>
         <p:nvSpPr>
-          <p:cNvPr id="5" name="o66"/>
+          <p:cNvPr id="5" name="o68"/>
           <p:cNvSpPr/>
           <p:nvPr/>
         </p:nvSpPr>
@@ -12688,7 +12761,7 @@
       </p:sp>
       <p:sp>
         <p:nvSpPr>
-          <p:cNvPr id="6" name="o67"/>
+          <p:cNvPr id="6" name="o69"/>
           <p:cNvSpPr txBox="1"/>
           <p:nvPr/>
         </p:nvSpPr>
@@ -12727,7 +12800,7 @@
       </p:sp>
       <p:sp>
         <p:nvSpPr>
-          <p:cNvPr id="7" name="o68"/>
+          <p:cNvPr id="7" name="o70"/>
           <p:cNvSpPr txBox="1"/>
           <p:nvPr/>
         </p:nvSpPr>
@@ -12766,7 +12839,7 @@
       </p:sp>
       <p:sp>
         <p:nvSpPr>
-          <p:cNvPr id="8" name="o69"/>
+          <p:cNvPr id="8" name="o71"/>
           <p:cNvSpPr txBox="1"/>
           <p:nvPr/>
         </p:nvSpPr>
@@ -12805,7 +12878,7 @@
       </p:sp>
       <p:sp>
         <p:nvSpPr>
-          <p:cNvPr id="9" name="o70"/>
+          <p:cNvPr id="9" name="o72"/>
           <p:cNvSpPr/>
           <p:nvPr/>
         </p:nvSpPr>
@@ -12830,7 +12903,7 @@
       </p:sp>
       <p:sp>
         <p:nvSpPr>
-          <p:cNvPr id="10" name="o71"/>
+          <p:cNvPr id="10" name="o73"/>
           <p:cNvSpPr txBox="1"/>
           <p:nvPr/>
         </p:nvSpPr>
@@ -12869,7 +12942,7 @@
       </p:sp>
       <p:sp>
         <p:nvSpPr>
-          <p:cNvPr id="11" name="o72"/>
+          <p:cNvPr id="11" name="o74"/>
           <p:cNvSpPr txBox="1"/>
           <p:nvPr/>
         </p:nvSpPr>
@@ -12908,7 +12981,7 @@
       </p:sp>
       <p:sp>
         <p:nvSpPr>
-          <p:cNvPr id="12" name="o73"/>
+          <p:cNvPr id="12" name="o75"/>
           <p:cNvSpPr txBox="1"/>
           <p:nvPr/>
         </p:nvSpPr>
@@ -12947,7 +13020,7 @@
       </p:sp>
       <p:sp>
         <p:nvSpPr>
-          <p:cNvPr id="13" name="o74"/>
+          <p:cNvPr id="13" name="o76"/>
           <p:cNvSpPr txBox="1"/>
           <p:nvPr/>
         </p:nvSpPr>
@@ -12986,7 +13059,7 @@
       </p:sp>
       <p:sp>
         <p:nvSpPr>
-          <p:cNvPr id="14" name="o75"/>
+          <p:cNvPr id="14" name="o77"/>
           <p:cNvSpPr/>
           <p:nvPr/>
         </p:nvSpPr>
@@ -13011,7 +13084,7 @@
       </p:sp>
       <p:sp>
         <p:nvSpPr>
-          <p:cNvPr id="15" name="o76"/>
+          <p:cNvPr id="15" name="o78"/>
           <p:cNvSpPr/>
           <p:nvPr/>
         </p:nvSpPr>
@@ -13031,7 +13104,7 @@
       </p:sp>
       <p:sp>
         <p:nvSpPr>
-          <p:cNvPr id="16" name="o77"/>
+          <p:cNvPr id="16" name="o79"/>
           <p:cNvSpPr txBox="1"/>
           <p:nvPr/>
         </p:nvSpPr>
@@ -13070,7 +13143,7 @@
       </p:sp>
       <p:sp>
         <p:nvSpPr>
-          <p:cNvPr id="17" name="o78"/>
+          <p:cNvPr id="17" name="o80"/>
           <p:cNvSpPr txBox="1"/>
           <p:nvPr/>
         </p:nvSpPr>
@@ -13109,7 +13182,7 @@
       </p:sp>
       <p:sp>
         <p:nvSpPr>
-          <p:cNvPr id="18" name="o79"/>
+          <p:cNvPr id="18" name="o81"/>
           <p:cNvSpPr txBox="1"/>
           <p:nvPr/>
         </p:nvSpPr>
@@ -13148,7 +13221,7 @@
       </p:sp>
       <p:sp>
         <p:nvSpPr>
-          <p:cNvPr id="19" name="o80"/>
+          <p:cNvPr id="19" name="o82"/>
           <p:cNvSpPr txBox="1"/>
           <p:nvPr/>
         </p:nvSpPr>
@@ -13187,7 +13260,7 @@
       </p:sp>
       <p:sp>
         <p:nvSpPr>
-          <p:cNvPr id="20" name="o81"/>
+          <p:cNvPr id="20" name="o83"/>
           <p:cNvSpPr/>
           <p:nvPr/>
         </p:nvSpPr>
@@ -13212,7 +13285,7 @@
       </p:sp>
       <p:sp>
         <p:nvSpPr>
-          <p:cNvPr id="21" name="o82"/>
+          <p:cNvPr id="21" name="o84"/>
           <p:cNvSpPr txBox="1"/>
           <p:nvPr/>
         </p:nvSpPr>
@@ -13251,7 +13324,7 @@
       </p:sp>
       <p:sp>
         <p:nvSpPr>
-          <p:cNvPr id="22" name="o83"/>
+          <p:cNvPr id="22" name="o85"/>
           <p:cNvSpPr txBox="1"/>
           <p:nvPr/>
         </p:nvSpPr>
@@ -13290,7 +13363,7 @@
       </p:sp>
       <p:sp>
         <p:nvSpPr>
-          <p:cNvPr id="23" name="o84"/>
+          <p:cNvPr id="23" name="o86"/>
           <p:cNvSpPr txBox="1"/>
           <p:nvPr/>
         </p:nvSpPr>
@@ -13329,7 +13402,7 @@
       </p:sp>
       <p:sp>
         <p:nvSpPr>
-          <p:cNvPr id="24" name="o85"/>
+          <p:cNvPr id="24" name="o87"/>
           <p:cNvSpPr txBox="1"/>
           <p:nvPr/>
         </p:nvSpPr>
@@ -13368,7 +13441,7 @@
       </p:sp>
       <p:sp>
         <p:nvSpPr>
-          <p:cNvPr id="25" name="o86"/>
+          <p:cNvPr id="25" name="o88"/>
           <p:cNvSpPr txBox="1"/>
           <p:nvPr/>
         </p:nvSpPr>
@@ -13407,7 +13480,7 @@
       </p:sp>
       <p:sp>
         <p:nvSpPr>
-          <p:cNvPr id="26" name="o87"/>
+          <p:cNvPr id="26" name="o89"/>
           <p:cNvSpPr txBox="1"/>
           <p:nvPr/>
         </p:nvSpPr>
@@ -13446,7 +13519,7 @@
       </p:sp>
       <p:sp>
         <p:nvSpPr>
-          <p:cNvPr id="27" name="o88"/>
+          <p:cNvPr id="27" name="o90"/>
           <p:cNvSpPr txBox="1"/>
           <p:nvPr/>
         </p:nvSpPr>
@@ -13485,7 +13558,7 @@
       </p:sp>
       <p:sp>
         <p:nvSpPr>
-          <p:cNvPr id="28" name="o89"/>
+          <p:cNvPr id="28" name="o91"/>
           <p:cNvSpPr txBox="1"/>
           <p:nvPr/>
         </p:nvSpPr>
@@ -13524,7 +13597,7 @@
       </p:sp>
       <p:sp>
         <p:nvSpPr>
-          <p:cNvPr id="29" name="o90"/>
+          <p:cNvPr id="29" name="o92"/>
           <p:cNvSpPr txBox="1"/>
           <p:nvPr/>
         </p:nvSpPr>
@@ -13563,7 +13636,7 @@
       </p:sp>
       <p:sp>
         <p:nvSpPr>
-          <p:cNvPr id="30" name="o91"/>
+          <p:cNvPr id="30" name="o93"/>
           <p:cNvSpPr txBox="1"/>
           <p:nvPr/>
         </p:nvSpPr>
@@ -13602,7 +13675,7 @@
       </p:sp>
       <p:sp>
         <p:nvSpPr>
-          <p:cNvPr id="31" name="o92"/>
+          <p:cNvPr id="31" name="o94"/>
           <p:cNvSpPr txBox="1"/>
           <p:nvPr/>
         </p:nvSpPr>
@@ -13641,7 +13714,7 @@
       </p:sp>
       <p:sp>
         <p:nvSpPr>
-          <p:cNvPr id="32" name="o93"/>
+          <p:cNvPr id="32" name="o95"/>
           <p:cNvSpPr txBox="1"/>
           <p:nvPr/>
         </p:nvSpPr>
@@ -13680,7 +13753,7 @@
       </p:sp>
       <p:sp>
         <p:nvSpPr>
-          <p:cNvPr id="33" name="o94"/>
+          <p:cNvPr id="33" name="o96"/>
           <p:cNvSpPr txBox="1"/>
           <p:nvPr/>
         </p:nvSpPr>
@@ -13719,7 +13792,7 @@
       </p:sp>
       <p:sp>
         <p:nvSpPr>
-          <p:cNvPr id="34" name="o95"/>
+          <p:cNvPr id="34" name="o97"/>
           <p:cNvSpPr txBox="1"/>
           <p:nvPr/>
         </p:nvSpPr>
@@ -13758,7 +13831,7 @@
       </p:sp>
       <p:sp>
         <p:nvSpPr>
-          <p:cNvPr id="35" name="o96"/>
+          <p:cNvPr id="35" name="o98"/>
           <p:cNvSpPr/>
           <p:nvPr/>
         </p:nvSpPr>
@@ -13781,7 +13854,7 @@
       </p:sp>
       <p:sp>
         <p:nvSpPr>
-          <p:cNvPr id="36" name="o97"/>
+          <p:cNvPr id="36" name="o99"/>
           <p:cNvSpPr txBox="1"/>
           <p:nvPr/>
         </p:nvSpPr>
@@ -13820,7 +13893,7 @@
       </p:sp>
       <p:sp>
         <p:nvSpPr>
-          <p:cNvPr id="37" name="o98"/>
+          <p:cNvPr id="37" name="o100"/>
           <p:cNvSpPr txBox="1"/>
           <p:nvPr/>
         </p:nvSpPr>
@@ -13859,7 +13932,7 @@
       </p:sp>
       <p:sp>
         <p:nvSpPr>
-          <p:cNvPr id="38" name="o99"/>
+          <p:cNvPr id="38" name="o101"/>
           <p:cNvSpPr/>
           <p:nvPr/>
         </p:nvSpPr>
@@ -13879,7 +13952,7 @@
       </p:sp>
       <p:sp>
         <p:nvSpPr>
-          <p:cNvPr id="39" name="o100"/>
+          <p:cNvPr id="39" name="o102"/>
           <p:cNvSpPr/>
           <p:nvPr/>
         </p:nvSpPr>
@@ -13902,7 +13975,7 @@
       </p:sp>
       <p:sp>
         <p:nvSpPr>
-          <p:cNvPr id="40" name="o101"/>
+          <p:cNvPr id="40" name="o103"/>
           <p:cNvSpPr txBox="1"/>
           <p:nvPr/>
         </p:nvSpPr>
@@ -13941,7 +14014,7 @@
       </p:sp>
       <p:sp>
         <p:nvSpPr>
-          <p:cNvPr id="41" name="o102"/>
+          <p:cNvPr id="41" name="o104"/>
           <p:cNvSpPr txBox="1"/>
           <p:nvPr/>
         </p:nvSpPr>
@@ -13980,7 +14053,7 @@
       </p:sp>
       <p:sp>
         <p:nvSpPr>
-          <p:cNvPr id="42" name="o103"/>
+          <p:cNvPr id="42" name="o105"/>
           <p:cNvSpPr/>
           <p:nvPr/>
         </p:nvSpPr>
@@ -14000,7 +14073,7 @@
       </p:sp>
       <p:sp>
         <p:nvSpPr>
-          <p:cNvPr id="43" name="o104"/>
+          <p:cNvPr id="43" name="o106"/>
           <p:cNvSpPr/>
           <p:nvPr/>
         </p:nvSpPr>
@@ -14023,7 +14096,7 @@
       </p:sp>
       <p:sp>
         <p:nvSpPr>
-          <p:cNvPr id="44" name="o105"/>
+          <p:cNvPr id="44" name="o107"/>
           <p:cNvSpPr txBox="1"/>
           <p:nvPr/>
         </p:nvSpPr>
@@ -14062,7 +14135,7 @@
       </p:sp>
       <p:sp>
         <p:nvSpPr>
-          <p:cNvPr id="45" name="o106"/>
+          <p:cNvPr id="45" name="o108"/>
           <p:cNvSpPr txBox="1"/>
           <p:nvPr/>
         </p:nvSpPr>
@@ -14101,7 +14174,7 @@
       </p:sp>
       <p:sp>
         <p:nvSpPr>
-          <p:cNvPr id="46" name="o107"/>
+          <p:cNvPr id="46" name="o109"/>
           <p:cNvSpPr/>
           <p:nvPr/>
         </p:nvSpPr>
@@ -14121,7 +14194,7 @@
       </p:sp>
       <p:sp>
         <p:nvSpPr>
-          <p:cNvPr id="47" name="o108"/>
+          <p:cNvPr id="47" name="o110"/>
           <p:cNvSpPr/>
           <p:nvPr/>
         </p:nvSpPr>
@@ -14144,7 +14217,7 @@
       </p:sp>
       <p:sp>
         <p:nvSpPr>
-          <p:cNvPr id="48" name="o109"/>
+          <p:cNvPr id="48" name="o111"/>
           <p:cNvSpPr txBox="1"/>
           <p:nvPr/>
         </p:nvSpPr>
@@ -14183,7 +14256,7 @@
       </p:sp>
       <p:sp>
         <p:nvSpPr>
-          <p:cNvPr id="49" name="o110"/>
+          <p:cNvPr id="49" name="o112"/>
           <p:cNvSpPr txBox="1"/>
           <p:nvPr/>
         </p:nvSpPr>
@@ -14222,7 +14295,7 @@
       </p:sp>
       <p:sp>
         <p:nvSpPr>
-          <p:cNvPr id="50" name="o111"/>
+          <p:cNvPr id="50" name="o113"/>
           <p:cNvSpPr/>
           <p:nvPr/>
         </p:nvSpPr>
@@ -14242,7 +14315,7 @@
       </p:sp>
       <p:sp>
         <p:nvSpPr>
-          <p:cNvPr id="51" name="o112"/>
+          <p:cNvPr id="51" name="o114"/>
           <p:cNvSpPr/>
           <p:nvPr/>
         </p:nvSpPr>
@@ -14265,7 +14338,7 @@
       </p:sp>
       <p:sp>
         <p:nvSpPr>
-          <p:cNvPr id="52" name="o113"/>
+          <p:cNvPr id="52" name="o115"/>
           <p:cNvSpPr txBox="1"/>
           <p:nvPr/>
         </p:nvSpPr>
@@ -14304,7 +14377,7 @@
       </p:sp>
       <p:sp>
         <p:nvSpPr>
-          <p:cNvPr id="53" name="o114"/>
+          <p:cNvPr id="53" name="o116"/>
           <p:cNvSpPr txBox="1"/>
           <p:nvPr/>
         </p:nvSpPr>
@@ -14343,7 +14416,7 @@
       </p:sp>
       <p:sp>
         <p:nvSpPr>
-          <p:cNvPr id="54" name="o115"/>
+          <p:cNvPr id="54" name="o117"/>
           <p:cNvSpPr/>
           <p:nvPr/>
         </p:nvSpPr>
@@ -14363,7 +14436,7 @@
       </p:sp>
       <p:sp>
         <p:nvSpPr>
-          <p:cNvPr id="55" name="o116"/>
+          <p:cNvPr id="55" name="o118"/>
           <p:cNvSpPr/>
           <p:nvPr/>
         </p:nvSpPr>
@@ -14386,7 +14459,7 @@
       </p:sp>
       <p:sp>
         <p:nvSpPr>
-          <p:cNvPr id="56" name="o117"/>
+          <p:cNvPr id="56" name="o119"/>
           <p:cNvSpPr txBox="1"/>
           <p:nvPr/>
         </p:nvSpPr>
@@ -14414,7 +14487,7 @@
       </p:sp>
       <p:sp>
         <p:nvSpPr>
-          <p:cNvPr id="57" name="o118"/>
+          <p:cNvPr id="57" name="o120"/>
           <p:cNvSpPr txBox="1"/>
           <p:nvPr/>
         </p:nvSpPr>
@@ -14453,7 +14526,7 @@
       </p:sp>
       <p:sp>
         <p:nvSpPr>
-          <p:cNvPr id="58" name="o119"/>
+          <p:cNvPr id="58" name="o121"/>
           <p:cNvSpPr/>
           <p:nvPr/>
         </p:nvSpPr>
@@ -14473,7 +14546,7 @@
       </p:sp>
       <p:sp>
         <p:nvSpPr>
-          <p:cNvPr id="59" name="o120"/>
+          <p:cNvPr id="59" name="o122"/>
           <p:cNvSpPr/>
           <p:nvPr/>
         </p:nvSpPr>
@@ -14496,7 +14569,7 @@
       </p:sp>
       <p:sp>
         <p:nvSpPr>
-          <p:cNvPr id="60" name="o121"/>
+          <p:cNvPr id="60" name="o123"/>
           <p:cNvSpPr/>
           <p:nvPr/>
         </p:nvSpPr>
@@ -14521,7 +14594,7 @@
       </p:sp>
       <p:sp>
         <p:nvSpPr>
-          <p:cNvPr id="61" name="o122"/>
+          <p:cNvPr id="61" name="o124"/>
           <p:cNvSpPr txBox="1"/>
           <p:nvPr/>
         </p:nvSpPr>
@@ -14560,7 +14633,7 @@
       </p:sp>
       <p:sp>
         <p:nvSpPr>
-          <p:cNvPr id="62" name="o123"/>
+          <p:cNvPr id="62" name="o125"/>
           <p:cNvSpPr txBox="1"/>
           <p:nvPr/>
         </p:nvSpPr>
@@ -14599,7 +14672,7 @@
       </p:sp>
       <p:sp>
         <p:nvSpPr>
-          <p:cNvPr id="63" name="o124"/>
+          <p:cNvPr id="63" name="o126"/>
           <p:cNvSpPr txBox="1"/>
           <p:nvPr/>
         </p:nvSpPr>
@@ -14638,7 +14711,7 @@
       </p:sp>
       <p:sp>
         <p:nvSpPr>
-          <p:cNvPr id="64" name="o125"/>
+          <p:cNvPr id="64" name="o127"/>
           <p:cNvSpPr/>
           <p:nvPr/>
         </p:nvSpPr>
@@ -14663,7 +14736,7 @@
       </p:sp>
       <p:sp>
         <p:nvSpPr>
-          <p:cNvPr id="65" name="o126"/>
+          <p:cNvPr id="65" name="o128"/>
           <p:cNvSpPr txBox="1"/>
           <p:nvPr/>
         </p:nvSpPr>
@@ -14702,7 +14775,7 @@
       </p:sp>
       <p:sp>
         <p:nvSpPr>
-          <p:cNvPr id="66" name="o127"/>
+          <p:cNvPr id="66" name="o129"/>
           <p:cNvSpPr txBox="1"/>
           <p:nvPr/>
         </p:nvSpPr>
@@ -14741,7 +14814,7 @@
       </p:sp>
       <p:sp>
         <p:nvSpPr>
-          <p:cNvPr id="67" name="o128"/>
+          <p:cNvPr id="67" name="o130"/>
           <p:cNvSpPr txBox="1"/>
           <p:nvPr/>
         </p:nvSpPr>
@@ -14780,7 +14853,7 @@
       </p:sp>
       <p:sp>
         <p:nvSpPr>
-          <p:cNvPr id="68" name="o129"/>
+          <p:cNvPr id="68" name="o131"/>
           <p:cNvSpPr/>
           <p:nvPr/>
         </p:nvSpPr>
@@ -14800,7 +14873,7 @@
       </p:sp>
       <p:sp>
         <p:nvSpPr>
-          <p:cNvPr id="69" name="o130"/>
+          <p:cNvPr id="69" name="o132"/>
           <p:cNvSpPr/>
           <p:nvPr/>
         </p:nvSpPr>
@@ -14820,7 +14893,7 @@
       </p:sp>
       <p:sp>
         <p:nvSpPr>
-          <p:cNvPr id="70" name="o131"/>
+          <p:cNvPr id="70" name="o133"/>
           <p:cNvSpPr txBox="1"/>
           <p:nvPr/>
         </p:nvSpPr>
@@ -14887,7 +14960,7 @@
       </p:grpSpPr>
       <p:sp>
         <p:nvSpPr>
-          <p:cNvPr id="2" name="o132"/>
+          <p:cNvPr id="2" name="o134"/>
           <p:cNvSpPr txBox="1"/>
           <p:nvPr/>
         </p:nvSpPr>
@@ -14926,7 +14999,7 @@
       </p:sp>
       <p:sp>
         <p:nvSpPr>
-          <p:cNvPr id="3" name="o133"/>
+          <p:cNvPr id="3" name="o135"/>
           <p:cNvSpPr txBox="1"/>
           <p:nvPr/>
         </p:nvSpPr>
@@ -14968,7 +15041,7 @@
       </p:sp>
       <p:sp>
         <p:nvSpPr>
-          <p:cNvPr id="4" name="o134"/>
+          <p:cNvPr id="4" name="o136"/>
           <p:cNvSpPr txBox="1"/>
           <p:nvPr/>
         </p:nvSpPr>
@@ -15007,7 +15080,7 @@
       </p:sp>
       <p:sp>
         <p:nvSpPr>
-          <p:cNvPr id="5" name="o135"/>
+          <p:cNvPr id="5" name="o137"/>
           <p:cNvSpPr/>
           <p:nvPr/>
         </p:nvSpPr>
@@ -15030,7 +15103,7 @@
       </p:sp>
       <p:sp>
         <p:nvSpPr>
-          <p:cNvPr id="6" name="o136"/>
+          <p:cNvPr id="6" name="o138"/>
           <p:cNvSpPr txBox="1"/>
           <p:nvPr/>
         </p:nvSpPr>
@@ -15069,7 +15142,7 @@
       </p:sp>
       <p:sp>
         <p:nvSpPr>
-          <p:cNvPr id="7" name="o137"/>
+          <p:cNvPr id="7" name="o139"/>
           <p:cNvSpPr txBox="1"/>
           <p:nvPr/>
         </p:nvSpPr>
@@ -15108,7 +15181,7 @@
       </p:sp>
       <p:sp>
         <p:nvSpPr>
-          <p:cNvPr id="8" name="o138"/>
+          <p:cNvPr id="8" name="o140"/>
           <p:cNvSpPr txBox="1"/>
           <p:nvPr/>
         </p:nvSpPr>
@@ -15147,7 +15220,7 @@
       </p:sp>
       <p:sp>
         <p:nvSpPr>
-          <p:cNvPr id="9" name="o139"/>
+          <p:cNvPr id="9" name="o141"/>
           <p:cNvSpPr txBox="1"/>
           <p:nvPr/>
         </p:nvSpPr>
@@ -15186,7 +15259,7 @@
       </p:sp>
       <p:sp>
         <p:nvSpPr>
-          <p:cNvPr id="10" name="o140"/>
+          <p:cNvPr id="10" name="o142"/>
           <p:cNvSpPr txBox="1"/>
           <p:nvPr/>
         </p:nvSpPr>
@@ -15268,7 +15341,7 @@
       </p:sp>
       <p:sp>
         <p:nvSpPr>
-          <p:cNvPr id="11" name="o141"/>
+          <p:cNvPr id="11" name="o143"/>
           <p:cNvSpPr/>
           <p:nvPr/>
         </p:nvSpPr>
@@ -15291,7 +15364,7 @@
       </p:sp>
       <p:sp>
         <p:nvSpPr>
-          <p:cNvPr id="12" name="o142"/>
+          <p:cNvPr id="12" name="o144"/>
           <p:cNvSpPr txBox="1"/>
           <p:nvPr/>
         </p:nvSpPr>
@@ -15330,7 +15403,7 @@
       </p:sp>
       <p:sp>
         <p:nvSpPr>
-          <p:cNvPr id="13" name="o143"/>
+          <p:cNvPr id="13" name="o145"/>
           <p:cNvSpPr txBox="1"/>
           <p:nvPr/>
         </p:nvSpPr>
@@ -15369,7 +15442,7 @@
       </p:sp>
       <p:sp>
         <p:nvSpPr>
-          <p:cNvPr id="14" name="o144"/>
+          <p:cNvPr id="14" name="o146"/>
           <p:cNvSpPr txBox="1"/>
           <p:nvPr/>
         </p:nvSpPr>
@@ -15408,7 +15481,7 @@
       </p:sp>
       <p:sp>
         <p:nvSpPr>
-          <p:cNvPr id="15" name="o145"/>
+          <p:cNvPr id="15" name="o147"/>
           <p:cNvSpPr txBox="1"/>
           <p:nvPr/>
         </p:nvSpPr>
@@ -15447,7 +15520,7 @@
       </p:sp>
       <p:sp>
         <p:nvSpPr>
-          <p:cNvPr id="16" name="o146"/>
+          <p:cNvPr id="16" name="o148"/>
           <p:cNvSpPr txBox="1"/>
           <p:nvPr/>
         </p:nvSpPr>
@@ -15529,7 +15602,7 @@
       </p:sp>
       <p:sp>
         <p:nvSpPr>
-          <p:cNvPr id="17" name="o147"/>
+          <p:cNvPr id="17" name="o149"/>
           <p:cNvSpPr/>
           <p:nvPr/>
         </p:nvSpPr>
@@ -15552,7 +15625,7 @@
       </p:sp>
       <p:sp>
         <p:nvSpPr>
-          <p:cNvPr id="18" name="o148"/>
+          <p:cNvPr id="18" name="o150"/>
           <p:cNvSpPr txBox="1"/>
           <p:nvPr/>
         </p:nvSpPr>
@@ -15591,7 +15664,7 @@
       </p:sp>
       <p:sp>
         <p:nvSpPr>
-          <p:cNvPr id="19" name="o149"/>
+          <p:cNvPr id="19" name="o151"/>
           <p:cNvSpPr txBox="1"/>
           <p:nvPr/>
         </p:nvSpPr>
@@ -15630,7 +15703,7 @@
       </p:sp>
       <p:sp>
         <p:nvSpPr>
-          <p:cNvPr id="20" name="o150"/>
+          <p:cNvPr id="20" name="o152"/>
           <p:cNvSpPr txBox="1"/>
           <p:nvPr/>
         </p:nvSpPr>
@@ -15669,7 +15742,7 @@
       </p:sp>
       <p:sp>
         <p:nvSpPr>
-          <p:cNvPr id="21" name="o151"/>
+          <p:cNvPr id="21" name="o153"/>
           <p:cNvSpPr txBox="1"/>
           <p:nvPr/>
         </p:nvSpPr>
@@ -15708,7 +15781,7 @@
       </p:sp>
       <p:sp>
         <p:nvSpPr>
-          <p:cNvPr id="22" name="o152"/>
+          <p:cNvPr id="22" name="o154"/>
           <p:cNvSpPr txBox="1"/>
           <p:nvPr/>
         </p:nvSpPr>
@@ -15790,7 +15863,7 @@
       </p:sp>
       <p:sp>
         <p:nvSpPr>
-          <p:cNvPr id="23" name="o153"/>
+          <p:cNvPr id="23" name="o155"/>
           <p:cNvSpPr/>
           <p:nvPr/>
         </p:nvSpPr>
@@ -15813,7 +15886,7 @@
       </p:sp>
       <p:sp>
         <p:nvSpPr>
-          <p:cNvPr id="24" name="o154"/>
+          <p:cNvPr id="24" name="o156"/>
           <p:cNvSpPr txBox="1"/>
           <p:nvPr/>
         </p:nvSpPr>
@@ -15852,7 +15925,7 @@
       </p:sp>
       <p:sp>
         <p:nvSpPr>
-          <p:cNvPr id="25" name="o155"/>
+          <p:cNvPr id="25" name="o157"/>
           <p:cNvSpPr txBox="1"/>
           <p:nvPr/>
         </p:nvSpPr>
@@ -15891,7 +15964,7 @@
       </p:sp>
       <p:sp>
         <p:nvSpPr>
-          <p:cNvPr id="26" name="o156"/>
+          <p:cNvPr id="26" name="o158"/>
           <p:cNvSpPr txBox="1"/>
           <p:nvPr/>
         </p:nvSpPr>
@@ -15930,7 +16003,7 @@
       </p:sp>
       <p:sp>
         <p:nvSpPr>
-          <p:cNvPr id="27" name="o157"/>
+          <p:cNvPr id="27" name="o159"/>
           <p:cNvSpPr/>
           <p:nvPr/>
         </p:nvSpPr>
@@ -15950,7 +16023,7 @@
       </p:sp>
       <p:sp>
         <p:nvSpPr>
-          <p:cNvPr id="28" name="o158"/>
+          <p:cNvPr id="28" name="o160"/>
           <p:cNvSpPr txBox="1"/>
           <p:nvPr/>
         </p:nvSpPr>
@@ -15989,7 +16062,7 @@
       </p:sp>
       <p:sp>
         <p:nvSpPr>
-          <p:cNvPr id="29" name="o159"/>
+          <p:cNvPr id="29" name="o161"/>
           <p:cNvSpPr txBox="1"/>
           <p:nvPr/>
         </p:nvSpPr>
@@ -16028,7 +16101,7 @@
       </p:sp>
       <p:sp>
         <p:nvSpPr>
-          <p:cNvPr id="30" name="o160"/>
+          <p:cNvPr id="30" name="o162"/>
           <p:cNvSpPr txBox="1"/>
           <p:nvPr/>
         </p:nvSpPr>
@@ -16067,7 +16140,7 @@
       </p:sp>
       <p:sp>
         <p:nvSpPr>
-          <p:cNvPr id="31" name="o161"/>
+          <p:cNvPr id="31" name="o163"/>
           <p:cNvSpPr/>
           <p:nvPr/>
         </p:nvSpPr>
@@ -16090,7 +16163,7 @@
       </p:sp>
       <p:sp>
         <p:nvSpPr>
-          <p:cNvPr id="32" name="o162"/>
+          <p:cNvPr id="32" name="o164"/>
           <p:cNvSpPr txBox="1"/>
           <p:nvPr/>
         </p:nvSpPr>
@@ -16129,7 +16202,7 @@
       </p:sp>
       <p:sp>
         <p:nvSpPr>
-          <p:cNvPr id="33" name="o163"/>
+          <p:cNvPr id="33" name="o165"/>
           <p:cNvSpPr txBox="1"/>
           <p:nvPr/>
         </p:nvSpPr>
@@ -16168,7 +16241,7 @@
       </p:sp>
       <p:sp>
         <p:nvSpPr>
-          <p:cNvPr id="34" name="o164"/>
+          <p:cNvPr id="34" name="o166"/>
           <p:cNvSpPr txBox="1"/>
           <p:nvPr/>
         </p:nvSpPr>
@@ -16207,7 +16280,7 @@
       </p:sp>
       <p:sp>
         <p:nvSpPr>
-          <p:cNvPr id="35" name="o165"/>
+          <p:cNvPr id="35" name="o167"/>
           <p:cNvSpPr/>
           <p:nvPr/>
         </p:nvSpPr>
@@ -16230,7 +16303,7 @@
       </p:sp>
       <p:sp>
         <p:nvSpPr>
-          <p:cNvPr id="36" name="o166"/>
+          <p:cNvPr id="36" name="o168"/>
           <p:cNvSpPr txBox="1"/>
           <p:nvPr/>
         </p:nvSpPr>
@@ -16269,7 +16342,7 @@
       </p:sp>
       <p:sp>
         <p:nvSpPr>
-          <p:cNvPr id="37" name="o167"/>
+          <p:cNvPr id="37" name="o169"/>
           <p:cNvSpPr txBox="1"/>
           <p:nvPr/>
         </p:nvSpPr>
@@ -16308,7 +16381,7 @@
       </p:sp>
       <p:sp>
         <p:nvSpPr>
-          <p:cNvPr id="38" name="o168"/>
+          <p:cNvPr id="38" name="o170"/>
           <p:cNvSpPr txBox="1"/>
           <p:nvPr/>
         </p:nvSpPr>
@@ -16347,7 +16420,7 @@
       </p:sp>
       <p:sp>
         <p:nvSpPr>
-          <p:cNvPr id="39" name="o169"/>
+          <p:cNvPr id="39" name="o171"/>
           <p:cNvSpPr/>
           <p:nvPr/>
         </p:nvSpPr>
@@ -16370,7 +16443,7 @@
       </p:sp>
       <p:sp>
         <p:nvSpPr>
-          <p:cNvPr id="40" name="o170"/>
+          <p:cNvPr id="40" name="o172"/>
           <p:cNvSpPr txBox="1"/>
           <p:nvPr/>
         </p:nvSpPr>
@@ -16409,7 +16482,7 @@
       </p:sp>
       <p:sp>
         <p:nvSpPr>
-          <p:cNvPr id="41" name="o171"/>
+          <p:cNvPr id="41" name="o173"/>
           <p:cNvSpPr txBox="1"/>
           <p:nvPr/>
         </p:nvSpPr>
@@ -16448,7 +16521,7 @@
       </p:sp>
       <p:sp>
         <p:nvSpPr>
-          <p:cNvPr id="42" name="o172"/>
+          <p:cNvPr id="42" name="o174"/>
           <p:cNvSpPr txBox="1"/>
           <p:nvPr/>
         </p:nvSpPr>
@@ -16487,7 +16560,7 @@
       </p:sp>
       <p:sp>
         <p:nvSpPr>
-          <p:cNvPr id="43" name="o173"/>
+          <p:cNvPr id="43" name="o175"/>
           <p:cNvSpPr/>
           <p:nvPr/>
         </p:nvSpPr>
@@ -16510,7 +16583,7 @@
       </p:sp>
       <p:sp>
         <p:nvSpPr>
-          <p:cNvPr id="44" name="o174"/>
+          <p:cNvPr id="44" name="o176"/>
           <p:cNvSpPr txBox="1"/>
           <p:nvPr/>
         </p:nvSpPr>
@@ -16549,7 +16622,7 @@
       </p:sp>
       <p:sp>
         <p:nvSpPr>
-          <p:cNvPr id="45" name="o175"/>
+          <p:cNvPr id="45" name="o177"/>
           <p:cNvSpPr txBox="1"/>
           <p:nvPr/>
         </p:nvSpPr>
@@ -16588,7 +16661,7 @@
       </p:sp>
       <p:sp>
         <p:nvSpPr>
-          <p:cNvPr id="46" name="o176"/>
+          <p:cNvPr id="46" name="o178"/>
           <p:cNvSpPr txBox="1"/>
           <p:nvPr/>
         </p:nvSpPr>
@@ -16627,7 +16700,7 @@
       </p:sp>
       <p:sp>
         <p:nvSpPr>
-          <p:cNvPr id="47" name="o177"/>
+          <p:cNvPr id="47" name="o179"/>
           <p:cNvSpPr/>
           <p:nvPr/>
         </p:nvSpPr>
@@ -16650,7 +16723,7 @@
       </p:sp>
       <p:sp>
         <p:nvSpPr>
-          <p:cNvPr id="48" name="o178"/>
+          <p:cNvPr id="48" name="o180"/>
           <p:cNvSpPr/>
           <p:nvPr/>
         </p:nvSpPr>
@@ -16673,7 +16746,7 @@
       </p:sp>
       <p:sp>
         <p:nvSpPr>
-          <p:cNvPr id="49" name="o179"/>
+          <p:cNvPr id="49" name="o181"/>
           <p:cNvSpPr/>
           <p:nvPr/>
         </p:nvSpPr>
@@ -16693,7 +16766,7 @@
       </p:sp>
       <p:sp>
         <p:nvSpPr>
-          <p:cNvPr id="50" name="o180"/>
+          <p:cNvPr id="50" name="o182"/>
           <p:cNvSpPr/>
           <p:nvPr/>
         </p:nvSpPr>
@@ -16713,7 +16786,7 @@
       </p:sp>
       <p:sp>
         <p:nvSpPr>
-          <p:cNvPr id="51" name="o181"/>
+          <p:cNvPr id="51" name="o183"/>
           <p:cNvSpPr txBox="1"/>
           <p:nvPr/>
         </p:nvSpPr>
@@ -16800,7 +16873,7 @@
       </p:grpSpPr>
       <p:sp>
         <p:nvSpPr>
-          <p:cNvPr id="2" name="o182"/>
+          <p:cNvPr id="2" name="o184"/>
           <p:cNvSpPr txBox="1"/>
           <p:nvPr/>
         </p:nvSpPr>
@@ -16839,7 +16912,7 @@
       </p:sp>
       <p:sp>
         <p:nvSpPr>
-          <p:cNvPr id="3" name="o183"/>
+          <p:cNvPr id="3" name="o185"/>
           <p:cNvSpPr txBox="1"/>
           <p:nvPr/>
         </p:nvSpPr>
@@ -16881,7 +16954,7 @@
       </p:sp>
       <p:sp>
         <p:nvSpPr>
-          <p:cNvPr id="4" name="o184"/>
+          <p:cNvPr id="4" name="o186"/>
           <p:cNvSpPr txBox="1"/>
           <p:nvPr/>
         </p:nvSpPr>
@@ -16920,7 +16993,7 @@
       </p:sp>
       <p:sp>
         <p:nvSpPr>
-          <p:cNvPr id="5" name="o185"/>
+          <p:cNvPr id="5" name="o187"/>
           <p:cNvSpPr/>
           <p:nvPr/>
         </p:nvSpPr>
@@ -16943,7 +17016,7 @@
       </p:sp>
       <p:sp>
         <p:nvSpPr>
-          <p:cNvPr id="6" name="o186"/>
+          <p:cNvPr id="6" name="o188"/>
           <p:cNvSpPr txBox="1"/>
           <p:nvPr/>
         </p:nvSpPr>
@@ -16982,7 +17055,7 @@
       </p:sp>
       <p:sp>
         <p:nvSpPr>
-          <p:cNvPr id="7" name="o187"/>
+          <p:cNvPr id="7" name="o189"/>
           <p:cNvSpPr txBox="1"/>
           <p:nvPr/>
         </p:nvSpPr>
@@ -17021,7 +17094,7 @@
       </p:sp>
       <p:sp>
         <p:nvSpPr>
-          <p:cNvPr id="8" name="o188"/>
+          <p:cNvPr id="8" name="o190"/>
           <p:cNvSpPr txBox="1"/>
           <p:nvPr/>
         </p:nvSpPr>
@@ -17060,7 +17133,7 @@
       </p:sp>
       <p:sp>
         <p:nvSpPr>
-          <p:cNvPr id="9" name="o189"/>
+          <p:cNvPr id="9" name="o191"/>
           <p:cNvSpPr txBox="1"/>
           <p:nvPr/>
         </p:nvSpPr>
@@ -17099,7 +17172,7 @@
       </p:sp>
       <p:graphicFrame>
         <p:nvGraphicFramePr>
-          <p:cNvPr id="10" name="o190" descr=""/>
+          <p:cNvPr id="10" name="o192" descr=""/>
           <p:cNvGraphicFramePr/>
           <p:nvPr/>
         </p:nvGraphicFramePr>
@@ -17115,7 +17188,7 @@
       </p:graphicFrame>
       <p:sp>
         <p:nvSpPr>
-          <p:cNvPr id="11" name="o191"/>
+          <p:cNvPr id="11" name="o193"/>
           <p:cNvSpPr txBox="1"/>
           <p:nvPr/>
         </p:nvSpPr>
@@ -17154,7 +17227,7 @@
       </p:sp>
       <p:sp>
         <p:nvSpPr>
-          <p:cNvPr id="12" name="o192"/>
+          <p:cNvPr id="12" name="o194"/>
           <p:cNvSpPr txBox="1"/>
           <p:nvPr/>
         </p:nvSpPr>
@@ -17193,7 +17266,7 @@
       </p:sp>
       <p:sp>
         <p:nvSpPr>
-          <p:cNvPr id="13" name="o193"/>
+          <p:cNvPr id="13" name="o195"/>
           <p:cNvSpPr/>
           <p:nvPr/>
         </p:nvSpPr>
@@ -17213,7 +17286,7 @@
       </p:sp>
       <p:sp>
         <p:nvSpPr>
-          <p:cNvPr id="14" name="o194"/>
+          <p:cNvPr id="14" name="o196"/>
           <p:cNvSpPr txBox="1"/>
           <p:nvPr/>
         </p:nvSpPr>
@@ -17252,7 +17325,7 @@
       </p:sp>
       <p:sp>
         <p:nvSpPr>
-          <p:cNvPr id="15" name="o195"/>
+          <p:cNvPr id="15" name="o197"/>
           <p:cNvSpPr txBox="1"/>
           <p:nvPr/>
         </p:nvSpPr>
@@ -17291,7 +17364,7 @@
       </p:sp>
       <p:sp>
         <p:nvSpPr>
-          <p:cNvPr id="16" name="o196"/>
+          <p:cNvPr id="16" name="o198"/>
           <p:cNvSpPr txBox="1"/>
           <p:nvPr/>
         </p:nvSpPr>
@@ -17330,7 +17403,7 @@
       </p:sp>
       <p:sp>
         <p:nvSpPr>
-          <p:cNvPr id="17" name="o197"/>
+          <p:cNvPr id="17" name="o199"/>
           <p:cNvSpPr txBox="1"/>
           <p:nvPr/>
         </p:nvSpPr>
@@ -17369,7 +17442,7 @@
       </p:sp>
       <p:sp>
         <p:nvSpPr>
-          <p:cNvPr id="18" name="o198"/>
+          <p:cNvPr id="18" name="o200"/>
           <p:cNvSpPr txBox="1"/>
           <p:nvPr/>
         </p:nvSpPr>
@@ -17408,7 +17481,7 @@
       </p:sp>
       <p:sp>
         <p:nvSpPr>
-          <p:cNvPr id="19" name="o199"/>
+          <p:cNvPr id="19" name="o201"/>
           <p:cNvSpPr/>
           <p:nvPr/>
         </p:nvSpPr>
@@ -17431,7 +17504,7 @@
       </p:sp>
       <p:sp>
         <p:nvSpPr>
-          <p:cNvPr id="20" name="o200"/>
+          <p:cNvPr id="20" name="o202"/>
           <p:cNvSpPr txBox="1"/>
           <p:nvPr/>
         </p:nvSpPr>
@@ -17470,7 +17543,7 @@
       </p:sp>
       <p:sp>
         <p:nvSpPr>
-          <p:cNvPr id="21" name="o201"/>
+          <p:cNvPr id="21" name="o203"/>
           <p:cNvSpPr txBox="1"/>
           <p:nvPr/>
         </p:nvSpPr>
@@ -17509,7 +17582,7 @@
       </p:sp>
       <p:sp>
         <p:nvSpPr>
-          <p:cNvPr id="22" name="o202"/>
+          <p:cNvPr id="22" name="o204"/>
           <p:cNvSpPr txBox="1"/>
           <p:nvPr/>
         </p:nvSpPr>
@@ -17548,7 +17621,7 @@
       </p:sp>
       <p:sp>
         <p:nvSpPr>
-          <p:cNvPr id="23" name="o203"/>
+          <p:cNvPr id="23" name="o205"/>
           <p:cNvSpPr txBox="1"/>
           <p:nvPr/>
         </p:nvSpPr>
@@ -17587,7 +17660,7 @@
       </p:sp>
       <p:sp>
         <p:nvSpPr>
-          <p:cNvPr id="24" name="o204"/>
+          <p:cNvPr id="24" name="o206"/>
           <p:cNvSpPr txBox="1"/>
           <p:nvPr/>
         </p:nvSpPr>
@@ -17626,7 +17699,7 @@
       </p:sp>
       <p:sp>
         <p:nvSpPr>
-          <p:cNvPr id="25" name="o205"/>
+          <p:cNvPr id="25" name="o207"/>
           <p:cNvSpPr/>
           <p:nvPr/>
         </p:nvSpPr>
@@ -17649,7 +17722,7 @@
       </p:sp>
       <p:sp>
         <p:nvSpPr>
-          <p:cNvPr id="26" name="o206"/>
+          <p:cNvPr id="26" name="o208"/>
           <p:cNvSpPr txBox="1"/>
           <p:nvPr/>
         </p:nvSpPr>
@@ -17688,7 +17761,7 @@
       </p:sp>
       <p:sp>
         <p:nvSpPr>
-          <p:cNvPr id="27" name="o207"/>
+          <p:cNvPr id="27" name="o209"/>
           <p:cNvSpPr txBox="1"/>
           <p:nvPr/>
         </p:nvSpPr>
@@ -17727,7 +17800,7 @@
       </p:sp>
       <p:sp>
         <p:nvSpPr>
-          <p:cNvPr id="28" name="o208"/>
+          <p:cNvPr id="28" name="o210"/>
           <p:cNvSpPr txBox="1"/>
           <p:nvPr/>
         </p:nvSpPr>
@@ -17766,7 +17839,7 @@
       </p:sp>
       <p:sp>
         <p:nvSpPr>
-          <p:cNvPr id="29" name="o209"/>
+          <p:cNvPr id="29" name="o211"/>
           <p:cNvSpPr txBox="1"/>
           <p:nvPr/>
         </p:nvSpPr>
@@ -17805,7 +17878,7 @@
       </p:sp>
       <p:sp>
         <p:nvSpPr>
-          <p:cNvPr id="30" name="o210"/>
+          <p:cNvPr id="30" name="o212"/>
           <p:cNvSpPr txBox="1"/>
           <p:nvPr/>
         </p:nvSpPr>
@@ -17844,7 +17917,7 @@
       </p:sp>
       <p:sp>
         <p:nvSpPr>
-          <p:cNvPr id="31" name="o211"/>
+          <p:cNvPr id="31" name="o213"/>
           <p:cNvSpPr/>
           <p:nvPr/>
         </p:nvSpPr>
@@ -17867,7 +17940,7 @@
       </p:sp>
       <p:sp>
         <p:nvSpPr>
-          <p:cNvPr id="32" name="o212"/>
+          <p:cNvPr id="32" name="o214"/>
           <p:cNvSpPr/>
           <p:nvPr/>
         </p:nvSpPr>
@@ -17890,7 +17963,7 @@
       </p:sp>
       <p:sp>
         <p:nvSpPr>
-          <p:cNvPr id="33" name="o213"/>
+          <p:cNvPr id="33" name="o215"/>
           <p:cNvSpPr txBox="1"/>
           <p:nvPr/>
         </p:nvSpPr>
@@ -17929,7 +18002,7 @@
       </p:sp>
       <p:sp>
         <p:nvSpPr>
-          <p:cNvPr id="34" name="o214"/>
+          <p:cNvPr id="34" name="o216"/>
           <p:cNvSpPr/>
           <p:nvPr/>
         </p:nvSpPr>
@@ -17949,7 +18022,7 @@
       </p:sp>
       <p:sp>
         <p:nvSpPr>
-          <p:cNvPr id="35" name="o215"/>
+          <p:cNvPr id="35" name="o217"/>
           <p:cNvSpPr txBox="1"/>
           <p:nvPr/>
         </p:nvSpPr>
@@ -17988,7 +18061,7 @@
       </p:sp>
       <p:sp>
         <p:nvSpPr>
-          <p:cNvPr id="36" name="o216"/>
+          <p:cNvPr id="36" name="o218"/>
           <p:cNvSpPr txBox="1"/>
           <p:nvPr/>
         </p:nvSpPr>
@@ -18027,7 +18100,7 @@
       </p:sp>
       <p:sp>
         <p:nvSpPr>
-          <p:cNvPr id="37" name="o217"/>
+          <p:cNvPr id="37" name="o219"/>
           <p:cNvSpPr/>
           <p:nvPr/>
         </p:nvSpPr>
@@ -18050,7 +18123,7 @@
       </p:sp>
       <p:sp>
         <p:nvSpPr>
-          <p:cNvPr id="38" name="o218"/>
+          <p:cNvPr id="38" name="o220"/>
           <p:cNvSpPr/>
           <p:nvPr/>
         </p:nvSpPr>
@@ -18070,7 +18143,7 @@
       </p:sp>
       <p:sp>
         <p:nvSpPr>
-          <p:cNvPr id="39" name="o219"/>
+          <p:cNvPr id="39" name="o221"/>
           <p:cNvSpPr txBox="1"/>
           <p:nvPr/>
         </p:nvSpPr>
@@ -18109,7 +18182,7 @@
       </p:sp>
       <p:sp>
         <p:nvSpPr>
-          <p:cNvPr id="40" name="o220"/>
+          <p:cNvPr id="40" name="o222"/>
           <p:cNvSpPr txBox="1"/>
           <p:nvPr/>
         </p:nvSpPr>
@@ -18148,7 +18221,7 @@
       </p:sp>
       <p:sp>
         <p:nvSpPr>
-          <p:cNvPr id="41" name="o221"/>
+          <p:cNvPr id="41" name="o223"/>
           <p:cNvSpPr/>
           <p:nvPr/>
         </p:nvSpPr>
@@ -18171,7 +18244,7 @@
       </p:sp>
       <p:sp>
         <p:nvSpPr>
-          <p:cNvPr id="42" name="o222"/>
+          <p:cNvPr id="42" name="o224"/>
           <p:cNvSpPr/>
           <p:nvPr/>
         </p:nvSpPr>
@@ -18191,7 +18264,7 @@
       </p:sp>
       <p:sp>
         <p:nvSpPr>
-          <p:cNvPr id="43" name="o223"/>
+          <p:cNvPr id="43" name="o225"/>
           <p:cNvSpPr txBox="1"/>
           <p:nvPr/>
         </p:nvSpPr>
@@ -18230,7 +18303,7 @@
       </p:sp>
       <p:sp>
         <p:nvSpPr>
-          <p:cNvPr id="44" name="o224"/>
+          <p:cNvPr id="44" name="o226"/>
           <p:cNvSpPr txBox="1"/>
           <p:nvPr/>
         </p:nvSpPr>
@@ -18269,7 +18342,7 @@
       </p:sp>
       <p:sp>
         <p:nvSpPr>
-          <p:cNvPr id="45" name="o225"/>
+          <p:cNvPr id="45" name="o227"/>
           <p:cNvSpPr/>
           <p:nvPr/>
         </p:nvSpPr>
@@ -18292,7 +18365,7 @@
       </p:sp>
       <p:sp>
         <p:nvSpPr>
-          <p:cNvPr id="46" name="o226"/>
+          <p:cNvPr id="46" name="o228"/>
           <p:cNvSpPr/>
           <p:nvPr/>
         </p:nvSpPr>
@@ -18312,7 +18385,7 @@
       </p:sp>
       <p:sp>
         <p:nvSpPr>
-          <p:cNvPr id="47" name="o227"/>
+          <p:cNvPr id="47" name="o229"/>
           <p:cNvSpPr txBox="1"/>
           <p:nvPr/>
         </p:nvSpPr>
@@ -18351,7 +18424,7 @@
       </p:sp>
       <p:sp>
         <p:nvSpPr>
-          <p:cNvPr id="48" name="o228"/>
+          <p:cNvPr id="48" name="o230"/>
           <p:cNvSpPr txBox="1"/>
           <p:nvPr/>
         </p:nvSpPr>
@@ -18390,7 +18463,7 @@
       </p:sp>
       <p:sp>
         <p:nvSpPr>
-          <p:cNvPr id="49" name="o229"/>
+          <p:cNvPr id="49" name="o231"/>
           <p:cNvSpPr/>
           <p:nvPr/>
         </p:nvSpPr>
@@ -18413,7 +18486,7 @@
       </p:sp>
       <p:sp>
         <p:nvSpPr>
-          <p:cNvPr id="50" name="o230"/>
+          <p:cNvPr id="50" name="o232"/>
           <p:cNvSpPr/>
           <p:nvPr/>
         </p:nvSpPr>
@@ -18433,7 +18506,7 @@
       </p:sp>
       <p:sp>
         <p:nvSpPr>
-          <p:cNvPr id="51" name="o231"/>
+          <p:cNvPr id="51" name="o233"/>
           <p:cNvSpPr txBox="1"/>
           <p:nvPr/>
         </p:nvSpPr>
@@ -18472,7 +18545,7 @@
       </p:sp>
       <p:sp>
         <p:nvSpPr>
-          <p:cNvPr id="52" name="o232"/>
+          <p:cNvPr id="52" name="o234"/>
           <p:cNvSpPr txBox="1"/>
           <p:nvPr/>
         </p:nvSpPr>
@@ -18511,7 +18584,7 @@
       </p:sp>
       <p:sp>
         <p:nvSpPr>
-          <p:cNvPr id="53" name="o233"/>
+          <p:cNvPr id="53" name="o235"/>
           <p:cNvSpPr/>
           <p:nvPr/>
         </p:nvSpPr>
@@ -18534,7 +18607,7 @@
       </p:sp>
       <p:sp>
         <p:nvSpPr>
-          <p:cNvPr id="54" name="o234"/>
+          <p:cNvPr id="54" name="o236"/>
           <p:cNvSpPr/>
           <p:nvPr/>
         </p:nvSpPr>
@@ -18554,7 +18627,7 @@
       </p:sp>
       <p:sp>
         <p:nvSpPr>
-          <p:cNvPr id="55" name="o235"/>
+          <p:cNvPr id="55" name="o237"/>
           <p:cNvSpPr txBox="1"/>
           <p:nvPr/>
         </p:nvSpPr>
@@ -18593,7 +18666,7 @@
       </p:sp>
       <p:sp>
         <p:nvSpPr>
-          <p:cNvPr id="56" name="o236"/>
+          <p:cNvPr id="56" name="o238"/>
           <p:cNvSpPr txBox="1"/>
           <p:nvPr/>
         </p:nvSpPr>
@@ -18632,7 +18705,7 @@
       </p:sp>
       <p:sp>
         <p:nvSpPr>
-          <p:cNvPr id="57" name="o237"/>
+          <p:cNvPr id="57" name="o239"/>
           <p:cNvSpPr/>
           <p:nvPr/>
         </p:nvSpPr>
@@ -18655,7 +18728,7 @@
       </p:sp>
       <p:sp>
         <p:nvSpPr>
-          <p:cNvPr id="58" name="o238"/>
+          <p:cNvPr id="58" name="o240"/>
           <p:cNvSpPr/>
           <p:nvPr/>
         </p:nvSpPr>
@@ -18675,7 +18748,7 @@
       </p:sp>
       <p:sp>
         <p:nvSpPr>
-          <p:cNvPr id="59" name="o239"/>
+          <p:cNvPr id="59" name="o241"/>
           <p:cNvSpPr txBox="1"/>
           <p:nvPr/>
         </p:nvSpPr>
@@ -18714,7 +18787,7 @@
       </p:sp>
       <p:sp>
         <p:nvSpPr>
-          <p:cNvPr id="60" name="o240"/>
+          <p:cNvPr id="60" name="o242"/>
           <p:cNvSpPr txBox="1"/>
           <p:nvPr/>
         </p:nvSpPr>
@@ -18753,7 +18826,7 @@
       </p:sp>
       <p:sp>
         <p:nvSpPr>
-          <p:cNvPr id="61" name="o241"/>
+          <p:cNvPr id="61" name="o243"/>
           <p:cNvSpPr/>
           <p:nvPr/>
         </p:nvSpPr>
@@ -18773,7 +18846,7 @@
       </p:sp>
       <p:sp>
         <p:nvSpPr>
-          <p:cNvPr id="62" name="o242"/>
+          <p:cNvPr id="62" name="o244"/>
           <p:cNvSpPr txBox="1"/>
           <p:nvPr/>
         </p:nvSpPr>
@@ -18812,7 +18885,7 @@
       </p:sp>
       <p:sp>
         <p:nvSpPr>
-          <p:cNvPr id="63" name="o243"/>
+          <p:cNvPr id="63" name="o245"/>
           <p:cNvSpPr txBox="1"/>
           <p:nvPr/>
         </p:nvSpPr>
@@ -18851,7 +18924,7 @@
       </p:sp>
       <p:sp>
         <p:nvSpPr>
-          <p:cNvPr id="64" name="o244"/>
+          <p:cNvPr id="64" name="o246"/>
           <p:cNvSpPr/>
           <p:nvPr/>
         </p:nvSpPr>
@@ -18874,7 +18947,7 @@
       </p:sp>
       <p:sp>
         <p:nvSpPr>
-          <p:cNvPr id="65" name="o245"/>
+          <p:cNvPr id="65" name="o247"/>
           <p:cNvSpPr txBox="1"/>
           <p:nvPr/>
         </p:nvSpPr>
@@ -18913,7 +18986,7 @@
       </p:sp>
       <p:sp>
         <p:nvSpPr>
-          <p:cNvPr id="66" name="o246"/>
+          <p:cNvPr id="66" name="o248"/>
           <p:cNvSpPr/>
           <p:nvPr/>
         </p:nvSpPr>
@@ -18938,7 +19011,7 @@
       </p:sp>
       <p:sp>
         <p:nvSpPr>
-          <p:cNvPr id="67" name="o247"/>
+          <p:cNvPr id="67" name="o249"/>
           <p:cNvSpPr txBox="1"/>
           <p:nvPr/>
         </p:nvSpPr>
@@ -18977,7 +19050,7 @@
       </p:sp>
       <p:sp>
         <p:nvSpPr>
-          <p:cNvPr id="68" name="o248"/>
+          <p:cNvPr id="68" name="o250"/>
           <p:cNvSpPr txBox="1"/>
           <p:nvPr/>
         </p:nvSpPr>
@@ -19016,7 +19089,7 @@
       </p:sp>
       <p:sp>
         <p:nvSpPr>
-          <p:cNvPr id="69" name="o249"/>
+          <p:cNvPr id="69" name="o251"/>
           <p:cNvSpPr txBox="1"/>
           <p:nvPr/>
         </p:nvSpPr>
@@ -19055,7 +19128,7 @@
       </p:sp>
       <p:sp>
         <p:nvSpPr>
-          <p:cNvPr id="70" name="o250"/>
+          <p:cNvPr id="70" name="o252"/>
           <p:cNvSpPr/>
           <p:nvPr/>
         </p:nvSpPr>
@@ -19080,7 +19153,7 @@
       </p:sp>
       <p:sp>
         <p:nvSpPr>
-          <p:cNvPr id="71" name="o251"/>
+          <p:cNvPr id="71" name="o253"/>
           <p:cNvSpPr txBox="1"/>
           <p:nvPr/>
         </p:nvSpPr>
@@ -19119,7 +19192,7 @@
       </p:sp>
       <p:sp>
         <p:nvSpPr>
-          <p:cNvPr id="72" name="o252"/>
+          <p:cNvPr id="72" name="o254"/>
           <p:cNvSpPr txBox="1"/>
           <p:nvPr/>
         </p:nvSpPr>
@@ -19158,7 +19231,7 @@
       </p:sp>
       <p:sp>
         <p:nvSpPr>
-          <p:cNvPr id="73" name="o253"/>
+          <p:cNvPr id="73" name="o255"/>
           <p:cNvSpPr txBox="1"/>
           <p:nvPr/>
         </p:nvSpPr>
@@ -19197,7 +19270,7 @@
       </p:sp>
       <p:sp>
         <p:nvSpPr>
-          <p:cNvPr id="74" name="o254"/>
+          <p:cNvPr id="74" name="o256"/>
           <p:cNvSpPr/>
           <p:nvPr/>
         </p:nvSpPr>
@@ -19222,7 +19295,7 @@
       </p:sp>
       <p:sp>
         <p:nvSpPr>
-          <p:cNvPr id="75" name="o255"/>
+          <p:cNvPr id="75" name="o257"/>
           <p:cNvSpPr txBox="1"/>
           <p:nvPr/>
         </p:nvSpPr>
@@ -19261,7 +19334,7 @@
       </p:sp>
       <p:sp>
         <p:nvSpPr>
-          <p:cNvPr id="76" name="o256"/>
+          <p:cNvPr id="76" name="o258"/>
           <p:cNvSpPr txBox="1"/>
           <p:nvPr/>
         </p:nvSpPr>
@@ -19300,7 +19373,7 @@
       </p:sp>
       <p:sp>
         <p:nvSpPr>
-          <p:cNvPr id="77" name="o257"/>
+          <p:cNvPr id="77" name="o259"/>
           <p:cNvSpPr txBox="1"/>
           <p:nvPr/>
         </p:nvSpPr>
@@ -19339,7 +19412,7 @@
       </p:sp>
       <p:sp>
         <p:nvSpPr>
-          <p:cNvPr id="78" name="o258"/>
+          <p:cNvPr id="78" name="o260"/>
           <p:cNvSpPr/>
           <p:nvPr/>
         </p:nvSpPr>
@@ -19359,7 +19432,7 @@
       </p:sp>
       <p:sp>
         <p:nvSpPr>
-          <p:cNvPr id="79" name="o259"/>
+          <p:cNvPr id="79" name="o261"/>
           <p:cNvSpPr/>
           <p:nvPr/>
         </p:nvSpPr>
@@ -19379,7 +19452,7 @@
       </p:sp>
       <p:sp>
         <p:nvSpPr>
-          <p:cNvPr id="80" name="o260"/>
+          <p:cNvPr id="80" name="o262"/>
           <p:cNvSpPr txBox="1"/>
           <p:nvPr/>
         </p:nvSpPr>
@@ -19446,7 +19519,7 @@
       </p:grpSpPr>
       <p:sp>
         <p:nvSpPr>
-          <p:cNvPr id="2" name="o261"/>
+          <p:cNvPr id="2" name="o263"/>
           <p:cNvSpPr txBox="1"/>
           <p:nvPr/>
         </p:nvSpPr>
@@ -19485,7 +19558,7 @@
       </p:sp>
       <p:sp>
         <p:nvSpPr>
-          <p:cNvPr id="3" name="o262"/>
+          <p:cNvPr id="3" name="o264"/>
           <p:cNvSpPr txBox="1"/>
           <p:nvPr/>
         </p:nvSpPr>
@@ -19527,7 +19600,7 @@
       </p:sp>
       <p:sp>
         <p:nvSpPr>
-          <p:cNvPr id="4" name="o263"/>
+          <p:cNvPr id="4" name="o265"/>
           <p:cNvSpPr txBox="1"/>
           <p:nvPr/>
         </p:nvSpPr>
@@ -19566,7 +19639,7 @@
       </p:sp>
       <p:sp>
         <p:nvSpPr>
-          <p:cNvPr id="5" name="o264"/>
+          <p:cNvPr id="5" name="o266"/>
           <p:cNvSpPr/>
           <p:nvPr/>
         </p:nvSpPr>
@@ -19589,7 +19662,7 @@
       </p:sp>
       <p:sp>
         <p:nvSpPr>
-          <p:cNvPr id="6" name="o265"/>
+          <p:cNvPr id="6" name="o267"/>
           <p:cNvSpPr txBox="1"/>
           <p:nvPr/>
         </p:nvSpPr>
@@ -19628,7 +19701,7 @@
       </p:sp>
       <p:sp>
         <p:nvSpPr>
-          <p:cNvPr id="7" name="o266"/>
+          <p:cNvPr id="7" name="o268"/>
           <p:cNvSpPr txBox="1"/>
           <p:nvPr/>
         </p:nvSpPr>
@@ -19667,7 +19740,7 @@
       </p:sp>
       <p:sp>
         <p:nvSpPr>
-          <p:cNvPr id="8" name="o267"/>
+          <p:cNvPr id="8" name="o269"/>
           <p:cNvSpPr txBox="1"/>
           <p:nvPr/>
         </p:nvSpPr>
@@ -19706,7 +19779,7 @@
       </p:sp>
       <p:sp>
         <p:nvSpPr>
-          <p:cNvPr id="9" name="o268"/>
+          <p:cNvPr id="9" name="o270"/>
           <p:cNvSpPr/>
           <p:nvPr/>
         </p:nvSpPr>
@@ -19726,7 +19799,7 @@
       </p:sp>
       <p:sp>
         <p:nvSpPr>
-          <p:cNvPr id="10" name="o269"/>
+          <p:cNvPr id="10" name="o271"/>
           <p:cNvSpPr txBox="1"/>
           <p:nvPr/>
         </p:nvSpPr>
@@ -19765,7 +19838,7 @@
       </p:sp>
       <p:sp>
         <p:nvSpPr>
-          <p:cNvPr id="11" name="o270"/>
+          <p:cNvPr id="11" name="o272"/>
           <p:cNvSpPr txBox="1"/>
           <p:nvPr/>
         </p:nvSpPr>
@@ -19804,7 +19877,7 @@
       </p:sp>
       <p:sp>
         <p:nvSpPr>
-          <p:cNvPr id="12" name="o271"/>
+          <p:cNvPr id="12" name="o273"/>
           <p:cNvSpPr txBox="1"/>
           <p:nvPr/>
         </p:nvSpPr>
@@ -19843,7 +19916,7 @@
       </p:sp>
       <p:sp>
         <p:nvSpPr>
-          <p:cNvPr id="13" name="o272"/>
+          <p:cNvPr id="13" name="o274"/>
           <p:cNvSpPr txBox="1"/>
           <p:nvPr/>
         </p:nvSpPr>
@@ -19882,7 +19955,7 @@
       </p:sp>
       <p:sp>
         <p:nvSpPr>
-          <p:cNvPr id="14" name="o273"/>
+          <p:cNvPr id="14" name="o275"/>
           <p:cNvSpPr txBox="1"/>
           <p:nvPr/>
         </p:nvSpPr>
@@ -19921,7 +19994,7 @@
       </p:sp>
       <p:sp>
         <p:nvSpPr>
-          <p:cNvPr id="15" name="o274"/>
+          <p:cNvPr id="15" name="o276"/>
           <p:cNvSpPr/>
           <p:nvPr/>
         </p:nvSpPr>
@@ -19944,7 +20017,7 @@
       </p:sp>
       <p:sp>
         <p:nvSpPr>
-          <p:cNvPr id="16" name="o275"/>
+          <p:cNvPr id="16" name="o277"/>
           <p:cNvSpPr txBox="1"/>
           <p:nvPr/>
         </p:nvSpPr>
@@ -19983,7 +20056,7 @@
       </p:sp>
       <p:sp>
         <p:nvSpPr>
-          <p:cNvPr id="17" name="o276"/>
+          <p:cNvPr id="17" name="o278"/>
           <p:cNvSpPr txBox="1"/>
           <p:nvPr/>
         </p:nvSpPr>
@@ -20022,7 +20095,7 @@
       </p:sp>
       <p:sp>
         <p:nvSpPr>
-          <p:cNvPr id="18" name="o277"/>
+          <p:cNvPr id="18" name="o279"/>
           <p:cNvSpPr txBox="1"/>
           <p:nvPr/>
         </p:nvSpPr>
@@ -20061,7 +20134,7 @@
       </p:sp>
       <p:sp>
         <p:nvSpPr>
-          <p:cNvPr id="19" name="o278"/>
+          <p:cNvPr id="19" name="o280"/>
           <p:cNvSpPr txBox="1"/>
           <p:nvPr/>
         </p:nvSpPr>
@@ -20100,7 +20173,7 @@
       </p:sp>
       <p:sp>
         <p:nvSpPr>
-          <p:cNvPr id="20" name="o279"/>
+          <p:cNvPr id="20" name="o281"/>
           <p:cNvSpPr txBox="1"/>
           <p:nvPr/>
         </p:nvSpPr>
@@ -20139,7 +20212,7 @@
       </p:sp>
       <p:sp>
         <p:nvSpPr>
-          <p:cNvPr id="21" name="o280"/>
+          <p:cNvPr id="21" name="o282"/>
           <p:cNvSpPr/>
           <p:nvPr/>
         </p:nvSpPr>
@@ -20162,7 +20235,7 @@
       </p:sp>
       <p:sp>
         <p:nvSpPr>
-          <p:cNvPr id="22" name="o281"/>
+          <p:cNvPr id="22" name="o283"/>
           <p:cNvSpPr txBox="1"/>
           <p:nvPr/>
         </p:nvSpPr>
@@ -20201,7 +20274,7 @@
       </p:sp>
       <p:sp>
         <p:nvSpPr>
-          <p:cNvPr id="23" name="o282"/>
+          <p:cNvPr id="23" name="o284"/>
           <p:cNvSpPr txBox="1"/>
           <p:nvPr/>
         </p:nvSpPr>
@@ -20240,7 +20313,7 @@
       </p:sp>
       <p:sp>
         <p:nvSpPr>
-          <p:cNvPr id="24" name="o283"/>
+          <p:cNvPr id="24" name="o285"/>
           <p:cNvSpPr txBox="1"/>
           <p:nvPr/>
         </p:nvSpPr>
@@ -20279,7 +20352,7 @@
       </p:sp>
       <p:sp>
         <p:nvSpPr>
-          <p:cNvPr id="25" name="o284"/>
+          <p:cNvPr id="25" name="o286"/>
           <p:cNvSpPr txBox="1"/>
           <p:nvPr/>
         </p:nvSpPr>
@@ -20318,7 +20391,7 @@
       </p:sp>
       <p:sp>
         <p:nvSpPr>
-          <p:cNvPr id="26" name="o285"/>
+          <p:cNvPr id="26" name="o287"/>
           <p:cNvSpPr txBox="1"/>
           <p:nvPr/>
         </p:nvSpPr>
@@ -20357,7 +20430,7 @@
       </p:sp>
       <p:sp>
         <p:nvSpPr>
-          <p:cNvPr id="27" name="o286"/>
+          <p:cNvPr id="27" name="o288"/>
           <p:cNvSpPr/>
           <p:nvPr/>
         </p:nvSpPr>
@@ -20380,7 +20453,7 @@
       </p:sp>
       <p:sp>
         <p:nvSpPr>
-          <p:cNvPr id="28" name="o287"/>
+          <p:cNvPr id="28" name="o289"/>
           <p:cNvSpPr txBox="1"/>
           <p:nvPr/>
         </p:nvSpPr>
@@ -20419,7 +20492,7 @@
       </p:sp>
       <p:sp>
         <p:nvSpPr>
-          <p:cNvPr id="29" name="o288"/>
+          <p:cNvPr id="29" name="o290"/>
           <p:cNvSpPr txBox="1"/>
           <p:nvPr/>
         </p:nvSpPr>
@@ -20458,7 +20531,7 @@
       </p:sp>
       <p:sp>
         <p:nvSpPr>
-          <p:cNvPr id="30" name="o289"/>
+          <p:cNvPr id="30" name="o291"/>
           <p:cNvSpPr txBox="1"/>
           <p:nvPr/>
         </p:nvSpPr>
@@ -20497,7 +20570,7 @@
       </p:sp>
       <p:sp>
         <p:nvSpPr>
-          <p:cNvPr id="31" name="o290"/>
+          <p:cNvPr id="31" name="o292"/>
           <p:cNvSpPr txBox="1"/>
           <p:nvPr/>
         </p:nvSpPr>
@@ -20536,7 +20609,7 @@
       </p:sp>
       <p:sp>
         <p:nvSpPr>
-          <p:cNvPr id="32" name="o291"/>
+          <p:cNvPr id="32" name="o293"/>
           <p:cNvSpPr txBox="1"/>
           <p:nvPr/>
         </p:nvSpPr>
@@ -20575,7 +20648,7 @@
       </p:sp>
       <p:sp>
         <p:nvSpPr>
-          <p:cNvPr id="33" name="o292"/>
+          <p:cNvPr id="33" name="o294"/>
           <p:cNvSpPr/>
           <p:nvPr/>
         </p:nvSpPr>
@@ -20598,7 +20671,7 @@
       </p:sp>
       <p:sp>
         <p:nvSpPr>
-          <p:cNvPr id="34" name="o293"/>
+          <p:cNvPr id="34" name="o295"/>
           <p:cNvSpPr txBox="1"/>
           <p:nvPr/>
         </p:nvSpPr>
@@ -20637,7 +20710,7 @@
       </p:sp>
       <p:sp>
         <p:nvSpPr>
-          <p:cNvPr id="35" name="o294"/>
+          <p:cNvPr id="35" name="o296"/>
           <p:cNvSpPr txBox="1"/>
           <p:nvPr/>
         </p:nvSpPr>
@@ -20676,7 +20749,7 @@
       </p:sp>
       <p:sp>
         <p:nvSpPr>
-          <p:cNvPr id="36" name="o295"/>
+          <p:cNvPr id="36" name="o297"/>
           <p:cNvSpPr txBox="1"/>
           <p:nvPr/>
         </p:nvSpPr>
@@ -20715,7 +20788,7 @@
       </p:sp>
       <p:sp>
         <p:nvSpPr>
-          <p:cNvPr id="37" name="o296"/>
+          <p:cNvPr id="37" name="o298"/>
           <p:cNvSpPr txBox="1"/>
           <p:nvPr/>
         </p:nvSpPr>
@@ -20754,7 +20827,7 @@
       </p:sp>
       <p:sp>
         <p:nvSpPr>
-          <p:cNvPr id="38" name="o297"/>
+          <p:cNvPr id="38" name="o299"/>
           <p:cNvSpPr txBox="1"/>
           <p:nvPr/>
         </p:nvSpPr>
@@ -20793,7 +20866,7 @@
       </p:sp>
       <p:sp>
         <p:nvSpPr>
-          <p:cNvPr id="39" name="o298"/>
+          <p:cNvPr id="39" name="o300"/>
           <p:cNvSpPr/>
           <p:nvPr/>
         </p:nvSpPr>
@@ -20816,7 +20889,7 @@
       </p:sp>
       <p:sp>
         <p:nvSpPr>
-          <p:cNvPr id="40" name="o299"/>
+          <p:cNvPr id="40" name="o301"/>
           <p:cNvSpPr/>
           <p:nvPr/>
         </p:nvSpPr>
@@ -20839,7 +20912,7 @@
       </p:sp>
       <p:sp>
         <p:nvSpPr>
-          <p:cNvPr id="41" name="o300"/>
+          <p:cNvPr id="41" name="o302"/>
           <p:cNvSpPr/>
           <p:nvPr/>
         </p:nvSpPr>
@@ -20864,7 +20937,7 @@
       </p:sp>
       <p:sp>
         <p:nvSpPr>
-          <p:cNvPr id="42" name="o301"/>
+          <p:cNvPr id="42" name="o303"/>
           <p:cNvSpPr txBox="1"/>
           <p:nvPr/>
         </p:nvSpPr>
@@ -20903,7 +20976,7 @@
       </p:sp>
       <p:sp>
         <p:nvSpPr>
-          <p:cNvPr id="43" name="o302"/>
+          <p:cNvPr id="43" name="o304"/>
           <p:cNvSpPr txBox="1"/>
           <p:nvPr/>
         </p:nvSpPr>
@@ -20942,7 +21015,7 @@
       </p:sp>
       <p:sp>
         <p:nvSpPr>
-          <p:cNvPr id="44" name="o303"/>
+          <p:cNvPr id="44" name="o305"/>
           <p:cNvSpPr txBox="1"/>
           <p:nvPr/>
         </p:nvSpPr>
@@ -20981,7 +21054,7 @@
       </p:sp>
       <p:sp>
         <p:nvSpPr>
-          <p:cNvPr id="45" name="o304"/>
+          <p:cNvPr id="45" name="o306"/>
           <p:cNvSpPr/>
           <p:nvPr/>
         </p:nvSpPr>
@@ -21006,7 +21079,7 @@
       </p:sp>
       <p:sp>
         <p:nvSpPr>
-          <p:cNvPr id="46" name="o305"/>
+          <p:cNvPr id="46" name="o307"/>
           <p:cNvSpPr txBox="1"/>
           <p:nvPr/>
         </p:nvSpPr>
@@ -21045,7 +21118,7 @@
       </p:sp>
       <p:sp>
         <p:nvSpPr>
-          <p:cNvPr id="47" name="o306"/>
+          <p:cNvPr id="47" name="o308"/>
           <p:cNvSpPr txBox="1"/>
           <p:nvPr/>
         </p:nvSpPr>
@@ -21084,7 +21157,7 @@
       </p:sp>
       <p:sp>
         <p:nvSpPr>
-          <p:cNvPr id="48" name="o307"/>
+          <p:cNvPr id="48" name="o309"/>
           <p:cNvSpPr txBox="1"/>
           <p:nvPr/>
         </p:nvSpPr>
@@ -21123,7 +21196,7 @@
       </p:sp>
       <p:sp>
         <p:nvSpPr>
-          <p:cNvPr id="49" name="o308"/>
+          <p:cNvPr id="49" name="o310"/>
           <p:cNvSpPr/>
           <p:nvPr/>
         </p:nvSpPr>
@@ -21148,7 +21221,7 @@
       </p:sp>
       <p:sp>
         <p:nvSpPr>
-          <p:cNvPr id="50" name="o309"/>
+          <p:cNvPr id="50" name="o311"/>
           <p:cNvSpPr txBox="1"/>
           <p:nvPr/>
         </p:nvSpPr>
@@ -21187,7 +21260,7 @@
       </p:sp>
       <p:sp>
         <p:nvSpPr>
-          <p:cNvPr id="51" name="o310"/>
+          <p:cNvPr id="51" name="o312"/>
           <p:cNvSpPr txBox="1"/>
           <p:nvPr/>
         </p:nvSpPr>
@@ -21226,7 +21299,7 @@
       </p:sp>
       <p:sp>
         <p:nvSpPr>
-          <p:cNvPr id="52" name="o311"/>
+          <p:cNvPr id="52" name="o313"/>
           <p:cNvSpPr txBox="1"/>
           <p:nvPr/>
         </p:nvSpPr>
@@ -21265,7 +21338,7 @@
       </p:sp>
       <p:sp>
         <p:nvSpPr>
-          <p:cNvPr id="53" name="o312"/>
+          <p:cNvPr id="53" name="o314"/>
           <p:cNvSpPr/>
           <p:nvPr/>
         </p:nvSpPr>
@@ -21285,7 +21358,7 @@
       </p:sp>
       <p:sp>
         <p:nvSpPr>
-          <p:cNvPr id="54" name="o313"/>
+          <p:cNvPr id="54" name="o315"/>
           <p:cNvSpPr/>
           <p:nvPr/>
         </p:nvSpPr>
@@ -21305,7 +21378,7 @@
       </p:sp>
       <p:sp>
         <p:nvSpPr>
-          <p:cNvPr id="55" name="o314"/>
+          <p:cNvPr id="55" name="o316"/>
           <p:cNvSpPr txBox="1"/>
           <p:nvPr/>
         </p:nvSpPr>
@@ -21372,7 +21445,7 @@
       </p:grpSpPr>
       <p:sp>
         <p:nvSpPr>
-          <p:cNvPr id="2" name="o315"/>
+          <p:cNvPr id="2" name="o317"/>
           <p:cNvSpPr txBox="1"/>
           <p:nvPr/>
         </p:nvSpPr>
@@ -21411,7 +21484,7 @@
       </p:sp>
       <p:sp>
         <p:nvSpPr>
-          <p:cNvPr id="3" name="o316"/>
+          <p:cNvPr id="3" name="o318"/>
           <p:cNvSpPr txBox="1"/>
           <p:nvPr/>
         </p:nvSpPr>
@@ -21453,7 +21526,7 @@
       </p:sp>
       <p:sp>
         <p:nvSpPr>
-          <p:cNvPr id="4" name="o317"/>
+          <p:cNvPr id="4" name="o319"/>
           <p:cNvSpPr txBox="1"/>
           <p:nvPr/>
         </p:nvSpPr>
@@ -21492,7 +21565,7 @@
       </p:sp>
       <p:sp>
         <p:nvSpPr>
-          <p:cNvPr id="5" name="o318"/>
+          <p:cNvPr id="5" name="o320"/>
           <p:cNvSpPr/>
           <p:nvPr/>
         </p:nvSpPr>
@@ -21515,7 +21588,7 @@
       </p:sp>
       <p:sp>
         <p:nvSpPr>
-          <p:cNvPr id="6" name="o319"/>
+          <p:cNvPr id="6" name="o321"/>
           <p:cNvSpPr txBox="1"/>
           <p:nvPr/>
         </p:nvSpPr>
@@ -21554,7 +21627,7 @@
       </p:sp>
       <p:sp>
         <p:nvSpPr>
-          <p:cNvPr id="7" name="o320"/>
+          <p:cNvPr id="7" name="o322"/>
           <p:cNvSpPr txBox="1"/>
           <p:nvPr/>
         </p:nvSpPr>
@@ -21593,7 +21666,7 @@
       </p:sp>
       <p:sp>
         <p:nvSpPr>
-          <p:cNvPr id="8" name="o321"/>
+          <p:cNvPr id="8" name="o323"/>
           <p:cNvSpPr txBox="1"/>
           <p:nvPr/>
         </p:nvSpPr>
@@ -21632,7 +21705,7 @@
       </p:sp>
       <p:sp>
         <p:nvSpPr>
-          <p:cNvPr id="9" name="o322"/>
+          <p:cNvPr id="9" name="o324"/>
           <p:cNvSpPr/>
           <p:nvPr/>
         </p:nvSpPr>
@@ -21652,7 +21725,7 @@
       </p:sp>
       <p:sp>
         <p:nvSpPr>
-          <p:cNvPr id="10" name="o323"/>
+          <p:cNvPr id="10" name="o325"/>
           <p:cNvSpPr txBox="1"/>
           <p:nvPr/>
         </p:nvSpPr>
@@ -21691,7 +21764,7 @@
       </p:sp>
       <p:sp>
         <p:nvSpPr>
-          <p:cNvPr id="11" name="o324"/>
+          <p:cNvPr id="11" name="o326"/>
           <p:cNvSpPr txBox="1"/>
           <p:nvPr/>
         </p:nvSpPr>
@@ -21730,7 +21803,7 @@
       </p:sp>
       <p:sp>
         <p:nvSpPr>
-          <p:cNvPr id="12" name="o325"/>
+          <p:cNvPr id="12" name="o327"/>
           <p:cNvSpPr txBox="1"/>
           <p:nvPr/>
         </p:nvSpPr>
@@ -21769,7 +21842,7 @@
       </p:sp>
       <p:sp>
         <p:nvSpPr>
-          <p:cNvPr id="13" name="o326"/>
+          <p:cNvPr id="13" name="o328"/>
           <p:cNvSpPr/>
           <p:nvPr/>
         </p:nvSpPr>
@@ -21792,7 +21865,7 @@
       </p:sp>
       <p:sp>
         <p:nvSpPr>
-          <p:cNvPr id="14" name="o327"/>
+          <p:cNvPr id="14" name="o329"/>
           <p:cNvSpPr txBox="1"/>
           <p:nvPr/>
         </p:nvSpPr>
@@ -21831,7 +21904,7 @@
       </p:sp>
       <p:sp>
         <p:nvSpPr>
-          <p:cNvPr id="15" name="o328"/>
+          <p:cNvPr id="15" name="o330"/>
           <p:cNvSpPr txBox="1"/>
           <p:nvPr/>
         </p:nvSpPr>
@@ -21870,7 +21943,7 @@
       </p:sp>
       <p:sp>
         <p:nvSpPr>
-          <p:cNvPr id="16" name="o329"/>
+          <p:cNvPr id="16" name="o331"/>
           <p:cNvSpPr txBox="1"/>
           <p:nvPr/>
         </p:nvSpPr>
@@ -21909,7 +21982,7 @@
       </p:sp>
       <p:sp>
         <p:nvSpPr>
-          <p:cNvPr id="17" name="o330"/>
+          <p:cNvPr id="17" name="o332"/>
           <p:cNvSpPr/>
           <p:nvPr/>
         </p:nvSpPr>
@@ -21932,7 +22005,7 @@
       </p:sp>
       <p:sp>
         <p:nvSpPr>
-          <p:cNvPr id="18" name="o331"/>
+          <p:cNvPr id="18" name="o333"/>
           <p:cNvSpPr txBox="1"/>
           <p:nvPr/>
         </p:nvSpPr>
@@ -21971,7 +22044,7 @@
       </p:sp>
       <p:sp>
         <p:nvSpPr>
-          <p:cNvPr id="19" name="o332"/>
+          <p:cNvPr id="19" name="o334"/>
           <p:cNvSpPr txBox="1"/>
           <p:nvPr/>
         </p:nvSpPr>
@@ -22010,7 +22083,7 @@
       </p:sp>
       <p:sp>
         <p:nvSpPr>
-          <p:cNvPr id="20" name="o333"/>
+          <p:cNvPr id="20" name="o335"/>
           <p:cNvSpPr txBox="1"/>
           <p:nvPr/>
         </p:nvSpPr>
@@ -22049,7 +22122,7 @@
       </p:sp>
       <p:sp>
         <p:nvSpPr>
-          <p:cNvPr id="21" name="o334"/>
+          <p:cNvPr id="21" name="o336"/>
           <p:cNvSpPr/>
           <p:nvPr/>
         </p:nvSpPr>
@@ -22072,7 +22145,7 @@
       </p:sp>
       <p:sp>
         <p:nvSpPr>
-          <p:cNvPr id="22" name="o335"/>
+          <p:cNvPr id="22" name="o337"/>
           <p:cNvSpPr/>
           <p:nvPr/>
         </p:nvSpPr>
@@ -22092,7 +22165,7 @@
       </p:sp>
       <p:sp>
         <p:nvSpPr>
-          <p:cNvPr id="23" name="o336"/>
+          <p:cNvPr id="23" name="o338"/>
           <p:cNvSpPr/>
           <p:nvPr/>
         </p:nvSpPr>
@@ -22112,7 +22185,7 @@
       </p:sp>
       <p:sp>
         <p:nvSpPr>
-          <p:cNvPr id="24" name="o337"/>
+          <p:cNvPr id="24" name="o339"/>
           <p:cNvSpPr txBox="1"/>
           <p:nvPr/>
         </p:nvSpPr>
@@ -22151,7 +22224,7 @@
       </p:sp>
       <p:sp>
         <p:nvSpPr>
-          <p:cNvPr id="25" name="o338"/>
+          <p:cNvPr id="25" name="o340"/>
           <p:cNvSpPr txBox="1"/>
           <p:nvPr/>
         </p:nvSpPr>
@@ -22190,7 +22263,7 @@
       </p:sp>
       <p:sp>
         <p:nvSpPr>
-          <p:cNvPr id="26" name="o339"/>
+          <p:cNvPr id="26" name="o341"/>
           <p:cNvSpPr txBox="1"/>
           <p:nvPr/>
         </p:nvSpPr>
@@ -22229,7 +22302,7 @@
       </p:sp>
       <p:sp>
         <p:nvSpPr>
-          <p:cNvPr id="27" name="o340"/>
+          <p:cNvPr id="27" name="o342"/>
           <p:cNvSpPr/>
           <p:nvPr/>
         </p:nvSpPr>
@@ -22252,7 +22325,7 @@
       </p:sp>
       <p:sp>
         <p:nvSpPr>
-          <p:cNvPr id="28" name="o341"/>
+          <p:cNvPr id="28" name="o343"/>
           <p:cNvSpPr txBox="1"/>
           <p:nvPr/>
         </p:nvSpPr>
@@ -22291,7 +22364,7 @@
       </p:sp>
       <p:sp>
         <p:nvSpPr>
-          <p:cNvPr id="29" name="o342"/>
+          <p:cNvPr id="29" name="o344"/>
           <p:cNvSpPr txBox="1"/>
           <p:nvPr/>
         </p:nvSpPr>
@@ -22330,7 +22403,7 @@
       </p:sp>
       <p:sp>
         <p:nvSpPr>
-          <p:cNvPr id="30" name="o343"/>
+          <p:cNvPr id="30" name="o345"/>
           <p:cNvSpPr txBox="1"/>
           <p:nvPr/>
         </p:nvSpPr>
@@ -22369,7 +22442,7 @@
       </p:sp>
       <p:sp>
         <p:nvSpPr>
-          <p:cNvPr id="31" name="o344"/>
+          <p:cNvPr id="31" name="o346"/>
           <p:cNvSpPr/>
           <p:nvPr/>
         </p:nvSpPr>
@@ -22392,7 +22465,7 @@
       </p:sp>
       <p:sp>
         <p:nvSpPr>
-          <p:cNvPr id="32" name="o345"/>
+          <p:cNvPr id="32" name="o347"/>
           <p:cNvSpPr txBox="1"/>
           <p:nvPr/>
         </p:nvSpPr>
@@ -22431,7 +22504,7 @@
       </p:sp>
       <p:sp>
         <p:nvSpPr>
-          <p:cNvPr id="33" name="o346"/>
+          <p:cNvPr id="33" name="o348"/>
           <p:cNvSpPr txBox="1"/>
           <p:nvPr/>
         </p:nvSpPr>
@@ -22470,7 +22543,7 @@
       </p:sp>
       <p:sp>
         <p:nvSpPr>
-          <p:cNvPr id="34" name="o347"/>
+          <p:cNvPr id="34" name="o349"/>
           <p:cNvSpPr txBox="1"/>
           <p:nvPr/>
         </p:nvSpPr>
@@ -22509,7 +22582,7 @@
       </p:sp>
       <p:sp>
         <p:nvSpPr>
-          <p:cNvPr id="35" name="o348"/>
+          <p:cNvPr id="35" name="o350"/>
           <p:cNvSpPr/>
           <p:nvPr/>
         </p:nvSpPr>
@@ -22532,7 +22605,7 @@
       </p:sp>
       <p:sp>
         <p:nvSpPr>
-          <p:cNvPr id="36" name="o349"/>
+          <p:cNvPr id="36" name="o351"/>
           <p:cNvSpPr txBox="1"/>
           <p:nvPr/>
         </p:nvSpPr>
@@ -22571,7 +22644,7 @@
       </p:sp>
       <p:sp>
         <p:nvSpPr>
-          <p:cNvPr id="37" name="o350"/>
+          <p:cNvPr id="37" name="o352"/>
           <p:cNvSpPr txBox="1"/>
           <p:nvPr/>
         </p:nvSpPr>
@@ -22610,7 +22683,7 @@
       </p:sp>
       <p:sp>
         <p:nvSpPr>
-          <p:cNvPr id="38" name="o351"/>
+          <p:cNvPr id="38" name="o353"/>
           <p:cNvSpPr txBox="1"/>
           <p:nvPr/>
         </p:nvSpPr>
@@ -22649,7 +22722,7 @@
       </p:sp>
       <p:sp>
         <p:nvSpPr>
-          <p:cNvPr id="39" name="o352"/>
+          <p:cNvPr id="39" name="o354"/>
           <p:cNvSpPr/>
           <p:nvPr/>
         </p:nvSpPr>
@@ -22672,7 +22745,7 @@
       </p:sp>
       <p:sp>
         <p:nvSpPr>
-          <p:cNvPr id="40" name="o353"/>
+          <p:cNvPr id="40" name="o355"/>
           <p:cNvSpPr/>
           <p:nvPr/>
         </p:nvSpPr>
@@ -22695,7 +22768,7 @@
       </p:sp>
       <p:sp>
         <p:nvSpPr>
-          <p:cNvPr id="41" name="o354"/>
+          <p:cNvPr id="41" name="o356"/>
           <p:cNvSpPr txBox="1"/>
           <p:nvPr/>
         </p:nvSpPr>
@@ -22734,7 +22807,7 @@
       </p:sp>
       <p:sp>
         <p:nvSpPr>
-          <p:cNvPr id="42" name="o355"/>
+          <p:cNvPr id="42" name="o357"/>
           <p:cNvSpPr/>
           <p:nvPr/>
         </p:nvSpPr>
@@ -22757,7 +22830,7 @@
       </p:sp>
       <p:sp>
         <p:nvSpPr>
-          <p:cNvPr id="43" name="o356"/>
+          <p:cNvPr id="43" name="o358"/>
           <p:cNvSpPr/>
           <p:nvPr/>
         </p:nvSpPr>
@@ -22780,7 +22853,7 @@
       </p:sp>
       <p:sp>
         <p:nvSpPr>
-          <p:cNvPr id="44" name="o357"/>
+          <p:cNvPr id="44" name="o359"/>
           <p:cNvSpPr/>
           <p:nvPr/>
         </p:nvSpPr>
@@ -22802,7 +22875,7 @@
       </p:sp>
       <p:sp>
         <p:nvSpPr>
-          <p:cNvPr id="45" name="o358"/>
+          <p:cNvPr id="45" name="o360"/>
           <p:cNvSpPr txBox="1"/>
           <p:nvPr/>
         </p:nvSpPr>
@@ -22841,7 +22914,7 @@
       </p:sp>
       <p:sp>
         <p:nvSpPr>
-          <p:cNvPr id="46" name="o359"/>
+          <p:cNvPr id="46" name="o361"/>
           <p:cNvSpPr txBox="1"/>
           <p:nvPr/>
         </p:nvSpPr>
@@ -22880,7 +22953,7 @@
       </p:sp>
       <p:sp>
         <p:nvSpPr>
-          <p:cNvPr id="47" name="o360"/>
+          <p:cNvPr id="47" name="o362"/>
           <p:cNvSpPr txBox="1"/>
           <p:nvPr/>
         </p:nvSpPr>
@@ -22919,7 +22992,7 @@
       </p:sp>
       <p:sp>
         <p:nvSpPr>
-          <p:cNvPr id="48" name="o361"/>
+          <p:cNvPr id="48" name="o363"/>
           <p:cNvSpPr txBox="1"/>
           <p:nvPr/>
         </p:nvSpPr>
@@ -22958,7 +23031,7 @@
       </p:sp>
       <p:sp>
         <p:nvSpPr>
-          <p:cNvPr id="49" name="o362"/>
+          <p:cNvPr id="49" name="o364"/>
           <p:cNvSpPr/>
           <p:nvPr/>
         </p:nvSpPr>
@@ -22983,7 +23056,7 @@
       </p:sp>
       <p:sp>
         <p:nvSpPr>
-          <p:cNvPr id="50" name="o363"/>
+          <p:cNvPr id="50" name="o365"/>
           <p:cNvSpPr txBox="1"/>
           <p:nvPr/>
         </p:nvSpPr>
@@ -23022,7 +23095,7 @@
       </p:sp>
       <p:sp>
         <p:nvSpPr>
-          <p:cNvPr id="51" name="o364"/>
+          <p:cNvPr id="51" name="o366"/>
           <p:cNvSpPr/>
           <p:nvPr/>
         </p:nvSpPr>
@@ -23047,7 +23120,7 @@
       </p:sp>
       <p:sp>
         <p:nvSpPr>
-          <p:cNvPr id="52" name="o365"/>
+          <p:cNvPr id="52" name="o367"/>
           <p:cNvSpPr txBox="1"/>
           <p:nvPr/>
         </p:nvSpPr>
@@ -23086,7 +23159,7 @@
       </p:sp>
       <p:sp>
         <p:nvSpPr>
-          <p:cNvPr id="53" name="o366"/>
+          <p:cNvPr id="53" name="o368"/>
           <p:cNvSpPr/>
           <p:nvPr/>
         </p:nvSpPr>
@@ -23111,7 +23184,7 @@
       </p:sp>
       <p:sp>
         <p:nvSpPr>
-          <p:cNvPr id="54" name="o367"/>
+          <p:cNvPr id="54" name="o369"/>
           <p:cNvSpPr txBox="1"/>
           <p:nvPr/>
         </p:nvSpPr>
@@ -23150,7 +23223,7 @@
       </p:sp>
       <p:sp>
         <p:nvSpPr>
-          <p:cNvPr id="55" name="o368"/>
+          <p:cNvPr id="55" name="o370"/>
           <p:cNvSpPr/>
           <p:nvPr/>
         </p:nvSpPr>
@@ -23175,7 +23248,7 @@
       </p:sp>
       <p:sp>
         <p:nvSpPr>
-          <p:cNvPr id="56" name="o369"/>
+          <p:cNvPr id="56" name="o371"/>
           <p:cNvSpPr txBox="1"/>
           <p:nvPr/>
         </p:nvSpPr>
@@ -23214,7 +23287,7 @@
       </p:sp>
       <p:sp>
         <p:nvSpPr>
-          <p:cNvPr id="57" name="o370"/>
+          <p:cNvPr id="57" name="o372"/>
           <p:cNvSpPr/>
           <p:nvPr/>
         </p:nvSpPr>
@@ -23239,7 +23312,7 @@
       </p:sp>
       <p:sp>
         <p:nvSpPr>
-          <p:cNvPr id="58" name="o371"/>
+          <p:cNvPr id="58" name="o373"/>
           <p:cNvSpPr txBox="1"/>
           <p:nvPr/>
         </p:nvSpPr>
@@ -23278,7 +23351,7 @@
       </p:sp>
       <p:sp>
         <p:nvSpPr>
-          <p:cNvPr id="59" name="o372"/>
+          <p:cNvPr id="59" name="o374"/>
           <p:cNvSpPr/>
           <p:nvPr/>
         </p:nvSpPr>
@@ -23303,7 +23376,7 @@
       </p:sp>
       <p:sp>
         <p:nvSpPr>
-          <p:cNvPr id="60" name="o373"/>
+          <p:cNvPr id="60" name="o375"/>
           <p:cNvSpPr txBox="1"/>
           <p:nvPr/>
         </p:nvSpPr>
@@ -23342,7 +23415,7 @@
       </p:sp>
       <p:sp>
         <p:nvSpPr>
-          <p:cNvPr id="61" name="o374"/>
+          <p:cNvPr id="61" name="o376"/>
           <p:cNvSpPr/>
           <p:nvPr/>
         </p:nvSpPr>
@@ -23367,7 +23440,7 @@
       </p:sp>
       <p:sp>
         <p:nvSpPr>
-          <p:cNvPr id="62" name="o375"/>
+          <p:cNvPr id="62" name="o377"/>
           <p:cNvSpPr txBox="1"/>
           <p:nvPr/>
         </p:nvSpPr>
@@ -23406,7 +23479,7 @@
       </p:sp>
       <p:sp>
         <p:nvSpPr>
-          <p:cNvPr id="63" name="o376"/>
+          <p:cNvPr id="63" name="o378"/>
           <p:cNvSpPr/>
           <p:nvPr/>
         </p:nvSpPr>
@@ -23431,7 +23504,7 @@
       </p:sp>
       <p:sp>
         <p:nvSpPr>
-          <p:cNvPr id="64" name="o377"/>
+          <p:cNvPr id="64" name="o379"/>
           <p:cNvSpPr txBox="1"/>
           <p:nvPr/>
         </p:nvSpPr>
@@ -23470,7 +23543,7 @@
       </p:sp>
       <p:sp>
         <p:nvSpPr>
-          <p:cNvPr id="65" name="o378"/>
+          <p:cNvPr id="65" name="o380"/>
           <p:cNvSpPr/>
           <p:nvPr/>
         </p:nvSpPr>
@@ -23495,7 +23568,7 @@
       </p:sp>
       <p:sp>
         <p:nvSpPr>
-          <p:cNvPr id="66" name="o379"/>
+          <p:cNvPr id="66" name="o381"/>
           <p:cNvSpPr txBox="1"/>
           <p:nvPr/>
         </p:nvSpPr>
@@ -23534,7 +23607,7 @@
       </p:sp>
       <p:sp>
         <p:nvSpPr>
-          <p:cNvPr id="67" name="o380"/>
+          <p:cNvPr id="67" name="o382"/>
           <p:cNvSpPr txBox="1"/>
           <p:nvPr/>
         </p:nvSpPr>
@@ -23573,7 +23646,7 @@
       </p:sp>
       <p:sp>
         <p:nvSpPr>
-          <p:cNvPr id="68" name="o381"/>
+          <p:cNvPr id="68" name="o383"/>
           <p:cNvSpPr/>
           <p:nvPr/>
         </p:nvSpPr>
@@ -23593,7 +23666,7 @@
       </p:sp>
       <p:sp>
         <p:nvSpPr>
-          <p:cNvPr id="69" name="o382"/>
+          <p:cNvPr id="69" name="o384"/>
           <p:cNvSpPr/>
           <p:nvPr/>
         </p:nvSpPr>
@@ -23613,7 +23686,7 @@
       </p:sp>
       <p:sp>
         <p:nvSpPr>
-          <p:cNvPr id="70" name="o383"/>
+          <p:cNvPr id="70" name="o385"/>
           <p:cNvSpPr txBox="1"/>
           <p:nvPr/>
         </p:nvSpPr>
@@ -23680,7 +23753,7 @@
       </p:grpSpPr>
       <p:sp>
         <p:nvSpPr>
-          <p:cNvPr id="2" name="o384"/>
+          <p:cNvPr id="2" name="o386"/>
           <p:cNvSpPr txBox="1"/>
           <p:nvPr/>
         </p:nvSpPr>
@@ -23719,7 +23792,7 @@
       </p:sp>
       <p:sp>
         <p:nvSpPr>
-          <p:cNvPr id="3" name="o385"/>
+          <p:cNvPr id="3" name="o387"/>
           <p:cNvSpPr txBox="1"/>
           <p:nvPr/>
         </p:nvSpPr>
@@ -23761,7 +23834,7 @@
       </p:sp>
       <p:sp>
         <p:nvSpPr>
-          <p:cNvPr id="4" name="o386"/>
+          <p:cNvPr id="4" name="o388"/>
           <p:cNvSpPr txBox="1"/>
           <p:nvPr/>
         </p:nvSpPr>
@@ -23800,7 +23873,7 @@
       </p:sp>
       <p:sp>
         <p:nvSpPr>
-          <p:cNvPr id="5" name="o387"/>
+          <p:cNvPr id="5" name="o389"/>
           <p:cNvSpPr/>
           <p:nvPr/>
         </p:nvSpPr>
@@ -23823,7 +23896,7 @@
       </p:sp>
       <p:sp>
         <p:nvSpPr>
-          <p:cNvPr id="6" name="o388"/>
+          <p:cNvPr id="6" name="o390"/>
           <p:cNvSpPr txBox="1"/>
           <p:nvPr/>
         </p:nvSpPr>
@@ -23862,7 +23935,7 @@
       </p:sp>
       <p:sp>
         <p:nvSpPr>
-          <p:cNvPr id="7" name="o389"/>
+          <p:cNvPr id="7" name="o391"/>
           <p:cNvSpPr txBox="1"/>
           <p:nvPr/>
         </p:nvSpPr>
@@ -23901,7 +23974,7 @@
       </p:sp>
       <p:sp>
         <p:nvSpPr>
-          <p:cNvPr id="8" name="o390"/>
+          <p:cNvPr id="8" name="o392"/>
           <p:cNvSpPr txBox="1"/>
           <p:nvPr/>
         </p:nvSpPr>
@@ -23940,7 +24013,7 @@
       </p:sp>
       <p:sp>
         <p:nvSpPr>
-          <p:cNvPr id="9" name="o391"/>
+          <p:cNvPr id="9" name="o393"/>
           <p:cNvSpPr/>
           <p:nvPr/>
         </p:nvSpPr>
@@ -23960,7 +24033,7 @@
       </p:sp>
       <p:sp>
         <p:nvSpPr>
-          <p:cNvPr id="10" name="o392"/>
+          <p:cNvPr id="10" name="o394"/>
           <p:cNvSpPr txBox="1"/>
           <p:nvPr/>
         </p:nvSpPr>
@@ -23999,7 +24072,7 @@
       </p:sp>
       <p:sp>
         <p:nvSpPr>
-          <p:cNvPr id="11" name="o393"/>
+          <p:cNvPr id="11" name="o395"/>
           <p:cNvSpPr txBox="1"/>
           <p:nvPr/>
         </p:nvSpPr>
@@ -24038,7 +24111,7 @@
       </p:sp>
       <p:sp>
         <p:nvSpPr>
-          <p:cNvPr id="12" name="o394"/>
+          <p:cNvPr id="12" name="o396"/>
           <p:cNvSpPr/>
           <p:nvPr/>
         </p:nvSpPr>
@@ -24061,7 +24134,7 @@
       </p:sp>
       <p:sp>
         <p:nvSpPr>
-          <p:cNvPr id="13" name="o395"/>
+          <p:cNvPr id="13" name="o397"/>
           <p:cNvSpPr/>
           <p:nvPr/>
         </p:nvSpPr>
@@ -24081,7 +24154,7 @@
       </p:sp>
       <p:sp>
         <p:nvSpPr>
-          <p:cNvPr id="14" name="o396"/>
+          <p:cNvPr id="14" name="o398"/>
           <p:cNvSpPr txBox="1"/>
           <p:nvPr/>
         </p:nvSpPr>
@@ -24120,7 +24193,7 @@
       </p:sp>
       <p:sp>
         <p:nvSpPr>
-          <p:cNvPr id="15" name="o397"/>
+          <p:cNvPr id="15" name="o399"/>
           <p:cNvSpPr txBox="1"/>
           <p:nvPr/>
         </p:nvSpPr>
@@ -24159,7 +24232,7 @@
       </p:sp>
       <p:sp>
         <p:nvSpPr>
-          <p:cNvPr id="16" name="o398"/>
+          <p:cNvPr id="16" name="o400"/>
           <p:cNvSpPr txBox="1"/>
           <p:nvPr/>
         </p:nvSpPr>
@@ -24198,7 +24271,7 @@
       </p:sp>
       <p:sp>
         <p:nvSpPr>
-          <p:cNvPr id="17" name="o399"/>
+          <p:cNvPr id="17" name="o401"/>
           <p:cNvSpPr/>
           <p:nvPr/>
         </p:nvSpPr>
@@ -24218,7 +24291,7 @@
       </p:sp>
       <p:sp>
         <p:nvSpPr>
-          <p:cNvPr id="18" name="o400"/>
+          <p:cNvPr id="18" name="o402"/>
           <p:cNvSpPr txBox="1"/>
           <p:nvPr/>
         </p:nvSpPr>
@@ -24257,7 +24330,7 @@
       </p:sp>
       <p:sp>
         <p:nvSpPr>
-          <p:cNvPr id="19" name="o401"/>
+          <p:cNvPr id="19" name="o403"/>
           <p:cNvSpPr txBox="1"/>
           <p:nvPr/>
         </p:nvSpPr>
@@ -24296,7 +24369,7 @@
       </p:sp>
       <p:sp>
         <p:nvSpPr>
-          <p:cNvPr id="20" name="o402"/>
+          <p:cNvPr id="20" name="o404"/>
           <p:cNvSpPr txBox="1"/>
           <p:nvPr/>
         </p:nvSpPr>
@@ -24335,7 +24408,7 @@
       </p:sp>
       <p:sp>
         <p:nvSpPr>
-          <p:cNvPr id="21" name="o403"/>
+          <p:cNvPr id="21" name="o405"/>
           <p:cNvSpPr/>
           <p:nvPr/>
         </p:nvSpPr>
@@ -24355,7 +24428,7 @@
       </p:sp>
       <p:sp>
         <p:nvSpPr>
-          <p:cNvPr id="22" name="o404"/>
+          <p:cNvPr id="22" name="o406"/>
           <p:cNvSpPr txBox="1"/>
           <p:nvPr/>
         </p:nvSpPr>
@@ -24394,7 +24467,7 @@
       </p:sp>
       <p:sp>
         <p:nvSpPr>
-          <p:cNvPr id="23" name="o405"/>
+          <p:cNvPr id="23" name="o407"/>
           <p:cNvSpPr txBox="1"/>
           <p:nvPr/>
         </p:nvSpPr>
@@ -24433,7 +24506,7 @@
       </p:sp>
       <p:sp>
         <p:nvSpPr>
-          <p:cNvPr id="24" name="o406"/>
+          <p:cNvPr id="24" name="o408"/>
           <p:cNvSpPr txBox="1"/>
           <p:nvPr/>
         </p:nvSpPr>
@@ -24472,7 +24545,7 @@
       </p:sp>
       <p:sp>
         <p:nvSpPr>
-          <p:cNvPr id="25" name="o407"/>
+          <p:cNvPr id="25" name="o409"/>
           <p:cNvSpPr/>
           <p:nvPr/>
         </p:nvSpPr>
@@ -24492,7 +24565,7 @@
       </p:sp>
       <p:sp>
         <p:nvSpPr>
-          <p:cNvPr id="26" name="o408"/>
+          <p:cNvPr id="26" name="o410"/>
           <p:cNvSpPr txBox="1"/>
           <p:nvPr/>
         </p:nvSpPr>
@@ -24531,7 +24604,7 @@
       </p:sp>
       <p:sp>
         <p:nvSpPr>
-          <p:cNvPr id="27" name="o409"/>
+          <p:cNvPr id="27" name="o411"/>
           <p:cNvSpPr txBox="1"/>
           <p:nvPr/>
         </p:nvSpPr>
@@ -24570,7 +24643,7 @@
       </p:sp>
       <p:sp>
         <p:nvSpPr>
-          <p:cNvPr id="28" name="o410"/>
+          <p:cNvPr id="28" name="o412"/>
           <p:cNvSpPr txBox="1"/>
           <p:nvPr/>
         </p:nvSpPr>
@@ -24609,7 +24682,7 @@
       </p:sp>
       <p:sp>
         <p:nvSpPr>
-          <p:cNvPr id="29" name="o411"/>
+          <p:cNvPr id="29" name="o413"/>
           <p:cNvSpPr txBox="1"/>
           <p:nvPr/>
         </p:nvSpPr>
@@ -24648,7 +24721,7 @@
       </p:sp>
       <p:sp>
         <p:nvSpPr>
-          <p:cNvPr id="30" name="o412"/>
+          <p:cNvPr id="30" name="o414"/>
           <p:cNvSpPr/>
           <p:nvPr/>
         </p:nvSpPr>
@@ -24673,7 +24746,7 @@
       </p:sp>
       <p:sp>
         <p:nvSpPr>
-          <p:cNvPr id="31" name="o413"/>
+          <p:cNvPr id="31" name="o415"/>
           <p:cNvSpPr/>
           <p:nvPr/>
         </p:nvSpPr>
@@ -24698,7 +24771,7 @@
       </p:sp>
       <p:sp>
         <p:nvSpPr>
-          <p:cNvPr id="32" name="o414"/>
+          <p:cNvPr id="32" name="o416"/>
           <p:cNvSpPr txBox="1"/>
           <p:nvPr/>
         </p:nvSpPr>
@@ -24737,7 +24810,7 @@
       </p:sp>
       <p:sp>
         <p:nvSpPr>
-          <p:cNvPr id="33" name="o415"/>
+          <p:cNvPr id="33" name="o417"/>
           <p:cNvSpPr txBox="1"/>
           <p:nvPr/>
         </p:nvSpPr>
@@ -24776,7 +24849,7 @@
       </p:sp>
       <p:sp>
         <p:nvSpPr>
-          <p:cNvPr id="34" name="o416"/>
+          <p:cNvPr id="34" name="o418"/>
           <p:cNvSpPr txBox="1"/>
           <p:nvPr/>
         </p:nvSpPr>
@@ -24815,7 +24888,7 @@
       </p:sp>
       <p:sp>
         <p:nvSpPr>
-          <p:cNvPr id="35" name="o417"/>
+          <p:cNvPr id="35" name="o419"/>
           <p:cNvSpPr/>
           <p:nvPr/>
         </p:nvSpPr>
@@ -24839,7 +24912,7 @@
       </p:sp>
       <p:sp>
         <p:nvSpPr>
-          <p:cNvPr id="36" name="o418"/>
+          <p:cNvPr id="36" name="o420"/>
           <p:cNvSpPr/>
           <p:nvPr/>
         </p:nvSpPr>
@@ -24864,7 +24937,7 @@
       </p:sp>
       <p:sp>
         <p:nvSpPr>
-          <p:cNvPr id="37" name="o419"/>
+          <p:cNvPr id="37" name="o421"/>
           <p:cNvSpPr/>
           <p:nvPr/>
         </p:nvSpPr>
@@ -24889,7 +24962,7 @@
       </p:sp>
       <p:sp>
         <p:nvSpPr>
-          <p:cNvPr id="38" name="o420"/>
+          <p:cNvPr id="38" name="o422"/>
           <p:cNvSpPr txBox="1"/>
           <p:nvPr/>
         </p:nvSpPr>
@@ -24928,7 +25001,7 @@
       </p:sp>
       <p:sp>
         <p:nvSpPr>
-          <p:cNvPr id="39" name="o421"/>
+          <p:cNvPr id="39" name="o423"/>
           <p:cNvSpPr txBox="1"/>
           <p:nvPr/>
         </p:nvSpPr>
@@ -24967,7 +25040,7 @@
       </p:sp>
       <p:sp>
         <p:nvSpPr>
-          <p:cNvPr id="40" name="o422"/>
+          <p:cNvPr id="40" name="o424"/>
           <p:cNvSpPr txBox="1"/>
           <p:nvPr/>
         </p:nvSpPr>
@@ -25006,7 +25079,7 @@
       </p:sp>
       <p:sp>
         <p:nvSpPr>
-          <p:cNvPr id="41" name="o423"/>
+          <p:cNvPr id="41" name="o425"/>
           <p:cNvSpPr/>
           <p:nvPr/>
         </p:nvSpPr>
@@ -25030,7 +25103,7 @@
       </p:sp>
       <p:sp>
         <p:nvSpPr>
-          <p:cNvPr id="42" name="o424"/>
+          <p:cNvPr id="42" name="o426"/>
           <p:cNvSpPr/>
           <p:nvPr/>
         </p:nvSpPr>
@@ -25055,7 +25128,7 @@
       </p:sp>
       <p:sp>
         <p:nvSpPr>
-          <p:cNvPr id="43" name="o425"/>
+          <p:cNvPr id="43" name="o427"/>
           <p:cNvSpPr/>
           <p:nvPr/>
         </p:nvSpPr>
@@ -25080,7 +25153,7 @@
       </p:sp>
       <p:sp>
         <p:nvSpPr>
-          <p:cNvPr id="44" name="o426"/>
+          <p:cNvPr id="44" name="o428"/>
           <p:cNvSpPr txBox="1"/>
           <p:nvPr/>
         </p:nvSpPr>
@@ -25119,7 +25192,7 @@
       </p:sp>
       <p:sp>
         <p:nvSpPr>
-          <p:cNvPr id="45" name="o427"/>
+          <p:cNvPr id="45" name="o429"/>
           <p:cNvSpPr txBox="1"/>
           <p:nvPr/>
         </p:nvSpPr>
@@ -25158,7 +25231,7 @@
       </p:sp>
       <p:sp>
         <p:nvSpPr>
-          <p:cNvPr id="46" name="o428"/>
+          <p:cNvPr id="46" name="o430"/>
           <p:cNvSpPr txBox="1"/>
           <p:nvPr/>
         </p:nvSpPr>
@@ -25197,7 +25270,7 @@
       </p:sp>
       <p:sp>
         <p:nvSpPr>
-          <p:cNvPr id="47" name="o429"/>
+          <p:cNvPr id="47" name="o431"/>
           <p:cNvSpPr/>
           <p:nvPr/>
         </p:nvSpPr>
@@ -25221,7 +25294,7 @@
       </p:sp>
       <p:sp>
         <p:nvSpPr>
-          <p:cNvPr id="48" name="o430"/>
+          <p:cNvPr id="48" name="o432"/>
           <p:cNvSpPr/>
           <p:nvPr/>
         </p:nvSpPr>
@@ -25246,7 +25319,7 @@
       </p:sp>
       <p:sp>
         <p:nvSpPr>
-          <p:cNvPr id="49" name="o431"/>
+          <p:cNvPr id="49" name="o433"/>
           <p:cNvSpPr/>
           <p:nvPr/>
         </p:nvSpPr>
@@ -25266,7 +25339,7 @@
       </p:sp>
       <p:sp>
         <p:nvSpPr>
-          <p:cNvPr id="50" name="o432"/>
+          <p:cNvPr id="50" name="o434"/>
           <p:cNvSpPr/>
           <p:nvPr/>
         </p:nvSpPr>
@@ -25291,7 +25364,7 @@
       </p:sp>
       <p:sp>
         <p:nvSpPr>
-          <p:cNvPr id="51" name="o433"/>
+          <p:cNvPr id="51" name="o435"/>
           <p:cNvSpPr txBox="1"/>
           <p:nvPr/>
         </p:nvSpPr>
@@ -25330,7 +25403,7 @@
       </p:sp>
       <p:sp>
         <p:nvSpPr>
-          <p:cNvPr id="52" name="o434"/>
+          <p:cNvPr id="52" name="o436"/>
           <p:cNvSpPr txBox="1"/>
           <p:nvPr/>
         </p:nvSpPr>
@@ -25369,7 +25442,7 @@
       </p:sp>
       <p:sp>
         <p:nvSpPr>
-          <p:cNvPr id="53" name="o435"/>
+          <p:cNvPr id="53" name="o437"/>
           <p:cNvSpPr txBox="1"/>
           <p:nvPr/>
         </p:nvSpPr>
@@ -25408,7 +25481,7 @@
       </p:sp>
       <p:sp>
         <p:nvSpPr>
-          <p:cNvPr id="54" name="o436"/>
+          <p:cNvPr id="54" name="o438"/>
           <p:cNvSpPr/>
           <p:nvPr/>
         </p:nvSpPr>
@@ -25432,7 +25505,7 @@
       </p:sp>
       <p:sp>
         <p:nvSpPr>
-          <p:cNvPr id="55" name="o437"/>
+          <p:cNvPr id="55" name="o439"/>
           <p:cNvSpPr/>
           <p:nvPr/>
         </p:nvSpPr>
@@ -25457,7 +25530,7 @@
       </p:sp>
       <p:sp>
         <p:nvSpPr>
-          <p:cNvPr id="56" name="o438"/>
+          <p:cNvPr id="56" name="o440"/>
           <p:cNvSpPr/>
           <p:nvPr/>
         </p:nvSpPr>
@@ -25482,7 +25555,7 @@
       </p:sp>
       <p:sp>
         <p:nvSpPr>
-          <p:cNvPr id="57" name="o439"/>
+          <p:cNvPr id="57" name="o441"/>
           <p:cNvSpPr txBox="1"/>
           <p:nvPr/>
         </p:nvSpPr>
@@ -25521,7 +25594,7 @@
       </p:sp>
       <p:sp>
         <p:nvSpPr>
-          <p:cNvPr id="58" name="o440"/>
+          <p:cNvPr id="58" name="o442"/>
           <p:cNvSpPr txBox="1"/>
           <p:nvPr/>
         </p:nvSpPr>
@@ -25560,7 +25633,7 @@
       </p:sp>
       <p:sp>
         <p:nvSpPr>
-          <p:cNvPr id="59" name="o441"/>
+          <p:cNvPr id="59" name="o443"/>
           <p:cNvSpPr txBox="1"/>
           <p:nvPr/>
         </p:nvSpPr>
@@ -25599,7 +25672,7 @@
       </p:sp>
       <p:sp>
         <p:nvSpPr>
-          <p:cNvPr id="60" name="o442"/>
+          <p:cNvPr id="60" name="o444"/>
           <p:cNvSpPr/>
           <p:nvPr/>
         </p:nvSpPr>
@@ -25619,7 +25692,7 @@
       </p:sp>
       <p:sp>
         <p:nvSpPr>
-          <p:cNvPr id="61" name="o443"/>
+          <p:cNvPr id="61" name="o445"/>
           <p:cNvSpPr/>
           <p:nvPr/>
         </p:nvSpPr>
@@ -25639,7 +25712,7 @@
       </p:sp>
       <p:sp>
         <p:nvSpPr>
-          <p:cNvPr id="62" name="o444"/>
+          <p:cNvPr id="62" name="o446"/>
           <p:cNvSpPr txBox="1"/>
           <p:nvPr/>
         </p:nvSpPr>
@@ -25706,7 +25779,7 @@
       </p:grpSpPr>
       <p:sp>
         <p:nvSpPr>
-          <p:cNvPr id="2" name="o445"/>
+          <p:cNvPr id="2" name="o447"/>
           <p:cNvSpPr txBox="1"/>
           <p:nvPr/>
         </p:nvSpPr>
@@ -25745,7 +25818,7 @@
       </p:sp>
       <p:sp>
         <p:nvSpPr>
-          <p:cNvPr id="3" name="o446"/>
+          <p:cNvPr id="3" name="o448"/>
           <p:cNvSpPr txBox="1"/>
           <p:nvPr/>
         </p:nvSpPr>
@@ -25787,7 +25860,7 @@
       </p:sp>
       <p:sp>
         <p:nvSpPr>
-          <p:cNvPr id="4" name="o447"/>
+          <p:cNvPr id="4" name="o449"/>
           <p:cNvSpPr txBox="1"/>
           <p:nvPr/>
         </p:nvSpPr>
@@ -25826,7 +25899,7 @@
       </p:sp>
       <p:sp>
         <p:nvSpPr>
-          <p:cNvPr id="5" name="o448"/>
+          <p:cNvPr id="5" name="o450"/>
           <p:cNvSpPr/>
           <p:nvPr/>
         </p:nvSpPr>
@@ -25849,7 +25922,7 @@
       </p:sp>
       <p:sp>
         <p:nvSpPr>
-          <p:cNvPr id="6" name="o449"/>
+          <p:cNvPr id="6" name="o451"/>
           <p:cNvSpPr txBox="1"/>
           <p:nvPr/>
         </p:nvSpPr>
@@ -25888,7 +25961,7 @@
       </p:sp>
       <p:sp>
         <p:nvSpPr>
-          <p:cNvPr id="7" name="o450"/>
+          <p:cNvPr id="7" name="o452"/>
           <p:cNvSpPr txBox="1"/>
           <p:nvPr/>
         </p:nvSpPr>
@@ -25927,7 +26000,7 @@
       </p:sp>
       <p:sp>
         <p:nvSpPr>
-          <p:cNvPr id="8" name="o451"/>
+          <p:cNvPr id="8" name="o453"/>
           <p:cNvSpPr txBox="1"/>
           <p:nvPr/>
         </p:nvSpPr>
@@ -25966,7 +26039,7 @@
       </p:sp>
       <p:sp>
         <p:nvSpPr>
-          <p:cNvPr id="9" name="o452"/>
+          <p:cNvPr id="9" name="o454"/>
           <p:cNvSpPr txBox="1"/>
           <p:nvPr/>
         </p:nvSpPr>
@@ -26005,7 +26078,7 @@
       </p:sp>
       <p:graphicFrame>
         <p:nvGraphicFramePr>
-          <p:cNvPr id="10" name="o453" descr=""/>
+          <p:cNvPr id="10" name="o455" descr=""/>
           <p:cNvGraphicFramePr/>
           <p:nvPr/>
         </p:nvGraphicFramePr>
@@ -26021,7 +26094,7 @@
       </p:graphicFrame>
       <p:sp>
         <p:nvSpPr>
-          <p:cNvPr id="11" name="o454"/>
+          <p:cNvPr id="11" name="o456"/>
           <p:cNvSpPr txBox="1"/>
           <p:nvPr/>
         </p:nvSpPr>
@@ -26060,7 +26133,7 @@
       </p:sp>
       <p:sp>
         <p:nvSpPr>
-          <p:cNvPr id="12" name="o455"/>
+          <p:cNvPr id="12" name="o457"/>
           <p:cNvSpPr txBox="1"/>
           <p:nvPr/>
         </p:nvSpPr>
@@ -26099,7 +26172,7 @@
       </p:sp>
       <p:sp>
         <p:nvSpPr>
-          <p:cNvPr id="13" name="o456"/>
+          <p:cNvPr id="13" name="o458"/>
           <p:cNvSpPr/>
           <p:nvPr/>
         </p:nvSpPr>
@@ -26119,7 +26192,7 @@
       </p:sp>
       <p:sp>
         <p:nvSpPr>
-          <p:cNvPr id="14" name="o457"/>
+          <p:cNvPr id="14" name="o459"/>
           <p:cNvSpPr/>
           <p:nvPr/>
         </p:nvSpPr>
@@ -26139,7 +26212,7 @@
       </p:sp>
       <p:sp>
         <p:nvSpPr>
-          <p:cNvPr id="15" name="o458"/>
+          <p:cNvPr id="15" name="o460"/>
           <p:cNvSpPr txBox="1"/>
           <p:nvPr/>
         </p:nvSpPr>
@@ -26181,7 +26254,7 @@
       </p:sp>
       <p:sp>
         <p:nvSpPr>
-          <p:cNvPr id="16" name="o459"/>
+          <p:cNvPr id="16" name="o461"/>
           <p:cNvSpPr/>
           <p:nvPr/>
         </p:nvSpPr>
@@ -26206,7 +26279,7 @@
       </p:sp>
       <p:sp>
         <p:nvSpPr>
-          <p:cNvPr id="17" name="o460"/>
+          <p:cNvPr id="17" name="o462"/>
           <p:cNvSpPr txBox="1"/>
           <p:nvPr/>
         </p:nvSpPr>
@@ -26245,7 +26318,7 @@
       </p:sp>
       <p:sp>
         <p:nvSpPr>
-          <p:cNvPr id="18" name="o461"/>
+          <p:cNvPr id="18" name="o463"/>
           <p:cNvSpPr txBox="1"/>
           <p:nvPr/>
         </p:nvSpPr>
@@ -26284,7 +26357,7 @@
       </p:sp>
       <p:sp>
         <p:nvSpPr>
-          <p:cNvPr id="19" name="o462"/>
+          <p:cNvPr id="19" name="o464"/>
           <p:cNvSpPr txBox="1"/>
           <p:nvPr/>
         </p:nvSpPr>
@@ -26323,7 +26396,7 @@
       </p:sp>
       <p:sp>
         <p:nvSpPr>
-          <p:cNvPr id="20" name="o463"/>
+          <p:cNvPr id="20" name="o465"/>
           <p:cNvSpPr/>
           <p:nvPr/>
         </p:nvSpPr>
@@ -26348,7 +26421,7 @@
       </p:sp>
       <p:sp>
         <p:nvSpPr>
-          <p:cNvPr id="21" name="o464"/>
+          <p:cNvPr id="21" name="o466"/>
           <p:cNvSpPr txBox="1"/>
           <p:nvPr/>
         </p:nvSpPr>
@@ -26387,7 +26460,7 @@
       </p:sp>
       <p:sp>
         <p:nvSpPr>
-          <p:cNvPr id="22" name="o465"/>
+          <p:cNvPr id="22" name="o467"/>
           <p:cNvSpPr txBox="1"/>
           <p:nvPr/>
         </p:nvSpPr>
@@ -26426,7 +26499,7 @@
       </p:sp>
       <p:sp>
         <p:nvSpPr>
-          <p:cNvPr id="23" name="o466"/>
+          <p:cNvPr id="23" name="o468"/>
           <p:cNvSpPr txBox="1"/>
           <p:nvPr/>
         </p:nvSpPr>
@@ -26465,7 +26538,7 @@
       </p:sp>
       <p:sp>
         <p:nvSpPr>
-          <p:cNvPr id="24" name="o467"/>
+          <p:cNvPr id="24" name="o469"/>
           <p:cNvSpPr/>
           <p:nvPr/>
         </p:nvSpPr>
@@ -26490,7 +26563,7 @@
       </p:sp>
       <p:sp>
         <p:nvSpPr>
-          <p:cNvPr id="25" name="o468"/>
+          <p:cNvPr id="25" name="o470"/>
           <p:cNvSpPr txBox="1"/>
           <p:nvPr/>
         </p:nvSpPr>
@@ -26529,7 +26602,7 @@
       </p:sp>
       <p:sp>
         <p:nvSpPr>
-          <p:cNvPr id="26" name="o469"/>
+          <p:cNvPr id="26" name="o471"/>
           <p:cNvSpPr txBox="1"/>
           <p:nvPr/>
         </p:nvSpPr>
@@ -26568,7 +26641,7 @@
       </p:sp>
       <p:sp>
         <p:nvSpPr>
-          <p:cNvPr id="27" name="o470"/>
+          <p:cNvPr id="27" name="o472"/>
           <p:cNvSpPr txBox="1"/>
           <p:nvPr/>
         </p:nvSpPr>
@@ -26607,7 +26680,7 @@
       </p:sp>
       <p:sp>
         <p:nvSpPr>
-          <p:cNvPr id="28" name="o471"/>
+          <p:cNvPr id="28" name="o473"/>
           <p:cNvSpPr txBox="1"/>
           <p:nvPr/>
         </p:nvSpPr>
@@ -26646,7 +26719,7 @@
       </p:sp>
       <p:sp>
         <p:nvSpPr>
-          <p:cNvPr id="29" name="o472"/>
+          <p:cNvPr id="29" name="o474"/>
           <p:cNvSpPr/>
           <p:nvPr/>
         </p:nvSpPr>
@@ -26666,7 +26739,7 @@
       </p:sp>
       <p:sp>
         <p:nvSpPr>
-          <p:cNvPr id="30" name="o473"/>
+          <p:cNvPr id="30" name="o475"/>
           <p:cNvSpPr txBox="1"/>
           <p:nvPr/>
         </p:nvSpPr>
@@ -26705,7 +26778,7 @@
       </p:sp>
       <p:sp>
         <p:nvSpPr>
-          <p:cNvPr id="31" name="o474"/>
+          <p:cNvPr id="31" name="o476"/>
           <p:cNvSpPr txBox="1"/>
           <p:nvPr/>
         </p:nvSpPr>
@@ -26744,7 +26817,7 @@
       </p:sp>
       <p:sp>
         <p:nvSpPr>
-          <p:cNvPr id="32" name="o475"/>
+          <p:cNvPr id="32" name="o477"/>
           <p:cNvSpPr txBox="1"/>
           <p:nvPr/>
         </p:nvSpPr>
@@ -26783,7 +26856,7 @@
       </p:sp>
       <p:sp>
         <p:nvSpPr>
-          <p:cNvPr id="33" name="o476"/>
+          <p:cNvPr id="33" name="o478"/>
           <p:cNvSpPr txBox="1"/>
           <p:nvPr/>
         </p:nvSpPr>
@@ -26822,7 +26895,7 @@
       </p:sp>
       <p:sp>
         <p:nvSpPr>
-          <p:cNvPr id="34" name="o477"/>
+          <p:cNvPr id="34" name="o479"/>
           <p:cNvSpPr txBox="1"/>
           <p:nvPr/>
         </p:nvSpPr>
@@ -26861,7 +26934,7 @@
       </p:sp>
       <p:sp>
         <p:nvSpPr>
-          <p:cNvPr id="35" name="o478"/>
+          <p:cNvPr id="35" name="o480"/>
           <p:cNvSpPr/>
           <p:nvPr/>
         </p:nvSpPr>
@@ -26884,7 +26957,7 @@
       </p:sp>
       <p:sp>
         <p:nvSpPr>
-          <p:cNvPr id="36" name="o479"/>
+          <p:cNvPr id="36" name="o481"/>
           <p:cNvSpPr txBox="1"/>
           <p:nvPr/>
         </p:nvSpPr>
@@ -26923,7 +26996,7 @@
       </p:sp>
       <p:sp>
         <p:nvSpPr>
-          <p:cNvPr id="37" name="o480"/>
+          <p:cNvPr id="37" name="o482"/>
           <p:cNvSpPr txBox="1"/>
           <p:nvPr/>
         </p:nvSpPr>
@@ -26962,7 +27035,7 @@
       </p:sp>
       <p:sp>
         <p:nvSpPr>
-          <p:cNvPr id="38" name="o481"/>
+          <p:cNvPr id="38" name="o483"/>
           <p:cNvSpPr txBox="1"/>
           <p:nvPr/>
         </p:nvSpPr>
@@ -27001,7 +27074,7 @@
       </p:sp>
       <p:sp>
         <p:nvSpPr>
-          <p:cNvPr id="39" name="o482"/>
+          <p:cNvPr id="39" name="o484"/>
           <p:cNvSpPr txBox="1"/>
           <p:nvPr/>
         </p:nvSpPr>
@@ -27040,7 +27113,7 @@
       </p:sp>
       <p:sp>
         <p:nvSpPr>
-          <p:cNvPr id="40" name="o483"/>
+          <p:cNvPr id="40" name="o485"/>
           <p:cNvSpPr txBox="1"/>
           <p:nvPr/>
         </p:nvSpPr>
@@ -27079,7 +27152,7 @@
       </p:sp>
       <p:sp>
         <p:nvSpPr>
-          <p:cNvPr id="41" name="o484"/>
+          <p:cNvPr id="41" name="o486"/>
           <p:cNvSpPr/>
           <p:nvPr/>
         </p:nvSpPr>
@@ -27102,7 +27175,7 @@
       </p:sp>
       <p:sp>
         <p:nvSpPr>
-          <p:cNvPr id="42" name="o485"/>
+          <p:cNvPr id="42" name="o487"/>
           <p:cNvSpPr txBox="1"/>
           <p:nvPr/>
         </p:nvSpPr>
@@ -27141,7 +27214,7 @@
       </p:sp>
       <p:sp>
         <p:nvSpPr>
-          <p:cNvPr id="43" name="o486"/>
+          <p:cNvPr id="43" name="o488"/>
           <p:cNvSpPr txBox="1"/>
           <p:nvPr/>
         </p:nvSpPr>
@@ -27180,7 +27253,7 @@
       </p:sp>
       <p:sp>
         <p:nvSpPr>
-          <p:cNvPr id="44" name="o487"/>
+          <p:cNvPr id="44" name="o489"/>
           <p:cNvSpPr txBox="1"/>
           <p:nvPr/>
         </p:nvSpPr>
@@ -27219,7 +27292,7 @@
       </p:sp>
       <p:sp>
         <p:nvSpPr>
-          <p:cNvPr id="45" name="o488"/>
+          <p:cNvPr id="45" name="o490"/>
           <p:cNvSpPr txBox="1"/>
           <p:nvPr/>
         </p:nvSpPr>
@@ -27258,7 +27331,7 @@
       </p:sp>
       <p:sp>
         <p:nvSpPr>
-          <p:cNvPr id="46" name="o489"/>
+          <p:cNvPr id="46" name="o491"/>
           <p:cNvSpPr txBox="1"/>
           <p:nvPr/>
         </p:nvSpPr>
@@ -27297,7 +27370,7 @@
       </p:sp>
       <p:sp>
         <p:nvSpPr>
-          <p:cNvPr id="47" name="o490"/>
+          <p:cNvPr id="47" name="o492"/>
           <p:cNvSpPr/>
           <p:nvPr/>
         </p:nvSpPr>
@@ -27320,7 +27393,7 @@
       </p:sp>
       <p:sp>
         <p:nvSpPr>
-          <p:cNvPr id="48" name="o491"/>
+          <p:cNvPr id="48" name="o493"/>
           <p:cNvSpPr txBox="1"/>
           <p:nvPr/>
         </p:nvSpPr>
@@ -27359,7 +27432,7 @@
       </p:sp>
       <p:sp>
         <p:nvSpPr>
-          <p:cNvPr id="49" name="o492"/>
+          <p:cNvPr id="49" name="o494"/>
           <p:cNvSpPr txBox="1"/>
           <p:nvPr/>
         </p:nvSpPr>
@@ -27398,7 +27471,7 @@
       </p:sp>
       <p:sp>
         <p:nvSpPr>
-          <p:cNvPr id="50" name="o493"/>
+          <p:cNvPr id="50" name="o495"/>
           <p:cNvSpPr txBox="1"/>
           <p:nvPr/>
         </p:nvSpPr>
@@ -27437,7 +27510,7 @@
       </p:sp>
       <p:sp>
         <p:nvSpPr>
-          <p:cNvPr id="51" name="o494"/>
+          <p:cNvPr id="51" name="o496"/>
           <p:cNvSpPr txBox="1"/>
           <p:nvPr/>
         </p:nvSpPr>
@@ -27476,7 +27549,7 @@
       </p:sp>
       <p:sp>
         <p:nvSpPr>
-          <p:cNvPr id="52" name="o495"/>
+          <p:cNvPr id="52" name="o497"/>
           <p:cNvSpPr txBox="1"/>
           <p:nvPr/>
         </p:nvSpPr>
@@ -27515,7 +27588,7 @@
       </p:sp>
       <p:sp>
         <p:nvSpPr>
-          <p:cNvPr id="53" name="o496"/>
+          <p:cNvPr id="53" name="o498"/>
           <p:cNvSpPr/>
           <p:nvPr/>
         </p:nvSpPr>
@@ -27538,7 +27611,7 @@
       </p:sp>
       <p:sp>
         <p:nvSpPr>
-          <p:cNvPr id="54" name="o497"/>
+          <p:cNvPr id="54" name="o499"/>
           <p:cNvSpPr txBox="1"/>
           <p:nvPr/>
         </p:nvSpPr>
@@ -27577,7 +27650,7 @@
       </p:sp>
       <p:sp>
         <p:nvSpPr>
-          <p:cNvPr id="55" name="o498"/>
+          <p:cNvPr id="55" name="o500"/>
           <p:cNvSpPr txBox="1"/>
           <p:nvPr/>
         </p:nvSpPr>
@@ -27616,7 +27689,7 @@
       </p:sp>
       <p:sp>
         <p:nvSpPr>
-          <p:cNvPr id="56" name="o499"/>
+          <p:cNvPr id="56" name="o501"/>
           <p:cNvSpPr txBox="1"/>
           <p:nvPr/>
         </p:nvSpPr>
@@ -27655,7 +27728,7 @@
       </p:sp>
       <p:sp>
         <p:nvSpPr>
-          <p:cNvPr id="57" name="o500"/>
+          <p:cNvPr id="57" name="o502"/>
           <p:cNvSpPr txBox="1"/>
           <p:nvPr/>
         </p:nvSpPr>
@@ -27694,7 +27767,7 @@
       </p:sp>
       <p:sp>
         <p:nvSpPr>
-          <p:cNvPr id="58" name="o501"/>
+          <p:cNvPr id="58" name="o503"/>
           <p:cNvSpPr txBox="1"/>
           <p:nvPr/>
         </p:nvSpPr>
@@ -27733,7 +27806,7 @@
       </p:sp>
       <p:sp>
         <p:nvSpPr>
-          <p:cNvPr id="59" name="o502"/>
+          <p:cNvPr id="59" name="o504"/>
           <p:cNvSpPr/>
           <p:nvPr/>
         </p:nvSpPr>
@@ -27756,7 +27829,7 @@
       </p:sp>
       <p:sp>
         <p:nvSpPr>
-          <p:cNvPr id="60" name="o503"/>
+          <p:cNvPr id="60" name="o505"/>
           <p:cNvSpPr/>
           <p:nvPr/>
         </p:nvSpPr>
@@ -27779,7 +27852,7 @@
       </p:sp>
       <p:sp>
         <p:nvSpPr>
-          <p:cNvPr id="61" name="o504"/>
+          <p:cNvPr id="61" name="o506"/>
           <p:cNvSpPr txBox="1"/>
           <p:nvPr/>
         </p:nvSpPr>

--- a/docs/QI_경진대회_발표_BCG.pptx
+++ b/docs/QI_경진대회_발표_BCG.pptx
@@ -119,14 +119,14 @@
   <p:extLst>
     <p:ext uri="{521415D9-36F7-43E2-AB2F-B90AF26B5E84}">
       <p14:sectionLst xmlns:p14="http://schemas.microsoft.com/office/powerpoint/2010/main">
-        <p14:section name="도입" id="{2509124e-79aa-de03-e504-384aa91c557e}">
+        <p14:section name="도입" id="{10df8983-3620-1b48-4a96-518d3762b58c}">
           <p14:sldIdLst>
             <p14:sldId id="256"/>
             <p14:sldId id="257"/>
             <p14:sldId id="258"/>
           </p14:sldIdLst>
         </p14:section>
-        <p14:section name="Plan" id="{541d466c-51fd-750a-58d8-462dbc63cd62}">
+        <p14:section name="Plan" id="{d65afb58-fbb2-f1d1-344f-783305d2fce7}">
           <p14:sldIdLst>
             <p14:sldId id="259"/>
             <p14:sldId id="260"/>
@@ -134,18 +134,18 @@
             <p14:sldId id="262"/>
           </p14:sldIdLst>
         </p14:section>
-        <p14:section name="Do" id="{a5932ea1-d84b-4921-3a85-63ede1666a02}">
+        <p14:section name="Do" id="{0f731f17-3adb-318b-1c6a-58964a04d4d2}">
           <p14:sldIdLst>
             <p14:sldId id="263"/>
           </p14:sldIdLst>
         </p14:section>
-        <p14:section name="Check" id="{94bed21a-394a-65e3-5873-cb76f6962255}">
+        <p14:section name="Check" id="{37cdc72f-f5f1-d5c8-d7ea-eae7b8456fb5}">
           <p14:sldIdLst>
             <p14:sldId id="264"/>
             <p14:sldId id="265"/>
           </p14:sldIdLst>
         </p14:section>
-        <p14:section name="Act" id="{5bc71ca4-c2b5-6290-15b7-7520b87a9a07}">
+        <p14:section name="Act" id="{4aa6ef64-b132-ddc8-8e93-20686fa87c08}">
           <p14:sldIdLst>
             <p14:sldId id="266"/>
             <p14:sldId id="267"/>
@@ -3813,7 +3813,7 @@
       </p:grpSpPr>
       <p:sp>
         <p:nvSpPr>
-          <p:cNvPr id="2" name="o507"/>
+          <p:cNvPr id="2" name="o501"/>
           <p:cNvSpPr txBox="1"/>
           <p:nvPr/>
         </p:nvSpPr>
@@ -3852,7 +3852,7 @@
       </p:sp>
       <p:sp>
         <p:nvSpPr>
-          <p:cNvPr id="3" name="o508"/>
+          <p:cNvPr id="3" name="o502"/>
           <p:cNvSpPr txBox="1"/>
           <p:nvPr/>
         </p:nvSpPr>
@@ -3894,7 +3894,7 @@
       </p:sp>
       <p:sp>
         <p:nvSpPr>
-          <p:cNvPr id="4" name="o509"/>
+          <p:cNvPr id="4" name="o503"/>
           <p:cNvSpPr txBox="1"/>
           <p:nvPr/>
         </p:nvSpPr>
@@ -3933,7 +3933,7 @@
       </p:sp>
       <p:sp>
         <p:nvSpPr>
-          <p:cNvPr id="5" name="o510"/>
+          <p:cNvPr id="5" name="o504"/>
           <p:cNvSpPr/>
           <p:nvPr/>
         </p:nvSpPr>
@@ -3956,7 +3956,7 @@
       </p:sp>
       <p:sp>
         <p:nvSpPr>
-          <p:cNvPr id="6" name="o511"/>
+          <p:cNvPr id="6" name="o505"/>
           <p:cNvSpPr txBox="1"/>
           <p:nvPr/>
         </p:nvSpPr>
@@ -3995,7 +3995,7 @@
       </p:sp>
       <p:sp>
         <p:nvSpPr>
-          <p:cNvPr id="7" name="o512"/>
+          <p:cNvPr id="7" name="o506"/>
           <p:cNvSpPr txBox="1"/>
           <p:nvPr/>
         </p:nvSpPr>
@@ -4034,7 +4034,7 @@
       </p:sp>
       <p:sp>
         <p:nvSpPr>
-          <p:cNvPr id="8" name="o513"/>
+          <p:cNvPr id="8" name="o507"/>
           <p:cNvSpPr txBox="1"/>
           <p:nvPr/>
         </p:nvSpPr>
@@ -4073,7 +4073,7 @@
       </p:sp>
       <p:sp>
         <p:nvSpPr>
-          <p:cNvPr id="9" name="o514"/>
+          <p:cNvPr id="9" name="o508"/>
           <p:cNvSpPr txBox="1"/>
           <p:nvPr/>
         </p:nvSpPr>
@@ -4112,7 +4112,7 @@
       </p:sp>
       <p:sp>
         <p:nvSpPr>
-          <p:cNvPr id="10" name="o515"/>
+          <p:cNvPr id="10" name="o509"/>
           <p:cNvSpPr/>
           <p:nvPr/>
         </p:nvSpPr>
@@ -4132,7 +4132,7 @@
       </p:sp>
       <p:sp>
         <p:nvSpPr>
-          <p:cNvPr id="11" name="o516"/>
+          <p:cNvPr id="11" name="o510"/>
           <p:cNvSpPr txBox="1"/>
           <p:nvPr/>
         </p:nvSpPr>
@@ -4171,7 +4171,7 @@
       </p:sp>
       <p:sp>
         <p:nvSpPr>
-          <p:cNvPr id="12" name="o517"/>
+          <p:cNvPr id="12" name="o511"/>
           <p:cNvSpPr txBox="1"/>
           <p:nvPr/>
         </p:nvSpPr>
@@ -4210,7 +4210,7 @@
       </p:sp>
       <p:sp>
         <p:nvSpPr>
-          <p:cNvPr id="13" name="o518"/>
+          <p:cNvPr id="13" name="o512"/>
           <p:cNvSpPr/>
           <p:nvPr/>
         </p:nvSpPr>
@@ -4233,7 +4233,7 @@
       </p:sp>
       <p:sp>
         <p:nvSpPr>
-          <p:cNvPr id="14" name="o519"/>
+          <p:cNvPr id="14" name="o513"/>
           <p:cNvSpPr/>
           <p:nvPr/>
         </p:nvSpPr>
@@ -4258,7 +4258,7 @@
       </p:sp>
       <p:sp>
         <p:nvSpPr>
-          <p:cNvPr id="15" name="o520"/>
+          <p:cNvPr id="15" name="o514"/>
           <p:cNvSpPr txBox="1"/>
           <p:nvPr/>
         </p:nvSpPr>
@@ -4297,7 +4297,7 @@
       </p:sp>
       <p:sp>
         <p:nvSpPr>
-          <p:cNvPr id="16" name="o521"/>
+          <p:cNvPr id="16" name="o515"/>
           <p:cNvSpPr txBox="1"/>
           <p:nvPr/>
         </p:nvSpPr>
@@ -4336,7 +4336,7 @@
       </p:sp>
       <p:sp>
         <p:nvSpPr>
-          <p:cNvPr id="17" name="o522"/>
+          <p:cNvPr id="17" name="o516"/>
           <p:cNvSpPr/>
           <p:nvPr/>
         </p:nvSpPr>
@@ -4359,7 +4359,7 @@
       </p:sp>
       <p:sp>
         <p:nvSpPr>
-          <p:cNvPr id="18" name="o523"/>
+          <p:cNvPr id="18" name="o517"/>
           <p:cNvSpPr/>
           <p:nvPr/>
         </p:nvSpPr>
@@ -4384,7 +4384,7 @@
       </p:sp>
       <p:sp>
         <p:nvSpPr>
-          <p:cNvPr id="19" name="o524"/>
+          <p:cNvPr id="19" name="o518"/>
           <p:cNvSpPr txBox="1"/>
           <p:nvPr/>
         </p:nvSpPr>
@@ -4423,7 +4423,7 @@
       </p:sp>
       <p:sp>
         <p:nvSpPr>
-          <p:cNvPr id="20" name="o525"/>
+          <p:cNvPr id="20" name="o519"/>
           <p:cNvSpPr txBox="1"/>
           <p:nvPr/>
         </p:nvSpPr>
@@ -4462,7 +4462,7 @@
       </p:sp>
       <p:sp>
         <p:nvSpPr>
-          <p:cNvPr id="21" name="o526"/>
+          <p:cNvPr id="21" name="o520"/>
           <p:cNvSpPr/>
           <p:nvPr/>
         </p:nvSpPr>
@@ -4485,7 +4485,7 @@
       </p:sp>
       <p:sp>
         <p:nvSpPr>
-          <p:cNvPr id="22" name="o527"/>
+          <p:cNvPr id="22" name="o521"/>
           <p:cNvSpPr/>
           <p:nvPr/>
         </p:nvSpPr>
@@ -4510,7 +4510,7 @@
       </p:sp>
       <p:sp>
         <p:nvSpPr>
-          <p:cNvPr id="23" name="o528"/>
+          <p:cNvPr id="23" name="o522"/>
           <p:cNvSpPr txBox="1"/>
           <p:nvPr/>
         </p:nvSpPr>
@@ -4549,7 +4549,7 @@
       </p:sp>
       <p:sp>
         <p:nvSpPr>
-          <p:cNvPr id="24" name="o529"/>
+          <p:cNvPr id="24" name="o523"/>
           <p:cNvSpPr txBox="1"/>
           <p:nvPr/>
         </p:nvSpPr>
@@ -4588,7 +4588,7 @@
       </p:sp>
       <p:sp>
         <p:nvSpPr>
-          <p:cNvPr id="25" name="o530"/>
+          <p:cNvPr id="25" name="o524"/>
           <p:cNvSpPr/>
           <p:nvPr/>
         </p:nvSpPr>
@@ -4611,7 +4611,7 @@
       </p:sp>
       <p:sp>
         <p:nvSpPr>
-          <p:cNvPr id="26" name="o531"/>
+          <p:cNvPr id="26" name="o525"/>
           <p:cNvSpPr/>
           <p:nvPr/>
         </p:nvSpPr>
@@ -4636,7 +4636,7 @@
       </p:sp>
       <p:sp>
         <p:nvSpPr>
-          <p:cNvPr id="27" name="o532"/>
+          <p:cNvPr id="27" name="o526"/>
           <p:cNvSpPr txBox="1"/>
           <p:nvPr/>
         </p:nvSpPr>
@@ -4675,7 +4675,7 @@
       </p:sp>
       <p:sp>
         <p:nvSpPr>
-          <p:cNvPr id="28" name="o533"/>
+          <p:cNvPr id="28" name="o527"/>
           <p:cNvSpPr txBox="1"/>
           <p:nvPr/>
         </p:nvSpPr>
@@ -4714,7 +4714,7 @@
       </p:sp>
       <p:sp>
         <p:nvSpPr>
-          <p:cNvPr id="29" name="o534"/>
+          <p:cNvPr id="29" name="o528"/>
           <p:cNvSpPr/>
           <p:nvPr/>
         </p:nvSpPr>
@@ -4737,7 +4737,7 @@
       </p:sp>
       <p:sp>
         <p:nvSpPr>
-          <p:cNvPr id="30" name="o535"/>
+          <p:cNvPr id="30" name="o529"/>
           <p:cNvSpPr/>
           <p:nvPr/>
         </p:nvSpPr>
@@ -4762,7 +4762,7 @@
       </p:sp>
       <p:sp>
         <p:nvSpPr>
-          <p:cNvPr id="31" name="o536"/>
+          <p:cNvPr id="31" name="o530"/>
           <p:cNvSpPr txBox="1"/>
           <p:nvPr/>
         </p:nvSpPr>
@@ -4801,7 +4801,7 @@
       </p:sp>
       <p:sp>
         <p:nvSpPr>
-          <p:cNvPr id="32" name="o537"/>
+          <p:cNvPr id="32" name="o531"/>
           <p:cNvSpPr txBox="1"/>
           <p:nvPr/>
         </p:nvSpPr>
@@ -4840,7 +4840,7 @@
       </p:sp>
       <p:sp>
         <p:nvSpPr>
-          <p:cNvPr id="33" name="o538"/>
+          <p:cNvPr id="33" name="o532"/>
           <p:cNvSpPr/>
           <p:nvPr/>
         </p:nvSpPr>
@@ -4863,7 +4863,7 @@
       </p:sp>
       <p:sp>
         <p:nvSpPr>
-          <p:cNvPr id="34" name="o539"/>
+          <p:cNvPr id="34" name="o533"/>
           <p:cNvSpPr/>
           <p:nvPr/>
         </p:nvSpPr>
@@ -4888,7 +4888,7 @@
       </p:sp>
       <p:sp>
         <p:nvSpPr>
-          <p:cNvPr id="35" name="o540"/>
+          <p:cNvPr id="35" name="o534"/>
           <p:cNvSpPr txBox="1"/>
           <p:nvPr/>
         </p:nvSpPr>
@@ -4927,7 +4927,7 @@
       </p:sp>
       <p:sp>
         <p:nvSpPr>
-          <p:cNvPr id="36" name="o541"/>
+          <p:cNvPr id="36" name="o535"/>
           <p:cNvSpPr txBox="1"/>
           <p:nvPr/>
         </p:nvSpPr>
@@ -4966,7 +4966,7 @@
       </p:sp>
       <p:sp>
         <p:nvSpPr>
-          <p:cNvPr id="37" name="o542"/>
+          <p:cNvPr id="37" name="o536"/>
           <p:cNvSpPr/>
           <p:nvPr/>
         </p:nvSpPr>
@@ -4989,7 +4989,7 @@
       </p:sp>
       <p:sp>
         <p:nvSpPr>
-          <p:cNvPr id="38" name="o543"/>
+          <p:cNvPr id="38" name="o537"/>
           <p:cNvSpPr/>
           <p:nvPr/>
         </p:nvSpPr>
@@ -5009,7 +5009,7 @@
       </p:sp>
       <p:sp>
         <p:nvSpPr>
-          <p:cNvPr id="39" name="o544"/>
+          <p:cNvPr id="39" name="o538"/>
           <p:cNvSpPr txBox="1"/>
           <p:nvPr/>
         </p:nvSpPr>
@@ -5048,7 +5048,7 @@
       </p:sp>
       <p:sp>
         <p:nvSpPr>
-          <p:cNvPr id="40" name="o545"/>
+          <p:cNvPr id="40" name="o539"/>
           <p:cNvSpPr txBox="1"/>
           <p:nvPr/>
         </p:nvSpPr>
@@ -5087,7 +5087,7 @@
       </p:sp>
       <p:sp>
         <p:nvSpPr>
-          <p:cNvPr id="41" name="o546"/>
+          <p:cNvPr id="41" name="o540"/>
           <p:cNvSpPr/>
           <p:nvPr/>
         </p:nvSpPr>
@@ -5110,7 +5110,7 @@
       </p:sp>
       <p:sp>
         <p:nvSpPr>
-          <p:cNvPr id="42" name="o547"/>
+          <p:cNvPr id="42" name="o541"/>
           <p:cNvSpPr/>
           <p:nvPr/>
         </p:nvSpPr>
@@ -5130,7 +5130,7 @@
       </p:sp>
       <p:sp>
         <p:nvSpPr>
-          <p:cNvPr id="43" name="o548"/>
+          <p:cNvPr id="43" name="o542"/>
           <p:cNvSpPr txBox="1"/>
           <p:nvPr/>
         </p:nvSpPr>
@@ -5169,7 +5169,7 @@
       </p:sp>
       <p:sp>
         <p:nvSpPr>
-          <p:cNvPr id="44" name="o549"/>
+          <p:cNvPr id="44" name="o543"/>
           <p:cNvSpPr txBox="1"/>
           <p:nvPr/>
         </p:nvSpPr>
@@ -5208,7 +5208,7 @@
       </p:sp>
       <p:sp>
         <p:nvSpPr>
-          <p:cNvPr id="45" name="o550"/>
+          <p:cNvPr id="45" name="o544"/>
           <p:cNvSpPr/>
           <p:nvPr/>
         </p:nvSpPr>
@@ -5231,7 +5231,7 @@
       </p:sp>
       <p:sp>
         <p:nvSpPr>
-          <p:cNvPr id="46" name="o551"/>
+          <p:cNvPr id="46" name="o545"/>
           <p:cNvSpPr/>
           <p:nvPr/>
         </p:nvSpPr>
@@ -5251,7 +5251,7 @@
       </p:sp>
       <p:sp>
         <p:nvSpPr>
-          <p:cNvPr id="47" name="o552"/>
+          <p:cNvPr id="47" name="o546"/>
           <p:cNvSpPr/>
           <p:nvPr/>
         </p:nvSpPr>
@@ -5271,7 +5271,7 @@
       </p:sp>
       <p:sp>
         <p:nvSpPr>
-          <p:cNvPr id="48" name="o553"/>
+          <p:cNvPr id="48" name="o547"/>
           <p:cNvSpPr txBox="1"/>
           <p:nvPr/>
         </p:nvSpPr>
@@ -5313,7 +5313,7 @@
       </p:sp>
       <p:sp>
         <p:nvSpPr>
-          <p:cNvPr id="49" name="o554"/>
+          <p:cNvPr id="49" name="o548"/>
           <p:cNvSpPr/>
           <p:nvPr/>
         </p:nvSpPr>
@@ -5338,7 +5338,7 @@
       </p:sp>
       <p:sp>
         <p:nvSpPr>
-          <p:cNvPr id="50" name="o555"/>
+          <p:cNvPr id="50" name="o549"/>
           <p:cNvSpPr txBox="1"/>
           <p:nvPr/>
         </p:nvSpPr>
@@ -5377,7 +5377,7 @@
       </p:sp>
       <p:sp>
         <p:nvSpPr>
-          <p:cNvPr id="51" name="o556"/>
+          <p:cNvPr id="51" name="o550"/>
           <p:cNvSpPr txBox="1"/>
           <p:nvPr/>
         </p:nvSpPr>
@@ -5416,7 +5416,7 @@
       </p:sp>
       <p:sp>
         <p:nvSpPr>
-          <p:cNvPr id="52" name="o557"/>
+          <p:cNvPr id="52" name="o551"/>
           <p:cNvSpPr txBox="1"/>
           <p:nvPr/>
         </p:nvSpPr>
@@ -5455,7 +5455,7 @@
       </p:sp>
       <p:sp>
         <p:nvSpPr>
-          <p:cNvPr id="53" name="o558"/>
+          <p:cNvPr id="53" name="o552"/>
           <p:cNvSpPr/>
           <p:nvPr/>
         </p:nvSpPr>
@@ -5480,7 +5480,7 @@
       </p:sp>
       <p:sp>
         <p:nvSpPr>
-          <p:cNvPr id="54" name="o559"/>
+          <p:cNvPr id="54" name="o553"/>
           <p:cNvSpPr txBox="1"/>
           <p:nvPr/>
         </p:nvSpPr>
@@ -5519,7 +5519,7 @@
       </p:sp>
       <p:sp>
         <p:nvSpPr>
-          <p:cNvPr id="55" name="o560"/>
+          <p:cNvPr id="55" name="o554"/>
           <p:cNvSpPr txBox="1"/>
           <p:nvPr/>
         </p:nvSpPr>
@@ -5558,7 +5558,7 @@
       </p:sp>
       <p:sp>
         <p:nvSpPr>
-          <p:cNvPr id="56" name="o561"/>
+          <p:cNvPr id="56" name="o555"/>
           <p:cNvSpPr txBox="1"/>
           <p:nvPr/>
         </p:nvSpPr>
@@ -5597,7 +5597,7 @@
       </p:sp>
       <p:sp>
         <p:nvSpPr>
-          <p:cNvPr id="57" name="o562"/>
+          <p:cNvPr id="57" name="o556"/>
           <p:cNvSpPr txBox="1"/>
           <p:nvPr/>
         </p:nvSpPr>
@@ -5636,7 +5636,7 @@
       </p:sp>
       <p:sp>
         <p:nvSpPr>
-          <p:cNvPr id="58" name="o563"/>
+          <p:cNvPr id="58" name="o557"/>
           <p:cNvSpPr/>
           <p:nvPr/>
         </p:nvSpPr>
@@ -5656,7 +5656,7 @@
       </p:sp>
       <p:sp>
         <p:nvSpPr>
-          <p:cNvPr id="59" name="o564"/>
+          <p:cNvPr id="59" name="o558"/>
           <p:cNvSpPr txBox="1"/>
           <p:nvPr/>
         </p:nvSpPr>
@@ -5695,7 +5695,7 @@
       </p:sp>
       <p:sp>
         <p:nvSpPr>
-          <p:cNvPr id="60" name="o565"/>
+          <p:cNvPr id="60" name="o559"/>
           <p:cNvSpPr txBox="1"/>
           <p:nvPr/>
         </p:nvSpPr>
@@ -5734,7 +5734,7 @@
       </p:sp>
       <p:sp>
         <p:nvSpPr>
-          <p:cNvPr id="61" name="o566"/>
+          <p:cNvPr id="61" name="o560"/>
           <p:cNvSpPr txBox="1"/>
           <p:nvPr/>
         </p:nvSpPr>
@@ -5773,7 +5773,7 @@
       </p:sp>
       <p:sp>
         <p:nvSpPr>
-          <p:cNvPr id="62" name="o567"/>
+          <p:cNvPr id="62" name="o561"/>
           <p:cNvSpPr/>
           <p:nvPr/>
         </p:nvSpPr>
@@ -5796,7 +5796,7 @@
       </p:sp>
       <p:sp>
         <p:nvSpPr>
-          <p:cNvPr id="63" name="o568"/>
+          <p:cNvPr id="63" name="o562"/>
           <p:cNvSpPr txBox="1"/>
           <p:nvPr/>
         </p:nvSpPr>
@@ -5835,7 +5835,7 @@
       </p:sp>
       <p:sp>
         <p:nvSpPr>
-          <p:cNvPr id="64" name="o569"/>
+          <p:cNvPr id="64" name="o563"/>
           <p:cNvSpPr txBox="1"/>
           <p:nvPr/>
         </p:nvSpPr>
@@ -5874,7 +5874,7 @@
       </p:sp>
       <p:sp>
         <p:nvSpPr>
-          <p:cNvPr id="65" name="o570"/>
+          <p:cNvPr id="65" name="o564"/>
           <p:cNvSpPr txBox="1"/>
           <p:nvPr/>
         </p:nvSpPr>
@@ -5913,7 +5913,7 @@
       </p:sp>
       <p:sp>
         <p:nvSpPr>
-          <p:cNvPr id="66" name="o571"/>
+          <p:cNvPr id="66" name="o565"/>
           <p:cNvSpPr/>
           <p:nvPr/>
         </p:nvSpPr>
@@ -5936,7 +5936,7 @@
       </p:sp>
       <p:sp>
         <p:nvSpPr>
-          <p:cNvPr id="67" name="o572"/>
+          <p:cNvPr id="67" name="o566"/>
           <p:cNvSpPr txBox="1"/>
           <p:nvPr/>
         </p:nvSpPr>
@@ -5975,7 +5975,7 @@
       </p:sp>
       <p:sp>
         <p:nvSpPr>
-          <p:cNvPr id="68" name="o573"/>
+          <p:cNvPr id="68" name="o567"/>
           <p:cNvSpPr txBox="1"/>
           <p:nvPr/>
         </p:nvSpPr>
@@ -6014,7 +6014,7 @@
       </p:sp>
       <p:sp>
         <p:nvSpPr>
-          <p:cNvPr id="69" name="o574"/>
+          <p:cNvPr id="69" name="o568"/>
           <p:cNvSpPr txBox="1"/>
           <p:nvPr/>
         </p:nvSpPr>
@@ -6053,7 +6053,7 @@
       </p:sp>
       <p:sp>
         <p:nvSpPr>
-          <p:cNvPr id="70" name="o575"/>
+          <p:cNvPr id="70" name="o569"/>
           <p:cNvSpPr/>
           <p:nvPr/>
         </p:nvSpPr>
@@ -6076,7 +6076,7 @@
       </p:sp>
       <p:sp>
         <p:nvSpPr>
-          <p:cNvPr id="71" name="o576"/>
+          <p:cNvPr id="71" name="o570"/>
           <p:cNvSpPr txBox="1"/>
           <p:nvPr/>
         </p:nvSpPr>
@@ -6115,7 +6115,7 @@
       </p:sp>
       <p:sp>
         <p:nvSpPr>
-          <p:cNvPr id="72" name="o577"/>
+          <p:cNvPr id="72" name="o571"/>
           <p:cNvSpPr txBox="1"/>
           <p:nvPr/>
         </p:nvSpPr>
@@ -6154,7 +6154,7 @@
       </p:sp>
       <p:sp>
         <p:nvSpPr>
-          <p:cNvPr id="73" name="o578"/>
+          <p:cNvPr id="73" name="o572"/>
           <p:cNvSpPr txBox="1"/>
           <p:nvPr/>
         </p:nvSpPr>
@@ -6193,7 +6193,7 @@
       </p:sp>
       <p:sp>
         <p:nvSpPr>
-          <p:cNvPr id="74" name="o579"/>
+          <p:cNvPr id="74" name="o573"/>
           <p:cNvSpPr/>
           <p:nvPr/>
         </p:nvSpPr>
@@ -6216,7 +6216,7 @@
       </p:sp>
       <p:sp>
         <p:nvSpPr>
-          <p:cNvPr id="75" name="o580"/>
+          <p:cNvPr id="75" name="o574"/>
           <p:cNvSpPr txBox="1"/>
           <p:nvPr/>
         </p:nvSpPr>
@@ -6255,7 +6255,7 @@
       </p:sp>
       <p:sp>
         <p:nvSpPr>
-          <p:cNvPr id="76" name="o581"/>
+          <p:cNvPr id="76" name="o575"/>
           <p:cNvSpPr txBox="1"/>
           <p:nvPr/>
         </p:nvSpPr>
@@ -6294,7 +6294,7 @@
       </p:sp>
       <p:sp>
         <p:nvSpPr>
-          <p:cNvPr id="77" name="o582"/>
+          <p:cNvPr id="77" name="o576"/>
           <p:cNvSpPr txBox="1"/>
           <p:nvPr/>
         </p:nvSpPr>
@@ -6333,7 +6333,7 @@
       </p:sp>
       <p:sp>
         <p:nvSpPr>
-          <p:cNvPr id="78" name="o583"/>
+          <p:cNvPr id="78" name="o577"/>
           <p:cNvSpPr/>
           <p:nvPr/>
         </p:nvSpPr>
@@ -6356,7 +6356,7 @@
       </p:sp>
       <p:sp>
         <p:nvSpPr>
-          <p:cNvPr id="79" name="o584"/>
+          <p:cNvPr id="79" name="o578"/>
           <p:cNvSpPr txBox="1"/>
           <p:nvPr/>
         </p:nvSpPr>
@@ -6395,7 +6395,7 @@
       </p:sp>
       <p:sp>
         <p:nvSpPr>
-          <p:cNvPr id="80" name="o585"/>
+          <p:cNvPr id="80" name="o579"/>
           <p:cNvSpPr txBox="1"/>
           <p:nvPr/>
         </p:nvSpPr>
@@ -6434,7 +6434,7 @@
       </p:sp>
       <p:sp>
         <p:nvSpPr>
-          <p:cNvPr id="81" name="o586"/>
+          <p:cNvPr id="81" name="o580"/>
           <p:cNvSpPr txBox="1"/>
           <p:nvPr/>
         </p:nvSpPr>
@@ -6473,7 +6473,7 @@
       </p:sp>
       <p:sp>
         <p:nvSpPr>
-          <p:cNvPr id="82" name="o587"/>
+          <p:cNvPr id="82" name="o581"/>
           <p:cNvSpPr/>
           <p:nvPr/>
         </p:nvSpPr>
@@ -6496,7 +6496,7 @@
       </p:sp>
       <p:sp>
         <p:nvSpPr>
-          <p:cNvPr id="83" name="o588"/>
+          <p:cNvPr id="83" name="o582"/>
           <p:cNvSpPr/>
           <p:nvPr/>
         </p:nvSpPr>
@@ -6519,7 +6519,7 @@
       </p:sp>
       <p:sp>
         <p:nvSpPr>
-          <p:cNvPr id="84" name="o589"/>
+          <p:cNvPr id="84" name="o583"/>
           <p:cNvSpPr txBox="1"/>
           <p:nvPr/>
         </p:nvSpPr>
@@ -6583,7 +6583,7 @@
       </p:grpSpPr>
       <p:sp>
         <p:nvSpPr>
-          <p:cNvPr id="2" name="o590"/>
+          <p:cNvPr id="2" name="o584"/>
           <p:cNvSpPr txBox="1"/>
           <p:nvPr/>
         </p:nvSpPr>
@@ -6622,7 +6622,7 @@
       </p:sp>
       <p:sp>
         <p:nvSpPr>
-          <p:cNvPr id="3" name="o591"/>
+          <p:cNvPr id="3" name="o585"/>
           <p:cNvSpPr txBox="1"/>
           <p:nvPr/>
         </p:nvSpPr>
@@ -6664,7 +6664,7 @@
       </p:sp>
       <p:sp>
         <p:nvSpPr>
-          <p:cNvPr id="4" name="o592"/>
+          <p:cNvPr id="4" name="o586"/>
           <p:cNvSpPr txBox="1"/>
           <p:nvPr/>
         </p:nvSpPr>
@@ -6703,7 +6703,7 @@
       </p:sp>
       <p:sp>
         <p:nvSpPr>
-          <p:cNvPr id="5" name="o593"/>
+          <p:cNvPr id="5" name="o587"/>
           <p:cNvSpPr/>
           <p:nvPr/>
         </p:nvSpPr>
@@ -6726,7 +6726,7 @@
       </p:sp>
       <p:sp>
         <p:nvSpPr>
-          <p:cNvPr id="6" name="o594"/>
+          <p:cNvPr id="6" name="o588"/>
           <p:cNvSpPr txBox="1"/>
           <p:nvPr/>
         </p:nvSpPr>
@@ -6765,7 +6765,7 @@
       </p:sp>
       <p:sp>
         <p:nvSpPr>
-          <p:cNvPr id="7" name="o595"/>
+          <p:cNvPr id="7" name="o589"/>
           <p:cNvSpPr txBox="1"/>
           <p:nvPr/>
         </p:nvSpPr>
@@ -6804,7 +6804,7 @@
       </p:sp>
       <p:sp>
         <p:nvSpPr>
-          <p:cNvPr id="8" name="o596"/>
+          <p:cNvPr id="8" name="o590"/>
           <p:cNvSpPr txBox="1"/>
           <p:nvPr/>
         </p:nvSpPr>
@@ -6843,7 +6843,7 @@
       </p:sp>
       <p:sp>
         <p:nvSpPr>
-          <p:cNvPr id="9" name="o597"/>
+          <p:cNvPr id="9" name="o591"/>
           <p:cNvSpPr txBox="1"/>
           <p:nvPr/>
         </p:nvSpPr>
@@ -6882,7 +6882,7 @@
       </p:sp>
       <p:sp>
         <p:nvSpPr>
-          <p:cNvPr id="10" name="o598"/>
+          <p:cNvPr id="10" name="o592"/>
           <p:cNvSpPr/>
           <p:nvPr/>
         </p:nvSpPr>
@@ -6907,7 +6907,7 @@
       </p:sp>
       <p:sp>
         <p:nvSpPr>
-          <p:cNvPr id="11" name="o599"/>
+          <p:cNvPr id="11" name="o593"/>
           <p:cNvSpPr/>
           <p:nvPr/>
         </p:nvSpPr>
@@ -6932,7 +6932,7 @@
       </p:sp>
       <p:sp>
         <p:nvSpPr>
-          <p:cNvPr id="12" name="o600"/>
+          <p:cNvPr id="12" name="o594"/>
           <p:cNvSpPr txBox="1"/>
           <p:nvPr/>
         </p:nvSpPr>
@@ -6971,7 +6971,7 @@
       </p:sp>
       <p:sp>
         <p:nvSpPr>
-          <p:cNvPr id="13" name="o601"/>
+          <p:cNvPr id="13" name="o595"/>
           <p:cNvSpPr txBox="1"/>
           <p:nvPr/>
         </p:nvSpPr>
@@ -7010,7 +7010,7 @@
       </p:sp>
       <p:sp>
         <p:nvSpPr>
-          <p:cNvPr id="14" name="o602"/>
+          <p:cNvPr id="14" name="o596"/>
           <p:cNvSpPr txBox="1"/>
           <p:nvPr/>
         </p:nvSpPr>
@@ -7049,7 +7049,7 @@
       </p:sp>
       <p:sp>
         <p:nvSpPr>
-          <p:cNvPr id="15" name="o603"/>
+          <p:cNvPr id="15" name="o597"/>
           <p:cNvSpPr/>
           <p:nvPr/>
         </p:nvSpPr>
@@ -7073,7 +7073,7 @@
       </p:sp>
       <p:sp>
         <p:nvSpPr>
-          <p:cNvPr id="16" name="o604"/>
+          <p:cNvPr id="16" name="o598"/>
           <p:cNvSpPr/>
           <p:nvPr/>
         </p:nvSpPr>
@@ -7098,7 +7098,7 @@
       </p:sp>
       <p:sp>
         <p:nvSpPr>
-          <p:cNvPr id="17" name="o605"/>
+          <p:cNvPr id="17" name="o599"/>
           <p:cNvSpPr/>
           <p:nvPr/>
         </p:nvSpPr>
@@ -7123,7 +7123,7 @@
       </p:sp>
       <p:sp>
         <p:nvSpPr>
-          <p:cNvPr id="18" name="o606"/>
+          <p:cNvPr id="18" name="o600"/>
           <p:cNvSpPr txBox="1"/>
           <p:nvPr/>
         </p:nvSpPr>
@@ -7162,7 +7162,7 @@
       </p:sp>
       <p:sp>
         <p:nvSpPr>
-          <p:cNvPr id="19" name="o607"/>
+          <p:cNvPr id="19" name="o601"/>
           <p:cNvSpPr txBox="1"/>
           <p:nvPr/>
         </p:nvSpPr>
@@ -7201,7 +7201,7 @@
       </p:sp>
       <p:sp>
         <p:nvSpPr>
-          <p:cNvPr id="20" name="o608"/>
+          <p:cNvPr id="20" name="o602"/>
           <p:cNvSpPr txBox="1"/>
           <p:nvPr/>
         </p:nvSpPr>
@@ -7240,7 +7240,7 @@
       </p:sp>
       <p:sp>
         <p:nvSpPr>
-          <p:cNvPr id="21" name="o609"/>
+          <p:cNvPr id="21" name="o603"/>
           <p:cNvSpPr/>
           <p:nvPr/>
         </p:nvSpPr>
@@ -7264,7 +7264,7 @@
       </p:sp>
       <p:sp>
         <p:nvSpPr>
-          <p:cNvPr id="22" name="o610"/>
+          <p:cNvPr id="22" name="o604"/>
           <p:cNvSpPr/>
           <p:nvPr/>
         </p:nvSpPr>
@@ -7289,7 +7289,7 @@
       </p:sp>
       <p:sp>
         <p:nvSpPr>
-          <p:cNvPr id="23" name="o611"/>
+          <p:cNvPr id="23" name="o605"/>
           <p:cNvSpPr/>
           <p:nvPr/>
         </p:nvSpPr>
@@ -7314,7 +7314,7 @@
       </p:sp>
       <p:sp>
         <p:nvSpPr>
-          <p:cNvPr id="24" name="o612"/>
+          <p:cNvPr id="24" name="o606"/>
           <p:cNvSpPr txBox="1"/>
           <p:nvPr/>
         </p:nvSpPr>
@@ -7353,7 +7353,7 @@
       </p:sp>
       <p:sp>
         <p:nvSpPr>
-          <p:cNvPr id="25" name="o613"/>
+          <p:cNvPr id="25" name="o607"/>
           <p:cNvSpPr txBox="1"/>
           <p:nvPr/>
         </p:nvSpPr>
@@ -7392,7 +7392,7 @@
       </p:sp>
       <p:sp>
         <p:nvSpPr>
-          <p:cNvPr id="26" name="o614"/>
+          <p:cNvPr id="26" name="o608"/>
           <p:cNvSpPr txBox="1"/>
           <p:nvPr/>
         </p:nvSpPr>
@@ -7431,7 +7431,7 @@
       </p:sp>
       <p:sp>
         <p:nvSpPr>
-          <p:cNvPr id="27" name="o615"/>
+          <p:cNvPr id="27" name="o609"/>
           <p:cNvSpPr/>
           <p:nvPr/>
         </p:nvSpPr>
@@ -7455,7 +7455,7 @@
       </p:sp>
       <p:sp>
         <p:nvSpPr>
-          <p:cNvPr id="28" name="o616"/>
+          <p:cNvPr id="28" name="o610"/>
           <p:cNvSpPr/>
           <p:nvPr/>
         </p:nvSpPr>
@@ -7480,7 +7480,7 @@
       </p:sp>
       <p:sp>
         <p:nvSpPr>
-          <p:cNvPr id="29" name="o617"/>
+          <p:cNvPr id="29" name="o611"/>
           <p:cNvSpPr/>
           <p:nvPr/>
         </p:nvSpPr>
@@ -7505,7 +7505,7 @@
       </p:sp>
       <p:sp>
         <p:nvSpPr>
-          <p:cNvPr id="30" name="o618"/>
+          <p:cNvPr id="30" name="o612"/>
           <p:cNvSpPr txBox="1"/>
           <p:nvPr/>
         </p:nvSpPr>
@@ -7544,7 +7544,7 @@
       </p:sp>
       <p:sp>
         <p:nvSpPr>
-          <p:cNvPr id="31" name="o619"/>
+          <p:cNvPr id="31" name="o613"/>
           <p:cNvSpPr txBox="1"/>
           <p:nvPr/>
         </p:nvSpPr>
@@ -7583,7 +7583,7 @@
       </p:sp>
       <p:sp>
         <p:nvSpPr>
-          <p:cNvPr id="32" name="o620"/>
+          <p:cNvPr id="32" name="o614"/>
           <p:cNvSpPr txBox="1"/>
           <p:nvPr/>
         </p:nvSpPr>
@@ -7622,7 +7622,7 @@
       </p:sp>
       <p:sp>
         <p:nvSpPr>
-          <p:cNvPr id="33" name="o621"/>
+          <p:cNvPr id="33" name="o615"/>
           <p:cNvSpPr/>
           <p:nvPr/>
         </p:nvSpPr>
@@ -7642,7 +7642,7 @@
       </p:sp>
       <p:sp>
         <p:nvSpPr>
-          <p:cNvPr id="34" name="o622"/>
+          <p:cNvPr id="34" name="o616"/>
           <p:cNvSpPr txBox="1"/>
           <p:nvPr/>
         </p:nvSpPr>
@@ -7681,7 +7681,7 @@
       </p:sp>
       <p:sp>
         <p:nvSpPr>
-          <p:cNvPr id="35" name="o623"/>
+          <p:cNvPr id="35" name="o617"/>
           <p:cNvSpPr txBox="1"/>
           <p:nvPr/>
         </p:nvSpPr>
@@ -7720,7 +7720,7 @@
       </p:sp>
       <p:sp>
         <p:nvSpPr>
-          <p:cNvPr id="36" name="o624"/>
+          <p:cNvPr id="36" name="o618"/>
           <p:cNvSpPr txBox="1"/>
           <p:nvPr/>
         </p:nvSpPr>
@@ -7759,7 +7759,7 @@
       </p:sp>
       <p:sp>
         <p:nvSpPr>
-          <p:cNvPr id="37" name="o625"/>
+          <p:cNvPr id="37" name="o619"/>
           <p:cNvSpPr txBox="1"/>
           <p:nvPr/>
         </p:nvSpPr>
@@ -7798,7 +7798,7 @@
       </p:sp>
       <p:sp>
         <p:nvSpPr>
-          <p:cNvPr id="38" name="o626"/>
+          <p:cNvPr id="38" name="o620"/>
           <p:cNvSpPr/>
           <p:nvPr/>
         </p:nvSpPr>
@@ -7821,7 +7821,7 @@
       </p:sp>
       <p:sp>
         <p:nvSpPr>
-          <p:cNvPr id="39" name="o627"/>
+          <p:cNvPr id="39" name="o621"/>
           <p:cNvSpPr txBox="1"/>
           <p:nvPr/>
         </p:nvSpPr>
@@ -7860,7 +7860,7 @@
       </p:sp>
       <p:sp>
         <p:nvSpPr>
-          <p:cNvPr id="40" name="o628"/>
+          <p:cNvPr id="40" name="o622"/>
           <p:cNvSpPr txBox="1"/>
           <p:nvPr/>
         </p:nvSpPr>
@@ -7899,7 +7899,7 @@
       </p:sp>
       <p:sp>
         <p:nvSpPr>
-          <p:cNvPr id="41" name="o629"/>
+          <p:cNvPr id="41" name="o623"/>
           <p:cNvSpPr txBox="1"/>
           <p:nvPr/>
         </p:nvSpPr>
@@ -7938,7 +7938,7 @@
       </p:sp>
       <p:sp>
         <p:nvSpPr>
-          <p:cNvPr id="42" name="o630"/>
+          <p:cNvPr id="42" name="o624"/>
           <p:cNvSpPr txBox="1"/>
           <p:nvPr/>
         </p:nvSpPr>
@@ -7977,7 +7977,7 @@
       </p:sp>
       <p:sp>
         <p:nvSpPr>
-          <p:cNvPr id="43" name="o631"/>
+          <p:cNvPr id="43" name="o625"/>
           <p:cNvSpPr/>
           <p:nvPr/>
         </p:nvSpPr>
@@ -8000,7 +8000,7 @@
       </p:sp>
       <p:sp>
         <p:nvSpPr>
-          <p:cNvPr id="44" name="o632"/>
+          <p:cNvPr id="44" name="o626"/>
           <p:cNvSpPr txBox="1"/>
           <p:nvPr/>
         </p:nvSpPr>
@@ -8039,7 +8039,7 @@
       </p:sp>
       <p:sp>
         <p:nvSpPr>
-          <p:cNvPr id="45" name="o633"/>
+          <p:cNvPr id="45" name="o627"/>
           <p:cNvSpPr txBox="1"/>
           <p:nvPr/>
         </p:nvSpPr>
@@ -8078,7 +8078,7 @@
       </p:sp>
       <p:sp>
         <p:nvSpPr>
-          <p:cNvPr id="46" name="o634"/>
+          <p:cNvPr id="46" name="o628"/>
           <p:cNvSpPr txBox="1"/>
           <p:nvPr/>
         </p:nvSpPr>
@@ -8117,7 +8117,7 @@
       </p:sp>
       <p:sp>
         <p:nvSpPr>
-          <p:cNvPr id="47" name="o635"/>
+          <p:cNvPr id="47" name="o629"/>
           <p:cNvSpPr txBox="1"/>
           <p:nvPr/>
         </p:nvSpPr>
@@ -8156,7 +8156,7 @@
       </p:sp>
       <p:sp>
         <p:nvSpPr>
-          <p:cNvPr id="48" name="o636"/>
+          <p:cNvPr id="48" name="o630"/>
           <p:cNvSpPr/>
           <p:nvPr/>
         </p:nvSpPr>
@@ -8179,7 +8179,7 @@
       </p:sp>
       <p:sp>
         <p:nvSpPr>
-          <p:cNvPr id="49" name="o637"/>
+          <p:cNvPr id="49" name="o631"/>
           <p:cNvSpPr txBox="1"/>
           <p:nvPr/>
         </p:nvSpPr>
@@ -8218,7 +8218,7 @@
       </p:sp>
       <p:sp>
         <p:nvSpPr>
-          <p:cNvPr id="50" name="o638"/>
+          <p:cNvPr id="50" name="o632"/>
           <p:cNvSpPr txBox="1"/>
           <p:nvPr/>
         </p:nvSpPr>
@@ -8257,7 +8257,7 @@
       </p:sp>
       <p:sp>
         <p:nvSpPr>
-          <p:cNvPr id="51" name="o639"/>
+          <p:cNvPr id="51" name="o633"/>
           <p:cNvSpPr txBox="1"/>
           <p:nvPr/>
         </p:nvSpPr>
@@ -8296,7 +8296,7 @@
       </p:sp>
       <p:sp>
         <p:nvSpPr>
-          <p:cNvPr id="52" name="o640"/>
+          <p:cNvPr id="52" name="o634"/>
           <p:cNvSpPr txBox="1"/>
           <p:nvPr/>
         </p:nvSpPr>
@@ -8335,7 +8335,7 @@
       </p:sp>
       <p:sp>
         <p:nvSpPr>
-          <p:cNvPr id="53" name="o641"/>
+          <p:cNvPr id="53" name="o635"/>
           <p:cNvSpPr/>
           <p:nvPr/>
         </p:nvSpPr>
@@ -8358,7 +8358,7 @@
       </p:sp>
       <p:sp>
         <p:nvSpPr>
-          <p:cNvPr id="54" name="o642"/>
+          <p:cNvPr id="54" name="o636"/>
           <p:cNvSpPr txBox="1"/>
           <p:nvPr/>
         </p:nvSpPr>
@@ -8397,7 +8397,7 @@
       </p:sp>
       <p:sp>
         <p:nvSpPr>
-          <p:cNvPr id="55" name="o643"/>
+          <p:cNvPr id="55" name="o637"/>
           <p:cNvSpPr txBox="1"/>
           <p:nvPr/>
         </p:nvSpPr>
@@ -8436,7 +8436,7 @@
       </p:sp>
       <p:sp>
         <p:nvSpPr>
-          <p:cNvPr id="56" name="o644"/>
+          <p:cNvPr id="56" name="o638"/>
           <p:cNvSpPr txBox="1"/>
           <p:nvPr/>
         </p:nvSpPr>
@@ -8475,7 +8475,7 @@
       </p:sp>
       <p:sp>
         <p:nvSpPr>
-          <p:cNvPr id="57" name="o645"/>
+          <p:cNvPr id="57" name="o639"/>
           <p:cNvSpPr txBox="1"/>
           <p:nvPr/>
         </p:nvSpPr>
@@ -8514,7 +8514,7 @@
       </p:sp>
       <p:sp>
         <p:nvSpPr>
-          <p:cNvPr id="58" name="o646"/>
+          <p:cNvPr id="58" name="o640"/>
           <p:cNvSpPr/>
           <p:nvPr/>
         </p:nvSpPr>
@@ -8537,7 +8537,7 @@
       </p:sp>
       <p:sp>
         <p:nvSpPr>
-          <p:cNvPr id="59" name="o647"/>
+          <p:cNvPr id="59" name="o641"/>
           <p:cNvSpPr/>
           <p:nvPr/>
         </p:nvSpPr>
@@ -8560,7 +8560,7 @@
       </p:sp>
       <p:sp>
         <p:nvSpPr>
-          <p:cNvPr id="60" name="o648"/>
+          <p:cNvPr id="60" name="o642"/>
           <p:cNvSpPr/>
           <p:nvPr/>
         </p:nvSpPr>
@@ -8585,7 +8585,7 @@
       </p:sp>
       <p:sp>
         <p:nvSpPr>
-          <p:cNvPr id="61" name="o649"/>
+          <p:cNvPr id="61" name="o643"/>
           <p:cNvSpPr txBox="1"/>
           <p:nvPr/>
         </p:nvSpPr>
@@ -8624,7 +8624,7 @@
       </p:sp>
       <p:sp>
         <p:nvSpPr>
-          <p:cNvPr id="62" name="o650"/>
+          <p:cNvPr id="62" name="o644"/>
           <p:cNvSpPr txBox="1"/>
           <p:nvPr/>
         </p:nvSpPr>
@@ -8663,7 +8663,7 @@
       </p:sp>
       <p:sp>
         <p:nvSpPr>
-          <p:cNvPr id="63" name="o651"/>
+          <p:cNvPr id="63" name="o645"/>
           <p:cNvSpPr txBox="1"/>
           <p:nvPr/>
         </p:nvSpPr>
@@ -8702,7 +8702,7 @@
       </p:sp>
       <p:sp>
         <p:nvSpPr>
-          <p:cNvPr id="64" name="o652"/>
+          <p:cNvPr id="64" name="o646"/>
           <p:cNvSpPr/>
           <p:nvPr/>
         </p:nvSpPr>
@@ -8722,7 +8722,7 @@
       </p:sp>
       <p:sp>
         <p:nvSpPr>
-          <p:cNvPr id="65" name="o653"/>
+          <p:cNvPr id="65" name="o647"/>
           <p:cNvSpPr/>
           <p:nvPr/>
         </p:nvSpPr>
@@ -8742,7 +8742,7 @@
       </p:sp>
       <p:sp>
         <p:nvSpPr>
-          <p:cNvPr id="66" name="o654"/>
+          <p:cNvPr id="66" name="o648"/>
           <p:cNvSpPr txBox="1"/>
           <p:nvPr/>
         </p:nvSpPr>
@@ -8869,7 +8869,7 @@
       </p:grpSpPr>
       <p:sp>
         <p:nvSpPr>
-          <p:cNvPr id="2" name="o655"/>
+          <p:cNvPr id="2" name="o649"/>
           <p:cNvSpPr txBox="1"/>
           <p:nvPr/>
         </p:nvSpPr>
@@ -8908,7 +8908,7 @@
       </p:sp>
       <p:sp>
         <p:nvSpPr>
-          <p:cNvPr id="3" name="o656"/>
+          <p:cNvPr id="3" name="o650"/>
           <p:cNvSpPr txBox="1"/>
           <p:nvPr/>
         </p:nvSpPr>
@@ -8950,7 +8950,7 @@
       </p:sp>
       <p:sp>
         <p:nvSpPr>
-          <p:cNvPr id="4" name="o657"/>
+          <p:cNvPr id="4" name="o651"/>
           <p:cNvSpPr txBox="1"/>
           <p:nvPr/>
         </p:nvSpPr>
@@ -8989,7 +8989,7 @@
       </p:sp>
       <p:sp>
         <p:nvSpPr>
-          <p:cNvPr id="5" name="o658"/>
+          <p:cNvPr id="5" name="o652"/>
           <p:cNvSpPr/>
           <p:nvPr/>
         </p:nvSpPr>
@@ -9012,7 +9012,7 @@
       </p:sp>
       <p:sp>
         <p:nvSpPr>
-          <p:cNvPr id="6" name="o659"/>
+          <p:cNvPr id="6" name="o653"/>
           <p:cNvSpPr txBox="1"/>
           <p:nvPr/>
         </p:nvSpPr>
@@ -9051,7 +9051,7 @@
       </p:sp>
       <p:sp>
         <p:nvSpPr>
-          <p:cNvPr id="7" name="o660"/>
+          <p:cNvPr id="7" name="o654"/>
           <p:cNvSpPr txBox="1"/>
           <p:nvPr/>
         </p:nvSpPr>
@@ -9090,7 +9090,7 @@
       </p:sp>
       <p:sp>
         <p:nvSpPr>
-          <p:cNvPr id="8" name="o661"/>
+          <p:cNvPr id="8" name="o655"/>
           <p:cNvSpPr/>
           <p:nvPr/>
         </p:nvSpPr>
@@ -9115,7 +9115,7 @@
       </p:sp>
       <p:sp>
         <p:nvSpPr>
-          <p:cNvPr id="9" name="o662"/>
+          <p:cNvPr id="9" name="o656"/>
           <p:cNvSpPr txBox="1"/>
           <p:nvPr/>
         </p:nvSpPr>
@@ -9154,7 +9154,7 @@
       </p:sp>
       <p:sp>
         <p:nvSpPr>
-          <p:cNvPr id="10" name="o663"/>
+          <p:cNvPr id="10" name="o657"/>
           <p:cNvSpPr txBox="1"/>
           <p:nvPr/>
         </p:nvSpPr>
@@ -9193,7 +9193,7 @@
       </p:sp>
       <p:sp>
         <p:nvSpPr>
-          <p:cNvPr id="11" name="o664"/>
+          <p:cNvPr id="11" name="o658"/>
           <p:cNvSpPr txBox="1"/>
           <p:nvPr/>
         </p:nvSpPr>
@@ -9232,7 +9232,7 @@
       </p:sp>
       <p:sp>
         <p:nvSpPr>
-          <p:cNvPr id="12" name="o665"/>
+          <p:cNvPr id="12" name="o659"/>
           <p:cNvSpPr/>
           <p:nvPr/>
         </p:nvSpPr>
@@ -9257,7 +9257,7 @@
       </p:sp>
       <p:sp>
         <p:nvSpPr>
-          <p:cNvPr id="13" name="o666"/>
+          <p:cNvPr id="13" name="o660"/>
           <p:cNvSpPr/>
           <p:nvPr/>
         </p:nvSpPr>
@@ -9277,7 +9277,7 @@
       </p:sp>
       <p:sp>
         <p:nvSpPr>
-          <p:cNvPr id="14" name="o667"/>
+          <p:cNvPr id="14" name="o661"/>
           <p:cNvSpPr txBox="1"/>
           <p:nvPr/>
         </p:nvSpPr>
@@ -9316,7 +9316,7 @@
       </p:sp>
       <p:sp>
         <p:nvSpPr>
-          <p:cNvPr id="15" name="o668"/>
+          <p:cNvPr id="15" name="o662"/>
           <p:cNvSpPr txBox="1"/>
           <p:nvPr/>
         </p:nvSpPr>
@@ -9355,7 +9355,7 @@
       </p:sp>
       <p:sp>
         <p:nvSpPr>
-          <p:cNvPr id="16" name="o669"/>
+          <p:cNvPr id="16" name="o663"/>
           <p:cNvSpPr txBox="1"/>
           <p:nvPr/>
         </p:nvSpPr>
@@ -9394,7 +9394,7 @@
       </p:sp>
       <p:sp>
         <p:nvSpPr>
-          <p:cNvPr id="17" name="o670"/>
+          <p:cNvPr id="17" name="o664"/>
           <p:cNvSpPr/>
           <p:nvPr/>
         </p:nvSpPr>
@@ -9419,7 +9419,7 @@
       </p:sp>
       <p:sp>
         <p:nvSpPr>
-          <p:cNvPr id="18" name="o671"/>
+          <p:cNvPr id="18" name="o665"/>
           <p:cNvSpPr txBox="1"/>
           <p:nvPr/>
         </p:nvSpPr>
@@ -9458,7 +9458,7 @@
       </p:sp>
       <p:sp>
         <p:nvSpPr>
-          <p:cNvPr id="19" name="o672"/>
+          <p:cNvPr id="19" name="o666"/>
           <p:cNvSpPr txBox="1"/>
           <p:nvPr/>
         </p:nvSpPr>
@@ -9497,7 +9497,7 @@
       </p:sp>
       <p:sp>
         <p:nvSpPr>
-          <p:cNvPr id="20" name="o673"/>
+          <p:cNvPr id="20" name="o667"/>
           <p:cNvSpPr txBox="1"/>
           <p:nvPr/>
         </p:nvSpPr>
@@ -9536,7 +9536,7 @@
       </p:sp>
       <p:sp>
         <p:nvSpPr>
-          <p:cNvPr id="21" name="o674"/>
+          <p:cNvPr id="21" name="o668"/>
           <p:cNvSpPr/>
           <p:nvPr/>
         </p:nvSpPr>
@@ -9556,7 +9556,7 @@
       </p:sp>
       <p:sp>
         <p:nvSpPr>
-          <p:cNvPr id="22" name="o675"/>
+          <p:cNvPr id="22" name="o669"/>
           <p:cNvSpPr txBox="1"/>
           <p:nvPr/>
         </p:nvSpPr>
@@ -9595,7 +9595,7 @@
       </p:sp>
       <p:sp>
         <p:nvSpPr>
-          <p:cNvPr id="23" name="o676"/>
+          <p:cNvPr id="23" name="o670"/>
           <p:cNvSpPr txBox="1"/>
           <p:nvPr/>
         </p:nvSpPr>
@@ -9634,7 +9634,7 @@
       </p:sp>
       <p:sp>
         <p:nvSpPr>
-          <p:cNvPr id="24" name="o677"/>
+          <p:cNvPr id="24" name="o671"/>
           <p:cNvSpPr txBox="1"/>
           <p:nvPr/>
         </p:nvSpPr>
@@ -9673,7 +9673,7 @@
       </p:sp>
       <p:sp>
         <p:nvSpPr>
-          <p:cNvPr id="25" name="o678"/>
+          <p:cNvPr id="25" name="o672"/>
           <p:cNvSpPr txBox="1"/>
           <p:nvPr/>
         </p:nvSpPr>
@@ -9712,7 +9712,7 @@
       </p:sp>
       <p:sp>
         <p:nvSpPr>
-          <p:cNvPr id="26" name="o679"/>
+          <p:cNvPr id="26" name="o673"/>
           <p:cNvSpPr/>
           <p:nvPr/>
         </p:nvSpPr>
@@ -9735,7 +9735,7 @@
       </p:sp>
       <p:sp>
         <p:nvSpPr>
-          <p:cNvPr id="27" name="o680"/>
+          <p:cNvPr id="27" name="o674"/>
           <p:cNvSpPr txBox="1"/>
           <p:nvPr/>
         </p:nvSpPr>
@@ -9774,7 +9774,7 @@
       </p:sp>
       <p:sp>
         <p:nvSpPr>
-          <p:cNvPr id="28" name="o681"/>
+          <p:cNvPr id="28" name="o675"/>
           <p:cNvSpPr txBox="1"/>
           <p:nvPr/>
         </p:nvSpPr>
@@ -9813,7 +9813,7 @@
       </p:sp>
       <p:sp>
         <p:nvSpPr>
-          <p:cNvPr id="29" name="o682"/>
+          <p:cNvPr id="29" name="o676"/>
           <p:cNvSpPr txBox="1"/>
           <p:nvPr/>
         </p:nvSpPr>
@@ -9852,7 +9852,7 @@
       </p:sp>
       <p:sp>
         <p:nvSpPr>
-          <p:cNvPr id="30" name="o683"/>
+          <p:cNvPr id="30" name="o677"/>
           <p:cNvSpPr txBox="1"/>
           <p:nvPr/>
         </p:nvSpPr>
@@ -9891,7 +9891,7 @@
       </p:sp>
       <p:sp>
         <p:nvSpPr>
-          <p:cNvPr id="31" name="o684"/>
+          <p:cNvPr id="31" name="o678"/>
           <p:cNvSpPr/>
           <p:nvPr/>
         </p:nvSpPr>
@@ -9914,7 +9914,7 @@
       </p:sp>
       <p:sp>
         <p:nvSpPr>
-          <p:cNvPr id="32" name="o685"/>
+          <p:cNvPr id="32" name="o679"/>
           <p:cNvSpPr txBox="1"/>
           <p:nvPr/>
         </p:nvSpPr>
@@ -9953,7 +9953,7 @@
       </p:sp>
       <p:sp>
         <p:nvSpPr>
-          <p:cNvPr id="33" name="o686"/>
+          <p:cNvPr id="33" name="o680"/>
           <p:cNvSpPr txBox="1"/>
           <p:nvPr/>
         </p:nvSpPr>
@@ -9992,7 +9992,7 @@
       </p:sp>
       <p:sp>
         <p:nvSpPr>
-          <p:cNvPr id="34" name="o687"/>
+          <p:cNvPr id="34" name="o681"/>
           <p:cNvSpPr txBox="1"/>
           <p:nvPr/>
         </p:nvSpPr>
@@ -10031,7 +10031,7 @@
       </p:sp>
       <p:sp>
         <p:nvSpPr>
-          <p:cNvPr id="35" name="o688"/>
+          <p:cNvPr id="35" name="o682"/>
           <p:cNvSpPr txBox="1"/>
           <p:nvPr/>
         </p:nvSpPr>
@@ -10070,7 +10070,7 @@
       </p:sp>
       <p:sp>
         <p:nvSpPr>
-          <p:cNvPr id="36" name="o689"/>
+          <p:cNvPr id="36" name="o683"/>
           <p:cNvSpPr/>
           <p:nvPr/>
         </p:nvSpPr>
@@ -10093,7 +10093,7 @@
       </p:sp>
       <p:sp>
         <p:nvSpPr>
-          <p:cNvPr id="37" name="o690"/>
+          <p:cNvPr id="37" name="o684"/>
           <p:cNvSpPr txBox="1"/>
           <p:nvPr/>
         </p:nvSpPr>
@@ -10132,7 +10132,7 @@
       </p:sp>
       <p:sp>
         <p:nvSpPr>
-          <p:cNvPr id="38" name="o691"/>
+          <p:cNvPr id="38" name="o685"/>
           <p:cNvSpPr txBox="1"/>
           <p:nvPr/>
         </p:nvSpPr>
@@ -10171,7 +10171,7 @@
       </p:sp>
       <p:sp>
         <p:nvSpPr>
-          <p:cNvPr id="39" name="o692"/>
+          <p:cNvPr id="39" name="o686"/>
           <p:cNvSpPr txBox="1"/>
           <p:nvPr/>
         </p:nvSpPr>
@@ -10210,7 +10210,7 @@
       </p:sp>
       <p:sp>
         <p:nvSpPr>
-          <p:cNvPr id="40" name="o693"/>
+          <p:cNvPr id="40" name="o687"/>
           <p:cNvSpPr txBox="1"/>
           <p:nvPr/>
         </p:nvSpPr>
@@ -10249,7 +10249,7 @@
       </p:sp>
       <p:sp>
         <p:nvSpPr>
-          <p:cNvPr id="41" name="o694"/>
+          <p:cNvPr id="41" name="o688"/>
           <p:cNvSpPr/>
           <p:nvPr/>
         </p:nvSpPr>
@@ -10272,7 +10272,7 @@
       </p:sp>
       <p:sp>
         <p:nvSpPr>
-          <p:cNvPr id="42" name="o695"/>
+          <p:cNvPr id="42" name="o689"/>
           <p:cNvSpPr txBox="1"/>
           <p:nvPr/>
         </p:nvSpPr>
@@ -10311,7 +10311,7 @@
       </p:sp>
       <p:sp>
         <p:nvSpPr>
-          <p:cNvPr id="43" name="o696"/>
+          <p:cNvPr id="43" name="o690"/>
           <p:cNvSpPr txBox="1"/>
           <p:nvPr/>
         </p:nvSpPr>
@@ -10350,7 +10350,7 @@
       </p:sp>
       <p:sp>
         <p:nvSpPr>
-          <p:cNvPr id="44" name="o697"/>
+          <p:cNvPr id="44" name="o691"/>
           <p:cNvSpPr txBox="1"/>
           <p:nvPr/>
         </p:nvSpPr>
@@ -10389,7 +10389,7 @@
       </p:sp>
       <p:sp>
         <p:nvSpPr>
-          <p:cNvPr id="45" name="o698"/>
+          <p:cNvPr id="45" name="o692"/>
           <p:cNvSpPr txBox="1"/>
           <p:nvPr/>
         </p:nvSpPr>
@@ -10428,7 +10428,7 @@
       </p:sp>
       <p:sp>
         <p:nvSpPr>
-          <p:cNvPr id="46" name="o699"/>
+          <p:cNvPr id="46" name="o693"/>
           <p:cNvSpPr/>
           <p:nvPr/>
         </p:nvSpPr>
@@ -10451,7 +10451,7 @@
       </p:sp>
       <p:sp>
         <p:nvSpPr>
-          <p:cNvPr id="47" name="o700"/>
+          <p:cNvPr id="47" name="o694"/>
           <p:cNvSpPr/>
           <p:nvPr/>
         </p:nvSpPr>
@@ -10474,7 +10474,7 @@
       </p:sp>
       <p:sp>
         <p:nvSpPr>
-          <p:cNvPr id="48" name="o701"/>
+          <p:cNvPr id="48" name="o695"/>
           <p:cNvSpPr/>
           <p:nvPr/>
         </p:nvSpPr>
@@ -10494,7 +10494,7 @@
       </p:sp>
       <p:sp>
         <p:nvSpPr>
-          <p:cNvPr id="49" name="o702"/>
+          <p:cNvPr id="49" name="o696"/>
           <p:cNvSpPr/>
           <p:nvPr/>
         </p:nvSpPr>
@@ -10514,7 +10514,7 @@
       </p:sp>
       <p:sp>
         <p:nvSpPr>
-          <p:cNvPr id="50" name="o703"/>
+          <p:cNvPr id="50" name="o697"/>
           <p:cNvSpPr txBox="1"/>
           <p:nvPr/>
         </p:nvSpPr>
@@ -10553,7 +10553,7 @@
       </p:sp>
       <p:sp>
         <p:nvSpPr>
-          <p:cNvPr id="51" name="o704"/>
+          <p:cNvPr id="51" name="o698"/>
           <p:cNvSpPr txBox="1"/>
           <p:nvPr/>
         </p:nvSpPr>
@@ -10615,7 +10615,7 @@
       </p:sp>
       <p:sp>
         <p:nvSpPr>
-          <p:cNvPr id="52" name="o705"/>
+          <p:cNvPr id="52" name="o699"/>
           <p:cNvSpPr txBox="1"/>
           <p:nvPr/>
         </p:nvSpPr>
@@ -10679,7 +10679,7 @@
       </p:grpSpPr>
       <p:sp>
         <p:nvSpPr>
-          <p:cNvPr id="2" name="o706"/>
+          <p:cNvPr id="2" name="o700"/>
           <p:cNvSpPr txBox="1"/>
           <p:nvPr/>
         </p:nvSpPr>
@@ -10718,7 +10718,7 @@
       </p:sp>
       <p:sp>
         <p:nvSpPr>
-          <p:cNvPr id="3" name="o707"/>
+          <p:cNvPr id="3" name="o701"/>
           <p:cNvSpPr txBox="1"/>
           <p:nvPr/>
         </p:nvSpPr>
@@ -10757,7 +10757,7 @@
       </p:sp>
       <p:sp>
         <p:nvSpPr>
-          <p:cNvPr id="4" name="o708"/>
+          <p:cNvPr id="4" name="o702"/>
           <p:cNvSpPr txBox="1"/>
           <p:nvPr/>
         </p:nvSpPr>
@@ -10796,7 +10796,7 @@
       </p:sp>
       <p:sp>
         <p:nvSpPr>
-          <p:cNvPr id="5" name="o709"/>
+          <p:cNvPr id="5" name="o703"/>
           <p:cNvSpPr/>
           <p:nvPr/>
         </p:nvSpPr>
@@ -10819,7 +10819,7 @@
       </p:sp>
       <p:sp>
         <p:nvSpPr>
-          <p:cNvPr id="6" name="o710"/>
+          <p:cNvPr id="6" name="o704"/>
           <p:cNvSpPr txBox="1"/>
           <p:nvPr/>
         </p:nvSpPr>
@@ -10858,7 +10858,7 @@
       </p:sp>
       <p:sp>
         <p:nvSpPr>
-          <p:cNvPr id="7" name="o711"/>
+          <p:cNvPr id="7" name="o705"/>
           <p:cNvSpPr txBox="1"/>
           <p:nvPr/>
         </p:nvSpPr>
@@ -10897,7 +10897,7 @@
       </p:sp>
       <p:sp>
         <p:nvSpPr>
-          <p:cNvPr id="8" name="o712"/>
+          <p:cNvPr id="8" name="o706"/>
           <p:cNvSpPr/>
           <p:nvPr/>
         </p:nvSpPr>
@@ -10920,7 +10920,7 @@
       </p:sp>
       <p:sp>
         <p:nvSpPr>
-          <p:cNvPr id="9" name="o713"/>
+          <p:cNvPr id="9" name="o707"/>
           <p:cNvSpPr txBox="1"/>
           <p:nvPr/>
         </p:nvSpPr>
@@ -10959,7 +10959,7 @@
       </p:sp>
       <p:sp>
         <p:nvSpPr>
-          <p:cNvPr id="10" name="o714"/>
+          <p:cNvPr id="10" name="o708"/>
           <p:cNvSpPr txBox="1"/>
           <p:nvPr/>
         </p:nvSpPr>
@@ -10998,7 +10998,7 @@
       </p:sp>
       <p:sp>
         <p:nvSpPr>
-          <p:cNvPr id="11" name="o715"/>
+          <p:cNvPr id="11" name="o709"/>
           <p:cNvSpPr/>
           <p:nvPr/>
         </p:nvSpPr>
@@ -11021,7 +11021,7 @@
       </p:sp>
       <p:sp>
         <p:nvSpPr>
-          <p:cNvPr id="12" name="o716"/>
+          <p:cNvPr id="12" name="o710"/>
           <p:cNvSpPr txBox="1"/>
           <p:nvPr/>
         </p:nvSpPr>
@@ -11060,7 +11060,7 @@
       </p:sp>
       <p:sp>
         <p:nvSpPr>
-          <p:cNvPr id="13" name="o717"/>
+          <p:cNvPr id="13" name="o711"/>
           <p:cNvSpPr txBox="1"/>
           <p:nvPr/>
         </p:nvSpPr>
@@ -11099,7 +11099,7 @@
       </p:sp>
       <p:sp>
         <p:nvSpPr>
-          <p:cNvPr id="14" name="o718"/>
+          <p:cNvPr id="14" name="o712"/>
           <p:cNvSpPr/>
           <p:nvPr/>
         </p:nvSpPr>
@@ -11122,7 +11122,7 @@
       </p:sp>
       <p:sp>
         <p:nvSpPr>
-          <p:cNvPr id="15" name="o719"/>
+          <p:cNvPr id="15" name="o713"/>
           <p:cNvSpPr/>
           <p:nvPr/>
         </p:nvSpPr>
@@ -11145,7 +11145,7 @@
       </p:sp>
       <p:sp>
         <p:nvSpPr>
-          <p:cNvPr id="16" name="o720"/>
+          <p:cNvPr id="16" name="o714"/>
           <p:cNvSpPr txBox="1"/>
           <p:nvPr/>
         </p:nvSpPr>
@@ -11282,7 +11282,7 @@
                 <a:ea typeface="Pretendard" pitchFamily="34" charset="-122"/>
                 <a:cs typeface="Pretendard" pitchFamily="34" charset="-120"/>
               </a:rPr>
-              <a:t>본 활동은 네 가지 질문에 답한다</a:t>
+              <a:t>목차</a:t>
             </a:r>
             <a:endParaRPr lang="en-US" sz="2800" dirty="0"/>
           </a:p>
@@ -11321,7 +11321,7 @@
                 <a:ea typeface="Pretendard" pitchFamily="34" charset="-122"/>
                 <a:cs typeface="Pretendard" pitchFamily="34" charset="-120"/>
               </a:rPr>
-              <a:t>PDCA 순서 — 왜 바꿔야 했나에서 어떻게 정착시키나까지</a:t>
+              <a:t>PDCA 4단계 순서로 말씀드립니다</a:t>
             </a:r>
             <a:endParaRPr lang="en-US" sz="1400" dirty="0"/>
           </a:p>
@@ -11436,8 +11436,126 @@
         </p:nvSpPr>
         <p:spPr>
           <a:xfrm>
-            <a:off x="609600" y="2057400"/>
-            <a:ext cx="7254240" cy="0"/>
+            <a:off x="609600" y="2171700"/>
+            <a:ext cx="2606040" cy="3771900"/>
+          </a:xfrm>
+          <a:prstGeom prst="rect">
+            <a:avLst/>
+          </a:prstGeom>
+          <a:solidFill>
+            <a:srgbClr val="F2F4F3"/>
+          </a:solidFill>
+          <a:ln/>
+        </p:spPr>
+      </p:sp>
+      <p:sp>
+        <p:nvSpPr>
+          <p:cNvPr id="9" name="o32"/>
+          <p:cNvSpPr/>
+          <p:nvPr/>
+        </p:nvSpPr>
+        <p:spPr>
+          <a:xfrm>
+            <a:off x="609600" y="2171700"/>
+            <a:ext cx="2606040" cy="57150"/>
+          </a:xfrm>
+          <a:prstGeom prst="rect">
+            <a:avLst/>
+          </a:prstGeom>
+          <a:solidFill>
+            <a:srgbClr val="177B57"/>
+          </a:solidFill>
+          <a:ln/>
+        </p:spPr>
+      </p:sp>
+      <p:sp>
+        <p:nvSpPr>
+          <p:cNvPr id="10" name="o33"/>
+          <p:cNvSpPr txBox="1"/>
+          <p:nvPr/>
+        </p:nvSpPr>
+        <p:spPr>
+          <a:xfrm>
+            <a:off x="876300" y="2419350"/>
+            <a:ext cx="1143000" cy="800100"/>
+          </a:xfrm>
+          <a:prstGeom prst="rect">
+            <a:avLst/>
+          </a:prstGeom>
+          <a:noFill/>
+          <a:ln/>
+        </p:spPr>
+        <p:txBody>
+          <a:bodyPr wrap="square" lIns="0" tIns="0" rIns="0" bIns="0" rtlCol="0" anchor="t"/>
+          <a:lstStyle/>
+          <a:p>
+            <a:pPr indent="0" marL="0">
+              <a:buNone/>
+            </a:pPr>
+            <a:r>
+              <a:rPr lang="en-US" sz="6400" b="1" dirty="0">
+                <a:solidFill>
+                  <a:srgbClr val="177B57"/>
+                </a:solidFill>
+                <a:latin typeface="IBM Plex Sans" pitchFamily="34" charset="0"/>
+                <a:ea typeface="IBM Plex Sans" pitchFamily="34" charset="-122"/>
+                <a:cs typeface="IBM Plex Sans" pitchFamily="34" charset="-120"/>
+              </a:rPr>
+              <a:t>P</a:t>
+            </a:r>
+            <a:endParaRPr lang="en-US" sz="6400" dirty="0"/>
+          </a:p>
+        </p:txBody>
+      </p:sp>
+      <p:sp>
+        <p:nvSpPr>
+          <p:cNvPr id="11" name="o34"/>
+          <p:cNvSpPr txBox="1"/>
+          <p:nvPr/>
+        </p:nvSpPr>
+        <p:spPr>
+          <a:xfrm>
+            <a:off x="895350" y="3238500"/>
+            <a:ext cx="2034540" cy="171450"/>
+          </a:xfrm>
+          <a:prstGeom prst="rect">
+            <a:avLst/>
+          </a:prstGeom>
+          <a:noFill/>
+          <a:ln/>
+        </p:spPr>
+        <p:txBody>
+          <a:bodyPr wrap="square" lIns="0" tIns="0" rIns="0" bIns="0" rtlCol="0" anchor="t"/>
+          <a:lstStyle/>
+          <a:p>
+            <a:pPr indent="0" marL="0">
+              <a:buNone/>
+            </a:pPr>
+            <a:r>
+              <a:rPr lang="en-US" sz="1100" b="1" spc="150" kern="0" dirty="0">
+                <a:solidFill>
+                  <a:srgbClr val="5B636E"/>
+                </a:solidFill>
+                <a:latin typeface="IBM Plex Mono" pitchFamily="34" charset="0"/>
+                <a:ea typeface="IBM Plex Mono" pitchFamily="34" charset="-122"/>
+                <a:cs typeface="IBM Plex Mono" pitchFamily="34" charset="-120"/>
+              </a:rPr>
+              <a:t>PLAN</a:t>
+            </a:r>
+            <a:endParaRPr lang="en-US" sz="1100" dirty="0"/>
+          </a:p>
+        </p:txBody>
+      </p:sp>
+      <p:sp>
+        <p:nvSpPr>
+          <p:cNvPr id="12" name="o35"/>
+          <p:cNvSpPr/>
+          <p:nvPr/>
+        </p:nvSpPr>
+        <p:spPr>
+          <a:xfrm>
+            <a:off x="876300" y="3505200"/>
+            <a:ext cx="2072640" cy="0"/>
           </a:xfrm>
           <a:prstGeom prst="line">
             <a:avLst/>
@@ -11453,14 +11571,175 @@
       </p:sp>
       <p:sp>
         <p:nvSpPr>
-          <p:cNvPr id="9" name="o32"/>
+          <p:cNvPr id="13" name="o36"/>
+          <p:cNvSpPr txBox="1"/>
+          <p:nvPr/>
+        </p:nvSpPr>
+        <p:spPr>
+          <a:xfrm>
+            <a:off x="876300" y="3657600"/>
+            <a:ext cx="2072640" cy="1619250"/>
+          </a:xfrm>
+          <a:prstGeom prst="rect">
+            <a:avLst/>
+          </a:prstGeom>
+          <a:noFill/>
+          <a:ln/>
+        </p:spPr>
+        <p:txBody>
+          <a:bodyPr wrap="square" lIns="0" tIns="0" rIns="0" bIns="0" rtlCol="0" anchor="t"/>
+          <a:lstStyle/>
+          <a:p>
+            <a:pPr indent="0" marL="0">
+              <a:lnSpc>
+                <a:spcPct val="160000"/>
+              </a:lnSpc>
+              <a:buNone/>
+            </a:pPr>
+            <a:r>
+              <a:rPr lang="en-US" sz="1600" dirty="0">
+                <a:solidFill>
+                  <a:srgbClr val="1A1A1A"/>
+                </a:solidFill>
+                <a:latin typeface="Pretendard" pitchFamily="34" charset="0"/>
+                <a:ea typeface="Pretendard" pitchFamily="34" charset="-122"/>
+                <a:cs typeface="Pretendard" pitchFamily="34" charset="-120"/>
+              </a:rPr>
+              <a:t>주제 선정 배경</a:t>
+            </a:r>
+            <a:endParaRPr lang="en-US" sz="1600" dirty="0"/>
+          </a:p>
+          <a:p>
+            <a:pPr indent="0" marL="0">
+              <a:lnSpc>
+                <a:spcPct val="160000"/>
+              </a:lnSpc>
+              <a:buNone/>
+            </a:pPr>
+            <a:r>
+              <a:rPr lang="en-US" sz="1600" dirty="0">
+                <a:solidFill>
+                  <a:srgbClr val="1A1A1A"/>
+                </a:solidFill>
+                <a:latin typeface="Pretendard" pitchFamily="34" charset="0"/>
+                <a:ea typeface="Pretendard" pitchFamily="34" charset="-122"/>
+                <a:cs typeface="Pretendard" pitchFamily="34" charset="-120"/>
+              </a:rPr>
+              <a:t>현황 분석</a:t>
+            </a:r>
+            <a:endParaRPr lang="en-US" sz="1600" dirty="0"/>
+          </a:p>
+          <a:p>
+            <a:pPr indent="0" marL="0">
+              <a:lnSpc>
+                <a:spcPct val="160000"/>
+              </a:lnSpc>
+              <a:buNone/>
+            </a:pPr>
+            <a:r>
+              <a:rPr lang="en-US" sz="1600" dirty="0">
+                <a:solidFill>
+                  <a:srgbClr val="1A1A1A"/>
+                </a:solidFill>
+                <a:latin typeface="Pretendard" pitchFamily="34" charset="0"/>
+                <a:ea typeface="Pretendard" pitchFamily="34" charset="-122"/>
+                <a:cs typeface="Pretendard" pitchFamily="34" charset="-120"/>
+              </a:rPr>
+              <a:t>지표 정의 · 목표</a:t>
+            </a:r>
+            <a:endParaRPr lang="en-US" sz="1600" dirty="0"/>
+          </a:p>
+          <a:p>
+            <a:pPr indent="0" marL="0">
+              <a:lnSpc>
+                <a:spcPct val="160000"/>
+              </a:lnSpc>
+              <a:buNone/>
+            </a:pPr>
+            <a:r>
+              <a:rPr lang="en-US" sz="1600" dirty="0">
+                <a:solidFill>
+                  <a:srgbClr val="1A1A1A"/>
+                </a:solidFill>
+                <a:latin typeface="Pretendard" pitchFamily="34" charset="0"/>
+                <a:ea typeface="Pretendard" pitchFamily="34" charset="-122"/>
+                <a:cs typeface="Pretendard" pitchFamily="34" charset="-120"/>
+              </a:rPr>
+              <a:t>원인 분석 · 개선 전략</a:t>
+            </a:r>
+            <a:endParaRPr lang="en-US" sz="1600" dirty="0"/>
+          </a:p>
+        </p:txBody>
+      </p:sp>
+      <p:sp>
+        <p:nvSpPr>
+          <p:cNvPr id="14" name="o37"/>
+          <p:cNvSpPr txBox="1"/>
+          <p:nvPr/>
+        </p:nvSpPr>
+        <p:spPr>
+          <a:xfrm>
+            <a:off x="876300" y="5619750"/>
+            <a:ext cx="2072640" cy="152400"/>
+          </a:xfrm>
+          <a:prstGeom prst="rect">
+            <a:avLst/>
+          </a:prstGeom>
+          <a:noFill/>
+          <a:ln/>
+        </p:spPr>
+        <p:txBody>
+          <a:bodyPr wrap="square" lIns="0" tIns="0" rIns="0" bIns="0" rtlCol="0" anchor="t"/>
+          <a:lstStyle/>
+          <a:p>
+            <a:pPr indent="0" marL="0">
+              <a:buNone/>
+            </a:pPr>
+            <a:r>
+              <a:rPr lang="en-US" sz="900" dirty="0">
+                <a:solidFill>
+                  <a:srgbClr val="5B636E"/>
+                </a:solidFill>
+                <a:latin typeface="IBM Plex Mono" pitchFamily="34" charset="0"/>
+                <a:ea typeface="IBM Plex Mono" pitchFamily="34" charset="-122"/>
+                <a:cs typeface="IBM Plex Mono" pitchFamily="34" charset="-120"/>
+              </a:rPr>
+              <a:t>Slide 04 – 07</a:t>
+            </a:r>
+            <a:endParaRPr lang="en-US" sz="900" dirty="0"/>
+          </a:p>
+        </p:txBody>
+      </p:sp>
+      <p:sp>
+        <p:nvSpPr>
+          <p:cNvPr id="15" name="o38"/>
           <p:cNvSpPr/>
           <p:nvPr/>
         </p:nvSpPr>
         <p:spPr>
           <a:xfrm>
-            <a:off x="609600" y="2171700"/>
-            <a:ext cx="91440" cy="742950"/>
+            <a:off x="3398520" y="2171700"/>
+            <a:ext cx="2606040" cy="3771900"/>
+          </a:xfrm>
+          <a:prstGeom prst="rect">
+            <a:avLst/>
+          </a:prstGeom>
+          <a:solidFill>
+            <a:srgbClr val="F2F4F3"/>
+          </a:solidFill>
+          <a:ln/>
+        </p:spPr>
+      </p:sp>
+      <p:sp>
+        <p:nvSpPr>
+          <p:cNvPr id="16" name="o39"/>
+          <p:cNvSpPr/>
+          <p:nvPr/>
+        </p:nvSpPr>
+        <p:spPr>
+          <a:xfrm>
+            <a:off x="3398520" y="2171700"/>
+            <a:ext cx="2606040" cy="57150"/>
           </a:xfrm>
           <a:prstGeom prst="rect">
             <a:avLst/>
@@ -11473,14 +11752,14 @@
       </p:sp>
       <p:sp>
         <p:nvSpPr>
-          <p:cNvPr id="10" name="o33"/>
-          <p:cNvSpPr txBox="1"/>
-          <p:nvPr/>
-        </p:nvSpPr>
-        <p:spPr>
-          <a:xfrm>
-            <a:off x="857250" y="2228850"/>
-            <a:ext cx="571500" cy="323850"/>
+          <p:cNvPr id="17" name="o40"/>
+          <p:cNvSpPr txBox="1"/>
+          <p:nvPr/>
+        </p:nvSpPr>
+        <p:spPr>
+          <a:xfrm>
+            <a:off x="3665220" y="2419350"/>
+            <a:ext cx="1143000" cy="800100"/>
           </a:xfrm>
           <a:prstGeom prst="rect">
             <a:avLst/>
@@ -11496,147 +11775,69 @@
               <a:buNone/>
             </a:pPr>
             <a:r>
-              <a:rPr lang="en-US" sz="2000" b="1" dirty="0">
+              <a:rPr lang="en-US" sz="6400" b="1" dirty="0">
                 <a:solidFill>
                   <a:srgbClr val="177B57"/>
+                </a:solidFill>
+                <a:latin typeface="IBM Plex Sans" pitchFamily="34" charset="0"/>
+                <a:ea typeface="IBM Plex Sans" pitchFamily="34" charset="-122"/>
+                <a:cs typeface="IBM Plex Sans" pitchFamily="34" charset="-120"/>
+              </a:rPr>
+              <a:t>D</a:t>
+            </a:r>
+            <a:endParaRPr lang="en-US" sz="6400" dirty="0"/>
+          </a:p>
+        </p:txBody>
+      </p:sp>
+      <p:sp>
+        <p:nvSpPr>
+          <p:cNvPr id="18" name="o41"/>
+          <p:cNvSpPr txBox="1"/>
+          <p:nvPr/>
+        </p:nvSpPr>
+        <p:spPr>
+          <a:xfrm>
+            <a:off x="3684270" y="3238500"/>
+            <a:ext cx="2034540" cy="171450"/>
+          </a:xfrm>
+          <a:prstGeom prst="rect">
+            <a:avLst/>
+          </a:prstGeom>
+          <a:noFill/>
+          <a:ln/>
+        </p:spPr>
+        <p:txBody>
+          <a:bodyPr wrap="square" lIns="0" tIns="0" rIns="0" bIns="0" rtlCol="0" anchor="t"/>
+          <a:lstStyle/>
+          <a:p>
+            <a:pPr indent="0" marL="0">
+              <a:buNone/>
+            </a:pPr>
+            <a:r>
+              <a:rPr lang="en-US" sz="1100" b="1" spc="150" kern="0" dirty="0">
+                <a:solidFill>
+                  <a:srgbClr val="5B636E"/>
                 </a:solidFill>
                 <a:latin typeface="IBM Plex Mono" pitchFamily="34" charset="0"/>
                 <a:ea typeface="IBM Plex Mono" pitchFamily="34" charset="-122"/>
                 <a:cs typeface="IBM Plex Mono" pitchFamily="34" charset="-120"/>
               </a:rPr>
-              <a:t>01</a:t>
-            </a:r>
-            <a:endParaRPr lang="en-US" sz="2000" dirty="0"/>
-          </a:p>
-        </p:txBody>
-      </p:sp>
-      <p:sp>
-        <p:nvSpPr>
-          <p:cNvPr id="11" name="o34"/>
-          <p:cNvSpPr txBox="1"/>
-          <p:nvPr/>
-        </p:nvSpPr>
-        <p:spPr>
-          <a:xfrm>
-            <a:off x="1562100" y="2228850"/>
-            <a:ext cx="4762500" cy="266700"/>
-          </a:xfrm>
-          <a:prstGeom prst="rect">
-            <a:avLst/>
-          </a:prstGeom>
-          <a:noFill/>
-          <a:ln/>
-        </p:spPr>
-        <p:txBody>
-          <a:bodyPr wrap="square" lIns="0" tIns="0" rIns="0" bIns="0" rtlCol="0" anchor="t"/>
-          <a:lstStyle/>
-          <a:p>
-            <a:pPr indent="0" marL="0">
-              <a:buNone/>
-            </a:pPr>
-            <a:r>
-              <a:rPr lang="en-US" sz="1800" b="1" dirty="0">
-                <a:solidFill>
-                  <a:srgbClr val="1A1A1A"/>
-                </a:solidFill>
-                <a:latin typeface="Pretendard" pitchFamily="34" charset="0"/>
-                <a:ea typeface="Pretendard" pitchFamily="34" charset="-122"/>
-                <a:cs typeface="Pretendard" pitchFamily="34" charset="-120"/>
-              </a:rPr>
-              <a:t>왜 바꿔야 했나</a:t>
-            </a:r>
-            <a:endParaRPr lang="en-US" sz="1800" dirty="0"/>
-          </a:p>
-        </p:txBody>
-      </p:sp>
-      <p:sp>
-        <p:nvSpPr>
-          <p:cNvPr id="12" name="o35"/>
-          <p:cNvSpPr txBox="1"/>
-          <p:nvPr/>
-        </p:nvSpPr>
-        <p:spPr>
-          <a:xfrm>
-            <a:off x="1562100" y="2552700"/>
-            <a:ext cx="5334000" cy="228600"/>
-          </a:xfrm>
-          <a:prstGeom prst="rect">
-            <a:avLst/>
-          </a:prstGeom>
-          <a:noFill/>
-          <a:ln/>
-        </p:spPr>
-        <p:txBody>
-          <a:bodyPr wrap="square" lIns="0" tIns="0" rIns="0" bIns="0" rtlCol="0" anchor="t"/>
-          <a:lstStyle/>
-          <a:p>
-            <a:pPr indent="0" marL="0">
-              <a:buNone/>
-            </a:pPr>
-            <a:r>
-              <a:rPr lang="en-US" sz="1300" dirty="0">
-                <a:solidFill>
-                  <a:srgbClr val="5B636E"/>
-                </a:solidFill>
-                <a:latin typeface="Pretendard" pitchFamily="34" charset="0"/>
-                <a:ea typeface="Pretendard" pitchFamily="34" charset="-122"/>
-                <a:cs typeface="Pretendard" pitchFamily="34" charset="-120"/>
-              </a:rPr>
-              <a:t>Plan — 배경 · 현황 · 지표 · 원인 분석</a:t>
-            </a:r>
-            <a:endParaRPr lang="en-US" sz="1300" dirty="0"/>
-          </a:p>
-        </p:txBody>
-      </p:sp>
-      <p:sp>
-        <p:nvSpPr>
-          <p:cNvPr id="13" name="o36"/>
-          <p:cNvSpPr txBox="1"/>
-          <p:nvPr/>
-        </p:nvSpPr>
-        <p:spPr>
-          <a:xfrm>
-            <a:off x="7292340" y="2286000"/>
-            <a:ext cx="571500" cy="152400"/>
-          </a:xfrm>
-          <a:prstGeom prst="rect">
-            <a:avLst/>
-          </a:prstGeom>
-          <a:noFill/>
-          <a:ln/>
-        </p:spPr>
-        <p:txBody>
-          <a:bodyPr wrap="square" lIns="0" tIns="0" rIns="0" bIns="0" rtlCol="0" anchor="t"/>
-          <a:lstStyle/>
-          <a:p>
-            <a:pPr algn="r" indent="0" marL="0">
-              <a:buNone/>
-            </a:pPr>
-            <a:r>
-              <a:rPr lang="en-US" sz="900" dirty="0">
-                <a:solidFill>
-                  <a:srgbClr val="5B636E"/>
-                </a:solidFill>
-                <a:latin typeface="IBM Plex Mono" pitchFamily="34" charset="0"/>
-                <a:ea typeface="IBM Plex Mono" pitchFamily="34" charset="-122"/>
-                <a:cs typeface="IBM Plex Mono" pitchFamily="34" charset="-120"/>
-              </a:rPr>
-              <a:t>p.04</a:t>
-            </a:r>
-            <a:endParaRPr lang="en-US" sz="900" dirty="0"/>
-          </a:p>
-        </p:txBody>
-      </p:sp>
-      <p:sp>
-        <p:nvSpPr>
-          <p:cNvPr id="14" name="o37"/>
+              <a:t>DO</a:t>
+            </a:r>
+            <a:endParaRPr lang="en-US" sz="1100" dirty="0"/>
+          </a:p>
+        </p:txBody>
+      </p:sp>
+      <p:sp>
+        <p:nvSpPr>
+          <p:cNvPr id="19" name="o42"/>
           <p:cNvSpPr/>
           <p:nvPr/>
         </p:nvSpPr>
         <p:spPr>
           <a:xfrm>
-            <a:off x="609600" y="3028950"/>
-            <a:ext cx="7254240" cy="0"/>
+            <a:off x="3665220" y="3505200"/>
+            <a:ext cx="2072640" cy="0"/>
           </a:xfrm>
           <a:prstGeom prst="line">
             <a:avLst/>
@@ -11652,14 +11853,14 @@
       </p:sp>
       <p:sp>
         <p:nvSpPr>
-          <p:cNvPr id="15" name="o38"/>
-          <p:cNvSpPr txBox="1"/>
-          <p:nvPr/>
-        </p:nvSpPr>
-        <p:spPr>
-          <a:xfrm>
-            <a:off x="857250" y="3200400"/>
-            <a:ext cx="571500" cy="323850"/>
+          <p:cNvPr id="20" name="o43"/>
+          <p:cNvSpPr txBox="1"/>
+          <p:nvPr/>
+        </p:nvSpPr>
+        <p:spPr>
+          <a:xfrm>
+            <a:off x="3665220" y="3657600"/>
+            <a:ext cx="2072640" cy="1619250"/>
           </a:xfrm>
           <a:prstGeom prst="rect">
             <a:avLst/>
@@ -11672,33 +11873,135 @@
           <a:lstStyle/>
           <a:p>
             <a:pPr indent="0" marL="0">
-              <a:buNone/>
-            </a:pPr>
-            <a:r>
-              <a:rPr lang="en-US" sz="2000" b="1" dirty="0">
-                <a:solidFill>
-                  <a:srgbClr val="177B57"/>
+              <a:lnSpc>
+                <a:spcPct val="160000"/>
+              </a:lnSpc>
+              <a:buNone/>
+            </a:pPr>
+            <a:r>
+              <a:rPr lang="en-US" sz="1600" dirty="0">
+                <a:solidFill>
+                  <a:srgbClr val="1A1A1A"/>
+                </a:solidFill>
+                <a:latin typeface="Pretendard" pitchFamily="34" charset="0"/>
+                <a:ea typeface="Pretendard" pitchFamily="34" charset="-122"/>
+                <a:cs typeface="Pretendard" pitchFamily="34" charset="-120"/>
+              </a:rPr>
+              <a:t>6대 모듈 구축</a:t>
+            </a:r>
+            <a:endParaRPr lang="en-US" sz="1600" dirty="0"/>
+          </a:p>
+          <a:p>
+            <a:pPr indent="0" marL="0">
+              <a:lnSpc>
+                <a:spcPct val="160000"/>
+              </a:lnSpc>
+              <a:buNone/>
+            </a:pPr>
+            <a:r>
+              <a:rPr lang="en-US" sz="1600" dirty="0">
+                <a:solidFill>
+                  <a:srgbClr val="1A1A1A"/>
+                </a:solidFill>
+                <a:latin typeface="Pretendard" pitchFamily="34" charset="0"/>
+                <a:ea typeface="Pretendard" pitchFamily="34" charset="-122"/>
+                <a:cs typeface="Pretendard" pitchFamily="34" charset="-120"/>
+              </a:rPr>
+              <a:t>플랫폼 시연</a:t>
+            </a:r>
+            <a:endParaRPr lang="en-US" sz="1600" dirty="0"/>
+          </a:p>
+        </p:txBody>
+      </p:sp>
+      <p:sp>
+        <p:nvSpPr>
+          <p:cNvPr id="21" name="o44"/>
+          <p:cNvSpPr txBox="1"/>
+          <p:nvPr/>
+        </p:nvSpPr>
+        <p:spPr>
+          <a:xfrm>
+            <a:off x="3665220" y="5619750"/>
+            <a:ext cx="2072640" cy="152400"/>
+          </a:xfrm>
+          <a:prstGeom prst="rect">
+            <a:avLst/>
+          </a:prstGeom>
+          <a:noFill/>
+          <a:ln/>
+        </p:spPr>
+        <p:txBody>
+          <a:bodyPr wrap="square" lIns="0" tIns="0" rIns="0" bIns="0" rtlCol="0" anchor="t"/>
+          <a:lstStyle/>
+          <a:p>
+            <a:pPr indent="0" marL="0">
+              <a:buNone/>
+            </a:pPr>
+            <a:r>
+              <a:rPr lang="en-US" sz="900" dirty="0">
+                <a:solidFill>
+                  <a:srgbClr val="5B636E"/>
                 </a:solidFill>
                 <a:latin typeface="IBM Plex Mono" pitchFamily="34" charset="0"/>
                 <a:ea typeface="IBM Plex Mono" pitchFamily="34" charset="-122"/>
                 <a:cs typeface="IBM Plex Mono" pitchFamily="34" charset="-120"/>
               </a:rPr>
-              <a:t>02</a:t>
-            </a:r>
-            <a:endParaRPr lang="en-US" sz="2000" dirty="0"/>
-          </a:p>
-        </p:txBody>
-      </p:sp>
-      <p:sp>
-        <p:nvSpPr>
-          <p:cNvPr id="16" name="o39"/>
-          <p:cNvSpPr txBox="1"/>
-          <p:nvPr/>
-        </p:nvSpPr>
-        <p:spPr>
-          <a:xfrm>
-            <a:off x="1562100" y="3200400"/>
-            <a:ext cx="4762500" cy="266700"/>
+              <a:t>Slide 08</a:t>
+            </a:r>
+            <a:endParaRPr lang="en-US" sz="900" dirty="0"/>
+          </a:p>
+        </p:txBody>
+      </p:sp>
+      <p:sp>
+        <p:nvSpPr>
+          <p:cNvPr id="22" name="o45"/>
+          <p:cNvSpPr/>
+          <p:nvPr/>
+        </p:nvSpPr>
+        <p:spPr>
+          <a:xfrm>
+            <a:off x="6187440" y="2171700"/>
+            <a:ext cx="2606040" cy="3771900"/>
+          </a:xfrm>
+          <a:prstGeom prst="rect">
+            <a:avLst/>
+          </a:prstGeom>
+          <a:solidFill>
+            <a:srgbClr val="F2F4F3"/>
+          </a:solidFill>
+          <a:ln/>
+        </p:spPr>
+      </p:sp>
+      <p:sp>
+        <p:nvSpPr>
+          <p:cNvPr id="23" name="o46"/>
+          <p:cNvSpPr/>
+          <p:nvPr/>
+        </p:nvSpPr>
+        <p:spPr>
+          <a:xfrm>
+            <a:off x="6187440" y="2171700"/>
+            <a:ext cx="2606040" cy="57150"/>
+          </a:xfrm>
+          <a:prstGeom prst="rect">
+            <a:avLst/>
+          </a:prstGeom>
+          <a:solidFill>
+            <a:srgbClr val="177B57"/>
+          </a:solidFill>
+          <a:ln/>
+        </p:spPr>
+      </p:sp>
+      <p:sp>
+        <p:nvSpPr>
+          <p:cNvPr id="24" name="o47"/>
+          <p:cNvSpPr txBox="1"/>
+          <p:nvPr/>
+        </p:nvSpPr>
+        <p:spPr>
+          <a:xfrm>
+            <a:off x="6454140" y="2419350"/>
+            <a:ext cx="1143000" cy="800100"/>
           </a:xfrm>
           <a:prstGeom prst="rect">
             <a:avLst/>
@@ -11714,30 +12017,30 @@
               <a:buNone/>
             </a:pPr>
             <a:r>
-              <a:rPr lang="en-US" sz="1800" b="1" dirty="0">
-                <a:solidFill>
-                  <a:srgbClr val="1A1A1A"/>
-                </a:solidFill>
-                <a:latin typeface="Pretendard" pitchFamily="34" charset="0"/>
-                <a:ea typeface="Pretendard" pitchFamily="34" charset="-122"/>
-                <a:cs typeface="Pretendard" pitchFamily="34" charset="-120"/>
-              </a:rPr>
-              <a:t>무엇을 만들었나</a:t>
-            </a:r>
-            <a:endParaRPr lang="en-US" sz="1800" dirty="0"/>
-          </a:p>
-        </p:txBody>
-      </p:sp>
-      <p:sp>
-        <p:nvSpPr>
-          <p:cNvPr id="17" name="o40"/>
-          <p:cNvSpPr txBox="1"/>
-          <p:nvPr/>
-        </p:nvSpPr>
-        <p:spPr>
-          <a:xfrm>
-            <a:off x="1562100" y="3524250"/>
-            <a:ext cx="5334000" cy="228600"/>
+              <a:rPr lang="en-US" sz="6400" b="1" dirty="0">
+                <a:solidFill>
+                  <a:srgbClr val="177B57"/>
+                </a:solidFill>
+                <a:latin typeface="IBM Plex Sans" pitchFamily="34" charset="0"/>
+                <a:ea typeface="IBM Plex Sans" pitchFamily="34" charset="-122"/>
+                <a:cs typeface="IBM Plex Sans" pitchFamily="34" charset="-120"/>
+              </a:rPr>
+              <a:t>C</a:t>
+            </a:r>
+            <a:endParaRPr lang="en-US" sz="6400" dirty="0"/>
+          </a:p>
+        </p:txBody>
+      </p:sp>
+      <p:sp>
+        <p:nvSpPr>
+          <p:cNvPr id="25" name="o48"/>
+          <p:cNvSpPr txBox="1"/>
+          <p:nvPr/>
+        </p:nvSpPr>
+        <p:spPr>
+          <a:xfrm>
+            <a:off x="6473190" y="3238500"/>
+            <a:ext cx="2034540" cy="171450"/>
           </a:xfrm>
           <a:prstGeom prst="rect">
             <a:avLst/>
@@ -11753,46 +12056,7 @@
               <a:buNone/>
             </a:pPr>
             <a:r>
-              <a:rPr lang="en-US" sz="1300" dirty="0">
-                <a:solidFill>
-                  <a:srgbClr val="5B636E"/>
-                </a:solidFill>
-                <a:latin typeface="Pretendard" pitchFamily="34" charset="0"/>
-                <a:ea typeface="Pretendard" pitchFamily="34" charset="-122"/>
-                <a:cs typeface="Pretendard" pitchFamily="34" charset="-120"/>
-              </a:rPr>
-              <a:t>Do — 6대 모듈 · 플랫폼 시연</a:t>
-            </a:r>
-            <a:endParaRPr lang="en-US" sz="1300" dirty="0"/>
-          </a:p>
-        </p:txBody>
-      </p:sp>
-      <p:sp>
-        <p:nvSpPr>
-          <p:cNvPr id="18" name="o41"/>
-          <p:cNvSpPr txBox="1"/>
-          <p:nvPr/>
-        </p:nvSpPr>
-        <p:spPr>
-          <a:xfrm>
-            <a:off x="7292340" y="3257550"/>
-            <a:ext cx="571500" cy="152400"/>
-          </a:xfrm>
-          <a:prstGeom prst="rect">
-            <a:avLst/>
-          </a:prstGeom>
-          <a:noFill/>
-          <a:ln/>
-        </p:spPr>
-        <p:txBody>
-          <a:bodyPr wrap="square" lIns="0" tIns="0" rIns="0" bIns="0" rtlCol="0" anchor="t"/>
-          <a:lstStyle/>
-          <a:p>
-            <a:pPr algn="r" indent="0" marL="0">
-              <a:buNone/>
-            </a:pPr>
-            <a:r>
-              <a:rPr lang="en-US" sz="900" dirty="0">
+              <a:rPr lang="en-US" sz="1100" b="1" spc="150" kern="0" dirty="0">
                 <a:solidFill>
                   <a:srgbClr val="5B636E"/>
                 </a:solidFill>
@@ -11800,22 +12064,22 @@
                 <a:ea typeface="IBM Plex Mono" pitchFamily="34" charset="-122"/>
                 <a:cs typeface="IBM Plex Mono" pitchFamily="34" charset="-120"/>
               </a:rPr>
-              <a:t>p.08</a:t>
-            </a:r>
-            <a:endParaRPr lang="en-US" sz="900" dirty="0"/>
-          </a:p>
-        </p:txBody>
-      </p:sp>
-      <p:sp>
-        <p:nvSpPr>
-          <p:cNvPr id="19" name="o42"/>
+              <a:t>CHECK</a:t>
+            </a:r>
+            <a:endParaRPr lang="en-US" sz="1100" dirty="0"/>
+          </a:p>
+        </p:txBody>
+      </p:sp>
+      <p:sp>
+        <p:nvSpPr>
+          <p:cNvPr id="26" name="o49"/>
           <p:cNvSpPr/>
           <p:nvPr/>
         </p:nvSpPr>
         <p:spPr>
           <a:xfrm>
-            <a:off x="609600" y="4000500"/>
-            <a:ext cx="7254240" cy="0"/>
+            <a:off x="6454140" y="3505200"/>
+            <a:ext cx="2072640" cy="0"/>
           </a:xfrm>
           <a:prstGeom prst="line">
             <a:avLst/>
@@ -11831,14 +12095,14 @@
       </p:sp>
       <p:sp>
         <p:nvSpPr>
-          <p:cNvPr id="20" name="o43"/>
-          <p:cNvSpPr txBox="1"/>
-          <p:nvPr/>
-        </p:nvSpPr>
-        <p:spPr>
-          <a:xfrm>
-            <a:off x="857250" y="4171950"/>
-            <a:ext cx="571500" cy="323850"/>
+          <p:cNvPr id="27" name="o50"/>
+          <p:cNvSpPr txBox="1"/>
+          <p:nvPr/>
+        </p:nvSpPr>
+        <p:spPr>
+          <a:xfrm>
+            <a:off x="6454140" y="3657600"/>
+            <a:ext cx="2072640" cy="1619250"/>
           </a:xfrm>
           <a:prstGeom prst="rect">
             <a:avLst/>
@@ -11851,33 +12115,155 @@
           <a:lstStyle/>
           <a:p>
             <a:pPr indent="0" marL="0">
-              <a:buNone/>
-            </a:pPr>
-            <a:r>
-              <a:rPr lang="en-US" sz="2000" b="1" dirty="0">
-                <a:solidFill>
-                  <a:srgbClr val="177B57"/>
+              <a:lnSpc>
+                <a:spcPct val="160000"/>
+              </a:lnSpc>
+              <a:buNone/>
+            </a:pPr>
+            <a:r>
+              <a:rPr lang="en-US" sz="1600" dirty="0">
+                <a:solidFill>
+                  <a:srgbClr val="1A1A1A"/>
+                </a:solidFill>
+                <a:latin typeface="Pretendard" pitchFamily="34" charset="0"/>
+                <a:ea typeface="Pretendard" pitchFamily="34" charset="-122"/>
+                <a:cs typeface="Pretendard" pitchFamily="34" charset="-120"/>
+              </a:rPr>
+              <a:t>법정교육 준수율</a:t>
+            </a:r>
+            <a:endParaRPr lang="en-US" sz="1600" dirty="0"/>
+          </a:p>
+          <a:p>
+            <a:pPr indent="0" marL="0">
+              <a:lnSpc>
+                <a:spcPct val="160000"/>
+              </a:lnSpc>
+              <a:buNone/>
+            </a:pPr>
+            <a:r>
+              <a:rPr lang="en-US" sz="1600" dirty="0">
+                <a:solidFill>
+                  <a:srgbClr val="1A1A1A"/>
+                </a:solidFill>
+                <a:latin typeface="Pretendard" pitchFamily="34" charset="0"/>
+                <a:ea typeface="Pretendard" pitchFamily="34" charset="-122"/>
+                <a:cs typeface="Pretendard" pitchFamily="34" charset="-120"/>
+              </a:rPr>
+              <a:t>페이퍼리스 전환율</a:t>
+            </a:r>
+            <a:endParaRPr lang="en-US" sz="1600" dirty="0"/>
+          </a:p>
+          <a:p>
+            <a:pPr indent="0" marL="0">
+              <a:lnSpc>
+                <a:spcPct val="160000"/>
+              </a:lnSpc>
+              <a:buNone/>
+            </a:pPr>
+            <a:r>
+              <a:rPr lang="en-US" sz="1600" dirty="0">
+                <a:solidFill>
+                  <a:srgbClr val="1A1A1A"/>
+                </a:solidFill>
+                <a:latin typeface="Pretendard" pitchFamily="34" charset="0"/>
+                <a:ea typeface="Pretendard" pitchFamily="34" charset="-122"/>
+                <a:cs typeface="Pretendard" pitchFamily="34" charset="-120"/>
+              </a:rPr>
+              <a:t>행정 소요시간</a:t>
+            </a:r>
+            <a:endParaRPr lang="en-US" sz="1600" dirty="0"/>
+          </a:p>
+        </p:txBody>
+      </p:sp>
+      <p:sp>
+        <p:nvSpPr>
+          <p:cNvPr id="28" name="o51"/>
+          <p:cNvSpPr txBox="1"/>
+          <p:nvPr/>
+        </p:nvSpPr>
+        <p:spPr>
+          <a:xfrm>
+            <a:off x="6454140" y="5619750"/>
+            <a:ext cx="2072640" cy="152400"/>
+          </a:xfrm>
+          <a:prstGeom prst="rect">
+            <a:avLst/>
+          </a:prstGeom>
+          <a:noFill/>
+          <a:ln/>
+        </p:spPr>
+        <p:txBody>
+          <a:bodyPr wrap="square" lIns="0" tIns="0" rIns="0" bIns="0" rtlCol="0" anchor="t"/>
+          <a:lstStyle/>
+          <a:p>
+            <a:pPr indent="0" marL="0">
+              <a:buNone/>
+            </a:pPr>
+            <a:r>
+              <a:rPr lang="en-US" sz="900" dirty="0">
+                <a:solidFill>
+                  <a:srgbClr val="5B636E"/>
                 </a:solidFill>
                 <a:latin typeface="IBM Plex Mono" pitchFamily="34" charset="0"/>
                 <a:ea typeface="IBM Plex Mono" pitchFamily="34" charset="-122"/>
                 <a:cs typeface="IBM Plex Mono" pitchFamily="34" charset="-120"/>
               </a:rPr>
-              <a:t>03</a:t>
-            </a:r>
-            <a:endParaRPr lang="en-US" sz="2000" dirty="0"/>
-          </a:p>
-        </p:txBody>
-      </p:sp>
-      <p:sp>
-        <p:nvSpPr>
-          <p:cNvPr id="21" name="o44"/>
-          <p:cNvSpPr txBox="1"/>
-          <p:nvPr/>
-        </p:nvSpPr>
-        <p:spPr>
-          <a:xfrm>
-            <a:off x="1562100" y="4171950"/>
-            <a:ext cx="4762500" cy="266700"/>
+              <a:t>Slide 09 – 10</a:t>
+            </a:r>
+            <a:endParaRPr lang="en-US" sz="900" dirty="0"/>
+          </a:p>
+        </p:txBody>
+      </p:sp>
+      <p:sp>
+        <p:nvSpPr>
+          <p:cNvPr id="29" name="o52"/>
+          <p:cNvSpPr/>
+          <p:nvPr/>
+        </p:nvSpPr>
+        <p:spPr>
+          <a:xfrm>
+            <a:off x="8976360" y="2171700"/>
+            <a:ext cx="2606040" cy="3771900"/>
+          </a:xfrm>
+          <a:prstGeom prst="rect">
+            <a:avLst/>
+          </a:prstGeom>
+          <a:solidFill>
+            <a:srgbClr val="F2F4F3"/>
+          </a:solidFill>
+          <a:ln/>
+        </p:spPr>
+      </p:sp>
+      <p:sp>
+        <p:nvSpPr>
+          <p:cNvPr id="30" name="o53"/>
+          <p:cNvSpPr/>
+          <p:nvPr/>
+        </p:nvSpPr>
+        <p:spPr>
+          <a:xfrm>
+            <a:off x="8976360" y="2171700"/>
+            <a:ext cx="2606040" cy="57150"/>
+          </a:xfrm>
+          <a:prstGeom prst="rect">
+            <a:avLst/>
+          </a:prstGeom>
+          <a:solidFill>
+            <a:srgbClr val="177B57"/>
+          </a:solidFill>
+          <a:ln/>
+        </p:spPr>
+      </p:sp>
+      <p:sp>
+        <p:nvSpPr>
+          <p:cNvPr id="31" name="o54"/>
+          <p:cNvSpPr txBox="1"/>
+          <p:nvPr/>
+        </p:nvSpPr>
+        <p:spPr>
+          <a:xfrm>
+            <a:off x="9243060" y="2419350"/>
+            <a:ext cx="1143000" cy="800100"/>
           </a:xfrm>
           <a:prstGeom prst="rect">
             <a:avLst/>
@@ -11893,30 +12279,30 @@
               <a:buNone/>
             </a:pPr>
             <a:r>
-              <a:rPr lang="en-US" sz="1800" b="1" dirty="0">
-                <a:solidFill>
-                  <a:srgbClr val="1A1A1A"/>
-                </a:solidFill>
-                <a:latin typeface="Pretendard" pitchFamily="34" charset="0"/>
-                <a:ea typeface="Pretendard" pitchFamily="34" charset="-122"/>
-                <a:cs typeface="Pretendard" pitchFamily="34" charset="-120"/>
-              </a:rPr>
-              <a:t>무엇이 달라졌나</a:t>
-            </a:r>
-            <a:endParaRPr lang="en-US" sz="1800" dirty="0"/>
-          </a:p>
-        </p:txBody>
-      </p:sp>
-      <p:sp>
-        <p:nvSpPr>
-          <p:cNvPr id="22" name="o45"/>
-          <p:cNvSpPr txBox="1"/>
-          <p:nvPr/>
-        </p:nvSpPr>
-        <p:spPr>
-          <a:xfrm>
-            <a:off x="1562100" y="4495800"/>
-            <a:ext cx="5334000" cy="228600"/>
+              <a:rPr lang="en-US" sz="6400" b="1" dirty="0">
+                <a:solidFill>
+                  <a:srgbClr val="177B57"/>
+                </a:solidFill>
+                <a:latin typeface="IBM Plex Sans" pitchFamily="34" charset="0"/>
+                <a:ea typeface="IBM Plex Sans" pitchFamily="34" charset="-122"/>
+                <a:cs typeface="IBM Plex Sans" pitchFamily="34" charset="-120"/>
+              </a:rPr>
+              <a:t>A</a:t>
+            </a:r>
+            <a:endParaRPr lang="en-US" sz="6400" dirty="0"/>
+          </a:p>
+        </p:txBody>
+      </p:sp>
+      <p:sp>
+        <p:nvSpPr>
+          <p:cNvPr id="32" name="o55"/>
+          <p:cNvSpPr txBox="1"/>
+          <p:nvPr/>
+        </p:nvSpPr>
+        <p:spPr>
+          <a:xfrm>
+            <a:off x="9262110" y="3238500"/>
+            <a:ext cx="2034540" cy="171450"/>
           </a:xfrm>
           <a:prstGeom prst="rect">
             <a:avLst/>
@@ -11932,46 +12318,7 @@
               <a:buNone/>
             </a:pPr>
             <a:r>
-              <a:rPr lang="en-US" sz="1300" dirty="0">
-                <a:solidFill>
-                  <a:srgbClr val="5B636E"/>
-                </a:solidFill>
-                <a:latin typeface="Pretendard" pitchFamily="34" charset="0"/>
-                <a:ea typeface="Pretendard" pitchFamily="34" charset="-122"/>
-                <a:cs typeface="Pretendard" pitchFamily="34" charset="-120"/>
-              </a:rPr>
-              <a:t>Check — 준수율 · 페이퍼리스 · 행정시간</a:t>
-            </a:r>
-            <a:endParaRPr lang="en-US" sz="1300" dirty="0"/>
-          </a:p>
-        </p:txBody>
-      </p:sp>
-      <p:sp>
-        <p:nvSpPr>
-          <p:cNvPr id="23" name="o46"/>
-          <p:cNvSpPr txBox="1"/>
-          <p:nvPr/>
-        </p:nvSpPr>
-        <p:spPr>
-          <a:xfrm>
-            <a:off x="7292340" y="4229100"/>
-            <a:ext cx="571500" cy="152400"/>
-          </a:xfrm>
-          <a:prstGeom prst="rect">
-            <a:avLst/>
-          </a:prstGeom>
-          <a:noFill/>
-          <a:ln/>
-        </p:spPr>
-        <p:txBody>
-          <a:bodyPr wrap="square" lIns="0" tIns="0" rIns="0" bIns="0" rtlCol="0" anchor="t"/>
-          <a:lstStyle/>
-          <a:p>
-            <a:pPr algn="r" indent="0" marL="0">
-              <a:buNone/>
-            </a:pPr>
-            <a:r>
-              <a:rPr lang="en-US" sz="900" dirty="0">
+              <a:rPr lang="en-US" sz="1100" b="1" spc="150" kern="0" dirty="0">
                 <a:solidFill>
                   <a:srgbClr val="5B636E"/>
                 </a:solidFill>
@@ -11979,22 +12326,22 @@
                 <a:ea typeface="IBM Plex Mono" pitchFamily="34" charset="-122"/>
                 <a:cs typeface="IBM Plex Mono" pitchFamily="34" charset="-120"/>
               </a:rPr>
-              <a:t>p.09</a:t>
-            </a:r>
-            <a:endParaRPr lang="en-US" sz="900" dirty="0"/>
-          </a:p>
-        </p:txBody>
-      </p:sp>
-      <p:sp>
-        <p:nvSpPr>
-          <p:cNvPr id="24" name="o47"/>
+              <a:t>ACT</a:t>
+            </a:r>
+            <a:endParaRPr lang="en-US" sz="1100" dirty="0"/>
+          </a:p>
+        </p:txBody>
+      </p:sp>
+      <p:sp>
+        <p:nvSpPr>
+          <p:cNvPr id="33" name="o56"/>
           <p:cNvSpPr/>
           <p:nvPr/>
         </p:nvSpPr>
         <p:spPr>
           <a:xfrm>
-            <a:off x="609600" y="4972050"/>
-            <a:ext cx="7254240" cy="0"/>
+            <a:off x="9243060" y="3505200"/>
+            <a:ext cx="2072640" cy="0"/>
           </a:xfrm>
           <a:prstGeom prst="line">
             <a:avLst/>
@@ -12010,14 +12357,14 @@
       </p:sp>
       <p:sp>
         <p:nvSpPr>
-          <p:cNvPr id="25" name="o48"/>
-          <p:cNvSpPr txBox="1"/>
-          <p:nvPr/>
-        </p:nvSpPr>
-        <p:spPr>
-          <a:xfrm>
-            <a:off x="857250" y="5143500"/>
-            <a:ext cx="571500" cy="323850"/>
+          <p:cNvPr id="34" name="o57"/>
+          <p:cNvSpPr txBox="1"/>
+          <p:nvPr/>
+        </p:nvSpPr>
+        <p:spPr>
+          <a:xfrm>
+            <a:off x="9243060" y="3657600"/>
+            <a:ext cx="2072640" cy="1619250"/>
           </a:xfrm>
           <a:prstGeom prst="rect">
             <a:avLst/>
@@ -12030,564 +12377,102 @@
           <a:lstStyle/>
           <a:p>
             <a:pPr indent="0" marL="0">
-              <a:buNone/>
-            </a:pPr>
-            <a:r>
-              <a:rPr lang="en-US" sz="2000" b="1" dirty="0">
-                <a:solidFill>
-                  <a:srgbClr val="177B57"/>
+              <a:lnSpc>
+                <a:spcPct val="160000"/>
+              </a:lnSpc>
+              <a:buNone/>
+            </a:pPr>
+            <a:r>
+              <a:rPr lang="en-US" sz="1600" dirty="0">
+                <a:solidFill>
+                  <a:srgbClr val="1A1A1A"/>
+                </a:solidFill>
+                <a:latin typeface="Pretendard" pitchFamily="34" charset="0"/>
+                <a:ea typeface="Pretendard" pitchFamily="34" charset="-122"/>
+                <a:cs typeface="Pretendard" pitchFamily="34" charset="-120"/>
+              </a:rPr>
+              <a:t>표준화</a:t>
+            </a:r>
+            <a:endParaRPr lang="en-US" sz="1600" dirty="0"/>
+          </a:p>
+          <a:p>
+            <a:pPr indent="0" marL="0">
+              <a:lnSpc>
+                <a:spcPct val="160000"/>
+              </a:lnSpc>
+              <a:buNone/>
+            </a:pPr>
+            <a:r>
+              <a:rPr lang="en-US" sz="1600" dirty="0">
+                <a:solidFill>
+                  <a:srgbClr val="1A1A1A"/>
+                </a:solidFill>
+                <a:latin typeface="Pretendard" pitchFamily="34" charset="0"/>
+                <a:ea typeface="Pretendard" pitchFamily="34" charset="-122"/>
+                <a:cs typeface="Pretendard" pitchFamily="34" charset="-120"/>
+              </a:rPr>
+              <a:t>AI 통합 플랫폼 고도화</a:t>
+            </a:r>
+            <a:endParaRPr lang="en-US" sz="1600" dirty="0"/>
+          </a:p>
+          <a:p>
+            <a:pPr indent="0" marL="0">
+              <a:lnSpc>
+                <a:spcPct val="160000"/>
+              </a:lnSpc>
+              <a:buNone/>
+            </a:pPr>
+            <a:r>
+              <a:rPr lang="en-US" sz="1600" dirty="0">
+                <a:solidFill>
+                  <a:srgbClr val="1A1A1A"/>
+                </a:solidFill>
+                <a:latin typeface="Pretendard" pitchFamily="34" charset="0"/>
+                <a:ea typeface="Pretendard" pitchFamily="34" charset="-122"/>
+                <a:cs typeface="Pretendard" pitchFamily="34" charset="-120"/>
+              </a:rPr>
+              <a:t>결론 및 제언</a:t>
+            </a:r>
+            <a:endParaRPr lang="en-US" sz="1600" dirty="0"/>
+          </a:p>
+        </p:txBody>
+      </p:sp>
+      <p:sp>
+        <p:nvSpPr>
+          <p:cNvPr id="35" name="o58"/>
+          <p:cNvSpPr txBox="1"/>
+          <p:nvPr/>
+        </p:nvSpPr>
+        <p:spPr>
+          <a:xfrm>
+            <a:off x="9243060" y="5619750"/>
+            <a:ext cx="2072640" cy="152400"/>
+          </a:xfrm>
+          <a:prstGeom prst="rect">
+            <a:avLst/>
+          </a:prstGeom>
+          <a:noFill/>
+          <a:ln/>
+        </p:spPr>
+        <p:txBody>
+          <a:bodyPr wrap="square" lIns="0" tIns="0" rIns="0" bIns="0" rtlCol="0" anchor="t"/>
+          <a:lstStyle/>
+          <a:p>
+            <a:pPr indent="0" marL="0">
+              <a:buNone/>
+            </a:pPr>
+            <a:r>
+              <a:rPr lang="en-US" sz="900" dirty="0">
+                <a:solidFill>
+                  <a:srgbClr val="5B636E"/>
                 </a:solidFill>
                 <a:latin typeface="IBM Plex Mono" pitchFamily="34" charset="0"/>
                 <a:ea typeface="IBM Plex Mono" pitchFamily="34" charset="-122"/>
                 <a:cs typeface="IBM Plex Mono" pitchFamily="34" charset="-120"/>
               </a:rPr>
-              <a:t>04</a:t>
-            </a:r>
-            <a:endParaRPr lang="en-US" sz="2000" dirty="0"/>
-          </a:p>
-        </p:txBody>
-      </p:sp>
-      <p:sp>
-        <p:nvSpPr>
-          <p:cNvPr id="26" name="o49"/>
-          <p:cNvSpPr txBox="1"/>
-          <p:nvPr/>
-        </p:nvSpPr>
-        <p:spPr>
-          <a:xfrm>
-            <a:off x="1562100" y="5143500"/>
-            <a:ext cx="4762500" cy="266700"/>
-          </a:xfrm>
-          <a:prstGeom prst="rect">
-            <a:avLst/>
-          </a:prstGeom>
-          <a:noFill/>
-          <a:ln/>
-        </p:spPr>
-        <p:txBody>
-          <a:bodyPr wrap="square" lIns="0" tIns="0" rIns="0" bIns="0" rtlCol="0" anchor="t"/>
-          <a:lstStyle/>
-          <a:p>
-            <a:pPr indent="0" marL="0">
-              <a:buNone/>
-            </a:pPr>
-            <a:r>
-              <a:rPr lang="en-US" sz="1800" b="1" dirty="0">
-                <a:solidFill>
-                  <a:srgbClr val="1A1A1A"/>
-                </a:solidFill>
-                <a:latin typeface="Pretendard" pitchFamily="34" charset="0"/>
-                <a:ea typeface="Pretendard" pitchFamily="34" charset="-122"/>
-                <a:cs typeface="Pretendard" pitchFamily="34" charset="-120"/>
-              </a:rPr>
-              <a:t>어떻게 정착 · 고도화하나</a:t>
-            </a:r>
-            <a:endParaRPr lang="en-US" sz="1800" dirty="0"/>
-          </a:p>
-        </p:txBody>
-      </p:sp>
-      <p:sp>
-        <p:nvSpPr>
-          <p:cNvPr id="27" name="o50"/>
-          <p:cNvSpPr txBox="1"/>
-          <p:nvPr/>
-        </p:nvSpPr>
-        <p:spPr>
-          <a:xfrm>
-            <a:off x="1562100" y="5467350"/>
-            <a:ext cx="5334000" cy="228600"/>
-          </a:xfrm>
-          <a:prstGeom prst="rect">
-            <a:avLst/>
-          </a:prstGeom>
-          <a:noFill/>
-          <a:ln/>
-        </p:spPr>
-        <p:txBody>
-          <a:bodyPr wrap="square" lIns="0" tIns="0" rIns="0" bIns="0" rtlCol="0" anchor="t"/>
-          <a:lstStyle/>
-          <a:p>
-            <a:pPr indent="0" marL="0">
-              <a:buNone/>
-            </a:pPr>
-            <a:r>
-              <a:rPr lang="en-US" sz="1300" dirty="0">
-                <a:solidFill>
-                  <a:srgbClr val="5B636E"/>
-                </a:solidFill>
-                <a:latin typeface="Pretendard" pitchFamily="34" charset="0"/>
-                <a:ea typeface="Pretendard" pitchFamily="34" charset="-122"/>
-                <a:cs typeface="Pretendard" pitchFamily="34" charset="-120"/>
-              </a:rPr>
-              <a:t>Act — 표준화 · AI 고도화 · 제언</a:t>
-            </a:r>
-            <a:endParaRPr lang="en-US" sz="1300" dirty="0"/>
-          </a:p>
-        </p:txBody>
-      </p:sp>
-      <p:sp>
-        <p:nvSpPr>
-          <p:cNvPr id="28" name="o51"/>
-          <p:cNvSpPr txBox="1"/>
-          <p:nvPr/>
-        </p:nvSpPr>
-        <p:spPr>
-          <a:xfrm>
-            <a:off x="7292340" y="5200650"/>
-            <a:ext cx="571500" cy="152400"/>
-          </a:xfrm>
-          <a:prstGeom prst="rect">
-            <a:avLst/>
-          </a:prstGeom>
-          <a:noFill/>
-          <a:ln/>
-        </p:spPr>
-        <p:txBody>
-          <a:bodyPr wrap="square" lIns="0" tIns="0" rIns="0" bIns="0" rtlCol="0" anchor="t"/>
-          <a:lstStyle/>
-          <a:p>
-            <a:pPr algn="r" indent="0" marL="0">
-              <a:buNone/>
-            </a:pPr>
-            <a:r>
-              <a:rPr lang="en-US" sz="900" dirty="0">
-                <a:solidFill>
-                  <a:srgbClr val="5B636E"/>
-                </a:solidFill>
-                <a:latin typeface="IBM Plex Mono" pitchFamily="34" charset="0"/>
-                <a:ea typeface="IBM Plex Mono" pitchFamily="34" charset="-122"/>
-                <a:cs typeface="IBM Plex Mono" pitchFamily="34" charset="-120"/>
-              </a:rPr>
-              <a:t>p.11</a:t>
+              <a:t>Slide 11 – 12</a:t>
             </a:r>
             <a:endParaRPr lang="en-US" sz="900" dirty="0"/>
-          </a:p>
-        </p:txBody>
-      </p:sp>
-      <p:sp>
-        <p:nvSpPr>
-          <p:cNvPr id="29" name="o52"/>
-          <p:cNvSpPr/>
-          <p:nvPr/>
-        </p:nvSpPr>
-        <p:spPr>
-          <a:xfrm>
-            <a:off x="609600" y="5943600"/>
-            <a:ext cx="7254240" cy="0"/>
-          </a:xfrm>
-          <a:prstGeom prst="line">
-            <a:avLst/>
-          </a:prstGeom>
-          <a:noFill/>
-          <a:ln w="9525">
-            <a:solidFill>
-              <a:srgbClr val="D6DAD8"/>
-            </a:solidFill>
-            <a:prstDash val="solid"/>
-          </a:ln>
-        </p:spPr>
-      </p:sp>
-      <p:sp>
-        <p:nvSpPr>
-          <p:cNvPr id="30" name="o53"/>
-          <p:cNvSpPr/>
-          <p:nvPr/>
-        </p:nvSpPr>
-        <p:spPr>
-          <a:xfrm>
-            <a:off x="8046720" y="2057400"/>
-            <a:ext cx="3535680" cy="3886200"/>
-          </a:xfrm>
-          <a:prstGeom prst="rect">
-            <a:avLst/>
-          </a:prstGeom>
-          <a:solidFill>
-            <a:srgbClr val="F2F4F3"/>
-          </a:solidFill>
-          <a:ln/>
-        </p:spPr>
-      </p:sp>
-      <p:sp>
-        <p:nvSpPr>
-          <p:cNvPr id="31" name="o54"/>
-          <p:cNvSpPr txBox="1"/>
-          <p:nvPr/>
-        </p:nvSpPr>
-        <p:spPr>
-          <a:xfrm>
-            <a:off x="8256270" y="2247900"/>
-            <a:ext cx="3116580" cy="171450"/>
-          </a:xfrm>
-          <a:prstGeom prst="rect">
-            <a:avLst/>
-          </a:prstGeom>
-          <a:noFill/>
-          <a:ln/>
-        </p:spPr>
-        <p:txBody>
-          <a:bodyPr wrap="square" lIns="0" tIns="0" rIns="0" bIns="0" rtlCol="0" anchor="t"/>
-          <a:lstStyle/>
-          <a:p>
-            <a:pPr indent="0" marL="0">
-              <a:buNone/>
-            </a:pPr>
-            <a:r>
-              <a:rPr lang="en-US" sz="900" b="1" spc="120" kern="0" dirty="0">
-                <a:solidFill>
-                  <a:srgbClr val="177B57"/>
-                </a:solidFill>
-                <a:latin typeface="IBM Plex Mono" pitchFamily="34" charset="0"/>
-                <a:ea typeface="IBM Plex Mono" pitchFamily="34" charset="-122"/>
-                <a:cs typeface="IBM Plex Mono" pitchFamily="34" charset="-120"/>
-              </a:rPr>
-              <a:t>보고서 요지</a:t>
-            </a:r>
-            <a:endParaRPr lang="en-US" sz="900" dirty="0"/>
-          </a:p>
-        </p:txBody>
-      </p:sp>
-      <p:sp>
-        <p:nvSpPr>
-          <p:cNvPr id="32" name="o55"/>
-          <p:cNvSpPr txBox="1"/>
-          <p:nvPr/>
-        </p:nvSpPr>
-        <p:spPr>
-          <a:xfrm>
-            <a:off x="8256270" y="2495550"/>
-            <a:ext cx="3116580" cy="762000"/>
-          </a:xfrm>
-          <a:prstGeom prst="rect">
-            <a:avLst/>
-          </a:prstGeom>
-          <a:noFill/>
-          <a:ln/>
-        </p:spPr>
-        <p:txBody>
-          <a:bodyPr wrap="square" lIns="0" tIns="0" rIns="0" bIns="0" rtlCol="0" anchor="t"/>
-          <a:lstStyle/>
-          <a:p>
-            <a:pPr indent="0" marL="0">
-              <a:lnSpc>
-                <a:spcPct val="125000"/>
-              </a:lnSpc>
-              <a:buNone/>
-            </a:pPr>
-            <a:r>
-              <a:rPr lang="en-US" sz="1600" b="1" dirty="0">
-                <a:solidFill>
-                  <a:srgbClr val="1A1A1A"/>
-                </a:solidFill>
-                <a:latin typeface="Pretendard" pitchFamily="34" charset="0"/>
-                <a:ea typeface="Pretendard" pitchFamily="34" charset="-122"/>
-                <a:cs typeface="Pretendard" pitchFamily="34" charset="-120"/>
-              </a:rPr>
-              <a:t>보건관리자가 직접 만든 플랫폼이 누락 · 대기 · 종이를 동시에 없앴다</a:t>
-            </a:r>
-            <a:endParaRPr lang="en-US" sz="1600" dirty="0"/>
-          </a:p>
-        </p:txBody>
-      </p:sp>
-      <p:sp>
-        <p:nvSpPr>
-          <p:cNvPr id="33" name="o56"/>
-          <p:cNvSpPr/>
-          <p:nvPr/>
-        </p:nvSpPr>
-        <p:spPr>
-          <a:xfrm>
-            <a:off x="8256270" y="3543300"/>
-            <a:ext cx="3116580" cy="0"/>
-          </a:xfrm>
-          <a:prstGeom prst="line">
-            <a:avLst/>
-          </a:prstGeom>
-          <a:noFill/>
-          <a:ln w="9525">
-            <a:solidFill>
-              <a:srgbClr val="D6DAD8"/>
-            </a:solidFill>
-            <a:prstDash val="solid"/>
-          </a:ln>
-        </p:spPr>
-      </p:sp>
-      <p:sp>
-        <p:nvSpPr>
-          <p:cNvPr id="34" name="o57"/>
-          <p:cNvSpPr txBox="1"/>
-          <p:nvPr/>
-        </p:nvSpPr>
-        <p:spPr>
-          <a:xfrm>
-            <a:off x="8256270" y="3695700"/>
-            <a:ext cx="266700" cy="228600"/>
-          </a:xfrm>
-          <a:prstGeom prst="rect">
-            <a:avLst/>
-          </a:prstGeom>
-          <a:noFill/>
-          <a:ln/>
-        </p:spPr>
-        <p:txBody>
-          <a:bodyPr wrap="square" lIns="0" tIns="0" rIns="0" bIns="0" rtlCol="0" anchor="t"/>
-          <a:lstStyle/>
-          <a:p>
-            <a:pPr indent="0" marL="0">
-              <a:buNone/>
-            </a:pPr>
-            <a:r>
-              <a:rPr lang="en-US" sz="1400" b="1" dirty="0">
-                <a:solidFill>
-                  <a:srgbClr val="177B57"/>
-                </a:solidFill>
-                <a:latin typeface="IBM Plex Mono" pitchFamily="34" charset="0"/>
-                <a:ea typeface="IBM Plex Mono" pitchFamily="34" charset="-122"/>
-                <a:cs typeface="IBM Plex Mono" pitchFamily="34" charset="-120"/>
-              </a:rPr>
-              <a:t>1</a:t>
-            </a:r>
-            <a:endParaRPr lang="en-US" sz="1400" dirty="0"/>
-          </a:p>
-        </p:txBody>
-      </p:sp>
-      <p:sp>
-        <p:nvSpPr>
-          <p:cNvPr id="35" name="o58"/>
-          <p:cNvSpPr txBox="1"/>
-          <p:nvPr/>
-        </p:nvSpPr>
-        <p:spPr>
-          <a:xfrm>
-            <a:off x="8580120" y="3695700"/>
-            <a:ext cx="2773680" cy="419100"/>
-          </a:xfrm>
-          <a:prstGeom prst="rect">
-            <a:avLst/>
-          </a:prstGeom>
-          <a:noFill/>
-          <a:ln/>
-        </p:spPr>
-        <p:txBody>
-          <a:bodyPr wrap="square" lIns="0" tIns="0" rIns="0" bIns="0" rtlCol="0" anchor="t"/>
-          <a:lstStyle/>
-          <a:p>
-            <a:pPr indent="0" marL="0">
-              <a:buNone/>
-            </a:pPr>
-            <a:r>
-              <a:rPr lang="en-US" sz="1400" b="1" dirty="0">
-                <a:solidFill>
-                  <a:srgbClr val="1A1A1A"/>
-                </a:solidFill>
-                <a:latin typeface="Pretendard" pitchFamily="34" charset="0"/>
-                <a:ea typeface="Pretendard" pitchFamily="34" charset="-122"/>
-                <a:cs typeface="Pretendard" pitchFamily="34" charset="-120"/>
-              </a:rPr>
-              <a:t>법정교육 누락 18건 → 0건</a:t>
-            </a:r>
-            <a:endParaRPr lang="en-US" sz="1400" dirty="0"/>
-          </a:p>
-        </p:txBody>
-      </p:sp>
-      <p:sp>
-        <p:nvSpPr>
-          <p:cNvPr id="36" name="o59"/>
-          <p:cNvSpPr/>
-          <p:nvPr/>
-        </p:nvSpPr>
-        <p:spPr>
-          <a:xfrm>
-            <a:off x="8256270" y="4267200"/>
-            <a:ext cx="3116580" cy="0"/>
-          </a:xfrm>
-          <a:prstGeom prst="line">
-            <a:avLst/>
-          </a:prstGeom>
-          <a:noFill/>
-          <a:ln w="9525">
-            <a:solidFill>
-              <a:srgbClr val="D6DAD8"/>
-            </a:solidFill>
-            <a:prstDash val="solid"/>
-          </a:ln>
-        </p:spPr>
-      </p:sp>
-      <p:sp>
-        <p:nvSpPr>
-          <p:cNvPr id="37" name="o60"/>
-          <p:cNvSpPr txBox="1"/>
-          <p:nvPr/>
-        </p:nvSpPr>
-        <p:spPr>
-          <a:xfrm>
-            <a:off x="8256270" y="4419600"/>
-            <a:ext cx="266700" cy="228600"/>
-          </a:xfrm>
-          <a:prstGeom prst="rect">
-            <a:avLst/>
-          </a:prstGeom>
-          <a:noFill/>
-          <a:ln/>
-        </p:spPr>
-        <p:txBody>
-          <a:bodyPr wrap="square" lIns="0" tIns="0" rIns="0" bIns="0" rtlCol="0" anchor="t"/>
-          <a:lstStyle/>
-          <a:p>
-            <a:pPr indent="0" marL="0">
-              <a:buNone/>
-            </a:pPr>
-            <a:r>
-              <a:rPr lang="en-US" sz="1400" b="1" dirty="0">
-                <a:solidFill>
-                  <a:srgbClr val="177B57"/>
-                </a:solidFill>
-                <a:latin typeface="IBM Plex Mono" pitchFamily="34" charset="0"/>
-                <a:ea typeface="IBM Plex Mono" pitchFamily="34" charset="-122"/>
-                <a:cs typeface="IBM Plex Mono" pitchFamily="34" charset="-120"/>
-              </a:rPr>
-              <a:t>2</a:t>
-            </a:r>
-            <a:endParaRPr lang="en-US" sz="1400" dirty="0"/>
-          </a:p>
-        </p:txBody>
-      </p:sp>
-      <p:sp>
-        <p:nvSpPr>
-          <p:cNvPr id="38" name="o61"/>
-          <p:cNvSpPr txBox="1"/>
-          <p:nvPr/>
-        </p:nvSpPr>
-        <p:spPr>
-          <a:xfrm>
-            <a:off x="8580120" y="4419600"/>
-            <a:ext cx="2773680" cy="419100"/>
-          </a:xfrm>
-          <a:prstGeom prst="rect">
-            <a:avLst/>
-          </a:prstGeom>
-          <a:noFill/>
-          <a:ln/>
-        </p:spPr>
-        <p:txBody>
-          <a:bodyPr wrap="square" lIns="0" tIns="0" rIns="0" bIns="0" rtlCol="0" anchor="t"/>
-          <a:lstStyle/>
-          <a:p>
-            <a:pPr indent="0" marL="0">
-              <a:buNone/>
-            </a:pPr>
-            <a:r>
-              <a:rPr lang="en-US" sz="1400" b="1" dirty="0">
-                <a:solidFill>
-                  <a:srgbClr val="1A1A1A"/>
-                </a:solidFill>
-                <a:latin typeface="Pretendard" pitchFamily="34" charset="0"/>
-                <a:ea typeface="Pretendard" pitchFamily="34" charset="-122"/>
-                <a:cs typeface="Pretendard" pitchFamily="34" charset="-120"/>
-              </a:rPr>
-              <a:t>특별교육 행정시간 93% 단축</a:t>
-            </a:r>
-            <a:endParaRPr lang="en-US" sz="1400" dirty="0"/>
-          </a:p>
-        </p:txBody>
-      </p:sp>
-      <p:sp>
-        <p:nvSpPr>
-          <p:cNvPr id="39" name="o62"/>
-          <p:cNvSpPr/>
-          <p:nvPr/>
-        </p:nvSpPr>
-        <p:spPr>
-          <a:xfrm>
-            <a:off x="8256270" y="4991100"/>
-            <a:ext cx="3116580" cy="0"/>
-          </a:xfrm>
-          <a:prstGeom prst="line">
-            <a:avLst/>
-          </a:prstGeom>
-          <a:noFill/>
-          <a:ln w="9525">
-            <a:solidFill>
-              <a:srgbClr val="D6DAD8"/>
-            </a:solidFill>
-            <a:prstDash val="solid"/>
-          </a:ln>
-        </p:spPr>
-      </p:sp>
-      <p:sp>
-        <p:nvSpPr>
-          <p:cNvPr id="40" name="o63"/>
-          <p:cNvSpPr txBox="1"/>
-          <p:nvPr/>
-        </p:nvSpPr>
-        <p:spPr>
-          <a:xfrm>
-            <a:off x="8256270" y="5143500"/>
-            <a:ext cx="266700" cy="228600"/>
-          </a:xfrm>
-          <a:prstGeom prst="rect">
-            <a:avLst/>
-          </a:prstGeom>
-          <a:noFill/>
-          <a:ln/>
-        </p:spPr>
-        <p:txBody>
-          <a:bodyPr wrap="square" lIns="0" tIns="0" rIns="0" bIns="0" rtlCol="0" anchor="t"/>
-          <a:lstStyle/>
-          <a:p>
-            <a:pPr indent="0" marL="0">
-              <a:buNone/>
-            </a:pPr>
-            <a:r>
-              <a:rPr lang="en-US" sz="1400" b="1" dirty="0">
-                <a:solidFill>
-                  <a:srgbClr val="177B57"/>
-                </a:solidFill>
-                <a:latin typeface="IBM Plex Mono" pitchFamily="34" charset="0"/>
-                <a:ea typeface="IBM Plex Mono" pitchFamily="34" charset="-122"/>
-                <a:cs typeface="IBM Plex Mono" pitchFamily="34" charset="-120"/>
-              </a:rPr>
-              <a:t>3</a:t>
-            </a:r>
-            <a:endParaRPr lang="en-US" sz="1400" dirty="0"/>
-          </a:p>
-        </p:txBody>
-      </p:sp>
-      <p:sp>
-        <p:nvSpPr>
-          <p:cNvPr id="41" name="o64"/>
-          <p:cNvSpPr txBox="1"/>
-          <p:nvPr/>
-        </p:nvSpPr>
-        <p:spPr>
-          <a:xfrm>
-            <a:off x="8580120" y="5143500"/>
-            <a:ext cx="2773680" cy="419100"/>
-          </a:xfrm>
-          <a:prstGeom prst="rect">
-            <a:avLst/>
-          </a:prstGeom>
-          <a:noFill/>
-          <a:ln/>
-        </p:spPr>
-        <p:txBody>
-          <a:bodyPr wrap="square" lIns="0" tIns="0" rIns="0" bIns="0" rtlCol="0" anchor="t"/>
-          <a:lstStyle/>
-          <a:p>
-            <a:pPr indent="0" marL="0">
-              <a:buNone/>
-            </a:pPr>
-            <a:r>
-              <a:rPr lang="en-US" sz="1400" b="1" dirty="0">
-                <a:solidFill>
-                  <a:srgbClr val="1A1A1A"/>
-                </a:solidFill>
-                <a:latin typeface="Pretendard" pitchFamily="34" charset="0"/>
-                <a:ea typeface="Pretendard" pitchFamily="34" charset="-122"/>
-                <a:cs typeface="Pretendard" pitchFamily="34" charset="-120"/>
-              </a:rPr>
-              <a:t>종이 출력 연 94건 → 0건</a:t>
-            </a:r>
-            <a:endParaRPr lang="en-US" sz="1400" dirty="0"/>
           </a:p>
         </p:txBody>
       </p:sp>
@@ -12618,7 +12503,7 @@
       </p:grpSpPr>
       <p:sp>
         <p:nvSpPr>
-          <p:cNvPr id="2" name="o65"/>
+          <p:cNvPr id="2" name="o59"/>
           <p:cNvSpPr txBox="1"/>
           <p:nvPr/>
         </p:nvSpPr>
@@ -12657,7 +12542,7 @@
       </p:sp>
       <p:sp>
         <p:nvSpPr>
-          <p:cNvPr id="3" name="o66"/>
+          <p:cNvPr id="3" name="o60"/>
           <p:cNvSpPr txBox="1"/>
           <p:nvPr/>
         </p:nvSpPr>
@@ -12699,7 +12584,7 @@
       </p:sp>
       <p:sp>
         <p:nvSpPr>
-          <p:cNvPr id="4" name="o67"/>
+          <p:cNvPr id="4" name="o61"/>
           <p:cNvSpPr txBox="1"/>
           <p:nvPr/>
         </p:nvSpPr>
@@ -12738,7 +12623,7 @@
       </p:sp>
       <p:sp>
         <p:nvSpPr>
-          <p:cNvPr id="5" name="o68"/>
+          <p:cNvPr id="5" name="o62"/>
           <p:cNvSpPr/>
           <p:nvPr/>
         </p:nvSpPr>
@@ -12761,7 +12646,7 @@
       </p:sp>
       <p:sp>
         <p:nvSpPr>
-          <p:cNvPr id="6" name="o69"/>
+          <p:cNvPr id="6" name="o63"/>
           <p:cNvSpPr txBox="1"/>
           <p:nvPr/>
         </p:nvSpPr>
@@ -12800,7 +12685,7 @@
       </p:sp>
       <p:sp>
         <p:nvSpPr>
-          <p:cNvPr id="7" name="o70"/>
+          <p:cNvPr id="7" name="o64"/>
           <p:cNvSpPr txBox="1"/>
           <p:nvPr/>
         </p:nvSpPr>
@@ -12839,7 +12724,7 @@
       </p:sp>
       <p:sp>
         <p:nvSpPr>
-          <p:cNvPr id="8" name="o71"/>
+          <p:cNvPr id="8" name="o65"/>
           <p:cNvSpPr txBox="1"/>
           <p:nvPr/>
         </p:nvSpPr>
@@ -12878,7 +12763,7 @@
       </p:sp>
       <p:sp>
         <p:nvSpPr>
-          <p:cNvPr id="9" name="o72"/>
+          <p:cNvPr id="9" name="o66"/>
           <p:cNvSpPr/>
           <p:nvPr/>
         </p:nvSpPr>
@@ -12903,7 +12788,7 @@
       </p:sp>
       <p:sp>
         <p:nvSpPr>
-          <p:cNvPr id="10" name="o73"/>
+          <p:cNvPr id="10" name="o67"/>
           <p:cNvSpPr txBox="1"/>
           <p:nvPr/>
         </p:nvSpPr>
@@ -12942,7 +12827,7 @@
       </p:sp>
       <p:sp>
         <p:nvSpPr>
-          <p:cNvPr id="11" name="o74"/>
+          <p:cNvPr id="11" name="o68"/>
           <p:cNvSpPr txBox="1"/>
           <p:nvPr/>
         </p:nvSpPr>
@@ -12981,7 +12866,7 @@
       </p:sp>
       <p:sp>
         <p:nvSpPr>
-          <p:cNvPr id="12" name="o75"/>
+          <p:cNvPr id="12" name="o69"/>
           <p:cNvSpPr txBox="1"/>
           <p:nvPr/>
         </p:nvSpPr>
@@ -13020,7 +12905,7 @@
       </p:sp>
       <p:sp>
         <p:nvSpPr>
-          <p:cNvPr id="13" name="o76"/>
+          <p:cNvPr id="13" name="o70"/>
           <p:cNvSpPr txBox="1"/>
           <p:nvPr/>
         </p:nvSpPr>
@@ -13059,7 +12944,7 @@
       </p:sp>
       <p:sp>
         <p:nvSpPr>
-          <p:cNvPr id="14" name="o77"/>
+          <p:cNvPr id="14" name="o71"/>
           <p:cNvSpPr/>
           <p:nvPr/>
         </p:nvSpPr>
@@ -13084,7 +12969,7 @@
       </p:sp>
       <p:sp>
         <p:nvSpPr>
-          <p:cNvPr id="15" name="o78"/>
+          <p:cNvPr id="15" name="o72"/>
           <p:cNvSpPr/>
           <p:nvPr/>
         </p:nvSpPr>
@@ -13104,7 +12989,7 @@
       </p:sp>
       <p:sp>
         <p:nvSpPr>
-          <p:cNvPr id="16" name="o79"/>
+          <p:cNvPr id="16" name="o73"/>
           <p:cNvSpPr txBox="1"/>
           <p:nvPr/>
         </p:nvSpPr>
@@ -13143,7 +13028,7 @@
       </p:sp>
       <p:sp>
         <p:nvSpPr>
-          <p:cNvPr id="17" name="o80"/>
+          <p:cNvPr id="17" name="o74"/>
           <p:cNvSpPr txBox="1"/>
           <p:nvPr/>
         </p:nvSpPr>
@@ -13182,7 +13067,7 @@
       </p:sp>
       <p:sp>
         <p:nvSpPr>
-          <p:cNvPr id="18" name="o81"/>
+          <p:cNvPr id="18" name="o75"/>
           <p:cNvSpPr txBox="1"/>
           <p:nvPr/>
         </p:nvSpPr>
@@ -13221,7 +13106,7 @@
       </p:sp>
       <p:sp>
         <p:nvSpPr>
-          <p:cNvPr id="19" name="o82"/>
+          <p:cNvPr id="19" name="o76"/>
           <p:cNvSpPr txBox="1"/>
           <p:nvPr/>
         </p:nvSpPr>
@@ -13260,7 +13145,7 @@
       </p:sp>
       <p:sp>
         <p:nvSpPr>
-          <p:cNvPr id="20" name="o83"/>
+          <p:cNvPr id="20" name="o77"/>
           <p:cNvSpPr/>
           <p:nvPr/>
         </p:nvSpPr>
@@ -13285,7 +13170,7 @@
       </p:sp>
       <p:sp>
         <p:nvSpPr>
-          <p:cNvPr id="21" name="o84"/>
+          <p:cNvPr id="21" name="o78"/>
           <p:cNvSpPr txBox="1"/>
           <p:nvPr/>
         </p:nvSpPr>
@@ -13324,7 +13209,7 @@
       </p:sp>
       <p:sp>
         <p:nvSpPr>
-          <p:cNvPr id="22" name="o85"/>
+          <p:cNvPr id="22" name="o79"/>
           <p:cNvSpPr txBox="1"/>
           <p:nvPr/>
         </p:nvSpPr>
@@ -13363,7 +13248,7 @@
       </p:sp>
       <p:sp>
         <p:nvSpPr>
-          <p:cNvPr id="23" name="o86"/>
+          <p:cNvPr id="23" name="o80"/>
           <p:cNvSpPr txBox="1"/>
           <p:nvPr/>
         </p:nvSpPr>
@@ -13402,7 +13287,7 @@
       </p:sp>
       <p:sp>
         <p:nvSpPr>
-          <p:cNvPr id="24" name="o87"/>
+          <p:cNvPr id="24" name="o81"/>
           <p:cNvSpPr txBox="1"/>
           <p:nvPr/>
         </p:nvSpPr>
@@ -13441,7 +13326,7 @@
       </p:sp>
       <p:sp>
         <p:nvSpPr>
-          <p:cNvPr id="25" name="o88"/>
+          <p:cNvPr id="25" name="o82"/>
           <p:cNvSpPr txBox="1"/>
           <p:nvPr/>
         </p:nvSpPr>
@@ -13480,7 +13365,7 @@
       </p:sp>
       <p:sp>
         <p:nvSpPr>
-          <p:cNvPr id="26" name="o89"/>
+          <p:cNvPr id="26" name="o83"/>
           <p:cNvSpPr txBox="1"/>
           <p:nvPr/>
         </p:nvSpPr>
@@ -13519,7 +13404,7 @@
       </p:sp>
       <p:sp>
         <p:nvSpPr>
-          <p:cNvPr id="27" name="o90"/>
+          <p:cNvPr id="27" name="o84"/>
           <p:cNvSpPr txBox="1"/>
           <p:nvPr/>
         </p:nvSpPr>
@@ -13558,7 +13443,7 @@
       </p:sp>
       <p:sp>
         <p:nvSpPr>
-          <p:cNvPr id="28" name="o91"/>
+          <p:cNvPr id="28" name="o85"/>
           <p:cNvSpPr txBox="1"/>
           <p:nvPr/>
         </p:nvSpPr>
@@ -13597,7 +13482,7 @@
       </p:sp>
       <p:sp>
         <p:nvSpPr>
-          <p:cNvPr id="29" name="o92"/>
+          <p:cNvPr id="29" name="o86"/>
           <p:cNvSpPr txBox="1"/>
           <p:nvPr/>
         </p:nvSpPr>
@@ -13636,7 +13521,7 @@
       </p:sp>
       <p:sp>
         <p:nvSpPr>
-          <p:cNvPr id="30" name="o93"/>
+          <p:cNvPr id="30" name="o87"/>
           <p:cNvSpPr txBox="1"/>
           <p:nvPr/>
         </p:nvSpPr>
@@ -13675,7 +13560,7 @@
       </p:sp>
       <p:sp>
         <p:nvSpPr>
-          <p:cNvPr id="31" name="o94"/>
+          <p:cNvPr id="31" name="o88"/>
           <p:cNvSpPr txBox="1"/>
           <p:nvPr/>
         </p:nvSpPr>
@@ -13714,7 +13599,7 @@
       </p:sp>
       <p:sp>
         <p:nvSpPr>
-          <p:cNvPr id="32" name="o95"/>
+          <p:cNvPr id="32" name="o89"/>
           <p:cNvSpPr txBox="1"/>
           <p:nvPr/>
         </p:nvSpPr>
@@ -13753,7 +13638,7 @@
       </p:sp>
       <p:sp>
         <p:nvSpPr>
-          <p:cNvPr id="33" name="o96"/>
+          <p:cNvPr id="33" name="o90"/>
           <p:cNvSpPr txBox="1"/>
           <p:nvPr/>
         </p:nvSpPr>
@@ -13792,7 +13677,7 @@
       </p:sp>
       <p:sp>
         <p:nvSpPr>
-          <p:cNvPr id="34" name="o97"/>
+          <p:cNvPr id="34" name="o91"/>
           <p:cNvSpPr txBox="1"/>
           <p:nvPr/>
         </p:nvSpPr>
@@ -13831,7 +13716,7 @@
       </p:sp>
       <p:sp>
         <p:nvSpPr>
-          <p:cNvPr id="35" name="o98"/>
+          <p:cNvPr id="35" name="o92"/>
           <p:cNvSpPr/>
           <p:nvPr/>
         </p:nvSpPr>
@@ -13854,7 +13739,7 @@
       </p:sp>
       <p:sp>
         <p:nvSpPr>
-          <p:cNvPr id="36" name="o99"/>
+          <p:cNvPr id="36" name="o93"/>
           <p:cNvSpPr txBox="1"/>
           <p:nvPr/>
         </p:nvSpPr>
@@ -13893,7 +13778,7 @@
       </p:sp>
       <p:sp>
         <p:nvSpPr>
-          <p:cNvPr id="37" name="o100"/>
+          <p:cNvPr id="37" name="o94"/>
           <p:cNvSpPr txBox="1"/>
           <p:nvPr/>
         </p:nvSpPr>
@@ -13932,7 +13817,7 @@
       </p:sp>
       <p:sp>
         <p:nvSpPr>
-          <p:cNvPr id="38" name="o101"/>
+          <p:cNvPr id="38" name="o95"/>
           <p:cNvSpPr/>
           <p:nvPr/>
         </p:nvSpPr>
@@ -13952,7 +13837,7 @@
       </p:sp>
       <p:sp>
         <p:nvSpPr>
-          <p:cNvPr id="39" name="o102"/>
+          <p:cNvPr id="39" name="o96"/>
           <p:cNvSpPr/>
           <p:nvPr/>
         </p:nvSpPr>
@@ -13975,7 +13860,7 @@
       </p:sp>
       <p:sp>
         <p:nvSpPr>
-          <p:cNvPr id="40" name="o103"/>
+          <p:cNvPr id="40" name="o97"/>
           <p:cNvSpPr txBox="1"/>
           <p:nvPr/>
         </p:nvSpPr>
@@ -14014,7 +13899,7 @@
       </p:sp>
       <p:sp>
         <p:nvSpPr>
-          <p:cNvPr id="41" name="o104"/>
+          <p:cNvPr id="41" name="o98"/>
           <p:cNvSpPr txBox="1"/>
           <p:nvPr/>
         </p:nvSpPr>
@@ -14053,7 +13938,7 @@
       </p:sp>
       <p:sp>
         <p:nvSpPr>
-          <p:cNvPr id="42" name="o105"/>
+          <p:cNvPr id="42" name="o99"/>
           <p:cNvSpPr/>
           <p:nvPr/>
         </p:nvSpPr>
@@ -14073,7 +13958,7 @@
       </p:sp>
       <p:sp>
         <p:nvSpPr>
-          <p:cNvPr id="43" name="o106"/>
+          <p:cNvPr id="43" name="o100"/>
           <p:cNvSpPr/>
           <p:nvPr/>
         </p:nvSpPr>
@@ -14096,7 +13981,7 @@
       </p:sp>
       <p:sp>
         <p:nvSpPr>
-          <p:cNvPr id="44" name="o107"/>
+          <p:cNvPr id="44" name="o101"/>
           <p:cNvSpPr txBox="1"/>
           <p:nvPr/>
         </p:nvSpPr>
@@ -14135,7 +14020,7 @@
       </p:sp>
       <p:sp>
         <p:nvSpPr>
-          <p:cNvPr id="45" name="o108"/>
+          <p:cNvPr id="45" name="o102"/>
           <p:cNvSpPr txBox="1"/>
           <p:nvPr/>
         </p:nvSpPr>
@@ -14174,7 +14059,7 @@
       </p:sp>
       <p:sp>
         <p:nvSpPr>
-          <p:cNvPr id="46" name="o109"/>
+          <p:cNvPr id="46" name="o103"/>
           <p:cNvSpPr/>
           <p:nvPr/>
         </p:nvSpPr>
@@ -14194,7 +14079,7 @@
       </p:sp>
       <p:sp>
         <p:nvSpPr>
-          <p:cNvPr id="47" name="o110"/>
+          <p:cNvPr id="47" name="o104"/>
           <p:cNvSpPr/>
           <p:nvPr/>
         </p:nvSpPr>
@@ -14217,7 +14102,7 @@
       </p:sp>
       <p:sp>
         <p:nvSpPr>
-          <p:cNvPr id="48" name="o111"/>
+          <p:cNvPr id="48" name="o105"/>
           <p:cNvSpPr txBox="1"/>
           <p:nvPr/>
         </p:nvSpPr>
@@ -14256,7 +14141,7 @@
       </p:sp>
       <p:sp>
         <p:nvSpPr>
-          <p:cNvPr id="49" name="o112"/>
+          <p:cNvPr id="49" name="o106"/>
           <p:cNvSpPr txBox="1"/>
           <p:nvPr/>
         </p:nvSpPr>
@@ -14295,7 +14180,7 @@
       </p:sp>
       <p:sp>
         <p:nvSpPr>
-          <p:cNvPr id="50" name="o113"/>
+          <p:cNvPr id="50" name="o107"/>
           <p:cNvSpPr/>
           <p:nvPr/>
         </p:nvSpPr>
@@ -14315,7 +14200,7 @@
       </p:sp>
       <p:sp>
         <p:nvSpPr>
-          <p:cNvPr id="51" name="o114"/>
+          <p:cNvPr id="51" name="o108"/>
           <p:cNvSpPr/>
           <p:nvPr/>
         </p:nvSpPr>
@@ -14338,7 +14223,7 @@
       </p:sp>
       <p:sp>
         <p:nvSpPr>
-          <p:cNvPr id="52" name="o115"/>
+          <p:cNvPr id="52" name="o109"/>
           <p:cNvSpPr txBox="1"/>
           <p:nvPr/>
         </p:nvSpPr>
@@ -14377,7 +14262,7 @@
       </p:sp>
       <p:sp>
         <p:nvSpPr>
-          <p:cNvPr id="53" name="o116"/>
+          <p:cNvPr id="53" name="o110"/>
           <p:cNvSpPr txBox="1"/>
           <p:nvPr/>
         </p:nvSpPr>
@@ -14416,7 +14301,7 @@
       </p:sp>
       <p:sp>
         <p:nvSpPr>
-          <p:cNvPr id="54" name="o117"/>
+          <p:cNvPr id="54" name="o111"/>
           <p:cNvSpPr/>
           <p:nvPr/>
         </p:nvSpPr>
@@ -14436,7 +14321,7 @@
       </p:sp>
       <p:sp>
         <p:nvSpPr>
-          <p:cNvPr id="55" name="o118"/>
+          <p:cNvPr id="55" name="o112"/>
           <p:cNvSpPr/>
           <p:nvPr/>
         </p:nvSpPr>
@@ -14459,7 +14344,7 @@
       </p:sp>
       <p:sp>
         <p:nvSpPr>
-          <p:cNvPr id="56" name="o119"/>
+          <p:cNvPr id="56" name="o113"/>
           <p:cNvSpPr txBox="1"/>
           <p:nvPr/>
         </p:nvSpPr>
@@ -14487,7 +14372,7 @@
       </p:sp>
       <p:sp>
         <p:nvSpPr>
-          <p:cNvPr id="57" name="o120"/>
+          <p:cNvPr id="57" name="o114"/>
           <p:cNvSpPr txBox="1"/>
           <p:nvPr/>
         </p:nvSpPr>
@@ -14526,7 +14411,7 @@
       </p:sp>
       <p:sp>
         <p:nvSpPr>
-          <p:cNvPr id="58" name="o121"/>
+          <p:cNvPr id="58" name="o115"/>
           <p:cNvSpPr/>
           <p:nvPr/>
         </p:nvSpPr>
@@ -14546,7 +14431,7 @@
       </p:sp>
       <p:sp>
         <p:nvSpPr>
-          <p:cNvPr id="59" name="o122"/>
+          <p:cNvPr id="59" name="o116"/>
           <p:cNvSpPr/>
           <p:nvPr/>
         </p:nvSpPr>
@@ -14569,7 +14454,7 @@
       </p:sp>
       <p:sp>
         <p:nvSpPr>
-          <p:cNvPr id="60" name="o123"/>
+          <p:cNvPr id="60" name="o117"/>
           <p:cNvSpPr/>
           <p:nvPr/>
         </p:nvSpPr>
@@ -14594,7 +14479,7 @@
       </p:sp>
       <p:sp>
         <p:nvSpPr>
-          <p:cNvPr id="61" name="o124"/>
+          <p:cNvPr id="61" name="o118"/>
           <p:cNvSpPr txBox="1"/>
           <p:nvPr/>
         </p:nvSpPr>
@@ -14633,7 +14518,7 @@
       </p:sp>
       <p:sp>
         <p:nvSpPr>
-          <p:cNvPr id="62" name="o125"/>
+          <p:cNvPr id="62" name="o119"/>
           <p:cNvSpPr txBox="1"/>
           <p:nvPr/>
         </p:nvSpPr>
@@ -14672,7 +14557,7 @@
       </p:sp>
       <p:sp>
         <p:nvSpPr>
-          <p:cNvPr id="63" name="o126"/>
+          <p:cNvPr id="63" name="o120"/>
           <p:cNvSpPr txBox="1"/>
           <p:nvPr/>
         </p:nvSpPr>
@@ -14711,7 +14596,7 @@
       </p:sp>
       <p:sp>
         <p:nvSpPr>
-          <p:cNvPr id="64" name="o127"/>
+          <p:cNvPr id="64" name="o121"/>
           <p:cNvSpPr/>
           <p:nvPr/>
         </p:nvSpPr>
@@ -14736,7 +14621,7 @@
       </p:sp>
       <p:sp>
         <p:nvSpPr>
-          <p:cNvPr id="65" name="o128"/>
+          <p:cNvPr id="65" name="o122"/>
           <p:cNvSpPr txBox="1"/>
           <p:nvPr/>
         </p:nvSpPr>
@@ -14775,7 +14660,7 @@
       </p:sp>
       <p:sp>
         <p:nvSpPr>
-          <p:cNvPr id="66" name="o129"/>
+          <p:cNvPr id="66" name="o123"/>
           <p:cNvSpPr txBox="1"/>
           <p:nvPr/>
         </p:nvSpPr>
@@ -14814,7 +14699,7 @@
       </p:sp>
       <p:sp>
         <p:nvSpPr>
-          <p:cNvPr id="67" name="o130"/>
+          <p:cNvPr id="67" name="o124"/>
           <p:cNvSpPr txBox="1"/>
           <p:nvPr/>
         </p:nvSpPr>
@@ -14853,7 +14738,7 @@
       </p:sp>
       <p:sp>
         <p:nvSpPr>
-          <p:cNvPr id="68" name="o131"/>
+          <p:cNvPr id="68" name="o125"/>
           <p:cNvSpPr/>
           <p:nvPr/>
         </p:nvSpPr>
@@ -14873,7 +14758,7 @@
       </p:sp>
       <p:sp>
         <p:nvSpPr>
-          <p:cNvPr id="69" name="o132"/>
+          <p:cNvPr id="69" name="o126"/>
           <p:cNvSpPr/>
           <p:nvPr/>
         </p:nvSpPr>
@@ -14893,7 +14778,7 @@
       </p:sp>
       <p:sp>
         <p:nvSpPr>
-          <p:cNvPr id="70" name="o133"/>
+          <p:cNvPr id="70" name="o127"/>
           <p:cNvSpPr txBox="1"/>
           <p:nvPr/>
         </p:nvSpPr>
@@ -14960,7 +14845,7 @@
       </p:grpSpPr>
       <p:sp>
         <p:nvSpPr>
-          <p:cNvPr id="2" name="o134"/>
+          <p:cNvPr id="2" name="o128"/>
           <p:cNvSpPr txBox="1"/>
           <p:nvPr/>
         </p:nvSpPr>
@@ -14999,7 +14884,7 @@
       </p:sp>
       <p:sp>
         <p:nvSpPr>
-          <p:cNvPr id="3" name="o135"/>
+          <p:cNvPr id="3" name="o129"/>
           <p:cNvSpPr txBox="1"/>
           <p:nvPr/>
         </p:nvSpPr>
@@ -15041,7 +14926,7 @@
       </p:sp>
       <p:sp>
         <p:nvSpPr>
-          <p:cNvPr id="4" name="o136"/>
+          <p:cNvPr id="4" name="o130"/>
           <p:cNvSpPr txBox="1"/>
           <p:nvPr/>
         </p:nvSpPr>
@@ -15080,7 +14965,7 @@
       </p:sp>
       <p:sp>
         <p:nvSpPr>
-          <p:cNvPr id="5" name="o137"/>
+          <p:cNvPr id="5" name="o131"/>
           <p:cNvSpPr/>
           <p:nvPr/>
         </p:nvSpPr>
@@ -15103,7 +14988,7 @@
       </p:sp>
       <p:sp>
         <p:nvSpPr>
-          <p:cNvPr id="6" name="o138"/>
+          <p:cNvPr id="6" name="o132"/>
           <p:cNvSpPr txBox="1"/>
           <p:nvPr/>
         </p:nvSpPr>
@@ -15142,7 +15027,7 @@
       </p:sp>
       <p:sp>
         <p:nvSpPr>
-          <p:cNvPr id="7" name="o139"/>
+          <p:cNvPr id="7" name="o133"/>
           <p:cNvSpPr txBox="1"/>
           <p:nvPr/>
         </p:nvSpPr>
@@ -15181,7 +15066,7 @@
       </p:sp>
       <p:sp>
         <p:nvSpPr>
-          <p:cNvPr id="8" name="o140"/>
+          <p:cNvPr id="8" name="o134"/>
           <p:cNvSpPr txBox="1"/>
           <p:nvPr/>
         </p:nvSpPr>
@@ -15220,7 +15105,7 @@
       </p:sp>
       <p:sp>
         <p:nvSpPr>
-          <p:cNvPr id="9" name="o141"/>
+          <p:cNvPr id="9" name="o135"/>
           <p:cNvSpPr txBox="1"/>
           <p:nvPr/>
         </p:nvSpPr>
@@ -15259,7 +15144,7 @@
       </p:sp>
       <p:sp>
         <p:nvSpPr>
-          <p:cNvPr id="10" name="o142"/>
+          <p:cNvPr id="10" name="o136"/>
           <p:cNvSpPr txBox="1"/>
           <p:nvPr/>
         </p:nvSpPr>
@@ -15341,7 +15226,7 @@
       </p:sp>
       <p:sp>
         <p:nvSpPr>
-          <p:cNvPr id="11" name="o143"/>
+          <p:cNvPr id="11" name="o137"/>
           <p:cNvSpPr/>
           <p:nvPr/>
         </p:nvSpPr>
@@ -15364,7 +15249,7 @@
       </p:sp>
       <p:sp>
         <p:nvSpPr>
-          <p:cNvPr id="12" name="o144"/>
+          <p:cNvPr id="12" name="o138"/>
           <p:cNvSpPr txBox="1"/>
           <p:nvPr/>
         </p:nvSpPr>
@@ -15403,7 +15288,7 @@
       </p:sp>
       <p:sp>
         <p:nvSpPr>
-          <p:cNvPr id="13" name="o145"/>
+          <p:cNvPr id="13" name="o139"/>
           <p:cNvSpPr txBox="1"/>
           <p:nvPr/>
         </p:nvSpPr>
@@ -15442,7 +15327,7 @@
       </p:sp>
       <p:sp>
         <p:nvSpPr>
-          <p:cNvPr id="14" name="o146"/>
+          <p:cNvPr id="14" name="o140"/>
           <p:cNvSpPr txBox="1"/>
           <p:nvPr/>
         </p:nvSpPr>
@@ -15481,7 +15366,7 @@
       </p:sp>
       <p:sp>
         <p:nvSpPr>
-          <p:cNvPr id="15" name="o147"/>
+          <p:cNvPr id="15" name="o141"/>
           <p:cNvSpPr txBox="1"/>
           <p:nvPr/>
         </p:nvSpPr>
@@ -15520,7 +15405,7 @@
       </p:sp>
       <p:sp>
         <p:nvSpPr>
-          <p:cNvPr id="16" name="o148"/>
+          <p:cNvPr id="16" name="o142"/>
           <p:cNvSpPr txBox="1"/>
           <p:nvPr/>
         </p:nvSpPr>
@@ -15602,7 +15487,7 @@
       </p:sp>
       <p:sp>
         <p:nvSpPr>
-          <p:cNvPr id="17" name="o149"/>
+          <p:cNvPr id="17" name="o143"/>
           <p:cNvSpPr/>
           <p:nvPr/>
         </p:nvSpPr>
@@ -15625,7 +15510,7 @@
       </p:sp>
       <p:sp>
         <p:nvSpPr>
-          <p:cNvPr id="18" name="o150"/>
+          <p:cNvPr id="18" name="o144"/>
           <p:cNvSpPr txBox="1"/>
           <p:nvPr/>
         </p:nvSpPr>
@@ -15664,7 +15549,7 @@
       </p:sp>
       <p:sp>
         <p:nvSpPr>
-          <p:cNvPr id="19" name="o151"/>
+          <p:cNvPr id="19" name="o145"/>
           <p:cNvSpPr txBox="1"/>
           <p:nvPr/>
         </p:nvSpPr>
@@ -15703,7 +15588,7 @@
       </p:sp>
       <p:sp>
         <p:nvSpPr>
-          <p:cNvPr id="20" name="o152"/>
+          <p:cNvPr id="20" name="o146"/>
           <p:cNvSpPr txBox="1"/>
           <p:nvPr/>
         </p:nvSpPr>
@@ -15742,7 +15627,7 @@
       </p:sp>
       <p:sp>
         <p:nvSpPr>
-          <p:cNvPr id="21" name="o153"/>
+          <p:cNvPr id="21" name="o147"/>
           <p:cNvSpPr txBox="1"/>
           <p:nvPr/>
         </p:nvSpPr>
@@ -15781,7 +15666,7 @@
       </p:sp>
       <p:sp>
         <p:nvSpPr>
-          <p:cNvPr id="22" name="o154"/>
+          <p:cNvPr id="22" name="o148"/>
           <p:cNvSpPr txBox="1"/>
           <p:nvPr/>
         </p:nvSpPr>
@@ -15863,7 +15748,7 @@
       </p:sp>
       <p:sp>
         <p:nvSpPr>
-          <p:cNvPr id="23" name="o155"/>
+          <p:cNvPr id="23" name="o149"/>
           <p:cNvSpPr/>
           <p:nvPr/>
         </p:nvSpPr>
@@ -15886,7 +15771,7 @@
       </p:sp>
       <p:sp>
         <p:nvSpPr>
-          <p:cNvPr id="24" name="o156"/>
+          <p:cNvPr id="24" name="o150"/>
           <p:cNvSpPr txBox="1"/>
           <p:nvPr/>
         </p:nvSpPr>
@@ -15925,7 +15810,7 @@
       </p:sp>
       <p:sp>
         <p:nvSpPr>
-          <p:cNvPr id="25" name="o157"/>
+          <p:cNvPr id="25" name="o151"/>
           <p:cNvSpPr txBox="1"/>
           <p:nvPr/>
         </p:nvSpPr>
@@ -15964,7 +15849,7 @@
       </p:sp>
       <p:sp>
         <p:nvSpPr>
-          <p:cNvPr id="26" name="o158"/>
+          <p:cNvPr id="26" name="o152"/>
           <p:cNvSpPr txBox="1"/>
           <p:nvPr/>
         </p:nvSpPr>
@@ -16003,7 +15888,7 @@
       </p:sp>
       <p:sp>
         <p:nvSpPr>
-          <p:cNvPr id="27" name="o159"/>
+          <p:cNvPr id="27" name="o153"/>
           <p:cNvSpPr/>
           <p:nvPr/>
         </p:nvSpPr>
@@ -16023,7 +15908,7 @@
       </p:sp>
       <p:sp>
         <p:nvSpPr>
-          <p:cNvPr id="28" name="o160"/>
+          <p:cNvPr id="28" name="o154"/>
           <p:cNvSpPr txBox="1"/>
           <p:nvPr/>
         </p:nvSpPr>
@@ -16062,7 +15947,7 @@
       </p:sp>
       <p:sp>
         <p:nvSpPr>
-          <p:cNvPr id="29" name="o161"/>
+          <p:cNvPr id="29" name="o155"/>
           <p:cNvSpPr txBox="1"/>
           <p:nvPr/>
         </p:nvSpPr>
@@ -16101,7 +15986,7 @@
       </p:sp>
       <p:sp>
         <p:nvSpPr>
-          <p:cNvPr id="30" name="o162"/>
+          <p:cNvPr id="30" name="o156"/>
           <p:cNvSpPr txBox="1"/>
           <p:nvPr/>
         </p:nvSpPr>
@@ -16140,7 +16025,7 @@
       </p:sp>
       <p:sp>
         <p:nvSpPr>
-          <p:cNvPr id="31" name="o163"/>
+          <p:cNvPr id="31" name="o157"/>
           <p:cNvSpPr/>
           <p:nvPr/>
         </p:nvSpPr>
@@ -16163,7 +16048,7 @@
       </p:sp>
       <p:sp>
         <p:nvSpPr>
-          <p:cNvPr id="32" name="o164"/>
+          <p:cNvPr id="32" name="o158"/>
           <p:cNvSpPr txBox="1"/>
           <p:nvPr/>
         </p:nvSpPr>
@@ -16202,7 +16087,7 @@
       </p:sp>
       <p:sp>
         <p:nvSpPr>
-          <p:cNvPr id="33" name="o165"/>
+          <p:cNvPr id="33" name="o159"/>
           <p:cNvSpPr txBox="1"/>
           <p:nvPr/>
         </p:nvSpPr>
@@ -16241,7 +16126,7 @@
       </p:sp>
       <p:sp>
         <p:nvSpPr>
-          <p:cNvPr id="34" name="o166"/>
+          <p:cNvPr id="34" name="o160"/>
           <p:cNvSpPr txBox="1"/>
           <p:nvPr/>
         </p:nvSpPr>
@@ -16280,7 +16165,7 @@
       </p:sp>
       <p:sp>
         <p:nvSpPr>
-          <p:cNvPr id="35" name="o167"/>
+          <p:cNvPr id="35" name="o161"/>
           <p:cNvSpPr/>
           <p:nvPr/>
         </p:nvSpPr>
@@ -16303,7 +16188,7 @@
       </p:sp>
       <p:sp>
         <p:nvSpPr>
-          <p:cNvPr id="36" name="o168"/>
+          <p:cNvPr id="36" name="o162"/>
           <p:cNvSpPr txBox="1"/>
           <p:nvPr/>
         </p:nvSpPr>
@@ -16342,7 +16227,7 @@
       </p:sp>
       <p:sp>
         <p:nvSpPr>
-          <p:cNvPr id="37" name="o169"/>
+          <p:cNvPr id="37" name="o163"/>
           <p:cNvSpPr txBox="1"/>
           <p:nvPr/>
         </p:nvSpPr>
@@ -16381,7 +16266,7 @@
       </p:sp>
       <p:sp>
         <p:nvSpPr>
-          <p:cNvPr id="38" name="o170"/>
+          <p:cNvPr id="38" name="o164"/>
           <p:cNvSpPr txBox="1"/>
           <p:nvPr/>
         </p:nvSpPr>
@@ -16420,7 +16305,7 @@
       </p:sp>
       <p:sp>
         <p:nvSpPr>
-          <p:cNvPr id="39" name="o171"/>
+          <p:cNvPr id="39" name="o165"/>
           <p:cNvSpPr/>
           <p:nvPr/>
         </p:nvSpPr>
@@ -16443,7 +16328,7 @@
       </p:sp>
       <p:sp>
         <p:nvSpPr>
-          <p:cNvPr id="40" name="o172"/>
+          <p:cNvPr id="40" name="o166"/>
           <p:cNvSpPr txBox="1"/>
           <p:nvPr/>
         </p:nvSpPr>
@@ -16482,7 +16367,7 @@
       </p:sp>
       <p:sp>
         <p:nvSpPr>
-          <p:cNvPr id="41" name="o173"/>
+          <p:cNvPr id="41" name="o167"/>
           <p:cNvSpPr txBox="1"/>
           <p:nvPr/>
         </p:nvSpPr>
@@ -16521,7 +16406,7 @@
       </p:sp>
       <p:sp>
         <p:nvSpPr>
-          <p:cNvPr id="42" name="o174"/>
+          <p:cNvPr id="42" name="o168"/>
           <p:cNvSpPr txBox="1"/>
           <p:nvPr/>
         </p:nvSpPr>
@@ -16560,7 +16445,7 @@
       </p:sp>
       <p:sp>
         <p:nvSpPr>
-          <p:cNvPr id="43" name="o175"/>
+          <p:cNvPr id="43" name="o169"/>
           <p:cNvSpPr/>
           <p:nvPr/>
         </p:nvSpPr>
@@ -16583,7 +16468,7 @@
       </p:sp>
       <p:sp>
         <p:nvSpPr>
-          <p:cNvPr id="44" name="o176"/>
+          <p:cNvPr id="44" name="o170"/>
           <p:cNvSpPr txBox="1"/>
           <p:nvPr/>
         </p:nvSpPr>
@@ -16622,7 +16507,7 @@
       </p:sp>
       <p:sp>
         <p:nvSpPr>
-          <p:cNvPr id="45" name="o177"/>
+          <p:cNvPr id="45" name="o171"/>
           <p:cNvSpPr txBox="1"/>
           <p:nvPr/>
         </p:nvSpPr>
@@ -16661,7 +16546,7 @@
       </p:sp>
       <p:sp>
         <p:nvSpPr>
-          <p:cNvPr id="46" name="o178"/>
+          <p:cNvPr id="46" name="o172"/>
           <p:cNvSpPr txBox="1"/>
           <p:nvPr/>
         </p:nvSpPr>
@@ -16700,7 +16585,7 @@
       </p:sp>
       <p:sp>
         <p:nvSpPr>
-          <p:cNvPr id="47" name="o179"/>
+          <p:cNvPr id="47" name="o173"/>
           <p:cNvSpPr/>
           <p:nvPr/>
         </p:nvSpPr>
@@ -16723,7 +16608,7 @@
       </p:sp>
       <p:sp>
         <p:nvSpPr>
-          <p:cNvPr id="48" name="o180"/>
+          <p:cNvPr id="48" name="o174"/>
           <p:cNvSpPr/>
           <p:nvPr/>
         </p:nvSpPr>
@@ -16746,7 +16631,7 @@
       </p:sp>
       <p:sp>
         <p:nvSpPr>
-          <p:cNvPr id="49" name="o181"/>
+          <p:cNvPr id="49" name="o175"/>
           <p:cNvSpPr/>
           <p:nvPr/>
         </p:nvSpPr>
@@ -16766,7 +16651,7 @@
       </p:sp>
       <p:sp>
         <p:nvSpPr>
-          <p:cNvPr id="50" name="o182"/>
+          <p:cNvPr id="50" name="o176"/>
           <p:cNvSpPr/>
           <p:nvPr/>
         </p:nvSpPr>
@@ -16786,7 +16671,7 @@
       </p:sp>
       <p:sp>
         <p:nvSpPr>
-          <p:cNvPr id="51" name="o183"/>
+          <p:cNvPr id="51" name="o177"/>
           <p:cNvSpPr txBox="1"/>
           <p:nvPr/>
         </p:nvSpPr>
@@ -16873,7 +16758,7 @@
       </p:grpSpPr>
       <p:sp>
         <p:nvSpPr>
-          <p:cNvPr id="2" name="o184"/>
+          <p:cNvPr id="2" name="o178"/>
           <p:cNvSpPr txBox="1"/>
           <p:nvPr/>
         </p:nvSpPr>
@@ -16912,7 +16797,7 @@
       </p:sp>
       <p:sp>
         <p:nvSpPr>
-          <p:cNvPr id="3" name="o185"/>
+          <p:cNvPr id="3" name="o179"/>
           <p:cNvSpPr txBox="1"/>
           <p:nvPr/>
         </p:nvSpPr>
@@ -16954,7 +16839,7 @@
       </p:sp>
       <p:sp>
         <p:nvSpPr>
-          <p:cNvPr id="4" name="o186"/>
+          <p:cNvPr id="4" name="o180"/>
           <p:cNvSpPr txBox="1"/>
           <p:nvPr/>
         </p:nvSpPr>
@@ -16993,7 +16878,7 @@
       </p:sp>
       <p:sp>
         <p:nvSpPr>
-          <p:cNvPr id="5" name="o187"/>
+          <p:cNvPr id="5" name="o181"/>
           <p:cNvSpPr/>
           <p:nvPr/>
         </p:nvSpPr>
@@ -17016,7 +16901,7 @@
       </p:sp>
       <p:sp>
         <p:nvSpPr>
-          <p:cNvPr id="6" name="o188"/>
+          <p:cNvPr id="6" name="o182"/>
           <p:cNvSpPr txBox="1"/>
           <p:nvPr/>
         </p:nvSpPr>
@@ -17055,7 +16940,7 @@
       </p:sp>
       <p:sp>
         <p:nvSpPr>
-          <p:cNvPr id="7" name="o189"/>
+          <p:cNvPr id="7" name="o183"/>
           <p:cNvSpPr txBox="1"/>
           <p:nvPr/>
         </p:nvSpPr>
@@ -17094,7 +16979,7 @@
       </p:sp>
       <p:sp>
         <p:nvSpPr>
-          <p:cNvPr id="8" name="o190"/>
+          <p:cNvPr id="8" name="o184"/>
           <p:cNvSpPr txBox="1"/>
           <p:nvPr/>
         </p:nvSpPr>
@@ -17133,7 +17018,7 @@
       </p:sp>
       <p:sp>
         <p:nvSpPr>
-          <p:cNvPr id="9" name="o191"/>
+          <p:cNvPr id="9" name="o185"/>
           <p:cNvSpPr txBox="1"/>
           <p:nvPr/>
         </p:nvSpPr>
@@ -17172,7 +17057,7 @@
       </p:sp>
       <p:graphicFrame>
         <p:nvGraphicFramePr>
-          <p:cNvPr id="10" name="o192" descr=""/>
+          <p:cNvPr id="10" name="o186" descr=""/>
           <p:cNvGraphicFramePr/>
           <p:nvPr/>
         </p:nvGraphicFramePr>
@@ -17188,7 +17073,7 @@
       </p:graphicFrame>
       <p:sp>
         <p:nvSpPr>
-          <p:cNvPr id="11" name="o193"/>
+          <p:cNvPr id="11" name="o187"/>
           <p:cNvSpPr txBox="1"/>
           <p:nvPr/>
         </p:nvSpPr>
@@ -17227,7 +17112,7 @@
       </p:sp>
       <p:sp>
         <p:nvSpPr>
-          <p:cNvPr id="12" name="o194"/>
+          <p:cNvPr id="12" name="o188"/>
           <p:cNvSpPr txBox="1"/>
           <p:nvPr/>
         </p:nvSpPr>
@@ -17266,7 +17151,7 @@
       </p:sp>
       <p:sp>
         <p:nvSpPr>
-          <p:cNvPr id="13" name="o195"/>
+          <p:cNvPr id="13" name="o189"/>
           <p:cNvSpPr/>
           <p:nvPr/>
         </p:nvSpPr>
@@ -17286,7 +17171,7 @@
       </p:sp>
       <p:sp>
         <p:nvSpPr>
-          <p:cNvPr id="14" name="o196"/>
+          <p:cNvPr id="14" name="o190"/>
           <p:cNvSpPr txBox="1"/>
           <p:nvPr/>
         </p:nvSpPr>
@@ -17325,7 +17210,7 @@
       </p:sp>
       <p:sp>
         <p:nvSpPr>
-          <p:cNvPr id="15" name="o197"/>
+          <p:cNvPr id="15" name="o191"/>
           <p:cNvSpPr txBox="1"/>
           <p:nvPr/>
         </p:nvSpPr>
@@ -17364,7 +17249,7 @@
       </p:sp>
       <p:sp>
         <p:nvSpPr>
-          <p:cNvPr id="16" name="o198"/>
+          <p:cNvPr id="16" name="o192"/>
           <p:cNvSpPr txBox="1"/>
           <p:nvPr/>
         </p:nvSpPr>
@@ -17403,7 +17288,7 @@
       </p:sp>
       <p:sp>
         <p:nvSpPr>
-          <p:cNvPr id="17" name="o199"/>
+          <p:cNvPr id="17" name="o193"/>
           <p:cNvSpPr txBox="1"/>
           <p:nvPr/>
         </p:nvSpPr>
@@ -17442,7 +17327,7 @@
       </p:sp>
       <p:sp>
         <p:nvSpPr>
-          <p:cNvPr id="18" name="o200"/>
+          <p:cNvPr id="18" name="o194"/>
           <p:cNvSpPr txBox="1"/>
           <p:nvPr/>
         </p:nvSpPr>
@@ -17481,7 +17366,7 @@
       </p:sp>
       <p:sp>
         <p:nvSpPr>
-          <p:cNvPr id="19" name="o201"/>
+          <p:cNvPr id="19" name="o195"/>
           <p:cNvSpPr/>
           <p:nvPr/>
         </p:nvSpPr>
@@ -17504,7 +17389,7 @@
       </p:sp>
       <p:sp>
         <p:nvSpPr>
-          <p:cNvPr id="20" name="o202"/>
+          <p:cNvPr id="20" name="o196"/>
           <p:cNvSpPr txBox="1"/>
           <p:nvPr/>
         </p:nvSpPr>
@@ -17543,7 +17428,7 @@
       </p:sp>
       <p:sp>
         <p:nvSpPr>
-          <p:cNvPr id="21" name="o203"/>
+          <p:cNvPr id="21" name="o197"/>
           <p:cNvSpPr txBox="1"/>
           <p:nvPr/>
         </p:nvSpPr>
@@ -17582,7 +17467,7 @@
       </p:sp>
       <p:sp>
         <p:nvSpPr>
-          <p:cNvPr id="22" name="o204"/>
+          <p:cNvPr id="22" name="o198"/>
           <p:cNvSpPr txBox="1"/>
           <p:nvPr/>
         </p:nvSpPr>
@@ -17621,7 +17506,7 @@
       </p:sp>
       <p:sp>
         <p:nvSpPr>
-          <p:cNvPr id="23" name="o205"/>
+          <p:cNvPr id="23" name="o199"/>
           <p:cNvSpPr txBox="1"/>
           <p:nvPr/>
         </p:nvSpPr>
@@ -17660,7 +17545,7 @@
       </p:sp>
       <p:sp>
         <p:nvSpPr>
-          <p:cNvPr id="24" name="o206"/>
+          <p:cNvPr id="24" name="o200"/>
           <p:cNvSpPr txBox="1"/>
           <p:nvPr/>
         </p:nvSpPr>
@@ -17699,7 +17584,7 @@
       </p:sp>
       <p:sp>
         <p:nvSpPr>
-          <p:cNvPr id="25" name="o207"/>
+          <p:cNvPr id="25" name="o201"/>
           <p:cNvSpPr/>
           <p:nvPr/>
         </p:nvSpPr>
@@ -17722,7 +17607,7 @@
       </p:sp>
       <p:sp>
         <p:nvSpPr>
-          <p:cNvPr id="26" name="o208"/>
+          <p:cNvPr id="26" name="o202"/>
           <p:cNvSpPr txBox="1"/>
           <p:nvPr/>
         </p:nvSpPr>
@@ -17761,7 +17646,7 @@
       </p:sp>
       <p:sp>
         <p:nvSpPr>
-          <p:cNvPr id="27" name="o209"/>
+          <p:cNvPr id="27" name="o203"/>
           <p:cNvSpPr txBox="1"/>
           <p:nvPr/>
         </p:nvSpPr>
@@ -17800,7 +17685,7 @@
       </p:sp>
       <p:sp>
         <p:nvSpPr>
-          <p:cNvPr id="28" name="o210"/>
+          <p:cNvPr id="28" name="o204"/>
           <p:cNvSpPr txBox="1"/>
           <p:nvPr/>
         </p:nvSpPr>
@@ -17839,7 +17724,7 @@
       </p:sp>
       <p:sp>
         <p:nvSpPr>
-          <p:cNvPr id="29" name="o211"/>
+          <p:cNvPr id="29" name="o205"/>
           <p:cNvSpPr txBox="1"/>
           <p:nvPr/>
         </p:nvSpPr>
@@ -17878,7 +17763,7 @@
       </p:sp>
       <p:sp>
         <p:nvSpPr>
-          <p:cNvPr id="30" name="o212"/>
+          <p:cNvPr id="30" name="o206"/>
           <p:cNvSpPr txBox="1"/>
           <p:nvPr/>
         </p:nvSpPr>
@@ -17917,7 +17802,7 @@
       </p:sp>
       <p:sp>
         <p:nvSpPr>
-          <p:cNvPr id="31" name="o213"/>
+          <p:cNvPr id="31" name="o207"/>
           <p:cNvSpPr/>
           <p:nvPr/>
         </p:nvSpPr>
@@ -17940,7 +17825,7 @@
       </p:sp>
       <p:sp>
         <p:nvSpPr>
-          <p:cNvPr id="32" name="o214"/>
+          <p:cNvPr id="32" name="o208"/>
           <p:cNvSpPr/>
           <p:nvPr/>
         </p:nvSpPr>
@@ -17963,7 +17848,7 @@
       </p:sp>
       <p:sp>
         <p:nvSpPr>
-          <p:cNvPr id="33" name="o215"/>
+          <p:cNvPr id="33" name="o209"/>
           <p:cNvSpPr txBox="1"/>
           <p:nvPr/>
         </p:nvSpPr>
@@ -18002,7 +17887,7 @@
       </p:sp>
       <p:sp>
         <p:nvSpPr>
-          <p:cNvPr id="34" name="o216"/>
+          <p:cNvPr id="34" name="o210"/>
           <p:cNvSpPr/>
           <p:nvPr/>
         </p:nvSpPr>
@@ -18022,7 +17907,7 @@
       </p:sp>
       <p:sp>
         <p:nvSpPr>
-          <p:cNvPr id="35" name="o217"/>
+          <p:cNvPr id="35" name="o211"/>
           <p:cNvSpPr txBox="1"/>
           <p:nvPr/>
         </p:nvSpPr>
@@ -18061,7 +17946,7 @@
       </p:sp>
       <p:sp>
         <p:nvSpPr>
-          <p:cNvPr id="36" name="o218"/>
+          <p:cNvPr id="36" name="o212"/>
           <p:cNvSpPr txBox="1"/>
           <p:nvPr/>
         </p:nvSpPr>
@@ -18100,7 +17985,7 @@
       </p:sp>
       <p:sp>
         <p:nvSpPr>
-          <p:cNvPr id="37" name="o219"/>
+          <p:cNvPr id="37" name="o213"/>
           <p:cNvSpPr/>
           <p:nvPr/>
         </p:nvSpPr>
@@ -18123,7 +18008,7 @@
       </p:sp>
       <p:sp>
         <p:nvSpPr>
-          <p:cNvPr id="38" name="o220"/>
+          <p:cNvPr id="38" name="o214"/>
           <p:cNvSpPr/>
           <p:nvPr/>
         </p:nvSpPr>
@@ -18143,7 +18028,7 @@
       </p:sp>
       <p:sp>
         <p:nvSpPr>
-          <p:cNvPr id="39" name="o221"/>
+          <p:cNvPr id="39" name="o215"/>
           <p:cNvSpPr txBox="1"/>
           <p:nvPr/>
         </p:nvSpPr>
@@ -18182,7 +18067,7 @@
       </p:sp>
       <p:sp>
         <p:nvSpPr>
-          <p:cNvPr id="40" name="o222"/>
+          <p:cNvPr id="40" name="o216"/>
           <p:cNvSpPr txBox="1"/>
           <p:nvPr/>
         </p:nvSpPr>
@@ -18221,7 +18106,7 @@
       </p:sp>
       <p:sp>
         <p:nvSpPr>
-          <p:cNvPr id="41" name="o223"/>
+          <p:cNvPr id="41" name="o217"/>
           <p:cNvSpPr/>
           <p:nvPr/>
         </p:nvSpPr>
@@ -18244,7 +18129,7 @@
       </p:sp>
       <p:sp>
         <p:nvSpPr>
-          <p:cNvPr id="42" name="o224"/>
+          <p:cNvPr id="42" name="o218"/>
           <p:cNvSpPr/>
           <p:nvPr/>
         </p:nvSpPr>
@@ -18264,7 +18149,7 @@
       </p:sp>
       <p:sp>
         <p:nvSpPr>
-          <p:cNvPr id="43" name="o225"/>
+          <p:cNvPr id="43" name="o219"/>
           <p:cNvSpPr txBox="1"/>
           <p:nvPr/>
         </p:nvSpPr>
@@ -18303,7 +18188,7 @@
       </p:sp>
       <p:sp>
         <p:nvSpPr>
-          <p:cNvPr id="44" name="o226"/>
+          <p:cNvPr id="44" name="o220"/>
           <p:cNvSpPr txBox="1"/>
           <p:nvPr/>
         </p:nvSpPr>
@@ -18342,7 +18227,7 @@
       </p:sp>
       <p:sp>
         <p:nvSpPr>
-          <p:cNvPr id="45" name="o227"/>
+          <p:cNvPr id="45" name="o221"/>
           <p:cNvSpPr/>
           <p:nvPr/>
         </p:nvSpPr>
@@ -18365,7 +18250,7 @@
       </p:sp>
       <p:sp>
         <p:nvSpPr>
-          <p:cNvPr id="46" name="o228"/>
+          <p:cNvPr id="46" name="o222"/>
           <p:cNvSpPr/>
           <p:nvPr/>
         </p:nvSpPr>
@@ -18385,7 +18270,7 @@
       </p:sp>
       <p:sp>
         <p:nvSpPr>
-          <p:cNvPr id="47" name="o229"/>
+          <p:cNvPr id="47" name="o223"/>
           <p:cNvSpPr txBox="1"/>
           <p:nvPr/>
         </p:nvSpPr>
@@ -18424,7 +18309,7 @@
       </p:sp>
       <p:sp>
         <p:nvSpPr>
-          <p:cNvPr id="48" name="o230"/>
+          <p:cNvPr id="48" name="o224"/>
           <p:cNvSpPr txBox="1"/>
           <p:nvPr/>
         </p:nvSpPr>
@@ -18463,7 +18348,7 @@
       </p:sp>
       <p:sp>
         <p:nvSpPr>
-          <p:cNvPr id="49" name="o231"/>
+          <p:cNvPr id="49" name="o225"/>
           <p:cNvSpPr/>
           <p:nvPr/>
         </p:nvSpPr>
@@ -18486,7 +18371,7 @@
       </p:sp>
       <p:sp>
         <p:nvSpPr>
-          <p:cNvPr id="50" name="o232"/>
+          <p:cNvPr id="50" name="o226"/>
           <p:cNvSpPr/>
           <p:nvPr/>
         </p:nvSpPr>
@@ -18506,7 +18391,7 @@
       </p:sp>
       <p:sp>
         <p:nvSpPr>
-          <p:cNvPr id="51" name="o233"/>
+          <p:cNvPr id="51" name="o227"/>
           <p:cNvSpPr txBox="1"/>
           <p:nvPr/>
         </p:nvSpPr>
@@ -18545,7 +18430,7 @@
       </p:sp>
       <p:sp>
         <p:nvSpPr>
-          <p:cNvPr id="52" name="o234"/>
+          <p:cNvPr id="52" name="o228"/>
           <p:cNvSpPr txBox="1"/>
           <p:nvPr/>
         </p:nvSpPr>
@@ -18584,7 +18469,7 @@
       </p:sp>
       <p:sp>
         <p:nvSpPr>
-          <p:cNvPr id="53" name="o235"/>
+          <p:cNvPr id="53" name="o229"/>
           <p:cNvSpPr/>
           <p:nvPr/>
         </p:nvSpPr>
@@ -18607,7 +18492,7 @@
       </p:sp>
       <p:sp>
         <p:nvSpPr>
-          <p:cNvPr id="54" name="o236"/>
+          <p:cNvPr id="54" name="o230"/>
           <p:cNvSpPr/>
           <p:nvPr/>
         </p:nvSpPr>
@@ -18627,7 +18512,7 @@
       </p:sp>
       <p:sp>
         <p:nvSpPr>
-          <p:cNvPr id="55" name="o237"/>
+          <p:cNvPr id="55" name="o231"/>
           <p:cNvSpPr txBox="1"/>
           <p:nvPr/>
         </p:nvSpPr>
@@ -18666,7 +18551,7 @@
       </p:sp>
       <p:sp>
         <p:nvSpPr>
-          <p:cNvPr id="56" name="o238"/>
+          <p:cNvPr id="56" name="o232"/>
           <p:cNvSpPr txBox="1"/>
           <p:nvPr/>
         </p:nvSpPr>
@@ -18705,7 +18590,7 @@
       </p:sp>
       <p:sp>
         <p:nvSpPr>
-          <p:cNvPr id="57" name="o239"/>
+          <p:cNvPr id="57" name="o233"/>
           <p:cNvSpPr/>
           <p:nvPr/>
         </p:nvSpPr>
@@ -18728,7 +18613,7 @@
       </p:sp>
       <p:sp>
         <p:nvSpPr>
-          <p:cNvPr id="58" name="o240"/>
+          <p:cNvPr id="58" name="o234"/>
           <p:cNvSpPr/>
           <p:nvPr/>
         </p:nvSpPr>
@@ -18748,7 +18633,7 @@
       </p:sp>
       <p:sp>
         <p:nvSpPr>
-          <p:cNvPr id="59" name="o241"/>
+          <p:cNvPr id="59" name="o235"/>
           <p:cNvSpPr txBox="1"/>
           <p:nvPr/>
         </p:nvSpPr>
@@ -18787,7 +18672,7 @@
       </p:sp>
       <p:sp>
         <p:nvSpPr>
-          <p:cNvPr id="60" name="o242"/>
+          <p:cNvPr id="60" name="o236"/>
           <p:cNvSpPr txBox="1"/>
           <p:nvPr/>
         </p:nvSpPr>
@@ -18826,7 +18711,7 @@
       </p:sp>
       <p:sp>
         <p:nvSpPr>
-          <p:cNvPr id="61" name="o243"/>
+          <p:cNvPr id="61" name="o237"/>
           <p:cNvSpPr/>
           <p:nvPr/>
         </p:nvSpPr>
@@ -18846,7 +18731,7 @@
       </p:sp>
       <p:sp>
         <p:nvSpPr>
-          <p:cNvPr id="62" name="o244"/>
+          <p:cNvPr id="62" name="o238"/>
           <p:cNvSpPr txBox="1"/>
           <p:nvPr/>
         </p:nvSpPr>
@@ -18885,7 +18770,7 @@
       </p:sp>
       <p:sp>
         <p:nvSpPr>
-          <p:cNvPr id="63" name="o245"/>
+          <p:cNvPr id="63" name="o239"/>
           <p:cNvSpPr txBox="1"/>
           <p:nvPr/>
         </p:nvSpPr>
@@ -18924,7 +18809,7 @@
       </p:sp>
       <p:sp>
         <p:nvSpPr>
-          <p:cNvPr id="64" name="o246"/>
+          <p:cNvPr id="64" name="o240"/>
           <p:cNvSpPr/>
           <p:nvPr/>
         </p:nvSpPr>
@@ -18947,7 +18832,7 @@
       </p:sp>
       <p:sp>
         <p:nvSpPr>
-          <p:cNvPr id="65" name="o247"/>
+          <p:cNvPr id="65" name="o241"/>
           <p:cNvSpPr txBox="1"/>
           <p:nvPr/>
         </p:nvSpPr>
@@ -18986,7 +18871,7 @@
       </p:sp>
       <p:sp>
         <p:nvSpPr>
-          <p:cNvPr id="66" name="o248"/>
+          <p:cNvPr id="66" name="o242"/>
           <p:cNvSpPr/>
           <p:nvPr/>
         </p:nvSpPr>
@@ -19011,7 +18896,7 @@
       </p:sp>
       <p:sp>
         <p:nvSpPr>
-          <p:cNvPr id="67" name="o249"/>
+          <p:cNvPr id="67" name="o243"/>
           <p:cNvSpPr txBox="1"/>
           <p:nvPr/>
         </p:nvSpPr>
@@ -19050,7 +18935,7 @@
       </p:sp>
       <p:sp>
         <p:nvSpPr>
-          <p:cNvPr id="68" name="o250"/>
+          <p:cNvPr id="68" name="o244"/>
           <p:cNvSpPr txBox="1"/>
           <p:nvPr/>
         </p:nvSpPr>
@@ -19089,7 +18974,7 @@
       </p:sp>
       <p:sp>
         <p:nvSpPr>
-          <p:cNvPr id="69" name="o251"/>
+          <p:cNvPr id="69" name="o245"/>
           <p:cNvSpPr txBox="1"/>
           <p:nvPr/>
         </p:nvSpPr>
@@ -19128,7 +19013,7 @@
       </p:sp>
       <p:sp>
         <p:nvSpPr>
-          <p:cNvPr id="70" name="o252"/>
+          <p:cNvPr id="70" name="o246"/>
           <p:cNvSpPr/>
           <p:nvPr/>
         </p:nvSpPr>
@@ -19153,7 +19038,7 @@
       </p:sp>
       <p:sp>
         <p:nvSpPr>
-          <p:cNvPr id="71" name="o253"/>
+          <p:cNvPr id="71" name="o247"/>
           <p:cNvSpPr txBox="1"/>
           <p:nvPr/>
         </p:nvSpPr>
@@ -19192,7 +19077,7 @@
       </p:sp>
       <p:sp>
         <p:nvSpPr>
-          <p:cNvPr id="72" name="o254"/>
+          <p:cNvPr id="72" name="o248"/>
           <p:cNvSpPr txBox="1"/>
           <p:nvPr/>
         </p:nvSpPr>
@@ -19231,7 +19116,7 @@
       </p:sp>
       <p:sp>
         <p:nvSpPr>
-          <p:cNvPr id="73" name="o255"/>
+          <p:cNvPr id="73" name="o249"/>
           <p:cNvSpPr txBox="1"/>
           <p:nvPr/>
         </p:nvSpPr>
@@ -19270,7 +19155,7 @@
       </p:sp>
       <p:sp>
         <p:nvSpPr>
-          <p:cNvPr id="74" name="o256"/>
+          <p:cNvPr id="74" name="o250"/>
           <p:cNvSpPr/>
           <p:nvPr/>
         </p:nvSpPr>
@@ -19295,7 +19180,7 @@
       </p:sp>
       <p:sp>
         <p:nvSpPr>
-          <p:cNvPr id="75" name="o257"/>
+          <p:cNvPr id="75" name="o251"/>
           <p:cNvSpPr txBox="1"/>
           <p:nvPr/>
         </p:nvSpPr>
@@ -19334,7 +19219,7 @@
       </p:sp>
       <p:sp>
         <p:nvSpPr>
-          <p:cNvPr id="76" name="o258"/>
+          <p:cNvPr id="76" name="o252"/>
           <p:cNvSpPr txBox="1"/>
           <p:nvPr/>
         </p:nvSpPr>
@@ -19373,7 +19258,7 @@
       </p:sp>
       <p:sp>
         <p:nvSpPr>
-          <p:cNvPr id="77" name="o259"/>
+          <p:cNvPr id="77" name="o253"/>
           <p:cNvSpPr txBox="1"/>
           <p:nvPr/>
         </p:nvSpPr>
@@ -19412,7 +19297,7 @@
       </p:sp>
       <p:sp>
         <p:nvSpPr>
-          <p:cNvPr id="78" name="o260"/>
+          <p:cNvPr id="78" name="o254"/>
           <p:cNvSpPr/>
           <p:nvPr/>
         </p:nvSpPr>
@@ -19432,7 +19317,7 @@
       </p:sp>
       <p:sp>
         <p:nvSpPr>
-          <p:cNvPr id="79" name="o261"/>
+          <p:cNvPr id="79" name="o255"/>
           <p:cNvSpPr/>
           <p:nvPr/>
         </p:nvSpPr>
@@ -19452,7 +19337,7 @@
       </p:sp>
       <p:sp>
         <p:nvSpPr>
-          <p:cNvPr id="80" name="o262"/>
+          <p:cNvPr id="80" name="o256"/>
           <p:cNvSpPr txBox="1"/>
           <p:nvPr/>
         </p:nvSpPr>
@@ -19519,7 +19404,7 @@
       </p:grpSpPr>
       <p:sp>
         <p:nvSpPr>
-          <p:cNvPr id="2" name="o263"/>
+          <p:cNvPr id="2" name="o257"/>
           <p:cNvSpPr txBox="1"/>
           <p:nvPr/>
         </p:nvSpPr>
@@ -19558,7 +19443,7 @@
       </p:sp>
       <p:sp>
         <p:nvSpPr>
-          <p:cNvPr id="3" name="o264"/>
+          <p:cNvPr id="3" name="o258"/>
           <p:cNvSpPr txBox="1"/>
           <p:nvPr/>
         </p:nvSpPr>
@@ -19600,7 +19485,7 @@
       </p:sp>
       <p:sp>
         <p:nvSpPr>
-          <p:cNvPr id="4" name="o265"/>
+          <p:cNvPr id="4" name="o259"/>
           <p:cNvSpPr txBox="1"/>
           <p:nvPr/>
         </p:nvSpPr>
@@ -19639,7 +19524,7 @@
       </p:sp>
       <p:sp>
         <p:nvSpPr>
-          <p:cNvPr id="5" name="o266"/>
+          <p:cNvPr id="5" name="o260"/>
           <p:cNvSpPr/>
           <p:nvPr/>
         </p:nvSpPr>
@@ -19662,7 +19547,7 @@
       </p:sp>
       <p:sp>
         <p:nvSpPr>
-          <p:cNvPr id="6" name="o267"/>
+          <p:cNvPr id="6" name="o261"/>
           <p:cNvSpPr txBox="1"/>
           <p:nvPr/>
         </p:nvSpPr>
@@ -19701,7 +19586,7 @@
       </p:sp>
       <p:sp>
         <p:nvSpPr>
-          <p:cNvPr id="7" name="o268"/>
+          <p:cNvPr id="7" name="o262"/>
           <p:cNvSpPr txBox="1"/>
           <p:nvPr/>
         </p:nvSpPr>
@@ -19740,7 +19625,7 @@
       </p:sp>
       <p:sp>
         <p:nvSpPr>
-          <p:cNvPr id="8" name="o269"/>
+          <p:cNvPr id="8" name="o263"/>
           <p:cNvSpPr txBox="1"/>
           <p:nvPr/>
         </p:nvSpPr>
@@ -19779,7 +19664,7 @@
       </p:sp>
       <p:sp>
         <p:nvSpPr>
-          <p:cNvPr id="9" name="o270"/>
+          <p:cNvPr id="9" name="o264"/>
           <p:cNvSpPr/>
           <p:nvPr/>
         </p:nvSpPr>
@@ -19799,7 +19684,7 @@
       </p:sp>
       <p:sp>
         <p:nvSpPr>
-          <p:cNvPr id="10" name="o271"/>
+          <p:cNvPr id="10" name="o265"/>
           <p:cNvSpPr txBox="1"/>
           <p:nvPr/>
         </p:nvSpPr>
@@ -19838,7 +19723,7 @@
       </p:sp>
       <p:sp>
         <p:nvSpPr>
-          <p:cNvPr id="11" name="o272"/>
+          <p:cNvPr id="11" name="o266"/>
           <p:cNvSpPr txBox="1"/>
           <p:nvPr/>
         </p:nvSpPr>
@@ -19877,7 +19762,7 @@
       </p:sp>
       <p:sp>
         <p:nvSpPr>
-          <p:cNvPr id="12" name="o273"/>
+          <p:cNvPr id="12" name="o267"/>
           <p:cNvSpPr txBox="1"/>
           <p:nvPr/>
         </p:nvSpPr>
@@ -19916,7 +19801,7 @@
       </p:sp>
       <p:sp>
         <p:nvSpPr>
-          <p:cNvPr id="13" name="o274"/>
+          <p:cNvPr id="13" name="o268"/>
           <p:cNvSpPr txBox="1"/>
           <p:nvPr/>
         </p:nvSpPr>
@@ -19955,7 +19840,7 @@
       </p:sp>
       <p:sp>
         <p:nvSpPr>
-          <p:cNvPr id="14" name="o275"/>
+          <p:cNvPr id="14" name="o269"/>
           <p:cNvSpPr txBox="1"/>
           <p:nvPr/>
         </p:nvSpPr>
@@ -19994,7 +19879,7 @@
       </p:sp>
       <p:sp>
         <p:nvSpPr>
-          <p:cNvPr id="15" name="o276"/>
+          <p:cNvPr id="15" name="o270"/>
           <p:cNvSpPr/>
           <p:nvPr/>
         </p:nvSpPr>
@@ -20017,7 +19902,7 @@
       </p:sp>
       <p:sp>
         <p:nvSpPr>
-          <p:cNvPr id="16" name="o277"/>
+          <p:cNvPr id="16" name="o271"/>
           <p:cNvSpPr txBox="1"/>
           <p:nvPr/>
         </p:nvSpPr>
@@ -20056,7 +19941,7 @@
       </p:sp>
       <p:sp>
         <p:nvSpPr>
-          <p:cNvPr id="17" name="o278"/>
+          <p:cNvPr id="17" name="o272"/>
           <p:cNvSpPr txBox="1"/>
           <p:nvPr/>
         </p:nvSpPr>
@@ -20095,7 +19980,7 @@
       </p:sp>
       <p:sp>
         <p:nvSpPr>
-          <p:cNvPr id="18" name="o279"/>
+          <p:cNvPr id="18" name="o273"/>
           <p:cNvSpPr txBox="1"/>
           <p:nvPr/>
         </p:nvSpPr>
@@ -20134,7 +20019,7 @@
       </p:sp>
       <p:sp>
         <p:nvSpPr>
-          <p:cNvPr id="19" name="o280"/>
+          <p:cNvPr id="19" name="o274"/>
           <p:cNvSpPr txBox="1"/>
           <p:nvPr/>
         </p:nvSpPr>
@@ -20173,7 +20058,7 @@
       </p:sp>
       <p:sp>
         <p:nvSpPr>
-          <p:cNvPr id="20" name="o281"/>
+          <p:cNvPr id="20" name="o275"/>
           <p:cNvSpPr txBox="1"/>
           <p:nvPr/>
         </p:nvSpPr>
@@ -20212,7 +20097,7 @@
       </p:sp>
       <p:sp>
         <p:nvSpPr>
-          <p:cNvPr id="21" name="o282"/>
+          <p:cNvPr id="21" name="o276"/>
           <p:cNvSpPr/>
           <p:nvPr/>
         </p:nvSpPr>
@@ -20235,7 +20120,7 @@
       </p:sp>
       <p:sp>
         <p:nvSpPr>
-          <p:cNvPr id="22" name="o283"/>
+          <p:cNvPr id="22" name="o277"/>
           <p:cNvSpPr txBox="1"/>
           <p:nvPr/>
         </p:nvSpPr>
@@ -20274,7 +20159,7 @@
       </p:sp>
       <p:sp>
         <p:nvSpPr>
-          <p:cNvPr id="23" name="o284"/>
+          <p:cNvPr id="23" name="o278"/>
           <p:cNvSpPr txBox="1"/>
           <p:nvPr/>
         </p:nvSpPr>
@@ -20313,7 +20198,7 @@
       </p:sp>
       <p:sp>
         <p:nvSpPr>
-          <p:cNvPr id="24" name="o285"/>
+          <p:cNvPr id="24" name="o279"/>
           <p:cNvSpPr txBox="1"/>
           <p:nvPr/>
         </p:nvSpPr>
@@ -20352,7 +20237,7 @@
       </p:sp>
       <p:sp>
         <p:nvSpPr>
-          <p:cNvPr id="25" name="o286"/>
+          <p:cNvPr id="25" name="o280"/>
           <p:cNvSpPr txBox="1"/>
           <p:nvPr/>
         </p:nvSpPr>
@@ -20391,7 +20276,7 @@
       </p:sp>
       <p:sp>
         <p:nvSpPr>
-          <p:cNvPr id="26" name="o287"/>
+          <p:cNvPr id="26" name="o281"/>
           <p:cNvSpPr txBox="1"/>
           <p:nvPr/>
         </p:nvSpPr>
@@ -20430,7 +20315,7 @@
       </p:sp>
       <p:sp>
         <p:nvSpPr>
-          <p:cNvPr id="27" name="o288"/>
+          <p:cNvPr id="27" name="o282"/>
           <p:cNvSpPr/>
           <p:nvPr/>
         </p:nvSpPr>
@@ -20453,7 +20338,7 @@
       </p:sp>
       <p:sp>
         <p:nvSpPr>
-          <p:cNvPr id="28" name="o289"/>
+          <p:cNvPr id="28" name="o283"/>
           <p:cNvSpPr txBox="1"/>
           <p:nvPr/>
         </p:nvSpPr>
@@ -20492,7 +20377,7 @@
       </p:sp>
       <p:sp>
         <p:nvSpPr>
-          <p:cNvPr id="29" name="o290"/>
+          <p:cNvPr id="29" name="o284"/>
           <p:cNvSpPr txBox="1"/>
           <p:nvPr/>
         </p:nvSpPr>
@@ -20531,7 +20416,7 @@
       </p:sp>
       <p:sp>
         <p:nvSpPr>
-          <p:cNvPr id="30" name="o291"/>
+          <p:cNvPr id="30" name="o285"/>
           <p:cNvSpPr txBox="1"/>
           <p:nvPr/>
         </p:nvSpPr>
@@ -20570,7 +20455,7 @@
       </p:sp>
       <p:sp>
         <p:nvSpPr>
-          <p:cNvPr id="31" name="o292"/>
+          <p:cNvPr id="31" name="o286"/>
           <p:cNvSpPr txBox="1"/>
           <p:nvPr/>
         </p:nvSpPr>
@@ -20609,7 +20494,7 @@
       </p:sp>
       <p:sp>
         <p:nvSpPr>
-          <p:cNvPr id="32" name="o293"/>
+          <p:cNvPr id="32" name="o287"/>
           <p:cNvSpPr txBox="1"/>
           <p:nvPr/>
         </p:nvSpPr>
@@ -20648,7 +20533,7 @@
       </p:sp>
       <p:sp>
         <p:nvSpPr>
-          <p:cNvPr id="33" name="o294"/>
+          <p:cNvPr id="33" name="o288"/>
           <p:cNvSpPr/>
           <p:nvPr/>
         </p:nvSpPr>
@@ -20671,7 +20556,7 @@
       </p:sp>
       <p:sp>
         <p:nvSpPr>
-          <p:cNvPr id="34" name="o295"/>
+          <p:cNvPr id="34" name="o289"/>
           <p:cNvSpPr txBox="1"/>
           <p:nvPr/>
         </p:nvSpPr>
@@ -20710,7 +20595,7 @@
       </p:sp>
       <p:sp>
         <p:nvSpPr>
-          <p:cNvPr id="35" name="o296"/>
+          <p:cNvPr id="35" name="o290"/>
           <p:cNvSpPr txBox="1"/>
           <p:nvPr/>
         </p:nvSpPr>
@@ -20749,7 +20634,7 @@
       </p:sp>
       <p:sp>
         <p:nvSpPr>
-          <p:cNvPr id="36" name="o297"/>
+          <p:cNvPr id="36" name="o291"/>
           <p:cNvSpPr txBox="1"/>
           <p:nvPr/>
         </p:nvSpPr>
@@ -20788,7 +20673,7 @@
       </p:sp>
       <p:sp>
         <p:nvSpPr>
-          <p:cNvPr id="37" name="o298"/>
+          <p:cNvPr id="37" name="o292"/>
           <p:cNvSpPr txBox="1"/>
           <p:nvPr/>
         </p:nvSpPr>
@@ -20827,7 +20712,7 @@
       </p:sp>
       <p:sp>
         <p:nvSpPr>
-          <p:cNvPr id="38" name="o299"/>
+          <p:cNvPr id="38" name="o293"/>
           <p:cNvSpPr txBox="1"/>
           <p:nvPr/>
         </p:nvSpPr>
@@ -20866,7 +20751,7 @@
       </p:sp>
       <p:sp>
         <p:nvSpPr>
-          <p:cNvPr id="39" name="o300"/>
+          <p:cNvPr id="39" name="o294"/>
           <p:cNvSpPr/>
           <p:nvPr/>
         </p:nvSpPr>
@@ -20889,7 +20774,7 @@
       </p:sp>
       <p:sp>
         <p:nvSpPr>
-          <p:cNvPr id="40" name="o301"/>
+          <p:cNvPr id="40" name="o295"/>
           <p:cNvSpPr/>
           <p:nvPr/>
         </p:nvSpPr>
@@ -20912,7 +20797,7 @@
       </p:sp>
       <p:sp>
         <p:nvSpPr>
-          <p:cNvPr id="41" name="o302"/>
+          <p:cNvPr id="41" name="o296"/>
           <p:cNvSpPr/>
           <p:nvPr/>
         </p:nvSpPr>
@@ -20937,7 +20822,7 @@
       </p:sp>
       <p:sp>
         <p:nvSpPr>
-          <p:cNvPr id="42" name="o303"/>
+          <p:cNvPr id="42" name="o297"/>
           <p:cNvSpPr txBox="1"/>
           <p:nvPr/>
         </p:nvSpPr>
@@ -20976,7 +20861,7 @@
       </p:sp>
       <p:sp>
         <p:nvSpPr>
-          <p:cNvPr id="43" name="o304"/>
+          <p:cNvPr id="43" name="o298"/>
           <p:cNvSpPr txBox="1"/>
           <p:nvPr/>
         </p:nvSpPr>
@@ -21015,7 +20900,7 @@
       </p:sp>
       <p:sp>
         <p:nvSpPr>
-          <p:cNvPr id="44" name="o305"/>
+          <p:cNvPr id="44" name="o299"/>
           <p:cNvSpPr txBox="1"/>
           <p:nvPr/>
         </p:nvSpPr>
@@ -21054,7 +20939,7 @@
       </p:sp>
       <p:sp>
         <p:nvSpPr>
-          <p:cNvPr id="45" name="o306"/>
+          <p:cNvPr id="45" name="o300"/>
           <p:cNvSpPr/>
           <p:nvPr/>
         </p:nvSpPr>
@@ -21079,7 +20964,7 @@
       </p:sp>
       <p:sp>
         <p:nvSpPr>
-          <p:cNvPr id="46" name="o307"/>
+          <p:cNvPr id="46" name="o301"/>
           <p:cNvSpPr txBox="1"/>
           <p:nvPr/>
         </p:nvSpPr>
@@ -21118,7 +21003,7 @@
       </p:sp>
       <p:sp>
         <p:nvSpPr>
-          <p:cNvPr id="47" name="o308"/>
+          <p:cNvPr id="47" name="o302"/>
           <p:cNvSpPr txBox="1"/>
           <p:nvPr/>
         </p:nvSpPr>
@@ -21157,7 +21042,7 @@
       </p:sp>
       <p:sp>
         <p:nvSpPr>
-          <p:cNvPr id="48" name="o309"/>
+          <p:cNvPr id="48" name="o303"/>
           <p:cNvSpPr txBox="1"/>
           <p:nvPr/>
         </p:nvSpPr>
@@ -21196,7 +21081,7 @@
       </p:sp>
       <p:sp>
         <p:nvSpPr>
-          <p:cNvPr id="49" name="o310"/>
+          <p:cNvPr id="49" name="o304"/>
           <p:cNvSpPr/>
           <p:nvPr/>
         </p:nvSpPr>
@@ -21221,7 +21106,7 @@
       </p:sp>
       <p:sp>
         <p:nvSpPr>
-          <p:cNvPr id="50" name="o311"/>
+          <p:cNvPr id="50" name="o305"/>
           <p:cNvSpPr txBox="1"/>
           <p:nvPr/>
         </p:nvSpPr>
@@ -21260,7 +21145,7 @@
       </p:sp>
       <p:sp>
         <p:nvSpPr>
-          <p:cNvPr id="51" name="o312"/>
+          <p:cNvPr id="51" name="o306"/>
           <p:cNvSpPr txBox="1"/>
           <p:nvPr/>
         </p:nvSpPr>
@@ -21299,7 +21184,7 @@
       </p:sp>
       <p:sp>
         <p:nvSpPr>
-          <p:cNvPr id="52" name="o313"/>
+          <p:cNvPr id="52" name="o307"/>
           <p:cNvSpPr txBox="1"/>
           <p:nvPr/>
         </p:nvSpPr>
@@ -21338,7 +21223,7 @@
       </p:sp>
       <p:sp>
         <p:nvSpPr>
-          <p:cNvPr id="53" name="o314"/>
+          <p:cNvPr id="53" name="o308"/>
           <p:cNvSpPr/>
           <p:nvPr/>
         </p:nvSpPr>
@@ -21358,7 +21243,7 @@
       </p:sp>
       <p:sp>
         <p:nvSpPr>
-          <p:cNvPr id="54" name="o315"/>
+          <p:cNvPr id="54" name="o309"/>
           <p:cNvSpPr/>
           <p:nvPr/>
         </p:nvSpPr>
@@ -21378,7 +21263,7 @@
       </p:sp>
       <p:sp>
         <p:nvSpPr>
-          <p:cNvPr id="55" name="o316"/>
+          <p:cNvPr id="55" name="o310"/>
           <p:cNvSpPr txBox="1"/>
           <p:nvPr/>
         </p:nvSpPr>
@@ -21445,7 +21330,7 @@
       </p:grpSpPr>
       <p:sp>
         <p:nvSpPr>
-          <p:cNvPr id="2" name="o317"/>
+          <p:cNvPr id="2" name="o311"/>
           <p:cNvSpPr txBox="1"/>
           <p:nvPr/>
         </p:nvSpPr>
@@ -21484,7 +21369,7 @@
       </p:sp>
       <p:sp>
         <p:nvSpPr>
-          <p:cNvPr id="3" name="o318"/>
+          <p:cNvPr id="3" name="o312"/>
           <p:cNvSpPr txBox="1"/>
           <p:nvPr/>
         </p:nvSpPr>
@@ -21526,7 +21411,7 @@
       </p:sp>
       <p:sp>
         <p:nvSpPr>
-          <p:cNvPr id="4" name="o319"/>
+          <p:cNvPr id="4" name="o313"/>
           <p:cNvSpPr txBox="1"/>
           <p:nvPr/>
         </p:nvSpPr>
@@ -21565,7 +21450,7 @@
       </p:sp>
       <p:sp>
         <p:nvSpPr>
-          <p:cNvPr id="5" name="o320"/>
+          <p:cNvPr id="5" name="o314"/>
           <p:cNvSpPr/>
           <p:nvPr/>
         </p:nvSpPr>
@@ -21588,7 +21473,7 @@
       </p:sp>
       <p:sp>
         <p:nvSpPr>
-          <p:cNvPr id="6" name="o321"/>
+          <p:cNvPr id="6" name="o315"/>
           <p:cNvSpPr txBox="1"/>
           <p:nvPr/>
         </p:nvSpPr>
@@ -21627,7 +21512,7 @@
       </p:sp>
       <p:sp>
         <p:nvSpPr>
-          <p:cNvPr id="7" name="o322"/>
+          <p:cNvPr id="7" name="o316"/>
           <p:cNvSpPr txBox="1"/>
           <p:nvPr/>
         </p:nvSpPr>
@@ -21666,7 +21551,7 @@
       </p:sp>
       <p:sp>
         <p:nvSpPr>
-          <p:cNvPr id="8" name="o323"/>
+          <p:cNvPr id="8" name="o317"/>
           <p:cNvSpPr txBox="1"/>
           <p:nvPr/>
         </p:nvSpPr>
@@ -21705,7 +21590,7 @@
       </p:sp>
       <p:sp>
         <p:nvSpPr>
-          <p:cNvPr id="9" name="o324"/>
+          <p:cNvPr id="9" name="o318"/>
           <p:cNvSpPr/>
           <p:nvPr/>
         </p:nvSpPr>
@@ -21725,7 +21610,7 @@
       </p:sp>
       <p:sp>
         <p:nvSpPr>
-          <p:cNvPr id="10" name="o325"/>
+          <p:cNvPr id="10" name="o319"/>
           <p:cNvSpPr txBox="1"/>
           <p:nvPr/>
         </p:nvSpPr>
@@ -21764,7 +21649,7 @@
       </p:sp>
       <p:sp>
         <p:nvSpPr>
-          <p:cNvPr id="11" name="o326"/>
+          <p:cNvPr id="11" name="o320"/>
           <p:cNvSpPr txBox="1"/>
           <p:nvPr/>
         </p:nvSpPr>
@@ -21803,7 +21688,7 @@
       </p:sp>
       <p:sp>
         <p:nvSpPr>
-          <p:cNvPr id="12" name="o327"/>
+          <p:cNvPr id="12" name="o321"/>
           <p:cNvSpPr txBox="1"/>
           <p:nvPr/>
         </p:nvSpPr>
@@ -21842,7 +21727,7 @@
       </p:sp>
       <p:sp>
         <p:nvSpPr>
-          <p:cNvPr id="13" name="o328"/>
+          <p:cNvPr id="13" name="o322"/>
           <p:cNvSpPr/>
           <p:nvPr/>
         </p:nvSpPr>
@@ -21865,7 +21750,7 @@
       </p:sp>
       <p:sp>
         <p:nvSpPr>
-          <p:cNvPr id="14" name="o329"/>
+          <p:cNvPr id="14" name="o323"/>
           <p:cNvSpPr txBox="1"/>
           <p:nvPr/>
         </p:nvSpPr>
@@ -21904,7 +21789,7 @@
       </p:sp>
       <p:sp>
         <p:nvSpPr>
-          <p:cNvPr id="15" name="o330"/>
+          <p:cNvPr id="15" name="o324"/>
           <p:cNvSpPr txBox="1"/>
           <p:nvPr/>
         </p:nvSpPr>
@@ -21943,7 +21828,7 @@
       </p:sp>
       <p:sp>
         <p:nvSpPr>
-          <p:cNvPr id="16" name="o331"/>
+          <p:cNvPr id="16" name="o325"/>
           <p:cNvSpPr txBox="1"/>
           <p:nvPr/>
         </p:nvSpPr>
@@ -21982,7 +21867,7 @@
       </p:sp>
       <p:sp>
         <p:nvSpPr>
-          <p:cNvPr id="17" name="o332"/>
+          <p:cNvPr id="17" name="o326"/>
           <p:cNvSpPr/>
           <p:nvPr/>
         </p:nvSpPr>
@@ -22005,7 +21890,7 @@
       </p:sp>
       <p:sp>
         <p:nvSpPr>
-          <p:cNvPr id="18" name="o333"/>
+          <p:cNvPr id="18" name="o327"/>
           <p:cNvSpPr txBox="1"/>
           <p:nvPr/>
         </p:nvSpPr>
@@ -22044,7 +21929,7 @@
       </p:sp>
       <p:sp>
         <p:nvSpPr>
-          <p:cNvPr id="19" name="o334"/>
+          <p:cNvPr id="19" name="o328"/>
           <p:cNvSpPr txBox="1"/>
           <p:nvPr/>
         </p:nvSpPr>
@@ -22083,7 +21968,7 @@
       </p:sp>
       <p:sp>
         <p:nvSpPr>
-          <p:cNvPr id="20" name="o335"/>
+          <p:cNvPr id="20" name="o329"/>
           <p:cNvSpPr txBox="1"/>
           <p:nvPr/>
         </p:nvSpPr>
@@ -22122,7 +22007,7 @@
       </p:sp>
       <p:sp>
         <p:nvSpPr>
-          <p:cNvPr id="21" name="o336"/>
+          <p:cNvPr id="21" name="o330"/>
           <p:cNvSpPr/>
           <p:nvPr/>
         </p:nvSpPr>
@@ -22145,7 +22030,7 @@
       </p:sp>
       <p:sp>
         <p:nvSpPr>
-          <p:cNvPr id="22" name="o337"/>
+          <p:cNvPr id="22" name="o331"/>
           <p:cNvSpPr/>
           <p:nvPr/>
         </p:nvSpPr>
@@ -22165,7 +22050,7 @@
       </p:sp>
       <p:sp>
         <p:nvSpPr>
-          <p:cNvPr id="23" name="o338"/>
+          <p:cNvPr id="23" name="o332"/>
           <p:cNvSpPr/>
           <p:nvPr/>
         </p:nvSpPr>
@@ -22185,7 +22070,7 @@
       </p:sp>
       <p:sp>
         <p:nvSpPr>
-          <p:cNvPr id="24" name="o339"/>
+          <p:cNvPr id="24" name="o333"/>
           <p:cNvSpPr txBox="1"/>
           <p:nvPr/>
         </p:nvSpPr>
@@ -22224,7 +22109,7 @@
       </p:sp>
       <p:sp>
         <p:nvSpPr>
-          <p:cNvPr id="25" name="o340"/>
+          <p:cNvPr id="25" name="o334"/>
           <p:cNvSpPr txBox="1"/>
           <p:nvPr/>
         </p:nvSpPr>
@@ -22263,7 +22148,7 @@
       </p:sp>
       <p:sp>
         <p:nvSpPr>
-          <p:cNvPr id="26" name="o341"/>
+          <p:cNvPr id="26" name="o335"/>
           <p:cNvSpPr txBox="1"/>
           <p:nvPr/>
         </p:nvSpPr>
@@ -22302,7 +22187,7 @@
       </p:sp>
       <p:sp>
         <p:nvSpPr>
-          <p:cNvPr id="27" name="o342"/>
+          <p:cNvPr id="27" name="o336"/>
           <p:cNvSpPr/>
           <p:nvPr/>
         </p:nvSpPr>
@@ -22325,7 +22210,7 @@
       </p:sp>
       <p:sp>
         <p:nvSpPr>
-          <p:cNvPr id="28" name="o343"/>
+          <p:cNvPr id="28" name="o337"/>
           <p:cNvSpPr txBox="1"/>
           <p:nvPr/>
         </p:nvSpPr>
@@ -22364,7 +22249,7 @@
       </p:sp>
       <p:sp>
         <p:nvSpPr>
-          <p:cNvPr id="29" name="o344"/>
+          <p:cNvPr id="29" name="o338"/>
           <p:cNvSpPr txBox="1"/>
           <p:nvPr/>
         </p:nvSpPr>
@@ -22403,7 +22288,7 @@
       </p:sp>
       <p:sp>
         <p:nvSpPr>
-          <p:cNvPr id="30" name="o345"/>
+          <p:cNvPr id="30" name="o339"/>
           <p:cNvSpPr txBox="1"/>
           <p:nvPr/>
         </p:nvSpPr>
@@ -22442,7 +22327,7 @@
       </p:sp>
       <p:sp>
         <p:nvSpPr>
-          <p:cNvPr id="31" name="o346"/>
+          <p:cNvPr id="31" name="o340"/>
           <p:cNvSpPr/>
           <p:nvPr/>
         </p:nvSpPr>
@@ -22465,7 +22350,7 @@
       </p:sp>
       <p:sp>
         <p:nvSpPr>
-          <p:cNvPr id="32" name="o347"/>
+          <p:cNvPr id="32" name="o341"/>
           <p:cNvSpPr txBox="1"/>
           <p:nvPr/>
         </p:nvSpPr>
@@ -22504,7 +22389,7 @@
       </p:sp>
       <p:sp>
         <p:nvSpPr>
-          <p:cNvPr id="33" name="o348"/>
+          <p:cNvPr id="33" name="o342"/>
           <p:cNvSpPr txBox="1"/>
           <p:nvPr/>
         </p:nvSpPr>
@@ -22543,7 +22428,7 @@
       </p:sp>
       <p:sp>
         <p:nvSpPr>
-          <p:cNvPr id="34" name="o349"/>
+          <p:cNvPr id="34" name="o343"/>
           <p:cNvSpPr txBox="1"/>
           <p:nvPr/>
         </p:nvSpPr>
@@ -22582,7 +22467,7 @@
       </p:sp>
       <p:sp>
         <p:nvSpPr>
-          <p:cNvPr id="35" name="o350"/>
+          <p:cNvPr id="35" name="o344"/>
           <p:cNvSpPr/>
           <p:nvPr/>
         </p:nvSpPr>
@@ -22605,7 +22490,7 @@
       </p:sp>
       <p:sp>
         <p:nvSpPr>
-          <p:cNvPr id="36" name="o351"/>
+          <p:cNvPr id="36" name="o345"/>
           <p:cNvSpPr txBox="1"/>
           <p:nvPr/>
         </p:nvSpPr>
@@ -22644,7 +22529,7 @@
       </p:sp>
       <p:sp>
         <p:nvSpPr>
-          <p:cNvPr id="37" name="o352"/>
+          <p:cNvPr id="37" name="o346"/>
           <p:cNvSpPr txBox="1"/>
           <p:nvPr/>
         </p:nvSpPr>
@@ -22683,7 +22568,7 @@
       </p:sp>
       <p:sp>
         <p:nvSpPr>
-          <p:cNvPr id="38" name="o353"/>
+          <p:cNvPr id="38" name="o347"/>
           <p:cNvSpPr txBox="1"/>
           <p:nvPr/>
         </p:nvSpPr>
@@ -22722,7 +22607,7 @@
       </p:sp>
       <p:sp>
         <p:nvSpPr>
-          <p:cNvPr id="39" name="o354"/>
+          <p:cNvPr id="39" name="o348"/>
           <p:cNvSpPr/>
           <p:nvPr/>
         </p:nvSpPr>
@@ -22745,7 +22630,7 @@
       </p:sp>
       <p:sp>
         <p:nvSpPr>
-          <p:cNvPr id="40" name="o355"/>
+          <p:cNvPr id="40" name="o349"/>
           <p:cNvSpPr/>
           <p:nvPr/>
         </p:nvSpPr>
@@ -22768,7 +22653,7 @@
       </p:sp>
       <p:sp>
         <p:nvSpPr>
-          <p:cNvPr id="41" name="o356"/>
+          <p:cNvPr id="41" name="o350"/>
           <p:cNvSpPr txBox="1"/>
           <p:nvPr/>
         </p:nvSpPr>
@@ -22807,7 +22692,7 @@
       </p:sp>
       <p:sp>
         <p:nvSpPr>
-          <p:cNvPr id="42" name="o357"/>
+          <p:cNvPr id="42" name="o351"/>
           <p:cNvSpPr/>
           <p:nvPr/>
         </p:nvSpPr>
@@ -22830,7 +22715,7 @@
       </p:sp>
       <p:sp>
         <p:nvSpPr>
-          <p:cNvPr id="43" name="o358"/>
+          <p:cNvPr id="43" name="o352"/>
           <p:cNvSpPr/>
           <p:nvPr/>
         </p:nvSpPr>
@@ -22853,7 +22738,7 @@
       </p:sp>
       <p:sp>
         <p:nvSpPr>
-          <p:cNvPr id="44" name="o359"/>
+          <p:cNvPr id="44" name="o353"/>
           <p:cNvSpPr/>
           <p:nvPr/>
         </p:nvSpPr>
@@ -22875,7 +22760,7 @@
       </p:sp>
       <p:sp>
         <p:nvSpPr>
-          <p:cNvPr id="45" name="o360"/>
+          <p:cNvPr id="45" name="o354"/>
           <p:cNvSpPr txBox="1"/>
           <p:nvPr/>
         </p:nvSpPr>
@@ -22914,7 +22799,7 @@
       </p:sp>
       <p:sp>
         <p:nvSpPr>
-          <p:cNvPr id="46" name="o361"/>
+          <p:cNvPr id="46" name="o355"/>
           <p:cNvSpPr txBox="1"/>
           <p:nvPr/>
         </p:nvSpPr>
@@ -22953,7 +22838,7 @@
       </p:sp>
       <p:sp>
         <p:nvSpPr>
-          <p:cNvPr id="47" name="o362"/>
+          <p:cNvPr id="47" name="o356"/>
           <p:cNvSpPr txBox="1"/>
           <p:nvPr/>
         </p:nvSpPr>
@@ -22992,7 +22877,7 @@
       </p:sp>
       <p:sp>
         <p:nvSpPr>
-          <p:cNvPr id="48" name="o363"/>
+          <p:cNvPr id="48" name="o357"/>
           <p:cNvSpPr txBox="1"/>
           <p:nvPr/>
         </p:nvSpPr>
@@ -23031,7 +22916,7 @@
       </p:sp>
       <p:sp>
         <p:nvSpPr>
-          <p:cNvPr id="49" name="o364"/>
+          <p:cNvPr id="49" name="o358"/>
           <p:cNvSpPr/>
           <p:nvPr/>
         </p:nvSpPr>
@@ -23056,7 +22941,7 @@
       </p:sp>
       <p:sp>
         <p:nvSpPr>
-          <p:cNvPr id="50" name="o365"/>
+          <p:cNvPr id="50" name="o359"/>
           <p:cNvSpPr txBox="1"/>
           <p:nvPr/>
         </p:nvSpPr>
@@ -23095,7 +22980,7 @@
       </p:sp>
       <p:sp>
         <p:nvSpPr>
-          <p:cNvPr id="51" name="o366"/>
+          <p:cNvPr id="51" name="o360"/>
           <p:cNvSpPr/>
           <p:nvPr/>
         </p:nvSpPr>
@@ -23120,7 +23005,7 @@
       </p:sp>
       <p:sp>
         <p:nvSpPr>
-          <p:cNvPr id="52" name="o367"/>
+          <p:cNvPr id="52" name="o361"/>
           <p:cNvSpPr txBox="1"/>
           <p:nvPr/>
         </p:nvSpPr>
@@ -23159,7 +23044,7 @@
       </p:sp>
       <p:sp>
         <p:nvSpPr>
-          <p:cNvPr id="53" name="o368"/>
+          <p:cNvPr id="53" name="o362"/>
           <p:cNvSpPr/>
           <p:nvPr/>
         </p:nvSpPr>
@@ -23184,7 +23069,7 @@
       </p:sp>
       <p:sp>
         <p:nvSpPr>
-          <p:cNvPr id="54" name="o369"/>
+          <p:cNvPr id="54" name="o363"/>
           <p:cNvSpPr txBox="1"/>
           <p:nvPr/>
         </p:nvSpPr>
@@ -23223,7 +23108,7 @@
       </p:sp>
       <p:sp>
         <p:nvSpPr>
-          <p:cNvPr id="55" name="o370"/>
+          <p:cNvPr id="55" name="o364"/>
           <p:cNvSpPr/>
           <p:nvPr/>
         </p:nvSpPr>
@@ -23248,7 +23133,7 @@
       </p:sp>
       <p:sp>
         <p:nvSpPr>
-          <p:cNvPr id="56" name="o371"/>
+          <p:cNvPr id="56" name="o365"/>
           <p:cNvSpPr txBox="1"/>
           <p:nvPr/>
         </p:nvSpPr>
@@ -23287,7 +23172,7 @@
       </p:sp>
       <p:sp>
         <p:nvSpPr>
-          <p:cNvPr id="57" name="o372"/>
+          <p:cNvPr id="57" name="o366"/>
           <p:cNvSpPr/>
           <p:nvPr/>
         </p:nvSpPr>
@@ -23312,7 +23197,7 @@
       </p:sp>
       <p:sp>
         <p:nvSpPr>
-          <p:cNvPr id="58" name="o373"/>
+          <p:cNvPr id="58" name="o367"/>
           <p:cNvSpPr txBox="1"/>
           <p:nvPr/>
         </p:nvSpPr>
@@ -23351,7 +23236,7 @@
       </p:sp>
       <p:sp>
         <p:nvSpPr>
-          <p:cNvPr id="59" name="o374"/>
+          <p:cNvPr id="59" name="o368"/>
           <p:cNvSpPr/>
           <p:nvPr/>
         </p:nvSpPr>
@@ -23376,7 +23261,7 @@
       </p:sp>
       <p:sp>
         <p:nvSpPr>
-          <p:cNvPr id="60" name="o375"/>
+          <p:cNvPr id="60" name="o369"/>
           <p:cNvSpPr txBox="1"/>
           <p:nvPr/>
         </p:nvSpPr>
@@ -23415,7 +23300,7 @@
       </p:sp>
       <p:sp>
         <p:nvSpPr>
-          <p:cNvPr id="61" name="o376"/>
+          <p:cNvPr id="61" name="o370"/>
           <p:cNvSpPr/>
           <p:nvPr/>
         </p:nvSpPr>
@@ -23440,7 +23325,7 @@
       </p:sp>
       <p:sp>
         <p:nvSpPr>
-          <p:cNvPr id="62" name="o377"/>
+          <p:cNvPr id="62" name="o371"/>
           <p:cNvSpPr txBox="1"/>
           <p:nvPr/>
         </p:nvSpPr>
@@ -23479,7 +23364,7 @@
       </p:sp>
       <p:sp>
         <p:nvSpPr>
-          <p:cNvPr id="63" name="o378"/>
+          <p:cNvPr id="63" name="o372"/>
           <p:cNvSpPr/>
           <p:nvPr/>
         </p:nvSpPr>
@@ -23504,7 +23389,7 @@
       </p:sp>
       <p:sp>
         <p:nvSpPr>
-          <p:cNvPr id="64" name="o379"/>
+          <p:cNvPr id="64" name="o373"/>
           <p:cNvSpPr txBox="1"/>
           <p:nvPr/>
         </p:nvSpPr>
@@ -23543,7 +23428,7 @@
       </p:sp>
       <p:sp>
         <p:nvSpPr>
-          <p:cNvPr id="65" name="o380"/>
+          <p:cNvPr id="65" name="o374"/>
           <p:cNvSpPr/>
           <p:nvPr/>
         </p:nvSpPr>
@@ -23568,7 +23453,7 @@
       </p:sp>
       <p:sp>
         <p:nvSpPr>
-          <p:cNvPr id="66" name="o381"/>
+          <p:cNvPr id="66" name="o375"/>
           <p:cNvSpPr txBox="1"/>
           <p:nvPr/>
         </p:nvSpPr>
@@ -23607,7 +23492,7 @@
       </p:sp>
       <p:sp>
         <p:nvSpPr>
-          <p:cNvPr id="67" name="o382"/>
+          <p:cNvPr id="67" name="o376"/>
           <p:cNvSpPr txBox="1"/>
           <p:nvPr/>
         </p:nvSpPr>
@@ -23646,7 +23531,7 @@
       </p:sp>
       <p:sp>
         <p:nvSpPr>
-          <p:cNvPr id="68" name="o383"/>
+          <p:cNvPr id="68" name="o377"/>
           <p:cNvSpPr/>
           <p:nvPr/>
         </p:nvSpPr>
@@ -23666,7 +23551,7 @@
       </p:sp>
       <p:sp>
         <p:nvSpPr>
-          <p:cNvPr id="69" name="o384"/>
+          <p:cNvPr id="69" name="o378"/>
           <p:cNvSpPr/>
           <p:nvPr/>
         </p:nvSpPr>
@@ -23686,7 +23571,7 @@
       </p:sp>
       <p:sp>
         <p:nvSpPr>
-          <p:cNvPr id="70" name="o385"/>
+          <p:cNvPr id="70" name="o379"/>
           <p:cNvSpPr txBox="1"/>
           <p:nvPr/>
         </p:nvSpPr>
@@ -23753,7 +23638,7 @@
       </p:grpSpPr>
       <p:sp>
         <p:nvSpPr>
-          <p:cNvPr id="2" name="o386"/>
+          <p:cNvPr id="2" name="o380"/>
           <p:cNvSpPr txBox="1"/>
           <p:nvPr/>
         </p:nvSpPr>
@@ -23792,7 +23677,7 @@
       </p:sp>
       <p:sp>
         <p:nvSpPr>
-          <p:cNvPr id="3" name="o387"/>
+          <p:cNvPr id="3" name="o381"/>
           <p:cNvSpPr txBox="1"/>
           <p:nvPr/>
         </p:nvSpPr>
@@ -23834,7 +23719,7 @@
       </p:sp>
       <p:sp>
         <p:nvSpPr>
-          <p:cNvPr id="4" name="o388"/>
+          <p:cNvPr id="4" name="o382"/>
           <p:cNvSpPr txBox="1"/>
           <p:nvPr/>
         </p:nvSpPr>
@@ -23873,7 +23758,7 @@
       </p:sp>
       <p:sp>
         <p:nvSpPr>
-          <p:cNvPr id="5" name="o389"/>
+          <p:cNvPr id="5" name="o383"/>
           <p:cNvSpPr/>
           <p:nvPr/>
         </p:nvSpPr>
@@ -23896,7 +23781,7 @@
       </p:sp>
       <p:sp>
         <p:nvSpPr>
-          <p:cNvPr id="6" name="o390"/>
+          <p:cNvPr id="6" name="o384"/>
           <p:cNvSpPr txBox="1"/>
           <p:nvPr/>
         </p:nvSpPr>
@@ -23935,7 +23820,7 @@
       </p:sp>
       <p:sp>
         <p:nvSpPr>
-          <p:cNvPr id="7" name="o391"/>
+          <p:cNvPr id="7" name="o385"/>
           <p:cNvSpPr txBox="1"/>
           <p:nvPr/>
         </p:nvSpPr>
@@ -23974,7 +23859,7 @@
       </p:sp>
       <p:sp>
         <p:nvSpPr>
-          <p:cNvPr id="8" name="o392"/>
+          <p:cNvPr id="8" name="o386"/>
           <p:cNvSpPr txBox="1"/>
           <p:nvPr/>
         </p:nvSpPr>
@@ -24013,7 +23898,7 @@
       </p:sp>
       <p:sp>
         <p:nvSpPr>
-          <p:cNvPr id="9" name="o393"/>
+          <p:cNvPr id="9" name="o387"/>
           <p:cNvSpPr/>
           <p:nvPr/>
         </p:nvSpPr>
@@ -24033,7 +23918,7 @@
       </p:sp>
       <p:sp>
         <p:nvSpPr>
-          <p:cNvPr id="10" name="o394"/>
+          <p:cNvPr id="10" name="o388"/>
           <p:cNvSpPr txBox="1"/>
           <p:nvPr/>
         </p:nvSpPr>
@@ -24072,7 +23957,7 @@
       </p:sp>
       <p:sp>
         <p:nvSpPr>
-          <p:cNvPr id="11" name="o395"/>
+          <p:cNvPr id="11" name="o389"/>
           <p:cNvSpPr txBox="1"/>
           <p:nvPr/>
         </p:nvSpPr>
@@ -24111,7 +23996,7 @@
       </p:sp>
       <p:sp>
         <p:nvSpPr>
-          <p:cNvPr id="12" name="o396"/>
+          <p:cNvPr id="12" name="o390"/>
           <p:cNvSpPr/>
           <p:nvPr/>
         </p:nvSpPr>
@@ -24134,7 +24019,7 @@
       </p:sp>
       <p:sp>
         <p:nvSpPr>
-          <p:cNvPr id="13" name="o397"/>
+          <p:cNvPr id="13" name="o391"/>
           <p:cNvSpPr/>
           <p:nvPr/>
         </p:nvSpPr>
@@ -24154,7 +24039,7 @@
       </p:sp>
       <p:sp>
         <p:nvSpPr>
-          <p:cNvPr id="14" name="o398"/>
+          <p:cNvPr id="14" name="o392"/>
           <p:cNvSpPr txBox="1"/>
           <p:nvPr/>
         </p:nvSpPr>
@@ -24193,7 +24078,7 @@
       </p:sp>
       <p:sp>
         <p:nvSpPr>
-          <p:cNvPr id="15" name="o399"/>
+          <p:cNvPr id="15" name="o393"/>
           <p:cNvSpPr txBox="1"/>
           <p:nvPr/>
         </p:nvSpPr>
@@ -24232,7 +24117,7 @@
       </p:sp>
       <p:sp>
         <p:nvSpPr>
-          <p:cNvPr id="16" name="o400"/>
+          <p:cNvPr id="16" name="o394"/>
           <p:cNvSpPr txBox="1"/>
           <p:nvPr/>
         </p:nvSpPr>
@@ -24271,7 +24156,7 @@
       </p:sp>
       <p:sp>
         <p:nvSpPr>
-          <p:cNvPr id="17" name="o401"/>
+          <p:cNvPr id="17" name="o395"/>
           <p:cNvSpPr/>
           <p:nvPr/>
         </p:nvSpPr>
@@ -24291,7 +24176,7 @@
       </p:sp>
       <p:sp>
         <p:nvSpPr>
-          <p:cNvPr id="18" name="o402"/>
+          <p:cNvPr id="18" name="o396"/>
           <p:cNvSpPr txBox="1"/>
           <p:nvPr/>
         </p:nvSpPr>
@@ -24330,7 +24215,7 @@
       </p:sp>
       <p:sp>
         <p:nvSpPr>
-          <p:cNvPr id="19" name="o403"/>
+          <p:cNvPr id="19" name="o397"/>
           <p:cNvSpPr txBox="1"/>
           <p:nvPr/>
         </p:nvSpPr>
@@ -24369,7 +24254,7 @@
       </p:sp>
       <p:sp>
         <p:nvSpPr>
-          <p:cNvPr id="20" name="o404"/>
+          <p:cNvPr id="20" name="o398"/>
           <p:cNvSpPr txBox="1"/>
           <p:nvPr/>
         </p:nvSpPr>
@@ -24408,7 +24293,7 @@
       </p:sp>
       <p:sp>
         <p:nvSpPr>
-          <p:cNvPr id="21" name="o405"/>
+          <p:cNvPr id="21" name="o399"/>
           <p:cNvSpPr/>
           <p:nvPr/>
         </p:nvSpPr>
@@ -24428,7 +24313,7 @@
       </p:sp>
       <p:sp>
         <p:nvSpPr>
-          <p:cNvPr id="22" name="o406"/>
+          <p:cNvPr id="22" name="o400"/>
           <p:cNvSpPr txBox="1"/>
           <p:nvPr/>
         </p:nvSpPr>
@@ -24467,7 +24352,7 @@
       </p:sp>
       <p:sp>
         <p:nvSpPr>
-          <p:cNvPr id="23" name="o407"/>
+          <p:cNvPr id="23" name="o401"/>
           <p:cNvSpPr txBox="1"/>
           <p:nvPr/>
         </p:nvSpPr>
@@ -24506,7 +24391,7 @@
       </p:sp>
       <p:sp>
         <p:nvSpPr>
-          <p:cNvPr id="24" name="o408"/>
+          <p:cNvPr id="24" name="o402"/>
           <p:cNvSpPr txBox="1"/>
           <p:nvPr/>
         </p:nvSpPr>
@@ -24545,7 +24430,7 @@
       </p:sp>
       <p:sp>
         <p:nvSpPr>
-          <p:cNvPr id="25" name="o409"/>
+          <p:cNvPr id="25" name="o403"/>
           <p:cNvSpPr/>
           <p:nvPr/>
         </p:nvSpPr>
@@ -24565,7 +24450,7 @@
       </p:sp>
       <p:sp>
         <p:nvSpPr>
-          <p:cNvPr id="26" name="o410"/>
+          <p:cNvPr id="26" name="o404"/>
           <p:cNvSpPr txBox="1"/>
           <p:nvPr/>
         </p:nvSpPr>
@@ -24604,7 +24489,7 @@
       </p:sp>
       <p:sp>
         <p:nvSpPr>
-          <p:cNvPr id="27" name="o411"/>
+          <p:cNvPr id="27" name="o405"/>
           <p:cNvSpPr txBox="1"/>
           <p:nvPr/>
         </p:nvSpPr>
@@ -24643,7 +24528,7 @@
       </p:sp>
       <p:sp>
         <p:nvSpPr>
-          <p:cNvPr id="28" name="o412"/>
+          <p:cNvPr id="28" name="o406"/>
           <p:cNvSpPr txBox="1"/>
           <p:nvPr/>
         </p:nvSpPr>
@@ -24682,7 +24567,7 @@
       </p:sp>
       <p:sp>
         <p:nvSpPr>
-          <p:cNvPr id="29" name="o413"/>
+          <p:cNvPr id="29" name="o407"/>
           <p:cNvSpPr txBox="1"/>
           <p:nvPr/>
         </p:nvSpPr>
@@ -24721,7 +24606,7 @@
       </p:sp>
       <p:sp>
         <p:nvSpPr>
-          <p:cNvPr id="30" name="o414"/>
+          <p:cNvPr id="30" name="o408"/>
           <p:cNvSpPr/>
           <p:nvPr/>
         </p:nvSpPr>
@@ -24746,7 +24631,7 @@
       </p:sp>
       <p:sp>
         <p:nvSpPr>
-          <p:cNvPr id="31" name="o415"/>
+          <p:cNvPr id="31" name="o409"/>
           <p:cNvSpPr/>
           <p:nvPr/>
         </p:nvSpPr>
@@ -24771,7 +24656,7 @@
       </p:sp>
       <p:sp>
         <p:nvSpPr>
-          <p:cNvPr id="32" name="o416"/>
+          <p:cNvPr id="32" name="o410"/>
           <p:cNvSpPr txBox="1"/>
           <p:nvPr/>
         </p:nvSpPr>
@@ -24810,7 +24695,7 @@
       </p:sp>
       <p:sp>
         <p:nvSpPr>
-          <p:cNvPr id="33" name="o417"/>
+          <p:cNvPr id="33" name="o411"/>
           <p:cNvSpPr txBox="1"/>
           <p:nvPr/>
         </p:nvSpPr>
@@ -24849,7 +24734,7 @@
       </p:sp>
       <p:sp>
         <p:nvSpPr>
-          <p:cNvPr id="34" name="o418"/>
+          <p:cNvPr id="34" name="o412"/>
           <p:cNvSpPr txBox="1"/>
           <p:nvPr/>
         </p:nvSpPr>
@@ -24888,7 +24773,7 @@
       </p:sp>
       <p:sp>
         <p:nvSpPr>
-          <p:cNvPr id="35" name="o419"/>
+          <p:cNvPr id="35" name="o413"/>
           <p:cNvSpPr/>
           <p:nvPr/>
         </p:nvSpPr>
@@ -24912,7 +24797,7 @@
       </p:sp>
       <p:sp>
         <p:nvSpPr>
-          <p:cNvPr id="36" name="o420"/>
+          <p:cNvPr id="36" name="o414"/>
           <p:cNvSpPr/>
           <p:nvPr/>
         </p:nvSpPr>
@@ -24937,7 +24822,7 @@
       </p:sp>
       <p:sp>
         <p:nvSpPr>
-          <p:cNvPr id="37" name="o421"/>
+          <p:cNvPr id="37" name="o415"/>
           <p:cNvSpPr/>
           <p:nvPr/>
         </p:nvSpPr>
@@ -24962,7 +24847,7 @@
       </p:sp>
       <p:sp>
         <p:nvSpPr>
-          <p:cNvPr id="38" name="o422"/>
+          <p:cNvPr id="38" name="o416"/>
           <p:cNvSpPr txBox="1"/>
           <p:nvPr/>
         </p:nvSpPr>
@@ -25001,7 +24886,7 @@
       </p:sp>
       <p:sp>
         <p:nvSpPr>
-          <p:cNvPr id="39" name="o423"/>
+          <p:cNvPr id="39" name="o417"/>
           <p:cNvSpPr txBox="1"/>
           <p:nvPr/>
         </p:nvSpPr>
@@ -25040,7 +24925,7 @@
       </p:sp>
       <p:sp>
         <p:nvSpPr>
-          <p:cNvPr id="40" name="o424"/>
+          <p:cNvPr id="40" name="o418"/>
           <p:cNvSpPr txBox="1"/>
           <p:nvPr/>
         </p:nvSpPr>
@@ -25079,7 +24964,7 @@
       </p:sp>
       <p:sp>
         <p:nvSpPr>
-          <p:cNvPr id="41" name="o425"/>
+          <p:cNvPr id="41" name="o419"/>
           <p:cNvSpPr/>
           <p:nvPr/>
         </p:nvSpPr>
@@ -25103,7 +24988,7 @@
       </p:sp>
       <p:sp>
         <p:nvSpPr>
-          <p:cNvPr id="42" name="o426"/>
+          <p:cNvPr id="42" name="o420"/>
           <p:cNvSpPr/>
           <p:nvPr/>
         </p:nvSpPr>
@@ -25128,7 +25013,7 @@
       </p:sp>
       <p:sp>
         <p:nvSpPr>
-          <p:cNvPr id="43" name="o427"/>
+          <p:cNvPr id="43" name="o421"/>
           <p:cNvSpPr/>
           <p:nvPr/>
         </p:nvSpPr>
@@ -25153,7 +25038,7 @@
       </p:sp>
       <p:sp>
         <p:nvSpPr>
-          <p:cNvPr id="44" name="o428"/>
+          <p:cNvPr id="44" name="o422"/>
           <p:cNvSpPr txBox="1"/>
           <p:nvPr/>
         </p:nvSpPr>
@@ -25192,7 +25077,7 @@
       </p:sp>
       <p:sp>
         <p:nvSpPr>
-          <p:cNvPr id="45" name="o429"/>
+          <p:cNvPr id="45" name="o423"/>
           <p:cNvSpPr txBox="1"/>
           <p:nvPr/>
         </p:nvSpPr>
@@ -25231,7 +25116,7 @@
       </p:sp>
       <p:sp>
         <p:nvSpPr>
-          <p:cNvPr id="46" name="o430"/>
+          <p:cNvPr id="46" name="o424"/>
           <p:cNvSpPr txBox="1"/>
           <p:nvPr/>
         </p:nvSpPr>
@@ -25270,7 +25155,7 @@
       </p:sp>
       <p:sp>
         <p:nvSpPr>
-          <p:cNvPr id="47" name="o431"/>
+          <p:cNvPr id="47" name="o425"/>
           <p:cNvSpPr/>
           <p:nvPr/>
         </p:nvSpPr>
@@ -25294,7 +25179,7 @@
       </p:sp>
       <p:sp>
         <p:nvSpPr>
-          <p:cNvPr id="48" name="o432"/>
+          <p:cNvPr id="48" name="o426"/>
           <p:cNvSpPr/>
           <p:nvPr/>
         </p:nvSpPr>
@@ -25319,7 +25204,7 @@
       </p:sp>
       <p:sp>
         <p:nvSpPr>
-          <p:cNvPr id="49" name="o433"/>
+          <p:cNvPr id="49" name="o427"/>
           <p:cNvSpPr/>
           <p:nvPr/>
         </p:nvSpPr>
@@ -25339,7 +25224,7 @@
       </p:sp>
       <p:sp>
         <p:nvSpPr>
-          <p:cNvPr id="50" name="o434"/>
+          <p:cNvPr id="50" name="o428"/>
           <p:cNvSpPr/>
           <p:nvPr/>
         </p:nvSpPr>
@@ -25364,7 +25249,7 @@
       </p:sp>
       <p:sp>
         <p:nvSpPr>
-          <p:cNvPr id="51" name="o435"/>
+          <p:cNvPr id="51" name="o429"/>
           <p:cNvSpPr txBox="1"/>
           <p:nvPr/>
         </p:nvSpPr>
@@ -25403,7 +25288,7 @@
       </p:sp>
       <p:sp>
         <p:nvSpPr>
-          <p:cNvPr id="52" name="o436"/>
+          <p:cNvPr id="52" name="o430"/>
           <p:cNvSpPr txBox="1"/>
           <p:nvPr/>
         </p:nvSpPr>
@@ -25442,7 +25327,7 @@
       </p:sp>
       <p:sp>
         <p:nvSpPr>
-          <p:cNvPr id="53" name="o437"/>
+          <p:cNvPr id="53" name="o431"/>
           <p:cNvSpPr txBox="1"/>
           <p:nvPr/>
         </p:nvSpPr>
@@ -25481,7 +25366,7 @@
       </p:sp>
       <p:sp>
         <p:nvSpPr>
-          <p:cNvPr id="54" name="o438"/>
+          <p:cNvPr id="54" name="o432"/>
           <p:cNvSpPr/>
           <p:nvPr/>
         </p:nvSpPr>
@@ -25505,7 +25390,7 @@
       </p:sp>
       <p:sp>
         <p:nvSpPr>
-          <p:cNvPr id="55" name="o439"/>
+          <p:cNvPr id="55" name="o433"/>
           <p:cNvSpPr/>
           <p:nvPr/>
         </p:nvSpPr>
@@ -25530,7 +25415,7 @@
       </p:sp>
       <p:sp>
         <p:nvSpPr>
-          <p:cNvPr id="56" name="o440"/>
+          <p:cNvPr id="56" name="o434"/>
           <p:cNvSpPr/>
           <p:nvPr/>
         </p:nvSpPr>
@@ -25555,7 +25440,7 @@
       </p:sp>
       <p:sp>
         <p:nvSpPr>
-          <p:cNvPr id="57" name="o441"/>
+          <p:cNvPr id="57" name="o435"/>
           <p:cNvSpPr txBox="1"/>
           <p:nvPr/>
         </p:nvSpPr>
@@ -25594,7 +25479,7 @@
       </p:sp>
       <p:sp>
         <p:nvSpPr>
-          <p:cNvPr id="58" name="o442"/>
+          <p:cNvPr id="58" name="o436"/>
           <p:cNvSpPr txBox="1"/>
           <p:nvPr/>
         </p:nvSpPr>
@@ -25633,7 +25518,7 @@
       </p:sp>
       <p:sp>
         <p:nvSpPr>
-          <p:cNvPr id="59" name="o443"/>
+          <p:cNvPr id="59" name="o437"/>
           <p:cNvSpPr txBox="1"/>
           <p:nvPr/>
         </p:nvSpPr>
@@ -25672,7 +25557,7 @@
       </p:sp>
       <p:sp>
         <p:nvSpPr>
-          <p:cNvPr id="60" name="o444"/>
+          <p:cNvPr id="60" name="o438"/>
           <p:cNvSpPr/>
           <p:nvPr/>
         </p:nvSpPr>
@@ -25692,7 +25577,7 @@
       </p:sp>
       <p:sp>
         <p:nvSpPr>
-          <p:cNvPr id="61" name="o445"/>
+          <p:cNvPr id="61" name="o439"/>
           <p:cNvSpPr/>
           <p:nvPr/>
         </p:nvSpPr>
@@ -25712,7 +25597,7 @@
       </p:sp>
       <p:sp>
         <p:nvSpPr>
-          <p:cNvPr id="62" name="o446"/>
+          <p:cNvPr id="62" name="o440"/>
           <p:cNvSpPr txBox="1"/>
           <p:nvPr/>
         </p:nvSpPr>
@@ -25779,7 +25664,7 @@
       </p:grpSpPr>
       <p:sp>
         <p:nvSpPr>
-          <p:cNvPr id="2" name="o447"/>
+          <p:cNvPr id="2" name="o441"/>
           <p:cNvSpPr txBox="1"/>
           <p:nvPr/>
         </p:nvSpPr>
@@ -25818,7 +25703,7 @@
       </p:sp>
       <p:sp>
         <p:nvSpPr>
-          <p:cNvPr id="3" name="o448"/>
+          <p:cNvPr id="3" name="o442"/>
           <p:cNvSpPr txBox="1"/>
           <p:nvPr/>
         </p:nvSpPr>
@@ -25860,7 +25745,7 @@
       </p:sp>
       <p:sp>
         <p:nvSpPr>
-          <p:cNvPr id="4" name="o449"/>
+          <p:cNvPr id="4" name="o443"/>
           <p:cNvSpPr txBox="1"/>
           <p:nvPr/>
         </p:nvSpPr>
@@ -25899,7 +25784,7 @@
       </p:sp>
       <p:sp>
         <p:nvSpPr>
-          <p:cNvPr id="5" name="o450"/>
+          <p:cNvPr id="5" name="o444"/>
           <p:cNvSpPr/>
           <p:nvPr/>
         </p:nvSpPr>
@@ -25922,7 +25807,7 @@
       </p:sp>
       <p:sp>
         <p:nvSpPr>
-          <p:cNvPr id="6" name="o451"/>
+          <p:cNvPr id="6" name="o445"/>
           <p:cNvSpPr txBox="1"/>
           <p:nvPr/>
         </p:nvSpPr>
@@ -25961,7 +25846,7 @@
       </p:sp>
       <p:sp>
         <p:nvSpPr>
-          <p:cNvPr id="7" name="o452"/>
+          <p:cNvPr id="7" name="o446"/>
           <p:cNvSpPr txBox="1"/>
           <p:nvPr/>
         </p:nvSpPr>
@@ -26000,7 +25885,7 @@
       </p:sp>
       <p:sp>
         <p:nvSpPr>
-          <p:cNvPr id="8" name="o453"/>
+          <p:cNvPr id="8" name="o447"/>
           <p:cNvSpPr txBox="1"/>
           <p:nvPr/>
         </p:nvSpPr>
@@ -26039,7 +25924,7 @@
       </p:sp>
       <p:sp>
         <p:nvSpPr>
-          <p:cNvPr id="9" name="o454"/>
+          <p:cNvPr id="9" name="o448"/>
           <p:cNvSpPr txBox="1"/>
           <p:nvPr/>
         </p:nvSpPr>
@@ -26078,7 +25963,7 @@
       </p:sp>
       <p:graphicFrame>
         <p:nvGraphicFramePr>
-          <p:cNvPr id="10" name="o455" descr=""/>
+          <p:cNvPr id="10" name="o449" descr=""/>
           <p:cNvGraphicFramePr/>
           <p:nvPr/>
         </p:nvGraphicFramePr>
@@ -26094,7 +25979,7 @@
       </p:graphicFrame>
       <p:sp>
         <p:nvSpPr>
-          <p:cNvPr id="11" name="o456"/>
+          <p:cNvPr id="11" name="o450"/>
           <p:cNvSpPr txBox="1"/>
           <p:nvPr/>
         </p:nvSpPr>
@@ -26133,7 +26018,7 @@
       </p:sp>
       <p:sp>
         <p:nvSpPr>
-          <p:cNvPr id="12" name="o457"/>
+          <p:cNvPr id="12" name="o451"/>
           <p:cNvSpPr txBox="1"/>
           <p:nvPr/>
         </p:nvSpPr>
@@ -26172,7 +26057,7 @@
       </p:sp>
       <p:sp>
         <p:nvSpPr>
-          <p:cNvPr id="13" name="o458"/>
+          <p:cNvPr id="13" name="o452"/>
           <p:cNvSpPr/>
           <p:nvPr/>
         </p:nvSpPr>
@@ -26192,7 +26077,7 @@
       </p:sp>
       <p:sp>
         <p:nvSpPr>
-          <p:cNvPr id="14" name="o459"/>
+          <p:cNvPr id="14" name="o453"/>
           <p:cNvSpPr/>
           <p:nvPr/>
         </p:nvSpPr>
@@ -26212,7 +26097,7 @@
       </p:sp>
       <p:sp>
         <p:nvSpPr>
-          <p:cNvPr id="15" name="o460"/>
+          <p:cNvPr id="15" name="o454"/>
           <p:cNvSpPr txBox="1"/>
           <p:nvPr/>
         </p:nvSpPr>
@@ -26254,7 +26139,7 @@
       </p:sp>
       <p:sp>
         <p:nvSpPr>
-          <p:cNvPr id="16" name="o461"/>
+          <p:cNvPr id="16" name="o455"/>
           <p:cNvSpPr/>
           <p:nvPr/>
         </p:nvSpPr>
@@ -26279,7 +26164,7 @@
       </p:sp>
       <p:sp>
         <p:nvSpPr>
-          <p:cNvPr id="17" name="o462"/>
+          <p:cNvPr id="17" name="o456"/>
           <p:cNvSpPr txBox="1"/>
           <p:nvPr/>
         </p:nvSpPr>
@@ -26318,7 +26203,7 @@
       </p:sp>
       <p:sp>
         <p:nvSpPr>
-          <p:cNvPr id="18" name="o463"/>
+          <p:cNvPr id="18" name="o457"/>
           <p:cNvSpPr txBox="1"/>
           <p:nvPr/>
         </p:nvSpPr>
@@ -26357,7 +26242,7 @@
       </p:sp>
       <p:sp>
         <p:nvSpPr>
-          <p:cNvPr id="19" name="o464"/>
+          <p:cNvPr id="19" name="o458"/>
           <p:cNvSpPr txBox="1"/>
           <p:nvPr/>
         </p:nvSpPr>
@@ -26396,7 +26281,7 @@
       </p:sp>
       <p:sp>
         <p:nvSpPr>
-          <p:cNvPr id="20" name="o465"/>
+          <p:cNvPr id="20" name="o459"/>
           <p:cNvSpPr/>
           <p:nvPr/>
         </p:nvSpPr>
@@ -26421,7 +26306,7 @@
       </p:sp>
       <p:sp>
         <p:nvSpPr>
-          <p:cNvPr id="21" name="o466"/>
+          <p:cNvPr id="21" name="o460"/>
           <p:cNvSpPr txBox="1"/>
           <p:nvPr/>
         </p:nvSpPr>
@@ -26460,7 +26345,7 @@
       </p:sp>
       <p:sp>
         <p:nvSpPr>
-          <p:cNvPr id="22" name="o467"/>
+          <p:cNvPr id="22" name="o461"/>
           <p:cNvSpPr txBox="1"/>
           <p:nvPr/>
         </p:nvSpPr>
@@ -26499,7 +26384,7 @@
       </p:sp>
       <p:sp>
         <p:nvSpPr>
-          <p:cNvPr id="23" name="o468"/>
+          <p:cNvPr id="23" name="o462"/>
           <p:cNvSpPr txBox="1"/>
           <p:nvPr/>
         </p:nvSpPr>
@@ -26538,7 +26423,7 @@
       </p:sp>
       <p:sp>
         <p:nvSpPr>
-          <p:cNvPr id="24" name="o469"/>
+          <p:cNvPr id="24" name="o463"/>
           <p:cNvSpPr/>
           <p:nvPr/>
         </p:nvSpPr>
@@ -26563,7 +26448,7 @@
       </p:sp>
       <p:sp>
         <p:nvSpPr>
-          <p:cNvPr id="25" name="o470"/>
+          <p:cNvPr id="25" name="o464"/>
           <p:cNvSpPr txBox="1"/>
           <p:nvPr/>
         </p:nvSpPr>
@@ -26602,7 +26487,7 @@
       </p:sp>
       <p:sp>
         <p:nvSpPr>
-          <p:cNvPr id="26" name="o471"/>
+          <p:cNvPr id="26" name="o465"/>
           <p:cNvSpPr txBox="1"/>
           <p:nvPr/>
         </p:nvSpPr>
@@ -26641,7 +26526,7 @@
       </p:sp>
       <p:sp>
         <p:nvSpPr>
-          <p:cNvPr id="27" name="o472"/>
+          <p:cNvPr id="27" name="o466"/>
           <p:cNvSpPr txBox="1"/>
           <p:nvPr/>
         </p:nvSpPr>
@@ -26680,7 +26565,7 @@
       </p:sp>
       <p:sp>
         <p:nvSpPr>
-          <p:cNvPr id="28" name="o473"/>
+          <p:cNvPr id="28" name="o467"/>
           <p:cNvSpPr txBox="1"/>
           <p:nvPr/>
         </p:nvSpPr>
@@ -26719,7 +26604,7 @@
       </p:sp>
       <p:sp>
         <p:nvSpPr>
-          <p:cNvPr id="29" name="o474"/>
+          <p:cNvPr id="29" name="o468"/>
           <p:cNvSpPr/>
           <p:nvPr/>
         </p:nvSpPr>
@@ -26739,7 +26624,7 @@
       </p:sp>
       <p:sp>
         <p:nvSpPr>
-          <p:cNvPr id="30" name="o475"/>
+          <p:cNvPr id="30" name="o469"/>
           <p:cNvSpPr txBox="1"/>
           <p:nvPr/>
         </p:nvSpPr>
@@ -26778,7 +26663,7 @@
       </p:sp>
       <p:sp>
         <p:nvSpPr>
-          <p:cNvPr id="31" name="o476"/>
+          <p:cNvPr id="31" name="o470"/>
           <p:cNvSpPr txBox="1"/>
           <p:nvPr/>
         </p:nvSpPr>
@@ -26817,7 +26702,7 @@
       </p:sp>
       <p:sp>
         <p:nvSpPr>
-          <p:cNvPr id="32" name="o477"/>
+          <p:cNvPr id="32" name="o471"/>
           <p:cNvSpPr txBox="1"/>
           <p:nvPr/>
         </p:nvSpPr>
@@ -26856,7 +26741,7 @@
       </p:sp>
       <p:sp>
         <p:nvSpPr>
-          <p:cNvPr id="33" name="o478"/>
+          <p:cNvPr id="33" name="o472"/>
           <p:cNvSpPr txBox="1"/>
           <p:nvPr/>
         </p:nvSpPr>
@@ -26895,7 +26780,7 @@
       </p:sp>
       <p:sp>
         <p:nvSpPr>
-          <p:cNvPr id="34" name="o479"/>
+          <p:cNvPr id="34" name="o473"/>
           <p:cNvSpPr txBox="1"/>
           <p:nvPr/>
         </p:nvSpPr>
@@ -26934,7 +26819,7 @@
       </p:sp>
       <p:sp>
         <p:nvSpPr>
-          <p:cNvPr id="35" name="o480"/>
+          <p:cNvPr id="35" name="o474"/>
           <p:cNvSpPr/>
           <p:nvPr/>
         </p:nvSpPr>
@@ -26957,7 +26842,7 @@
       </p:sp>
       <p:sp>
         <p:nvSpPr>
-          <p:cNvPr id="36" name="o481"/>
+          <p:cNvPr id="36" name="o475"/>
           <p:cNvSpPr txBox="1"/>
           <p:nvPr/>
         </p:nvSpPr>
@@ -26996,7 +26881,7 @@
       </p:sp>
       <p:sp>
         <p:nvSpPr>
-          <p:cNvPr id="37" name="o482"/>
+          <p:cNvPr id="37" name="o476"/>
           <p:cNvSpPr txBox="1"/>
           <p:nvPr/>
         </p:nvSpPr>
@@ -27035,7 +26920,7 @@
       </p:sp>
       <p:sp>
         <p:nvSpPr>
-          <p:cNvPr id="38" name="o483"/>
+          <p:cNvPr id="38" name="o477"/>
           <p:cNvSpPr txBox="1"/>
           <p:nvPr/>
         </p:nvSpPr>
@@ -27074,7 +26959,7 @@
       </p:sp>
       <p:sp>
         <p:nvSpPr>
-          <p:cNvPr id="39" name="o484"/>
+          <p:cNvPr id="39" name="o478"/>
           <p:cNvSpPr txBox="1"/>
           <p:nvPr/>
         </p:nvSpPr>
@@ -27113,7 +26998,7 @@
       </p:sp>
       <p:sp>
         <p:nvSpPr>
-          <p:cNvPr id="40" name="o485"/>
+          <p:cNvPr id="40" name="o479"/>
           <p:cNvSpPr txBox="1"/>
           <p:nvPr/>
         </p:nvSpPr>
@@ -27152,7 +27037,7 @@
       </p:sp>
       <p:sp>
         <p:nvSpPr>
-          <p:cNvPr id="41" name="o486"/>
+          <p:cNvPr id="41" name="o480"/>
           <p:cNvSpPr/>
           <p:nvPr/>
         </p:nvSpPr>
@@ -27175,7 +27060,7 @@
       </p:sp>
       <p:sp>
         <p:nvSpPr>
-          <p:cNvPr id="42" name="o487"/>
+          <p:cNvPr id="42" name="o481"/>
           <p:cNvSpPr txBox="1"/>
           <p:nvPr/>
         </p:nvSpPr>
@@ -27214,7 +27099,7 @@
       </p:sp>
       <p:sp>
         <p:nvSpPr>
-          <p:cNvPr id="43" name="o488"/>
+          <p:cNvPr id="43" name="o482"/>
           <p:cNvSpPr txBox="1"/>
           <p:nvPr/>
         </p:nvSpPr>
@@ -27253,7 +27138,7 @@
       </p:sp>
       <p:sp>
         <p:nvSpPr>
-          <p:cNvPr id="44" name="o489"/>
+          <p:cNvPr id="44" name="o483"/>
           <p:cNvSpPr txBox="1"/>
           <p:nvPr/>
         </p:nvSpPr>
@@ -27292,7 +27177,7 @@
       </p:sp>
       <p:sp>
         <p:nvSpPr>
-          <p:cNvPr id="45" name="o490"/>
+          <p:cNvPr id="45" name="o484"/>
           <p:cNvSpPr txBox="1"/>
           <p:nvPr/>
         </p:nvSpPr>
@@ -27331,7 +27216,7 @@
       </p:sp>
       <p:sp>
         <p:nvSpPr>
-          <p:cNvPr id="46" name="o491"/>
+          <p:cNvPr id="46" name="o485"/>
           <p:cNvSpPr txBox="1"/>
           <p:nvPr/>
         </p:nvSpPr>
@@ -27370,7 +27255,7 @@
       </p:sp>
       <p:sp>
         <p:nvSpPr>
-          <p:cNvPr id="47" name="o492"/>
+          <p:cNvPr id="47" name="o486"/>
           <p:cNvSpPr/>
           <p:nvPr/>
         </p:nvSpPr>
@@ -27393,7 +27278,7 @@
       </p:sp>
       <p:sp>
         <p:nvSpPr>
-          <p:cNvPr id="48" name="o493"/>
+          <p:cNvPr id="48" name="o487"/>
           <p:cNvSpPr txBox="1"/>
           <p:nvPr/>
         </p:nvSpPr>
@@ -27432,7 +27317,7 @@
       </p:sp>
       <p:sp>
         <p:nvSpPr>
-          <p:cNvPr id="49" name="o494"/>
+          <p:cNvPr id="49" name="o488"/>
           <p:cNvSpPr txBox="1"/>
           <p:nvPr/>
         </p:nvSpPr>
@@ -27471,7 +27356,7 @@
       </p:sp>
       <p:sp>
         <p:nvSpPr>
-          <p:cNvPr id="50" name="o495"/>
+          <p:cNvPr id="50" name="o489"/>
           <p:cNvSpPr txBox="1"/>
           <p:nvPr/>
         </p:nvSpPr>
@@ -27510,7 +27395,7 @@
       </p:sp>
       <p:sp>
         <p:nvSpPr>
-          <p:cNvPr id="51" name="o496"/>
+          <p:cNvPr id="51" name="o490"/>
           <p:cNvSpPr txBox="1"/>
           <p:nvPr/>
         </p:nvSpPr>
@@ -27549,7 +27434,7 @@
       </p:sp>
       <p:sp>
         <p:nvSpPr>
-          <p:cNvPr id="52" name="o497"/>
+          <p:cNvPr id="52" name="o491"/>
           <p:cNvSpPr txBox="1"/>
           <p:nvPr/>
         </p:nvSpPr>
@@ -27588,7 +27473,7 @@
       </p:sp>
       <p:sp>
         <p:nvSpPr>
-          <p:cNvPr id="53" name="o498"/>
+          <p:cNvPr id="53" name="o492"/>
           <p:cNvSpPr/>
           <p:nvPr/>
         </p:nvSpPr>
@@ -27611,7 +27496,7 @@
       </p:sp>
       <p:sp>
         <p:nvSpPr>
-          <p:cNvPr id="54" name="o499"/>
+          <p:cNvPr id="54" name="o493"/>
           <p:cNvSpPr txBox="1"/>
           <p:nvPr/>
         </p:nvSpPr>
@@ -27650,7 +27535,7 @@
       </p:sp>
       <p:sp>
         <p:nvSpPr>
-          <p:cNvPr id="55" name="o500"/>
+          <p:cNvPr id="55" name="o494"/>
           <p:cNvSpPr txBox="1"/>
           <p:nvPr/>
         </p:nvSpPr>
@@ -27689,7 +27574,7 @@
       </p:sp>
       <p:sp>
         <p:nvSpPr>
-          <p:cNvPr id="56" name="o501"/>
+          <p:cNvPr id="56" name="o495"/>
           <p:cNvSpPr txBox="1"/>
           <p:nvPr/>
         </p:nvSpPr>
@@ -27728,7 +27613,7 @@
       </p:sp>
       <p:sp>
         <p:nvSpPr>
-          <p:cNvPr id="57" name="o502"/>
+          <p:cNvPr id="57" name="o496"/>
           <p:cNvSpPr txBox="1"/>
           <p:nvPr/>
         </p:nvSpPr>
@@ -27767,7 +27652,7 @@
       </p:sp>
       <p:sp>
         <p:nvSpPr>
-          <p:cNvPr id="58" name="o503"/>
+          <p:cNvPr id="58" name="o497"/>
           <p:cNvSpPr txBox="1"/>
           <p:nvPr/>
         </p:nvSpPr>
@@ -27806,7 +27691,7 @@
       </p:sp>
       <p:sp>
         <p:nvSpPr>
-          <p:cNvPr id="59" name="o504"/>
+          <p:cNvPr id="59" name="o498"/>
           <p:cNvSpPr/>
           <p:nvPr/>
         </p:nvSpPr>
@@ -27829,7 +27714,7 @@
       </p:sp>
       <p:sp>
         <p:nvSpPr>
-          <p:cNvPr id="60" name="o505"/>
+          <p:cNvPr id="60" name="o499"/>
           <p:cNvSpPr/>
           <p:nvPr/>
         </p:nvSpPr>
@@ -27852,7 +27737,7 @@
       </p:sp>
       <p:sp>
         <p:nvSpPr>
-          <p:cNvPr id="61" name="o506"/>
+          <p:cNvPr id="61" name="o500"/>
           <p:cNvSpPr txBox="1"/>
           <p:nvPr/>
         </p:nvSpPr>

--- a/docs/QI_경진대회_발표_BCG.pptx
+++ b/docs/QI_경진대회_발표_BCG.pptx
@@ -119,14 +119,14 @@
   <p:extLst>
     <p:ext uri="{521415D9-36F7-43E2-AB2F-B90AF26B5E84}">
       <p14:sectionLst xmlns:p14="http://schemas.microsoft.com/office/powerpoint/2010/main">
-        <p14:section name="도입" id="{10df8983-3620-1b48-4a96-518d3762b58c}">
+        <p14:section name="도입" id="{a17db192-1ada-7350-da64-c2493d450fd4}">
           <p14:sldIdLst>
             <p14:sldId id="256"/>
             <p14:sldId id="257"/>
             <p14:sldId id="258"/>
           </p14:sldIdLst>
         </p14:section>
-        <p14:section name="Plan" id="{d65afb58-fbb2-f1d1-344f-783305d2fce7}">
+        <p14:section name="Plan" id="{148ef8de-fe41-ecb7-53a6-b24ca6c87987}">
           <p14:sldIdLst>
             <p14:sldId id="259"/>
             <p14:sldId id="260"/>
@@ -134,18 +134,18 @@
             <p14:sldId id="262"/>
           </p14:sldIdLst>
         </p14:section>
-        <p14:section name="Do" id="{0f731f17-3adb-318b-1c6a-58964a04d4d2}">
+        <p14:section name="Do" id="{71fcdf03-52b2-11cf-f80b-bfdd03e340fc}">
           <p14:sldIdLst>
             <p14:sldId id="263"/>
           </p14:sldIdLst>
         </p14:section>
-        <p14:section name="Check" id="{37cdc72f-f5f1-d5c8-d7ea-eae7b8456fb5}">
+        <p14:section name="Check" id="{40f2c2cc-034e-d99f-8ad2-8a8dad40b2fc}">
           <p14:sldIdLst>
             <p14:sldId id="264"/>
             <p14:sldId id="265"/>
           </p14:sldIdLst>
         </p14:section>
-        <p14:section name="Act" id="{4aa6ef64-b132-ddc8-8e93-20686fa87c08}">
+        <p14:section name="Act" id="{5a03f199-5a43-5ce7-2c87-b7e112948cab}">
           <p14:sldIdLst>
             <p14:sldId id="266"/>
             <p14:sldId id="267"/>
@@ -2008,7 +2008,8 @@
             <a:r>
               <a:rPr lang="en-US" dirty="0"/>
               <a:t>- 김광현: 총괄 / 장은선(보건관리자): 플랫폼 기획 · 직접 코딩 / 장종문(안전관리자): MSDS · AI 위험성평가
-- 4월 1주 프로토타입 → 고위험 부서 우선 → 전 부서 확대</a:t>
+- 4월 1주 프로토타입 → 고위험 부서 우선 → 전 부서 확대
+- 8~10월 표준화 이후 AI 고도화 (Slide 11)</a:t>
             </a:r>
             <a:endParaRPr lang="en-US" dirty="0"/>
           </a:p>
@@ -3813,7 +3814,7 @@
       </p:grpSpPr>
       <p:sp>
         <p:nvSpPr>
-          <p:cNvPr id="2" name="o501"/>
+          <p:cNvPr id="2" name="o498"/>
           <p:cNvSpPr txBox="1"/>
           <p:nvPr/>
         </p:nvSpPr>
@@ -3852,7 +3853,7 @@
       </p:sp>
       <p:sp>
         <p:nvSpPr>
-          <p:cNvPr id="3" name="o502"/>
+          <p:cNvPr id="3" name="o499"/>
           <p:cNvSpPr txBox="1"/>
           <p:nvPr/>
         </p:nvSpPr>
@@ -3894,7 +3895,7 @@
       </p:sp>
       <p:sp>
         <p:nvSpPr>
-          <p:cNvPr id="4" name="o503"/>
+          <p:cNvPr id="4" name="o500"/>
           <p:cNvSpPr txBox="1"/>
           <p:nvPr/>
         </p:nvSpPr>
@@ -3933,7 +3934,7 @@
       </p:sp>
       <p:sp>
         <p:nvSpPr>
-          <p:cNvPr id="5" name="o504"/>
+          <p:cNvPr id="5" name="o501"/>
           <p:cNvSpPr/>
           <p:nvPr/>
         </p:nvSpPr>
@@ -3956,7 +3957,7 @@
       </p:sp>
       <p:sp>
         <p:nvSpPr>
-          <p:cNvPr id="6" name="o505"/>
+          <p:cNvPr id="6" name="o502"/>
           <p:cNvSpPr txBox="1"/>
           <p:nvPr/>
         </p:nvSpPr>
@@ -3995,7 +3996,7 @@
       </p:sp>
       <p:sp>
         <p:nvSpPr>
-          <p:cNvPr id="7" name="o506"/>
+          <p:cNvPr id="7" name="o503"/>
           <p:cNvSpPr txBox="1"/>
           <p:nvPr/>
         </p:nvSpPr>
@@ -4034,7 +4035,7 @@
       </p:sp>
       <p:sp>
         <p:nvSpPr>
-          <p:cNvPr id="8" name="o507"/>
+          <p:cNvPr id="8" name="o504"/>
           <p:cNvSpPr txBox="1"/>
           <p:nvPr/>
         </p:nvSpPr>
@@ -4073,7 +4074,7 @@
       </p:sp>
       <p:sp>
         <p:nvSpPr>
-          <p:cNvPr id="9" name="o508"/>
+          <p:cNvPr id="9" name="o505"/>
           <p:cNvSpPr txBox="1"/>
           <p:nvPr/>
         </p:nvSpPr>
@@ -4112,7 +4113,7 @@
       </p:sp>
       <p:sp>
         <p:nvSpPr>
-          <p:cNvPr id="10" name="o509"/>
+          <p:cNvPr id="10" name="o506"/>
           <p:cNvSpPr/>
           <p:nvPr/>
         </p:nvSpPr>
@@ -4132,7 +4133,7 @@
       </p:sp>
       <p:sp>
         <p:nvSpPr>
-          <p:cNvPr id="11" name="o510"/>
+          <p:cNvPr id="11" name="o507"/>
           <p:cNvSpPr txBox="1"/>
           <p:nvPr/>
         </p:nvSpPr>
@@ -4171,7 +4172,7 @@
       </p:sp>
       <p:sp>
         <p:nvSpPr>
-          <p:cNvPr id="12" name="o511"/>
+          <p:cNvPr id="12" name="o508"/>
           <p:cNvSpPr txBox="1"/>
           <p:nvPr/>
         </p:nvSpPr>
@@ -4210,7 +4211,7 @@
       </p:sp>
       <p:sp>
         <p:nvSpPr>
-          <p:cNvPr id="13" name="o512"/>
+          <p:cNvPr id="13" name="o509"/>
           <p:cNvSpPr/>
           <p:nvPr/>
         </p:nvSpPr>
@@ -4233,7 +4234,7 @@
       </p:sp>
       <p:sp>
         <p:nvSpPr>
-          <p:cNvPr id="14" name="o513"/>
+          <p:cNvPr id="14" name="o510"/>
           <p:cNvSpPr/>
           <p:nvPr/>
         </p:nvSpPr>
@@ -4258,7 +4259,7 @@
       </p:sp>
       <p:sp>
         <p:nvSpPr>
-          <p:cNvPr id="15" name="o514"/>
+          <p:cNvPr id="15" name="o511"/>
           <p:cNvSpPr txBox="1"/>
           <p:nvPr/>
         </p:nvSpPr>
@@ -4297,7 +4298,7 @@
       </p:sp>
       <p:sp>
         <p:nvSpPr>
-          <p:cNvPr id="16" name="o515"/>
+          <p:cNvPr id="16" name="o512"/>
           <p:cNvSpPr txBox="1"/>
           <p:nvPr/>
         </p:nvSpPr>
@@ -4336,7 +4337,7 @@
       </p:sp>
       <p:sp>
         <p:nvSpPr>
-          <p:cNvPr id="17" name="o516"/>
+          <p:cNvPr id="17" name="o513"/>
           <p:cNvSpPr/>
           <p:nvPr/>
         </p:nvSpPr>
@@ -4359,7 +4360,7 @@
       </p:sp>
       <p:sp>
         <p:nvSpPr>
-          <p:cNvPr id="18" name="o517"/>
+          <p:cNvPr id="18" name="o514"/>
           <p:cNvSpPr/>
           <p:nvPr/>
         </p:nvSpPr>
@@ -4384,7 +4385,7 @@
       </p:sp>
       <p:sp>
         <p:nvSpPr>
-          <p:cNvPr id="19" name="o518"/>
+          <p:cNvPr id="19" name="o515"/>
           <p:cNvSpPr txBox="1"/>
           <p:nvPr/>
         </p:nvSpPr>
@@ -4423,7 +4424,7 @@
       </p:sp>
       <p:sp>
         <p:nvSpPr>
-          <p:cNvPr id="20" name="o519"/>
+          <p:cNvPr id="20" name="o516"/>
           <p:cNvSpPr txBox="1"/>
           <p:nvPr/>
         </p:nvSpPr>
@@ -4462,7 +4463,7 @@
       </p:sp>
       <p:sp>
         <p:nvSpPr>
-          <p:cNvPr id="21" name="o520"/>
+          <p:cNvPr id="21" name="o517"/>
           <p:cNvSpPr/>
           <p:nvPr/>
         </p:nvSpPr>
@@ -4485,7 +4486,7 @@
       </p:sp>
       <p:sp>
         <p:nvSpPr>
-          <p:cNvPr id="22" name="o521"/>
+          <p:cNvPr id="22" name="o518"/>
           <p:cNvSpPr/>
           <p:nvPr/>
         </p:nvSpPr>
@@ -4510,7 +4511,7 @@
       </p:sp>
       <p:sp>
         <p:nvSpPr>
-          <p:cNvPr id="23" name="o522"/>
+          <p:cNvPr id="23" name="o519"/>
           <p:cNvSpPr txBox="1"/>
           <p:nvPr/>
         </p:nvSpPr>
@@ -4549,7 +4550,7 @@
       </p:sp>
       <p:sp>
         <p:nvSpPr>
-          <p:cNvPr id="24" name="o523"/>
+          <p:cNvPr id="24" name="o520"/>
           <p:cNvSpPr txBox="1"/>
           <p:nvPr/>
         </p:nvSpPr>
@@ -4588,7 +4589,7 @@
       </p:sp>
       <p:sp>
         <p:nvSpPr>
-          <p:cNvPr id="25" name="o524"/>
+          <p:cNvPr id="25" name="o521"/>
           <p:cNvSpPr/>
           <p:nvPr/>
         </p:nvSpPr>
@@ -4611,7 +4612,7 @@
       </p:sp>
       <p:sp>
         <p:nvSpPr>
-          <p:cNvPr id="26" name="o525"/>
+          <p:cNvPr id="26" name="o522"/>
           <p:cNvSpPr/>
           <p:nvPr/>
         </p:nvSpPr>
@@ -4636,7 +4637,7 @@
       </p:sp>
       <p:sp>
         <p:nvSpPr>
-          <p:cNvPr id="27" name="o526"/>
+          <p:cNvPr id="27" name="o523"/>
           <p:cNvSpPr txBox="1"/>
           <p:nvPr/>
         </p:nvSpPr>
@@ -4675,7 +4676,7 @@
       </p:sp>
       <p:sp>
         <p:nvSpPr>
-          <p:cNvPr id="28" name="o527"/>
+          <p:cNvPr id="28" name="o524"/>
           <p:cNvSpPr txBox="1"/>
           <p:nvPr/>
         </p:nvSpPr>
@@ -4714,7 +4715,7 @@
       </p:sp>
       <p:sp>
         <p:nvSpPr>
-          <p:cNvPr id="29" name="o528"/>
+          <p:cNvPr id="29" name="o525"/>
           <p:cNvSpPr/>
           <p:nvPr/>
         </p:nvSpPr>
@@ -4737,7 +4738,7 @@
       </p:sp>
       <p:sp>
         <p:nvSpPr>
-          <p:cNvPr id="30" name="o529"/>
+          <p:cNvPr id="30" name="o526"/>
           <p:cNvSpPr/>
           <p:nvPr/>
         </p:nvSpPr>
@@ -4762,7 +4763,7 @@
       </p:sp>
       <p:sp>
         <p:nvSpPr>
-          <p:cNvPr id="31" name="o530"/>
+          <p:cNvPr id="31" name="o527"/>
           <p:cNvSpPr txBox="1"/>
           <p:nvPr/>
         </p:nvSpPr>
@@ -4801,7 +4802,7 @@
       </p:sp>
       <p:sp>
         <p:nvSpPr>
-          <p:cNvPr id="32" name="o531"/>
+          <p:cNvPr id="32" name="o528"/>
           <p:cNvSpPr txBox="1"/>
           <p:nvPr/>
         </p:nvSpPr>
@@ -4840,7 +4841,7 @@
       </p:sp>
       <p:sp>
         <p:nvSpPr>
-          <p:cNvPr id="33" name="o532"/>
+          <p:cNvPr id="33" name="o529"/>
           <p:cNvSpPr/>
           <p:nvPr/>
         </p:nvSpPr>
@@ -4863,7 +4864,7 @@
       </p:sp>
       <p:sp>
         <p:nvSpPr>
-          <p:cNvPr id="34" name="o533"/>
+          <p:cNvPr id="34" name="o530"/>
           <p:cNvSpPr/>
           <p:nvPr/>
         </p:nvSpPr>
@@ -4888,7 +4889,7 @@
       </p:sp>
       <p:sp>
         <p:nvSpPr>
-          <p:cNvPr id="35" name="o534"/>
+          <p:cNvPr id="35" name="o531"/>
           <p:cNvSpPr txBox="1"/>
           <p:nvPr/>
         </p:nvSpPr>
@@ -4927,7 +4928,7 @@
       </p:sp>
       <p:sp>
         <p:nvSpPr>
-          <p:cNvPr id="36" name="o535"/>
+          <p:cNvPr id="36" name="o532"/>
           <p:cNvSpPr txBox="1"/>
           <p:nvPr/>
         </p:nvSpPr>
@@ -4966,7 +4967,7 @@
       </p:sp>
       <p:sp>
         <p:nvSpPr>
-          <p:cNvPr id="37" name="o536"/>
+          <p:cNvPr id="37" name="o533"/>
           <p:cNvSpPr/>
           <p:nvPr/>
         </p:nvSpPr>
@@ -4989,7 +4990,7 @@
       </p:sp>
       <p:sp>
         <p:nvSpPr>
-          <p:cNvPr id="38" name="o537"/>
+          <p:cNvPr id="38" name="o534"/>
           <p:cNvSpPr/>
           <p:nvPr/>
         </p:nvSpPr>
@@ -5009,7 +5010,7 @@
       </p:sp>
       <p:sp>
         <p:nvSpPr>
-          <p:cNvPr id="39" name="o538"/>
+          <p:cNvPr id="39" name="o535"/>
           <p:cNvSpPr txBox="1"/>
           <p:nvPr/>
         </p:nvSpPr>
@@ -5048,7 +5049,7 @@
       </p:sp>
       <p:sp>
         <p:nvSpPr>
-          <p:cNvPr id="40" name="o539"/>
+          <p:cNvPr id="40" name="o536"/>
           <p:cNvSpPr txBox="1"/>
           <p:nvPr/>
         </p:nvSpPr>
@@ -5087,7 +5088,7 @@
       </p:sp>
       <p:sp>
         <p:nvSpPr>
-          <p:cNvPr id="41" name="o540"/>
+          <p:cNvPr id="41" name="o537"/>
           <p:cNvSpPr/>
           <p:nvPr/>
         </p:nvSpPr>
@@ -5110,7 +5111,7 @@
       </p:sp>
       <p:sp>
         <p:nvSpPr>
-          <p:cNvPr id="42" name="o541"/>
+          <p:cNvPr id="42" name="o538"/>
           <p:cNvSpPr/>
           <p:nvPr/>
         </p:nvSpPr>
@@ -5130,7 +5131,7 @@
       </p:sp>
       <p:sp>
         <p:nvSpPr>
-          <p:cNvPr id="43" name="o542"/>
+          <p:cNvPr id="43" name="o539"/>
           <p:cNvSpPr txBox="1"/>
           <p:nvPr/>
         </p:nvSpPr>
@@ -5169,7 +5170,7 @@
       </p:sp>
       <p:sp>
         <p:nvSpPr>
-          <p:cNvPr id="44" name="o543"/>
+          <p:cNvPr id="44" name="o540"/>
           <p:cNvSpPr txBox="1"/>
           <p:nvPr/>
         </p:nvSpPr>
@@ -5208,7 +5209,7 @@
       </p:sp>
       <p:sp>
         <p:nvSpPr>
-          <p:cNvPr id="45" name="o544"/>
+          <p:cNvPr id="45" name="o541"/>
           <p:cNvSpPr/>
           <p:nvPr/>
         </p:nvSpPr>
@@ -5231,7 +5232,7 @@
       </p:sp>
       <p:sp>
         <p:nvSpPr>
-          <p:cNvPr id="46" name="o545"/>
+          <p:cNvPr id="46" name="o542"/>
           <p:cNvSpPr/>
           <p:nvPr/>
         </p:nvSpPr>
@@ -5251,7 +5252,7 @@
       </p:sp>
       <p:sp>
         <p:nvSpPr>
-          <p:cNvPr id="47" name="o546"/>
+          <p:cNvPr id="47" name="o543"/>
           <p:cNvSpPr/>
           <p:nvPr/>
         </p:nvSpPr>
@@ -5271,7 +5272,7 @@
       </p:sp>
       <p:sp>
         <p:nvSpPr>
-          <p:cNvPr id="48" name="o547"/>
+          <p:cNvPr id="48" name="o544"/>
           <p:cNvSpPr txBox="1"/>
           <p:nvPr/>
         </p:nvSpPr>
@@ -5313,7 +5314,7 @@
       </p:sp>
       <p:sp>
         <p:nvSpPr>
-          <p:cNvPr id="49" name="o548"/>
+          <p:cNvPr id="49" name="o545"/>
           <p:cNvSpPr/>
           <p:nvPr/>
         </p:nvSpPr>
@@ -5338,7 +5339,7 @@
       </p:sp>
       <p:sp>
         <p:nvSpPr>
-          <p:cNvPr id="50" name="o549"/>
+          <p:cNvPr id="50" name="o546"/>
           <p:cNvSpPr txBox="1"/>
           <p:nvPr/>
         </p:nvSpPr>
@@ -5377,7 +5378,7 @@
       </p:sp>
       <p:sp>
         <p:nvSpPr>
-          <p:cNvPr id="51" name="o550"/>
+          <p:cNvPr id="51" name="o547"/>
           <p:cNvSpPr txBox="1"/>
           <p:nvPr/>
         </p:nvSpPr>
@@ -5416,7 +5417,7 @@
       </p:sp>
       <p:sp>
         <p:nvSpPr>
-          <p:cNvPr id="52" name="o551"/>
+          <p:cNvPr id="52" name="o548"/>
           <p:cNvSpPr txBox="1"/>
           <p:nvPr/>
         </p:nvSpPr>
@@ -5455,7 +5456,7 @@
       </p:sp>
       <p:sp>
         <p:nvSpPr>
-          <p:cNvPr id="53" name="o552"/>
+          <p:cNvPr id="53" name="o549"/>
           <p:cNvSpPr/>
           <p:nvPr/>
         </p:nvSpPr>
@@ -5480,7 +5481,7 @@
       </p:sp>
       <p:sp>
         <p:nvSpPr>
-          <p:cNvPr id="54" name="o553"/>
+          <p:cNvPr id="54" name="o550"/>
           <p:cNvSpPr txBox="1"/>
           <p:nvPr/>
         </p:nvSpPr>
@@ -5519,7 +5520,7 @@
       </p:sp>
       <p:sp>
         <p:nvSpPr>
-          <p:cNvPr id="55" name="o554"/>
+          <p:cNvPr id="55" name="o551"/>
           <p:cNvSpPr txBox="1"/>
           <p:nvPr/>
         </p:nvSpPr>
@@ -5558,7 +5559,7 @@
       </p:sp>
       <p:sp>
         <p:nvSpPr>
-          <p:cNvPr id="56" name="o555"/>
+          <p:cNvPr id="56" name="o552"/>
           <p:cNvSpPr txBox="1"/>
           <p:nvPr/>
         </p:nvSpPr>
@@ -5597,7 +5598,7 @@
       </p:sp>
       <p:sp>
         <p:nvSpPr>
-          <p:cNvPr id="57" name="o556"/>
+          <p:cNvPr id="57" name="o553"/>
           <p:cNvSpPr txBox="1"/>
           <p:nvPr/>
         </p:nvSpPr>
@@ -5636,7 +5637,7 @@
       </p:sp>
       <p:sp>
         <p:nvSpPr>
-          <p:cNvPr id="58" name="o557"/>
+          <p:cNvPr id="58" name="o554"/>
           <p:cNvSpPr/>
           <p:nvPr/>
         </p:nvSpPr>
@@ -5656,7 +5657,7 @@
       </p:sp>
       <p:sp>
         <p:nvSpPr>
-          <p:cNvPr id="59" name="o558"/>
+          <p:cNvPr id="59" name="o555"/>
           <p:cNvSpPr txBox="1"/>
           <p:nvPr/>
         </p:nvSpPr>
@@ -5695,7 +5696,7 @@
       </p:sp>
       <p:sp>
         <p:nvSpPr>
-          <p:cNvPr id="60" name="o559"/>
+          <p:cNvPr id="60" name="o556"/>
           <p:cNvSpPr txBox="1"/>
           <p:nvPr/>
         </p:nvSpPr>
@@ -5734,7 +5735,7 @@
       </p:sp>
       <p:sp>
         <p:nvSpPr>
-          <p:cNvPr id="61" name="o560"/>
+          <p:cNvPr id="61" name="o557"/>
           <p:cNvSpPr txBox="1"/>
           <p:nvPr/>
         </p:nvSpPr>
@@ -5773,7 +5774,7 @@
       </p:sp>
       <p:sp>
         <p:nvSpPr>
-          <p:cNvPr id="62" name="o561"/>
+          <p:cNvPr id="62" name="o558"/>
           <p:cNvSpPr/>
           <p:nvPr/>
         </p:nvSpPr>
@@ -5796,7 +5797,7 @@
       </p:sp>
       <p:sp>
         <p:nvSpPr>
-          <p:cNvPr id="63" name="o562"/>
+          <p:cNvPr id="63" name="o559"/>
           <p:cNvSpPr txBox="1"/>
           <p:nvPr/>
         </p:nvSpPr>
@@ -5835,7 +5836,7 @@
       </p:sp>
       <p:sp>
         <p:nvSpPr>
-          <p:cNvPr id="64" name="o563"/>
+          <p:cNvPr id="64" name="o560"/>
           <p:cNvSpPr txBox="1"/>
           <p:nvPr/>
         </p:nvSpPr>
@@ -5874,7 +5875,7 @@
       </p:sp>
       <p:sp>
         <p:nvSpPr>
-          <p:cNvPr id="65" name="o564"/>
+          <p:cNvPr id="65" name="o561"/>
           <p:cNvSpPr txBox="1"/>
           <p:nvPr/>
         </p:nvSpPr>
@@ -5913,7 +5914,7 @@
       </p:sp>
       <p:sp>
         <p:nvSpPr>
-          <p:cNvPr id="66" name="o565"/>
+          <p:cNvPr id="66" name="o562"/>
           <p:cNvSpPr/>
           <p:nvPr/>
         </p:nvSpPr>
@@ -5936,7 +5937,7 @@
       </p:sp>
       <p:sp>
         <p:nvSpPr>
-          <p:cNvPr id="67" name="o566"/>
+          <p:cNvPr id="67" name="o563"/>
           <p:cNvSpPr txBox="1"/>
           <p:nvPr/>
         </p:nvSpPr>
@@ -5975,7 +5976,7 @@
       </p:sp>
       <p:sp>
         <p:nvSpPr>
-          <p:cNvPr id="68" name="o567"/>
+          <p:cNvPr id="68" name="o564"/>
           <p:cNvSpPr txBox="1"/>
           <p:nvPr/>
         </p:nvSpPr>
@@ -6014,7 +6015,7 @@
       </p:sp>
       <p:sp>
         <p:nvSpPr>
-          <p:cNvPr id="69" name="o568"/>
+          <p:cNvPr id="69" name="o565"/>
           <p:cNvSpPr txBox="1"/>
           <p:nvPr/>
         </p:nvSpPr>
@@ -6053,7 +6054,7 @@
       </p:sp>
       <p:sp>
         <p:nvSpPr>
-          <p:cNvPr id="70" name="o569"/>
+          <p:cNvPr id="70" name="o566"/>
           <p:cNvSpPr/>
           <p:nvPr/>
         </p:nvSpPr>
@@ -6076,7 +6077,7 @@
       </p:sp>
       <p:sp>
         <p:nvSpPr>
-          <p:cNvPr id="71" name="o570"/>
+          <p:cNvPr id="71" name="o567"/>
           <p:cNvSpPr txBox="1"/>
           <p:nvPr/>
         </p:nvSpPr>
@@ -6115,7 +6116,7 @@
       </p:sp>
       <p:sp>
         <p:nvSpPr>
-          <p:cNvPr id="72" name="o571"/>
+          <p:cNvPr id="72" name="o568"/>
           <p:cNvSpPr txBox="1"/>
           <p:nvPr/>
         </p:nvSpPr>
@@ -6154,7 +6155,7 @@
       </p:sp>
       <p:sp>
         <p:nvSpPr>
-          <p:cNvPr id="73" name="o572"/>
+          <p:cNvPr id="73" name="o569"/>
           <p:cNvSpPr txBox="1"/>
           <p:nvPr/>
         </p:nvSpPr>
@@ -6193,7 +6194,7 @@
       </p:sp>
       <p:sp>
         <p:nvSpPr>
-          <p:cNvPr id="74" name="o573"/>
+          <p:cNvPr id="74" name="o570"/>
           <p:cNvSpPr/>
           <p:nvPr/>
         </p:nvSpPr>
@@ -6216,7 +6217,7 @@
       </p:sp>
       <p:sp>
         <p:nvSpPr>
-          <p:cNvPr id="75" name="o574"/>
+          <p:cNvPr id="75" name="o571"/>
           <p:cNvSpPr txBox="1"/>
           <p:nvPr/>
         </p:nvSpPr>
@@ -6255,7 +6256,7 @@
       </p:sp>
       <p:sp>
         <p:nvSpPr>
-          <p:cNvPr id="76" name="o575"/>
+          <p:cNvPr id="76" name="o572"/>
           <p:cNvSpPr txBox="1"/>
           <p:nvPr/>
         </p:nvSpPr>
@@ -6294,7 +6295,7 @@
       </p:sp>
       <p:sp>
         <p:nvSpPr>
-          <p:cNvPr id="77" name="o576"/>
+          <p:cNvPr id="77" name="o573"/>
           <p:cNvSpPr txBox="1"/>
           <p:nvPr/>
         </p:nvSpPr>
@@ -6333,7 +6334,7 @@
       </p:sp>
       <p:sp>
         <p:nvSpPr>
-          <p:cNvPr id="78" name="o577"/>
+          <p:cNvPr id="78" name="o574"/>
           <p:cNvSpPr/>
           <p:nvPr/>
         </p:nvSpPr>
@@ -6356,7 +6357,7 @@
       </p:sp>
       <p:sp>
         <p:nvSpPr>
-          <p:cNvPr id="79" name="o578"/>
+          <p:cNvPr id="79" name="o575"/>
           <p:cNvSpPr txBox="1"/>
           <p:nvPr/>
         </p:nvSpPr>
@@ -6395,7 +6396,7 @@
       </p:sp>
       <p:sp>
         <p:nvSpPr>
-          <p:cNvPr id="80" name="o579"/>
+          <p:cNvPr id="80" name="o576"/>
           <p:cNvSpPr txBox="1"/>
           <p:nvPr/>
         </p:nvSpPr>
@@ -6434,7 +6435,7 @@
       </p:sp>
       <p:sp>
         <p:nvSpPr>
-          <p:cNvPr id="81" name="o580"/>
+          <p:cNvPr id="81" name="o577"/>
           <p:cNvSpPr txBox="1"/>
           <p:nvPr/>
         </p:nvSpPr>
@@ -6473,7 +6474,7 @@
       </p:sp>
       <p:sp>
         <p:nvSpPr>
-          <p:cNvPr id="82" name="o581"/>
+          <p:cNvPr id="82" name="o578"/>
           <p:cNvSpPr/>
           <p:nvPr/>
         </p:nvSpPr>
@@ -6496,7 +6497,7 @@
       </p:sp>
       <p:sp>
         <p:nvSpPr>
-          <p:cNvPr id="83" name="o582"/>
+          <p:cNvPr id="83" name="o579"/>
           <p:cNvSpPr/>
           <p:nvPr/>
         </p:nvSpPr>
@@ -6519,7 +6520,7 @@
       </p:sp>
       <p:sp>
         <p:nvSpPr>
-          <p:cNvPr id="84" name="o583"/>
+          <p:cNvPr id="84" name="o580"/>
           <p:cNvSpPr txBox="1"/>
           <p:nvPr/>
         </p:nvSpPr>
@@ -6583,7 +6584,7 @@
       </p:grpSpPr>
       <p:sp>
         <p:nvSpPr>
-          <p:cNvPr id="2" name="o584"/>
+          <p:cNvPr id="2" name="o581"/>
           <p:cNvSpPr txBox="1"/>
           <p:nvPr/>
         </p:nvSpPr>
@@ -6622,7 +6623,7 @@
       </p:sp>
       <p:sp>
         <p:nvSpPr>
-          <p:cNvPr id="3" name="o585"/>
+          <p:cNvPr id="3" name="o582"/>
           <p:cNvSpPr txBox="1"/>
           <p:nvPr/>
         </p:nvSpPr>
@@ -6664,7 +6665,7 @@
       </p:sp>
       <p:sp>
         <p:nvSpPr>
-          <p:cNvPr id="4" name="o586"/>
+          <p:cNvPr id="4" name="o583"/>
           <p:cNvSpPr txBox="1"/>
           <p:nvPr/>
         </p:nvSpPr>
@@ -6703,7 +6704,7 @@
       </p:sp>
       <p:sp>
         <p:nvSpPr>
-          <p:cNvPr id="5" name="o587"/>
+          <p:cNvPr id="5" name="o584"/>
           <p:cNvSpPr/>
           <p:nvPr/>
         </p:nvSpPr>
@@ -6726,7 +6727,7 @@
       </p:sp>
       <p:sp>
         <p:nvSpPr>
-          <p:cNvPr id="6" name="o588"/>
+          <p:cNvPr id="6" name="o585"/>
           <p:cNvSpPr txBox="1"/>
           <p:nvPr/>
         </p:nvSpPr>
@@ -6765,7 +6766,7 @@
       </p:sp>
       <p:sp>
         <p:nvSpPr>
-          <p:cNvPr id="7" name="o589"/>
+          <p:cNvPr id="7" name="o586"/>
           <p:cNvSpPr txBox="1"/>
           <p:nvPr/>
         </p:nvSpPr>
@@ -6804,7 +6805,7 @@
       </p:sp>
       <p:sp>
         <p:nvSpPr>
-          <p:cNvPr id="8" name="o590"/>
+          <p:cNvPr id="8" name="o587"/>
           <p:cNvSpPr txBox="1"/>
           <p:nvPr/>
         </p:nvSpPr>
@@ -6843,7 +6844,7 @@
       </p:sp>
       <p:sp>
         <p:nvSpPr>
-          <p:cNvPr id="9" name="o591"/>
+          <p:cNvPr id="9" name="o588"/>
           <p:cNvSpPr txBox="1"/>
           <p:nvPr/>
         </p:nvSpPr>
@@ -6882,7 +6883,7 @@
       </p:sp>
       <p:sp>
         <p:nvSpPr>
-          <p:cNvPr id="10" name="o592"/>
+          <p:cNvPr id="10" name="o589"/>
           <p:cNvSpPr/>
           <p:nvPr/>
         </p:nvSpPr>
@@ -6907,7 +6908,7 @@
       </p:sp>
       <p:sp>
         <p:nvSpPr>
-          <p:cNvPr id="11" name="o593"/>
+          <p:cNvPr id="11" name="o590"/>
           <p:cNvSpPr/>
           <p:nvPr/>
         </p:nvSpPr>
@@ -6932,7 +6933,7 @@
       </p:sp>
       <p:sp>
         <p:nvSpPr>
-          <p:cNvPr id="12" name="o594"/>
+          <p:cNvPr id="12" name="o591"/>
           <p:cNvSpPr txBox="1"/>
           <p:nvPr/>
         </p:nvSpPr>
@@ -6971,7 +6972,7 @@
       </p:sp>
       <p:sp>
         <p:nvSpPr>
-          <p:cNvPr id="13" name="o595"/>
+          <p:cNvPr id="13" name="o592"/>
           <p:cNvSpPr txBox="1"/>
           <p:nvPr/>
         </p:nvSpPr>
@@ -7010,7 +7011,7 @@
       </p:sp>
       <p:sp>
         <p:nvSpPr>
-          <p:cNvPr id="14" name="o596"/>
+          <p:cNvPr id="14" name="o593"/>
           <p:cNvSpPr txBox="1"/>
           <p:nvPr/>
         </p:nvSpPr>
@@ -7049,7 +7050,7 @@
       </p:sp>
       <p:sp>
         <p:nvSpPr>
-          <p:cNvPr id="15" name="o597"/>
+          <p:cNvPr id="15" name="o594"/>
           <p:cNvSpPr/>
           <p:nvPr/>
         </p:nvSpPr>
@@ -7073,7 +7074,7 @@
       </p:sp>
       <p:sp>
         <p:nvSpPr>
-          <p:cNvPr id="16" name="o598"/>
+          <p:cNvPr id="16" name="o595"/>
           <p:cNvSpPr/>
           <p:nvPr/>
         </p:nvSpPr>
@@ -7098,7 +7099,7 @@
       </p:sp>
       <p:sp>
         <p:nvSpPr>
-          <p:cNvPr id="17" name="o599"/>
+          <p:cNvPr id="17" name="o596"/>
           <p:cNvSpPr/>
           <p:nvPr/>
         </p:nvSpPr>
@@ -7123,7 +7124,7 @@
       </p:sp>
       <p:sp>
         <p:nvSpPr>
-          <p:cNvPr id="18" name="o600"/>
+          <p:cNvPr id="18" name="o597"/>
           <p:cNvSpPr txBox="1"/>
           <p:nvPr/>
         </p:nvSpPr>
@@ -7162,7 +7163,7 @@
       </p:sp>
       <p:sp>
         <p:nvSpPr>
-          <p:cNvPr id="19" name="o601"/>
+          <p:cNvPr id="19" name="o598"/>
           <p:cNvSpPr txBox="1"/>
           <p:nvPr/>
         </p:nvSpPr>
@@ -7201,7 +7202,7 @@
       </p:sp>
       <p:sp>
         <p:nvSpPr>
-          <p:cNvPr id="20" name="o602"/>
+          <p:cNvPr id="20" name="o599"/>
           <p:cNvSpPr txBox="1"/>
           <p:nvPr/>
         </p:nvSpPr>
@@ -7240,7 +7241,7 @@
       </p:sp>
       <p:sp>
         <p:nvSpPr>
-          <p:cNvPr id="21" name="o603"/>
+          <p:cNvPr id="21" name="o600"/>
           <p:cNvSpPr/>
           <p:nvPr/>
         </p:nvSpPr>
@@ -7264,7 +7265,7 @@
       </p:sp>
       <p:sp>
         <p:nvSpPr>
-          <p:cNvPr id="22" name="o604"/>
+          <p:cNvPr id="22" name="o601"/>
           <p:cNvSpPr/>
           <p:nvPr/>
         </p:nvSpPr>
@@ -7289,7 +7290,7 @@
       </p:sp>
       <p:sp>
         <p:nvSpPr>
-          <p:cNvPr id="23" name="o605"/>
+          <p:cNvPr id="23" name="o602"/>
           <p:cNvSpPr/>
           <p:nvPr/>
         </p:nvSpPr>
@@ -7314,7 +7315,7 @@
       </p:sp>
       <p:sp>
         <p:nvSpPr>
-          <p:cNvPr id="24" name="o606"/>
+          <p:cNvPr id="24" name="o603"/>
           <p:cNvSpPr txBox="1"/>
           <p:nvPr/>
         </p:nvSpPr>
@@ -7353,7 +7354,7 @@
       </p:sp>
       <p:sp>
         <p:nvSpPr>
-          <p:cNvPr id="25" name="o607"/>
+          <p:cNvPr id="25" name="o604"/>
           <p:cNvSpPr txBox="1"/>
           <p:nvPr/>
         </p:nvSpPr>
@@ -7392,7 +7393,7 @@
       </p:sp>
       <p:sp>
         <p:nvSpPr>
-          <p:cNvPr id="26" name="o608"/>
+          <p:cNvPr id="26" name="o605"/>
           <p:cNvSpPr txBox="1"/>
           <p:nvPr/>
         </p:nvSpPr>
@@ -7431,7 +7432,7 @@
       </p:sp>
       <p:sp>
         <p:nvSpPr>
-          <p:cNvPr id="27" name="o609"/>
+          <p:cNvPr id="27" name="o606"/>
           <p:cNvSpPr/>
           <p:nvPr/>
         </p:nvSpPr>
@@ -7455,7 +7456,7 @@
       </p:sp>
       <p:sp>
         <p:nvSpPr>
-          <p:cNvPr id="28" name="o610"/>
+          <p:cNvPr id="28" name="o607"/>
           <p:cNvSpPr/>
           <p:nvPr/>
         </p:nvSpPr>
@@ -7480,7 +7481,7 @@
       </p:sp>
       <p:sp>
         <p:nvSpPr>
-          <p:cNvPr id="29" name="o611"/>
+          <p:cNvPr id="29" name="o608"/>
           <p:cNvSpPr/>
           <p:nvPr/>
         </p:nvSpPr>
@@ -7505,7 +7506,7 @@
       </p:sp>
       <p:sp>
         <p:nvSpPr>
-          <p:cNvPr id="30" name="o612"/>
+          <p:cNvPr id="30" name="o609"/>
           <p:cNvSpPr txBox="1"/>
           <p:nvPr/>
         </p:nvSpPr>
@@ -7544,7 +7545,7 @@
       </p:sp>
       <p:sp>
         <p:nvSpPr>
-          <p:cNvPr id="31" name="o613"/>
+          <p:cNvPr id="31" name="o610"/>
           <p:cNvSpPr txBox="1"/>
           <p:nvPr/>
         </p:nvSpPr>
@@ -7583,7 +7584,7 @@
       </p:sp>
       <p:sp>
         <p:nvSpPr>
-          <p:cNvPr id="32" name="o614"/>
+          <p:cNvPr id="32" name="o611"/>
           <p:cNvSpPr txBox="1"/>
           <p:nvPr/>
         </p:nvSpPr>
@@ -7622,7 +7623,7 @@
       </p:sp>
       <p:sp>
         <p:nvSpPr>
-          <p:cNvPr id="33" name="o615"/>
+          <p:cNvPr id="33" name="o612"/>
           <p:cNvSpPr/>
           <p:nvPr/>
         </p:nvSpPr>
@@ -7642,7 +7643,7 @@
       </p:sp>
       <p:sp>
         <p:nvSpPr>
-          <p:cNvPr id="34" name="o616"/>
+          <p:cNvPr id="34" name="o613"/>
           <p:cNvSpPr txBox="1"/>
           <p:nvPr/>
         </p:nvSpPr>
@@ -7681,7 +7682,7 @@
       </p:sp>
       <p:sp>
         <p:nvSpPr>
-          <p:cNvPr id="35" name="o617"/>
+          <p:cNvPr id="35" name="o614"/>
           <p:cNvSpPr txBox="1"/>
           <p:nvPr/>
         </p:nvSpPr>
@@ -7720,7 +7721,7 @@
       </p:sp>
       <p:sp>
         <p:nvSpPr>
-          <p:cNvPr id="36" name="o618"/>
+          <p:cNvPr id="36" name="o615"/>
           <p:cNvSpPr txBox="1"/>
           <p:nvPr/>
         </p:nvSpPr>
@@ -7759,7 +7760,7 @@
       </p:sp>
       <p:sp>
         <p:nvSpPr>
-          <p:cNvPr id="37" name="o619"/>
+          <p:cNvPr id="37" name="o616"/>
           <p:cNvSpPr txBox="1"/>
           <p:nvPr/>
         </p:nvSpPr>
@@ -7798,7 +7799,7 @@
       </p:sp>
       <p:sp>
         <p:nvSpPr>
-          <p:cNvPr id="38" name="o620"/>
+          <p:cNvPr id="38" name="o617"/>
           <p:cNvSpPr/>
           <p:nvPr/>
         </p:nvSpPr>
@@ -7821,7 +7822,7 @@
       </p:sp>
       <p:sp>
         <p:nvSpPr>
-          <p:cNvPr id="39" name="o621"/>
+          <p:cNvPr id="39" name="o618"/>
           <p:cNvSpPr txBox="1"/>
           <p:nvPr/>
         </p:nvSpPr>
@@ -7860,7 +7861,7 @@
       </p:sp>
       <p:sp>
         <p:nvSpPr>
-          <p:cNvPr id="40" name="o622"/>
+          <p:cNvPr id="40" name="o619"/>
           <p:cNvSpPr txBox="1"/>
           <p:nvPr/>
         </p:nvSpPr>
@@ -7899,7 +7900,7 @@
       </p:sp>
       <p:sp>
         <p:nvSpPr>
-          <p:cNvPr id="41" name="o623"/>
+          <p:cNvPr id="41" name="o620"/>
           <p:cNvSpPr txBox="1"/>
           <p:nvPr/>
         </p:nvSpPr>
@@ -7938,7 +7939,7 @@
       </p:sp>
       <p:sp>
         <p:nvSpPr>
-          <p:cNvPr id="42" name="o624"/>
+          <p:cNvPr id="42" name="o621"/>
           <p:cNvSpPr txBox="1"/>
           <p:nvPr/>
         </p:nvSpPr>
@@ -7977,7 +7978,7 @@
       </p:sp>
       <p:sp>
         <p:nvSpPr>
-          <p:cNvPr id="43" name="o625"/>
+          <p:cNvPr id="43" name="o622"/>
           <p:cNvSpPr/>
           <p:nvPr/>
         </p:nvSpPr>
@@ -8000,7 +8001,7 @@
       </p:sp>
       <p:sp>
         <p:nvSpPr>
-          <p:cNvPr id="44" name="o626"/>
+          <p:cNvPr id="44" name="o623"/>
           <p:cNvSpPr txBox="1"/>
           <p:nvPr/>
         </p:nvSpPr>
@@ -8039,7 +8040,7 @@
       </p:sp>
       <p:sp>
         <p:nvSpPr>
-          <p:cNvPr id="45" name="o627"/>
+          <p:cNvPr id="45" name="o624"/>
           <p:cNvSpPr txBox="1"/>
           <p:nvPr/>
         </p:nvSpPr>
@@ -8078,7 +8079,7 @@
       </p:sp>
       <p:sp>
         <p:nvSpPr>
-          <p:cNvPr id="46" name="o628"/>
+          <p:cNvPr id="46" name="o625"/>
           <p:cNvSpPr txBox="1"/>
           <p:nvPr/>
         </p:nvSpPr>
@@ -8117,7 +8118,7 @@
       </p:sp>
       <p:sp>
         <p:nvSpPr>
-          <p:cNvPr id="47" name="o629"/>
+          <p:cNvPr id="47" name="o626"/>
           <p:cNvSpPr txBox="1"/>
           <p:nvPr/>
         </p:nvSpPr>
@@ -8156,7 +8157,7 @@
       </p:sp>
       <p:sp>
         <p:nvSpPr>
-          <p:cNvPr id="48" name="o630"/>
+          <p:cNvPr id="48" name="o627"/>
           <p:cNvSpPr/>
           <p:nvPr/>
         </p:nvSpPr>
@@ -8179,7 +8180,7 @@
       </p:sp>
       <p:sp>
         <p:nvSpPr>
-          <p:cNvPr id="49" name="o631"/>
+          <p:cNvPr id="49" name="o628"/>
           <p:cNvSpPr txBox="1"/>
           <p:nvPr/>
         </p:nvSpPr>
@@ -8218,7 +8219,7 @@
       </p:sp>
       <p:sp>
         <p:nvSpPr>
-          <p:cNvPr id="50" name="o632"/>
+          <p:cNvPr id="50" name="o629"/>
           <p:cNvSpPr txBox="1"/>
           <p:nvPr/>
         </p:nvSpPr>
@@ -8257,7 +8258,7 @@
       </p:sp>
       <p:sp>
         <p:nvSpPr>
-          <p:cNvPr id="51" name="o633"/>
+          <p:cNvPr id="51" name="o630"/>
           <p:cNvSpPr txBox="1"/>
           <p:nvPr/>
         </p:nvSpPr>
@@ -8296,7 +8297,7 @@
       </p:sp>
       <p:sp>
         <p:nvSpPr>
-          <p:cNvPr id="52" name="o634"/>
+          <p:cNvPr id="52" name="o631"/>
           <p:cNvSpPr txBox="1"/>
           <p:nvPr/>
         </p:nvSpPr>
@@ -8335,7 +8336,7 @@
       </p:sp>
       <p:sp>
         <p:nvSpPr>
-          <p:cNvPr id="53" name="o635"/>
+          <p:cNvPr id="53" name="o632"/>
           <p:cNvSpPr/>
           <p:nvPr/>
         </p:nvSpPr>
@@ -8358,7 +8359,7 @@
       </p:sp>
       <p:sp>
         <p:nvSpPr>
-          <p:cNvPr id="54" name="o636"/>
+          <p:cNvPr id="54" name="o633"/>
           <p:cNvSpPr txBox="1"/>
           <p:nvPr/>
         </p:nvSpPr>
@@ -8397,7 +8398,7 @@
       </p:sp>
       <p:sp>
         <p:nvSpPr>
-          <p:cNvPr id="55" name="o637"/>
+          <p:cNvPr id="55" name="o634"/>
           <p:cNvSpPr txBox="1"/>
           <p:nvPr/>
         </p:nvSpPr>
@@ -8436,7 +8437,7 @@
       </p:sp>
       <p:sp>
         <p:nvSpPr>
-          <p:cNvPr id="56" name="o638"/>
+          <p:cNvPr id="56" name="o635"/>
           <p:cNvSpPr txBox="1"/>
           <p:nvPr/>
         </p:nvSpPr>
@@ -8475,7 +8476,7 @@
       </p:sp>
       <p:sp>
         <p:nvSpPr>
-          <p:cNvPr id="57" name="o639"/>
+          <p:cNvPr id="57" name="o636"/>
           <p:cNvSpPr txBox="1"/>
           <p:nvPr/>
         </p:nvSpPr>
@@ -8514,7 +8515,7 @@
       </p:sp>
       <p:sp>
         <p:nvSpPr>
-          <p:cNvPr id="58" name="o640"/>
+          <p:cNvPr id="58" name="o637"/>
           <p:cNvSpPr/>
           <p:nvPr/>
         </p:nvSpPr>
@@ -8537,7 +8538,7 @@
       </p:sp>
       <p:sp>
         <p:nvSpPr>
-          <p:cNvPr id="59" name="o641"/>
+          <p:cNvPr id="59" name="o638"/>
           <p:cNvSpPr/>
           <p:nvPr/>
         </p:nvSpPr>
@@ -8560,7 +8561,7 @@
       </p:sp>
       <p:sp>
         <p:nvSpPr>
-          <p:cNvPr id="60" name="o642"/>
+          <p:cNvPr id="60" name="o639"/>
           <p:cNvSpPr/>
           <p:nvPr/>
         </p:nvSpPr>
@@ -8585,7 +8586,7 @@
       </p:sp>
       <p:sp>
         <p:nvSpPr>
-          <p:cNvPr id="61" name="o643"/>
+          <p:cNvPr id="61" name="o640"/>
           <p:cNvSpPr txBox="1"/>
           <p:nvPr/>
         </p:nvSpPr>
@@ -8624,7 +8625,7 @@
       </p:sp>
       <p:sp>
         <p:nvSpPr>
-          <p:cNvPr id="62" name="o644"/>
+          <p:cNvPr id="62" name="o641"/>
           <p:cNvSpPr txBox="1"/>
           <p:nvPr/>
         </p:nvSpPr>
@@ -8663,7 +8664,7 @@
       </p:sp>
       <p:sp>
         <p:nvSpPr>
-          <p:cNvPr id="63" name="o645"/>
+          <p:cNvPr id="63" name="o642"/>
           <p:cNvSpPr txBox="1"/>
           <p:nvPr/>
         </p:nvSpPr>
@@ -8702,7 +8703,7 @@
       </p:sp>
       <p:sp>
         <p:nvSpPr>
-          <p:cNvPr id="64" name="o646"/>
+          <p:cNvPr id="64" name="o643"/>
           <p:cNvSpPr/>
           <p:nvPr/>
         </p:nvSpPr>
@@ -8722,7 +8723,7 @@
       </p:sp>
       <p:sp>
         <p:nvSpPr>
-          <p:cNvPr id="65" name="o647"/>
+          <p:cNvPr id="65" name="o644"/>
           <p:cNvSpPr/>
           <p:nvPr/>
         </p:nvSpPr>
@@ -8742,7 +8743,7 @@
       </p:sp>
       <p:sp>
         <p:nvSpPr>
-          <p:cNvPr id="66" name="o648"/>
+          <p:cNvPr id="66" name="o645"/>
           <p:cNvSpPr txBox="1"/>
           <p:nvPr/>
         </p:nvSpPr>
@@ -8869,7 +8870,7 @@
       </p:grpSpPr>
       <p:sp>
         <p:nvSpPr>
-          <p:cNvPr id="2" name="o649"/>
+          <p:cNvPr id="2" name="o646"/>
           <p:cNvSpPr txBox="1"/>
           <p:nvPr/>
         </p:nvSpPr>
@@ -8908,7 +8909,7 @@
       </p:sp>
       <p:sp>
         <p:nvSpPr>
-          <p:cNvPr id="3" name="o650"/>
+          <p:cNvPr id="3" name="o647"/>
           <p:cNvSpPr txBox="1"/>
           <p:nvPr/>
         </p:nvSpPr>
@@ -8950,7 +8951,7 @@
       </p:sp>
       <p:sp>
         <p:nvSpPr>
-          <p:cNvPr id="4" name="o651"/>
+          <p:cNvPr id="4" name="o648"/>
           <p:cNvSpPr txBox="1"/>
           <p:nvPr/>
         </p:nvSpPr>
@@ -8989,7 +8990,7 @@
       </p:sp>
       <p:sp>
         <p:nvSpPr>
-          <p:cNvPr id="5" name="o652"/>
+          <p:cNvPr id="5" name="o649"/>
           <p:cNvSpPr/>
           <p:nvPr/>
         </p:nvSpPr>
@@ -9012,7 +9013,7 @@
       </p:sp>
       <p:sp>
         <p:nvSpPr>
-          <p:cNvPr id="6" name="o653"/>
+          <p:cNvPr id="6" name="o650"/>
           <p:cNvSpPr txBox="1"/>
           <p:nvPr/>
         </p:nvSpPr>
@@ -9051,7 +9052,7 @@
       </p:sp>
       <p:sp>
         <p:nvSpPr>
-          <p:cNvPr id="7" name="o654"/>
+          <p:cNvPr id="7" name="o651"/>
           <p:cNvSpPr txBox="1"/>
           <p:nvPr/>
         </p:nvSpPr>
@@ -9090,7 +9091,7 @@
       </p:sp>
       <p:sp>
         <p:nvSpPr>
-          <p:cNvPr id="8" name="o655"/>
+          <p:cNvPr id="8" name="o652"/>
           <p:cNvSpPr/>
           <p:nvPr/>
         </p:nvSpPr>
@@ -9115,7 +9116,7 @@
       </p:sp>
       <p:sp>
         <p:nvSpPr>
-          <p:cNvPr id="9" name="o656"/>
+          <p:cNvPr id="9" name="o653"/>
           <p:cNvSpPr txBox="1"/>
           <p:nvPr/>
         </p:nvSpPr>
@@ -9154,7 +9155,7 @@
       </p:sp>
       <p:sp>
         <p:nvSpPr>
-          <p:cNvPr id="10" name="o657"/>
+          <p:cNvPr id="10" name="o654"/>
           <p:cNvSpPr txBox="1"/>
           <p:nvPr/>
         </p:nvSpPr>
@@ -9193,7 +9194,7 @@
       </p:sp>
       <p:sp>
         <p:nvSpPr>
-          <p:cNvPr id="11" name="o658"/>
+          <p:cNvPr id="11" name="o655"/>
           <p:cNvSpPr txBox="1"/>
           <p:nvPr/>
         </p:nvSpPr>
@@ -9232,7 +9233,7 @@
       </p:sp>
       <p:sp>
         <p:nvSpPr>
-          <p:cNvPr id="12" name="o659"/>
+          <p:cNvPr id="12" name="o656"/>
           <p:cNvSpPr/>
           <p:nvPr/>
         </p:nvSpPr>
@@ -9257,7 +9258,7 @@
       </p:sp>
       <p:sp>
         <p:nvSpPr>
-          <p:cNvPr id="13" name="o660"/>
+          <p:cNvPr id="13" name="o657"/>
           <p:cNvSpPr/>
           <p:nvPr/>
         </p:nvSpPr>
@@ -9277,7 +9278,7 @@
       </p:sp>
       <p:sp>
         <p:nvSpPr>
-          <p:cNvPr id="14" name="o661"/>
+          <p:cNvPr id="14" name="o658"/>
           <p:cNvSpPr txBox="1"/>
           <p:nvPr/>
         </p:nvSpPr>
@@ -9316,7 +9317,7 @@
       </p:sp>
       <p:sp>
         <p:nvSpPr>
-          <p:cNvPr id="15" name="o662"/>
+          <p:cNvPr id="15" name="o659"/>
           <p:cNvSpPr txBox="1"/>
           <p:nvPr/>
         </p:nvSpPr>
@@ -9355,7 +9356,7 @@
       </p:sp>
       <p:sp>
         <p:nvSpPr>
-          <p:cNvPr id="16" name="o663"/>
+          <p:cNvPr id="16" name="o660"/>
           <p:cNvSpPr txBox="1"/>
           <p:nvPr/>
         </p:nvSpPr>
@@ -9394,7 +9395,7 @@
       </p:sp>
       <p:sp>
         <p:nvSpPr>
-          <p:cNvPr id="17" name="o664"/>
+          <p:cNvPr id="17" name="o661"/>
           <p:cNvSpPr/>
           <p:nvPr/>
         </p:nvSpPr>
@@ -9419,7 +9420,7 @@
       </p:sp>
       <p:sp>
         <p:nvSpPr>
-          <p:cNvPr id="18" name="o665"/>
+          <p:cNvPr id="18" name="o662"/>
           <p:cNvSpPr txBox="1"/>
           <p:nvPr/>
         </p:nvSpPr>
@@ -9458,7 +9459,7 @@
       </p:sp>
       <p:sp>
         <p:nvSpPr>
-          <p:cNvPr id="19" name="o666"/>
+          <p:cNvPr id="19" name="o663"/>
           <p:cNvSpPr txBox="1"/>
           <p:nvPr/>
         </p:nvSpPr>
@@ -9497,7 +9498,7 @@
       </p:sp>
       <p:sp>
         <p:nvSpPr>
-          <p:cNvPr id="20" name="o667"/>
+          <p:cNvPr id="20" name="o664"/>
           <p:cNvSpPr txBox="1"/>
           <p:nvPr/>
         </p:nvSpPr>
@@ -9536,7 +9537,7 @@
       </p:sp>
       <p:sp>
         <p:nvSpPr>
-          <p:cNvPr id="21" name="o668"/>
+          <p:cNvPr id="21" name="o665"/>
           <p:cNvSpPr/>
           <p:nvPr/>
         </p:nvSpPr>
@@ -9556,7 +9557,7 @@
       </p:sp>
       <p:sp>
         <p:nvSpPr>
-          <p:cNvPr id="22" name="o669"/>
+          <p:cNvPr id="22" name="o666"/>
           <p:cNvSpPr txBox="1"/>
           <p:nvPr/>
         </p:nvSpPr>
@@ -9595,7 +9596,7 @@
       </p:sp>
       <p:sp>
         <p:nvSpPr>
-          <p:cNvPr id="23" name="o670"/>
+          <p:cNvPr id="23" name="o667"/>
           <p:cNvSpPr txBox="1"/>
           <p:nvPr/>
         </p:nvSpPr>
@@ -9634,7 +9635,7 @@
       </p:sp>
       <p:sp>
         <p:nvSpPr>
-          <p:cNvPr id="24" name="o671"/>
+          <p:cNvPr id="24" name="o668"/>
           <p:cNvSpPr txBox="1"/>
           <p:nvPr/>
         </p:nvSpPr>
@@ -9673,7 +9674,7 @@
       </p:sp>
       <p:sp>
         <p:nvSpPr>
-          <p:cNvPr id="25" name="o672"/>
+          <p:cNvPr id="25" name="o669"/>
           <p:cNvSpPr txBox="1"/>
           <p:nvPr/>
         </p:nvSpPr>
@@ -9712,7 +9713,7 @@
       </p:sp>
       <p:sp>
         <p:nvSpPr>
-          <p:cNvPr id="26" name="o673"/>
+          <p:cNvPr id="26" name="o670"/>
           <p:cNvSpPr/>
           <p:nvPr/>
         </p:nvSpPr>
@@ -9735,7 +9736,7 @@
       </p:sp>
       <p:sp>
         <p:nvSpPr>
-          <p:cNvPr id="27" name="o674"/>
+          <p:cNvPr id="27" name="o671"/>
           <p:cNvSpPr txBox="1"/>
           <p:nvPr/>
         </p:nvSpPr>
@@ -9774,7 +9775,7 @@
       </p:sp>
       <p:sp>
         <p:nvSpPr>
-          <p:cNvPr id="28" name="o675"/>
+          <p:cNvPr id="28" name="o672"/>
           <p:cNvSpPr txBox="1"/>
           <p:nvPr/>
         </p:nvSpPr>
@@ -9813,7 +9814,7 @@
       </p:sp>
       <p:sp>
         <p:nvSpPr>
-          <p:cNvPr id="29" name="o676"/>
+          <p:cNvPr id="29" name="o673"/>
           <p:cNvSpPr txBox="1"/>
           <p:nvPr/>
         </p:nvSpPr>
@@ -9852,7 +9853,7 @@
       </p:sp>
       <p:sp>
         <p:nvSpPr>
-          <p:cNvPr id="30" name="o677"/>
+          <p:cNvPr id="30" name="o674"/>
           <p:cNvSpPr txBox="1"/>
           <p:nvPr/>
         </p:nvSpPr>
@@ -9891,7 +9892,7 @@
       </p:sp>
       <p:sp>
         <p:nvSpPr>
-          <p:cNvPr id="31" name="o678"/>
+          <p:cNvPr id="31" name="o675"/>
           <p:cNvSpPr/>
           <p:nvPr/>
         </p:nvSpPr>
@@ -9914,7 +9915,7 @@
       </p:sp>
       <p:sp>
         <p:nvSpPr>
-          <p:cNvPr id="32" name="o679"/>
+          <p:cNvPr id="32" name="o676"/>
           <p:cNvSpPr txBox="1"/>
           <p:nvPr/>
         </p:nvSpPr>
@@ -9953,7 +9954,7 @@
       </p:sp>
       <p:sp>
         <p:nvSpPr>
-          <p:cNvPr id="33" name="o680"/>
+          <p:cNvPr id="33" name="o677"/>
           <p:cNvSpPr txBox="1"/>
           <p:nvPr/>
         </p:nvSpPr>
@@ -9992,7 +9993,7 @@
       </p:sp>
       <p:sp>
         <p:nvSpPr>
-          <p:cNvPr id="34" name="o681"/>
+          <p:cNvPr id="34" name="o678"/>
           <p:cNvSpPr txBox="1"/>
           <p:nvPr/>
         </p:nvSpPr>
@@ -10031,7 +10032,7 @@
       </p:sp>
       <p:sp>
         <p:nvSpPr>
-          <p:cNvPr id="35" name="o682"/>
+          <p:cNvPr id="35" name="o679"/>
           <p:cNvSpPr txBox="1"/>
           <p:nvPr/>
         </p:nvSpPr>
@@ -10070,7 +10071,7 @@
       </p:sp>
       <p:sp>
         <p:nvSpPr>
-          <p:cNvPr id="36" name="o683"/>
+          <p:cNvPr id="36" name="o680"/>
           <p:cNvSpPr/>
           <p:nvPr/>
         </p:nvSpPr>
@@ -10093,7 +10094,7 @@
       </p:sp>
       <p:sp>
         <p:nvSpPr>
-          <p:cNvPr id="37" name="o684"/>
+          <p:cNvPr id="37" name="o681"/>
           <p:cNvSpPr txBox="1"/>
           <p:nvPr/>
         </p:nvSpPr>
@@ -10132,7 +10133,7 @@
       </p:sp>
       <p:sp>
         <p:nvSpPr>
-          <p:cNvPr id="38" name="o685"/>
+          <p:cNvPr id="38" name="o682"/>
           <p:cNvSpPr txBox="1"/>
           <p:nvPr/>
         </p:nvSpPr>
@@ -10171,7 +10172,7 @@
       </p:sp>
       <p:sp>
         <p:nvSpPr>
-          <p:cNvPr id="39" name="o686"/>
+          <p:cNvPr id="39" name="o683"/>
           <p:cNvSpPr txBox="1"/>
           <p:nvPr/>
         </p:nvSpPr>
@@ -10210,7 +10211,7 @@
       </p:sp>
       <p:sp>
         <p:nvSpPr>
-          <p:cNvPr id="40" name="o687"/>
+          <p:cNvPr id="40" name="o684"/>
           <p:cNvSpPr txBox="1"/>
           <p:nvPr/>
         </p:nvSpPr>
@@ -10249,7 +10250,7 @@
       </p:sp>
       <p:sp>
         <p:nvSpPr>
-          <p:cNvPr id="41" name="o688"/>
+          <p:cNvPr id="41" name="o685"/>
           <p:cNvSpPr/>
           <p:nvPr/>
         </p:nvSpPr>
@@ -10272,7 +10273,7 @@
       </p:sp>
       <p:sp>
         <p:nvSpPr>
-          <p:cNvPr id="42" name="o689"/>
+          <p:cNvPr id="42" name="o686"/>
           <p:cNvSpPr txBox="1"/>
           <p:nvPr/>
         </p:nvSpPr>
@@ -10311,7 +10312,7 @@
       </p:sp>
       <p:sp>
         <p:nvSpPr>
-          <p:cNvPr id="43" name="o690"/>
+          <p:cNvPr id="43" name="o687"/>
           <p:cNvSpPr txBox="1"/>
           <p:nvPr/>
         </p:nvSpPr>
@@ -10350,7 +10351,7 @@
       </p:sp>
       <p:sp>
         <p:nvSpPr>
-          <p:cNvPr id="44" name="o691"/>
+          <p:cNvPr id="44" name="o688"/>
           <p:cNvSpPr txBox="1"/>
           <p:nvPr/>
         </p:nvSpPr>
@@ -10389,7 +10390,7 @@
       </p:sp>
       <p:sp>
         <p:nvSpPr>
-          <p:cNvPr id="45" name="o692"/>
+          <p:cNvPr id="45" name="o689"/>
           <p:cNvSpPr txBox="1"/>
           <p:nvPr/>
         </p:nvSpPr>
@@ -10428,7 +10429,7 @@
       </p:sp>
       <p:sp>
         <p:nvSpPr>
-          <p:cNvPr id="46" name="o693"/>
+          <p:cNvPr id="46" name="o690"/>
           <p:cNvSpPr/>
           <p:nvPr/>
         </p:nvSpPr>
@@ -10451,7 +10452,7 @@
       </p:sp>
       <p:sp>
         <p:nvSpPr>
-          <p:cNvPr id="47" name="o694"/>
+          <p:cNvPr id="47" name="o691"/>
           <p:cNvSpPr/>
           <p:nvPr/>
         </p:nvSpPr>
@@ -10474,7 +10475,7 @@
       </p:sp>
       <p:sp>
         <p:nvSpPr>
-          <p:cNvPr id="48" name="o695"/>
+          <p:cNvPr id="48" name="o692"/>
           <p:cNvSpPr/>
           <p:nvPr/>
         </p:nvSpPr>
@@ -10494,7 +10495,7 @@
       </p:sp>
       <p:sp>
         <p:nvSpPr>
-          <p:cNvPr id="49" name="o696"/>
+          <p:cNvPr id="49" name="o693"/>
           <p:cNvSpPr/>
           <p:nvPr/>
         </p:nvSpPr>
@@ -10514,7 +10515,7 @@
       </p:sp>
       <p:sp>
         <p:nvSpPr>
-          <p:cNvPr id="50" name="o697"/>
+          <p:cNvPr id="50" name="o694"/>
           <p:cNvSpPr txBox="1"/>
           <p:nvPr/>
         </p:nvSpPr>
@@ -10553,7 +10554,7 @@
       </p:sp>
       <p:sp>
         <p:nvSpPr>
-          <p:cNvPr id="51" name="o698"/>
+          <p:cNvPr id="51" name="o695"/>
           <p:cNvSpPr txBox="1"/>
           <p:nvPr/>
         </p:nvSpPr>
@@ -10615,7 +10616,7 @@
       </p:sp>
       <p:sp>
         <p:nvSpPr>
-          <p:cNvPr id="52" name="o699"/>
+          <p:cNvPr id="52" name="o696"/>
           <p:cNvSpPr txBox="1"/>
           <p:nvPr/>
         </p:nvSpPr>
@@ -10679,7 +10680,7 @@
       </p:grpSpPr>
       <p:sp>
         <p:nvSpPr>
-          <p:cNvPr id="2" name="o700"/>
+          <p:cNvPr id="2" name="o697"/>
           <p:cNvSpPr txBox="1"/>
           <p:nvPr/>
         </p:nvSpPr>
@@ -10718,7 +10719,7 @@
       </p:sp>
       <p:sp>
         <p:nvSpPr>
-          <p:cNvPr id="3" name="o701"/>
+          <p:cNvPr id="3" name="o698"/>
           <p:cNvSpPr txBox="1"/>
           <p:nvPr/>
         </p:nvSpPr>
@@ -10757,7 +10758,7 @@
       </p:sp>
       <p:sp>
         <p:nvSpPr>
-          <p:cNvPr id="4" name="o702"/>
+          <p:cNvPr id="4" name="o699"/>
           <p:cNvSpPr txBox="1"/>
           <p:nvPr/>
         </p:nvSpPr>
@@ -10796,7 +10797,7 @@
       </p:sp>
       <p:sp>
         <p:nvSpPr>
-          <p:cNvPr id="5" name="o703"/>
+          <p:cNvPr id="5" name="o700"/>
           <p:cNvSpPr/>
           <p:nvPr/>
         </p:nvSpPr>
@@ -10819,7 +10820,7 @@
       </p:sp>
       <p:sp>
         <p:nvSpPr>
-          <p:cNvPr id="6" name="o704"/>
+          <p:cNvPr id="6" name="o701"/>
           <p:cNvSpPr txBox="1"/>
           <p:nvPr/>
         </p:nvSpPr>
@@ -10858,7 +10859,7 @@
       </p:sp>
       <p:sp>
         <p:nvSpPr>
-          <p:cNvPr id="7" name="o705"/>
+          <p:cNvPr id="7" name="o702"/>
           <p:cNvSpPr txBox="1"/>
           <p:nvPr/>
         </p:nvSpPr>
@@ -10897,7 +10898,7 @@
       </p:sp>
       <p:sp>
         <p:nvSpPr>
-          <p:cNvPr id="8" name="o706"/>
+          <p:cNvPr id="8" name="o703"/>
           <p:cNvSpPr/>
           <p:nvPr/>
         </p:nvSpPr>
@@ -10920,7 +10921,7 @@
       </p:sp>
       <p:sp>
         <p:nvSpPr>
-          <p:cNvPr id="9" name="o707"/>
+          <p:cNvPr id="9" name="o704"/>
           <p:cNvSpPr txBox="1"/>
           <p:nvPr/>
         </p:nvSpPr>
@@ -10959,7 +10960,7 @@
       </p:sp>
       <p:sp>
         <p:nvSpPr>
-          <p:cNvPr id="10" name="o708"/>
+          <p:cNvPr id="10" name="o705"/>
           <p:cNvSpPr txBox="1"/>
           <p:nvPr/>
         </p:nvSpPr>
@@ -10998,7 +10999,7 @@
       </p:sp>
       <p:sp>
         <p:nvSpPr>
-          <p:cNvPr id="11" name="o709"/>
+          <p:cNvPr id="11" name="o706"/>
           <p:cNvSpPr/>
           <p:nvPr/>
         </p:nvSpPr>
@@ -11021,7 +11022,7 @@
       </p:sp>
       <p:sp>
         <p:nvSpPr>
-          <p:cNvPr id="12" name="o710"/>
+          <p:cNvPr id="12" name="o707"/>
           <p:cNvSpPr txBox="1"/>
           <p:nvPr/>
         </p:nvSpPr>
@@ -11060,7 +11061,7 @@
       </p:sp>
       <p:sp>
         <p:nvSpPr>
-          <p:cNvPr id="13" name="o711"/>
+          <p:cNvPr id="13" name="o708"/>
           <p:cNvSpPr txBox="1"/>
           <p:nvPr/>
         </p:nvSpPr>
@@ -11099,7 +11100,7 @@
       </p:sp>
       <p:sp>
         <p:nvSpPr>
-          <p:cNvPr id="14" name="o712"/>
+          <p:cNvPr id="14" name="o709"/>
           <p:cNvSpPr/>
           <p:nvPr/>
         </p:nvSpPr>
@@ -11122,7 +11123,7 @@
       </p:sp>
       <p:sp>
         <p:nvSpPr>
-          <p:cNvPr id="15" name="o713"/>
+          <p:cNvPr id="15" name="o710"/>
           <p:cNvSpPr/>
           <p:nvPr/>
         </p:nvSpPr>
@@ -11145,7 +11146,7 @@
       </p:sp>
       <p:sp>
         <p:nvSpPr>
-          <p:cNvPr id="16" name="o714"/>
+          <p:cNvPr id="16" name="o711"/>
           <p:cNvSpPr txBox="1"/>
           <p:nvPr/>
         </p:nvSpPr>
@@ -12615,7 +12616,7 @@
                 <a:ea typeface="Pretendard" pitchFamily="34" charset="-122"/>
                 <a:cs typeface="Pretendard" pitchFamily="34" charset="-120"/>
               </a:rPr>
-              <a:t>팀 구성과 1–10월 활동 일정</a:t>
+              <a:t>팀 구성 · 1–10월 활동 일정</a:t>
             </a:r>
             <a:endParaRPr lang="en-US" sz="1400" dirty="0"/>
           </a:p>
@@ -12677,7 +12678,7 @@
                 <a:ea typeface="IBM Plex Mono" pitchFamily="34" charset="-122"/>
                 <a:cs typeface="IBM Plex Mono" pitchFamily="34" charset="-120"/>
               </a:rPr>
-              <a:t>Source: QI 활동 계획서(2026.05) · 최종보고서(2026.07)</a:t>
+              <a:t>Source: QI 활동 계획서(2026.05) · Do/Check/Act 보고서(2026.07)</a:t>
             </a:r>
             <a:endParaRPr lang="en-US" sz="800" dirty="0"/>
           </a:p>
@@ -12770,7 +12771,7 @@
         <p:spPr>
           <a:xfrm>
             <a:off x="609600" y="2057400"/>
-            <a:ext cx="3535680" cy="914400"/>
+            <a:ext cx="3535680" cy="952500"/>
           </a:xfrm>
           <a:prstGeom prst="rect">
             <a:avLst/>
@@ -12789,13 +12790,77 @@
       <p:sp>
         <p:nvSpPr>
           <p:cNvPr id="10" name="o67"/>
-          <p:cNvSpPr txBox="1"/>
-          <p:nvPr/>
-        </p:nvSpPr>
-        <p:spPr>
-          <a:xfrm>
-            <a:off x="819150" y="2190750"/>
-            <a:ext cx="381000" cy="152400"/>
+          <p:cNvSpPr/>
+          <p:nvPr/>
+        </p:nvSpPr>
+        <p:spPr>
+          <a:xfrm>
+            <a:off x="819150" y="2266950"/>
+            <a:ext cx="533400" cy="533400"/>
+          </a:xfrm>
+          <a:prstGeom prst="ellipse">
+            <a:avLst/>
+          </a:prstGeom>
+          <a:solidFill>
+            <a:srgbClr val="FFFFFF"/>
+          </a:solidFill>
+          <a:ln w="15875">
+            <a:solidFill>
+              <a:srgbClr val="177B57"/>
+            </a:solidFill>
+            <a:prstDash val="solid"/>
+          </a:ln>
+        </p:spPr>
+      </p:sp>
+      <p:sp>
+        <p:nvSpPr>
+          <p:cNvPr id="11" name="o68"/>
+          <p:cNvSpPr txBox="1"/>
+          <p:nvPr/>
+        </p:nvSpPr>
+        <p:spPr>
+          <a:xfrm>
+            <a:off x="819150" y="2266950"/>
+            <a:ext cx="533400" cy="533400"/>
+          </a:xfrm>
+          <a:prstGeom prst="rect">
+            <a:avLst/>
+          </a:prstGeom>
+          <a:noFill/>
+          <a:ln/>
+        </p:spPr>
+        <p:txBody>
+          <a:bodyPr wrap="square" lIns="0" tIns="0" rIns="0" bIns="0" rtlCol="0" anchor="ctr"/>
+          <a:lstStyle/>
+          <a:p>
+            <a:pPr algn="ctr" indent="0" marL="0">
+              <a:buNone/>
+            </a:pPr>
+            <a:r>
+              <a:rPr lang="en-US" sz="1800" b="1" dirty="0">
+                <a:solidFill>
+                  <a:srgbClr val="177B57"/>
+                </a:solidFill>
+                <a:latin typeface="Pretendard" pitchFamily="34" charset="0"/>
+                <a:ea typeface="Pretendard" pitchFamily="34" charset="-122"/>
+                <a:cs typeface="Pretendard" pitchFamily="34" charset="-120"/>
+              </a:rPr>
+              <a:t>김</a:t>
+            </a:r>
+            <a:endParaRPr lang="en-US" sz="1800" dirty="0"/>
+          </a:p>
+        </p:txBody>
+      </p:sp>
+      <p:sp>
+        <p:nvSpPr>
+          <p:cNvPr id="12" name="o69"/>
+          <p:cNvSpPr txBox="1"/>
+          <p:nvPr/>
+        </p:nvSpPr>
+        <p:spPr>
+          <a:xfrm>
+            <a:off x="1524000" y="2247900"/>
+            <a:ext cx="2430780" cy="228600"/>
           </a:xfrm>
           <a:prstGeom prst="rect">
             <a:avLst/>
@@ -12811,30 +12876,69 @@
               <a:buNone/>
             </a:pPr>
             <a:r>
-              <a:rPr lang="en-US" sz="1000" b="1" dirty="0">
+              <a:rPr lang="en-US" sz="1700" b="1" dirty="0">
+                <a:solidFill>
+                  <a:srgbClr val="1A1A1A"/>
+                </a:solidFill>
+                <a:latin typeface="Pretendard" pitchFamily="34" charset="0"/>
+                <a:ea typeface="Pretendard" pitchFamily="34" charset="-122"/>
+                <a:cs typeface="Pretendard" pitchFamily="34" charset="-120"/>
+              </a:rPr>
+              <a:t>김광현</a:t>
+            </a:r>
+            <a:endParaRPr lang="en-US" sz="1700" dirty="0"/>
+          </a:p>
+        </p:txBody>
+      </p:sp>
+      <p:sp>
+        <p:nvSpPr>
+          <p:cNvPr id="13" name="o70"/>
+          <p:cNvSpPr txBox="1"/>
+          <p:nvPr/>
+        </p:nvSpPr>
+        <p:spPr>
+          <a:xfrm>
+            <a:off x="1524000" y="2495550"/>
+            <a:ext cx="2430780" cy="171450"/>
+          </a:xfrm>
+          <a:prstGeom prst="rect">
+            <a:avLst/>
+          </a:prstGeom>
+          <a:noFill/>
+          <a:ln/>
+        </p:spPr>
+        <p:txBody>
+          <a:bodyPr wrap="square" lIns="0" tIns="0" rIns="0" bIns="0" rtlCol="0" anchor="t"/>
+          <a:lstStyle/>
+          <a:p>
+            <a:pPr indent="0" marL="0">
+              <a:buNone/>
+            </a:pPr>
+            <a:r>
+              <a:rPr lang="en-US" sz="1100" b="1" dirty="0">
                 <a:solidFill>
                   <a:srgbClr val="177B57"/>
                 </a:solidFill>
-                <a:latin typeface="IBM Plex Mono" pitchFamily="34" charset="0"/>
-                <a:ea typeface="IBM Plex Mono" pitchFamily="34" charset="-122"/>
-                <a:cs typeface="IBM Plex Mono" pitchFamily="34" charset="-120"/>
-              </a:rPr>
-              <a:t>01</a:t>
-            </a:r>
-            <a:endParaRPr lang="en-US" sz="1000" dirty="0"/>
-          </a:p>
-        </p:txBody>
-      </p:sp>
-      <p:sp>
-        <p:nvSpPr>
-          <p:cNvPr id="11" name="o68"/>
-          <p:cNvSpPr txBox="1"/>
-          <p:nvPr/>
-        </p:nvSpPr>
-        <p:spPr>
-          <a:xfrm>
-            <a:off x="819150" y="2381250"/>
-            <a:ext cx="1524000" cy="247650"/>
+                <a:latin typeface="Pretendard" pitchFamily="34" charset="0"/>
+                <a:ea typeface="Pretendard" pitchFamily="34" charset="-122"/>
+                <a:cs typeface="Pretendard" pitchFamily="34" charset="-120"/>
+              </a:rPr>
+              <a:t>팀장</a:t>
+            </a:r>
+            <a:endParaRPr lang="en-US" sz="1100" dirty="0"/>
+          </a:p>
+        </p:txBody>
+      </p:sp>
+      <p:sp>
+        <p:nvSpPr>
+          <p:cNvPr id="14" name="o71"/>
+          <p:cNvSpPr txBox="1"/>
+          <p:nvPr/>
+        </p:nvSpPr>
+        <p:spPr>
+          <a:xfrm>
+            <a:off x="1524000" y="2686050"/>
+            <a:ext cx="2430780" cy="171450"/>
           </a:xfrm>
           <a:prstGeom prst="rect">
             <a:avLst/>
@@ -12850,46 +12954,7 @@
               <a:buNone/>
             </a:pPr>
             <a:r>
-              <a:rPr lang="en-US" sz="1800" b="1" dirty="0">
-                <a:solidFill>
-                  <a:srgbClr val="1A1A1A"/>
-                </a:solidFill>
-                <a:latin typeface="Pretendard" pitchFamily="34" charset="0"/>
-                <a:ea typeface="Pretendard" pitchFamily="34" charset="-122"/>
-                <a:cs typeface="Pretendard" pitchFamily="34" charset="-120"/>
-              </a:rPr>
-              <a:t>김광현</a:t>
-            </a:r>
-            <a:endParaRPr lang="en-US" sz="1800" dirty="0"/>
-          </a:p>
-        </p:txBody>
-      </p:sp>
-      <p:sp>
-        <p:nvSpPr>
-          <p:cNvPr id="12" name="o69"/>
-          <p:cNvSpPr txBox="1"/>
-          <p:nvPr/>
-        </p:nvSpPr>
-        <p:spPr>
-          <a:xfrm>
-            <a:off x="2038350" y="2419350"/>
-            <a:ext cx="1916430" cy="190500"/>
-          </a:xfrm>
-          <a:prstGeom prst="rect">
-            <a:avLst/>
-          </a:prstGeom>
-          <a:noFill/>
-          <a:ln/>
-        </p:spPr>
-        <p:txBody>
-          <a:bodyPr wrap="square" lIns="0" tIns="0" rIns="0" bIns="0" rtlCol="0" anchor="t"/>
-          <a:lstStyle/>
-          <a:p>
-            <a:pPr indent="0" marL="0">
-              <a:buNone/>
-            </a:pPr>
-            <a:r>
-              <a:rPr lang="en-US" sz="1100" b="1" dirty="0">
+              <a:rPr lang="en-US" sz="1100" dirty="0">
                 <a:solidFill>
                   <a:srgbClr val="5B636E"/>
                 </a:solidFill>
@@ -12897,7 +12962,7 @@
                 <a:ea typeface="Pretendard" pitchFamily="34" charset="-122"/>
                 <a:cs typeface="Pretendard" pitchFamily="34" charset="-120"/>
               </a:rPr>
-              <a:t>팀장</a:t>
+              <a:t>활동 총괄</a:t>
             </a:r>
             <a:endParaRPr lang="en-US" sz="1100" dirty="0"/>
           </a:p>
@@ -12905,53 +12970,14 @@
       </p:sp>
       <p:sp>
         <p:nvSpPr>
-          <p:cNvPr id="13" name="o70"/>
-          <p:cNvSpPr txBox="1"/>
-          <p:nvPr/>
-        </p:nvSpPr>
-        <p:spPr>
-          <a:xfrm>
-            <a:off x="819150" y="2686050"/>
-            <a:ext cx="3116580" cy="190500"/>
-          </a:xfrm>
-          <a:prstGeom prst="rect">
-            <a:avLst/>
-          </a:prstGeom>
-          <a:noFill/>
-          <a:ln/>
-        </p:spPr>
-        <p:txBody>
-          <a:bodyPr wrap="square" lIns="0" tIns="0" rIns="0" bIns="0" rtlCol="0" anchor="t"/>
-          <a:lstStyle/>
-          <a:p>
-            <a:pPr indent="0" marL="0">
-              <a:buNone/>
-            </a:pPr>
-            <a:r>
-              <a:rPr lang="en-US" sz="1200" dirty="0">
-                <a:solidFill>
-                  <a:srgbClr val="5B636E"/>
-                </a:solidFill>
-                <a:latin typeface="Pretendard" pitchFamily="34" charset="0"/>
-                <a:ea typeface="Pretendard" pitchFamily="34" charset="-122"/>
-                <a:cs typeface="Pretendard" pitchFamily="34" charset="-120"/>
-              </a:rPr>
-              <a:t>활동 총괄 · 결재</a:t>
-            </a:r>
-            <a:endParaRPr lang="en-US" sz="1200" dirty="0"/>
-          </a:p>
-        </p:txBody>
-      </p:sp>
-      <p:sp>
-        <p:nvSpPr>
-          <p:cNvPr id="14" name="o71"/>
+          <p:cNvPr id="15" name="o72"/>
           <p:cNvSpPr/>
           <p:nvPr/>
         </p:nvSpPr>
         <p:spPr>
           <a:xfrm>
             <a:off x="4328160" y="2057400"/>
-            <a:ext cx="3535680" cy="914400"/>
+            <a:ext cx="3535680" cy="952500"/>
           </a:xfrm>
           <a:prstGeom prst="rect">
             <a:avLst/>
@@ -12969,34 +12995,78 @@
       </p:sp>
       <p:sp>
         <p:nvSpPr>
-          <p:cNvPr id="15" name="o72"/>
+          <p:cNvPr id="16" name="o73"/>
           <p:cNvSpPr/>
           <p:nvPr/>
         </p:nvSpPr>
         <p:spPr>
           <a:xfrm>
-            <a:off x="4328160" y="2057400"/>
-            <a:ext cx="91440" cy="914400"/>
-          </a:xfrm>
-          <a:prstGeom prst="rect">
+            <a:off x="4537710" y="2266950"/>
+            <a:ext cx="533400" cy="533400"/>
+          </a:xfrm>
+          <a:prstGeom prst="ellipse">
             <a:avLst/>
           </a:prstGeom>
           <a:solidFill>
-            <a:srgbClr val="177B57"/>
+            <a:srgbClr val="FFFFFF"/>
           </a:solidFill>
-          <a:ln/>
-        </p:spPr>
-      </p:sp>
-      <p:sp>
-        <p:nvSpPr>
-          <p:cNvPr id="16" name="o73"/>
-          <p:cNvSpPr txBox="1"/>
-          <p:nvPr/>
-        </p:nvSpPr>
-        <p:spPr>
-          <a:xfrm>
-            <a:off x="4537710" y="2190750"/>
-            <a:ext cx="381000" cy="152400"/>
+          <a:ln w="15875">
+            <a:solidFill>
+              <a:srgbClr val="177B57"/>
+            </a:solidFill>
+            <a:prstDash val="solid"/>
+          </a:ln>
+        </p:spPr>
+      </p:sp>
+      <p:sp>
+        <p:nvSpPr>
+          <p:cNvPr id="17" name="o74"/>
+          <p:cNvSpPr txBox="1"/>
+          <p:nvPr/>
+        </p:nvSpPr>
+        <p:spPr>
+          <a:xfrm>
+            <a:off x="4537710" y="2266950"/>
+            <a:ext cx="533400" cy="533400"/>
+          </a:xfrm>
+          <a:prstGeom prst="rect">
+            <a:avLst/>
+          </a:prstGeom>
+          <a:noFill/>
+          <a:ln/>
+        </p:spPr>
+        <p:txBody>
+          <a:bodyPr wrap="square" lIns="0" tIns="0" rIns="0" bIns="0" rtlCol="0" anchor="ctr"/>
+          <a:lstStyle/>
+          <a:p>
+            <a:pPr algn="ctr" indent="0" marL="0">
+              <a:buNone/>
+            </a:pPr>
+            <a:r>
+              <a:rPr lang="en-US" sz="1800" b="1" dirty="0">
+                <a:solidFill>
+                  <a:srgbClr val="177B57"/>
+                </a:solidFill>
+                <a:latin typeface="Pretendard" pitchFamily="34" charset="0"/>
+                <a:ea typeface="Pretendard" pitchFamily="34" charset="-122"/>
+                <a:cs typeface="Pretendard" pitchFamily="34" charset="-120"/>
+              </a:rPr>
+              <a:t>장</a:t>
+            </a:r>
+            <a:endParaRPr lang="en-US" sz="1800" dirty="0"/>
+          </a:p>
+        </p:txBody>
+      </p:sp>
+      <p:sp>
+        <p:nvSpPr>
+          <p:cNvPr id="18" name="o75"/>
+          <p:cNvSpPr txBox="1"/>
+          <p:nvPr/>
+        </p:nvSpPr>
+        <p:spPr>
+          <a:xfrm>
+            <a:off x="5242560" y="2247900"/>
+            <a:ext cx="2430780" cy="228600"/>
           </a:xfrm>
           <a:prstGeom prst="rect">
             <a:avLst/>
@@ -13012,30 +13082,69 @@
               <a:buNone/>
             </a:pPr>
             <a:r>
-              <a:rPr lang="en-US" sz="1000" b="1" dirty="0">
+              <a:rPr lang="en-US" sz="1700" b="1" dirty="0">
+                <a:solidFill>
+                  <a:srgbClr val="1A1A1A"/>
+                </a:solidFill>
+                <a:latin typeface="Pretendard" pitchFamily="34" charset="0"/>
+                <a:ea typeface="Pretendard" pitchFamily="34" charset="-122"/>
+                <a:cs typeface="Pretendard" pitchFamily="34" charset="-120"/>
+              </a:rPr>
+              <a:t>장은선</a:t>
+            </a:r>
+            <a:endParaRPr lang="en-US" sz="1700" dirty="0"/>
+          </a:p>
+        </p:txBody>
+      </p:sp>
+      <p:sp>
+        <p:nvSpPr>
+          <p:cNvPr id="19" name="o76"/>
+          <p:cNvSpPr txBox="1"/>
+          <p:nvPr/>
+        </p:nvSpPr>
+        <p:spPr>
+          <a:xfrm>
+            <a:off x="5242560" y="2495550"/>
+            <a:ext cx="2430780" cy="171450"/>
+          </a:xfrm>
+          <a:prstGeom prst="rect">
+            <a:avLst/>
+          </a:prstGeom>
+          <a:noFill/>
+          <a:ln/>
+        </p:spPr>
+        <p:txBody>
+          <a:bodyPr wrap="square" lIns="0" tIns="0" rIns="0" bIns="0" rtlCol="0" anchor="t"/>
+          <a:lstStyle/>
+          <a:p>
+            <a:pPr indent="0" marL="0">
+              <a:buNone/>
+            </a:pPr>
+            <a:r>
+              <a:rPr lang="en-US" sz="1100" b="1" dirty="0">
                 <a:solidFill>
                   <a:srgbClr val="177B57"/>
                 </a:solidFill>
-                <a:latin typeface="IBM Plex Mono" pitchFamily="34" charset="0"/>
-                <a:ea typeface="IBM Plex Mono" pitchFamily="34" charset="-122"/>
-                <a:cs typeface="IBM Plex Mono" pitchFamily="34" charset="-120"/>
-              </a:rPr>
-              <a:t>02</a:t>
-            </a:r>
-            <a:endParaRPr lang="en-US" sz="1000" dirty="0"/>
-          </a:p>
-        </p:txBody>
-      </p:sp>
-      <p:sp>
-        <p:nvSpPr>
-          <p:cNvPr id="17" name="o74"/>
-          <p:cNvSpPr txBox="1"/>
-          <p:nvPr/>
-        </p:nvSpPr>
-        <p:spPr>
-          <a:xfrm>
-            <a:off x="4537710" y="2381250"/>
-            <a:ext cx="1524000" cy="247650"/>
+                <a:latin typeface="Pretendard" pitchFamily="34" charset="0"/>
+                <a:ea typeface="Pretendard" pitchFamily="34" charset="-122"/>
+                <a:cs typeface="Pretendard" pitchFamily="34" charset="-120"/>
+              </a:rPr>
+              <a:t>팀원 · 보건관리자</a:t>
+            </a:r>
+            <a:endParaRPr lang="en-US" sz="1100" dirty="0"/>
+          </a:p>
+        </p:txBody>
+      </p:sp>
+      <p:sp>
+        <p:nvSpPr>
+          <p:cNvPr id="20" name="o77"/>
+          <p:cNvSpPr txBox="1"/>
+          <p:nvPr/>
+        </p:nvSpPr>
+        <p:spPr>
+          <a:xfrm>
+            <a:off x="5242560" y="2686050"/>
+            <a:ext cx="2430780" cy="171450"/>
           </a:xfrm>
           <a:prstGeom prst="rect">
             <a:avLst/>
@@ -13051,46 +13160,7 @@
               <a:buNone/>
             </a:pPr>
             <a:r>
-              <a:rPr lang="en-US" sz="1800" b="1" dirty="0">
-                <a:solidFill>
-                  <a:srgbClr val="1A1A1A"/>
-                </a:solidFill>
-                <a:latin typeface="Pretendard" pitchFamily="34" charset="0"/>
-                <a:ea typeface="Pretendard" pitchFamily="34" charset="-122"/>
-                <a:cs typeface="Pretendard" pitchFamily="34" charset="-120"/>
-              </a:rPr>
-              <a:t>장은선</a:t>
-            </a:r>
-            <a:endParaRPr lang="en-US" sz="1800" dirty="0"/>
-          </a:p>
-        </p:txBody>
-      </p:sp>
-      <p:sp>
-        <p:nvSpPr>
-          <p:cNvPr id="18" name="o75"/>
-          <p:cNvSpPr txBox="1"/>
-          <p:nvPr/>
-        </p:nvSpPr>
-        <p:spPr>
-          <a:xfrm>
-            <a:off x="5756910" y="2419350"/>
-            <a:ext cx="1916430" cy="190500"/>
-          </a:xfrm>
-          <a:prstGeom prst="rect">
-            <a:avLst/>
-          </a:prstGeom>
-          <a:noFill/>
-          <a:ln/>
-        </p:spPr>
-        <p:txBody>
-          <a:bodyPr wrap="square" lIns="0" tIns="0" rIns="0" bIns="0" rtlCol="0" anchor="t"/>
-          <a:lstStyle/>
-          <a:p>
-            <a:pPr indent="0" marL="0">
-              <a:buNone/>
-            </a:pPr>
-            <a:r>
-              <a:rPr lang="en-US" sz="1100" b="1" dirty="0">
+              <a:rPr lang="en-US" sz="1100" dirty="0">
                 <a:solidFill>
                   <a:srgbClr val="5B636E"/>
                 </a:solidFill>
@@ -13098,7 +13168,7 @@
                 <a:ea typeface="Pretendard" pitchFamily="34" charset="-122"/>
                 <a:cs typeface="Pretendard" pitchFamily="34" charset="-120"/>
               </a:rPr>
-              <a:t>팀원 · 보건관리자</a:t>
+              <a:t>플랫폼 기획 · 직접 개발</a:t>
             </a:r>
             <a:endParaRPr lang="en-US" sz="1100" dirty="0"/>
           </a:p>
@@ -13106,53 +13176,14 @@
       </p:sp>
       <p:sp>
         <p:nvSpPr>
-          <p:cNvPr id="19" name="o76"/>
-          <p:cNvSpPr txBox="1"/>
-          <p:nvPr/>
-        </p:nvSpPr>
-        <p:spPr>
-          <a:xfrm>
-            <a:off x="4537710" y="2686050"/>
-            <a:ext cx="3116580" cy="190500"/>
-          </a:xfrm>
-          <a:prstGeom prst="rect">
-            <a:avLst/>
-          </a:prstGeom>
-          <a:noFill/>
-          <a:ln/>
-        </p:spPr>
-        <p:txBody>
-          <a:bodyPr wrap="square" lIns="0" tIns="0" rIns="0" bIns="0" rtlCol="0" anchor="t"/>
-          <a:lstStyle/>
-          <a:p>
-            <a:pPr indent="0" marL="0">
-              <a:buNone/>
-            </a:pPr>
-            <a:r>
-              <a:rPr lang="en-US" sz="1200" dirty="0">
-                <a:solidFill>
-                  <a:srgbClr val="5B636E"/>
-                </a:solidFill>
-                <a:latin typeface="Pretendard" pitchFamily="34" charset="0"/>
-                <a:ea typeface="Pretendard" pitchFamily="34" charset="-122"/>
-                <a:cs typeface="Pretendard" pitchFamily="34" charset="-120"/>
-              </a:rPr>
-              <a:t>플랫폼 기획 · 직접 개발</a:t>
-            </a:r>
-            <a:endParaRPr lang="en-US" sz="1200" dirty="0"/>
-          </a:p>
-        </p:txBody>
-      </p:sp>
-      <p:sp>
-        <p:nvSpPr>
-          <p:cNvPr id="20" name="o77"/>
+          <p:cNvPr id="21" name="o78"/>
           <p:cNvSpPr/>
           <p:nvPr/>
         </p:nvSpPr>
         <p:spPr>
           <a:xfrm>
             <a:off x="8046720" y="2057400"/>
-            <a:ext cx="3535680" cy="914400"/>
+            <a:ext cx="3535680" cy="952500"/>
           </a:xfrm>
           <a:prstGeom prst="rect">
             <a:avLst/>
@@ -13170,14 +13201,78 @@
       </p:sp>
       <p:sp>
         <p:nvSpPr>
-          <p:cNvPr id="21" name="o78"/>
-          <p:cNvSpPr txBox="1"/>
-          <p:nvPr/>
-        </p:nvSpPr>
-        <p:spPr>
-          <a:xfrm>
-            <a:off x="8256270" y="2190750"/>
-            <a:ext cx="381000" cy="152400"/>
+          <p:cNvPr id="22" name="o79"/>
+          <p:cNvSpPr/>
+          <p:nvPr/>
+        </p:nvSpPr>
+        <p:spPr>
+          <a:xfrm>
+            <a:off x="8256270" y="2266950"/>
+            <a:ext cx="533400" cy="533400"/>
+          </a:xfrm>
+          <a:prstGeom prst="ellipse">
+            <a:avLst/>
+          </a:prstGeom>
+          <a:solidFill>
+            <a:srgbClr val="FFFFFF"/>
+          </a:solidFill>
+          <a:ln w="15875">
+            <a:solidFill>
+              <a:srgbClr val="177B57"/>
+            </a:solidFill>
+            <a:prstDash val="solid"/>
+          </a:ln>
+        </p:spPr>
+      </p:sp>
+      <p:sp>
+        <p:nvSpPr>
+          <p:cNvPr id="23" name="o80"/>
+          <p:cNvSpPr txBox="1"/>
+          <p:nvPr/>
+        </p:nvSpPr>
+        <p:spPr>
+          <a:xfrm>
+            <a:off x="8256270" y="2266950"/>
+            <a:ext cx="533400" cy="533400"/>
+          </a:xfrm>
+          <a:prstGeom prst="rect">
+            <a:avLst/>
+          </a:prstGeom>
+          <a:noFill/>
+          <a:ln/>
+        </p:spPr>
+        <p:txBody>
+          <a:bodyPr wrap="square" lIns="0" tIns="0" rIns="0" bIns="0" rtlCol="0" anchor="ctr"/>
+          <a:lstStyle/>
+          <a:p>
+            <a:pPr algn="ctr" indent="0" marL="0">
+              <a:buNone/>
+            </a:pPr>
+            <a:r>
+              <a:rPr lang="en-US" sz="1800" b="1" dirty="0">
+                <a:solidFill>
+                  <a:srgbClr val="177B57"/>
+                </a:solidFill>
+                <a:latin typeface="Pretendard" pitchFamily="34" charset="0"/>
+                <a:ea typeface="Pretendard" pitchFamily="34" charset="-122"/>
+                <a:cs typeface="Pretendard" pitchFamily="34" charset="-120"/>
+              </a:rPr>
+              <a:t>장</a:t>
+            </a:r>
+            <a:endParaRPr lang="en-US" sz="1800" dirty="0"/>
+          </a:p>
+        </p:txBody>
+      </p:sp>
+      <p:sp>
+        <p:nvSpPr>
+          <p:cNvPr id="24" name="o81"/>
+          <p:cNvSpPr txBox="1"/>
+          <p:nvPr/>
+        </p:nvSpPr>
+        <p:spPr>
+          <a:xfrm>
+            <a:off x="8961120" y="2247900"/>
+            <a:ext cx="2430780" cy="228600"/>
           </a:xfrm>
           <a:prstGeom prst="rect">
             <a:avLst/>
@@ -13193,147 +13288,190 @@
               <a:buNone/>
             </a:pPr>
             <a:r>
-              <a:rPr lang="en-US" sz="1000" b="1" dirty="0">
+              <a:rPr lang="en-US" sz="1700" b="1" dirty="0">
+                <a:solidFill>
+                  <a:srgbClr val="1A1A1A"/>
+                </a:solidFill>
+                <a:latin typeface="Pretendard" pitchFamily="34" charset="0"/>
+                <a:ea typeface="Pretendard" pitchFamily="34" charset="-122"/>
+                <a:cs typeface="Pretendard" pitchFamily="34" charset="-120"/>
+              </a:rPr>
+              <a:t>장종문</a:t>
+            </a:r>
+            <a:endParaRPr lang="en-US" sz="1700" dirty="0"/>
+          </a:p>
+        </p:txBody>
+      </p:sp>
+      <p:sp>
+        <p:nvSpPr>
+          <p:cNvPr id="25" name="o82"/>
+          <p:cNvSpPr txBox="1"/>
+          <p:nvPr/>
+        </p:nvSpPr>
+        <p:spPr>
+          <a:xfrm>
+            <a:off x="8961120" y="2495550"/>
+            <a:ext cx="2430780" cy="171450"/>
+          </a:xfrm>
+          <a:prstGeom prst="rect">
+            <a:avLst/>
+          </a:prstGeom>
+          <a:noFill/>
+          <a:ln/>
+        </p:spPr>
+        <p:txBody>
+          <a:bodyPr wrap="square" lIns="0" tIns="0" rIns="0" bIns="0" rtlCol="0" anchor="t"/>
+          <a:lstStyle/>
+          <a:p>
+            <a:pPr indent="0" marL="0">
+              <a:buNone/>
+            </a:pPr>
+            <a:r>
+              <a:rPr lang="en-US" sz="1100" b="1" dirty="0">
                 <a:solidFill>
                   <a:srgbClr val="177B57"/>
+                </a:solidFill>
+                <a:latin typeface="Pretendard" pitchFamily="34" charset="0"/>
+                <a:ea typeface="Pretendard" pitchFamily="34" charset="-122"/>
+                <a:cs typeface="Pretendard" pitchFamily="34" charset="-120"/>
+              </a:rPr>
+              <a:t>팀원 · 안전관리자</a:t>
+            </a:r>
+            <a:endParaRPr lang="en-US" sz="1100" dirty="0"/>
+          </a:p>
+        </p:txBody>
+      </p:sp>
+      <p:sp>
+        <p:nvSpPr>
+          <p:cNvPr id="26" name="o83"/>
+          <p:cNvSpPr txBox="1"/>
+          <p:nvPr/>
+        </p:nvSpPr>
+        <p:spPr>
+          <a:xfrm>
+            <a:off x="8961120" y="2686050"/>
+            <a:ext cx="2430780" cy="171450"/>
+          </a:xfrm>
+          <a:prstGeom prst="rect">
+            <a:avLst/>
+          </a:prstGeom>
+          <a:noFill/>
+          <a:ln/>
+        </p:spPr>
+        <p:txBody>
+          <a:bodyPr wrap="square" lIns="0" tIns="0" rIns="0" bIns="0" rtlCol="0" anchor="t"/>
+          <a:lstStyle/>
+          <a:p>
+            <a:pPr indent="0" marL="0">
+              <a:buNone/>
+            </a:pPr>
+            <a:r>
+              <a:rPr lang="en-US" sz="1100" dirty="0">
+                <a:solidFill>
+                  <a:srgbClr val="5B636E"/>
+                </a:solidFill>
+                <a:latin typeface="Pretendard" pitchFamily="34" charset="0"/>
+                <a:ea typeface="Pretendard" pitchFamily="34" charset="-122"/>
+                <a:cs typeface="Pretendard" pitchFamily="34" charset="-120"/>
+              </a:rPr>
+              <a:t>MSDS · AI 위험성평가</a:t>
+            </a:r>
+            <a:endParaRPr lang="en-US" sz="1100" dirty="0"/>
+          </a:p>
+        </p:txBody>
+      </p:sp>
+      <p:sp>
+        <p:nvSpPr>
+          <p:cNvPr id="27" name="o84"/>
+          <p:cNvSpPr/>
+          <p:nvPr/>
+        </p:nvSpPr>
+        <p:spPr>
+          <a:xfrm>
+            <a:off x="609600" y="3200400"/>
+            <a:ext cx="10972800" cy="2743200"/>
+          </a:xfrm>
+          <a:prstGeom prst="rect">
+            <a:avLst/>
+          </a:prstGeom>
+          <a:solidFill>
+            <a:srgbClr val="F2F4F3"/>
+          </a:solidFill>
+          <a:ln/>
+        </p:spPr>
+      </p:sp>
+      <p:sp>
+        <p:nvSpPr>
+          <p:cNvPr id="28" name="o85"/>
+          <p:cNvSpPr txBox="1"/>
+          <p:nvPr/>
+        </p:nvSpPr>
+        <p:spPr>
+          <a:xfrm>
+            <a:off x="2990850" y="3352800"/>
+            <a:ext cx="836295" cy="152400"/>
+          </a:xfrm>
+          <a:prstGeom prst="rect">
+            <a:avLst/>
+          </a:prstGeom>
+          <a:noFill/>
+          <a:ln/>
+        </p:spPr>
+        <p:txBody>
+          <a:bodyPr wrap="square" lIns="0" tIns="0" rIns="0" bIns="0" rtlCol="0" anchor="t"/>
+          <a:lstStyle/>
+          <a:p>
+            <a:pPr algn="ctr" indent="0" marL="0">
+              <a:buNone/>
+            </a:pPr>
+            <a:r>
+              <a:rPr lang="en-US" sz="900" b="1" dirty="0">
+                <a:solidFill>
+                  <a:srgbClr val="5B636E"/>
                 </a:solidFill>
                 <a:latin typeface="IBM Plex Mono" pitchFamily="34" charset="0"/>
                 <a:ea typeface="IBM Plex Mono" pitchFamily="34" charset="-122"/>
                 <a:cs typeface="IBM Plex Mono" pitchFamily="34" charset="-120"/>
               </a:rPr>
-              <a:t>03</a:t>
-            </a:r>
-            <a:endParaRPr lang="en-US" sz="1000" dirty="0"/>
-          </a:p>
-        </p:txBody>
-      </p:sp>
-      <p:sp>
-        <p:nvSpPr>
-          <p:cNvPr id="22" name="o79"/>
-          <p:cNvSpPr txBox="1"/>
-          <p:nvPr/>
-        </p:nvSpPr>
-        <p:spPr>
-          <a:xfrm>
-            <a:off x="8256270" y="2381250"/>
-            <a:ext cx="1524000" cy="247650"/>
-          </a:xfrm>
-          <a:prstGeom prst="rect">
-            <a:avLst/>
-          </a:prstGeom>
-          <a:noFill/>
-          <a:ln/>
-        </p:spPr>
-        <p:txBody>
-          <a:bodyPr wrap="square" lIns="0" tIns="0" rIns="0" bIns="0" rtlCol="0" anchor="t"/>
-          <a:lstStyle/>
-          <a:p>
-            <a:pPr indent="0" marL="0">
-              <a:buNone/>
-            </a:pPr>
-            <a:r>
-              <a:rPr lang="en-US" sz="1800" b="1" dirty="0">
-                <a:solidFill>
-                  <a:srgbClr val="1A1A1A"/>
-                </a:solidFill>
-                <a:latin typeface="Pretendard" pitchFamily="34" charset="0"/>
-                <a:ea typeface="Pretendard" pitchFamily="34" charset="-122"/>
-                <a:cs typeface="Pretendard" pitchFamily="34" charset="-120"/>
-              </a:rPr>
-              <a:t>장종문</a:t>
-            </a:r>
-            <a:endParaRPr lang="en-US" sz="1800" dirty="0"/>
-          </a:p>
-        </p:txBody>
-      </p:sp>
-      <p:sp>
-        <p:nvSpPr>
-          <p:cNvPr id="23" name="o80"/>
-          <p:cNvSpPr txBox="1"/>
-          <p:nvPr/>
-        </p:nvSpPr>
-        <p:spPr>
-          <a:xfrm>
-            <a:off x="9475470" y="2419350"/>
-            <a:ext cx="1916430" cy="190500"/>
-          </a:xfrm>
-          <a:prstGeom prst="rect">
-            <a:avLst/>
-          </a:prstGeom>
-          <a:noFill/>
-          <a:ln/>
-        </p:spPr>
-        <p:txBody>
-          <a:bodyPr wrap="square" lIns="0" tIns="0" rIns="0" bIns="0" rtlCol="0" anchor="t"/>
-          <a:lstStyle/>
-          <a:p>
-            <a:pPr indent="0" marL="0">
-              <a:buNone/>
-            </a:pPr>
-            <a:r>
-              <a:rPr lang="en-US" sz="1100" b="1" dirty="0">
-                <a:solidFill>
-                  <a:srgbClr val="5B636E"/>
-                </a:solidFill>
-                <a:latin typeface="Pretendard" pitchFamily="34" charset="0"/>
-                <a:ea typeface="Pretendard" pitchFamily="34" charset="-122"/>
-                <a:cs typeface="Pretendard" pitchFamily="34" charset="-120"/>
-              </a:rPr>
-              <a:t>팀원 · 안전관리자</a:t>
-            </a:r>
-            <a:endParaRPr lang="en-US" sz="1100" dirty="0"/>
-          </a:p>
-        </p:txBody>
-      </p:sp>
-      <p:sp>
-        <p:nvSpPr>
-          <p:cNvPr id="24" name="o81"/>
-          <p:cNvSpPr txBox="1"/>
-          <p:nvPr/>
-        </p:nvSpPr>
-        <p:spPr>
-          <a:xfrm>
-            <a:off x="8256270" y="2686050"/>
-            <a:ext cx="3116580" cy="190500"/>
-          </a:xfrm>
-          <a:prstGeom prst="rect">
-            <a:avLst/>
-          </a:prstGeom>
-          <a:noFill/>
-          <a:ln/>
-        </p:spPr>
-        <p:txBody>
-          <a:bodyPr wrap="square" lIns="0" tIns="0" rIns="0" bIns="0" rtlCol="0" anchor="t"/>
-          <a:lstStyle/>
-          <a:p>
-            <a:pPr indent="0" marL="0">
-              <a:buNone/>
-            </a:pPr>
-            <a:r>
-              <a:rPr lang="en-US" sz="1200" dirty="0">
-                <a:solidFill>
-                  <a:srgbClr val="5B636E"/>
-                </a:solidFill>
-                <a:latin typeface="Pretendard" pitchFamily="34" charset="0"/>
-                <a:ea typeface="Pretendard" pitchFamily="34" charset="-122"/>
-                <a:cs typeface="Pretendard" pitchFamily="34" charset="-120"/>
-              </a:rPr>
-              <a:t>MSDS · AI 위험성평가</a:t>
-            </a:r>
-            <a:endParaRPr lang="en-US" sz="1200" dirty="0"/>
-          </a:p>
-        </p:txBody>
-      </p:sp>
-      <p:sp>
-        <p:nvSpPr>
-          <p:cNvPr id="25" name="o82"/>
-          <p:cNvSpPr txBox="1"/>
-          <p:nvPr/>
-        </p:nvSpPr>
-        <p:spPr>
-          <a:xfrm>
-            <a:off x="2324100" y="3200400"/>
-            <a:ext cx="553974" cy="152400"/>
+              <a:t>1월</a:t>
+            </a:r>
+            <a:endParaRPr lang="en-US" sz="900" dirty="0"/>
+          </a:p>
+        </p:txBody>
+      </p:sp>
+      <p:sp>
+        <p:nvSpPr>
+          <p:cNvPr id="29" name="o86"/>
+          <p:cNvSpPr/>
+          <p:nvPr/>
+        </p:nvSpPr>
+        <p:spPr>
+          <a:xfrm>
+            <a:off x="2990850" y="3581400"/>
+            <a:ext cx="0" cy="2247900"/>
+          </a:xfrm>
+          <a:prstGeom prst="line">
+            <a:avLst/>
+          </a:prstGeom>
+          <a:noFill/>
+          <a:ln w="6350">
+            <a:solidFill>
+              <a:srgbClr val="D6DAD8"/>
+            </a:solidFill>
+            <a:prstDash val="solid"/>
+          </a:ln>
+        </p:spPr>
+      </p:sp>
+      <p:sp>
+        <p:nvSpPr>
+          <p:cNvPr id="30" name="o87"/>
+          <p:cNvSpPr txBox="1"/>
+          <p:nvPr/>
+        </p:nvSpPr>
+        <p:spPr>
+          <a:xfrm>
+            <a:off x="3827145" y="3352800"/>
+            <a:ext cx="836295" cy="152400"/>
           </a:xfrm>
           <a:prstGeom prst="rect">
             <a:avLst/>
@@ -13349,7 +13487,7 @@
               <a:buNone/>
             </a:pPr>
             <a:r>
-              <a:rPr lang="en-US" sz="900" dirty="0">
+              <a:rPr lang="en-US" sz="900" b="1" dirty="0">
                 <a:solidFill>
                   <a:srgbClr val="5B636E"/>
                 </a:solidFill>
@@ -13357,7 +13495,7 @@
                 <a:ea typeface="IBM Plex Mono" pitchFamily="34" charset="-122"/>
                 <a:cs typeface="IBM Plex Mono" pitchFamily="34" charset="-120"/>
               </a:rPr>
-              <a:t>1월</a:t>
+              <a:t>2월</a:t>
             </a:r>
             <a:endParaRPr lang="en-US" sz="900" dirty="0"/>
           </a:p>
@@ -13365,14 +13503,37 @@
       </p:sp>
       <p:sp>
         <p:nvSpPr>
-          <p:cNvPr id="26" name="o83"/>
-          <p:cNvSpPr txBox="1"/>
-          <p:nvPr/>
-        </p:nvSpPr>
-        <p:spPr>
-          <a:xfrm>
-            <a:off x="2878074" y="3200400"/>
-            <a:ext cx="553974" cy="152400"/>
+          <p:cNvPr id="31" name="o88"/>
+          <p:cNvSpPr/>
+          <p:nvPr/>
+        </p:nvSpPr>
+        <p:spPr>
+          <a:xfrm>
+            <a:off x="3827145" y="3581400"/>
+            <a:ext cx="0" cy="2247900"/>
+          </a:xfrm>
+          <a:prstGeom prst="line">
+            <a:avLst/>
+          </a:prstGeom>
+          <a:noFill/>
+          <a:ln w="6350">
+            <a:solidFill>
+              <a:srgbClr val="D6DAD8"/>
+            </a:solidFill>
+            <a:prstDash val="solid"/>
+          </a:ln>
+        </p:spPr>
+      </p:sp>
+      <p:sp>
+        <p:nvSpPr>
+          <p:cNvPr id="32" name="o89"/>
+          <p:cNvSpPr txBox="1"/>
+          <p:nvPr/>
+        </p:nvSpPr>
+        <p:spPr>
+          <a:xfrm>
+            <a:off x="4663440" y="3352800"/>
+            <a:ext cx="836295" cy="152400"/>
           </a:xfrm>
           <a:prstGeom prst="rect">
             <a:avLst/>
@@ -13388,7 +13549,7 @@
               <a:buNone/>
             </a:pPr>
             <a:r>
-              <a:rPr lang="en-US" sz="900" dirty="0">
+              <a:rPr lang="en-US" sz="900" b="1" dirty="0">
                 <a:solidFill>
                   <a:srgbClr val="5B636E"/>
                 </a:solidFill>
@@ -13396,7 +13557,7 @@
                 <a:ea typeface="IBM Plex Mono" pitchFamily="34" charset="-122"/>
                 <a:cs typeface="IBM Plex Mono" pitchFamily="34" charset="-120"/>
               </a:rPr>
-              <a:t>2월</a:t>
+              <a:t>3월</a:t>
             </a:r>
             <a:endParaRPr lang="en-US" sz="900" dirty="0"/>
           </a:p>
@@ -13404,14 +13565,37 @@
       </p:sp>
       <p:sp>
         <p:nvSpPr>
-          <p:cNvPr id="27" name="o84"/>
-          <p:cNvSpPr txBox="1"/>
-          <p:nvPr/>
-        </p:nvSpPr>
-        <p:spPr>
-          <a:xfrm>
-            <a:off x="3432048" y="3200400"/>
-            <a:ext cx="553974" cy="152400"/>
+          <p:cNvPr id="33" name="o90"/>
+          <p:cNvSpPr/>
+          <p:nvPr/>
+        </p:nvSpPr>
+        <p:spPr>
+          <a:xfrm>
+            <a:off x="4663440" y="3581400"/>
+            <a:ext cx="0" cy="2247900"/>
+          </a:xfrm>
+          <a:prstGeom prst="line">
+            <a:avLst/>
+          </a:prstGeom>
+          <a:noFill/>
+          <a:ln w="6350">
+            <a:solidFill>
+              <a:srgbClr val="D6DAD8"/>
+            </a:solidFill>
+            <a:prstDash val="solid"/>
+          </a:ln>
+        </p:spPr>
+      </p:sp>
+      <p:sp>
+        <p:nvSpPr>
+          <p:cNvPr id="34" name="o91"/>
+          <p:cNvSpPr txBox="1"/>
+          <p:nvPr/>
+        </p:nvSpPr>
+        <p:spPr>
+          <a:xfrm>
+            <a:off x="5499735" y="3352800"/>
+            <a:ext cx="836295" cy="152400"/>
           </a:xfrm>
           <a:prstGeom prst="rect">
             <a:avLst/>
@@ -13427,7 +13611,7 @@
               <a:buNone/>
             </a:pPr>
             <a:r>
-              <a:rPr lang="en-US" sz="900" dirty="0">
+              <a:rPr lang="en-US" sz="900" b="1" dirty="0">
                 <a:solidFill>
                   <a:srgbClr val="5B636E"/>
                 </a:solidFill>
@@ -13435,7 +13619,7 @@
                 <a:ea typeface="IBM Plex Mono" pitchFamily="34" charset="-122"/>
                 <a:cs typeface="IBM Plex Mono" pitchFamily="34" charset="-120"/>
               </a:rPr>
-              <a:t>3월</a:t>
+              <a:t>4월</a:t>
             </a:r>
             <a:endParaRPr lang="en-US" sz="900" dirty="0"/>
           </a:p>
@@ -13443,14 +13627,37 @@
       </p:sp>
       <p:sp>
         <p:nvSpPr>
-          <p:cNvPr id="28" name="o85"/>
-          <p:cNvSpPr txBox="1"/>
-          <p:nvPr/>
-        </p:nvSpPr>
-        <p:spPr>
-          <a:xfrm>
-            <a:off x="3986022" y="3200400"/>
-            <a:ext cx="553974" cy="152400"/>
+          <p:cNvPr id="35" name="o92"/>
+          <p:cNvSpPr/>
+          <p:nvPr/>
+        </p:nvSpPr>
+        <p:spPr>
+          <a:xfrm>
+            <a:off x="5499735" y="3581400"/>
+            <a:ext cx="0" cy="2247900"/>
+          </a:xfrm>
+          <a:prstGeom prst="line">
+            <a:avLst/>
+          </a:prstGeom>
+          <a:noFill/>
+          <a:ln w="6350">
+            <a:solidFill>
+              <a:srgbClr val="D6DAD8"/>
+            </a:solidFill>
+            <a:prstDash val="solid"/>
+          </a:ln>
+        </p:spPr>
+      </p:sp>
+      <p:sp>
+        <p:nvSpPr>
+          <p:cNvPr id="36" name="o93"/>
+          <p:cNvSpPr txBox="1"/>
+          <p:nvPr/>
+        </p:nvSpPr>
+        <p:spPr>
+          <a:xfrm>
+            <a:off x="6336030" y="3352800"/>
+            <a:ext cx="836295" cy="152400"/>
           </a:xfrm>
           <a:prstGeom prst="rect">
             <a:avLst/>
@@ -13466,7 +13673,7 @@
               <a:buNone/>
             </a:pPr>
             <a:r>
-              <a:rPr lang="en-US" sz="900" dirty="0">
+              <a:rPr lang="en-US" sz="900" b="1" dirty="0">
                 <a:solidFill>
                   <a:srgbClr val="5B636E"/>
                 </a:solidFill>
@@ -13474,7 +13681,7 @@
                 <a:ea typeface="IBM Plex Mono" pitchFamily="34" charset="-122"/>
                 <a:cs typeface="IBM Plex Mono" pitchFamily="34" charset="-120"/>
               </a:rPr>
-              <a:t>4월</a:t>
+              <a:t>5월</a:t>
             </a:r>
             <a:endParaRPr lang="en-US" sz="900" dirty="0"/>
           </a:p>
@@ -13482,14 +13689,37 @@
       </p:sp>
       <p:sp>
         <p:nvSpPr>
-          <p:cNvPr id="29" name="o86"/>
-          <p:cNvSpPr txBox="1"/>
-          <p:nvPr/>
-        </p:nvSpPr>
-        <p:spPr>
-          <a:xfrm>
-            <a:off x="4539996" y="3200400"/>
-            <a:ext cx="553974" cy="152400"/>
+          <p:cNvPr id="37" name="o94"/>
+          <p:cNvSpPr/>
+          <p:nvPr/>
+        </p:nvSpPr>
+        <p:spPr>
+          <a:xfrm>
+            <a:off x="6336030" y="3581400"/>
+            <a:ext cx="0" cy="2247900"/>
+          </a:xfrm>
+          <a:prstGeom prst="line">
+            <a:avLst/>
+          </a:prstGeom>
+          <a:noFill/>
+          <a:ln w="6350">
+            <a:solidFill>
+              <a:srgbClr val="D6DAD8"/>
+            </a:solidFill>
+            <a:prstDash val="solid"/>
+          </a:ln>
+        </p:spPr>
+      </p:sp>
+      <p:sp>
+        <p:nvSpPr>
+          <p:cNvPr id="38" name="o95"/>
+          <p:cNvSpPr txBox="1"/>
+          <p:nvPr/>
+        </p:nvSpPr>
+        <p:spPr>
+          <a:xfrm>
+            <a:off x="7172325" y="3352800"/>
+            <a:ext cx="836295" cy="152400"/>
           </a:xfrm>
           <a:prstGeom prst="rect">
             <a:avLst/>
@@ -13505,7 +13735,7 @@
               <a:buNone/>
             </a:pPr>
             <a:r>
-              <a:rPr lang="en-US" sz="900" dirty="0">
+              <a:rPr lang="en-US" sz="900" b="1" dirty="0">
                 <a:solidFill>
                   <a:srgbClr val="5B636E"/>
                 </a:solidFill>
@@ -13513,7 +13743,7 @@
                 <a:ea typeface="IBM Plex Mono" pitchFamily="34" charset="-122"/>
                 <a:cs typeface="IBM Plex Mono" pitchFamily="34" charset="-120"/>
               </a:rPr>
-              <a:t>5월</a:t>
+              <a:t>6월</a:t>
             </a:r>
             <a:endParaRPr lang="en-US" sz="900" dirty="0"/>
           </a:p>
@@ -13521,14 +13751,37 @@
       </p:sp>
       <p:sp>
         <p:nvSpPr>
-          <p:cNvPr id="30" name="o87"/>
-          <p:cNvSpPr txBox="1"/>
-          <p:nvPr/>
-        </p:nvSpPr>
-        <p:spPr>
-          <a:xfrm>
-            <a:off x="5093970" y="3200400"/>
-            <a:ext cx="553974" cy="152400"/>
+          <p:cNvPr id="39" name="o96"/>
+          <p:cNvSpPr/>
+          <p:nvPr/>
+        </p:nvSpPr>
+        <p:spPr>
+          <a:xfrm>
+            <a:off x="7172325" y="3581400"/>
+            <a:ext cx="0" cy="2247900"/>
+          </a:xfrm>
+          <a:prstGeom prst="line">
+            <a:avLst/>
+          </a:prstGeom>
+          <a:noFill/>
+          <a:ln w="6350">
+            <a:solidFill>
+              <a:srgbClr val="D6DAD8"/>
+            </a:solidFill>
+            <a:prstDash val="solid"/>
+          </a:ln>
+        </p:spPr>
+      </p:sp>
+      <p:sp>
+        <p:nvSpPr>
+          <p:cNvPr id="40" name="o97"/>
+          <p:cNvSpPr txBox="1"/>
+          <p:nvPr/>
+        </p:nvSpPr>
+        <p:spPr>
+          <a:xfrm>
+            <a:off x="8008620" y="3352800"/>
+            <a:ext cx="836295" cy="152400"/>
           </a:xfrm>
           <a:prstGeom prst="rect">
             <a:avLst/>
@@ -13544,7 +13797,7 @@
               <a:buNone/>
             </a:pPr>
             <a:r>
-              <a:rPr lang="en-US" sz="900" dirty="0">
+              <a:rPr lang="en-US" sz="900" b="1" dirty="0">
                 <a:solidFill>
                   <a:srgbClr val="5B636E"/>
                 </a:solidFill>
@@ -13552,7 +13805,7 @@
                 <a:ea typeface="IBM Plex Mono" pitchFamily="34" charset="-122"/>
                 <a:cs typeface="IBM Plex Mono" pitchFamily="34" charset="-120"/>
               </a:rPr>
-              <a:t>6월</a:t>
+              <a:t>7월</a:t>
             </a:r>
             <a:endParaRPr lang="en-US" sz="900" dirty="0"/>
           </a:p>
@@ -13560,14 +13813,37 @@
       </p:sp>
       <p:sp>
         <p:nvSpPr>
-          <p:cNvPr id="31" name="o88"/>
-          <p:cNvSpPr txBox="1"/>
-          <p:nvPr/>
-        </p:nvSpPr>
-        <p:spPr>
-          <a:xfrm>
-            <a:off x="5647944" y="3200400"/>
-            <a:ext cx="553974" cy="152400"/>
+          <p:cNvPr id="41" name="o98"/>
+          <p:cNvSpPr/>
+          <p:nvPr/>
+        </p:nvSpPr>
+        <p:spPr>
+          <a:xfrm>
+            <a:off x="8008620" y="3581400"/>
+            <a:ext cx="0" cy="2247900"/>
+          </a:xfrm>
+          <a:prstGeom prst="line">
+            <a:avLst/>
+          </a:prstGeom>
+          <a:noFill/>
+          <a:ln w="6350">
+            <a:solidFill>
+              <a:srgbClr val="D6DAD8"/>
+            </a:solidFill>
+            <a:prstDash val="solid"/>
+          </a:ln>
+        </p:spPr>
+      </p:sp>
+      <p:sp>
+        <p:nvSpPr>
+          <p:cNvPr id="42" name="o99"/>
+          <p:cNvSpPr txBox="1"/>
+          <p:nvPr/>
+        </p:nvSpPr>
+        <p:spPr>
+          <a:xfrm>
+            <a:off x="8844915" y="3352800"/>
+            <a:ext cx="836295" cy="152400"/>
           </a:xfrm>
           <a:prstGeom prst="rect">
             <a:avLst/>
@@ -13583,7 +13859,7 @@
               <a:buNone/>
             </a:pPr>
             <a:r>
-              <a:rPr lang="en-US" sz="900" dirty="0">
+              <a:rPr lang="en-US" sz="900" b="1" dirty="0">
                 <a:solidFill>
                   <a:srgbClr val="5B636E"/>
                 </a:solidFill>
@@ -13591,7 +13867,7 @@
                 <a:ea typeface="IBM Plex Mono" pitchFamily="34" charset="-122"/>
                 <a:cs typeface="IBM Plex Mono" pitchFamily="34" charset="-120"/>
               </a:rPr>
-              <a:t>7월</a:t>
+              <a:t>8월</a:t>
             </a:r>
             <a:endParaRPr lang="en-US" sz="900" dirty="0"/>
           </a:p>
@@ -13599,14 +13875,37 @@
       </p:sp>
       <p:sp>
         <p:nvSpPr>
-          <p:cNvPr id="32" name="o89"/>
-          <p:cNvSpPr txBox="1"/>
-          <p:nvPr/>
-        </p:nvSpPr>
-        <p:spPr>
-          <a:xfrm>
-            <a:off x="6201918" y="3200400"/>
-            <a:ext cx="553974" cy="152400"/>
+          <p:cNvPr id="43" name="o100"/>
+          <p:cNvSpPr/>
+          <p:nvPr/>
+        </p:nvSpPr>
+        <p:spPr>
+          <a:xfrm>
+            <a:off x="8844915" y="3581400"/>
+            <a:ext cx="0" cy="2247900"/>
+          </a:xfrm>
+          <a:prstGeom prst="line">
+            <a:avLst/>
+          </a:prstGeom>
+          <a:noFill/>
+          <a:ln w="6350">
+            <a:solidFill>
+              <a:srgbClr val="D6DAD8"/>
+            </a:solidFill>
+            <a:prstDash val="solid"/>
+          </a:ln>
+        </p:spPr>
+      </p:sp>
+      <p:sp>
+        <p:nvSpPr>
+          <p:cNvPr id="44" name="o101"/>
+          <p:cNvSpPr txBox="1"/>
+          <p:nvPr/>
+        </p:nvSpPr>
+        <p:spPr>
+          <a:xfrm>
+            <a:off x="9681210" y="3352800"/>
+            <a:ext cx="836295" cy="152400"/>
           </a:xfrm>
           <a:prstGeom prst="rect">
             <a:avLst/>
@@ -13622,7 +13921,7 @@
               <a:buNone/>
             </a:pPr>
             <a:r>
-              <a:rPr lang="en-US" sz="900" dirty="0">
+              <a:rPr lang="en-US" sz="900" b="1" dirty="0">
                 <a:solidFill>
                   <a:srgbClr val="5B636E"/>
                 </a:solidFill>
@@ -13630,7 +13929,7 @@
                 <a:ea typeface="IBM Plex Mono" pitchFamily="34" charset="-122"/>
                 <a:cs typeface="IBM Plex Mono" pitchFamily="34" charset="-120"/>
               </a:rPr>
-              <a:t>8월</a:t>
+              <a:t>9월</a:t>
             </a:r>
             <a:endParaRPr lang="en-US" sz="900" dirty="0"/>
           </a:p>
@@ -13638,14 +13937,37 @@
       </p:sp>
       <p:sp>
         <p:nvSpPr>
-          <p:cNvPr id="33" name="o90"/>
-          <p:cNvSpPr txBox="1"/>
-          <p:nvPr/>
-        </p:nvSpPr>
-        <p:spPr>
-          <a:xfrm>
-            <a:off x="6755892" y="3200400"/>
-            <a:ext cx="553974" cy="152400"/>
+          <p:cNvPr id="45" name="o102"/>
+          <p:cNvSpPr/>
+          <p:nvPr/>
+        </p:nvSpPr>
+        <p:spPr>
+          <a:xfrm>
+            <a:off x="9681210" y="3581400"/>
+            <a:ext cx="0" cy="2247900"/>
+          </a:xfrm>
+          <a:prstGeom prst="line">
+            <a:avLst/>
+          </a:prstGeom>
+          <a:noFill/>
+          <a:ln w="6350">
+            <a:solidFill>
+              <a:srgbClr val="D6DAD8"/>
+            </a:solidFill>
+            <a:prstDash val="solid"/>
+          </a:ln>
+        </p:spPr>
+      </p:sp>
+      <p:sp>
+        <p:nvSpPr>
+          <p:cNvPr id="46" name="o103"/>
+          <p:cNvSpPr txBox="1"/>
+          <p:nvPr/>
+        </p:nvSpPr>
+        <p:spPr>
+          <a:xfrm>
+            <a:off x="10517505" y="3352800"/>
+            <a:ext cx="836295" cy="152400"/>
           </a:xfrm>
           <a:prstGeom prst="rect">
             <a:avLst/>
@@ -13661,7 +13983,7 @@
               <a:buNone/>
             </a:pPr>
             <a:r>
-              <a:rPr lang="en-US" sz="900" dirty="0">
+              <a:rPr lang="en-US" sz="900" b="1" dirty="0">
                 <a:solidFill>
                   <a:srgbClr val="5B636E"/>
                 </a:solidFill>
@@ -13669,7 +13991,7 @@
                 <a:ea typeface="IBM Plex Mono" pitchFamily="34" charset="-122"/>
                 <a:cs typeface="IBM Plex Mono" pitchFamily="34" charset="-120"/>
               </a:rPr>
-              <a:t>9월</a:t>
+              <a:t>10월</a:t>
             </a:r>
             <a:endParaRPr lang="en-US" sz="900" dirty="0"/>
           </a:p>
@@ -13677,53 +13999,60 @@
       </p:sp>
       <p:sp>
         <p:nvSpPr>
-          <p:cNvPr id="34" name="o91"/>
-          <p:cNvSpPr txBox="1"/>
-          <p:nvPr/>
-        </p:nvSpPr>
-        <p:spPr>
-          <a:xfrm>
-            <a:off x="7309866" y="3200400"/>
-            <a:ext cx="553974" cy="152400"/>
-          </a:xfrm>
-          <a:prstGeom prst="rect">
-            <a:avLst/>
-          </a:prstGeom>
-          <a:noFill/>
-          <a:ln/>
-        </p:spPr>
-        <p:txBody>
-          <a:bodyPr wrap="square" lIns="0" tIns="0" rIns="0" bIns="0" rtlCol="0" anchor="t"/>
-          <a:lstStyle/>
-          <a:p>
-            <a:pPr algn="ctr" indent="0" marL="0">
-              <a:buNone/>
-            </a:pPr>
-            <a:r>
-              <a:rPr lang="en-US" sz="900" dirty="0">
-                <a:solidFill>
-                  <a:srgbClr val="5B636E"/>
-                </a:solidFill>
-                <a:latin typeface="IBM Plex Mono" pitchFamily="34" charset="0"/>
-                <a:ea typeface="IBM Plex Mono" pitchFamily="34" charset="-122"/>
-                <a:cs typeface="IBM Plex Mono" pitchFamily="34" charset="-120"/>
-              </a:rPr>
-              <a:t>10월</a:t>
-            </a:r>
-            <a:endParaRPr lang="en-US" sz="900" dirty="0"/>
-          </a:p>
-        </p:txBody>
-      </p:sp>
-      <p:sp>
-        <p:nvSpPr>
-          <p:cNvPr id="35" name="o92"/>
+          <p:cNvPr id="47" name="o104"/>
           <p:cNvSpPr/>
           <p:nvPr/>
         </p:nvSpPr>
         <p:spPr>
           <a:xfrm>
-            <a:off x="609600" y="3409950"/>
-            <a:ext cx="7254240" cy="0"/>
+            <a:off x="10517505" y="3581400"/>
+            <a:ext cx="0" cy="2247900"/>
+          </a:xfrm>
+          <a:prstGeom prst="line">
+            <a:avLst/>
+          </a:prstGeom>
+          <a:noFill/>
+          <a:ln w="6350">
+            <a:solidFill>
+              <a:srgbClr val="D6DAD8"/>
+            </a:solidFill>
+            <a:prstDash val="solid"/>
+          </a:ln>
+        </p:spPr>
+      </p:sp>
+      <p:sp>
+        <p:nvSpPr>
+          <p:cNvPr id="48" name="o105"/>
+          <p:cNvSpPr/>
+          <p:nvPr/>
+        </p:nvSpPr>
+        <p:spPr>
+          <a:xfrm>
+            <a:off x="11353800" y="3581400"/>
+            <a:ext cx="0" cy="2247900"/>
+          </a:xfrm>
+          <a:prstGeom prst="line">
+            <a:avLst/>
+          </a:prstGeom>
+          <a:noFill/>
+          <a:ln w="6350">
+            <a:solidFill>
+              <a:srgbClr val="D6DAD8"/>
+            </a:solidFill>
+            <a:prstDash val="solid"/>
+          </a:ln>
+        </p:spPr>
+      </p:sp>
+      <p:sp>
+        <p:nvSpPr>
+          <p:cNvPr id="49" name="o106"/>
+          <p:cNvSpPr/>
+          <p:nvPr/>
+        </p:nvSpPr>
+        <p:spPr>
+          <a:xfrm>
+            <a:off x="838200" y="3581400"/>
+            <a:ext cx="10515600" cy="0"/>
           </a:xfrm>
           <a:prstGeom prst="line">
             <a:avLst/>
@@ -13739,14 +14068,14 @@
       </p:sp>
       <p:sp>
         <p:nvSpPr>
-          <p:cNvPr id="36" name="o93"/>
-          <p:cNvSpPr txBox="1"/>
-          <p:nvPr/>
-        </p:nvSpPr>
-        <p:spPr>
-          <a:xfrm>
-            <a:off x="609600" y="3524250"/>
-            <a:ext cx="476250" cy="209550"/>
+          <p:cNvPr id="50" name="o107"/>
+          <p:cNvSpPr txBox="1"/>
+          <p:nvPr/>
+        </p:nvSpPr>
+        <p:spPr>
+          <a:xfrm>
+            <a:off x="838200" y="3695700"/>
+            <a:ext cx="533400" cy="228600"/>
           </a:xfrm>
           <a:prstGeom prst="rect">
             <a:avLst/>
@@ -13778,14 +14107,14 @@
       </p:sp>
       <p:sp>
         <p:nvSpPr>
-          <p:cNvPr id="37" name="o94"/>
-          <p:cNvSpPr txBox="1"/>
-          <p:nvPr/>
-        </p:nvSpPr>
-        <p:spPr>
-          <a:xfrm>
-            <a:off x="1104900" y="3524250"/>
-            <a:ext cx="1219200" cy="209550"/>
+          <p:cNvPr id="51" name="o108"/>
+          <p:cNvSpPr txBox="1"/>
+          <p:nvPr/>
+        </p:nvSpPr>
+        <p:spPr>
+          <a:xfrm>
+            <a:off x="1390650" y="3695700"/>
+            <a:ext cx="1600200" cy="228600"/>
           </a:xfrm>
           <a:prstGeom prst="rect">
             <a:avLst/>
@@ -13801,7 +14130,7 @@
               <a:buNone/>
             </a:pPr>
             <a:r>
-              <a:rPr lang="en-US" sz="1100" dirty="0">
+              <a:rPr lang="en-US" sz="1200" dirty="0">
                 <a:solidFill>
                   <a:srgbClr val="1A1A1A"/>
                 </a:solidFill>
@@ -13811,20 +14140,20 @@
               </a:rPr>
               <a:t>현황 · 원인 분석</a:t>
             </a:r>
-            <a:endParaRPr lang="en-US" sz="1100" dirty="0"/>
-          </a:p>
-        </p:txBody>
-      </p:sp>
-      <p:sp>
-        <p:nvSpPr>
-          <p:cNvPr id="38" name="o95"/>
+            <a:endParaRPr lang="en-US" sz="1200" dirty="0"/>
+          </a:p>
+        </p:txBody>
+      </p:sp>
+      <p:sp>
+        <p:nvSpPr>
+          <p:cNvPr id="52" name="o109"/>
           <p:cNvSpPr/>
           <p:nvPr/>
         </p:nvSpPr>
         <p:spPr>
           <a:xfrm>
-            <a:off x="2352675" y="3552825"/>
-            <a:ext cx="1604772" cy="152400"/>
+            <a:off x="3028950" y="3733800"/>
+            <a:ext cx="2432685" cy="152400"/>
           </a:xfrm>
           <a:prstGeom prst="rect">
             <a:avLst/>
@@ -13837,37 +14166,14 @@
       </p:sp>
       <p:sp>
         <p:nvSpPr>
-          <p:cNvPr id="39" name="o96"/>
-          <p:cNvSpPr/>
-          <p:nvPr/>
-        </p:nvSpPr>
-        <p:spPr>
-          <a:xfrm>
-            <a:off x="609600" y="3810000"/>
-            <a:ext cx="7254240" cy="0"/>
-          </a:xfrm>
-          <a:prstGeom prst="line">
-            <a:avLst/>
-          </a:prstGeom>
-          <a:noFill/>
-          <a:ln w="9525">
-            <a:solidFill>
-              <a:srgbClr val="D6DAD8"/>
-            </a:solidFill>
-            <a:prstDash val="solid"/>
-          </a:ln>
-        </p:spPr>
-      </p:sp>
-      <p:sp>
-        <p:nvSpPr>
-          <p:cNvPr id="40" name="o97"/>
-          <p:cNvSpPr txBox="1"/>
-          <p:nvPr/>
-        </p:nvSpPr>
-        <p:spPr>
-          <a:xfrm>
-            <a:off x="609600" y="3905250"/>
-            <a:ext cx="476250" cy="209550"/>
+          <p:cNvPr id="53" name="o110"/>
+          <p:cNvSpPr txBox="1"/>
+          <p:nvPr/>
+        </p:nvSpPr>
+        <p:spPr>
+          <a:xfrm>
+            <a:off x="838200" y="4057650"/>
+            <a:ext cx="533400" cy="228600"/>
           </a:xfrm>
           <a:prstGeom prst="rect">
             <a:avLst/>
@@ -13899,14 +14205,14 @@
       </p:sp>
       <p:sp>
         <p:nvSpPr>
-          <p:cNvPr id="41" name="o98"/>
-          <p:cNvSpPr txBox="1"/>
-          <p:nvPr/>
-        </p:nvSpPr>
-        <p:spPr>
-          <a:xfrm>
-            <a:off x="1104900" y="3905250"/>
-            <a:ext cx="1219200" cy="209550"/>
+          <p:cNvPr id="54" name="o111"/>
+          <p:cNvSpPr txBox="1"/>
+          <p:nvPr/>
+        </p:nvSpPr>
+        <p:spPr>
+          <a:xfrm>
+            <a:off x="1390650" y="4057650"/>
+            <a:ext cx="1600200" cy="228600"/>
           </a:xfrm>
           <a:prstGeom prst="rect">
             <a:avLst/>
@@ -13922,7 +14228,7 @@
               <a:buNone/>
             </a:pPr>
             <a:r>
-              <a:rPr lang="en-US" sz="1100" dirty="0">
+              <a:rPr lang="en-US" sz="1200" dirty="0">
                 <a:solidFill>
                   <a:srgbClr val="1A1A1A"/>
                 </a:solidFill>
@@ -13932,63 +14238,40 @@
               </a:rPr>
               <a:t>플랫폼 개발</a:t>
             </a:r>
-            <a:endParaRPr lang="en-US" sz="1100" dirty="0"/>
-          </a:p>
-        </p:txBody>
-      </p:sp>
-      <p:sp>
-        <p:nvSpPr>
-          <p:cNvPr id="42" name="o99"/>
+            <a:endParaRPr lang="en-US" sz="1200" dirty="0"/>
+          </a:p>
+        </p:txBody>
+      </p:sp>
+      <p:sp>
+        <p:nvSpPr>
+          <p:cNvPr id="55" name="o112"/>
           <p:cNvSpPr/>
           <p:nvPr/>
         </p:nvSpPr>
         <p:spPr>
           <a:xfrm>
-            <a:off x="3460623" y="3933825"/>
-            <a:ext cx="1050798" cy="152400"/>
+            <a:off x="4701540" y="4095750"/>
+            <a:ext cx="1596390" cy="152400"/>
           </a:xfrm>
           <a:prstGeom prst="rect">
             <a:avLst/>
           </a:prstGeom>
           <a:solidFill>
-            <a:srgbClr val="9CA3AC"/>
+            <a:srgbClr val="5B636E"/>
           </a:solidFill>
           <a:ln/>
         </p:spPr>
       </p:sp>
       <p:sp>
         <p:nvSpPr>
-          <p:cNvPr id="43" name="o100"/>
-          <p:cNvSpPr/>
-          <p:nvPr/>
-        </p:nvSpPr>
-        <p:spPr>
-          <a:xfrm>
-            <a:off x="609600" y="4191000"/>
-            <a:ext cx="7254240" cy="0"/>
-          </a:xfrm>
-          <a:prstGeom prst="line">
-            <a:avLst/>
-          </a:prstGeom>
-          <a:noFill/>
-          <a:ln w="9525">
-            <a:solidFill>
-              <a:srgbClr val="D6DAD8"/>
-            </a:solidFill>
-            <a:prstDash val="solid"/>
-          </a:ln>
-        </p:spPr>
-      </p:sp>
-      <p:sp>
-        <p:nvSpPr>
-          <p:cNvPr id="44" name="o101"/>
-          <p:cNvSpPr txBox="1"/>
-          <p:nvPr/>
-        </p:nvSpPr>
-        <p:spPr>
-          <a:xfrm>
-            <a:off x="609600" y="4286250"/>
-            <a:ext cx="476250" cy="209550"/>
+          <p:cNvPr id="56" name="o113"/>
+          <p:cNvSpPr txBox="1"/>
+          <p:nvPr/>
+        </p:nvSpPr>
+        <p:spPr>
+          <a:xfrm>
+            <a:off x="838200" y="4419600"/>
+            <a:ext cx="533400" cy="228600"/>
           </a:xfrm>
           <a:prstGeom prst="rect">
             <a:avLst/>
@@ -14020,14 +14303,14 @@
       </p:sp>
       <p:sp>
         <p:nvSpPr>
-          <p:cNvPr id="45" name="o102"/>
-          <p:cNvSpPr txBox="1"/>
-          <p:nvPr/>
-        </p:nvSpPr>
-        <p:spPr>
-          <a:xfrm>
-            <a:off x="1104900" y="4286250"/>
-            <a:ext cx="1219200" cy="209550"/>
+          <p:cNvPr id="57" name="o114"/>
+          <p:cNvSpPr txBox="1"/>
+          <p:nvPr/>
+        </p:nvSpPr>
+        <p:spPr>
+          <a:xfrm>
+            <a:off x="1390650" y="4419600"/>
+            <a:ext cx="1600200" cy="228600"/>
           </a:xfrm>
           <a:prstGeom prst="rect">
             <a:avLst/>
@@ -14043,7 +14326,7 @@
               <a:buNone/>
             </a:pPr>
             <a:r>
-              <a:rPr lang="en-US" sz="1100" dirty="0">
+              <a:rPr lang="en-US" sz="1200" dirty="0">
                 <a:solidFill>
                   <a:srgbClr val="1A1A1A"/>
                 </a:solidFill>
@@ -14053,63 +14336,40 @@
               </a:rPr>
               <a:t>현장 시범 적용</a:t>
             </a:r>
-            <a:endParaRPr lang="en-US" sz="1100" dirty="0"/>
-          </a:p>
-        </p:txBody>
-      </p:sp>
-      <p:sp>
-        <p:nvSpPr>
-          <p:cNvPr id="46" name="o103"/>
+            <a:endParaRPr lang="en-US" sz="1200" dirty="0"/>
+          </a:p>
+        </p:txBody>
+      </p:sp>
+      <p:sp>
+        <p:nvSpPr>
+          <p:cNvPr id="58" name="o115"/>
           <p:cNvSpPr/>
           <p:nvPr/>
         </p:nvSpPr>
         <p:spPr>
           <a:xfrm>
-            <a:off x="4568571" y="4314825"/>
-            <a:ext cx="1604772" cy="152400"/>
+            <a:off x="6374130" y="4457700"/>
+            <a:ext cx="2432685" cy="152400"/>
           </a:xfrm>
           <a:prstGeom prst="rect">
             <a:avLst/>
           </a:prstGeom>
           <a:solidFill>
-            <a:srgbClr val="9CA3AC"/>
+            <a:srgbClr val="5B636E"/>
           </a:solidFill>
           <a:ln/>
         </p:spPr>
       </p:sp>
       <p:sp>
         <p:nvSpPr>
-          <p:cNvPr id="47" name="o104"/>
-          <p:cNvSpPr/>
-          <p:nvPr/>
-        </p:nvSpPr>
-        <p:spPr>
-          <a:xfrm>
-            <a:off x="609600" y="4572000"/>
-            <a:ext cx="7254240" cy="0"/>
-          </a:xfrm>
-          <a:prstGeom prst="line">
-            <a:avLst/>
-          </a:prstGeom>
-          <a:noFill/>
-          <a:ln w="9525">
-            <a:solidFill>
-              <a:srgbClr val="D6DAD8"/>
-            </a:solidFill>
-            <a:prstDash val="solid"/>
-          </a:ln>
-        </p:spPr>
-      </p:sp>
-      <p:sp>
-        <p:nvSpPr>
-          <p:cNvPr id="48" name="o105"/>
-          <p:cNvSpPr txBox="1"/>
-          <p:nvPr/>
-        </p:nvSpPr>
-        <p:spPr>
-          <a:xfrm>
-            <a:off x="609600" y="4667250"/>
-            <a:ext cx="476250" cy="209550"/>
+          <p:cNvPr id="59" name="o116"/>
+          <p:cNvSpPr txBox="1"/>
+          <p:nvPr/>
+        </p:nvSpPr>
+        <p:spPr>
+          <a:xfrm>
+            <a:off x="838200" y="4781550"/>
+            <a:ext cx="533400" cy="228600"/>
           </a:xfrm>
           <a:prstGeom prst="rect">
             <a:avLst/>
@@ -14141,14 +14401,14 @@
       </p:sp>
       <p:sp>
         <p:nvSpPr>
-          <p:cNvPr id="49" name="o106"/>
-          <p:cNvSpPr txBox="1"/>
-          <p:nvPr/>
-        </p:nvSpPr>
-        <p:spPr>
-          <a:xfrm>
-            <a:off x="1104900" y="4667250"/>
-            <a:ext cx="1219200" cy="209550"/>
+          <p:cNvPr id="60" name="o117"/>
+          <p:cNvSpPr txBox="1"/>
+          <p:nvPr/>
+        </p:nvSpPr>
+        <p:spPr>
+          <a:xfrm>
+            <a:off x="1390650" y="4781550"/>
+            <a:ext cx="1600200" cy="228600"/>
           </a:xfrm>
           <a:prstGeom prst="rect">
             <a:avLst/>
@@ -14164,7 +14424,7 @@
               <a:buNone/>
             </a:pPr>
             <a:r>
-              <a:rPr lang="en-US" sz="1100" dirty="0">
+              <a:rPr lang="en-US" sz="1200" dirty="0">
                 <a:solidFill>
                   <a:srgbClr val="1A1A1A"/>
                 </a:solidFill>
@@ -14174,63 +14434,40 @@
               </a:rPr>
               <a:t>결과 확인</a:t>
             </a:r>
-            <a:endParaRPr lang="en-US" sz="1100" dirty="0"/>
-          </a:p>
-        </p:txBody>
-      </p:sp>
-      <p:sp>
-        <p:nvSpPr>
-          <p:cNvPr id="50" name="o107"/>
+            <a:endParaRPr lang="en-US" sz="1200" dirty="0"/>
+          </a:p>
+        </p:txBody>
+      </p:sp>
+      <p:sp>
+        <p:nvSpPr>
+          <p:cNvPr id="61" name="o118"/>
           <p:cNvSpPr/>
           <p:nvPr/>
         </p:nvSpPr>
         <p:spPr>
           <a:xfrm>
-            <a:off x="5676519" y="4695825"/>
-            <a:ext cx="496824" cy="152400"/>
+            <a:off x="8046720" y="4819650"/>
+            <a:ext cx="760095" cy="152400"/>
           </a:xfrm>
           <a:prstGeom prst="rect">
             <a:avLst/>
           </a:prstGeom>
           <a:solidFill>
-            <a:srgbClr val="5B636E"/>
+            <a:srgbClr val="3A4048"/>
           </a:solidFill>
           <a:ln/>
         </p:spPr>
       </p:sp>
       <p:sp>
         <p:nvSpPr>
-          <p:cNvPr id="51" name="o108"/>
-          <p:cNvSpPr/>
-          <p:nvPr/>
-        </p:nvSpPr>
-        <p:spPr>
-          <a:xfrm>
-            <a:off x="609600" y="4953000"/>
-            <a:ext cx="7254240" cy="0"/>
-          </a:xfrm>
-          <a:prstGeom prst="line">
-            <a:avLst/>
-          </a:prstGeom>
-          <a:noFill/>
-          <a:ln w="9525">
-            <a:solidFill>
-              <a:srgbClr val="D6DAD8"/>
-            </a:solidFill>
-            <a:prstDash val="solid"/>
-          </a:ln>
-        </p:spPr>
-      </p:sp>
-      <p:sp>
-        <p:nvSpPr>
-          <p:cNvPr id="52" name="o109"/>
-          <p:cNvSpPr txBox="1"/>
-          <p:nvPr/>
-        </p:nvSpPr>
-        <p:spPr>
-          <a:xfrm>
-            <a:off x="609600" y="5048250"/>
-            <a:ext cx="476250" cy="209550"/>
+          <p:cNvPr id="62" name="o119"/>
+          <p:cNvSpPr txBox="1"/>
+          <p:nvPr/>
+        </p:nvSpPr>
+        <p:spPr>
+          <a:xfrm>
+            <a:off x="838200" y="5143500"/>
+            <a:ext cx="533400" cy="228600"/>
           </a:xfrm>
           <a:prstGeom prst="rect">
             <a:avLst/>
@@ -14262,14 +14499,14 @@
       </p:sp>
       <p:sp>
         <p:nvSpPr>
-          <p:cNvPr id="53" name="o110"/>
-          <p:cNvSpPr txBox="1"/>
-          <p:nvPr/>
-        </p:nvSpPr>
-        <p:spPr>
-          <a:xfrm>
-            <a:off x="1104900" y="5048250"/>
-            <a:ext cx="1219200" cy="209550"/>
+          <p:cNvPr id="63" name="o120"/>
+          <p:cNvSpPr txBox="1"/>
+          <p:nvPr/>
+        </p:nvSpPr>
+        <p:spPr>
+          <a:xfrm>
+            <a:off x="1390650" y="5143500"/>
+            <a:ext cx="1600200" cy="228600"/>
           </a:xfrm>
           <a:prstGeom prst="rect">
             <a:avLst/>
@@ -14285,7 +14522,7 @@
               <a:buNone/>
             </a:pPr>
             <a:r>
-              <a:rPr lang="en-US" sz="1100" dirty="0">
+              <a:rPr lang="en-US" sz="1200" dirty="0">
                 <a:solidFill>
                   <a:srgbClr val="1A1A1A"/>
                 </a:solidFill>
@@ -14295,20 +14532,20 @@
               </a:rPr>
               <a:t>표준화 · AI 고도화</a:t>
             </a:r>
-            <a:endParaRPr lang="en-US" sz="1100" dirty="0"/>
-          </a:p>
-        </p:txBody>
-      </p:sp>
-      <p:sp>
-        <p:nvSpPr>
-          <p:cNvPr id="54" name="o111"/>
+            <a:endParaRPr lang="en-US" sz="1200" dirty="0"/>
+          </a:p>
+        </p:txBody>
+      </p:sp>
+      <p:sp>
+        <p:nvSpPr>
+          <p:cNvPr id="64" name="o121"/>
           <p:cNvSpPr/>
           <p:nvPr/>
         </p:nvSpPr>
         <p:spPr>
           <a:xfrm>
-            <a:off x="6230493" y="5076825"/>
-            <a:ext cx="1604772" cy="152400"/>
+            <a:off x="8883015" y="5181600"/>
+            <a:ext cx="2432685" cy="152400"/>
           </a:xfrm>
           <a:prstGeom prst="rect">
             <a:avLst/>
@@ -14321,502 +14558,90 @@
       </p:sp>
       <p:sp>
         <p:nvSpPr>
-          <p:cNvPr id="55" name="o112"/>
+          <p:cNvPr id="65" name="o122"/>
+          <p:cNvSpPr txBox="1"/>
+          <p:nvPr/>
+        </p:nvSpPr>
+        <p:spPr>
+          <a:xfrm>
+            <a:off x="838200" y="5505450"/>
+            <a:ext cx="533400" cy="228600"/>
+          </a:xfrm>
+          <a:prstGeom prst="rect">
+            <a:avLst/>
+          </a:prstGeom>
+          <a:noFill/>
+          <a:ln/>
+        </p:spPr>
+        <p:txBody>
+          <a:bodyPr wrap="square" lIns="0" tIns="0" rIns="0" bIns="0" rtlCol="0" anchor="ctr"/>
+          <a:lstStyle/>
+          <a:p>
+            <a:pPr indent="0" marL="0">
+              <a:buNone/>
+            </a:pPr>
+            <a:endParaRPr lang="en-US" sz="900" dirty="0"/>
+          </a:p>
+        </p:txBody>
+      </p:sp>
+      <p:sp>
+        <p:nvSpPr>
+          <p:cNvPr id="66" name="o123"/>
+          <p:cNvSpPr txBox="1"/>
+          <p:nvPr/>
+        </p:nvSpPr>
+        <p:spPr>
+          <a:xfrm>
+            <a:off x="1390650" y="5505450"/>
+            <a:ext cx="1600200" cy="228600"/>
+          </a:xfrm>
+          <a:prstGeom prst="rect">
+            <a:avLst/>
+          </a:prstGeom>
+          <a:noFill/>
+          <a:ln/>
+        </p:spPr>
+        <p:txBody>
+          <a:bodyPr wrap="square" lIns="0" tIns="0" rIns="0" bIns="0" rtlCol="0" anchor="ctr"/>
+          <a:lstStyle/>
+          <a:p>
+            <a:pPr indent="0" marL="0">
+              <a:buNone/>
+            </a:pPr>
+            <a:r>
+              <a:rPr lang="en-US" sz="1200" dirty="0">
+                <a:solidFill>
+                  <a:srgbClr val="1A1A1A"/>
+                </a:solidFill>
+                <a:latin typeface="Pretendard" pitchFamily="34" charset="0"/>
+                <a:ea typeface="Pretendard" pitchFamily="34" charset="-122"/>
+                <a:cs typeface="Pretendard" pitchFamily="34" charset="-120"/>
+              </a:rPr>
+              <a:t>QI 경진대회</a:t>
+            </a:r>
+            <a:endParaRPr lang="en-US" sz="1200" dirty="0"/>
+          </a:p>
+        </p:txBody>
+      </p:sp>
+      <p:sp>
+        <p:nvSpPr>
+          <p:cNvPr id="67" name="o124"/>
           <p:cNvSpPr/>
           <p:nvPr/>
         </p:nvSpPr>
         <p:spPr>
           <a:xfrm>
-            <a:off x="609600" y="5334000"/>
-            <a:ext cx="7254240" cy="0"/>
-          </a:xfrm>
-          <a:prstGeom prst="line">
-            <a:avLst/>
-          </a:prstGeom>
-          <a:noFill/>
-          <a:ln w="9525">
-            <a:solidFill>
-              <a:srgbClr val="D6DAD8"/>
-            </a:solidFill>
-            <a:prstDash val="solid"/>
-          </a:ln>
-        </p:spPr>
-      </p:sp>
-      <p:sp>
-        <p:nvSpPr>
-          <p:cNvPr id="56" name="o113"/>
-          <p:cNvSpPr txBox="1"/>
-          <p:nvPr/>
-        </p:nvSpPr>
-        <p:spPr>
-          <a:xfrm>
-            <a:off x="609600" y="5429250"/>
-            <a:ext cx="476250" cy="209550"/>
-          </a:xfrm>
-          <a:prstGeom prst="rect">
-            <a:avLst/>
-          </a:prstGeom>
-          <a:noFill/>
-          <a:ln/>
-        </p:spPr>
-        <p:txBody>
-          <a:bodyPr wrap="square" lIns="0" tIns="0" rIns="0" bIns="0" rtlCol="0" anchor="ctr"/>
-          <a:lstStyle/>
-          <a:p>
-            <a:pPr indent="0" marL="0">
-              <a:buNone/>
-            </a:pPr>
-            <a:endParaRPr lang="en-US" sz="900" dirty="0"/>
-          </a:p>
-        </p:txBody>
-      </p:sp>
-      <p:sp>
-        <p:nvSpPr>
-          <p:cNvPr id="57" name="o114"/>
-          <p:cNvSpPr txBox="1"/>
-          <p:nvPr/>
-        </p:nvSpPr>
-        <p:spPr>
-          <a:xfrm>
-            <a:off x="1104900" y="5429250"/>
-            <a:ext cx="1219200" cy="209550"/>
-          </a:xfrm>
-          <a:prstGeom prst="rect">
-            <a:avLst/>
-          </a:prstGeom>
-          <a:noFill/>
-          <a:ln/>
-        </p:spPr>
-        <p:txBody>
-          <a:bodyPr wrap="square" lIns="0" tIns="0" rIns="0" bIns="0" rtlCol="0" anchor="ctr"/>
-          <a:lstStyle/>
-          <a:p>
-            <a:pPr indent="0" marL="0">
-              <a:buNone/>
-            </a:pPr>
-            <a:r>
-              <a:rPr lang="en-US" sz="1100" dirty="0">
-                <a:solidFill>
-                  <a:srgbClr val="1A1A1A"/>
-                </a:solidFill>
-                <a:latin typeface="Pretendard" pitchFamily="34" charset="0"/>
-                <a:ea typeface="Pretendard" pitchFamily="34" charset="-122"/>
-                <a:cs typeface="Pretendard" pitchFamily="34" charset="-120"/>
-              </a:rPr>
-              <a:t>QI 경진대회</a:t>
-            </a:r>
-            <a:endParaRPr lang="en-US" sz="1100" dirty="0"/>
-          </a:p>
-        </p:txBody>
-      </p:sp>
-      <p:sp>
-        <p:nvSpPr>
-          <p:cNvPr id="58" name="o115"/>
-          <p:cNvSpPr/>
-          <p:nvPr/>
-        </p:nvSpPr>
-        <p:spPr>
-          <a:xfrm>
-            <a:off x="6784467" y="5457825"/>
-            <a:ext cx="496824" cy="152400"/>
+            <a:off x="9719310" y="5543550"/>
+            <a:ext cx="760095" cy="152400"/>
           </a:xfrm>
           <a:prstGeom prst="rect">
             <a:avLst/>
           </a:prstGeom>
           <a:solidFill>
-            <a:srgbClr val="5B636E"/>
+            <a:srgbClr val="3A4048"/>
           </a:solidFill>
           <a:ln/>
         </p:spPr>
-      </p:sp>
-      <p:sp>
-        <p:nvSpPr>
-          <p:cNvPr id="59" name="o116"/>
-          <p:cNvSpPr/>
-          <p:nvPr/>
-        </p:nvSpPr>
-        <p:spPr>
-          <a:xfrm>
-            <a:off x="609600" y="5715000"/>
-            <a:ext cx="7254240" cy="0"/>
-          </a:xfrm>
-          <a:prstGeom prst="line">
-            <a:avLst/>
-          </a:prstGeom>
-          <a:noFill/>
-          <a:ln w="9525">
-            <a:solidFill>
-              <a:srgbClr val="D6DAD8"/>
-            </a:solidFill>
-            <a:prstDash val="solid"/>
-          </a:ln>
-        </p:spPr>
-      </p:sp>
-      <p:sp>
-        <p:nvSpPr>
-          <p:cNvPr id="60" name="o117"/>
-          <p:cNvSpPr/>
-          <p:nvPr/>
-        </p:nvSpPr>
-        <p:spPr>
-          <a:xfrm>
-            <a:off x="8046720" y="3200400"/>
-            <a:ext cx="3535680" cy="876300"/>
-          </a:xfrm>
-          <a:prstGeom prst="rect">
-            <a:avLst/>
-          </a:prstGeom>
-          <a:solidFill>
-            <a:srgbClr val="FFFFFF"/>
-          </a:solidFill>
-          <a:ln w="9525">
-            <a:solidFill>
-              <a:srgbClr val="D6DAD8"/>
-            </a:solidFill>
-            <a:prstDash val="solid"/>
-          </a:ln>
-        </p:spPr>
-      </p:sp>
-      <p:sp>
-        <p:nvSpPr>
-          <p:cNvPr id="61" name="o118"/>
-          <p:cNvSpPr txBox="1"/>
-          <p:nvPr/>
-        </p:nvSpPr>
-        <p:spPr>
-          <a:xfrm>
-            <a:off x="8180070" y="3314700"/>
-            <a:ext cx="3268980" cy="171450"/>
-          </a:xfrm>
-          <a:prstGeom prst="rect">
-            <a:avLst/>
-          </a:prstGeom>
-          <a:noFill/>
-          <a:ln/>
-        </p:spPr>
-        <p:txBody>
-          <a:bodyPr wrap="square" lIns="0" tIns="0" rIns="0" bIns="0" rtlCol="0" anchor="t"/>
-          <a:lstStyle/>
-          <a:p>
-            <a:pPr indent="0" marL="0">
-              <a:buNone/>
-            </a:pPr>
-            <a:r>
-              <a:rPr lang="en-US" sz="1000" dirty="0">
-                <a:solidFill>
-                  <a:srgbClr val="5B636E"/>
-                </a:solidFill>
-                <a:latin typeface="Pretendard" pitchFamily="34" charset="0"/>
-                <a:ea typeface="Pretendard" pitchFamily="34" charset="-122"/>
-                <a:cs typeface="Pretendard" pitchFamily="34" charset="-120"/>
-              </a:rPr>
-              <a:t>개발 방식</a:t>
-            </a:r>
-            <a:endParaRPr lang="en-US" sz="1000" dirty="0"/>
-          </a:p>
-        </p:txBody>
-      </p:sp>
-      <p:sp>
-        <p:nvSpPr>
-          <p:cNvPr id="62" name="o119"/>
-          <p:cNvSpPr txBox="1"/>
-          <p:nvPr/>
-        </p:nvSpPr>
-        <p:spPr>
-          <a:xfrm>
-            <a:off x="8180070" y="3486150"/>
-            <a:ext cx="3268980" cy="381000"/>
-          </a:xfrm>
-          <a:prstGeom prst="rect">
-            <a:avLst/>
-          </a:prstGeom>
-          <a:noFill/>
-          <a:ln/>
-        </p:spPr>
-        <p:txBody>
-          <a:bodyPr wrap="square" lIns="0" tIns="0" rIns="0" bIns="0" rtlCol="0" anchor="t"/>
-          <a:lstStyle/>
-          <a:p>
-            <a:pPr indent="0" marL="0">
-              <a:buNone/>
-            </a:pPr>
-            <a:r>
-              <a:rPr lang="en-US" sz="2400" b="1" dirty="0">
-                <a:solidFill>
-                  <a:srgbClr val="1A1A1A"/>
-                </a:solidFill>
-                <a:latin typeface="IBM Plex Sans" pitchFamily="34" charset="0"/>
-                <a:ea typeface="IBM Plex Sans" pitchFamily="34" charset="-122"/>
-                <a:cs typeface="IBM Plex Sans" pitchFamily="34" charset="-120"/>
-              </a:rPr>
-              <a:t>자체 개발</a:t>
-            </a:r>
-            <a:endParaRPr lang="en-US" sz="2400" dirty="0"/>
-          </a:p>
-        </p:txBody>
-      </p:sp>
-      <p:sp>
-        <p:nvSpPr>
-          <p:cNvPr id="63" name="o120"/>
-          <p:cNvSpPr txBox="1"/>
-          <p:nvPr/>
-        </p:nvSpPr>
-        <p:spPr>
-          <a:xfrm>
-            <a:off x="8180070" y="3848100"/>
-            <a:ext cx="3268980" cy="171450"/>
-          </a:xfrm>
-          <a:prstGeom prst="rect">
-            <a:avLst/>
-          </a:prstGeom>
-          <a:noFill/>
-          <a:ln/>
-        </p:spPr>
-        <p:txBody>
-          <a:bodyPr wrap="square" lIns="0" tIns="0" rIns="0" bIns="0" rtlCol="0" anchor="t"/>
-          <a:lstStyle/>
-          <a:p>
-            <a:pPr indent="0" marL="0">
-              <a:buNone/>
-            </a:pPr>
-            <a:r>
-              <a:rPr lang="en-US" sz="1100" b="1" dirty="0">
-                <a:solidFill>
-                  <a:srgbClr val="177B57"/>
-                </a:solidFill>
-                <a:latin typeface="Pretendard" pitchFamily="34" charset="0"/>
-                <a:ea typeface="Pretendard" pitchFamily="34" charset="-122"/>
-                <a:cs typeface="Pretendard" pitchFamily="34" charset="-120"/>
-              </a:rPr>
-              <a:t>외주 · 별도 예산 없음</a:t>
-            </a:r>
-            <a:endParaRPr lang="en-US" sz="1100" dirty="0"/>
-          </a:p>
-        </p:txBody>
-      </p:sp>
-      <p:sp>
-        <p:nvSpPr>
-          <p:cNvPr id="64" name="o121"/>
-          <p:cNvSpPr/>
-          <p:nvPr/>
-        </p:nvSpPr>
-        <p:spPr>
-          <a:xfrm>
-            <a:off x="8046720" y="4191000"/>
-            <a:ext cx="3535680" cy="876300"/>
-          </a:xfrm>
-          <a:prstGeom prst="rect">
-            <a:avLst/>
-          </a:prstGeom>
-          <a:solidFill>
-            <a:srgbClr val="FFFFFF"/>
-          </a:solidFill>
-          <a:ln w="9525">
-            <a:solidFill>
-              <a:srgbClr val="D6DAD8"/>
-            </a:solidFill>
-            <a:prstDash val="solid"/>
-          </a:ln>
-        </p:spPr>
-      </p:sp>
-      <p:sp>
-        <p:nvSpPr>
-          <p:cNvPr id="65" name="o122"/>
-          <p:cNvSpPr txBox="1"/>
-          <p:nvPr/>
-        </p:nvSpPr>
-        <p:spPr>
-          <a:xfrm>
-            <a:off x="8180070" y="4305300"/>
-            <a:ext cx="3268980" cy="171450"/>
-          </a:xfrm>
-          <a:prstGeom prst="rect">
-            <a:avLst/>
-          </a:prstGeom>
-          <a:noFill/>
-          <a:ln/>
-        </p:spPr>
-        <p:txBody>
-          <a:bodyPr wrap="square" lIns="0" tIns="0" rIns="0" bIns="0" rtlCol="0" anchor="t"/>
-          <a:lstStyle/>
-          <a:p>
-            <a:pPr indent="0" marL="0">
-              <a:buNone/>
-            </a:pPr>
-            <a:r>
-              <a:rPr lang="en-US" sz="1000" dirty="0">
-                <a:solidFill>
-                  <a:srgbClr val="5B636E"/>
-                </a:solidFill>
-                <a:latin typeface="Pretendard" pitchFamily="34" charset="0"/>
-                <a:ea typeface="Pretendard" pitchFamily="34" charset="-122"/>
-                <a:cs typeface="Pretendard" pitchFamily="34" charset="-120"/>
-              </a:rPr>
-              <a:t>시범 적용 범위</a:t>
-            </a:r>
-            <a:endParaRPr lang="en-US" sz="1000" dirty="0"/>
-          </a:p>
-        </p:txBody>
-      </p:sp>
-      <p:sp>
-        <p:nvSpPr>
-          <p:cNvPr id="66" name="o123"/>
-          <p:cNvSpPr txBox="1"/>
-          <p:nvPr/>
-        </p:nvSpPr>
-        <p:spPr>
-          <a:xfrm>
-            <a:off x="8180070" y="4476750"/>
-            <a:ext cx="3268980" cy="381000"/>
-          </a:xfrm>
-          <a:prstGeom prst="rect">
-            <a:avLst/>
-          </a:prstGeom>
-          <a:noFill/>
-          <a:ln/>
-        </p:spPr>
-        <p:txBody>
-          <a:bodyPr wrap="square" lIns="0" tIns="0" rIns="0" bIns="0" rtlCol="0" anchor="t"/>
-          <a:lstStyle/>
-          <a:p>
-            <a:pPr indent="0" marL="0">
-              <a:buNone/>
-            </a:pPr>
-            <a:r>
-              <a:rPr lang="en-US" sz="2400" b="1" dirty="0">
-                <a:solidFill>
-                  <a:srgbClr val="1A1A1A"/>
-                </a:solidFill>
-                <a:latin typeface="IBM Plex Sans" pitchFamily="34" charset="0"/>
-                <a:ea typeface="IBM Plex Sans" pitchFamily="34" charset="-122"/>
-                <a:cs typeface="IBM Plex Sans" pitchFamily="34" charset="-120"/>
-              </a:rPr>
-              <a:t>전 부서</a:t>
-            </a:r>
-            <a:endParaRPr lang="en-US" sz="2400" dirty="0"/>
-          </a:p>
-        </p:txBody>
-      </p:sp>
-      <p:sp>
-        <p:nvSpPr>
-          <p:cNvPr id="67" name="o124"/>
-          <p:cNvSpPr txBox="1"/>
-          <p:nvPr/>
-        </p:nvSpPr>
-        <p:spPr>
-          <a:xfrm>
-            <a:off x="8180070" y="4838700"/>
-            <a:ext cx="3268980" cy="171450"/>
-          </a:xfrm>
-          <a:prstGeom prst="rect">
-            <a:avLst/>
-          </a:prstGeom>
-          <a:noFill/>
-          <a:ln/>
-        </p:spPr>
-        <p:txBody>
-          <a:bodyPr wrap="square" lIns="0" tIns="0" rIns="0" bIns="0" rtlCol="0" anchor="t"/>
-          <a:lstStyle/>
-          <a:p>
-            <a:pPr indent="0" marL="0">
-              <a:buNone/>
-            </a:pPr>
-            <a:r>
-              <a:rPr lang="en-US" sz="1100" b="1" dirty="0">
-                <a:solidFill>
-                  <a:srgbClr val="5B636E"/>
-                </a:solidFill>
-                <a:latin typeface="Pretendard" pitchFamily="34" charset="0"/>
-                <a:ea typeface="Pretendard" pitchFamily="34" charset="-122"/>
-                <a:cs typeface="Pretendard" pitchFamily="34" charset="-120"/>
-              </a:rPr>
-              <a:t>2026.05–07 · 3개월</a:t>
-            </a:r>
-            <a:endParaRPr lang="en-US" sz="1100" dirty="0"/>
-          </a:p>
-        </p:txBody>
-      </p:sp>
-      <p:sp>
-        <p:nvSpPr>
-          <p:cNvPr id="68" name="o125"/>
-          <p:cNvSpPr/>
-          <p:nvPr/>
-        </p:nvSpPr>
-        <p:spPr>
-          <a:xfrm>
-            <a:off x="8046720" y="5181600"/>
-            <a:ext cx="3535680" cy="762000"/>
-          </a:xfrm>
-          <a:prstGeom prst="rect">
-            <a:avLst/>
-          </a:prstGeom>
-          <a:solidFill>
-            <a:srgbClr val="F2F4F3"/>
-          </a:solidFill>
-          <a:ln/>
-        </p:spPr>
-      </p:sp>
-      <p:sp>
-        <p:nvSpPr>
-          <p:cNvPr id="69" name="o126"/>
-          <p:cNvSpPr/>
-          <p:nvPr/>
-        </p:nvSpPr>
-        <p:spPr>
-          <a:xfrm>
-            <a:off x="8046720" y="5181600"/>
-            <a:ext cx="91440" cy="762000"/>
-          </a:xfrm>
-          <a:prstGeom prst="rect">
-            <a:avLst/>
-          </a:prstGeom>
-          <a:solidFill>
-            <a:srgbClr val="177B57"/>
-          </a:solidFill>
-          <a:ln/>
-        </p:spPr>
-      </p:sp>
-      <p:sp>
-        <p:nvSpPr>
-          <p:cNvPr id="70" name="o127"/>
-          <p:cNvSpPr txBox="1"/>
-          <p:nvPr/>
-        </p:nvSpPr>
-        <p:spPr>
-          <a:xfrm>
-            <a:off x="8281035" y="5324475"/>
-            <a:ext cx="3158490" cy="476250"/>
-          </a:xfrm>
-          <a:prstGeom prst="rect">
-            <a:avLst/>
-          </a:prstGeom>
-          <a:noFill/>
-          <a:ln/>
-        </p:spPr>
-        <p:txBody>
-          <a:bodyPr wrap="square" lIns="0" tIns="0" rIns="0" bIns="0" rtlCol="0" anchor="ctr"/>
-          <a:lstStyle/>
-          <a:p>
-            <a:pPr indent="0" marL="0">
-              <a:lnSpc>
-                <a:spcPct val="130000"/>
-              </a:lnSpc>
-              <a:buNone/>
-            </a:pPr>
-            <a:r>
-              <a:rPr lang="en-US" sz="1200" b="1" dirty="0">
-                <a:solidFill>
-                  <a:srgbClr val="1A1A1A"/>
-                </a:solidFill>
-                <a:latin typeface="Pretendard" pitchFamily="34" charset="0"/>
-                <a:ea typeface="Pretendard" pitchFamily="34" charset="-122"/>
-                <a:cs typeface="Pretendard" pitchFamily="34" charset="-120"/>
-              </a:rPr>
-              <a:t>현장 피드백으로 신규입사 알림 · 현장 사진 기능을 추가했다</a:t>
-            </a:r>
-            <a:endParaRPr lang="en-US" sz="1200" dirty="0"/>
-          </a:p>
-        </p:txBody>
       </p:sp>
     </p:spTree>
   </p:cSld>
@@ -14845,7 +14670,7 @@
       </p:grpSpPr>
       <p:sp>
         <p:nvSpPr>
-          <p:cNvPr id="2" name="o128"/>
+          <p:cNvPr id="2" name="o125"/>
           <p:cNvSpPr txBox="1"/>
           <p:nvPr/>
         </p:nvSpPr>
@@ -14884,7 +14709,7 @@
       </p:sp>
       <p:sp>
         <p:nvSpPr>
-          <p:cNvPr id="3" name="o129"/>
+          <p:cNvPr id="3" name="o126"/>
           <p:cNvSpPr txBox="1"/>
           <p:nvPr/>
         </p:nvSpPr>
@@ -14926,7 +14751,7 @@
       </p:sp>
       <p:sp>
         <p:nvSpPr>
-          <p:cNvPr id="4" name="o130"/>
+          <p:cNvPr id="4" name="o127"/>
           <p:cNvSpPr txBox="1"/>
           <p:nvPr/>
         </p:nvSpPr>
@@ -14965,7 +14790,7 @@
       </p:sp>
       <p:sp>
         <p:nvSpPr>
-          <p:cNvPr id="5" name="o131"/>
+          <p:cNvPr id="5" name="o128"/>
           <p:cNvSpPr/>
           <p:nvPr/>
         </p:nvSpPr>
@@ -14988,7 +14813,7 @@
       </p:sp>
       <p:sp>
         <p:nvSpPr>
-          <p:cNvPr id="6" name="o132"/>
+          <p:cNvPr id="6" name="o129"/>
           <p:cNvSpPr txBox="1"/>
           <p:nvPr/>
         </p:nvSpPr>
@@ -15027,7 +14852,7 @@
       </p:sp>
       <p:sp>
         <p:nvSpPr>
-          <p:cNvPr id="7" name="o133"/>
+          <p:cNvPr id="7" name="o130"/>
           <p:cNvSpPr txBox="1"/>
           <p:nvPr/>
         </p:nvSpPr>
@@ -15066,7 +14891,7 @@
       </p:sp>
       <p:sp>
         <p:nvSpPr>
-          <p:cNvPr id="8" name="o134"/>
+          <p:cNvPr id="8" name="o131"/>
           <p:cNvSpPr txBox="1"/>
           <p:nvPr/>
         </p:nvSpPr>
@@ -15105,7 +14930,7 @@
       </p:sp>
       <p:sp>
         <p:nvSpPr>
-          <p:cNvPr id="9" name="o135"/>
+          <p:cNvPr id="9" name="o132"/>
           <p:cNvSpPr txBox="1"/>
           <p:nvPr/>
         </p:nvSpPr>
@@ -15144,7 +14969,7 @@
       </p:sp>
       <p:sp>
         <p:nvSpPr>
-          <p:cNvPr id="10" name="o136"/>
+          <p:cNvPr id="10" name="o133"/>
           <p:cNvSpPr txBox="1"/>
           <p:nvPr/>
         </p:nvSpPr>
@@ -15226,7 +15051,7 @@
       </p:sp>
       <p:sp>
         <p:nvSpPr>
-          <p:cNvPr id="11" name="o137"/>
+          <p:cNvPr id="11" name="o134"/>
           <p:cNvSpPr/>
           <p:nvPr/>
         </p:nvSpPr>
@@ -15249,7 +15074,7 @@
       </p:sp>
       <p:sp>
         <p:nvSpPr>
-          <p:cNvPr id="12" name="o138"/>
+          <p:cNvPr id="12" name="o135"/>
           <p:cNvSpPr txBox="1"/>
           <p:nvPr/>
         </p:nvSpPr>
@@ -15288,7 +15113,7 @@
       </p:sp>
       <p:sp>
         <p:nvSpPr>
-          <p:cNvPr id="13" name="o139"/>
+          <p:cNvPr id="13" name="o136"/>
           <p:cNvSpPr txBox="1"/>
           <p:nvPr/>
         </p:nvSpPr>
@@ -15327,7 +15152,7 @@
       </p:sp>
       <p:sp>
         <p:nvSpPr>
-          <p:cNvPr id="14" name="o140"/>
+          <p:cNvPr id="14" name="o137"/>
           <p:cNvSpPr txBox="1"/>
           <p:nvPr/>
         </p:nvSpPr>
@@ -15366,7 +15191,7 @@
       </p:sp>
       <p:sp>
         <p:nvSpPr>
-          <p:cNvPr id="15" name="o141"/>
+          <p:cNvPr id="15" name="o138"/>
           <p:cNvSpPr txBox="1"/>
           <p:nvPr/>
         </p:nvSpPr>
@@ -15405,7 +15230,7 @@
       </p:sp>
       <p:sp>
         <p:nvSpPr>
-          <p:cNvPr id="16" name="o142"/>
+          <p:cNvPr id="16" name="o139"/>
           <p:cNvSpPr txBox="1"/>
           <p:nvPr/>
         </p:nvSpPr>
@@ -15487,7 +15312,7 @@
       </p:sp>
       <p:sp>
         <p:nvSpPr>
-          <p:cNvPr id="17" name="o143"/>
+          <p:cNvPr id="17" name="o140"/>
           <p:cNvSpPr/>
           <p:nvPr/>
         </p:nvSpPr>
@@ -15510,7 +15335,7 @@
       </p:sp>
       <p:sp>
         <p:nvSpPr>
-          <p:cNvPr id="18" name="o144"/>
+          <p:cNvPr id="18" name="o141"/>
           <p:cNvSpPr txBox="1"/>
           <p:nvPr/>
         </p:nvSpPr>
@@ -15549,7 +15374,7 @@
       </p:sp>
       <p:sp>
         <p:nvSpPr>
-          <p:cNvPr id="19" name="o145"/>
+          <p:cNvPr id="19" name="o142"/>
           <p:cNvSpPr txBox="1"/>
           <p:nvPr/>
         </p:nvSpPr>
@@ -15588,7 +15413,7 @@
       </p:sp>
       <p:sp>
         <p:nvSpPr>
-          <p:cNvPr id="20" name="o146"/>
+          <p:cNvPr id="20" name="o143"/>
           <p:cNvSpPr txBox="1"/>
           <p:nvPr/>
         </p:nvSpPr>
@@ -15627,7 +15452,7 @@
       </p:sp>
       <p:sp>
         <p:nvSpPr>
-          <p:cNvPr id="21" name="o147"/>
+          <p:cNvPr id="21" name="o144"/>
           <p:cNvSpPr txBox="1"/>
           <p:nvPr/>
         </p:nvSpPr>
@@ -15666,7 +15491,7 @@
       </p:sp>
       <p:sp>
         <p:nvSpPr>
-          <p:cNvPr id="22" name="o148"/>
+          <p:cNvPr id="22" name="o145"/>
           <p:cNvSpPr txBox="1"/>
           <p:nvPr/>
         </p:nvSpPr>
@@ -15748,7 +15573,7 @@
       </p:sp>
       <p:sp>
         <p:nvSpPr>
-          <p:cNvPr id="23" name="o149"/>
+          <p:cNvPr id="23" name="o146"/>
           <p:cNvSpPr/>
           <p:nvPr/>
         </p:nvSpPr>
@@ -15771,7 +15596,7 @@
       </p:sp>
       <p:sp>
         <p:nvSpPr>
-          <p:cNvPr id="24" name="o150"/>
+          <p:cNvPr id="24" name="o147"/>
           <p:cNvSpPr txBox="1"/>
           <p:nvPr/>
         </p:nvSpPr>
@@ -15810,7 +15635,7 @@
       </p:sp>
       <p:sp>
         <p:nvSpPr>
-          <p:cNvPr id="25" name="o151"/>
+          <p:cNvPr id="25" name="o148"/>
           <p:cNvSpPr txBox="1"/>
           <p:nvPr/>
         </p:nvSpPr>
@@ -15849,7 +15674,7 @@
       </p:sp>
       <p:sp>
         <p:nvSpPr>
-          <p:cNvPr id="26" name="o152"/>
+          <p:cNvPr id="26" name="o149"/>
           <p:cNvSpPr txBox="1"/>
           <p:nvPr/>
         </p:nvSpPr>
@@ -15888,7 +15713,7 @@
       </p:sp>
       <p:sp>
         <p:nvSpPr>
-          <p:cNvPr id="27" name="o153"/>
+          <p:cNvPr id="27" name="o150"/>
           <p:cNvSpPr/>
           <p:nvPr/>
         </p:nvSpPr>
@@ -15908,7 +15733,7 @@
       </p:sp>
       <p:sp>
         <p:nvSpPr>
-          <p:cNvPr id="28" name="o154"/>
+          <p:cNvPr id="28" name="o151"/>
           <p:cNvSpPr txBox="1"/>
           <p:nvPr/>
         </p:nvSpPr>
@@ -15947,7 +15772,7 @@
       </p:sp>
       <p:sp>
         <p:nvSpPr>
-          <p:cNvPr id="29" name="o155"/>
+          <p:cNvPr id="29" name="o152"/>
           <p:cNvSpPr txBox="1"/>
           <p:nvPr/>
         </p:nvSpPr>
@@ -15986,7 +15811,7 @@
       </p:sp>
       <p:sp>
         <p:nvSpPr>
-          <p:cNvPr id="30" name="o156"/>
+          <p:cNvPr id="30" name="o153"/>
           <p:cNvSpPr txBox="1"/>
           <p:nvPr/>
         </p:nvSpPr>
@@ -16025,7 +15850,7 @@
       </p:sp>
       <p:sp>
         <p:nvSpPr>
-          <p:cNvPr id="31" name="o157"/>
+          <p:cNvPr id="31" name="o154"/>
           <p:cNvSpPr/>
           <p:nvPr/>
         </p:nvSpPr>
@@ -16048,7 +15873,7 @@
       </p:sp>
       <p:sp>
         <p:nvSpPr>
-          <p:cNvPr id="32" name="o158"/>
+          <p:cNvPr id="32" name="o155"/>
           <p:cNvSpPr txBox="1"/>
           <p:nvPr/>
         </p:nvSpPr>
@@ -16087,7 +15912,7 @@
       </p:sp>
       <p:sp>
         <p:nvSpPr>
-          <p:cNvPr id="33" name="o159"/>
+          <p:cNvPr id="33" name="o156"/>
           <p:cNvSpPr txBox="1"/>
           <p:nvPr/>
         </p:nvSpPr>
@@ -16126,7 +15951,7 @@
       </p:sp>
       <p:sp>
         <p:nvSpPr>
-          <p:cNvPr id="34" name="o160"/>
+          <p:cNvPr id="34" name="o157"/>
           <p:cNvSpPr txBox="1"/>
           <p:nvPr/>
         </p:nvSpPr>
@@ -16165,7 +15990,7 @@
       </p:sp>
       <p:sp>
         <p:nvSpPr>
-          <p:cNvPr id="35" name="o161"/>
+          <p:cNvPr id="35" name="o158"/>
           <p:cNvSpPr/>
           <p:nvPr/>
         </p:nvSpPr>
@@ -16188,7 +16013,7 @@
       </p:sp>
       <p:sp>
         <p:nvSpPr>
-          <p:cNvPr id="36" name="o162"/>
+          <p:cNvPr id="36" name="o159"/>
           <p:cNvSpPr txBox="1"/>
           <p:nvPr/>
         </p:nvSpPr>
@@ -16227,7 +16052,7 @@
       </p:sp>
       <p:sp>
         <p:nvSpPr>
-          <p:cNvPr id="37" name="o163"/>
+          <p:cNvPr id="37" name="o160"/>
           <p:cNvSpPr txBox="1"/>
           <p:nvPr/>
         </p:nvSpPr>
@@ -16266,7 +16091,7 @@
       </p:sp>
       <p:sp>
         <p:nvSpPr>
-          <p:cNvPr id="38" name="o164"/>
+          <p:cNvPr id="38" name="o161"/>
           <p:cNvSpPr txBox="1"/>
           <p:nvPr/>
         </p:nvSpPr>
@@ -16305,7 +16130,7 @@
       </p:sp>
       <p:sp>
         <p:nvSpPr>
-          <p:cNvPr id="39" name="o165"/>
+          <p:cNvPr id="39" name="o162"/>
           <p:cNvSpPr/>
           <p:nvPr/>
         </p:nvSpPr>
@@ -16328,7 +16153,7 @@
       </p:sp>
       <p:sp>
         <p:nvSpPr>
-          <p:cNvPr id="40" name="o166"/>
+          <p:cNvPr id="40" name="o163"/>
           <p:cNvSpPr txBox="1"/>
           <p:nvPr/>
         </p:nvSpPr>
@@ -16367,7 +16192,7 @@
       </p:sp>
       <p:sp>
         <p:nvSpPr>
-          <p:cNvPr id="41" name="o167"/>
+          <p:cNvPr id="41" name="o164"/>
           <p:cNvSpPr txBox="1"/>
           <p:nvPr/>
         </p:nvSpPr>
@@ -16406,7 +16231,7 @@
       </p:sp>
       <p:sp>
         <p:nvSpPr>
-          <p:cNvPr id="42" name="o168"/>
+          <p:cNvPr id="42" name="o165"/>
           <p:cNvSpPr txBox="1"/>
           <p:nvPr/>
         </p:nvSpPr>
@@ -16445,7 +16270,7 @@
       </p:sp>
       <p:sp>
         <p:nvSpPr>
-          <p:cNvPr id="43" name="o169"/>
+          <p:cNvPr id="43" name="o166"/>
           <p:cNvSpPr/>
           <p:nvPr/>
         </p:nvSpPr>
@@ -16468,7 +16293,7 @@
       </p:sp>
       <p:sp>
         <p:nvSpPr>
-          <p:cNvPr id="44" name="o170"/>
+          <p:cNvPr id="44" name="o167"/>
           <p:cNvSpPr txBox="1"/>
           <p:nvPr/>
         </p:nvSpPr>
@@ -16507,7 +16332,7 @@
       </p:sp>
       <p:sp>
         <p:nvSpPr>
-          <p:cNvPr id="45" name="o171"/>
+          <p:cNvPr id="45" name="o168"/>
           <p:cNvSpPr txBox="1"/>
           <p:nvPr/>
         </p:nvSpPr>
@@ -16546,7 +16371,7 @@
       </p:sp>
       <p:sp>
         <p:nvSpPr>
-          <p:cNvPr id="46" name="o172"/>
+          <p:cNvPr id="46" name="o169"/>
           <p:cNvSpPr txBox="1"/>
           <p:nvPr/>
         </p:nvSpPr>
@@ -16585,7 +16410,7 @@
       </p:sp>
       <p:sp>
         <p:nvSpPr>
-          <p:cNvPr id="47" name="o173"/>
+          <p:cNvPr id="47" name="o170"/>
           <p:cNvSpPr/>
           <p:nvPr/>
         </p:nvSpPr>
@@ -16608,7 +16433,7 @@
       </p:sp>
       <p:sp>
         <p:nvSpPr>
-          <p:cNvPr id="48" name="o174"/>
+          <p:cNvPr id="48" name="o171"/>
           <p:cNvSpPr/>
           <p:nvPr/>
         </p:nvSpPr>
@@ -16631,7 +16456,7 @@
       </p:sp>
       <p:sp>
         <p:nvSpPr>
-          <p:cNvPr id="49" name="o175"/>
+          <p:cNvPr id="49" name="o172"/>
           <p:cNvSpPr/>
           <p:nvPr/>
         </p:nvSpPr>
@@ -16651,7 +16476,7 @@
       </p:sp>
       <p:sp>
         <p:nvSpPr>
-          <p:cNvPr id="50" name="o176"/>
+          <p:cNvPr id="50" name="o173"/>
           <p:cNvSpPr/>
           <p:nvPr/>
         </p:nvSpPr>
@@ -16671,7 +16496,7 @@
       </p:sp>
       <p:sp>
         <p:nvSpPr>
-          <p:cNvPr id="51" name="o177"/>
+          <p:cNvPr id="51" name="o174"/>
           <p:cNvSpPr txBox="1"/>
           <p:nvPr/>
         </p:nvSpPr>
@@ -16758,7 +16583,7 @@
       </p:grpSpPr>
       <p:sp>
         <p:nvSpPr>
-          <p:cNvPr id="2" name="o178"/>
+          <p:cNvPr id="2" name="o175"/>
           <p:cNvSpPr txBox="1"/>
           <p:nvPr/>
         </p:nvSpPr>
@@ -16797,7 +16622,7 @@
       </p:sp>
       <p:sp>
         <p:nvSpPr>
-          <p:cNvPr id="3" name="o179"/>
+          <p:cNvPr id="3" name="o176"/>
           <p:cNvSpPr txBox="1"/>
           <p:nvPr/>
         </p:nvSpPr>
@@ -16839,7 +16664,7 @@
       </p:sp>
       <p:sp>
         <p:nvSpPr>
-          <p:cNvPr id="4" name="o180"/>
+          <p:cNvPr id="4" name="o177"/>
           <p:cNvSpPr txBox="1"/>
           <p:nvPr/>
         </p:nvSpPr>
@@ -16878,7 +16703,7 @@
       </p:sp>
       <p:sp>
         <p:nvSpPr>
-          <p:cNvPr id="5" name="o181"/>
+          <p:cNvPr id="5" name="o178"/>
           <p:cNvSpPr/>
           <p:nvPr/>
         </p:nvSpPr>
@@ -16901,7 +16726,7 @@
       </p:sp>
       <p:sp>
         <p:nvSpPr>
-          <p:cNvPr id="6" name="o182"/>
+          <p:cNvPr id="6" name="o179"/>
           <p:cNvSpPr txBox="1"/>
           <p:nvPr/>
         </p:nvSpPr>
@@ -16940,7 +16765,7 @@
       </p:sp>
       <p:sp>
         <p:nvSpPr>
-          <p:cNvPr id="7" name="o183"/>
+          <p:cNvPr id="7" name="o180"/>
           <p:cNvSpPr txBox="1"/>
           <p:nvPr/>
         </p:nvSpPr>
@@ -16979,7 +16804,7 @@
       </p:sp>
       <p:sp>
         <p:nvSpPr>
-          <p:cNvPr id="8" name="o184"/>
+          <p:cNvPr id="8" name="o181"/>
           <p:cNvSpPr txBox="1"/>
           <p:nvPr/>
         </p:nvSpPr>
@@ -17018,7 +16843,7 @@
       </p:sp>
       <p:sp>
         <p:nvSpPr>
-          <p:cNvPr id="9" name="o185"/>
+          <p:cNvPr id="9" name="o182"/>
           <p:cNvSpPr txBox="1"/>
           <p:nvPr/>
         </p:nvSpPr>
@@ -17057,7 +16882,7 @@
       </p:sp>
       <p:graphicFrame>
         <p:nvGraphicFramePr>
-          <p:cNvPr id="10" name="o186" descr=""/>
+          <p:cNvPr id="10" name="o183" descr=""/>
           <p:cNvGraphicFramePr/>
           <p:nvPr/>
         </p:nvGraphicFramePr>
@@ -17073,7 +16898,7 @@
       </p:graphicFrame>
       <p:sp>
         <p:nvSpPr>
-          <p:cNvPr id="11" name="o187"/>
+          <p:cNvPr id="11" name="o184"/>
           <p:cNvSpPr txBox="1"/>
           <p:nvPr/>
         </p:nvSpPr>
@@ -17112,7 +16937,7 @@
       </p:sp>
       <p:sp>
         <p:nvSpPr>
-          <p:cNvPr id="12" name="o188"/>
+          <p:cNvPr id="12" name="o185"/>
           <p:cNvSpPr txBox="1"/>
           <p:nvPr/>
         </p:nvSpPr>
@@ -17151,7 +16976,7 @@
       </p:sp>
       <p:sp>
         <p:nvSpPr>
-          <p:cNvPr id="13" name="o189"/>
+          <p:cNvPr id="13" name="o186"/>
           <p:cNvSpPr/>
           <p:nvPr/>
         </p:nvSpPr>
@@ -17171,7 +16996,7 @@
       </p:sp>
       <p:sp>
         <p:nvSpPr>
-          <p:cNvPr id="14" name="o190"/>
+          <p:cNvPr id="14" name="o187"/>
           <p:cNvSpPr txBox="1"/>
           <p:nvPr/>
         </p:nvSpPr>
@@ -17210,7 +17035,7 @@
       </p:sp>
       <p:sp>
         <p:nvSpPr>
-          <p:cNvPr id="15" name="o191"/>
+          <p:cNvPr id="15" name="o188"/>
           <p:cNvSpPr txBox="1"/>
           <p:nvPr/>
         </p:nvSpPr>
@@ -17249,7 +17074,7 @@
       </p:sp>
       <p:sp>
         <p:nvSpPr>
-          <p:cNvPr id="16" name="o192"/>
+          <p:cNvPr id="16" name="o189"/>
           <p:cNvSpPr txBox="1"/>
           <p:nvPr/>
         </p:nvSpPr>
@@ -17288,7 +17113,7 @@
       </p:sp>
       <p:sp>
         <p:nvSpPr>
-          <p:cNvPr id="17" name="o193"/>
+          <p:cNvPr id="17" name="o190"/>
           <p:cNvSpPr txBox="1"/>
           <p:nvPr/>
         </p:nvSpPr>
@@ -17327,7 +17152,7 @@
       </p:sp>
       <p:sp>
         <p:nvSpPr>
-          <p:cNvPr id="18" name="o194"/>
+          <p:cNvPr id="18" name="o191"/>
           <p:cNvSpPr txBox="1"/>
           <p:nvPr/>
         </p:nvSpPr>
@@ -17366,7 +17191,7 @@
       </p:sp>
       <p:sp>
         <p:nvSpPr>
-          <p:cNvPr id="19" name="o195"/>
+          <p:cNvPr id="19" name="o192"/>
           <p:cNvSpPr/>
           <p:nvPr/>
         </p:nvSpPr>
@@ -17389,7 +17214,7 @@
       </p:sp>
       <p:sp>
         <p:nvSpPr>
-          <p:cNvPr id="20" name="o196"/>
+          <p:cNvPr id="20" name="o193"/>
           <p:cNvSpPr txBox="1"/>
           <p:nvPr/>
         </p:nvSpPr>
@@ -17428,7 +17253,7 @@
       </p:sp>
       <p:sp>
         <p:nvSpPr>
-          <p:cNvPr id="21" name="o197"/>
+          <p:cNvPr id="21" name="o194"/>
           <p:cNvSpPr txBox="1"/>
           <p:nvPr/>
         </p:nvSpPr>
@@ -17467,7 +17292,7 @@
       </p:sp>
       <p:sp>
         <p:nvSpPr>
-          <p:cNvPr id="22" name="o198"/>
+          <p:cNvPr id="22" name="o195"/>
           <p:cNvSpPr txBox="1"/>
           <p:nvPr/>
         </p:nvSpPr>
@@ -17506,7 +17331,7 @@
       </p:sp>
       <p:sp>
         <p:nvSpPr>
-          <p:cNvPr id="23" name="o199"/>
+          <p:cNvPr id="23" name="o196"/>
           <p:cNvSpPr txBox="1"/>
           <p:nvPr/>
         </p:nvSpPr>
@@ -17545,7 +17370,7 @@
       </p:sp>
       <p:sp>
         <p:nvSpPr>
-          <p:cNvPr id="24" name="o200"/>
+          <p:cNvPr id="24" name="o197"/>
           <p:cNvSpPr txBox="1"/>
           <p:nvPr/>
         </p:nvSpPr>
@@ -17584,7 +17409,7 @@
       </p:sp>
       <p:sp>
         <p:nvSpPr>
-          <p:cNvPr id="25" name="o201"/>
+          <p:cNvPr id="25" name="o198"/>
           <p:cNvSpPr/>
           <p:nvPr/>
         </p:nvSpPr>
@@ -17607,7 +17432,7 @@
       </p:sp>
       <p:sp>
         <p:nvSpPr>
-          <p:cNvPr id="26" name="o202"/>
+          <p:cNvPr id="26" name="o199"/>
           <p:cNvSpPr txBox="1"/>
           <p:nvPr/>
         </p:nvSpPr>
@@ -17646,7 +17471,7 @@
       </p:sp>
       <p:sp>
         <p:nvSpPr>
-          <p:cNvPr id="27" name="o203"/>
+          <p:cNvPr id="27" name="o200"/>
           <p:cNvSpPr txBox="1"/>
           <p:nvPr/>
         </p:nvSpPr>
@@ -17685,7 +17510,7 @@
       </p:sp>
       <p:sp>
         <p:nvSpPr>
-          <p:cNvPr id="28" name="o204"/>
+          <p:cNvPr id="28" name="o201"/>
           <p:cNvSpPr txBox="1"/>
           <p:nvPr/>
         </p:nvSpPr>
@@ -17724,7 +17549,7 @@
       </p:sp>
       <p:sp>
         <p:nvSpPr>
-          <p:cNvPr id="29" name="o205"/>
+          <p:cNvPr id="29" name="o202"/>
           <p:cNvSpPr txBox="1"/>
           <p:nvPr/>
         </p:nvSpPr>
@@ -17763,7 +17588,7 @@
       </p:sp>
       <p:sp>
         <p:nvSpPr>
-          <p:cNvPr id="30" name="o206"/>
+          <p:cNvPr id="30" name="o203"/>
           <p:cNvSpPr txBox="1"/>
           <p:nvPr/>
         </p:nvSpPr>
@@ -17802,7 +17627,7 @@
       </p:sp>
       <p:sp>
         <p:nvSpPr>
-          <p:cNvPr id="31" name="o207"/>
+          <p:cNvPr id="31" name="o204"/>
           <p:cNvSpPr/>
           <p:nvPr/>
         </p:nvSpPr>
@@ -17825,7 +17650,7 @@
       </p:sp>
       <p:sp>
         <p:nvSpPr>
-          <p:cNvPr id="32" name="o208"/>
+          <p:cNvPr id="32" name="o205"/>
           <p:cNvSpPr/>
           <p:nvPr/>
         </p:nvSpPr>
@@ -17848,7 +17673,7 @@
       </p:sp>
       <p:sp>
         <p:nvSpPr>
-          <p:cNvPr id="33" name="o209"/>
+          <p:cNvPr id="33" name="o206"/>
           <p:cNvSpPr txBox="1"/>
           <p:nvPr/>
         </p:nvSpPr>
@@ -17887,7 +17712,7 @@
       </p:sp>
       <p:sp>
         <p:nvSpPr>
-          <p:cNvPr id="34" name="o210"/>
+          <p:cNvPr id="34" name="o207"/>
           <p:cNvSpPr/>
           <p:nvPr/>
         </p:nvSpPr>
@@ -17907,7 +17732,7 @@
       </p:sp>
       <p:sp>
         <p:nvSpPr>
-          <p:cNvPr id="35" name="o211"/>
+          <p:cNvPr id="35" name="o208"/>
           <p:cNvSpPr txBox="1"/>
           <p:nvPr/>
         </p:nvSpPr>
@@ -17946,7 +17771,7 @@
       </p:sp>
       <p:sp>
         <p:nvSpPr>
-          <p:cNvPr id="36" name="o212"/>
+          <p:cNvPr id="36" name="o209"/>
           <p:cNvSpPr txBox="1"/>
           <p:nvPr/>
         </p:nvSpPr>
@@ -17985,7 +17810,7 @@
       </p:sp>
       <p:sp>
         <p:nvSpPr>
-          <p:cNvPr id="37" name="o213"/>
+          <p:cNvPr id="37" name="o210"/>
           <p:cNvSpPr/>
           <p:nvPr/>
         </p:nvSpPr>
@@ -18008,7 +17833,7 @@
       </p:sp>
       <p:sp>
         <p:nvSpPr>
-          <p:cNvPr id="38" name="o214"/>
+          <p:cNvPr id="38" name="o211"/>
           <p:cNvSpPr/>
           <p:nvPr/>
         </p:nvSpPr>
@@ -18028,7 +17853,7 @@
       </p:sp>
       <p:sp>
         <p:nvSpPr>
-          <p:cNvPr id="39" name="o215"/>
+          <p:cNvPr id="39" name="o212"/>
           <p:cNvSpPr txBox="1"/>
           <p:nvPr/>
         </p:nvSpPr>
@@ -18067,7 +17892,7 @@
       </p:sp>
       <p:sp>
         <p:nvSpPr>
-          <p:cNvPr id="40" name="o216"/>
+          <p:cNvPr id="40" name="o213"/>
           <p:cNvSpPr txBox="1"/>
           <p:nvPr/>
         </p:nvSpPr>
@@ -18106,7 +17931,7 @@
       </p:sp>
       <p:sp>
         <p:nvSpPr>
-          <p:cNvPr id="41" name="o217"/>
+          <p:cNvPr id="41" name="o214"/>
           <p:cNvSpPr/>
           <p:nvPr/>
         </p:nvSpPr>
@@ -18129,7 +17954,7 @@
       </p:sp>
       <p:sp>
         <p:nvSpPr>
-          <p:cNvPr id="42" name="o218"/>
+          <p:cNvPr id="42" name="o215"/>
           <p:cNvSpPr/>
           <p:nvPr/>
         </p:nvSpPr>
@@ -18149,7 +17974,7 @@
       </p:sp>
       <p:sp>
         <p:nvSpPr>
-          <p:cNvPr id="43" name="o219"/>
+          <p:cNvPr id="43" name="o216"/>
           <p:cNvSpPr txBox="1"/>
           <p:nvPr/>
         </p:nvSpPr>
@@ -18188,7 +18013,7 @@
       </p:sp>
       <p:sp>
         <p:nvSpPr>
-          <p:cNvPr id="44" name="o220"/>
+          <p:cNvPr id="44" name="o217"/>
           <p:cNvSpPr txBox="1"/>
           <p:nvPr/>
         </p:nvSpPr>
@@ -18227,7 +18052,7 @@
       </p:sp>
       <p:sp>
         <p:nvSpPr>
-          <p:cNvPr id="45" name="o221"/>
+          <p:cNvPr id="45" name="o218"/>
           <p:cNvSpPr/>
           <p:nvPr/>
         </p:nvSpPr>
@@ -18250,7 +18075,7 @@
       </p:sp>
       <p:sp>
         <p:nvSpPr>
-          <p:cNvPr id="46" name="o222"/>
+          <p:cNvPr id="46" name="o219"/>
           <p:cNvSpPr/>
           <p:nvPr/>
         </p:nvSpPr>
@@ -18270,7 +18095,7 @@
       </p:sp>
       <p:sp>
         <p:nvSpPr>
-          <p:cNvPr id="47" name="o223"/>
+          <p:cNvPr id="47" name="o220"/>
           <p:cNvSpPr txBox="1"/>
           <p:nvPr/>
         </p:nvSpPr>
@@ -18309,7 +18134,7 @@
       </p:sp>
       <p:sp>
         <p:nvSpPr>
-          <p:cNvPr id="48" name="o224"/>
+          <p:cNvPr id="48" name="o221"/>
           <p:cNvSpPr txBox="1"/>
           <p:nvPr/>
         </p:nvSpPr>
@@ -18348,7 +18173,7 @@
       </p:sp>
       <p:sp>
         <p:nvSpPr>
-          <p:cNvPr id="49" name="o225"/>
+          <p:cNvPr id="49" name="o222"/>
           <p:cNvSpPr/>
           <p:nvPr/>
         </p:nvSpPr>
@@ -18371,7 +18196,7 @@
       </p:sp>
       <p:sp>
         <p:nvSpPr>
-          <p:cNvPr id="50" name="o226"/>
+          <p:cNvPr id="50" name="o223"/>
           <p:cNvSpPr/>
           <p:nvPr/>
         </p:nvSpPr>
@@ -18391,7 +18216,7 @@
       </p:sp>
       <p:sp>
         <p:nvSpPr>
-          <p:cNvPr id="51" name="o227"/>
+          <p:cNvPr id="51" name="o224"/>
           <p:cNvSpPr txBox="1"/>
           <p:nvPr/>
         </p:nvSpPr>
@@ -18430,7 +18255,7 @@
       </p:sp>
       <p:sp>
         <p:nvSpPr>
-          <p:cNvPr id="52" name="o228"/>
+          <p:cNvPr id="52" name="o225"/>
           <p:cNvSpPr txBox="1"/>
           <p:nvPr/>
         </p:nvSpPr>
@@ -18469,7 +18294,7 @@
       </p:sp>
       <p:sp>
         <p:nvSpPr>
-          <p:cNvPr id="53" name="o229"/>
+          <p:cNvPr id="53" name="o226"/>
           <p:cNvSpPr/>
           <p:nvPr/>
         </p:nvSpPr>
@@ -18492,7 +18317,7 @@
       </p:sp>
       <p:sp>
         <p:nvSpPr>
-          <p:cNvPr id="54" name="o230"/>
+          <p:cNvPr id="54" name="o227"/>
           <p:cNvSpPr/>
           <p:nvPr/>
         </p:nvSpPr>
@@ -18512,7 +18337,7 @@
       </p:sp>
       <p:sp>
         <p:nvSpPr>
-          <p:cNvPr id="55" name="o231"/>
+          <p:cNvPr id="55" name="o228"/>
           <p:cNvSpPr txBox="1"/>
           <p:nvPr/>
         </p:nvSpPr>
@@ -18551,7 +18376,7 @@
       </p:sp>
       <p:sp>
         <p:nvSpPr>
-          <p:cNvPr id="56" name="o232"/>
+          <p:cNvPr id="56" name="o229"/>
           <p:cNvSpPr txBox="1"/>
           <p:nvPr/>
         </p:nvSpPr>
@@ -18590,7 +18415,7 @@
       </p:sp>
       <p:sp>
         <p:nvSpPr>
-          <p:cNvPr id="57" name="o233"/>
+          <p:cNvPr id="57" name="o230"/>
           <p:cNvSpPr/>
           <p:nvPr/>
         </p:nvSpPr>
@@ -18613,7 +18438,7 @@
       </p:sp>
       <p:sp>
         <p:nvSpPr>
-          <p:cNvPr id="58" name="o234"/>
+          <p:cNvPr id="58" name="o231"/>
           <p:cNvSpPr/>
           <p:nvPr/>
         </p:nvSpPr>
@@ -18633,7 +18458,7 @@
       </p:sp>
       <p:sp>
         <p:nvSpPr>
-          <p:cNvPr id="59" name="o235"/>
+          <p:cNvPr id="59" name="o232"/>
           <p:cNvSpPr txBox="1"/>
           <p:nvPr/>
         </p:nvSpPr>
@@ -18672,7 +18497,7 @@
       </p:sp>
       <p:sp>
         <p:nvSpPr>
-          <p:cNvPr id="60" name="o236"/>
+          <p:cNvPr id="60" name="o233"/>
           <p:cNvSpPr txBox="1"/>
           <p:nvPr/>
         </p:nvSpPr>
@@ -18711,7 +18536,7 @@
       </p:sp>
       <p:sp>
         <p:nvSpPr>
-          <p:cNvPr id="61" name="o237"/>
+          <p:cNvPr id="61" name="o234"/>
           <p:cNvSpPr/>
           <p:nvPr/>
         </p:nvSpPr>
@@ -18731,7 +18556,7 @@
       </p:sp>
       <p:sp>
         <p:nvSpPr>
-          <p:cNvPr id="62" name="o238"/>
+          <p:cNvPr id="62" name="o235"/>
           <p:cNvSpPr txBox="1"/>
           <p:nvPr/>
         </p:nvSpPr>
@@ -18770,7 +18595,7 @@
       </p:sp>
       <p:sp>
         <p:nvSpPr>
-          <p:cNvPr id="63" name="o239"/>
+          <p:cNvPr id="63" name="o236"/>
           <p:cNvSpPr txBox="1"/>
           <p:nvPr/>
         </p:nvSpPr>
@@ -18809,7 +18634,7 @@
       </p:sp>
       <p:sp>
         <p:nvSpPr>
-          <p:cNvPr id="64" name="o240"/>
+          <p:cNvPr id="64" name="o237"/>
           <p:cNvSpPr/>
           <p:nvPr/>
         </p:nvSpPr>
@@ -18832,7 +18657,7 @@
       </p:sp>
       <p:sp>
         <p:nvSpPr>
-          <p:cNvPr id="65" name="o241"/>
+          <p:cNvPr id="65" name="o238"/>
           <p:cNvSpPr txBox="1"/>
           <p:nvPr/>
         </p:nvSpPr>
@@ -18871,7 +18696,7 @@
       </p:sp>
       <p:sp>
         <p:nvSpPr>
-          <p:cNvPr id="66" name="o242"/>
+          <p:cNvPr id="66" name="o239"/>
           <p:cNvSpPr/>
           <p:nvPr/>
         </p:nvSpPr>
@@ -18896,7 +18721,7 @@
       </p:sp>
       <p:sp>
         <p:nvSpPr>
-          <p:cNvPr id="67" name="o243"/>
+          <p:cNvPr id="67" name="o240"/>
           <p:cNvSpPr txBox="1"/>
           <p:nvPr/>
         </p:nvSpPr>
@@ -18935,7 +18760,7 @@
       </p:sp>
       <p:sp>
         <p:nvSpPr>
-          <p:cNvPr id="68" name="o244"/>
+          <p:cNvPr id="68" name="o241"/>
           <p:cNvSpPr txBox="1"/>
           <p:nvPr/>
         </p:nvSpPr>
@@ -18974,7 +18799,7 @@
       </p:sp>
       <p:sp>
         <p:nvSpPr>
-          <p:cNvPr id="69" name="o245"/>
+          <p:cNvPr id="69" name="o242"/>
           <p:cNvSpPr txBox="1"/>
           <p:nvPr/>
         </p:nvSpPr>
@@ -19013,7 +18838,7 @@
       </p:sp>
       <p:sp>
         <p:nvSpPr>
-          <p:cNvPr id="70" name="o246"/>
+          <p:cNvPr id="70" name="o243"/>
           <p:cNvSpPr/>
           <p:nvPr/>
         </p:nvSpPr>
@@ -19038,7 +18863,7 @@
       </p:sp>
       <p:sp>
         <p:nvSpPr>
-          <p:cNvPr id="71" name="o247"/>
+          <p:cNvPr id="71" name="o244"/>
           <p:cNvSpPr txBox="1"/>
           <p:nvPr/>
         </p:nvSpPr>
@@ -19077,7 +18902,7 @@
       </p:sp>
       <p:sp>
         <p:nvSpPr>
-          <p:cNvPr id="72" name="o248"/>
+          <p:cNvPr id="72" name="o245"/>
           <p:cNvSpPr txBox="1"/>
           <p:nvPr/>
         </p:nvSpPr>
@@ -19116,7 +18941,7 @@
       </p:sp>
       <p:sp>
         <p:nvSpPr>
-          <p:cNvPr id="73" name="o249"/>
+          <p:cNvPr id="73" name="o246"/>
           <p:cNvSpPr txBox="1"/>
           <p:nvPr/>
         </p:nvSpPr>
@@ -19155,7 +18980,7 @@
       </p:sp>
       <p:sp>
         <p:nvSpPr>
-          <p:cNvPr id="74" name="o250"/>
+          <p:cNvPr id="74" name="o247"/>
           <p:cNvSpPr/>
           <p:nvPr/>
         </p:nvSpPr>
@@ -19180,7 +19005,7 @@
       </p:sp>
       <p:sp>
         <p:nvSpPr>
-          <p:cNvPr id="75" name="o251"/>
+          <p:cNvPr id="75" name="o248"/>
           <p:cNvSpPr txBox="1"/>
           <p:nvPr/>
         </p:nvSpPr>
@@ -19219,7 +19044,7 @@
       </p:sp>
       <p:sp>
         <p:nvSpPr>
-          <p:cNvPr id="76" name="o252"/>
+          <p:cNvPr id="76" name="o249"/>
           <p:cNvSpPr txBox="1"/>
           <p:nvPr/>
         </p:nvSpPr>
@@ -19258,7 +19083,7 @@
       </p:sp>
       <p:sp>
         <p:nvSpPr>
-          <p:cNvPr id="77" name="o253"/>
+          <p:cNvPr id="77" name="o250"/>
           <p:cNvSpPr txBox="1"/>
           <p:nvPr/>
         </p:nvSpPr>
@@ -19297,7 +19122,7 @@
       </p:sp>
       <p:sp>
         <p:nvSpPr>
-          <p:cNvPr id="78" name="o254"/>
+          <p:cNvPr id="78" name="o251"/>
           <p:cNvSpPr/>
           <p:nvPr/>
         </p:nvSpPr>
@@ -19317,7 +19142,7 @@
       </p:sp>
       <p:sp>
         <p:nvSpPr>
-          <p:cNvPr id="79" name="o255"/>
+          <p:cNvPr id="79" name="o252"/>
           <p:cNvSpPr/>
           <p:nvPr/>
         </p:nvSpPr>
@@ -19337,7 +19162,7 @@
       </p:sp>
       <p:sp>
         <p:nvSpPr>
-          <p:cNvPr id="80" name="o256"/>
+          <p:cNvPr id="80" name="o253"/>
           <p:cNvSpPr txBox="1"/>
           <p:nvPr/>
         </p:nvSpPr>
@@ -19404,7 +19229,7 @@
       </p:grpSpPr>
       <p:sp>
         <p:nvSpPr>
-          <p:cNvPr id="2" name="o257"/>
+          <p:cNvPr id="2" name="o254"/>
           <p:cNvSpPr txBox="1"/>
           <p:nvPr/>
         </p:nvSpPr>
@@ -19443,7 +19268,7 @@
       </p:sp>
       <p:sp>
         <p:nvSpPr>
-          <p:cNvPr id="3" name="o258"/>
+          <p:cNvPr id="3" name="o255"/>
           <p:cNvSpPr txBox="1"/>
           <p:nvPr/>
         </p:nvSpPr>
@@ -19485,7 +19310,7 @@
       </p:sp>
       <p:sp>
         <p:nvSpPr>
-          <p:cNvPr id="4" name="o259"/>
+          <p:cNvPr id="4" name="o256"/>
           <p:cNvSpPr txBox="1"/>
           <p:nvPr/>
         </p:nvSpPr>
@@ -19524,7 +19349,7 @@
       </p:sp>
       <p:sp>
         <p:nvSpPr>
-          <p:cNvPr id="5" name="o260"/>
+          <p:cNvPr id="5" name="o257"/>
           <p:cNvSpPr/>
           <p:nvPr/>
         </p:nvSpPr>
@@ -19547,7 +19372,7 @@
       </p:sp>
       <p:sp>
         <p:nvSpPr>
-          <p:cNvPr id="6" name="o261"/>
+          <p:cNvPr id="6" name="o258"/>
           <p:cNvSpPr txBox="1"/>
           <p:nvPr/>
         </p:nvSpPr>
@@ -19586,7 +19411,7 @@
       </p:sp>
       <p:sp>
         <p:nvSpPr>
-          <p:cNvPr id="7" name="o262"/>
+          <p:cNvPr id="7" name="o259"/>
           <p:cNvSpPr txBox="1"/>
           <p:nvPr/>
         </p:nvSpPr>
@@ -19625,7 +19450,7 @@
       </p:sp>
       <p:sp>
         <p:nvSpPr>
-          <p:cNvPr id="8" name="o263"/>
+          <p:cNvPr id="8" name="o260"/>
           <p:cNvSpPr txBox="1"/>
           <p:nvPr/>
         </p:nvSpPr>
@@ -19664,7 +19489,7 @@
       </p:sp>
       <p:sp>
         <p:nvSpPr>
-          <p:cNvPr id="9" name="o264"/>
+          <p:cNvPr id="9" name="o261"/>
           <p:cNvSpPr/>
           <p:nvPr/>
         </p:nvSpPr>
@@ -19684,7 +19509,7 @@
       </p:sp>
       <p:sp>
         <p:nvSpPr>
-          <p:cNvPr id="10" name="o265"/>
+          <p:cNvPr id="10" name="o262"/>
           <p:cNvSpPr txBox="1"/>
           <p:nvPr/>
         </p:nvSpPr>
@@ -19723,7 +19548,7 @@
       </p:sp>
       <p:sp>
         <p:nvSpPr>
-          <p:cNvPr id="11" name="o266"/>
+          <p:cNvPr id="11" name="o263"/>
           <p:cNvSpPr txBox="1"/>
           <p:nvPr/>
         </p:nvSpPr>
@@ -19762,7 +19587,7 @@
       </p:sp>
       <p:sp>
         <p:nvSpPr>
-          <p:cNvPr id="12" name="o267"/>
+          <p:cNvPr id="12" name="o264"/>
           <p:cNvSpPr txBox="1"/>
           <p:nvPr/>
         </p:nvSpPr>
@@ -19801,7 +19626,7 @@
       </p:sp>
       <p:sp>
         <p:nvSpPr>
-          <p:cNvPr id="13" name="o268"/>
+          <p:cNvPr id="13" name="o265"/>
           <p:cNvSpPr txBox="1"/>
           <p:nvPr/>
         </p:nvSpPr>
@@ -19840,7 +19665,7 @@
       </p:sp>
       <p:sp>
         <p:nvSpPr>
-          <p:cNvPr id="14" name="o269"/>
+          <p:cNvPr id="14" name="o266"/>
           <p:cNvSpPr txBox="1"/>
           <p:nvPr/>
         </p:nvSpPr>
@@ -19879,7 +19704,7 @@
       </p:sp>
       <p:sp>
         <p:nvSpPr>
-          <p:cNvPr id="15" name="o270"/>
+          <p:cNvPr id="15" name="o267"/>
           <p:cNvSpPr/>
           <p:nvPr/>
         </p:nvSpPr>
@@ -19902,7 +19727,7 @@
       </p:sp>
       <p:sp>
         <p:nvSpPr>
-          <p:cNvPr id="16" name="o271"/>
+          <p:cNvPr id="16" name="o268"/>
           <p:cNvSpPr txBox="1"/>
           <p:nvPr/>
         </p:nvSpPr>
@@ -19941,7 +19766,7 @@
       </p:sp>
       <p:sp>
         <p:nvSpPr>
-          <p:cNvPr id="17" name="o272"/>
+          <p:cNvPr id="17" name="o269"/>
           <p:cNvSpPr txBox="1"/>
           <p:nvPr/>
         </p:nvSpPr>
@@ -19980,7 +19805,7 @@
       </p:sp>
       <p:sp>
         <p:nvSpPr>
-          <p:cNvPr id="18" name="o273"/>
+          <p:cNvPr id="18" name="o270"/>
           <p:cNvSpPr txBox="1"/>
           <p:nvPr/>
         </p:nvSpPr>
@@ -20019,7 +19844,7 @@
       </p:sp>
       <p:sp>
         <p:nvSpPr>
-          <p:cNvPr id="19" name="o274"/>
+          <p:cNvPr id="19" name="o271"/>
           <p:cNvSpPr txBox="1"/>
           <p:nvPr/>
         </p:nvSpPr>
@@ -20058,7 +19883,7 @@
       </p:sp>
       <p:sp>
         <p:nvSpPr>
-          <p:cNvPr id="20" name="o275"/>
+          <p:cNvPr id="20" name="o272"/>
           <p:cNvSpPr txBox="1"/>
           <p:nvPr/>
         </p:nvSpPr>
@@ -20097,7 +19922,7 @@
       </p:sp>
       <p:sp>
         <p:nvSpPr>
-          <p:cNvPr id="21" name="o276"/>
+          <p:cNvPr id="21" name="o273"/>
           <p:cNvSpPr/>
           <p:nvPr/>
         </p:nvSpPr>
@@ -20120,7 +19945,7 @@
       </p:sp>
       <p:sp>
         <p:nvSpPr>
-          <p:cNvPr id="22" name="o277"/>
+          <p:cNvPr id="22" name="o274"/>
           <p:cNvSpPr txBox="1"/>
           <p:nvPr/>
         </p:nvSpPr>
@@ -20159,7 +19984,7 @@
       </p:sp>
       <p:sp>
         <p:nvSpPr>
-          <p:cNvPr id="23" name="o278"/>
+          <p:cNvPr id="23" name="o275"/>
           <p:cNvSpPr txBox="1"/>
           <p:nvPr/>
         </p:nvSpPr>
@@ -20198,7 +20023,7 @@
       </p:sp>
       <p:sp>
         <p:nvSpPr>
-          <p:cNvPr id="24" name="o279"/>
+          <p:cNvPr id="24" name="o276"/>
           <p:cNvSpPr txBox="1"/>
           <p:nvPr/>
         </p:nvSpPr>
@@ -20237,7 +20062,7 @@
       </p:sp>
       <p:sp>
         <p:nvSpPr>
-          <p:cNvPr id="25" name="o280"/>
+          <p:cNvPr id="25" name="o277"/>
           <p:cNvSpPr txBox="1"/>
           <p:nvPr/>
         </p:nvSpPr>
@@ -20276,7 +20101,7 @@
       </p:sp>
       <p:sp>
         <p:nvSpPr>
-          <p:cNvPr id="26" name="o281"/>
+          <p:cNvPr id="26" name="o278"/>
           <p:cNvSpPr txBox="1"/>
           <p:nvPr/>
         </p:nvSpPr>
@@ -20315,7 +20140,7 @@
       </p:sp>
       <p:sp>
         <p:nvSpPr>
-          <p:cNvPr id="27" name="o282"/>
+          <p:cNvPr id="27" name="o279"/>
           <p:cNvSpPr/>
           <p:nvPr/>
         </p:nvSpPr>
@@ -20338,7 +20163,7 @@
       </p:sp>
       <p:sp>
         <p:nvSpPr>
-          <p:cNvPr id="28" name="o283"/>
+          <p:cNvPr id="28" name="o280"/>
           <p:cNvSpPr txBox="1"/>
           <p:nvPr/>
         </p:nvSpPr>
@@ -20377,7 +20202,7 @@
       </p:sp>
       <p:sp>
         <p:nvSpPr>
-          <p:cNvPr id="29" name="o284"/>
+          <p:cNvPr id="29" name="o281"/>
           <p:cNvSpPr txBox="1"/>
           <p:nvPr/>
         </p:nvSpPr>
@@ -20416,7 +20241,7 @@
       </p:sp>
       <p:sp>
         <p:nvSpPr>
-          <p:cNvPr id="30" name="o285"/>
+          <p:cNvPr id="30" name="o282"/>
           <p:cNvSpPr txBox="1"/>
           <p:nvPr/>
         </p:nvSpPr>
@@ -20455,7 +20280,7 @@
       </p:sp>
       <p:sp>
         <p:nvSpPr>
-          <p:cNvPr id="31" name="o286"/>
+          <p:cNvPr id="31" name="o283"/>
           <p:cNvSpPr txBox="1"/>
           <p:nvPr/>
         </p:nvSpPr>
@@ -20494,7 +20319,7 @@
       </p:sp>
       <p:sp>
         <p:nvSpPr>
-          <p:cNvPr id="32" name="o287"/>
+          <p:cNvPr id="32" name="o284"/>
           <p:cNvSpPr txBox="1"/>
           <p:nvPr/>
         </p:nvSpPr>
@@ -20533,7 +20358,7 @@
       </p:sp>
       <p:sp>
         <p:nvSpPr>
-          <p:cNvPr id="33" name="o288"/>
+          <p:cNvPr id="33" name="o285"/>
           <p:cNvSpPr/>
           <p:nvPr/>
         </p:nvSpPr>
@@ -20556,7 +20381,7 @@
       </p:sp>
       <p:sp>
         <p:nvSpPr>
-          <p:cNvPr id="34" name="o289"/>
+          <p:cNvPr id="34" name="o286"/>
           <p:cNvSpPr txBox="1"/>
           <p:nvPr/>
         </p:nvSpPr>
@@ -20595,7 +20420,7 @@
       </p:sp>
       <p:sp>
         <p:nvSpPr>
-          <p:cNvPr id="35" name="o290"/>
+          <p:cNvPr id="35" name="o287"/>
           <p:cNvSpPr txBox="1"/>
           <p:nvPr/>
         </p:nvSpPr>
@@ -20634,7 +20459,7 @@
       </p:sp>
       <p:sp>
         <p:nvSpPr>
-          <p:cNvPr id="36" name="o291"/>
+          <p:cNvPr id="36" name="o288"/>
           <p:cNvSpPr txBox="1"/>
           <p:nvPr/>
         </p:nvSpPr>
@@ -20673,7 +20498,7 @@
       </p:sp>
       <p:sp>
         <p:nvSpPr>
-          <p:cNvPr id="37" name="o292"/>
+          <p:cNvPr id="37" name="o289"/>
           <p:cNvSpPr txBox="1"/>
           <p:nvPr/>
         </p:nvSpPr>
@@ -20712,7 +20537,7 @@
       </p:sp>
       <p:sp>
         <p:nvSpPr>
-          <p:cNvPr id="38" name="o293"/>
+          <p:cNvPr id="38" name="o290"/>
           <p:cNvSpPr txBox="1"/>
           <p:nvPr/>
         </p:nvSpPr>
@@ -20751,7 +20576,7 @@
       </p:sp>
       <p:sp>
         <p:nvSpPr>
-          <p:cNvPr id="39" name="o294"/>
+          <p:cNvPr id="39" name="o291"/>
           <p:cNvSpPr/>
           <p:nvPr/>
         </p:nvSpPr>
@@ -20774,7 +20599,7 @@
       </p:sp>
       <p:sp>
         <p:nvSpPr>
-          <p:cNvPr id="40" name="o295"/>
+          <p:cNvPr id="40" name="o292"/>
           <p:cNvSpPr/>
           <p:nvPr/>
         </p:nvSpPr>
@@ -20797,7 +20622,7 @@
       </p:sp>
       <p:sp>
         <p:nvSpPr>
-          <p:cNvPr id="41" name="o296"/>
+          <p:cNvPr id="41" name="o293"/>
           <p:cNvSpPr/>
           <p:nvPr/>
         </p:nvSpPr>
@@ -20822,7 +20647,7 @@
       </p:sp>
       <p:sp>
         <p:nvSpPr>
-          <p:cNvPr id="42" name="o297"/>
+          <p:cNvPr id="42" name="o294"/>
           <p:cNvSpPr txBox="1"/>
           <p:nvPr/>
         </p:nvSpPr>
@@ -20861,7 +20686,7 @@
       </p:sp>
       <p:sp>
         <p:nvSpPr>
-          <p:cNvPr id="43" name="o298"/>
+          <p:cNvPr id="43" name="o295"/>
           <p:cNvSpPr txBox="1"/>
           <p:nvPr/>
         </p:nvSpPr>
@@ -20900,7 +20725,7 @@
       </p:sp>
       <p:sp>
         <p:nvSpPr>
-          <p:cNvPr id="44" name="o299"/>
+          <p:cNvPr id="44" name="o296"/>
           <p:cNvSpPr txBox="1"/>
           <p:nvPr/>
         </p:nvSpPr>
@@ -20939,7 +20764,7 @@
       </p:sp>
       <p:sp>
         <p:nvSpPr>
-          <p:cNvPr id="45" name="o300"/>
+          <p:cNvPr id="45" name="o297"/>
           <p:cNvSpPr/>
           <p:nvPr/>
         </p:nvSpPr>
@@ -20964,7 +20789,7 @@
       </p:sp>
       <p:sp>
         <p:nvSpPr>
-          <p:cNvPr id="46" name="o301"/>
+          <p:cNvPr id="46" name="o298"/>
           <p:cNvSpPr txBox="1"/>
           <p:nvPr/>
         </p:nvSpPr>
@@ -21003,7 +20828,7 @@
       </p:sp>
       <p:sp>
         <p:nvSpPr>
-          <p:cNvPr id="47" name="o302"/>
+          <p:cNvPr id="47" name="o299"/>
           <p:cNvSpPr txBox="1"/>
           <p:nvPr/>
         </p:nvSpPr>
@@ -21042,7 +20867,7 @@
       </p:sp>
       <p:sp>
         <p:nvSpPr>
-          <p:cNvPr id="48" name="o303"/>
+          <p:cNvPr id="48" name="o300"/>
           <p:cNvSpPr txBox="1"/>
           <p:nvPr/>
         </p:nvSpPr>
@@ -21081,7 +20906,7 @@
       </p:sp>
       <p:sp>
         <p:nvSpPr>
-          <p:cNvPr id="49" name="o304"/>
+          <p:cNvPr id="49" name="o301"/>
           <p:cNvSpPr/>
           <p:nvPr/>
         </p:nvSpPr>
@@ -21106,7 +20931,7 @@
       </p:sp>
       <p:sp>
         <p:nvSpPr>
-          <p:cNvPr id="50" name="o305"/>
+          <p:cNvPr id="50" name="o302"/>
           <p:cNvSpPr txBox="1"/>
           <p:nvPr/>
         </p:nvSpPr>
@@ -21145,7 +20970,7 @@
       </p:sp>
       <p:sp>
         <p:nvSpPr>
-          <p:cNvPr id="51" name="o306"/>
+          <p:cNvPr id="51" name="o303"/>
           <p:cNvSpPr txBox="1"/>
           <p:nvPr/>
         </p:nvSpPr>
@@ -21184,7 +21009,7 @@
       </p:sp>
       <p:sp>
         <p:nvSpPr>
-          <p:cNvPr id="52" name="o307"/>
+          <p:cNvPr id="52" name="o304"/>
           <p:cNvSpPr txBox="1"/>
           <p:nvPr/>
         </p:nvSpPr>
@@ -21223,7 +21048,7 @@
       </p:sp>
       <p:sp>
         <p:nvSpPr>
-          <p:cNvPr id="53" name="o308"/>
+          <p:cNvPr id="53" name="o305"/>
           <p:cNvSpPr/>
           <p:nvPr/>
         </p:nvSpPr>
@@ -21243,7 +21068,7 @@
       </p:sp>
       <p:sp>
         <p:nvSpPr>
-          <p:cNvPr id="54" name="o309"/>
+          <p:cNvPr id="54" name="o306"/>
           <p:cNvSpPr/>
           <p:nvPr/>
         </p:nvSpPr>
@@ -21263,7 +21088,7 @@
       </p:sp>
       <p:sp>
         <p:nvSpPr>
-          <p:cNvPr id="55" name="o310"/>
+          <p:cNvPr id="55" name="o307"/>
           <p:cNvSpPr txBox="1"/>
           <p:nvPr/>
         </p:nvSpPr>
@@ -21330,7 +21155,7 @@
       </p:grpSpPr>
       <p:sp>
         <p:nvSpPr>
-          <p:cNvPr id="2" name="o311"/>
+          <p:cNvPr id="2" name="o308"/>
           <p:cNvSpPr txBox="1"/>
           <p:nvPr/>
         </p:nvSpPr>
@@ -21369,7 +21194,7 @@
       </p:sp>
       <p:sp>
         <p:nvSpPr>
-          <p:cNvPr id="3" name="o312"/>
+          <p:cNvPr id="3" name="o309"/>
           <p:cNvSpPr txBox="1"/>
           <p:nvPr/>
         </p:nvSpPr>
@@ -21411,7 +21236,7 @@
       </p:sp>
       <p:sp>
         <p:nvSpPr>
-          <p:cNvPr id="4" name="o313"/>
+          <p:cNvPr id="4" name="o310"/>
           <p:cNvSpPr txBox="1"/>
           <p:nvPr/>
         </p:nvSpPr>
@@ -21450,7 +21275,7 @@
       </p:sp>
       <p:sp>
         <p:nvSpPr>
-          <p:cNvPr id="5" name="o314"/>
+          <p:cNvPr id="5" name="o311"/>
           <p:cNvSpPr/>
           <p:nvPr/>
         </p:nvSpPr>
@@ -21473,7 +21298,7 @@
       </p:sp>
       <p:sp>
         <p:nvSpPr>
-          <p:cNvPr id="6" name="o315"/>
+          <p:cNvPr id="6" name="o312"/>
           <p:cNvSpPr txBox="1"/>
           <p:nvPr/>
         </p:nvSpPr>
@@ -21512,7 +21337,7 @@
       </p:sp>
       <p:sp>
         <p:nvSpPr>
-          <p:cNvPr id="7" name="o316"/>
+          <p:cNvPr id="7" name="o313"/>
           <p:cNvSpPr txBox="1"/>
           <p:nvPr/>
         </p:nvSpPr>
@@ -21551,7 +21376,7 @@
       </p:sp>
       <p:sp>
         <p:nvSpPr>
-          <p:cNvPr id="8" name="o317"/>
+          <p:cNvPr id="8" name="o314"/>
           <p:cNvSpPr txBox="1"/>
           <p:nvPr/>
         </p:nvSpPr>
@@ -21590,7 +21415,7 @@
       </p:sp>
       <p:sp>
         <p:nvSpPr>
-          <p:cNvPr id="9" name="o318"/>
+          <p:cNvPr id="9" name="o315"/>
           <p:cNvSpPr/>
           <p:nvPr/>
         </p:nvSpPr>
@@ -21610,7 +21435,7 @@
       </p:sp>
       <p:sp>
         <p:nvSpPr>
-          <p:cNvPr id="10" name="o319"/>
+          <p:cNvPr id="10" name="o316"/>
           <p:cNvSpPr txBox="1"/>
           <p:nvPr/>
         </p:nvSpPr>
@@ -21649,7 +21474,7 @@
       </p:sp>
       <p:sp>
         <p:nvSpPr>
-          <p:cNvPr id="11" name="o320"/>
+          <p:cNvPr id="11" name="o317"/>
           <p:cNvSpPr txBox="1"/>
           <p:nvPr/>
         </p:nvSpPr>
@@ -21688,7 +21513,7 @@
       </p:sp>
       <p:sp>
         <p:nvSpPr>
-          <p:cNvPr id="12" name="o321"/>
+          <p:cNvPr id="12" name="o318"/>
           <p:cNvSpPr txBox="1"/>
           <p:nvPr/>
         </p:nvSpPr>
@@ -21727,7 +21552,7 @@
       </p:sp>
       <p:sp>
         <p:nvSpPr>
-          <p:cNvPr id="13" name="o322"/>
+          <p:cNvPr id="13" name="o319"/>
           <p:cNvSpPr/>
           <p:nvPr/>
         </p:nvSpPr>
@@ -21750,7 +21575,7 @@
       </p:sp>
       <p:sp>
         <p:nvSpPr>
-          <p:cNvPr id="14" name="o323"/>
+          <p:cNvPr id="14" name="o320"/>
           <p:cNvSpPr txBox="1"/>
           <p:nvPr/>
         </p:nvSpPr>
@@ -21789,7 +21614,7 @@
       </p:sp>
       <p:sp>
         <p:nvSpPr>
-          <p:cNvPr id="15" name="o324"/>
+          <p:cNvPr id="15" name="o321"/>
           <p:cNvSpPr txBox="1"/>
           <p:nvPr/>
         </p:nvSpPr>
@@ -21828,7 +21653,7 @@
       </p:sp>
       <p:sp>
         <p:nvSpPr>
-          <p:cNvPr id="16" name="o325"/>
+          <p:cNvPr id="16" name="o322"/>
           <p:cNvSpPr txBox="1"/>
           <p:nvPr/>
         </p:nvSpPr>
@@ -21867,7 +21692,7 @@
       </p:sp>
       <p:sp>
         <p:nvSpPr>
-          <p:cNvPr id="17" name="o326"/>
+          <p:cNvPr id="17" name="o323"/>
           <p:cNvSpPr/>
           <p:nvPr/>
         </p:nvSpPr>
@@ -21890,7 +21715,7 @@
       </p:sp>
       <p:sp>
         <p:nvSpPr>
-          <p:cNvPr id="18" name="o327"/>
+          <p:cNvPr id="18" name="o324"/>
           <p:cNvSpPr txBox="1"/>
           <p:nvPr/>
         </p:nvSpPr>
@@ -21929,7 +21754,7 @@
       </p:sp>
       <p:sp>
         <p:nvSpPr>
-          <p:cNvPr id="19" name="o328"/>
+          <p:cNvPr id="19" name="o325"/>
           <p:cNvSpPr txBox="1"/>
           <p:nvPr/>
         </p:nvSpPr>
@@ -21968,7 +21793,7 @@
       </p:sp>
       <p:sp>
         <p:nvSpPr>
-          <p:cNvPr id="20" name="o329"/>
+          <p:cNvPr id="20" name="o326"/>
           <p:cNvSpPr txBox="1"/>
           <p:nvPr/>
         </p:nvSpPr>
@@ -22007,7 +21832,7 @@
       </p:sp>
       <p:sp>
         <p:nvSpPr>
-          <p:cNvPr id="21" name="o330"/>
+          <p:cNvPr id="21" name="o327"/>
           <p:cNvSpPr/>
           <p:nvPr/>
         </p:nvSpPr>
@@ -22030,7 +21855,7 @@
       </p:sp>
       <p:sp>
         <p:nvSpPr>
-          <p:cNvPr id="22" name="o331"/>
+          <p:cNvPr id="22" name="o328"/>
           <p:cNvSpPr/>
           <p:nvPr/>
         </p:nvSpPr>
@@ -22050,7 +21875,7 @@
       </p:sp>
       <p:sp>
         <p:nvSpPr>
-          <p:cNvPr id="23" name="o332"/>
+          <p:cNvPr id="23" name="o329"/>
           <p:cNvSpPr/>
           <p:nvPr/>
         </p:nvSpPr>
@@ -22070,7 +21895,7 @@
       </p:sp>
       <p:sp>
         <p:nvSpPr>
-          <p:cNvPr id="24" name="o333"/>
+          <p:cNvPr id="24" name="o330"/>
           <p:cNvSpPr txBox="1"/>
           <p:nvPr/>
         </p:nvSpPr>
@@ -22109,7 +21934,7 @@
       </p:sp>
       <p:sp>
         <p:nvSpPr>
-          <p:cNvPr id="25" name="o334"/>
+          <p:cNvPr id="25" name="o331"/>
           <p:cNvSpPr txBox="1"/>
           <p:nvPr/>
         </p:nvSpPr>
@@ -22148,7 +21973,7 @@
       </p:sp>
       <p:sp>
         <p:nvSpPr>
-          <p:cNvPr id="26" name="o335"/>
+          <p:cNvPr id="26" name="o332"/>
           <p:cNvSpPr txBox="1"/>
           <p:nvPr/>
         </p:nvSpPr>
@@ -22187,7 +22012,7 @@
       </p:sp>
       <p:sp>
         <p:nvSpPr>
-          <p:cNvPr id="27" name="o336"/>
+          <p:cNvPr id="27" name="o333"/>
           <p:cNvSpPr/>
           <p:nvPr/>
         </p:nvSpPr>
@@ -22210,7 +22035,7 @@
       </p:sp>
       <p:sp>
         <p:nvSpPr>
-          <p:cNvPr id="28" name="o337"/>
+          <p:cNvPr id="28" name="o334"/>
           <p:cNvSpPr txBox="1"/>
           <p:nvPr/>
         </p:nvSpPr>
@@ -22249,7 +22074,7 @@
       </p:sp>
       <p:sp>
         <p:nvSpPr>
-          <p:cNvPr id="29" name="o338"/>
+          <p:cNvPr id="29" name="o335"/>
           <p:cNvSpPr txBox="1"/>
           <p:nvPr/>
         </p:nvSpPr>
@@ -22288,7 +22113,7 @@
       </p:sp>
       <p:sp>
         <p:nvSpPr>
-          <p:cNvPr id="30" name="o339"/>
+          <p:cNvPr id="30" name="o336"/>
           <p:cNvSpPr txBox="1"/>
           <p:nvPr/>
         </p:nvSpPr>
@@ -22327,7 +22152,7 @@
       </p:sp>
       <p:sp>
         <p:nvSpPr>
-          <p:cNvPr id="31" name="o340"/>
+          <p:cNvPr id="31" name="o337"/>
           <p:cNvSpPr/>
           <p:nvPr/>
         </p:nvSpPr>
@@ -22350,7 +22175,7 @@
       </p:sp>
       <p:sp>
         <p:nvSpPr>
-          <p:cNvPr id="32" name="o341"/>
+          <p:cNvPr id="32" name="o338"/>
           <p:cNvSpPr txBox="1"/>
           <p:nvPr/>
         </p:nvSpPr>
@@ -22389,7 +22214,7 @@
       </p:sp>
       <p:sp>
         <p:nvSpPr>
-          <p:cNvPr id="33" name="o342"/>
+          <p:cNvPr id="33" name="o339"/>
           <p:cNvSpPr txBox="1"/>
           <p:nvPr/>
         </p:nvSpPr>
@@ -22428,7 +22253,7 @@
       </p:sp>
       <p:sp>
         <p:nvSpPr>
-          <p:cNvPr id="34" name="o343"/>
+          <p:cNvPr id="34" name="o340"/>
           <p:cNvSpPr txBox="1"/>
           <p:nvPr/>
         </p:nvSpPr>
@@ -22467,7 +22292,7 @@
       </p:sp>
       <p:sp>
         <p:nvSpPr>
-          <p:cNvPr id="35" name="o344"/>
+          <p:cNvPr id="35" name="o341"/>
           <p:cNvSpPr/>
           <p:nvPr/>
         </p:nvSpPr>
@@ -22490,7 +22315,7 @@
       </p:sp>
       <p:sp>
         <p:nvSpPr>
-          <p:cNvPr id="36" name="o345"/>
+          <p:cNvPr id="36" name="o342"/>
           <p:cNvSpPr txBox="1"/>
           <p:nvPr/>
         </p:nvSpPr>
@@ -22529,7 +22354,7 @@
       </p:sp>
       <p:sp>
         <p:nvSpPr>
-          <p:cNvPr id="37" name="o346"/>
+          <p:cNvPr id="37" name="o343"/>
           <p:cNvSpPr txBox="1"/>
           <p:nvPr/>
         </p:nvSpPr>
@@ -22568,7 +22393,7 @@
       </p:sp>
       <p:sp>
         <p:nvSpPr>
-          <p:cNvPr id="38" name="o347"/>
+          <p:cNvPr id="38" name="o344"/>
           <p:cNvSpPr txBox="1"/>
           <p:nvPr/>
         </p:nvSpPr>
@@ -22607,7 +22432,7 @@
       </p:sp>
       <p:sp>
         <p:nvSpPr>
-          <p:cNvPr id="39" name="o348"/>
+          <p:cNvPr id="39" name="o345"/>
           <p:cNvSpPr/>
           <p:nvPr/>
         </p:nvSpPr>
@@ -22630,7 +22455,7 @@
       </p:sp>
       <p:sp>
         <p:nvSpPr>
-          <p:cNvPr id="40" name="o349"/>
+          <p:cNvPr id="40" name="o346"/>
           <p:cNvSpPr/>
           <p:nvPr/>
         </p:nvSpPr>
@@ -22653,7 +22478,7 @@
       </p:sp>
       <p:sp>
         <p:nvSpPr>
-          <p:cNvPr id="41" name="o350"/>
+          <p:cNvPr id="41" name="o347"/>
           <p:cNvSpPr txBox="1"/>
           <p:nvPr/>
         </p:nvSpPr>
@@ -22692,7 +22517,7 @@
       </p:sp>
       <p:sp>
         <p:nvSpPr>
-          <p:cNvPr id="42" name="o351"/>
+          <p:cNvPr id="42" name="o348"/>
           <p:cNvSpPr/>
           <p:nvPr/>
         </p:nvSpPr>
@@ -22715,7 +22540,7 @@
       </p:sp>
       <p:sp>
         <p:nvSpPr>
-          <p:cNvPr id="43" name="o352"/>
+          <p:cNvPr id="43" name="o349"/>
           <p:cNvSpPr/>
           <p:nvPr/>
         </p:nvSpPr>
@@ -22738,7 +22563,7 @@
       </p:sp>
       <p:sp>
         <p:nvSpPr>
-          <p:cNvPr id="44" name="o353"/>
+          <p:cNvPr id="44" name="o350"/>
           <p:cNvSpPr/>
           <p:nvPr/>
         </p:nvSpPr>
@@ -22760,7 +22585,7 @@
       </p:sp>
       <p:sp>
         <p:nvSpPr>
-          <p:cNvPr id="45" name="o354"/>
+          <p:cNvPr id="45" name="o351"/>
           <p:cNvSpPr txBox="1"/>
           <p:nvPr/>
         </p:nvSpPr>
@@ -22799,7 +22624,7 @@
       </p:sp>
       <p:sp>
         <p:nvSpPr>
-          <p:cNvPr id="46" name="o355"/>
+          <p:cNvPr id="46" name="o352"/>
           <p:cNvSpPr txBox="1"/>
           <p:nvPr/>
         </p:nvSpPr>
@@ -22838,7 +22663,7 @@
       </p:sp>
       <p:sp>
         <p:nvSpPr>
-          <p:cNvPr id="47" name="o356"/>
+          <p:cNvPr id="47" name="o353"/>
           <p:cNvSpPr txBox="1"/>
           <p:nvPr/>
         </p:nvSpPr>
@@ -22877,7 +22702,7 @@
       </p:sp>
       <p:sp>
         <p:nvSpPr>
-          <p:cNvPr id="48" name="o357"/>
+          <p:cNvPr id="48" name="o354"/>
           <p:cNvSpPr txBox="1"/>
           <p:nvPr/>
         </p:nvSpPr>
@@ -22916,7 +22741,7 @@
       </p:sp>
       <p:sp>
         <p:nvSpPr>
-          <p:cNvPr id="49" name="o358"/>
+          <p:cNvPr id="49" name="o355"/>
           <p:cNvSpPr/>
           <p:nvPr/>
         </p:nvSpPr>
@@ -22941,7 +22766,7 @@
       </p:sp>
       <p:sp>
         <p:nvSpPr>
-          <p:cNvPr id="50" name="o359"/>
+          <p:cNvPr id="50" name="o356"/>
           <p:cNvSpPr txBox="1"/>
           <p:nvPr/>
         </p:nvSpPr>
@@ -22980,7 +22805,7 @@
       </p:sp>
       <p:sp>
         <p:nvSpPr>
-          <p:cNvPr id="51" name="o360"/>
+          <p:cNvPr id="51" name="o357"/>
           <p:cNvSpPr/>
           <p:nvPr/>
         </p:nvSpPr>
@@ -23005,7 +22830,7 @@
       </p:sp>
       <p:sp>
         <p:nvSpPr>
-          <p:cNvPr id="52" name="o361"/>
+          <p:cNvPr id="52" name="o358"/>
           <p:cNvSpPr txBox="1"/>
           <p:nvPr/>
         </p:nvSpPr>
@@ -23044,7 +22869,7 @@
       </p:sp>
       <p:sp>
         <p:nvSpPr>
-          <p:cNvPr id="53" name="o362"/>
+          <p:cNvPr id="53" name="o359"/>
           <p:cNvSpPr/>
           <p:nvPr/>
         </p:nvSpPr>
@@ -23069,7 +22894,7 @@
       </p:sp>
       <p:sp>
         <p:nvSpPr>
-          <p:cNvPr id="54" name="o363"/>
+          <p:cNvPr id="54" name="o360"/>
           <p:cNvSpPr txBox="1"/>
           <p:nvPr/>
         </p:nvSpPr>
@@ -23108,7 +22933,7 @@
       </p:sp>
       <p:sp>
         <p:nvSpPr>
-          <p:cNvPr id="55" name="o364"/>
+          <p:cNvPr id="55" name="o361"/>
           <p:cNvSpPr/>
           <p:nvPr/>
         </p:nvSpPr>
@@ -23133,7 +22958,7 @@
       </p:sp>
       <p:sp>
         <p:nvSpPr>
-          <p:cNvPr id="56" name="o365"/>
+          <p:cNvPr id="56" name="o362"/>
           <p:cNvSpPr txBox="1"/>
           <p:nvPr/>
         </p:nvSpPr>
@@ -23172,7 +22997,7 @@
       </p:sp>
       <p:sp>
         <p:nvSpPr>
-          <p:cNvPr id="57" name="o366"/>
+          <p:cNvPr id="57" name="o363"/>
           <p:cNvSpPr/>
           <p:nvPr/>
         </p:nvSpPr>
@@ -23197,7 +23022,7 @@
       </p:sp>
       <p:sp>
         <p:nvSpPr>
-          <p:cNvPr id="58" name="o367"/>
+          <p:cNvPr id="58" name="o364"/>
           <p:cNvSpPr txBox="1"/>
           <p:nvPr/>
         </p:nvSpPr>
@@ -23236,7 +23061,7 @@
       </p:sp>
       <p:sp>
         <p:nvSpPr>
-          <p:cNvPr id="59" name="o368"/>
+          <p:cNvPr id="59" name="o365"/>
           <p:cNvSpPr/>
           <p:nvPr/>
         </p:nvSpPr>
@@ -23261,7 +23086,7 @@
       </p:sp>
       <p:sp>
         <p:nvSpPr>
-          <p:cNvPr id="60" name="o369"/>
+          <p:cNvPr id="60" name="o366"/>
           <p:cNvSpPr txBox="1"/>
           <p:nvPr/>
         </p:nvSpPr>
@@ -23300,7 +23125,7 @@
       </p:sp>
       <p:sp>
         <p:nvSpPr>
-          <p:cNvPr id="61" name="o370"/>
+          <p:cNvPr id="61" name="o367"/>
           <p:cNvSpPr/>
           <p:nvPr/>
         </p:nvSpPr>
@@ -23325,7 +23150,7 @@
       </p:sp>
       <p:sp>
         <p:nvSpPr>
-          <p:cNvPr id="62" name="o371"/>
+          <p:cNvPr id="62" name="o368"/>
           <p:cNvSpPr txBox="1"/>
           <p:nvPr/>
         </p:nvSpPr>
@@ -23364,7 +23189,7 @@
       </p:sp>
       <p:sp>
         <p:nvSpPr>
-          <p:cNvPr id="63" name="o372"/>
+          <p:cNvPr id="63" name="o369"/>
           <p:cNvSpPr/>
           <p:nvPr/>
         </p:nvSpPr>
@@ -23389,7 +23214,7 @@
       </p:sp>
       <p:sp>
         <p:nvSpPr>
-          <p:cNvPr id="64" name="o373"/>
+          <p:cNvPr id="64" name="o370"/>
           <p:cNvSpPr txBox="1"/>
           <p:nvPr/>
         </p:nvSpPr>
@@ -23428,7 +23253,7 @@
       </p:sp>
       <p:sp>
         <p:nvSpPr>
-          <p:cNvPr id="65" name="o374"/>
+          <p:cNvPr id="65" name="o371"/>
           <p:cNvSpPr/>
           <p:nvPr/>
         </p:nvSpPr>
@@ -23453,7 +23278,7 @@
       </p:sp>
       <p:sp>
         <p:nvSpPr>
-          <p:cNvPr id="66" name="o375"/>
+          <p:cNvPr id="66" name="o372"/>
           <p:cNvSpPr txBox="1"/>
           <p:nvPr/>
         </p:nvSpPr>
@@ -23492,7 +23317,7 @@
       </p:sp>
       <p:sp>
         <p:nvSpPr>
-          <p:cNvPr id="67" name="o376"/>
+          <p:cNvPr id="67" name="o373"/>
           <p:cNvSpPr txBox="1"/>
           <p:nvPr/>
         </p:nvSpPr>
@@ -23531,7 +23356,7 @@
       </p:sp>
       <p:sp>
         <p:nvSpPr>
-          <p:cNvPr id="68" name="o377"/>
+          <p:cNvPr id="68" name="o374"/>
           <p:cNvSpPr/>
           <p:nvPr/>
         </p:nvSpPr>
@@ -23551,7 +23376,7 @@
       </p:sp>
       <p:sp>
         <p:nvSpPr>
-          <p:cNvPr id="69" name="o378"/>
+          <p:cNvPr id="69" name="o375"/>
           <p:cNvSpPr/>
           <p:nvPr/>
         </p:nvSpPr>
@@ -23571,7 +23396,7 @@
       </p:sp>
       <p:sp>
         <p:nvSpPr>
-          <p:cNvPr id="70" name="o379"/>
+          <p:cNvPr id="70" name="o376"/>
           <p:cNvSpPr txBox="1"/>
           <p:nvPr/>
         </p:nvSpPr>
@@ -23638,7 +23463,7 @@
       </p:grpSpPr>
       <p:sp>
         <p:nvSpPr>
-          <p:cNvPr id="2" name="o380"/>
+          <p:cNvPr id="2" name="o377"/>
           <p:cNvSpPr txBox="1"/>
           <p:nvPr/>
         </p:nvSpPr>
@@ -23677,7 +23502,7 @@
       </p:sp>
       <p:sp>
         <p:nvSpPr>
-          <p:cNvPr id="3" name="o381"/>
+          <p:cNvPr id="3" name="o378"/>
           <p:cNvSpPr txBox="1"/>
           <p:nvPr/>
         </p:nvSpPr>
@@ -23719,7 +23544,7 @@
       </p:sp>
       <p:sp>
         <p:nvSpPr>
-          <p:cNvPr id="4" name="o382"/>
+          <p:cNvPr id="4" name="o379"/>
           <p:cNvSpPr txBox="1"/>
           <p:nvPr/>
         </p:nvSpPr>
@@ -23758,7 +23583,7 @@
       </p:sp>
       <p:sp>
         <p:nvSpPr>
-          <p:cNvPr id="5" name="o383"/>
+          <p:cNvPr id="5" name="o380"/>
           <p:cNvSpPr/>
           <p:nvPr/>
         </p:nvSpPr>
@@ -23781,7 +23606,7 @@
       </p:sp>
       <p:sp>
         <p:nvSpPr>
-          <p:cNvPr id="6" name="o384"/>
+          <p:cNvPr id="6" name="o381"/>
           <p:cNvSpPr txBox="1"/>
           <p:nvPr/>
         </p:nvSpPr>
@@ -23820,7 +23645,7 @@
       </p:sp>
       <p:sp>
         <p:nvSpPr>
-          <p:cNvPr id="7" name="o385"/>
+          <p:cNvPr id="7" name="o382"/>
           <p:cNvSpPr txBox="1"/>
           <p:nvPr/>
         </p:nvSpPr>
@@ -23859,7 +23684,7 @@
       </p:sp>
       <p:sp>
         <p:nvSpPr>
-          <p:cNvPr id="8" name="o386"/>
+          <p:cNvPr id="8" name="o383"/>
           <p:cNvSpPr txBox="1"/>
           <p:nvPr/>
         </p:nvSpPr>
@@ -23898,7 +23723,7 @@
       </p:sp>
       <p:sp>
         <p:nvSpPr>
-          <p:cNvPr id="9" name="o387"/>
+          <p:cNvPr id="9" name="o384"/>
           <p:cNvSpPr/>
           <p:nvPr/>
         </p:nvSpPr>
@@ -23918,7 +23743,7 @@
       </p:sp>
       <p:sp>
         <p:nvSpPr>
-          <p:cNvPr id="10" name="o388"/>
+          <p:cNvPr id="10" name="o385"/>
           <p:cNvSpPr txBox="1"/>
           <p:nvPr/>
         </p:nvSpPr>
@@ -23957,7 +23782,7 @@
       </p:sp>
       <p:sp>
         <p:nvSpPr>
-          <p:cNvPr id="11" name="o389"/>
+          <p:cNvPr id="11" name="o386"/>
           <p:cNvSpPr txBox="1"/>
           <p:nvPr/>
         </p:nvSpPr>
@@ -23996,7 +23821,7 @@
       </p:sp>
       <p:sp>
         <p:nvSpPr>
-          <p:cNvPr id="12" name="o390"/>
+          <p:cNvPr id="12" name="o387"/>
           <p:cNvSpPr/>
           <p:nvPr/>
         </p:nvSpPr>
@@ -24019,7 +23844,7 @@
       </p:sp>
       <p:sp>
         <p:nvSpPr>
-          <p:cNvPr id="13" name="o391"/>
+          <p:cNvPr id="13" name="o388"/>
           <p:cNvSpPr/>
           <p:nvPr/>
         </p:nvSpPr>
@@ -24039,7 +23864,7 @@
       </p:sp>
       <p:sp>
         <p:nvSpPr>
-          <p:cNvPr id="14" name="o392"/>
+          <p:cNvPr id="14" name="o389"/>
           <p:cNvSpPr txBox="1"/>
           <p:nvPr/>
         </p:nvSpPr>
@@ -24078,7 +23903,7 @@
       </p:sp>
       <p:sp>
         <p:nvSpPr>
-          <p:cNvPr id="15" name="o393"/>
+          <p:cNvPr id="15" name="o390"/>
           <p:cNvSpPr txBox="1"/>
           <p:nvPr/>
         </p:nvSpPr>
@@ -24117,7 +23942,7 @@
       </p:sp>
       <p:sp>
         <p:nvSpPr>
-          <p:cNvPr id="16" name="o394"/>
+          <p:cNvPr id="16" name="o391"/>
           <p:cNvSpPr txBox="1"/>
           <p:nvPr/>
         </p:nvSpPr>
@@ -24156,7 +23981,7 @@
       </p:sp>
       <p:sp>
         <p:nvSpPr>
-          <p:cNvPr id="17" name="o395"/>
+          <p:cNvPr id="17" name="o392"/>
           <p:cNvSpPr/>
           <p:nvPr/>
         </p:nvSpPr>
@@ -24176,7 +24001,7 @@
       </p:sp>
       <p:sp>
         <p:nvSpPr>
-          <p:cNvPr id="18" name="o396"/>
+          <p:cNvPr id="18" name="o393"/>
           <p:cNvSpPr txBox="1"/>
           <p:nvPr/>
         </p:nvSpPr>
@@ -24215,7 +24040,7 @@
       </p:sp>
       <p:sp>
         <p:nvSpPr>
-          <p:cNvPr id="19" name="o397"/>
+          <p:cNvPr id="19" name="o394"/>
           <p:cNvSpPr txBox="1"/>
           <p:nvPr/>
         </p:nvSpPr>
@@ -24254,7 +24079,7 @@
       </p:sp>
       <p:sp>
         <p:nvSpPr>
-          <p:cNvPr id="20" name="o398"/>
+          <p:cNvPr id="20" name="o395"/>
           <p:cNvSpPr txBox="1"/>
           <p:nvPr/>
         </p:nvSpPr>
@@ -24293,7 +24118,7 @@
       </p:sp>
       <p:sp>
         <p:nvSpPr>
-          <p:cNvPr id="21" name="o399"/>
+          <p:cNvPr id="21" name="o396"/>
           <p:cNvSpPr/>
           <p:nvPr/>
         </p:nvSpPr>
@@ -24313,7 +24138,7 @@
       </p:sp>
       <p:sp>
         <p:nvSpPr>
-          <p:cNvPr id="22" name="o400"/>
+          <p:cNvPr id="22" name="o397"/>
           <p:cNvSpPr txBox="1"/>
           <p:nvPr/>
         </p:nvSpPr>
@@ -24352,7 +24177,7 @@
       </p:sp>
       <p:sp>
         <p:nvSpPr>
-          <p:cNvPr id="23" name="o401"/>
+          <p:cNvPr id="23" name="o398"/>
           <p:cNvSpPr txBox="1"/>
           <p:nvPr/>
         </p:nvSpPr>
@@ -24391,7 +24216,7 @@
       </p:sp>
       <p:sp>
         <p:nvSpPr>
-          <p:cNvPr id="24" name="o402"/>
+          <p:cNvPr id="24" name="o399"/>
           <p:cNvSpPr txBox="1"/>
           <p:nvPr/>
         </p:nvSpPr>
@@ -24430,7 +24255,7 @@
       </p:sp>
       <p:sp>
         <p:nvSpPr>
-          <p:cNvPr id="25" name="o403"/>
+          <p:cNvPr id="25" name="o400"/>
           <p:cNvSpPr/>
           <p:nvPr/>
         </p:nvSpPr>
@@ -24450,7 +24275,7 @@
       </p:sp>
       <p:sp>
         <p:nvSpPr>
-          <p:cNvPr id="26" name="o404"/>
+          <p:cNvPr id="26" name="o401"/>
           <p:cNvSpPr txBox="1"/>
           <p:nvPr/>
         </p:nvSpPr>
@@ -24489,7 +24314,7 @@
       </p:sp>
       <p:sp>
         <p:nvSpPr>
-          <p:cNvPr id="27" name="o405"/>
+          <p:cNvPr id="27" name="o402"/>
           <p:cNvSpPr txBox="1"/>
           <p:nvPr/>
         </p:nvSpPr>
@@ -24528,7 +24353,7 @@
       </p:sp>
       <p:sp>
         <p:nvSpPr>
-          <p:cNvPr id="28" name="o406"/>
+          <p:cNvPr id="28" name="o403"/>
           <p:cNvSpPr txBox="1"/>
           <p:nvPr/>
         </p:nvSpPr>
@@ -24567,7 +24392,7 @@
       </p:sp>
       <p:sp>
         <p:nvSpPr>
-          <p:cNvPr id="29" name="o407"/>
+          <p:cNvPr id="29" name="o404"/>
           <p:cNvSpPr txBox="1"/>
           <p:nvPr/>
         </p:nvSpPr>
@@ -24606,7 +24431,7 @@
       </p:sp>
       <p:sp>
         <p:nvSpPr>
-          <p:cNvPr id="30" name="o408"/>
+          <p:cNvPr id="30" name="o405"/>
           <p:cNvSpPr/>
           <p:nvPr/>
         </p:nvSpPr>
@@ -24631,7 +24456,7 @@
       </p:sp>
       <p:sp>
         <p:nvSpPr>
-          <p:cNvPr id="31" name="o409"/>
+          <p:cNvPr id="31" name="o406"/>
           <p:cNvSpPr/>
           <p:nvPr/>
         </p:nvSpPr>
@@ -24656,7 +24481,7 @@
       </p:sp>
       <p:sp>
         <p:nvSpPr>
-          <p:cNvPr id="32" name="o410"/>
+          <p:cNvPr id="32" name="o407"/>
           <p:cNvSpPr txBox="1"/>
           <p:nvPr/>
         </p:nvSpPr>
@@ -24695,7 +24520,7 @@
       </p:sp>
       <p:sp>
         <p:nvSpPr>
-          <p:cNvPr id="33" name="o411"/>
+          <p:cNvPr id="33" name="o408"/>
           <p:cNvSpPr txBox="1"/>
           <p:nvPr/>
         </p:nvSpPr>
@@ -24734,7 +24559,7 @@
       </p:sp>
       <p:sp>
         <p:nvSpPr>
-          <p:cNvPr id="34" name="o412"/>
+          <p:cNvPr id="34" name="o409"/>
           <p:cNvSpPr txBox="1"/>
           <p:nvPr/>
         </p:nvSpPr>
@@ -24773,7 +24598,7 @@
       </p:sp>
       <p:sp>
         <p:nvSpPr>
-          <p:cNvPr id="35" name="o413"/>
+          <p:cNvPr id="35" name="o410"/>
           <p:cNvSpPr/>
           <p:nvPr/>
         </p:nvSpPr>
@@ -24797,7 +24622,7 @@
       </p:sp>
       <p:sp>
         <p:nvSpPr>
-          <p:cNvPr id="36" name="o414"/>
+          <p:cNvPr id="36" name="o411"/>
           <p:cNvSpPr/>
           <p:nvPr/>
         </p:nvSpPr>
@@ -24822,7 +24647,7 @@
       </p:sp>
       <p:sp>
         <p:nvSpPr>
-          <p:cNvPr id="37" name="o415"/>
+          <p:cNvPr id="37" name="o412"/>
           <p:cNvSpPr/>
           <p:nvPr/>
         </p:nvSpPr>
@@ -24847,7 +24672,7 @@
       </p:sp>
       <p:sp>
         <p:nvSpPr>
-          <p:cNvPr id="38" name="o416"/>
+          <p:cNvPr id="38" name="o413"/>
           <p:cNvSpPr txBox="1"/>
           <p:nvPr/>
         </p:nvSpPr>
@@ -24886,7 +24711,7 @@
       </p:sp>
       <p:sp>
         <p:nvSpPr>
-          <p:cNvPr id="39" name="o417"/>
+          <p:cNvPr id="39" name="o414"/>
           <p:cNvSpPr txBox="1"/>
           <p:nvPr/>
         </p:nvSpPr>
@@ -24925,7 +24750,7 @@
       </p:sp>
       <p:sp>
         <p:nvSpPr>
-          <p:cNvPr id="40" name="o418"/>
+          <p:cNvPr id="40" name="o415"/>
           <p:cNvSpPr txBox="1"/>
           <p:nvPr/>
         </p:nvSpPr>
@@ -24964,7 +24789,7 @@
       </p:sp>
       <p:sp>
         <p:nvSpPr>
-          <p:cNvPr id="41" name="o419"/>
+          <p:cNvPr id="41" name="o416"/>
           <p:cNvSpPr/>
           <p:nvPr/>
         </p:nvSpPr>
@@ -24988,7 +24813,7 @@
       </p:sp>
       <p:sp>
         <p:nvSpPr>
-          <p:cNvPr id="42" name="o420"/>
+          <p:cNvPr id="42" name="o417"/>
           <p:cNvSpPr/>
           <p:nvPr/>
         </p:nvSpPr>
@@ -25013,7 +24838,7 @@
       </p:sp>
       <p:sp>
         <p:nvSpPr>
-          <p:cNvPr id="43" name="o421"/>
+          <p:cNvPr id="43" name="o418"/>
           <p:cNvSpPr/>
           <p:nvPr/>
         </p:nvSpPr>
@@ -25038,7 +24863,7 @@
       </p:sp>
       <p:sp>
         <p:nvSpPr>
-          <p:cNvPr id="44" name="o422"/>
+          <p:cNvPr id="44" name="o419"/>
           <p:cNvSpPr txBox="1"/>
           <p:nvPr/>
         </p:nvSpPr>
@@ -25077,7 +24902,7 @@
       </p:sp>
       <p:sp>
         <p:nvSpPr>
-          <p:cNvPr id="45" name="o423"/>
+          <p:cNvPr id="45" name="o420"/>
           <p:cNvSpPr txBox="1"/>
           <p:nvPr/>
         </p:nvSpPr>
@@ -25116,7 +24941,7 @@
       </p:sp>
       <p:sp>
         <p:nvSpPr>
-          <p:cNvPr id="46" name="o424"/>
+          <p:cNvPr id="46" name="o421"/>
           <p:cNvSpPr txBox="1"/>
           <p:nvPr/>
         </p:nvSpPr>
@@ -25155,7 +24980,7 @@
       </p:sp>
       <p:sp>
         <p:nvSpPr>
-          <p:cNvPr id="47" name="o425"/>
+          <p:cNvPr id="47" name="o422"/>
           <p:cNvSpPr/>
           <p:nvPr/>
         </p:nvSpPr>
@@ -25179,7 +25004,7 @@
       </p:sp>
       <p:sp>
         <p:nvSpPr>
-          <p:cNvPr id="48" name="o426"/>
+          <p:cNvPr id="48" name="o423"/>
           <p:cNvSpPr/>
           <p:nvPr/>
         </p:nvSpPr>
@@ -25204,7 +25029,7 @@
       </p:sp>
       <p:sp>
         <p:nvSpPr>
-          <p:cNvPr id="49" name="o427"/>
+          <p:cNvPr id="49" name="o424"/>
           <p:cNvSpPr/>
           <p:nvPr/>
         </p:nvSpPr>
@@ -25224,7 +25049,7 @@
       </p:sp>
       <p:sp>
         <p:nvSpPr>
-          <p:cNvPr id="50" name="o428"/>
+          <p:cNvPr id="50" name="o425"/>
           <p:cNvSpPr/>
           <p:nvPr/>
         </p:nvSpPr>
@@ -25249,7 +25074,7 @@
       </p:sp>
       <p:sp>
         <p:nvSpPr>
-          <p:cNvPr id="51" name="o429"/>
+          <p:cNvPr id="51" name="o426"/>
           <p:cNvSpPr txBox="1"/>
           <p:nvPr/>
         </p:nvSpPr>
@@ -25288,7 +25113,7 @@
       </p:sp>
       <p:sp>
         <p:nvSpPr>
-          <p:cNvPr id="52" name="o430"/>
+          <p:cNvPr id="52" name="o427"/>
           <p:cNvSpPr txBox="1"/>
           <p:nvPr/>
         </p:nvSpPr>
@@ -25327,7 +25152,7 @@
       </p:sp>
       <p:sp>
         <p:nvSpPr>
-          <p:cNvPr id="53" name="o431"/>
+          <p:cNvPr id="53" name="o428"/>
           <p:cNvSpPr txBox="1"/>
           <p:nvPr/>
         </p:nvSpPr>
@@ -25366,7 +25191,7 @@
       </p:sp>
       <p:sp>
         <p:nvSpPr>
-          <p:cNvPr id="54" name="o432"/>
+          <p:cNvPr id="54" name="o429"/>
           <p:cNvSpPr/>
           <p:nvPr/>
         </p:nvSpPr>
@@ -25390,7 +25215,7 @@
       </p:sp>
       <p:sp>
         <p:nvSpPr>
-          <p:cNvPr id="55" name="o433"/>
+          <p:cNvPr id="55" name="o430"/>
           <p:cNvSpPr/>
           <p:nvPr/>
         </p:nvSpPr>
@@ -25415,7 +25240,7 @@
       </p:sp>
       <p:sp>
         <p:nvSpPr>
-          <p:cNvPr id="56" name="o434"/>
+          <p:cNvPr id="56" name="o431"/>
           <p:cNvSpPr/>
           <p:nvPr/>
         </p:nvSpPr>
@@ -25440,7 +25265,7 @@
       </p:sp>
       <p:sp>
         <p:nvSpPr>
-          <p:cNvPr id="57" name="o435"/>
+          <p:cNvPr id="57" name="o432"/>
           <p:cNvSpPr txBox="1"/>
           <p:nvPr/>
         </p:nvSpPr>
@@ -25479,7 +25304,7 @@
       </p:sp>
       <p:sp>
         <p:nvSpPr>
-          <p:cNvPr id="58" name="o436"/>
+          <p:cNvPr id="58" name="o433"/>
           <p:cNvSpPr txBox="1"/>
           <p:nvPr/>
         </p:nvSpPr>
@@ -25518,7 +25343,7 @@
       </p:sp>
       <p:sp>
         <p:nvSpPr>
-          <p:cNvPr id="59" name="o437"/>
+          <p:cNvPr id="59" name="o434"/>
           <p:cNvSpPr txBox="1"/>
           <p:nvPr/>
         </p:nvSpPr>
@@ -25557,7 +25382,7 @@
       </p:sp>
       <p:sp>
         <p:nvSpPr>
-          <p:cNvPr id="60" name="o438"/>
+          <p:cNvPr id="60" name="o435"/>
           <p:cNvSpPr/>
           <p:nvPr/>
         </p:nvSpPr>
@@ -25577,7 +25402,7 @@
       </p:sp>
       <p:sp>
         <p:nvSpPr>
-          <p:cNvPr id="61" name="o439"/>
+          <p:cNvPr id="61" name="o436"/>
           <p:cNvSpPr/>
           <p:nvPr/>
         </p:nvSpPr>
@@ -25597,7 +25422,7 @@
       </p:sp>
       <p:sp>
         <p:nvSpPr>
-          <p:cNvPr id="62" name="o440"/>
+          <p:cNvPr id="62" name="o437"/>
           <p:cNvSpPr txBox="1"/>
           <p:nvPr/>
         </p:nvSpPr>
@@ -25664,7 +25489,7 @@
       </p:grpSpPr>
       <p:sp>
         <p:nvSpPr>
-          <p:cNvPr id="2" name="o441"/>
+          <p:cNvPr id="2" name="o438"/>
           <p:cNvSpPr txBox="1"/>
           <p:nvPr/>
         </p:nvSpPr>
@@ -25703,7 +25528,7 @@
       </p:sp>
       <p:sp>
         <p:nvSpPr>
-          <p:cNvPr id="3" name="o442"/>
+          <p:cNvPr id="3" name="o439"/>
           <p:cNvSpPr txBox="1"/>
           <p:nvPr/>
         </p:nvSpPr>
@@ -25745,7 +25570,7 @@
       </p:sp>
       <p:sp>
         <p:nvSpPr>
-          <p:cNvPr id="4" name="o443"/>
+          <p:cNvPr id="4" name="o440"/>
           <p:cNvSpPr txBox="1"/>
           <p:nvPr/>
         </p:nvSpPr>
@@ -25784,7 +25609,7 @@
       </p:sp>
       <p:sp>
         <p:nvSpPr>
-          <p:cNvPr id="5" name="o444"/>
+          <p:cNvPr id="5" name="o441"/>
           <p:cNvSpPr/>
           <p:nvPr/>
         </p:nvSpPr>
@@ -25807,7 +25632,7 @@
       </p:sp>
       <p:sp>
         <p:nvSpPr>
-          <p:cNvPr id="6" name="o445"/>
+          <p:cNvPr id="6" name="o442"/>
           <p:cNvSpPr txBox="1"/>
           <p:nvPr/>
         </p:nvSpPr>
@@ -25846,7 +25671,7 @@
       </p:sp>
       <p:sp>
         <p:nvSpPr>
-          <p:cNvPr id="7" name="o446"/>
+          <p:cNvPr id="7" name="o443"/>
           <p:cNvSpPr txBox="1"/>
           <p:nvPr/>
         </p:nvSpPr>
@@ -25885,7 +25710,7 @@
       </p:sp>
       <p:sp>
         <p:nvSpPr>
-          <p:cNvPr id="8" name="o447"/>
+          <p:cNvPr id="8" name="o444"/>
           <p:cNvSpPr txBox="1"/>
           <p:nvPr/>
         </p:nvSpPr>
@@ -25924,7 +25749,7 @@
       </p:sp>
       <p:sp>
         <p:nvSpPr>
-          <p:cNvPr id="9" name="o448"/>
+          <p:cNvPr id="9" name="o445"/>
           <p:cNvSpPr txBox="1"/>
           <p:nvPr/>
         </p:nvSpPr>
@@ -25963,7 +25788,7 @@
       </p:sp>
       <p:graphicFrame>
         <p:nvGraphicFramePr>
-          <p:cNvPr id="10" name="o449" descr=""/>
+          <p:cNvPr id="10" name="o446" descr=""/>
           <p:cNvGraphicFramePr/>
           <p:nvPr/>
         </p:nvGraphicFramePr>
@@ -25979,7 +25804,7 @@
       </p:graphicFrame>
       <p:sp>
         <p:nvSpPr>
-          <p:cNvPr id="11" name="o450"/>
+          <p:cNvPr id="11" name="o447"/>
           <p:cNvSpPr txBox="1"/>
           <p:nvPr/>
         </p:nvSpPr>
@@ -26018,7 +25843,7 @@
       </p:sp>
       <p:sp>
         <p:nvSpPr>
-          <p:cNvPr id="12" name="o451"/>
+          <p:cNvPr id="12" name="o448"/>
           <p:cNvSpPr txBox="1"/>
           <p:nvPr/>
         </p:nvSpPr>
@@ -26057,7 +25882,7 @@
       </p:sp>
       <p:sp>
         <p:nvSpPr>
-          <p:cNvPr id="13" name="o452"/>
+          <p:cNvPr id="13" name="o449"/>
           <p:cNvSpPr/>
           <p:nvPr/>
         </p:nvSpPr>
@@ -26077,7 +25902,7 @@
       </p:sp>
       <p:sp>
         <p:nvSpPr>
-          <p:cNvPr id="14" name="o453"/>
+          <p:cNvPr id="14" name="o450"/>
           <p:cNvSpPr/>
           <p:nvPr/>
         </p:nvSpPr>
@@ -26097,7 +25922,7 @@
       </p:sp>
       <p:sp>
         <p:nvSpPr>
-          <p:cNvPr id="15" name="o454"/>
+          <p:cNvPr id="15" name="o451"/>
           <p:cNvSpPr txBox="1"/>
           <p:nvPr/>
         </p:nvSpPr>
@@ -26139,7 +25964,7 @@
       </p:sp>
       <p:sp>
         <p:nvSpPr>
-          <p:cNvPr id="16" name="o455"/>
+          <p:cNvPr id="16" name="o452"/>
           <p:cNvSpPr/>
           <p:nvPr/>
         </p:nvSpPr>
@@ -26164,7 +25989,7 @@
       </p:sp>
       <p:sp>
         <p:nvSpPr>
-          <p:cNvPr id="17" name="o456"/>
+          <p:cNvPr id="17" name="o453"/>
           <p:cNvSpPr txBox="1"/>
           <p:nvPr/>
         </p:nvSpPr>
@@ -26203,7 +26028,7 @@
       </p:sp>
       <p:sp>
         <p:nvSpPr>
-          <p:cNvPr id="18" name="o457"/>
+          <p:cNvPr id="18" name="o454"/>
           <p:cNvSpPr txBox="1"/>
           <p:nvPr/>
         </p:nvSpPr>
@@ -26242,7 +26067,7 @@
       </p:sp>
       <p:sp>
         <p:nvSpPr>
-          <p:cNvPr id="19" name="o458"/>
+          <p:cNvPr id="19" name="o455"/>
           <p:cNvSpPr txBox="1"/>
           <p:nvPr/>
         </p:nvSpPr>
@@ -26281,7 +26106,7 @@
       </p:sp>
       <p:sp>
         <p:nvSpPr>
-          <p:cNvPr id="20" name="o459"/>
+          <p:cNvPr id="20" name="o456"/>
           <p:cNvSpPr/>
           <p:nvPr/>
         </p:nvSpPr>
@@ -26306,7 +26131,7 @@
       </p:sp>
       <p:sp>
         <p:nvSpPr>
-          <p:cNvPr id="21" name="o460"/>
+          <p:cNvPr id="21" name="o457"/>
           <p:cNvSpPr txBox="1"/>
           <p:nvPr/>
         </p:nvSpPr>
@@ -26345,7 +26170,7 @@
       </p:sp>
       <p:sp>
         <p:nvSpPr>
-          <p:cNvPr id="22" name="o461"/>
+          <p:cNvPr id="22" name="o458"/>
           <p:cNvSpPr txBox="1"/>
           <p:nvPr/>
         </p:nvSpPr>
@@ -26384,7 +26209,7 @@
       </p:sp>
       <p:sp>
         <p:nvSpPr>
-          <p:cNvPr id="23" name="o462"/>
+          <p:cNvPr id="23" name="o459"/>
           <p:cNvSpPr txBox="1"/>
           <p:nvPr/>
         </p:nvSpPr>
@@ -26423,7 +26248,7 @@
       </p:sp>
       <p:sp>
         <p:nvSpPr>
-          <p:cNvPr id="24" name="o463"/>
+          <p:cNvPr id="24" name="o460"/>
           <p:cNvSpPr/>
           <p:nvPr/>
         </p:nvSpPr>
@@ -26448,7 +26273,7 @@
       </p:sp>
       <p:sp>
         <p:nvSpPr>
-          <p:cNvPr id="25" name="o464"/>
+          <p:cNvPr id="25" name="o461"/>
           <p:cNvSpPr txBox="1"/>
           <p:nvPr/>
         </p:nvSpPr>
@@ -26487,7 +26312,7 @@
       </p:sp>
       <p:sp>
         <p:nvSpPr>
-          <p:cNvPr id="26" name="o465"/>
+          <p:cNvPr id="26" name="o462"/>
           <p:cNvSpPr txBox="1"/>
           <p:nvPr/>
         </p:nvSpPr>
@@ -26526,7 +26351,7 @@
       </p:sp>
       <p:sp>
         <p:nvSpPr>
-          <p:cNvPr id="27" name="o466"/>
+          <p:cNvPr id="27" name="o463"/>
           <p:cNvSpPr txBox="1"/>
           <p:nvPr/>
         </p:nvSpPr>
@@ -26565,7 +26390,7 @@
       </p:sp>
       <p:sp>
         <p:nvSpPr>
-          <p:cNvPr id="28" name="o467"/>
+          <p:cNvPr id="28" name="o464"/>
           <p:cNvSpPr txBox="1"/>
           <p:nvPr/>
         </p:nvSpPr>
@@ -26604,7 +26429,7 @@
       </p:sp>
       <p:sp>
         <p:nvSpPr>
-          <p:cNvPr id="29" name="o468"/>
+          <p:cNvPr id="29" name="o465"/>
           <p:cNvSpPr/>
           <p:nvPr/>
         </p:nvSpPr>
@@ -26624,7 +26449,7 @@
       </p:sp>
       <p:sp>
         <p:nvSpPr>
-          <p:cNvPr id="30" name="o469"/>
+          <p:cNvPr id="30" name="o466"/>
           <p:cNvSpPr txBox="1"/>
           <p:nvPr/>
         </p:nvSpPr>
@@ -26663,7 +26488,7 @@
       </p:sp>
       <p:sp>
         <p:nvSpPr>
-          <p:cNvPr id="31" name="o470"/>
+          <p:cNvPr id="31" name="o467"/>
           <p:cNvSpPr txBox="1"/>
           <p:nvPr/>
         </p:nvSpPr>
@@ -26702,7 +26527,7 @@
       </p:sp>
       <p:sp>
         <p:nvSpPr>
-          <p:cNvPr id="32" name="o471"/>
+          <p:cNvPr id="32" name="o468"/>
           <p:cNvSpPr txBox="1"/>
           <p:nvPr/>
         </p:nvSpPr>
@@ -26741,7 +26566,7 @@
       </p:sp>
       <p:sp>
         <p:nvSpPr>
-          <p:cNvPr id="33" name="o472"/>
+          <p:cNvPr id="33" name="o469"/>
           <p:cNvSpPr txBox="1"/>
           <p:nvPr/>
         </p:nvSpPr>
@@ -26780,7 +26605,7 @@
       </p:sp>
       <p:sp>
         <p:nvSpPr>
-          <p:cNvPr id="34" name="o473"/>
+          <p:cNvPr id="34" name="o470"/>
           <p:cNvSpPr txBox="1"/>
           <p:nvPr/>
         </p:nvSpPr>
@@ -26819,7 +26644,7 @@
       </p:sp>
       <p:sp>
         <p:nvSpPr>
-          <p:cNvPr id="35" name="o474"/>
+          <p:cNvPr id="35" name="o471"/>
           <p:cNvSpPr/>
           <p:nvPr/>
         </p:nvSpPr>
@@ -26842,7 +26667,7 @@
       </p:sp>
       <p:sp>
         <p:nvSpPr>
-          <p:cNvPr id="36" name="o475"/>
+          <p:cNvPr id="36" name="o472"/>
           <p:cNvSpPr txBox="1"/>
           <p:nvPr/>
         </p:nvSpPr>
@@ -26881,7 +26706,7 @@
       </p:sp>
       <p:sp>
         <p:nvSpPr>
-          <p:cNvPr id="37" name="o476"/>
+          <p:cNvPr id="37" name="o473"/>
           <p:cNvSpPr txBox="1"/>
           <p:nvPr/>
         </p:nvSpPr>
@@ -26920,7 +26745,7 @@
       </p:sp>
       <p:sp>
         <p:nvSpPr>
-          <p:cNvPr id="38" name="o477"/>
+          <p:cNvPr id="38" name="o474"/>
           <p:cNvSpPr txBox="1"/>
           <p:nvPr/>
         </p:nvSpPr>
@@ -26959,7 +26784,7 @@
       </p:sp>
       <p:sp>
         <p:nvSpPr>
-          <p:cNvPr id="39" name="o478"/>
+          <p:cNvPr id="39" name="o475"/>
           <p:cNvSpPr txBox="1"/>
           <p:nvPr/>
         </p:nvSpPr>
@@ -26998,7 +26823,7 @@
       </p:sp>
       <p:sp>
         <p:nvSpPr>
-          <p:cNvPr id="40" name="o479"/>
+          <p:cNvPr id="40" name="o476"/>
           <p:cNvSpPr txBox="1"/>
           <p:nvPr/>
         </p:nvSpPr>
@@ -27037,7 +26862,7 @@
       </p:sp>
       <p:sp>
         <p:nvSpPr>
-          <p:cNvPr id="41" name="o480"/>
+          <p:cNvPr id="41" name="o477"/>
           <p:cNvSpPr/>
           <p:nvPr/>
         </p:nvSpPr>
@@ -27060,7 +26885,7 @@
       </p:sp>
       <p:sp>
         <p:nvSpPr>
-          <p:cNvPr id="42" name="o481"/>
+          <p:cNvPr id="42" name="o478"/>
           <p:cNvSpPr txBox="1"/>
           <p:nvPr/>
         </p:nvSpPr>
@@ -27099,7 +26924,7 @@
       </p:sp>
       <p:sp>
         <p:nvSpPr>
-          <p:cNvPr id="43" name="o482"/>
+          <p:cNvPr id="43" name="o479"/>
           <p:cNvSpPr txBox="1"/>
           <p:nvPr/>
         </p:nvSpPr>
@@ -27138,7 +26963,7 @@
       </p:sp>
       <p:sp>
         <p:nvSpPr>
-          <p:cNvPr id="44" name="o483"/>
+          <p:cNvPr id="44" name="o480"/>
           <p:cNvSpPr txBox="1"/>
           <p:nvPr/>
         </p:nvSpPr>
@@ -27177,7 +27002,7 @@
       </p:sp>
       <p:sp>
         <p:nvSpPr>
-          <p:cNvPr id="45" name="o484"/>
+          <p:cNvPr id="45" name="o481"/>
           <p:cNvSpPr txBox="1"/>
           <p:nvPr/>
         </p:nvSpPr>
@@ -27216,7 +27041,7 @@
       </p:sp>
       <p:sp>
         <p:nvSpPr>
-          <p:cNvPr id="46" name="o485"/>
+          <p:cNvPr id="46" name="o482"/>
           <p:cNvSpPr txBox="1"/>
           <p:nvPr/>
         </p:nvSpPr>
@@ -27255,7 +27080,7 @@
       </p:sp>
       <p:sp>
         <p:nvSpPr>
-          <p:cNvPr id="47" name="o486"/>
+          <p:cNvPr id="47" name="o483"/>
           <p:cNvSpPr/>
           <p:nvPr/>
         </p:nvSpPr>
@@ -27278,7 +27103,7 @@
       </p:sp>
       <p:sp>
         <p:nvSpPr>
-          <p:cNvPr id="48" name="o487"/>
+          <p:cNvPr id="48" name="o484"/>
           <p:cNvSpPr txBox="1"/>
           <p:nvPr/>
         </p:nvSpPr>
@@ -27317,7 +27142,7 @@
       </p:sp>
       <p:sp>
         <p:nvSpPr>
-          <p:cNvPr id="49" name="o488"/>
+          <p:cNvPr id="49" name="o485"/>
           <p:cNvSpPr txBox="1"/>
           <p:nvPr/>
         </p:nvSpPr>
@@ -27356,7 +27181,7 @@
       </p:sp>
       <p:sp>
         <p:nvSpPr>
-          <p:cNvPr id="50" name="o489"/>
+          <p:cNvPr id="50" name="o486"/>
           <p:cNvSpPr txBox="1"/>
           <p:nvPr/>
         </p:nvSpPr>
@@ -27395,7 +27220,7 @@
       </p:sp>
       <p:sp>
         <p:nvSpPr>
-          <p:cNvPr id="51" name="o490"/>
+          <p:cNvPr id="51" name="o487"/>
           <p:cNvSpPr txBox="1"/>
           <p:nvPr/>
         </p:nvSpPr>
@@ -27434,7 +27259,7 @@
       </p:sp>
       <p:sp>
         <p:nvSpPr>
-          <p:cNvPr id="52" name="o491"/>
+          <p:cNvPr id="52" name="o488"/>
           <p:cNvSpPr txBox="1"/>
           <p:nvPr/>
         </p:nvSpPr>
@@ -27473,7 +27298,7 @@
       </p:sp>
       <p:sp>
         <p:nvSpPr>
-          <p:cNvPr id="53" name="o492"/>
+          <p:cNvPr id="53" name="o489"/>
           <p:cNvSpPr/>
           <p:nvPr/>
         </p:nvSpPr>
@@ -27496,7 +27321,7 @@
       </p:sp>
       <p:sp>
         <p:nvSpPr>
-          <p:cNvPr id="54" name="o493"/>
+          <p:cNvPr id="54" name="o490"/>
           <p:cNvSpPr txBox="1"/>
           <p:nvPr/>
         </p:nvSpPr>
@@ -27535,7 +27360,7 @@
       </p:sp>
       <p:sp>
         <p:nvSpPr>
-          <p:cNvPr id="55" name="o494"/>
+          <p:cNvPr id="55" name="o491"/>
           <p:cNvSpPr txBox="1"/>
           <p:nvPr/>
         </p:nvSpPr>
@@ -27574,7 +27399,7 @@
       </p:sp>
       <p:sp>
         <p:nvSpPr>
-          <p:cNvPr id="56" name="o495"/>
+          <p:cNvPr id="56" name="o492"/>
           <p:cNvSpPr txBox="1"/>
           <p:nvPr/>
         </p:nvSpPr>
@@ -27613,7 +27438,7 @@
       </p:sp>
       <p:sp>
         <p:nvSpPr>
-          <p:cNvPr id="57" name="o496"/>
+          <p:cNvPr id="57" name="o493"/>
           <p:cNvSpPr txBox="1"/>
           <p:nvPr/>
         </p:nvSpPr>
@@ -27652,7 +27477,7 @@
       </p:sp>
       <p:sp>
         <p:nvSpPr>
-          <p:cNvPr id="58" name="o497"/>
+          <p:cNvPr id="58" name="o494"/>
           <p:cNvSpPr txBox="1"/>
           <p:nvPr/>
         </p:nvSpPr>
@@ -27691,7 +27516,7 @@
       </p:sp>
       <p:sp>
         <p:nvSpPr>
-          <p:cNvPr id="59" name="o498"/>
+          <p:cNvPr id="59" name="o495"/>
           <p:cNvSpPr/>
           <p:nvPr/>
         </p:nvSpPr>
@@ -27714,7 +27539,7 @@
       </p:sp>
       <p:sp>
         <p:nvSpPr>
-          <p:cNvPr id="60" name="o499"/>
+          <p:cNvPr id="60" name="o496"/>
           <p:cNvSpPr/>
           <p:nvPr/>
         </p:nvSpPr>
@@ -27737,7 +27562,7 @@
       </p:sp>
       <p:sp>
         <p:nvSpPr>
-          <p:cNvPr id="61" name="o500"/>
+          <p:cNvPr id="61" name="o497"/>
           <p:cNvSpPr txBox="1"/>
           <p:nvPr/>
         </p:nvSpPr>

--- a/docs/QI_경진대회_발표_BCG.pptx
+++ b/docs/QI_경진대회_발표_BCG.pptx
@@ -119,14 +119,14 @@
   <p:extLst>
     <p:ext uri="{521415D9-36F7-43E2-AB2F-B90AF26B5E84}">
       <p14:sectionLst xmlns:p14="http://schemas.microsoft.com/office/powerpoint/2010/main">
-        <p14:section name="도입" id="{a17db192-1ada-7350-da64-c2493d450fd4}">
+        <p14:section name="도입" id="{92903124-acc1-0009-9690-7e3bd11f4334}">
           <p14:sldIdLst>
             <p14:sldId id="256"/>
             <p14:sldId id="257"/>
             <p14:sldId id="258"/>
           </p14:sldIdLst>
         </p14:section>
-        <p14:section name="Plan" id="{148ef8de-fe41-ecb7-53a6-b24ca6c87987}">
+        <p14:section name="Plan" id="{c277e5f2-7a00-bc7f-772c-75cee13039d3}">
           <p14:sldIdLst>
             <p14:sldId id="259"/>
             <p14:sldId id="260"/>
@@ -134,18 +134,18 @@
             <p14:sldId id="262"/>
           </p14:sldIdLst>
         </p14:section>
-        <p14:section name="Do" id="{71fcdf03-52b2-11cf-f80b-bfdd03e340fc}">
+        <p14:section name="Do" id="{e3a507c0-64ea-f509-f001-b7174b443861}">
           <p14:sldIdLst>
             <p14:sldId id="263"/>
           </p14:sldIdLst>
         </p14:section>
-        <p14:section name="Check" id="{40f2c2cc-034e-d99f-8ad2-8a8dad40b2fc}">
+        <p14:section name="Check" id="{20f1ad4e-a64c-49a7-7907-c7fdf85a3ed0}">
           <p14:sldIdLst>
             <p14:sldId id="264"/>
             <p14:sldId id="265"/>
           </p14:sldIdLst>
         </p14:section>
-        <p14:section name="Act" id="{5a03f199-5a43-5ce7-2c87-b7e112948cab}">
+        <p14:section name="Act" id="{4ec3153c-6a91-03fe-c68d-65535aa2f86b}">
           <p14:sldIdLst>
             <p14:sldId id="266"/>
             <p14:sldId id="267"/>
@@ -3814,7 +3814,7 @@
       </p:grpSpPr>
       <p:sp>
         <p:nvSpPr>
-          <p:cNvPr id="2" name="o498"/>
+          <p:cNvPr id="2" name="o481"/>
           <p:cNvSpPr txBox="1"/>
           <p:nvPr/>
         </p:nvSpPr>
@@ -3853,7 +3853,7 @@
       </p:sp>
       <p:sp>
         <p:nvSpPr>
-          <p:cNvPr id="3" name="o499"/>
+          <p:cNvPr id="3" name="o482"/>
           <p:cNvSpPr txBox="1"/>
           <p:nvPr/>
         </p:nvSpPr>
@@ -3895,7 +3895,7 @@
       </p:sp>
       <p:sp>
         <p:nvSpPr>
-          <p:cNvPr id="4" name="o500"/>
+          <p:cNvPr id="4" name="o483"/>
           <p:cNvSpPr txBox="1"/>
           <p:nvPr/>
         </p:nvSpPr>
@@ -3934,7 +3934,7 @@
       </p:sp>
       <p:sp>
         <p:nvSpPr>
-          <p:cNvPr id="5" name="o501"/>
+          <p:cNvPr id="5" name="o484"/>
           <p:cNvSpPr/>
           <p:nvPr/>
         </p:nvSpPr>
@@ -3957,7 +3957,7 @@
       </p:sp>
       <p:sp>
         <p:nvSpPr>
-          <p:cNvPr id="6" name="o502"/>
+          <p:cNvPr id="6" name="o485"/>
           <p:cNvSpPr txBox="1"/>
           <p:nvPr/>
         </p:nvSpPr>
@@ -3996,7 +3996,7 @@
       </p:sp>
       <p:sp>
         <p:nvSpPr>
-          <p:cNvPr id="7" name="o503"/>
+          <p:cNvPr id="7" name="o486"/>
           <p:cNvSpPr txBox="1"/>
           <p:nvPr/>
         </p:nvSpPr>
@@ -4035,7 +4035,7 @@
       </p:sp>
       <p:sp>
         <p:nvSpPr>
-          <p:cNvPr id="8" name="o504"/>
+          <p:cNvPr id="8" name="o487"/>
           <p:cNvSpPr txBox="1"/>
           <p:nvPr/>
         </p:nvSpPr>
@@ -4074,7 +4074,7 @@
       </p:sp>
       <p:sp>
         <p:nvSpPr>
-          <p:cNvPr id="9" name="o505"/>
+          <p:cNvPr id="9" name="o488"/>
           <p:cNvSpPr txBox="1"/>
           <p:nvPr/>
         </p:nvSpPr>
@@ -4113,7 +4113,7 @@
       </p:sp>
       <p:sp>
         <p:nvSpPr>
-          <p:cNvPr id="10" name="o506"/>
+          <p:cNvPr id="10" name="o489"/>
           <p:cNvSpPr/>
           <p:nvPr/>
         </p:nvSpPr>
@@ -4133,7 +4133,7 @@
       </p:sp>
       <p:sp>
         <p:nvSpPr>
-          <p:cNvPr id="11" name="o507"/>
+          <p:cNvPr id="11" name="o490"/>
           <p:cNvSpPr txBox="1"/>
           <p:nvPr/>
         </p:nvSpPr>
@@ -4172,7 +4172,7 @@
       </p:sp>
       <p:sp>
         <p:nvSpPr>
-          <p:cNvPr id="12" name="o508"/>
+          <p:cNvPr id="12" name="o491"/>
           <p:cNvSpPr txBox="1"/>
           <p:nvPr/>
         </p:nvSpPr>
@@ -4211,7 +4211,7 @@
       </p:sp>
       <p:sp>
         <p:nvSpPr>
-          <p:cNvPr id="13" name="o509"/>
+          <p:cNvPr id="13" name="o492"/>
           <p:cNvSpPr/>
           <p:nvPr/>
         </p:nvSpPr>
@@ -4234,7 +4234,7 @@
       </p:sp>
       <p:sp>
         <p:nvSpPr>
-          <p:cNvPr id="14" name="o510"/>
+          <p:cNvPr id="14" name="o493"/>
           <p:cNvSpPr/>
           <p:nvPr/>
         </p:nvSpPr>
@@ -4259,7 +4259,7 @@
       </p:sp>
       <p:sp>
         <p:nvSpPr>
-          <p:cNvPr id="15" name="o511"/>
+          <p:cNvPr id="15" name="o494"/>
           <p:cNvSpPr txBox="1"/>
           <p:nvPr/>
         </p:nvSpPr>
@@ -4298,7 +4298,7 @@
       </p:sp>
       <p:sp>
         <p:nvSpPr>
-          <p:cNvPr id="16" name="o512"/>
+          <p:cNvPr id="16" name="o495"/>
           <p:cNvSpPr txBox="1"/>
           <p:nvPr/>
         </p:nvSpPr>
@@ -4337,7 +4337,7 @@
       </p:sp>
       <p:sp>
         <p:nvSpPr>
-          <p:cNvPr id="17" name="o513"/>
+          <p:cNvPr id="17" name="o496"/>
           <p:cNvSpPr/>
           <p:nvPr/>
         </p:nvSpPr>
@@ -4360,7 +4360,7 @@
       </p:sp>
       <p:sp>
         <p:nvSpPr>
-          <p:cNvPr id="18" name="o514"/>
+          <p:cNvPr id="18" name="o497"/>
           <p:cNvSpPr/>
           <p:nvPr/>
         </p:nvSpPr>
@@ -4385,7 +4385,7 @@
       </p:sp>
       <p:sp>
         <p:nvSpPr>
-          <p:cNvPr id="19" name="o515"/>
+          <p:cNvPr id="19" name="o498"/>
           <p:cNvSpPr txBox="1"/>
           <p:nvPr/>
         </p:nvSpPr>
@@ -4424,7 +4424,7 @@
       </p:sp>
       <p:sp>
         <p:nvSpPr>
-          <p:cNvPr id="20" name="o516"/>
+          <p:cNvPr id="20" name="o499"/>
           <p:cNvSpPr txBox="1"/>
           <p:nvPr/>
         </p:nvSpPr>
@@ -4463,7 +4463,7 @@
       </p:sp>
       <p:sp>
         <p:nvSpPr>
-          <p:cNvPr id="21" name="o517"/>
+          <p:cNvPr id="21" name="o500"/>
           <p:cNvSpPr/>
           <p:nvPr/>
         </p:nvSpPr>
@@ -4486,7 +4486,7 @@
       </p:sp>
       <p:sp>
         <p:nvSpPr>
-          <p:cNvPr id="22" name="o518"/>
+          <p:cNvPr id="22" name="o501"/>
           <p:cNvSpPr/>
           <p:nvPr/>
         </p:nvSpPr>
@@ -4511,7 +4511,7 @@
       </p:sp>
       <p:sp>
         <p:nvSpPr>
-          <p:cNvPr id="23" name="o519"/>
+          <p:cNvPr id="23" name="o502"/>
           <p:cNvSpPr txBox="1"/>
           <p:nvPr/>
         </p:nvSpPr>
@@ -4550,7 +4550,7 @@
       </p:sp>
       <p:sp>
         <p:nvSpPr>
-          <p:cNvPr id="24" name="o520"/>
+          <p:cNvPr id="24" name="o503"/>
           <p:cNvSpPr txBox="1"/>
           <p:nvPr/>
         </p:nvSpPr>
@@ -4589,7 +4589,7 @@
       </p:sp>
       <p:sp>
         <p:nvSpPr>
-          <p:cNvPr id="25" name="o521"/>
+          <p:cNvPr id="25" name="o504"/>
           <p:cNvSpPr/>
           <p:nvPr/>
         </p:nvSpPr>
@@ -4612,7 +4612,7 @@
       </p:sp>
       <p:sp>
         <p:nvSpPr>
-          <p:cNvPr id="26" name="o522"/>
+          <p:cNvPr id="26" name="o505"/>
           <p:cNvSpPr/>
           <p:nvPr/>
         </p:nvSpPr>
@@ -4637,7 +4637,7 @@
       </p:sp>
       <p:sp>
         <p:nvSpPr>
-          <p:cNvPr id="27" name="o523"/>
+          <p:cNvPr id="27" name="o506"/>
           <p:cNvSpPr txBox="1"/>
           <p:nvPr/>
         </p:nvSpPr>
@@ -4676,7 +4676,7 @@
       </p:sp>
       <p:sp>
         <p:nvSpPr>
-          <p:cNvPr id="28" name="o524"/>
+          <p:cNvPr id="28" name="o507"/>
           <p:cNvSpPr txBox="1"/>
           <p:nvPr/>
         </p:nvSpPr>
@@ -4715,7 +4715,7 @@
       </p:sp>
       <p:sp>
         <p:nvSpPr>
-          <p:cNvPr id="29" name="o525"/>
+          <p:cNvPr id="29" name="o508"/>
           <p:cNvSpPr/>
           <p:nvPr/>
         </p:nvSpPr>
@@ -4738,7 +4738,7 @@
       </p:sp>
       <p:sp>
         <p:nvSpPr>
-          <p:cNvPr id="30" name="o526"/>
+          <p:cNvPr id="30" name="o509"/>
           <p:cNvSpPr/>
           <p:nvPr/>
         </p:nvSpPr>
@@ -4763,7 +4763,7 @@
       </p:sp>
       <p:sp>
         <p:nvSpPr>
-          <p:cNvPr id="31" name="o527"/>
+          <p:cNvPr id="31" name="o510"/>
           <p:cNvSpPr txBox="1"/>
           <p:nvPr/>
         </p:nvSpPr>
@@ -4802,7 +4802,7 @@
       </p:sp>
       <p:sp>
         <p:nvSpPr>
-          <p:cNvPr id="32" name="o528"/>
+          <p:cNvPr id="32" name="o511"/>
           <p:cNvSpPr txBox="1"/>
           <p:nvPr/>
         </p:nvSpPr>
@@ -4841,7 +4841,7 @@
       </p:sp>
       <p:sp>
         <p:nvSpPr>
-          <p:cNvPr id="33" name="o529"/>
+          <p:cNvPr id="33" name="o512"/>
           <p:cNvSpPr/>
           <p:nvPr/>
         </p:nvSpPr>
@@ -4864,7 +4864,7 @@
       </p:sp>
       <p:sp>
         <p:nvSpPr>
-          <p:cNvPr id="34" name="o530"/>
+          <p:cNvPr id="34" name="o513"/>
           <p:cNvSpPr/>
           <p:nvPr/>
         </p:nvSpPr>
@@ -4889,7 +4889,7 @@
       </p:sp>
       <p:sp>
         <p:nvSpPr>
-          <p:cNvPr id="35" name="o531"/>
+          <p:cNvPr id="35" name="o514"/>
           <p:cNvSpPr txBox="1"/>
           <p:nvPr/>
         </p:nvSpPr>
@@ -4928,7 +4928,7 @@
       </p:sp>
       <p:sp>
         <p:nvSpPr>
-          <p:cNvPr id="36" name="o532"/>
+          <p:cNvPr id="36" name="o515"/>
           <p:cNvSpPr txBox="1"/>
           <p:nvPr/>
         </p:nvSpPr>
@@ -4967,7 +4967,7 @@
       </p:sp>
       <p:sp>
         <p:nvSpPr>
-          <p:cNvPr id="37" name="o533"/>
+          <p:cNvPr id="37" name="o516"/>
           <p:cNvSpPr/>
           <p:nvPr/>
         </p:nvSpPr>
@@ -4990,7 +4990,7 @@
       </p:sp>
       <p:sp>
         <p:nvSpPr>
-          <p:cNvPr id="38" name="o534"/>
+          <p:cNvPr id="38" name="o517"/>
           <p:cNvSpPr/>
           <p:nvPr/>
         </p:nvSpPr>
@@ -5010,7 +5010,7 @@
       </p:sp>
       <p:sp>
         <p:nvSpPr>
-          <p:cNvPr id="39" name="o535"/>
+          <p:cNvPr id="39" name="o518"/>
           <p:cNvSpPr txBox="1"/>
           <p:nvPr/>
         </p:nvSpPr>
@@ -5049,7 +5049,7 @@
       </p:sp>
       <p:sp>
         <p:nvSpPr>
-          <p:cNvPr id="40" name="o536"/>
+          <p:cNvPr id="40" name="o519"/>
           <p:cNvSpPr txBox="1"/>
           <p:nvPr/>
         </p:nvSpPr>
@@ -5088,7 +5088,7 @@
       </p:sp>
       <p:sp>
         <p:nvSpPr>
-          <p:cNvPr id="41" name="o537"/>
+          <p:cNvPr id="41" name="o520"/>
           <p:cNvSpPr/>
           <p:nvPr/>
         </p:nvSpPr>
@@ -5111,7 +5111,7 @@
       </p:sp>
       <p:sp>
         <p:nvSpPr>
-          <p:cNvPr id="42" name="o538"/>
+          <p:cNvPr id="42" name="o521"/>
           <p:cNvSpPr/>
           <p:nvPr/>
         </p:nvSpPr>
@@ -5131,7 +5131,7 @@
       </p:sp>
       <p:sp>
         <p:nvSpPr>
-          <p:cNvPr id="43" name="o539"/>
+          <p:cNvPr id="43" name="o522"/>
           <p:cNvSpPr txBox="1"/>
           <p:nvPr/>
         </p:nvSpPr>
@@ -5170,7 +5170,7 @@
       </p:sp>
       <p:sp>
         <p:nvSpPr>
-          <p:cNvPr id="44" name="o540"/>
+          <p:cNvPr id="44" name="o523"/>
           <p:cNvSpPr txBox="1"/>
           <p:nvPr/>
         </p:nvSpPr>
@@ -5209,7 +5209,7 @@
       </p:sp>
       <p:sp>
         <p:nvSpPr>
-          <p:cNvPr id="45" name="o541"/>
+          <p:cNvPr id="45" name="o524"/>
           <p:cNvSpPr/>
           <p:nvPr/>
         </p:nvSpPr>
@@ -5232,7 +5232,7 @@
       </p:sp>
       <p:sp>
         <p:nvSpPr>
-          <p:cNvPr id="46" name="o542"/>
+          <p:cNvPr id="46" name="o525"/>
           <p:cNvSpPr/>
           <p:nvPr/>
         </p:nvSpPr>
@@ -5252,7 +5252,7 @@
       </p:sp>
       <p:sp>
         <p:nvSpPr>
-          <p:cNvPr id="47" name="o543"/>
+          <p:cNvPr id="47" name="o526"/>
           <p:cNvSpPr/>
           <p:nvPr/>
         </p:nvSpPr>
@@ -5272,7 +5272,7 @@
       </p:sp>
       <p:sp>
         <p:nvSpPr>
-          <p:cNvPr id="48" name="o544"/>
+          <p:cNvPr id="48" name="o527"/>
           <p:cNvSpPr txBox="1"/>
           <p:nvPr/>
         </p:nvSpPr>
@@ -5314,7 +5314,7 @@
       </p:sp>
       <p:sp>
         <p:nvSpPr>
-          <p:cNvPr id="49" name="o545"/>
+          <p:cNvPr id="49" name="o528"/>
           <p:cNvSpPr/>
           <p:nvPr/>
         </p:nvSpPr>
@@ -5339,7 +5339,7 @@
       </p:sp>
       <p:sp>
         <p:nvSpPr>
-          <p:cNvPr id="50" name="o546"/>
+          <p:cNvPr id="50" name="o529"/>
           <p:cNvSpPr txBox="1"/>
           <p:nvPr/>
         </p:nvSpPr>
@@ -5378,7 +5378,7 @@
       </p:sp>
       <p:sp>
         <p:nvSpPr>
-          <p:cNvPr id="51" name="o547"/>
+          <p:cNvPr id="51" name="o530"/>
           <p:cNvSpPr txBox="1"/>
           <p:nvPr/>
         </p:nvSpPr>
@@ -5417,7 +5417,7 @@
       </p:sp>
       <p:sp>
         <p:nvSpPr>
-          <p:cNvPr id="52" name="o548"/>
+          <p:cNvPr id="52" name="o531"/>
           <p:cNvSpPr txBox="1"/>
           <p:nvPr/>
         </p:nvSpPr>
@@ -5456,7 +5456,7 @@
       </p:sp>
       <p:sp>
         <p:nvSpPr>
-          <p:cNvPr id="53" name="o549"/>
+          <p:cNvPr id="53" name="o532"/>
           <p:cNvSpPr/>
           <p:nvPr/>
         </p:nvSpPr>
@@ -5481,7 +5481,7 @@
       </p:sp>
       <p:sp>
         <p:nvSpPr>
-          <p:cNvPr id="54" name="o550"/>
+          <p:cNvPr id="54" name="o533"/>
           <p:cNvSpPr txBox="1"/>
           <p:nvPr/>
         </p:nvSpPr>
@@ -5520,7 +5520,7 @@
       </p:sp>
       <p:sp>
         <p:nvSpPr>
-          <p:cNvPr id="55" name="o551"/>
+          <p:cNvPr id="55" name="o534"/>
           <p:cNvSpPr txBox="1"/>
           <p:nvPr/>
         </p:nvSpPr>
@@ -5559,7 +5559,7 @@
       </p:sp>
       <p:sp>
         <p:nvSpPr>
-          <p:cNvPr id="56" name="o552"/>
+          <p:cNvPr id="56" name="o535"/>
           <p:cNvSpPr txBox="1"/>
           <p:nvPr/>
         </p:nvSpPr>
@@ -5598,7 +5598,7 @@
       </p:sp>
       <p:sp>
         <p:nvSpPr>
-          <p:cNvPr id="57" name="o553"/>
+          <p:cNvPr id="57" name="o536"/>
           <p:cNvSpPr txBox="1"/>
           <p:nvPr/>
         </p:nvSpPr>
@@ -5637,7 +5637,7 @@
       </p:sp>
       <p:sp>
         <p:nvSpPr>
-          <p:cNvPr id="58" name="o554"/>
+          <p:cNvPr id="58" name="o537"/>
           <p:cNvSpPr/>
           <p:nvPr/>
         </p:nvSpPr>
@@ -5657,7 +5657,7 @@
       </p:sp>
       <p:sp>
         <p:nvSpPr>
-          <p:cNvPr id="59" name="o555"/>
+          <p:cNvPr id="59" name="o538"/>
           <p:cNvSpPr txBox="1"/>
           <p:nvPr/>
         </p:nvSpPr>
@@ -5696,7 +5696,7 @@
       </p:sp>
       <p:sp>
         <p:nvSpPr>
-          <p:cNvPr id="60" name="o556"/>
+          <p:cNvPr id="60" name="o539"/>
           <p:cNvSpPr txBox="1"/>
           <p:nvPr/>
         </p:nvSpPr>
@@ -5735,7 +5735,7 @@
       </p:sp>
       <p:sp>
         <p:nvSpPr>
-          <p:cNvPr id="61" name="o557"/>
+          <p:cNvPr id="61" name="o540"/>
           <p:cNvSpPr txBox="1"/>
           <p:nvPr/>
         </p:nvSpPr>
@@ -5774,7 +5774,7 @@
       </p:sp>
       <p:sp>
         <p:nvSpPr>
-          <p:cNvPr id="62" name="o558"/>
+          <p:cNvPr id="62" name="o541"/>
           <p:cNvSpPr/>
           <p:nvPr/>
         </p:nvSpPr>
@@ -5797,7 +5797,7 @@
       </p:sp>
       <p:sp>
         <p:nvSpPr>
-          <p:cNvPr id="63" name="o559"/>
+          <p:cNvPr id="63" name="o542"/>
           <p:cNvSpPr txBox="1"/>
           <p:nvPr/>
         </p:nvSpPr>
@@ -5836,7 +5836,7 @@
       </p:sp>
       <p:sp>
         <p:nvSpPr>
-          <p:cNvPr id="64" name="o560"/>
+          <p:cNvPr id="64" name="o543"/>
           <p:cNvSpPr txBox="1"/>
           <p:nvPr/>
         </p:nvSpPr>
@@ -5875,7 +5875,7 @@
       </p:sp>
       <p:sp>
         <p:nvSpPr>
-          <p:cNvPr id="65" name="o561"/>
+          <p:cNvPr id="65" name="o544"/>
           <p:cNvSpPr txBox="1"/>
           <p:nvPr/>
         </p:nvSpPr>
@@ -5914,7 +5914,7 @@
       </p:sp>
       <p:sp>
         <p:nvSpPr>
-          <p:cNvPr id="66" name="o562"/>
+          <p:cNvPr id="66" name="o545"/>
           <p:cNvSpPr/>
           <p:nvPr/>
         </p:nvSpPr>
@@ -5937,7 +5937,7 @@
       </p:sp>
       <p:sp>
         <p:nvSpPr>
-          <p:cNvPr id="67" name="o563"/>
+          <p:cNvPr id="67" name="o546"/>
           <p:cNvSpPr txBox="1"/>
           <p:nvPr/>
         </p:nvSpPr>
@@ -5976,7 +5976,7 @@
       </p:sp>
       <p:sp>
         <p:nvSpPr>
-          <p:cNvPr id="68" name="o564"/>
+          <p:cNvPr id="68" name="o547"/>
           <p:cNvSpPr txBox="1"/>
           <p:nvPr/>
         </p:nvSpPr>
@@ -6015,7 +6015,7 @@
       </p:sp>
       <p:sp>
         <p:nvSpPr>
-          <p:cNvPr id="69" name="o565"/>
+          <p:cNvPr id="69" name="o548"/>
           <p:cNvSpPr txBox="1"/>
           <p:nvPr/>
         </p:nvSpPr>
@@ -6054,7 +6054,7 @@
       </p:sp>
       <p:sp>
         <p:nvSpPr>
-          <p:cNvPr id="70" name="o566"/>
+          <p:cNvPr id="70" name="o549"/>
           <p:cNvSpPr/>
           <p:nvPr/>
         </p:nvSpPr>
@@ -6077,7 +6077,7 @@
       </p:sp>
       <p:sp>
         <p:nvSpPr>
-          <p:cNvPr id="71" name="o567"/>
+          <p:cNvPr id="71" name="o550"/>
           <p:cNvSpPr txBox="1"/>
           <p:nvPr/>
         </p:nvSpPr>
@@ -6116,7 +6116,7 @@
       </p:sp>
       <p:sp>
         <p:nvSpPr>
-          <p:cNvPr id="72" name="o568"/>
+          <p:cNvPr id="72" name="o551"/>
           <p:cNvSpPr txBox="1"/>
           <p:nvPr/>
         </p:nvSpPr>
@@ -6155,7 +6155,7 @@
       </p:sp>
       <p:sp>
         <p:nvSpPr>
-          <p:cNvPr id="73" name="o569"/>
+          <p:cNvPr id="73" name="o552"/>
           <p:cNvSpPr txBox="1"/>
           <p:nvPr/>
         </p:nvSpPr>
@@ -6194,7 +6194,7 @@
       </p:sp>
       <p:sp>
         <p:nvSpPr>
-          <p:cNvPr id="74" name="o570"/>
+          <p:cNvPr id="74" name="o553"/>
           <p:cNvSpPr/>
           <p:nvPr/>
         </p:nvSpPr>
@@ -6217,7 +6217,7 @@
       </p:sp>
       <p:sp>
         <p:nvSpPr>
-          <p:cNvPr id="75" name="o571"/>
+          <p:cNvPr id="75" name="o554"/>
           <p:cNvSpPr txBox="1"/>
           <p:nvPr/>
         </p:nvSpPr>
@@ -6256,7 +6256,7 @@
       </p:sp>
       <p:sp>
         <p:nvSpPr>
-          <p:cNvPr id="76" name="o572"/>
+          <p:cNvPr id="76" name="o555"/>
           <p:cNvSpPr txBox="1"/>
           <p:nvPr/>
         </p:nvSpPr>
@@ -6295,7 +6295,7 @@
       </p:sp>
       <p:sp>
         <p:nvSpPr>
-          <p:cNvPr id="77" name="o573"/>
+          <p:cNvPr id="77" name="o556"/>
           <p:cNvSpPr txBox="1"/>
           <p:nvPr/>
         </p:nvSpPr>
@@ -6334,7 +6334,7 @@
       </p:sp>
       <p:sp>
         <p:nvSpPr>
-          <p:cNvPr id="78" name="o574"/>
+          <p:cNvPr id="78" name="o557"/>
           <p:cNvSpPr/>
           <p:nvPr/>
         </p:nvSpPr>
@@ -6357,7 +6357,7 @@
       </p:sp>
       <p:sp>
         <p:nvSpPr>
-          <p:cNvPr id="79" name="o575"/>
+          <p:cNvPr id="79" name="o558"/>
           <p:cNvSpPr txBox="1"/>
           <p:nvPr/>
         </p:nvSpPr>
@@ -6396,7 +6396,7 @@
       </p:sp>
       <p:sp>
         <p:nvSpPr>
-          <p:cNvPr id="80" name="o576"/>
+          <p:cNvPr id="80" name="o559"/>
           <p:cNvSpPr txBox="1"/>
           <p:nvPr/>
         </p:nvSpPr>
@@ -6435,7 +6435,7 @@
       </p:sp>
       <p:sp>
         <p:nvSpPr>
-          <p:cNvPr id="81" name="o577"/>
+          <p:cNvPr id="81" name="o560"/>
           <p:cNvSpPr txBox="1"/>
           <p:nvPr/>
         </p:nvSpPr>
@@ -6474,7 +6474,7 @@
       </p:sp>
       <p:sp>
         <p:nvSpPr>
-          <p:cNvPr id="82" name="o578"/>
+          <p:cNvPr id="82" name="o561"/>
           <p:cNvSpPr/>
           <p:nvPr/>
         </p:nvSpPr>
@@ -6497,7 +6497,7 @@
       </p:sp>
       <p:sp>
         <p:nvSpPr>
-          <p:cNvPr id="83" name="o579"/>
+          <p:cNvPr id="83" name="o562"/>
           <p:cNvSpPr/>
           <p:nvPr/>
         </p:nvSpPr>
@@ -6520,7 +6520,7 @@
       </p:sp>
       <p:sp>
         <p:nvSpPr>
-          <p:cNvPr id="84" name="o580"/>
+          <p:cNvPr id="84" name="o563"/>
           <p:cNvSpPr txBox="1"/>
           <p:nvPr/>
         </p:nvSpPr>
@@ -6584,7 +6584,7 @@
       </p:grpSpPr>
       <p:sp>
         <p:nvSpPr>
-          <p:cNvPr id="2" name="o581"/>
+          <p:cNvPr id="2" name="o564"/>
           <p:cNvSpPr txBox="1"/>
           <p:nvPr/>
         </p:nvSpPr>
@@ -6623,7 +6623,7 @@
       </p:sp>
       <p:sp>
         <p:nvSpPr>
-          <p:cNvPr id="3" name="o582"/>
+          <p:cNvPr id="3" name="o565"/>
           <p:cNvSpPr txBox="1"/>
           <p:nvPr/>
         </p:nvSpPr>
@@ -6665,7 +6665,7 @@
       </p:sp>
       <p:sp>
         <p:nvSpPr>
-          <p:cNvPr id="4" name="o583"/>
+          <p:cNvPr id="4" name="o566"/>
           <p:cNvSpPr txBox="1"/>
           <p:nvPr/>
         </p:nvSpPr>
@@ -6704,7 +6704,7 @@
       </p:sp>
       <p:sp>
         <p:nvSpPr>
-          <p:cNvPr id="5" name="o584"/>
+          <p:cNvPr id="5" name="o567"/>
           <p:cNvSpPr/>
           <p:nvPr/>
         </p:nvSpPr>
@@ -6727,7 +6727,7 @@
       </p:sp>
       <p:sp>
         <p:nvSpPr>
-          <p:cNvPr id="6" name="o585"/>
+          <p:cNvPr id="6" name="o568"/>
           <p:cNvSpPr txBox="1"/>
           <p:nvPr/>
         </p:nvSpPr>
@@ -6766,7 +6766,7 @@
       </p:sp>
       <p:sp>
         <p:nvSpPr>
-          <p:cNvPr id="7" name="o586"/>
+          <p:cNvPr id="7" name="o569"/>
           <p:cNvSpPr txBox="1"/>
           <p:nvPr/>
         </p:nvSpPr>
@@ -6805,7 +6805,7 @@
       </p:sp>
       <p:sp>
         <p:nvSpPr>
-          <p:cNvPr id="8" name="o587"/>
+          <p:cNvPr id="8" name="o570"/>
           <p:cNvSpPr txBox="1"/>
           <p:nvPr/>
         </p:nvSpPr>
@@ -6844,7 +6844,7 @@
       </p:sp>
       <p:sp>
         <p:nvSpPr>
-          <p:cNvPr id="9" name="o588"/>
+          <p:cNvPr id="9" name="o571"/>
           <p:cNvSpPr txBox="1"/>
           <p:nvPr/>
         </p:nvSpPr>
@@ -6883,7 +6883,7 @@
       </p:sp>
       <p:sp>
         <p:nvSpPr>
-          <p:cNvPr id="10" name="o589"/>
+          <p:cNvPr id="10" name="o572"/>
           <p:cNvSpPr/>
           <p:nvPr/>
         </p:nvSpPr>
@@ -6908,7 +6908,7 @@
       </p:sp>
       <p:sp>
         <p:nvSpPr>
-          <p:cNvPr id="11" name="o590"/>
+          <p:cNvPr id="11" name="o573"/>
           <p:cNvSpPr/>
           <p:nvPr/>
         </p:nvSpPr>
@@ -6933,7 +6933,7 @@
       </p:sp>
       <p:sp>
         <p:nvSpPr>
-          <p:cNvPr id="12" name="o591"/>
+          <p:cNvPr id="12" name="o574"/>
           <p:cNvSpPr txBox="1"/>
           <p:nvPr/>
         </p:nvSpPr>
@@ -6972,7 +6972,7 @@
       </p:sp>
       <p:sp>
         <p:nvSpPr>
-          <p:cNvPr id="13" name="o592"/>
+          <p:cNvPr id="13" name="o575"/>
           <p:cNvSpPr txBox="1"/>
           <p:nvPr/>
         </p:nvSpPr>
@@ -7011,7 +7011,7 @@
       </p:sp>
       <p:sp>
         <p:nvSpPr>
-          <p:cNvPr id="14" name="o593"/>
+          <p:cNvPr id="14" name="o576"/>
           <p:cNvSpPr txBox="1"/>
           <p:nvPr/>
         </p:nvSpPr>
@@ -7050,7 +7050,7 @@
       </p:sp>
       <p:sp>
         <p:nvSpPr>
-          <p:cNvPr id="15" name="o594"/>
+          <p:cNvPr id="15" name="o577"/>
           <p:cNvSpPr/>
           <p:nvPr/>
         </p:nvSpPr>
@@ -7074,7 +7074,7 @@
       </p:sp>
       <p:sp>
         <p:nvSpPr>
-          <p:cNvPr id="16" name="o595"/>
+          <p:cNvPr id="16" name="o578"/>
           <p:cNvSpPr/>
           <p:nvPr/>
         </p:nvSpPr>
@@ -7099,7 +7099,7 @@
       </p:sp>
       <p:sp>
         <p:nvSpPr>
-          <p:cNvPr id="17" name="o596"/>
+          <p:cNvPr id="17" name="o579"/>
           <p:cNvSpPr/>
           <p:nvPr/>
         </p:nvSpPr>
@@ -7124,7 +7124,7 @@
       </p:sp>
       <p:sp>
         <p:nvSpPr>
-          <p:cNvPr id="18" name="o597"/>
+          <p:cNvPr id="18" name="o580"/>
           <p:cNvSpPr txBox="1"/>
           <p:nvPr/>
         </p:nvSpPr>
@@ -7163,7 +7163,7 @@
       </p:sp>
       <p:sp>
         <p:nvSpPr>
-          <p:cNvPr id="19" name="o598"/>
+          <p:cNvPr id="19" name="o581"/>
           <p:cNvSpPr txBox="1"/>
           <p:nvPr/>
         </p:nvSpPr>
@@ -7202,7 +7202,7 @@
       </p:sp>
       <p:sp>
         <p:nvSpPr>
-          <p:cNvPr id="20" name="o599"/>
+          <p:cNvPr id="20" name="o582"/>
           <p:cNvSpPr txBox="1"/>
           <p:nvPr/>
         </p:nvSpPr>
@@ -7241,7 +7241,7 @@
       </p:sp>
       <p:sp>
         <p:nvSpPr>
-          <p:cNvPr id="21" name="o600"/>
+          <p:cNvPr id="21" name="o583"/>
           <p:cNvSpPr/>
           <p:nvPr/>
         </p:nvSpPr>
@@ -7265,7 +7265,7 @@
       </p:sp>
       <p:sp>
         <p:nvSpPr>
-          <p:cNvPr id="22" name="o601"/>
+          <p:cNvPr id="22" name="o584"/>
           <p:cNvSpPr/>
           <p:nvPr/>
         </p:nvSpPr>
@@ -7290,7 +7290,7 @@
       </p:sp>
       <p:sp>
         <p:nvSpPr>
-          <p:cNvPr id="23" name="o602"/>
+          <p:cNvPr id="23" name="o585"/>
           <p:cNvSpPr/>
           <p:nvPr/>
         </p:nvSpPr>
@@ -7315,7 +7315,7 @@
       </p:sp>
       <p:sp>
         <p:nvSpPr>
-          <p:cNvPr id="24" name="o603"/>
+          <p:cNvPr id="24" name="o586"/>
           <p:cNvSpPr txBox="1"/>
           <p:nvPr/>
         </p:nvSpPr>
@@ -7354,7 +7354,7 @@
       </p:sp>
       <p:sp>
         <p:nvSpPr>
-          <p:cNvPr id="25" name="o604"/>
+          <p:cNvPr id="25" name="o587"/>
           <p:cNvSpPr txBox="1"/>
           <p:nvPr/>
         </p:nvSpPr>
@@ -7393,7 +7393,7 @@
       </p:sp>
       <p:sp>
         <p:nvSpPr>
-          <p:cNvPr id="26" name="o605"/>
+          <p:cNvPr id="26" name="o588"/>
           <p:cNvSpPr txBox="1"/>
           <p:nvPr/>
         </p:nvSpPr>
@@ -7432,7 +7432,7 @@
       </p:sp>
       <p:sp>
         <p:nvSpPr>
-          <p:cNvPr id="27" name="o606"/>
+          <p:cNvPr id="27" name="o589"/>
           <p:cNvSpPr/>
           <p:nvPr/>
         </p:nvSpPr>
@@ -7456,7 +7456,7 @@
       </p:sp>
       <p:sp>
         <p:nvSpPr>
-          <p:cNvPr id="28" name="o607"/>
+          <p:cNvPr id="28" name="o590"/>
           <p:cNvSpPr/>
           <p:nvPr/>
         </p:nvSpPr>
@@ -7481,7 +7481,7 @@
       </p:sp>
       <p:sp>
         <p:nvSpPr>
-          <p:cNvPr id="29" name="o608"/>
+          <p:cNvPr id="29" name="o591"/>
           <p:cNvSpPr/>
           <p:nvPr/>
         </p:nvSpPr>
@@ -7506,7 +7506,7 @@
       </p:sp>
       <p:sp>
         <p:nvSpPr>
-          <p:cNvPr id="30" name="o609"/>
+          <p:cNvPr id="30" name="o592"/>
           <p:cNvSpPr txBox="1"/>
           <p:nvPr/>
         </p:nvSpPr>
@@ -7545,7 +7545,7 @@
       </p:sp>
       <p:sp>
         <p:nvSpPr>
-          <p:cNvPr id="31" name="o610"/>
+          <p:cNvPr id="31" name="o593"/>
           <p:cNvSpPr txBox="1"/>
           <p:nvPr/>
         </p:nvSpPr>
@@ -7584,7 +7584,7 @@
       </p:sp>
       <p:sp>
         <p:nvSpPr>
-          <p:cNvPr id="32" name="o611"/>
+          <p:cNvPr id="32" name="o594"/>
           <p:cNvSpPr txBox="1"/>
           <p:nvPr/>
         </p:nvSpPr>
@@ -7623,7 +7623,7 @@
       </p:sp>
       <p:sp>
         <p:nvSpPr>
-          <p:cNvPr id="33" name="o612"/>
+          <p:cNvPr id="33" name="o595"/>
           <p:cNvSpPr/>
           <p:nvPr/>
         </p:nvSpPr>
@@ -7643,7 +7643,7 @@
       </p:sp>
       <p:sp>
         <p:nvSpPr>
-          <p:cNvPr id="34" name="o613"/>
+          <p:cNvPr id="34" name="o596"/>
           <p:cNvSpPr txBox="1"/>
           <p:nvPr/>
         </p:nvSpPr>
@@ -7682,7 +7682,7 @@
       </p:sp>
       <p:sp>
         <p:nvSpPr>
-          <p:cNvPr id="35" name="o614"/>
+          <p:cNvPr id="35" name="o597"/>
           <p:cNvSpPr txBox="1"/>
           <p:nvPr/>
         </p:nvSpPr>
@@ -7721,7 +7721,7 @@
       </p:sp>
       <p:sp>
         <p:nvSpPr>
-          <p:cNvPr id="36" name="o615"/>
+          <p:cNvPr id="36" name="o598"/>
           <p:cNvSpPr txBox="1"/>
           <p:nvPr/>
         </p:nvSpPr>
@@ -7760,7 +7760,7 @@
       </p:sp>
       <p:sp>
         <p:nvSpPr>
-          <p:cNvPr id="37" name="o616"/>
+          <p:cNvPr id="37" name="o599"/>
           <p:cNvSpPr txBox="1"/>
           <p:nvPr/>
         </p:nvSpPr>
@@ -7799,7 +7799,7 @@
       </p:sp>
       <p:sp>
         <p:nvSpPr>
-          <p:cNvPr id="38" name="o617"/>
+          <p:cNvPr id="38" name="o600"/>
           <p:cNvSpPr/>
           <p:nvPr/>
         </p:nvSpPr>
@@ -7822,7 +7822,7 @@
       </p:sp>
       <p:sp>
         <p:nvSpPr>
-          <p:cNvPr id="39" name="o618"/>
+          <p:cNvPr id="39" name="o601"/>
           <p:cNvSpPr txBox="1"/>
           <p:nvPr/>
         </p:nvSpPr>
@@ -7861,7 +7861,7 @@
       </p:sp>
       <p:sp>
         <p:nvSpPr>
-          <p:cNvPr id="40" name="o619"/>
+          <p:cNvPr id="40" name="o602"/>
           <p:cNvSpPr txBox="1"/>
           <p:nvPr/>
         </p:nvSpPr>
@@ -7900,7 +7900,7 @@
       </p:sp>
       <p:sp>
         <p:nvSpPr>
-          <p:cNvPr id="41" name="o620"/>
+          <p:cNvPr id="41" name="o603"/>
           <p:cNvSpPr txBox="1"/>
           <p:nvPr/>
         </p:nvSpPr>
@@ -7939,7 +7939,7 @@
       </p:sp>
       <p:sp>
         <p:nvSpPr>
-          <p:cNvPr id="42" name="o621"/>
+          <p:cNvPr id="42" name="o604"/>
           <p:cNvSpPr txBox="1"/>
           <p:nvPr/>
         </p:nvSpPr>
@@ -7978,7 +7978,7 @@
       </p:sp>
       <p:sp>
         <p:nvSpPr>
-          <p:cNvPr id="43" name="o622"/>
+          <p:cNvPr id="43" name="o605"/>
           <p:cNvSpPr/>
           <p:nvPr/>
         </p:nvSpPr>
@@ -8001,7 +8001,7 @@
       </p:sp>
       <p:sp>
         <p:nvSpPr>
-          <p:cNvPr id="44" name="o623"/>
+          <p:cNvPr id="44" name="o606"/>
           <p:cNvSpPr txBox="1"/>
           <p:nvPr/>
         </p:nvSpPr>
@@ -8040,7 +8040,7 @@
       </p:sp>
       <p:sp>
         <p:nvSpPr>
-          <p:cNvPr id="45" name="o624"/>
+          <p:cNvPr id="45" name="o607"/>
           <p:cNvSpPr txBox="1"/>
           <p:nvPr/>
         </p:nvSpPr>
@@ -8079,7 +8079,7 @@
       </p:sp>
       <p:sp>
         <p:nvSpPr>
-          <p:cNvPr id="46" name="o625"/>
+          <p:cNvPr id="46" name="o608"/>
           <p:cNvSpPr txBox="1"/>
           <p:nvPr/>
         </p:nvSpPr>
@@ -8118,7 +8118,7 @@
       </p:sp>
       <p:sp>
         <p:nvSpPr>
-          <p:cNvPr id="47" name="o626"/>
+          <p:cNvPr id="47" name="o609"/>
           <p:cNvSpPr txBox="1"/>
           <p:nvPr/>
         </p:nvSpPr>
@@ -8157,7 +8157,7 @@
       </p:sp>
       <p:sp>
         <p:nvSpPr>
-          <p:cNvPr id="48" name="o627"/>
+          <p:cNvPr id="48" name="o610"/>
           <p:cNvSpPr/>
           <p:nvPr/>
         </p:nvSpPr>
@@ -8180,7 +8180,7 @@
       </p:sp>
       <p:sp>
         <p:nvSpPr>
-          <p:cNvPr id="49" name="o628"/>
+          <p:cNvPr id="49" name="o611"/>
           <p:cNvSpPr txBox="1"/>
           <p:nvPr/>
         </p:nvSpPr>
@@ -8219,7 +8219,7 @@
       </p:sp>
       <p:sp>
         <p:nvSpPr>
-          <p:cNvPr id="50" name="o629"/>
+          <p:cNvPr id="50" name="o612"/>
           <p:cNvSpPr txBox="1"/>
           <p:nvPr/>
         </p:nvSpPr>
@@ -8258,7 +8258,7 @@
       </p:sp>
       <p:sp>
         <p:nvSpPr>
-          <p:cNvPr id="51" name="o630"/>
+          <p:cNvPr id="51" name="o613"/>
           <p:cNvSpPr txBox="1"/>
           <p:nvPr/>
         </p:nvSpPr>
@@ -8297,7 +8297,7 @@
       </p:sp>
       <p:sp>
         <p:nvSpPr>
-          <p:cNvPr id="52" name="o631"/>
+          <p:cNvPr id="52" name="o614"/>
           <p:cNvSpPr txBox="1"/>
           <p:nvPr/>
         </p:nvSpPr>
@@ -8336,7 +8336,7 @@
       </p:sp>
       <p:sp>
         <p:nvSpPr>
-          <p:cNvPr id="53" name="o632"/>
+          <p:cNvPr id="53" name="o615"/>
           <p:cNvSpPr/>
           <p:nvPr/>
         </p:nvSpPr>
@@ -8359,7 +8359,7 @@
       </p:sp>
       <p:sp>
         <p:nvSpPr>
-          <p:cNvPr id="54" name="o633"/>
+          <p:cNvPr id="54" name="o616"/>
           <p:cNvSpPr txBox="1"/>
           <p:nvPr/>
         </p:nvSpPr>
@@ -8398,7 +8398,7 @@
       </p:sp>
       <p:sp>
         <p:nvSpPr>
-          <p:cNvPr id="55" name="o634"/>
+          <p:cNvPr id="55" name="o617"/>
           <p:cNvSpPr txBox="1"/>
           <p:nvPr/>
         </p:nvSpPr>
@@ -8437,7 +8437,7 @@
       </p:sp>
       <p:sp>
         <p:nvSpPr>
-          <p:cNvPr id="56" name="o635"/>
+          <p:cNvPr id="56" name="o618"/>
           <p:cNvSpPr txBox="1"/>
           <p:nvPr/>
         </p:nvSpPr>
@@ -8476,7 +8476,7 @@
       </p:sp>
       <p:sp>
         <p:nvSpPr>
-          <p:cNvPr id="57" name="o636"/>
+          <p:cNvPr id="57" name="o619"/>
           <p:cNvSpPr txBox="1"/>
           <p:nvPr/>
         </p:nvSpPr>
@@ -8515,7 +8515,7 @@
       </p:sp>
       <p:sp>
         <p:nvSpPr>
-          <p:cNvPr id="58" name="o637"/>
+          <p:cNvPr id="58" name="o620"/>
           <p:cNvSpPr/>
           <p:nvPr/>
         </p:nvSpPr>
@@ -8538,7 +8538,7 @@
       </p:sp>
       <p:sp>
         <p:nvSpPr>
-          <p:cNvPr id="59" name="o638"/>
+          <p:cNvPr id="59" name="o621"/>
           <p:cNvSpPr/>
           <p:nvPr/>
         </p:nvSpPr>
@@ -8561,7 +8561,7 @@
       </p:sp>
       <p:sp>
         <p:nvSpPr>
-          <p:cNvPr id="60" name="o639"/>
+          <p:cNvPr id="60" name="o622"/>
           <p:cNvSpPr/>
           <p:nvPr/>
         </p:nvSpPr>
@@ -8586,7 +8586,7 @@
       </p:sp>
       <p:sp>
         <p:nvSpPr>
-          <p:cNvPr id="61" name="o640"/>
+          <p:cNvPr id="61" name="o623"/>
           <p:cNvSpPr txBox="1"/>
           <p:nvPr/>
         </p:nvSpPr>
@@ -8625,7 +8625,7 @@
       </p:sp>
       <p:sp>
         <p:nvSpPr>
-          <p:cNvPr id="62" name="o641"/>
+          <p:cNvPr id="62" name="o624"/>
           <p:cNvSpPr txBox="1"/>
           <p:nvPr/>
         </p:nvSpPr>
@@ -8664,7 +8664,7 @@
       </p:sp>
       <p:sp>
         <p:nvSpPr>
-          <p:cNvPr id="63" name="o642"/>
+          <p:cNvPr id="63" name="o625"/>
           <p:cNvSpPr txBox="1"/>
           <p:nvPr/>
         </p:nvSpPr>
@@ -8703,7 +8703,7 @@
       </p:sp>
       <p:sp>
         <p:nvSpPr>
-          <p:cNvPr id="64" name="o643"/>
+          <p:cNvPr id="64" name="o626"/>
           <p:cNvSpPr/>
           <p:nvPr/>
         </p:nvSpPr>
@@ -8723,7 +8723,7 @@
       </p:sp>
       <p:sp>
         <p:nvSpPr>
-          <p:cNvPr id="65" name="o644"/>
+          <p:cNvPr id="65" name="o627"/>
           <p:cNvSpPr/>
           <p:nvPr/>
         </p:nvSpPr>
@@ -8743,7 +8743,7 @@
       </p:sp>
       <p:sp>
         <p:nvSpPr>
-          <p:cNvPr id="66" name="o645"/>
+          <p:cNvPr id="66" name="o628"/>
           <p:cNvSpPr txBox="1"/>
           <p:nvPr/>
         </p:nvSpPr>
@@ -8870,7 +8870,7 @@
       </p:grpSpPr>
       <p:sp>
         <p:nvSpPr>
-          <p:cNvPr id="2" name="o646"/>
+          <p:cNvPr id="2" name="o629"/>
           <p:cNvSpPr txBox="1"/>
           <p:nvPr/>
         </p:nvSpPr>
@@ -8909,7 +8909,7 @@
       </p:sp>
       <p:sp>
         <p:nvSpPr>
-          <p:cNvPr id="3" name="o647"/>
+          <p:cNvPr id="3" name="o630"/>
           <p:cNvSpPr txBox="1"/>
           <p:nvPr/>
         </p:nvSpPr>
@@ -8951,7 +8951,7 @@
       </p:sp>
       <p:sp>
         <p:nvSpPr>
-          <p:cNvPr id="4" name="o648"/>
+          <p:cNvPr id="4" name="o631"/>
           <p:cNvSpPr txBox="1"/>
           <p:nvPr/>
         </p:nvSpPr>
@@ -8990,7 +8990,7 @@
       </p:sp>
       <p:sp>
         <p:nvSpPr>
-          <p:cNvPr id="5" name="o649"/>
+          <p:cNvPr id="5" name="o632"/>
           <p:cNvSpPr/>
           <p:nvPr/>
         </p:nvSpPr>
@@ -9013,7 +9013,7 @@
       </p:sp>
       <p:sp>
         <p:nvSpPr>
-          <p:cNvPr id="6" name="o650"/>
+          <p:cNvPr id="6" name="o633"/>
           <p:cNvSpPr txBox="1"/>
           <p:nvPr/>
         </p:nvSpPr>
@@ -9052,7 +9052,7 @@
       </p:sp>
       <p:sp>
         <p:nvSpPr>
-          <p:cNvPr id="7" name="o651"/>
+          <p:cNvPr id="7" name="o634"/>
           <p:cNvSpPr txBox="1"/>
           <p:nvPr/>
         </p:nvSpPr>
@@ -9091,7 +9091,7 @@
       </p:sp>
       <p:sp>
         <p:nvSpPr>
-          <p:cNvPr id="8" name="o652"/>
+          <p:cNvPr id="8" name="o635"/>
           <p:cNvSpPr/>
           <p:nvPr/>
         </p:nvSpPr>
@@ -9116,7 +9116,7 @@
       </p:sp>
       <p:sp>
         <p:nvSpPr>
-          <p:cNvPr id="9" name="o653"/>
+          <p:cNvPr id="9" name="o636"/>
           <p:cNvSpPr txBox="1"/>
           <p:nvPr/>
         </p:nvSpPr>
@@ -9155,7 +9155,7 @@
       </p:sp>
       <p:sp>
         <p:nvSpPr>
-          <p:cNvPr id="10" name="o654"/>
+          <p:cNvPr id="10" name="o637"/>
           <p:cNvSpPr txBox="1"/>
           <p:nvPr/>
         </p:nvSpPr>
@@ -9194,7 +9194,7 @@
       </p:sp>
       <p:sp>
         <p:nvSpPr>
-          <p:cNvPr id="11" name="o655"/>
+          <p:cNvPr id="11" name="o638"/>
           <p:cNvSpPr txBox="1"/>
           <p:nvPr/>
         </p:nvSpPr>
@@ -9233,7 +9233,7 @@
       </p:sp>
       <p:sp>
         <p:nvSpPr>
-          <p:cNvPr id="12" name="o656"/>
+          <p:cNvPr id="12" name="o639"/>
           <p:cNvSpPr/>
           <p:nvPr/>
         </p:nvSpPr>
@@ -9258,7 +9258,7 @@
       </p:sp>
       <p:sp>
         <p:nvSpPr>
-          <p:cNvPr id="13" name="o657"/>
+          <p:cNvPr id="13" name="o640"/>
           <p:cNvSpPr/>
           <p:nvPr/>
         </p:nvSpPr>
@@ -9278,7 +9278,7 @@
       </p:sp>
       <p:sp>
         <p:nvSpPr>
-          <p:cNvPr id="14" name="o658"/>
+          <p:cNvPr id="14" name="o641"/>
           <p:cNvSpPr txBox="1"/>
           <p:nvPr/>
         </p:nvSpPr>
@@ -9317,7 +9317,7 @@
       </p:sp>
       <p:sp>
         <p:nvSpPr>
-          <p:cNvPr id="15" name="o659"/>
+          <p:cNvPr id="15" name="o642"/>
           <p:cNvSpPr txBox="1"/>
           <p:nvPr/>
         </p:nvSpPr>
@@ -9356,7 +9356,7 @@
       </p:sp>
       <p:sp>
         <p:nvSpPr>
-          <p:cNvPr id="16" name="o660"/>
+          <p:cNvPr id="16" name="o643"/>
           <p:cNvSpPr txBox="1"/>
           <p:nvPr/>
         </p:nvSpPr>
@@ -9395,7 +9395,7 @@
       </p:sp>
       <p:sp>
         <p:nvSpPr>
-          <p:cNvPr id="17" name="o661"/>
+          <p:cNvPr id="17" name="o644"/>
           <p:cNvSpPr/>
           <p:nvPr/>
         </p:nvSpPr>
@@ -9420,7 +9420,7 @@
       </p:sp>
       <p:sp>
         <p:nvSpPr>
-          <p:cNvPr id="18" name="o662"/>
+          <p:cNvPr id="18" name="o645"/>
           <p:cNvSpPr txBox="1"/>
           <p:nvPr/>
         </p:nvSpPr>
@@ -9459,7 +9459,7 @@
       </p:sp>
       <p:sp>
         <p:nvSpPr>
-          <p:cNvPr id="19" name="o663"/>
+          <p:cNvPr id="19" name="o646"/>
           <p:cNvSpPr txBox="1"/>
           <p:nvPr/>
         </p:nvSpPr>
@@ -9498,7 +9498,7 @@
       </p:sp>
       <p:sp>
         <p:nvSpPr>
-          <p:cNvPr id="20" name="o664"/>
+          <p:cNvPr id="20" name="o647"/>
           <p:cNvSpPr txBox="1"/>
           <p:nvPr/>
         </p:nvSpPr>
@@ -9537,7 +9537,7 @@
       </p:sp>
       <p:sp>
         <p:nvSpPr>
-          <p:cNvPr id="21" name="o665"/>
+          <p:cNvPr id="21" name="o648"/>
           <p:cNvSpPr/>
           <p:nvPr/>
         </p:nvSpPr>
@@ -9557,7 +9557,7 @@
       </p:sp>
       <p:sp>
         <p:nvSpPr>
-          <p:cNvPr id="22" name="o666"/>
+          <p:cNvPr id="22" name="o649"/>
           <p:cNvSpPr txBox="1"/>
           <p:nvPr/>
         </p:nvSpPr>
@@ -9596,7 +9596,7 @@
       </p:sp>
       <p:sp>
         <p:nvSpPr>
-          <p:cNvPr id="23" name="o667"/>
+          <p:cNvPr id="23" name="o650"/>
           <p:cNvSpPr txBox="1"/>
           <p:nvPr/>
         </p:nvSpPr>
@@ -9635,7 +9635,7 @@
       </p:sp>
       <p:sp>
         <p:nvSpPr>
-          <p:cNvPr id="24" name="o668"/>
+          <p:cNvPr id="24" name="o651"/>
           <p:cNvSpPr txBox="1"/>
           <p:nvPr/>
         </p:nvSpPr>
@@ -9674,7 +9674,7 @@
       </p:sp>
       <p:sp>
         <p:nvSpPr>
-          <p:cNvPr id="25" name="o669"/>
+          <p:cNvPr id="25" name="o652"/>
           <p:cNvSpPr txBox="1"/>
           <p:nvPr/>
         </p:nvSpPr>
@@ -9713,7 +9713,7 @@
       </p:sp>
       <p:sp>
         <p:nvSpPr>
-          <p:cNvPr id="26" name="o670"/>
+          <p:cNvPr id="26" name="o653"/>
           <p:cNvSpPr/>
           <p:nvPr/>
         </p:nvSpPr>
@@ -9736,7 +9736,7 @@
       </p:sp>
       <p:sp>
         <p:nvSpPr>
-          <p:cNvPr id="27" name="o671"/>
+          <p:cNvPr id="27" name="o654"/>
           <p:cNvSpPr txBox="1"/>
           <p:nvPr/>
         </p:nvSpPr>
@@ -9775,7 +9775,7 @@
       </p:sp>
       <p:sp>
         <p:nvSpPr>
-          <p:cNvPr id="28" name="o672"/>
+          <p:cNvPr id="28" name="o655"/>
           <p:cNvSpPr txBox="1"/>
           <p:nvPr/>
         </p:nvSpPr>
@@ -9814,7 +9814,7 @@
       </p:sp>
       <p:sp>
         <p:nvSpPr>
-          <p:cNvPr id="29" name="o673"/>
+          <p:cNvPr id="29" name="o656"/>
           <p:cNvSpPr txBox="1"/>
           <p:nvPr/>
         </p:nvSpPr>
@@ -9853,7 +9853,7 @@
       </p:sp>
       <p:sp>
         <p:nvSpPr>
-          <p:cNvPr id="30" name="o674"/>
+          <p:cNvPr id="30" name="o657"/>
           <p:cNvSpPr txBox="1"/>
           <p:nvPr/>
         </p:nvSpPr>
@@ -9892,7 +9892,7 @@
       </p:sp>
       <p:sp>
         <p:nvSpPr>
-          <p:cNvPr id="31" name="o675"/>
+          <p:cNvPr id="31" name="o658"/>
           <p:cNvSpPr/>
           <p:nvPr/>
         </p:nvSpPr>
@@ -9915,7 +9915,7 @@
       </p:sp>
       <p:sp>
         <p:nvSpPr>
-          <p:cNvPr id="32" name="o676"/>
+          <p:cNvPr id="32" name="o659"/>
           <p:cNvSpPr txBox="1"/>
           <p:nvPr/>
         </p:nvSpPr>
@@ -9954,7 +9954,7 @@
       </p:sp>
       <p:sp>
         <p:nvSpPr>
-          <p:cNvPr id="33" name="o677"/>
+          <p:cNvPr id="33" name="o660"/>
           <p:cNvSpPr txBox="1"/>
           <p:nvPr/>
         </p:nvSpPr>
@@ -9993,7 +9993,7 @@
       </p:sp>
       <p:sp>
         <p:nvSpPr>
-          <p:cNvPr id="34" name="o678"/>
+          <p:cNvPr id="34" name="o661"/>
           <p:cNvSpPr txBox="1"/>
           <p:nvPr/>
         </p:nvSpPr>
@@ -10032,7 +10032,7 @@
       </p:sp>
       <p:sp>
         <p:nvSpPr>
-          <p:cNvPr id="35" name="o679"/>
+          <p:cNvPr id="35" name="o662"/>
           <p:cNvSpPr txBox="1"/>
           <p:nvPr/>
         </p:nvSpPr>
@@ -10071,7 +10071,7 @@
       </p:sp>
       <p:sp>
         <p:nvSpPr>
-          <p:cNvPr id="36" name="o680"/>
+          <p:cNvPr id="36" name="o663"/>
           <p:cNvSpPr/>
           <p:nvPr/>
         </p:nvSpPr>
@@ -10094,7 +10094,7 @@
       </p:sp>
       <p:sp>
         <p:nvSpPr>
-          <p:cNvPr id="37" name="o681"/>
+          <p:cNvPr id="37" name="o664"/>
           <p:cNvSpPr txBox="1"/>
           <p:nvPr/>
         </p:nvSpPr>
@@ -10133,7 +10133,7 @@
       </p:sp>
       <p:sp>
         <p:nvSpPr>
-          <p:cNvPr id="38" name="o682"/>
+          <p:cNvPr id="38" name="o665"/>
           <p:cNvSpPr txBox="1"/>
           <p:nvPr/>
         </p:nvSpPr>
@@ -10172,7 +10172,7 @@
       </p:sp>
       <p:sp>
         <p:nvSpPr>
-          <p:cNvPr id="39" name="o683"/>
+          <p:cNvPr id="39" name="o666"/>
           <p:cNvSpPr txBox="1"/>
           <p:nvPr/>
         </p:nvSpPr>
@@ -10211,7 +10211,7 @@
       </p:sp>
       <p:sp>
         <p:nvSpPr>
-          <p:cNvPr id="40" name="o684"/>
+          <p:cNvPr id="40" name="o667"/>
           <p:cNvSpPr txBox="1"/>
           <p:nvPr/>
         </p:nvSpPr>
@@ -10250,7 +10250,7 @@
       </p:sp>
       <p:sp>
         <p:nvSpPr>
-          <p:cNvPr id="41" name="o685"/>
+          <p:cNvPr id="41" name="o668"/>
           <p:cNvSpPr/>
           <p:nvPr/>
         </p:nvSpPr>
@@ -10273,7 +10273,7 @@
       </p:sp>
       <p:sp>
         <p:nvSpPr>
-          <p:cNvPr id="42" name="o686"/>
+          <p:cNvPr id="42" name="o669"/>
           <p:cNvSpPr txBox="1"/>
           <p:nvPr/>
         </p:nvSpPr>
@@ -10312,7 +10312,7 @@
       </p:sp>
       <p:sp>
         <p:nvSpPr>
-          <p:cNvPr id="43" name="o687"/>
+          <p:cNvPr id="43" name="o670"/>
           <p:cNvSpPr txBox="1"/>
           <p:nvPr/>
         </p:nvSpPr>
@@ -10351,7 +10351,7 @@
       </p:sp>
       <p:sp>
         <p:nvSpPr>
-          <p:cNvPr id="44" name="o688"/>
+          <p:cNvPr id="44" name="o671"/>
           <p:cNvSpPr txBox="1"/>
           <p:nvPr/>
         </p:nvSpPr>
@@ -10390,7 +10390,7 @@
       </p:sp>
       <p:sp>
         <p:nvSpPr>
-          <p:cNvPr id="45" name="o689"/>
+          <p:cNvPr id="45" name="o672"/>
           <p:cNvSpPr txBox="1"/>
           <p:nvPr/>
         </p:nvSpPr>
@@ -10429,7 +10429,7 @@
       </p:sp>
       <p:sp>
         <p:nvSpPr>
-          <p:cNvPr id="46" name="o690"/>
+          <p:cNvPr id="46" name="o673"/>
           <p:cNvSpPr/>
           <p:nvPr/>
         </p:nvSpPr>
@@ -10452,7 +10452,7 @@
       </p:sp>
       <p:sp>
         <p:nvSpPr>
-          <p:cNvPr id="47" name="o691"/>
+          <p:cNvPr id="47" name="o674"/>
           <p:cNvSpPr/>
           <p:nvPr/>
         </p:nvSpPr>
@@ -10475,7 +10475,7 @@
       </p:sp>
       <p:sp>
         <p:nvSpPr>
-          <p:cNvPr id="48" name="o692"/>
+          <p:cNvPr id="48" name="o675"/>
           <p:cNvSpPr/>
           <p:nvPr/>
         </p:nvSpPr>
@@ -10495,7 +10495,7 @@
       </p:sp>
       <p:sp>
         <p:nvSpPr>
-          <p:cNvPr id="49" name="o693"/>
+          <p:cNvPr id="49" name="o676"/>
           <p:cNvSpPr/>
           <p:nvPr/>
         </p:nvSpPr>
@@ -10515,7 +10515,7 @@
       </p:sp>
       <p:sp>
         <p:nvSpPr>
-          <p:cNvPr id="50" name="o694"/>
+          <p:cNvPr id="50" name="o677"/>
           <p:cNvSpPr txBox="1"/>
           <p:nvPr/>
         </p:nvSpPr>
@@ -10554,7 +10554,7 @@
       </p:sp>
       <p:sp>
         <p:nvSpPr>
-          <p:cNvPr id="51" name="o695"/>
+          <p:cNvPr id="51" name="o678"/>
           <p:cNvSpPr txBox="1"/>
           <p:nvPr/>
         </p:nvSpPr>
@@ -10616,7 +10616,7 @@
       </p:sp>
       <p:sp>
         <p:nvSpPr>
-          <p:cNvPr id="52" name="o696"/>
+          <p:cNvPr id="52" name="o679"/>
           <p:cNvSpPr txBox="1"/>
           <p:nvPr/>
         </p:nvSpPr>
@@ -10680,7 +10680,7 @@
       </p:grpSpPr>
       <p:sp>
         <p:nvSpPr>
-          <p:cNvPr id="2" name="o697"/>
+          <p:cNvPr id="2" name="o680"/>
           <p:cNvSpPr txBox="1"/>
           <p:nvPr/>
         </p:nvSpPr>
@@ -10719,7 +10719,7 @@
       </p:sp>
       <p:sp>
         <p:nvSpPr>
-          <p:cNvPr id="3" name="o698"/>
+          <p:cNvPr id="3" name="o681"/>
           <p:cNvSpPr txBox="1"/>
           <p:nvPr/>
         </p:nvSpPr>
@@ -10758,7 +10758,7 @@
       </p:sp>
       <p:sp>
         <p:nvSpPr>
-          <p:cNvPr id="4" name="o699"/>
+          <p:cNvPr id="4" name="o682"/>
           <p:cNvSpPr txBox="1"/>
           <p:nvPr/>
         </p:nvSpPr>
@@ -10797,7 +10797,7 @@
       </p:sp>
       <p:sp>
         <p:nvSpPr>
-          <p:cNvPr id="5" name="o700"/>
+          <p:cNvPr id="5" name="o683"/>
           <p:cNvSpPr/>
           <p:nvPr/>
         </p:nvSpPr>
@@ -10820,7 +10820,7 @@
       </p:sp>
       <p:sp>
         <p:nvSpPr>
-          <p:cNvPr id="6" name="o701"/>
+          <p:cNvPr id="6" name="o684"/>
           <p:cNvSpPr txBox="1"/>
           <p:nvPr/>
         </p:nvSpPr>
@@ -10859,7 +10859,7 @@
       </p:sp>
       <p:sp>
         <p:nvSpPr>
-          <p:cNvPr id="7" name="o702"/>
+          <p:cNvPr id="7" name="o685"/>
           <p:cNvSpPr txBox="1"/>
           <p:nvPr/>
         </p:nvSpPr>
@@ -10898,7 +10898,7 @@
       </p:sp>
       <p:sp>
         <p:nvSpPr>
-          <p:cNvPr id="8" name="o703"/>
+          <p:cNvPr id="8" name="o686"/>
           <p:cNvSpPr/>
           <p:nvPr/>
         </p:nvSpPr>
@@ -10921,7 +10921,7 @@
       </p:sp>
       <p:sp>
         <p:nvSpPr>
-          <p:cNvPr id="9" name="o704"/>
+          <p:cNvPr id="9" name="o687"/>
           <p:cNvSpPr txBox="1"/>
           <p:nvPr/>
         </p:nvSpPr>
@@ -10960,7 +10960,7 @@
       </p:sp>
       <p:sp>
         <p:nvSpPr>
-          <p:cNvPr id="10" name="o705"/>
+          <p:cNvPr id="10" name="o688"/>
           <p:cNvSpPr txBox="1"/>
           <p:nvPr/>
         </p:nvSpPr>
@@ -10999,7 +10999,7 @@
       </p:sp>
       <p:sp>
         <p:nvSpPr>
-          <p:cNvPr id="11" name="o706"/>
+          <p:cNvPr id="11" name="o689"/>
           <p:cNvSpPr/>
           <p:nvPr/>
         </p:nvSpPr>
@@ -11022,7 +11022,7 @@
       </p:sp>
       <p:sp>
         <p:nvSpPr>
-          <p:cNvPr id="12" name="o707"/>
+          <p:cNvPr id="12" name="o690"/>
           <p:cNvSpPr txBox="1"/>
           <p:nvPr/>
         </p:nvSpPr>
@@ -11061,7 +11061,7 @@
       </p:sp>
       <p:sp>
         <p:nvSpPr>
-          <p:cNvPr id="13" name="o708"/>
+          <p:cNvPr id="13" name="o691"/>
           <p:cNvSpPr txBox="1"/>
           <p:nvPr/>
         </p:nvSpPr>
@@ -11100,7 +11100,7 @@
       </p:sp>
       <p:sp>
         <p:nvSpPr>
-          <p:cNvPr id="14" name="o709"/>
+          <p:cNvPr id="14" name="o692"/>
           <p:cNvSpPr/>
           <p:nvPr/>
         </p:nvSpPr>
@@ -11123,7 +11123,7 @@
       </p:sp>
       <p:sp>
         <p:nvSpPr>
-          <p:cNvPr id="15" name="o710"/>
+          <p:cNvPr id="15" name="o693"/>
           <p:cNvSpPr/>
           <p:nvPr/>
         </p:nvSpPr>
@@ -11146,7 +11146,7 @@
       </p:sp>
       <p:sp>
         <p:nvSpPr>
-          <p:cNvPr id="16" name="o711"/>
+          <p:cNvPr id="16" name="o694"/>
           <p:cNvSpPr txBox="1"/>
           <p:nvPr/>
         </p:nvSpPr>
@@ -14892,178 +14892,20 @@
       <p:sp>
         <p:nvSpPr>
           <p:cNvPr id="8" name="o131"/>
-          <p:cNvSpPr txBox="1"/>
+          <p:cNvSpPr/>
           <p:nvPr/>
         </p:nvSpPr>
         <p:spPr>
           <a:xfrm>
             <a:off x="609600" y="2057400"/>
-            <a:ext cx="381000" cy="152400"/>
-          </a:xfrm>
-          <a:prstGeom prst="rect">
-            <a:avLst/>
-          </a:prstGeom>
-          <a:noFill/>
-          <a:ln/>
-        </p:spPr>
-        <p:txBody>
-          <a:bodyPr wrap="square" lIns="0" tIns="0" rIns="0" bIns="0" rtlCol="0" anchor="t"/>
-          <a:lstStyle/>
-          <a:p>
-            <a:pPr indent="0" marL="0">
-              <a:buNone/>
-            </a:pPr>
-            <a:r>
-              <a:rPr lang="en-US" sz="1000" b="1" dirty="0">
-                <a:solidFill>
-                  <a:srgbClr val="177B57"/>
-                </a:solidFill>
-                <a:latin typeface="IBM Plex Mono" pitchFamily="34" charset="0"/>
-                <a:ea typeface="IBM Plex Mono" pitchFamily="34" charset="-122"/>
-                <a:cs typeface="IBM Plex Mono" pitchFamily="34" charset="-120"/>
-              </a:rPr>
-              <a:t>01</a:t>
-            </a:r>
-            <a:endParaRPr lang="en-US" sz="1000" dirty="0"/>
-          </a:p>
-        </p:txBody>
-      </p:sp>
-      <p:sp>
-        <p:nvSpPr>
-          <p:cNvPr id="9" name="o132"/>
-          <p:cNvSpPr txBox="1"/>
-          <p:nvPr/>
-        </p:nvSpPr>
-        <p:spPr>
-          <a:xfrm>
-            <a:off x="609600" y="2247900"/>
-            <a:ext cx="3535680" cy="228600"/>
-          </a:xfrm>
-          <a:prstGeom prst="rect">
-            <a:avLst/>
-          </a:prstGeom>
-          <a:noFill/>
-          <a:ln/>
-        </p:spPr>
-        <p:txBody>
-          <a:bodyPr wrap="square" lIns="0" tIns="0" rIns="0" bIns="0" rtlCol="0" anchor="t"/>
-          <a:lstStyle/>
-          <a:p>
-            <a:pPr indent="0" marL="0">
-              <a:buNone/>
-            </a:pPr>
-            <a:r>
-              <a:rPr lang="en-US" sz="1500" b="1" dirty="0">
-                <a:solidFill>
-                  <a:srgbClr val="1A1A1A"/>
-                </a:solidFill>
-                <a:latin typeface="Pretendard" pitchFamily="34" charset="0"/>
-                <a:ea typeface="Pretendard" pitchFamily="34" charset="-122"/>
-                <a:cs typeface="Pretendard" pitchFamily="34" charset="-120"/>
-              </a:rPr>
-              <a:t>법 · 인증</a:t>
-            </a:r>
-            <a:endParaRPr lang="en-US" sz="1500" dirty="0"/>
-          </a:p>
-        </p:txBody>
-      </p:sp>
-      <p:sp>
-        <p:nvSpPr>
-          <p:cNvPr id="10" name="o133"/>
-          <p:cNvSpPr txBox="1"/>
-          <p:nvPr/>
-        </p:nvSpPr>
-        <p:spPr>
-          <a:xfrm>
-            <a:off x="609600" y="2533650"/>
-            <a:ext cx="3535680" cy="800100"/>
-          </a:xfrm>
-          <a:prstGeom prst="rect">
-            <a:avLst/>
-          </a:prstGeom>
-          <a:noFill/>
-          <a:ln/>
-        </p:spPr>
-        <p:txBody>
-          <a:bodyPr wrap="square" lIns="0" tIns="0" rIns="0" bIns="0" rtlCol="0" anchor="t"/>
-          <a:lstStyle/>
-          <a:p>
-            <a:pPr indent="0" marL="0">
-              <a:lnSpc>
-                <a:spcPct val="145000"/>
-              </a:lnSpc>
-              <a:buNone/>
-            </a:pPr>
-            <a:r>
-              <a:rPr lang="en-US" sz="1200" dirty="0">
-                <a:solidFill>
-                  <a:srgbClr val="5B636E"/>
-                </a:solidFill>
-                <a:latin typeface="Pretendard" pitchFamily="34" charset="0"/>
-                <a:ea typeface="Pretendard" pitchFamily="34" charset="-122"/>
-                <a:cs typeface="Pretendard" pitchFamily="34" charset="-120"/>
-              </a:rPr>
-              <a:t>· 산업안전보건법 제29조 안전보건교육</a:t>
-            </a:r>
-            <a:endParaRPr lang="en-US" sz="1200" dirty="0"/>
-          </a:p>
-          <a:p>
-            <a:pPr indent="0" marL="0">
-              <a:lnSpc>
-                <a:spcPct val="145000"/>
-              </a:lnSpc>
-              <a:buNone/>
-            </a:pPr>
-            <a:r>
-              <a:rPr lang="en-US" sz="1200" dirty="0">
-                <a:solidFill>
-                  <a:srgbClr val="5B636E"/>
-                </a:solidFill>
-                <a:latin typeface="Pretendard" pitchFamily="34" charset="0"/>
-                <a:ea typeface="Pretendard" pitchFamily="34" charset="-122"/>
-                <a:cs typeface="Pretendard" pitchFamily="34" charset="-120"/>
-              </a:rPr>
-              <a:t>· 중대재해 시 교육 이행이 핵심 증빙</a:t>
-            </a:r>
-            <a:endParaRPr lang="en-US" sz="1200" dirty="0"/>
-          </a:p>
-          <a:p>
-            <a:pPr indent="0" marL="0">
-              <a:lnSpc>
-                <a:spcPct val="145000"/>
-              </a:lnSpc>
-              <a:buNone/>
-            </a:pPr>
-            <a:r>
-              <a:rPr lang="en-US" sz="1200" dirty="0">
-                <a:solidFill>
-                  <a:srgbClr val="5B636E"/>
-                </a:solidFill>
-                <a:latin typeface="Pretendard" pitchFamily="34" charset="0"/>
-                <a:ea typeface="Pretendard" pitchFamily="34" charset="-122"/>
-                <a:cs typeface="Pretendard" pitchFamily="34" charset="-120"/>
-              </a:rPr>
-              <a:t>· 인증기준 10.7 · 11.3 무결성 요구</a:t>
-            </a:r>
-            <a:endParaRPr lang="en-US" sz="1200" dirty="0"/>
-          </a:p>
-        </p:txBody>
-      </p:sp>
-      <p:sp>
-        <p:nvSpPr>
-          <p:cNvPr id="11" name="o134"/>
-          <p:cNvSpPr/>
-          <p:nvPr/>
-        </p:nvSpPr>
-        <p:spPr>
-          <a:xfrm>
-            <a:off x="609600" y="3390900"/>
-            <a:ext cx="3535680" cy="0"/>
-          </a:xfrm>
-          <a:prstGeom prst="line">
-            <a:avLst/>
-          </a:prstGeom>
-          <a:noFill/>
+            <a:ext cx="3535680" cy="2857500"/>
+          </a:xfrm>
+          <a:prstGeom prst="rect">
+            <a:avLst/>
+          </a:prstGeom>
+          <a:solidFill>
+            <a:srgbClr val="FFFFFF"/>
+          </a:solidFill>
           <a:ln w="9525">
             <a:solidFill>
               <a:srgbClr val="D6DAD8"/>
@@ -15074,104 +14916,51 @@
       </p:sp>
       <p:sp>
         <p:nvSpPr>
-          <p:cNvPr id="12" name="o135"/>
-          <p:cNvSpPr txBox="1"/>
-          <p:nvPr/>
-        </p:nvSpPr>
-        <p:spPr>
-          <a:xfrm>
-            <a:off x="609600" y="3448050"/>
-            <a:ext cx="1333500" cy="323850"/>
-          </a:xfrm>
-          <a:prstGeom prst="rect">
-            <a:avLst/>
-          </a:prstGeom>
-          <a:noFill/>
-          <a:ln/>
-        </p:spPr>
-        <p:txBody>
-          <a:bodyPr wrap="square" lIns="0" tIns="0" rIns="0" bIns="0" rtlCol="0" anchor="t"/>
-          <a:lstStyle/>
-          <a:p>
-            <a:pPr indent="0" marL="0">
-              <a:buNone/>
-            </a:pPr>
-            <a:r>
-              <a:rPr lang="en-US" sz="2200" b="1" dirty="0">
-                <a:solidFill>
-                  <a:srgbClr val="1A1A1A"/>
-                </a:solidFill>
-                <a:latin typeface="IBM Plex Sans" pitchFamily="34" charset="0"/>
-                <a:ea typeface="IBM Plex Sans" pitchFamily="34" charset="-122"/>
-                <a:cs typeface="IBM Plex Sans" pitchFamily="34" charset="-120"/>
-              </a:rPr>
-              <a:t>2개</a:t>
-            </a:r>
-            <a:endParaRPr lang="en-US" sz="2200" dirty="0"/>
-          </a:p>
-        </p:txBody>
-      </p:sp>
-      <p:sp>
-        <p:nvSpPr>
-          <p:cNvPr id="13" name="o136"/>
-          <p:cNvSpPr txBox="1"/>
-          <p:nvPr/>
-        </p:nvSpPr>
-        <p:spPr>
-          <a:xfrm>
-            <a:off x="1943100" y="3543300"/>
-            <a:ext cx="2202180" cy="190500"/>
-          </a:xfrm>
-          <a:prstGeom prst="rect">
-            <a:avLst/>
-          </a:prstGeom>
-          <a:noFill/>
-          <a:ln/>
-        </p:spPr>
-        <p:txBody>
-          <a:bodyPr wrap="square" lIns="0" tIns="0" rIns="0" bIns="0" rtlCol="0" anchor="t"/>
-          <a:lstStyle/>
-          <a:p>
-            <a:pPr indent="0" marL="0">
-              <a:buNone/>
-            </a:pPr>
-            <a:r>
-              <a:rPr lang="en-US" sz="1100" dirty="0">
-                <a:solidFill>
-                  <a:srgbClr val="5B636E"/>
-                </a:solidFill>
-                <a:latin typeface="Pretendard" pitchFamily="34" charset="0"/>
-                <a:ea typeface="Pretendard" pitchFamily="34" charset="-122"/>
-                <a:cs typeface="Pretendard" pitchFamily="34" charset="-120"/>
-              </a:rPr>
-              <a:t>인증 조사 항목</a:t>
-            </a:r>
-            <a:endParaRPr lang="en-US" sz="1100" dirty="0"/>
-          </a:p>
-        </p:txBody>
-      </p:sp>
-      <p:sp>
-        <p:nvSpPr>
-          <p:cNvPr id="14" name="o137"/>
-          <p:cNvSpPr txBox="1"/>
-          <p:nvPr/>
-        </p:nvSpPr>
-        <p:spPr>
-          <a:xfrm>
-            <a:off x="4328160" y="2057400"/>
-            <a:ext cx="381000" cy="152400"/>
-          </a:xfrm>
-          <a:prstGeom prst="rect">
-            <a:avLst/>
-          </a:prstGeom>
-          <a:noFill/>
-          <a:ln/>
-        </p:spPr>
-        <p:txBody>
-          <a:bodyPr wrap="square" lIns="0" tIns="0" rIns="0" bIns="0" rtlCol="0" anchor="t"/>
-          <a:lstStyle/>
-          <a:p>
-            <a:pPr indent="0" marL="0">
+          <p:cNvPr id="9" name="o132"/>
+          <p:cNvSpPr/>
+          <p:nvPr/>
+        </p:nvSpPr>
+        <p:spPr>
+          <a:xfrm>
+            <a:off x="838200" y="2286000"/>
+            <a:ext cx="323850" cy="323850"/>
+          </a:xfrm>
+          <a:prstGeom prst="ellipse">
+            <a:avLst/>
+          </a:prstGeom>
+          <a:solidFill>
+            <a:srgbClr val="FFFFFF"/>
+          </a:solidFill>
+          <a:ln w="15875">
+            <a:solidFill>
+              <a:srgbClr val="177B57"/>
+            </a:solidFill>
+            <a:prstDash val="solid"/>
+          </a:ln>
+        </p:spPr>
+      </p:sp>
+      <p:sp>
+        <p:nvSpPr>
+          <p:cNvPr id="10" name="o133"/>
+          <p:cNvSpPr txBox="1"/>
+          <p:nvPr/>
+        </p:nvSpPr>
+        <p:spPr>
+          <a:xfrm>
+            <a:off x="838200" y="2286000"/>
+            <a:ext cx="323850" cy="323850"/>
+          </a:xfrm>
+          <a:prstGeom prst="rect">
+            <a:avLst/>
+          </a:prstGeom>
+          <a:noFill/>
+          <a:ln/>
+        </p:spPr>
+        <p:txBody>
+          <a:bodyPr wrap="square" lIns="0" tIns="0" rIns="0" bIns="0" rtlCol="0" anchor="ctr"/>
+          <a:lstStyle/>
+          <a:p>
+            <a:pPr algn="ctr" indent="0" marL="0">
               <a:buNone/>
             </a:pPr>
             <a:r>
@@ -15183,7 +14972,7 @@
                 <a:ea typeface="IBM Plex Mono" pitchFamily="34" charset="-122"/>
                 <a:cs typeface="IBM Plex Mono" pitchFamily="34" charset="-120"/>
               </a:rPr>
-              <a:t>02</a:t>
+              <a:t>1</a:t>
             </a:r>
             <a:endParaRPr lang="en-US" sz="1000" dirty="0"/>
           </a:p>
@@ -15191,30 +14980,30 @@
       </p:sp>
       <p:sp>
         <p:nvSpPr>
-          <p:cNvPr id="15" name="o138"/>
-          <p:cNvSpPr txBox="1"/>
-          <p:nvPr/>
-        </p:nvSpPr>
-        <p:spPr>
-          <a:xfrm>
-            <a:off x="4328160" y="2247900"/>
-            <a:ext cx="3535680" cy="228600"/>
-          </a:xfrm>
-          <a:prstGeom prst="rect">
-            <a:avLst/>
-          </a:prstGeom>
-          <a:noFill/>
-          <a:ln/>
-        </p:spPr>
-        <p:txBody>
-          <a:bodyPr wrap="square" lIns="0" tIns="0" rIns="0" bIns="0" rtlCol="0" anchor="t"/>
+          <p:cNvPr id="11" name="o134"/>
+          <p:cNvSpPr txBox="1"/>
+          <p:nvPr/>
+        </p:nvSpPr>
+        <p:spPr>
+          <a:xfrm>
+            <a:off x="1295400" y="2305050"/>
+            <a:ext cx="2621280" cy="285750"/>
+          </a:xfrm>
+          <a:prstGeom prst="rect">
+            <a:avLst/>
+          </a:prstGeom>
+          <a:noFill/>
+          <a:ln/>
+        </p:spPr>
+        <p:txBody>
+          <a:bodyPr wrap="square" lIns="0" tIns="0" rIns="0" bIns="0" rtlCol="0" anchor="ctr"/>
           <a:lstStyle/>
           <a:p>
             <a:pPr indent="0" marL="0">
               <a:buNone/>
             </a:pPr>
             <a:r>
-              <a:rPr lang="en-US" sz="1500" b="1" dirty="0">
+              <a:rPr lang="en-US" sz="1800" b="1" dirty="0">
                 <a:solidFill>
                   <a:srgbClr val="1A1A1A"/>
                 </a:solidFill>
@@ -15222,22 +15011,22 @@
                 <a:ea typeface="Pretendard" pitchFamily="34" charset="-122"/>
                 <a:cs typeface="Pretendard" pitchFamily="34" charset="-120"/>
               </a:rPr>
-              <a:t>현장</a:t>
-            </a:r>
-            <a:endParaRPr lang="en-US" sz="1500" dirty="0"/>
-          </a:p>
-        </p:txBody>
-      </p:sp>
-      <p:sp>
-        <p:nvSpPr>
-          <p:cNvPr id="16" name="o139"/>
-          <p:cNvSpPr txBox="1"/>
-          <p:nvPr/>
-        </p:nvSpPr>
-        <p:spPr>
-          <a:xfrm>
-            <a:off x="4328160" y="2533650"/>
-            <a:ext cx="3535680" cy="800100"/>
+              <a:t>법 · 인증</a:t>
+            </a:r>
+            <a:endParaRPr lang="en-US" sz="1800" dirty="0"/>
+          </a:p>
+        </p:txBody>
+      </p:sp>
+      <p:sp>
+        <p:nvSpPr>
+          <p:cNvPr id="12" name="o135"/>
+          <p:cNvSpPr txBox="1"/>
+          <p:nvPr/>
+        </p:nvSpPr>
+        <p:spPr>
+          <a:xfrm>
+            <a:off x="838200" y="2857500"/>
+            <a:ext cx="3078480" cy="1047750"/>
           </a:xfrm>
           <a:prstGeom prst="rect">
             <a:avLst/>
@@ -15251,75 +15040,75 @@
           <a:p>
             <a:pPr indent="0" marL="0">
               <a:lnSpc>
-                <a:spcPct val="145000"/>
+                <a:spcPct val="160000"/>
               </a:lnSpc>
               <a:buNone/>
             </a:pPr>
             <a:r>
-              <a:rPr lang="en-US" sz="1200" dirty="0">
-                <a:solidFill>
-                  <a:srgbClr val="5B636E"/>
-                </a:solidFill>
-                <a:latin typeface="Pretendard" pitchFamily="34" charset="0"/>
-                <a:ea typeface="Pretendard" pitchFamily="34" charset="-122"/>
-                <a:cs typeface="Pretendard" pitchFamily="34" charset="-120"/>
-              </a:rPr>
-              <a:t>· 교육일지 수기 작성 · 대면 서명</a:t>
-            </a:r>
-            <a:endParaRPr lang="en-US" sz="1200" dirty="0"/>
+              <a:rPr lang="en-US" sz="1400" dirty="0">
+                <a:solidFill>
+                  <a:srgbClr val="1A1A1A"/>
+                </a:solidFill>
+                <a:latin typeface="Pretendard" pitchFamily="34" charset="0"/>
+                <a:ea typeface="Pretendard" pitchFamily="34" charset="-122"/>
+                <a:cs typeface="Pretendard" pitchFamily="34" charset="-120"/>
+              </a:rPr>
+              <a:t>산업안전보건법 제29조</a:t>
+            </a:r>
+            <a:endParaRPr lang="en-US" sz="1400" dirty="0"/>
           </a:p>
           <a:p>
             <a:pPr indent="0" marL="0">
               <a:lnSpc>
-                <a:spcPct val="145000"/>
+                <a:spcPct val="160000"/>
               </a:lnSpc>
               <a:buNone/>
             </a:pPr>
             <a:r>
-              <a:rPr lang="en-US" sz="1200" dirty="0">
-                <a:solidFill>
-                  <a:srgbClr val="5B636E"/>
-                </a:solidFill>
-                <a:latin typeface="Pretendard" pitchFamily="34" charset="0"/>
-                <a:ea typeface="Pretendard" pitchFamily="34" charset="-122"/>
-                <a:cs typeface="Pretendard" pitchFamily="34" charset="-120"/>
-              </a:rPr>
-              <a:t>· 보건실 방문 제출 · 오프라인 결재</a:t>
-            </a:r>
-            <a:endParaRPr lang="en-US" sz="1200" dirty="0"/>
+              <a:rPr lang="en-US" sz="1400" dirty="0">
+                <a:solidFill>
+                  <a:srgbClr val="1A1A1A"/>
+                </a:solidFill>
+                <a:latin typeface="Pretendard" pitchFamily="34" charset="0"/>
+                <a:ea typeface="Pretendard" pitchFamily="34" charset="-122"/>
+                <a:cs typeface="Pretendard" pitchFamily="34" charset="-120"/>
+              </a:rPr>
+              <a:t>중대재해처벌법</a:t>
+            </a:r>
+            <a:endParaRPr lang="en-US" sz="1400" dirty="0"/>
           </a:p>
           <a:p>
             <a:pPr indent="0" marL="0">
               <a:lnSpc>
-                <a:spcPct val="145000"/>
+                <a:spcPct val="160000"/>
               </a:lnSpc>
               <a:buNone/>
             </a:pPr>
             <a:r>
-              <a:rPr lang="en-US" sz="1200" dirty="0">
-                <a:solidFill>
-                  <a:srgbClr val="5B636E"/>
-                </a:solidFill>
-                <a:latin typeface="Pretendard" pitchFamily="34" charset="0"/>
-                <a:ea typeface="Pretendard" pitchFamily="34" charset="-122"/>
-                <a:cs typeface="Pretendard" pitchFamily="34" charset="-120"/>
-              </a:rPr>
-              <a:t>· 바인더 편철 — 검색 · 통계 불가</a:t>
-            </a:r>
-            <a:endParaRPr lang="en-US" sz="1200" dirty="0"/>
-          </a:p>
-        </p:txBody>
-      </p:sp>
-      <p:sp>
-        <p:nvSpPr>
-          <p:cNvPr id="17" name="o140"/>
+              <a:rPr lang="en-US" sz="1400" dirty="0">
+                <a:solidFill>
+                  <a:srgbClr val="1A1A1A"/>
+                </a:solidFill>
+                <a:latin typeface="Pretendard" pitchFamily="34" charset="0"/>
+                <a:ea typeface="Pretendard" pitchFamily="34" charset="-122"/>
+                <a:cs typeface="Pretendard" pitchFamily="34" charset="-120"/>
+              </a:rPr>
+              <a:t>의료기관 인증기준 10.7 · 11.3</a:t>
+            </a:r>
+            <a:endParaRPr lang="en-US" sz="1400" dirty="0"/>
+          </a:p>
+        </p:txBody>
+      </p:sp>
+      <p:sp>
+        <p:nvSpPr>
+          <p:cNvPr id="13" name="o136"/>
           <p:cNvSpPr/>
           <p:nvPr/>
         </p:nvSpPr>
         <p:spPr>
           <a:xfrm>
-            <a:off x="4328160" y="3390900"/>
-            <a:ext cx="3535680" cy="0"/>
+            <a:off x="838200" y="4114800"/>
+            <a:ext cx="3078480" cy="0"/>
           </a:xfrm>
           <a:prstGeom prst="line">
             <a:avLst/>
@@ -15335,14 +15124,14 @@
       </p:sp>
       <p:sp>
         <p:nvSpPr>
-          <p:cNvPr id="18" name="o141"/>
-          <p:cNvSpPr txBox="1"/>
-          <p:nvPr/>
-        </p:nvSpPr>
-        <p:spPr>
-          <a:xfrm>
-            <a:off x="4328160" y="3448050"/>
-            <a:ext cx="1333500" cy="323850"/>
+          <p:cNvPr id="14" name="o137"/>
+          <p:cNvSpPr txBox="1"/>
+          <p:nvPr/>
+        </p:nvSpPr>
+        <p:spPr>
+          <a:xfrm>
+            <a:off x="838200" y="4248150"/>
+            <a:ext cx="3078480" cy="476250"/>
           </a:xfrm>
           <a:prstGeom prst="rect">
             <a:avLst/>
@@ -15358,234 +15147,37 @@
               <a:buNone/>
             </a:pPr>
             <a:r>
-              <a:rPr lang="en-US" sz="2200" b="1" dirty="0">
-                <a:solidFill>
-                  <a:srgbClr val="177B57"/>
+              <a:rPr lang="en-US" sz="2000" b="1" dirty="0">
+                <a:solidFill>
+                  <a:srgbClr val="1A1A1A"/>
                 </a:solidFill>
                 <a:latin typeface="IBM Plex Sans" pitchFamily="34" charset="0"/>
                 <a:ea typeface="IBM Plex Sans" pitchFamily="34" charset="-122"/>
                 <a:cs typeface="IBM Plex Sans" pitchFamily="34" charset="-120"/>
               </a:rPr>
-              <a:t>100%</a:t>
-            </a:r>
-            <a:endParaRPr lang="en-US" sz="2200" dirty="0"/>
-          </a:p>
-        </p:txBody>
-      </p:sp>
-      <p:sp>
-        <p:nvSpPr>
-          <p:cNvPr id="19" name="o142"/>
-          <p:cNvSpPr txBox="1"/>
-          <p:nvPr/>
-        </p:nvSpPr>
-        <p:spPr>
-          <a:xfrm>
-            <a:off x="5661660" y="3543300"/>
-            <a:ext cx="2202180" cy="190500"/>
-          </a:xfrm>
-          <a:prstGeom prst="rect">
-            <a:avLst/>
-          </a:prstGeom>
-          <a:noFill/>
-          <a:ln/>
-        </p:spPr>
-        <p:txBody>
-          <a:bodyPr wrap="square" lIns="0" tIns="0" rIns="0" bIns="0" rtlCol="0" anchor="t"/>
-          <a:lstStyle/>
-          <a:p>
-            <a:pPr indent="0" marL="0">
-              <a:buNone/>
-            </a:pPr>
-            <a:r>
-              <a:rPr lang="en-US" sz="1100" dirty="0">
-                <a:solidFill>
-                  <a:srgbClr val="5B636E"/>
-                </a:solidFill>
-                <a:latin typeface="Pretendard" pitchFamily="34" charset="0"/>
-                <a:ea typeface="Pretendard" pitchFamily="34" charset="-122"/>
-                <a:cs typeface="Pretendard" pitchFamily="34" charset="-120"/>
-              </a:rPr>
-              <a:t>종이 처리 비율</a:t>
-            </a:r>
-            <a:endParaRPr lang="en-US" sz="1100" dirty="0"/>
-          </a:p>
-        </p:txBody>
-      </p:sp>
-      <p:sp>
-        <p:nvSpPr>
-          <p:cNvPr id="20" name="o143"/>
-          <p:cNvSpPr txBox="1"/>
-          <p:nvPr/>
-        </p:nvSpPr>
-        <p:spPr>
-          <a:xfrm>
-            <a:off x="8046720" y="2057400"/>
-            <a:ext cx="381000" cy="152400"/>
-          </a:xfrm>
-          <a:prstGeom prst="rect">
-            <a:avLst/>
-          </a:prstGeom>
-          <a:noFill/>
-          <a:ln/>
-        </p:spPr>
-        <p:txBody>
-          <a:bodyPr wrap="square" lIns="0" tIns="0" rIns="0" bIns="0" rtlCol="0" anchor="t"/>
-          <a:lstStyle/>
-          <a:p>
-            <a:pPr indent="0" marL="0">
-              <a:buNone/>
-            </a:pPr>
-            <a:r>
-              <a:rPr lang="en-US" sz="1000" b="1" dirty="0">
-                <a:solidFill>
-                  <a:srgbClr val="177B57"/>
-                </a:solidFill>
-                <a:latin typeface="IBM Plex Mono" pitchFamily="34" charset="0"/>
-                <a:ea typeface="IBM Plex Mono" pitchFamily="34" charset="-122"/>
-                <a:cs typeface="IBM Plex Mono" pitchFamily="34" charset="-120"/>
-              </a:rPr>
-              <a:t>03</a:t>
-            </a:r>
-            <a:endParaRPr lang="en-US" sz="1000" dirty="0"/>
-          </a:p>
-        </p:txBody>
-      </p:sp>
-      <p:sp>
-        <p:nvSpPr>
-          <p:cNvPr id="21" name="o144"/>
-          <p:cNvSpPr txBox="1"/>
-          <p:nvPr/>
-        </p:nvSpPr>
-        <p:spPr>
-          <a:xfrm>
-            <a:off x="8046720" y="2247900"/>
-            <a:ext cx="3535680" cy="228600"/>
-          </a:xfrm>
-          <a:prstGeom prst="rect">
-            <a:avLst/>
-          </a:prstGeom>
-          <a:noFill/>
-          <a:ln/>
-        </p:spPr>
-        <p:txBody>
-          <a:bodyPr wrap="square" lIns="0" tIns="0" rIns="0" bIns="0" rtlCol="0" anchor="t"/>
-          <a:lstStyle/>
-          <a:p>
-            <a:pPr indent="0" marL="0">
-              <a:buNone/>
-            </a:pPr>
-            <a:r>
-              <a:rPr lang="en-US" sz="1500" b="1" dirty="0">
-                <a:solidFill>
-                  <a:srgbClr val="1A1A1A"/>
-                </a:solidFill>
-                <a:latin typeface="Pretendard" pitchFamily="34" charset="0"/>
-                <a:ea typeface="Pretendard" pitchFamily="34" charset="-122"/>
-                <a:cs typeface="Pretendard" pitchFamily="34" charset="-120"/>
-              </a:rPr>
-              <a:t>경영 (ESG)</a:t>
-            </a:r>
-            <a:endParaRPr lang="en-US" sz="1500" dirty="0"/>
-          </a:p>
-        </p:txBody>
-      </p:sp>
-      <p:sp>
-        <p:nvSpPr>
-          <p:cNvPr id="22" name="o145"/>
-          <p:cNvSpPr txBox="1"/>
-          <p:nvPr/>
-        </p:nvSpPr>
-        <p:spPr>
-          <a:xfrm>
-            <a:off x="8046720" y="2533650"/>
-            <a:ext cx="3535680" cy="800100"/>
-          </a:xfrm>
-          <a:prstGeom prst="rect">
-            <a:avLst/>
-          </a:prstGeom>
-          <a:noFill/>
-          <a:ln/>
-        </p:spPr>
-        <p:txBody>
-          <a:bodyPr wrap="square" lIns="0" tIns="0" rIns="0" bIns="0" rtlCol="0" anchor="t"/>
-          <a:lstStyle/>
-          <a:p>
-            <a:pPr indent="0" marL="0">
-              <a:lnSpc>
-                <a:spcPct val="145000"/>
-              </a:lnSpc>
-              <a:buNone/>
-            </a:pPr>
-            <a:r>
-              <a:rPr lang="en-US" sz="1200" dirty="0">
-                <a:solidFill>
-                  <a:srgbClr val="5B636E"/>
-                </a:solidFill>
-                <a:latin typeface="Pretendard" pitchFamily="34" charset="0"/>
-                <a:ea typeface="Pretendard" pitchFamily="34" charset="-122"/>
-                <a:cs typeface="Pretendard" pitchFamily="34" charset="-120"/>
-              </a:rPr>
-              <a:t>· 출력 · 운반 · 보관의 자원 낭비</a:t>
-            </a:r>
-            <a:endParaRPr lang="en-US" sz="1200" dirty="0"/>
-          </a:p>
-          <a:p>
-            <a:pPr indent="0" marL="0">
-              <a:lnSpc>
-                <a:spcPct val="145000"/>
-              </a:lnSpc>
-              <a:buNone/>
-            </a:pPr>
-            <a:r>
-              <a:rPr lang="en-US" sz="1200" dirty="0">
-                <a:solidFill>
-                  <a:srgbClr val="5B636E"/>
-                </a:solidFill>
-                <a:latin typeface="Pretendard" pitchFamily="34" charset="0"/>
-                <a:ea typeface="Pretendard" pitchFamily="34" charset="-122"/>
-                <a:cs typeface="Pretendard" pitchFamily="34" charset="-120"/>
-              </a:rPr>
-              <a:t>· 친환경 경영 방향과 불일치</a:t>
-            </a:r>
-            <a:endParaRPr lang="en-US" sz="1200" dirty="0"/>
-          </a:p>
-          <a:p>
-            <a:pPr indent="0" marL="0">
-              <a:lnSpc>
-                <a:spcPct val="145000"/>
-              </a:lnSpc>
-              <a:buNone/>
-            </a:pPr>
-            <a:r>
-              <a:rPr lang="en-US" sz="1200" dirty="0">
-                <a:solidFill>
-                  <a:srgbClr val="5B636E"/>
-                </a:solidFill>
-                <a:latin typeface="Pretendard" pitchFamily="34" charset="0"/>
-                <a:ea typeface="Pretendard" pitchFamily="34" charset="-122"/>
-                <a:cs typeface="Pretendard" pitchFamily="34" charset="-120"/>
-              </a:rPr>
-              <a:t>· MSDS 개정본 비치 확인 어려움</a:t>
-            </a:r>
-            <a:endParaRPr lang="en-US" sz="1200" dirty="0"/>
-          </a:p>
-        </p:txBody>
-      </p:sp>
-      <p:sp>
-        <p:nvSpPr>
-          <p:cNvPr id="23" name="o146"/>
+              <a:t>실시간 증빙 요구</a:t>
+            </a:r>
+            <a:endParaRPr lang="en-US" sz="2000" dirty="0"/>
+          </a:p>
+        </p:txBody>
+      </p:sp>
+      <p:sp>
+        <p:nvSpPr>
+          <p:cNvPr id="15" name="o138"/>
           <p:cNvSpPr/>
           <p:nvPr/>
         </p:nvSpPr>
         <p:spPr>
           <a:xfrm>
-            <a:off x="8046720" y="3390900"/>
-            <a:ext cx="3535680" cy="0"/>
-          </a:xfrm>
-          <a:prstGeom prst="line">
-            <a:avLst/>
-          </a:prstGeom>
-          <a:noFill/>
+            <a:off x="4328160" y="2057400"/>
+            <a:ext cx="3535680" cy="2857500"/>
+          </a:xfrm>
+          <a:prstGeom prst="rect">
+            <a:avLst/>
+          </a:prstGeom>
+          <a:solidFill>
+            <a:srgbClr val="FFFFFF"/>
+          </a:solidFill>
           <a:ln w="9525">
             <a:solidFill>
               <a:srgbClr val="D6DAD8"/>
@@ -15596,14 +15188,117 @@
       </p:sp>
       <p:sp>
         <p:nvSpPr>
-          <p:cNvPr id="24" name="o147"/>
-          <p:cNvSpPr txBox="1"/>
-          <p:nvPr/>
-        </p:nvSpPr>
-        <p:spPr>
-          <a:xfrm>
-            <a:off x="8046720" y="3448050"/>
-            <a:ext cx="1333500" cy="323850"/>
+          <p:cNvPr id="16" name="o139"/>
+          <p:cNvSpPr/>
+          <p:nvPr/>
+        </p:nvSpPr>
+        <p:spPr>
+          <a:xfrm>
+            <a:off x="4556760" y="2286000"/>
+            <a:ext cx="323850" cy="323850"/>
+          </a:xfrm>
+          <a:prstGeom prst="ellipse">
+            <a:avLst/>
+          </a:prstGeom>
+          <a:solidFill>
+            <a:srgbClr val="FFFFFF"/>
+          </a:solidFill>
+          <a:ln w="15875">
+            <a:solidFill>
+              <a:srgbClr val="177B57"/>
+            </a:solidFill>
+            <a:prstDash val="solid"/>
+          </a:ln>
+        </p:spPr>
+      </p:sp>
+      <p:sp>
+        <p:nvSpPr>
+          <p:cNvPr id="17" name="o140"/>
+          <p:cNvSpPr txBox="1"/>
+          <p:nvPr/>
+        </p:nvSpPr>
+        <p:spPr>
+          <a:xfrm>
+            <a:off x="4556760" y="2286000"/>
+            <a:ext cx="323850" cy="323850"/>
+          </a:xfrm>
+          <a:prstGeom prst="rect">
+            <a:avLst/>
+          </a:prstGeom>
+          <a:noFill/>
+          <a:ln/>
+        </p:spPr>
+        <p:txBody>
+          <a:bodyPr wrap="square" lIns="0" tIns="0" rIns="0" bIns="0" rtlCol="0" anchor="ctr"/>
+          <a:lstStyle/>
+          <a:p>
+            <a:pPr algn="ctr" indent="0" marL="0">
+              <a:buNone/>
+            </a:pPr>
+            <a:r>
+              <a:rPr lang="en-US" sz="1000" b="1" dirty="0">
+                <a:solidFill>
+                  <a:srgbClr val="177B57"/>
+                </a:solidFill>
+                <a:latin typeface="IBM Plex Mono" pitchFamily="34" charset="0"/>
+                <a:ea typeface="IBM Plex Mono" pitchFamily="34" charset="-122"/>
+                <a:cs typeface="IBM Plex Mono" pitchFamily="34" charset="-120"/>
+              </a:rPr>
+              <a:t>2</a:t>
+            </a:r>
+            <a:endParaRPr lang="en-US" sz="1000" dirty="0"/>
+          </a:p>
+        </p:txBody>
+      </p:sp>
+      <p:sp>
+        <p:nvSpPr>
+          <p:cNvPr id="18" name="o141"/>
+          <p:cNvSpPr txBox="1"/>
+          <p:nvPr/>
+        </p:nvSpPr>
+        <p:spPr>
+          <a:xfrm>
+            <a:off x="5013960" y="2305050"/>
+            <a:ext cx="2621280" cy="285750"/>
+          </a:xfrm>
+          <a:prstGeom prst="rect">
+            <a:avLst/>
+          </a:prstGeom>
+          <a:noFill/>
+          <a:ln/>
+        </p:spPr>
+        <p:txBody>
+          <a:bodyPr wrap="square" lIns="0" tIns="0" rIns="0" bIns="0" rtlCol="0" anchor="ctr"/>
+          <a:lstStyle/>
+          <a:p>
+            <a:pPr indent="0" marL="0">
+              <a:buNone/>
+            </a:pPr>
+            <a:r>
+              <a:rPr lang="en-US" sz="1800" b="1" dirty="0">
+                <a:solidFill>
+                  <a:srgbClr val="1A1A1A"/>
+                </a:solidFill>
+                <a:latin typeface="Pretendard" pitchFamily="34" charset="0"/>
+                <a:ea typeface="Pretendard" pitchFamily="34" charset="-122"/>
+                <a:cs typeface="Pretendard" pitchFamily="34" charset="-120"/>
+              </a:rPr>
+              <a:t>현장</a:t>
+            </a:r>
+            <a:endParaRPr lang="en-US" sz="1800" dirty="0"/>
+          </a:p>
+        </p:txBody>
+      </p:sp>
+      <p:sp>
+        <p:nvSpPr>
+          <p:cNvPr id="19" name="o142"/>
+          <p:cNvSpPr txBox="1"/>
+          <p:nvPr/>
+        </p:nvSpPr>
+        <p:spPr>
+          <a:xfrm>
+            <a:off x="4556760" y="2857500"/>
+            <a:ext cx="3078480" cy="1047750"/>
           </a:xfrm>
           <a:prstGeom prst="rect">
             <a:avLst/>
@@ -15616,248 +15311,76 @@
           <a:lstStyle/>
           <a:p>
             <a:pPr indent="0" marL="0">
-              <a:buNone/>
-            </a:pPr>
-            <a:r>
-              <a:rPr lang="en-US" sz="2200" b="1" dirty="0">
+              <a:lnSpc>
+                <a:spcPct val="160000"/>
+              </a:lnSpc>
+              <a:buNone/>
+            </a:pPr>
+            <a:r>
+              <a:rPr lang="en-US" sz="1400" dirty="0">
                 <a:solidFill>
                   <a:srgbClr val="1A1A1A"/>
                 </a:solidFill>
-                <a:latin typeface="IBM Plex Sans" pitchFamily="34" charset="0"/>
-                <a:ea typeface="IBM Plex Sans" pitchFamily="34" charset="-122"/>
-                <a:cs typeface="IBM Plex Sans" pitchFamily="34" charset="-120"/>
-              </a:rPr>
-              <a:t>94건</a:t>
-            </a:r>
-            <a:endParaRPr lang="en-US" sz="2200" dirty="0"/>
-          </a:p>
-        </p:txBody>
-      </p:sp>
-      <p:sp>
-        <p:nvSpPr>
-          <p:cNvPr id="25" name="o148"/>
-          <p:cNvSpPr txBox="1"/>
-          <p:nvPr/>
-        </p:nvSpPr>
-        <p:spPr>
-          <a:xfrm>
-            <a:off x="9380220" y="3543300"/>
-            <a:ext cx="2202180" cy="190500"/>
-          </a:xfrm>
-          <a:prstGeom prst="rect">
-            <a:avLst/>
-          </a:prstGeom>
-          <a:noFill/>
-          <a:ln/>
-        </p:spPr>
-        <p:txBody>
-          <a:bodyPr wrap="square" lIns="0" tIns="0" rIns="0" bIns="0" rtlCol="0" anchor="t"/>
-          <a:lstStyle/>
+                <a:latin typeface="Pretendard" pitchFamily="34" charset="0"/>
+                <a:ea typeface="Pretendard" pitchFamily="34" charset="-122"/>
+                <a:cs typeface="Pretendard" pitchFamily="34" charset="-120"/>
+              </a:rPr>
+              <a:t>교육일지 100% 수기 작성</a:t>
+            </a:r>
+            <a:endParaRPr lang="en-US" sz="1400" dirty="0"/>
+          </a:p>
           <a:p>
             <a:pPr indent="0" marL="0">
-              <a:buNone/>
-            </a:pPr>
-            <a:r>
-              <a:rPr lang="en-US" sz="1100" dirty="0">
-                <a:solidFill>
-                  <a:srgbClr val="5B636E"/>
-                </a:solidFill>
-                <a:latin typeface="Pretendard" pitchFamily="34" charset="0"/>
-                <a:ea typeface="Pretendard" pitchFamily="34" charset="-122"/>
-                <a:cs typeface="Pretendard" pitchFamily="34" charset="-120"/>
-              </a:rPr>
-              <a:t>연간 종이 출력</a:t>
-            </a:r>
-            <a:endParaRPr lang="en-US" sz="1100" dirty="0"/>
-          </a:p>
-        </p:txBody>
-      </p:sp>
-      <p:sp>
-        <p:nvSpPr>
-          <p:cNvPr id="26" name="o149"/>
-          <p:cNvSpPr txBox="1"/>
-          <p:nvPr/>
-        </p:nvSpPr>
-        <p:spPr>
-          <a:xfrm>
-            <a:off x="609600" y="4000500"/>
-            <a:ext cx="6324600" cy="171450"/>
-          </a:xfrm>
-          <a:prstGeom prst="rect">
-            <a:avLst/>
-          </a:prstGeom>
-          <a:noFill/>
-          <a:ln/>
-        </p:spPr>
-        <p:txBody>
-          <a:bodyPr wrap="square" lIns="0" tIns="0" rIns="0" bIns="0" rtlCol="0" anchor="t"/>
-          <a:lstStyle/>
+              <a:lnSpc>
+                <a:spcPct val="160000"/>
+              </a:lnSpc>
+              <a:buNone/>
+            </a:pPr>
+            <a:r>
+              <a:rPr lang="en-US" sz="1400" dirty="0">
+                <a:solidFill>
+                  <a:srgbClr val="1A1A1A"/>
+                </a:solidFill>
+                <a:latin typeface="Pretendard" pitchFamily="34" charset="0"/>
+                <a:ea typeface="Pretendard" pitchFamily="34" charset="-122"/>
+                <a:cs typeface="Pretendard" pitchFamily="34" charset="-120"/>
+              </a:rPr>
+              <a:t>대면 서명 · 오프라인 결재</a:t>
+            </a:r>
+            <a:endParaRPr lang="en-US" sz="1400" dirty="0"/>
+          </a:p>
           <a:p>
             <a:pPr indent="0" marL="0">
-              <a:buNone/>
-            </a:pPr>
-            <a:r>
-              <a:rPr lang="en-US" sz="1200" b="1" dirty="0">
-                <a:solidFill>
-                  <a:srgbClr val="5B636E"/>
-                </a:solidFill>
-                <a:latin typeface="Pretendard" pitchFamily="34" charset="0"/>
-                <a:ea typeface="Pretendard" pitchFamily="34" charset="-122"/>
-                <a:cs typeface="Pretendard" pitchFamily="34" charset="-120"/>
-              </a:rPr>
-              <a:t>매체 전환 경로 — 한 건의 교육일지</a:t>
-            </a:r>
-            <a:endParaRPr lang="en-US" sz="1200" dirty="0"/>
-          </a:p>
-        </p:txBody>
-      </p:sp>
-      <p:sp>
-        <p:nvSpPr>
-          <p:cNvPr id="27" name="o150"/>
+              <a:lnSpc>
+                <a:spcPct val="160000"/>
+              </a:lnSpc>
+              <a:buNone/>
+            </a:pPr>
+            <a:r>
+              <a:rPr lang="en-US" sz="1400" dirty="0">
+                <a:solidFill>
+                  <a:srgbClr val="1A1A1A"/>
+                </a:solidFill>
+                <a:latin typeface="Pretendard" pitchFamily="34" charset="0"/>
+                <a:ea typeface="Pretendard" pitchFamily="34" charset="-122"/>
+                <a:cs typeface="Pretendard" pitchFamily="34" charset="-120"/>
+              </a:rPr>
+              <a:t>바인더 편철 보관</a:t>
+            </a:r>
+            <a:endParaRPr lang="en-US" sz="1400" dirty="0"/>
+          </a:p>
+        </p:txBody>
+      </p:sp>
+      <p:sp>
+        <p:nvSpPr>
+          <p:cNvPr id="20" name="o143"/>
           <p:cNvSpPr/>
           <p:nvPr/>
         </p:nvSpPr>
         <p:spPr>
           <a:xfrm>
-            <a:off x="609600" y="4229100"/>
-            <a:ext cx="6324600" cy="323850"/>
-          </a:xfrm>
-          <a:prstGeom prst="rect">
-            <a:avLst/>
-          </a:prstGeom>
-          <a:solidFill>
-            <a:srgbClr val="F2F4F3"/>
-          </a:solidFill>
-          <a:ln/>
-        </p:spPr>
-      </p:sp>
-      <p:sp>
-        <p:nvSpPr>
-          <p:cNvPr id="28" name="o151"/>
-          <p:cNvSpPr txBox="1"/>
-          <p:nvPr/>
-        </p:nvSpPr>
-        <p:spPr>
-          <a:xfrm>
-            <a:off x="704850" y="4229100"/>
-            <a:ext cx="1327404" cy="323850"/>
-          </a:xfrm>
-          <a:prstGeom prst="rect">
-            <a:avLst/>
-          </a:prstGeom>
-          <a:noFill/>
-          <a:ln/>
-        </p:spPr>
-        <p:txBody>
-          <a:bodyPr wrap="square" lIns="0" tIns="0" rIns="0" bIns="0" rtlCol="0" anchor="ctr"/>
-          <a:lstStyle/>
-          <a:p>
-            <a:pPr algn="l" indent="0" marL="0">
-              <a:buNone/>
-            </a:pPr>
-            <a:r>
-              <a:rPr lang="en-US" sz="1100" b="1" dirty="0">
-                <a:solidFill>
-                  <a:srgbClr val="5B636E"/>
-                </a:solidFill>
-                <a:latin typeface="Pretendard" pitchFamily="34" charset="0"/>
-                <a:ea typeface="Pretendard" pitchFamily="34" charset="-122"/>
-                <a:cs typeface="Pretendard" pitchFamily="34" charset="-120"/>
-              </a:rPr>
-              <a:t>단계</a:t>
-            </a:r>
-            <a:endParaRPr lang="en-US" sz="1100" dirty="0"/>
-          </a:p>
-        </p:txBody>
-      </p:sp>
-      <p:sp>
-        <p:nvSpPr>
-          <p:cNvPr id="29" name="o152"/>
-          <p:cNvSpPr txBox="1"/>
-          <p:nvPr/>
-        </p:nvSpPr>
-        <p:spPr>
-          <a:xfrm>
-            <a:off x="2222754" y="4229100"/>
-            <a:ext cx="1959864" cy="323850"/>
-          </a:xfrm>
-          <a:prstGeom prst="rect">
-            <a:avLst/>
-          </a:prstGeom>
-          <a:noFill/>
-          <a:ln/>
-        </p:spPr>
-        <p:txBody>
-          <a:bodyPr wrap="square" lIns="0" tIns="0" rIns="0" bIns="0" rtlCol="0" anchor="ctr"/>
-          <a:lstStyle/>
-          <a:p>
-            <a:pPr algn="l" indent="0" marL="0">
-              <a:buNone/>
-            </a:pPr>
-            <a:r>
-              <a:rPr lang="en-US" sz="1100" b="1" dirty="0">
-                <a:solidFill>
-                  <a:srgbClr val="5B636E"/>
-                </a:solidFill>
-                <a:latin typeface="Pretendard" pitchFamily="34" charset="0"/>
-                <a:ea typeface="Pretendard" pitchFamily="34" charset="-122"/>
-                <a:cs typeface="Pretendard" pitchFamily="34" charset="-120"/>
-              </a:rPr>
-              <a:t>기존 매체</a:t>
-            </a:r>
-            <a:endParaRPr lang="en-US" sz="1100" dirty="0"/>
-          </a:p>
-        </p:txBody>
-      </p:sp>
-      <p:sp>
-        <p:nvSpPr>
-          <p:cNvPr id="30" name="o153"/>
-          <p:cNvSpPr txBox="1"/>
-          <p:nvPr/>
-        </p:nvSpPr>
-        <p:spPr>
-          <a:xfrm>
-            <a:off x="4373118" y="4229100"/>
-            <a:ext cx="2465832" cy="323850"/>
-          </a:xfrm>
-          <a:prstGeom prst="rect">
-            <a:avLst/>
-          </a:prstGeom>
-          <a:noFill/>
-          <a:ln/>
-        </p:spPr>
-        <p:txBody>
-          <a:bodyPr wrap="square" lIns="0" tIns="0" rIns="0" bIns="0" rtlCol="0" anchor="ctr"/>
-          <a:lstStyle/>
-          <a:p>
-            <a:pPr algn="l" indent="0" marL="0">
-              <a:buNone/>
-            </a:pPr>
-            <a:r>
-              <a:rPr lang="en-US" sz="1100" b="1" dirty="0">
-                <a:solidFill>
-                  <a:srgbClr val="5B636E"/>
-                </a:solidFill>
-                <a:latin typeface="Pretendard" pitchFamily="34" charset="0"/>
-                <a:ea typeface="Pretendard" pitchFamily="34" charset="-122"/>
-                <a:cs typeface="Pretendard" pitchFamily="34" charset="-120"/>
-              </a:rPr>
-              <a:t>문제</a:t>
-            </a:r>
-            <a:endParaRPr lang="en-US" sz="1100" dirty="0"/>
-          </a:p>
-        </p:txBody>
-      </p:sp>
-      <p:sp>
-        <p:nvSpPr>
-          <p:cNvPr id="31" name="o154"/>
-          <p:cNvSpPr/>
-          <p:nvPr/>
-        </p:nvSpPr>
-        <p:spPr>
-          <a:xfrm>
-            <a:off x="609600" y="4552950"/>
-            <a:ext cx="6324600" cy="0"/>
+            <a:off x="4556760" y="4114800"/>
+            <a:ext cx="3078480" cy="0"/>
           </a:xfrm>
           <a:prstGeom prst="line">
             <a:avLst/>
@@ -15873,136 +15396,60 @@
       </p:sp>
       <p:sp>
         <p:nvSpPr>
-          <p:cNvPr id="32" name="o155"/>
-          <p:cNvSpPr txBox="1"/>
-          <p:nvPr/>
-        </p:nvSpPr>
-        <p:spPr>
-          <a:xfrm>
-            <a:off x="704850" y="4552950"/>
-            <a:ext cx="1327404" cy="323850"/>
-          </a:xfrm>
-          <a:prstGeom prst="rect">
-            <a:avLst/>
-          </a:prstGeom>
-          <a:noFill/>
-          <a:ln/>
-        </p:spPr>
-        <p:txBody>
-          <a:bodyPr wrap="square" lIns="0" tIns="0" rIns="0" bIns="0" rtlCol="0" anchor="ctr"/>
-          <a:lstStyle/>
-          <a:p>
-            <a:pPr algn="l" indent="0" marL="0">
-              <a:buNone/>
-            </a:pPr>
-            <a:r>
-              <a:rPr lang="en-US" sz="1200" dirty="0">
-                <a:solidFill>
-                  <a:srgbClr val="1A1A1A"/>
-                </a:solidFill>
-                <a:latin typeface="Pretendard" pitchFamily="34" charset="0"/>
-                <a:ea typeface="Pretendard" pitchFamily="34" charset="-122"/>
-                <a:cs typeface="Pretendard" pitchFamily="34" charset="-120"/>
-              </a:rPr>
-              <a:t>작성 · 전송</a:t>
-            </a:r>
-            <a:endParaRPr lang="en-US" sz="1200" dirty="0"/>
-          </a:p>
-        </p:txBody>
-      </p:sp>
-      <p:sp>
-        <p:nvSpPr>
-          <p:cNvPr id="33" name="o156"/>
-          <p:cNvSpPr txBox="1"/>
-          <p:nvPr/>
-        </p:nvSpPr>
-        <p:spPr>
-          <a:xfrm>
-            <a:off x="2222754" y="4552950"/>
-            <a:ext cx="1959864" cy="323850"/>
-          </a:xfrm>
-          <a:prstGeom prst="rect">
-            <a:avLst/>
-          </a:prstGeom>
-          <a:noFill/>
-          <a:ln/>
-        </p:spPr>
-        <p:txBody>
-          <a:bodyPr wrap="square" lIns="0" tIns="0" rIns="0" bIns="0" rtlCol="0" anchor="ctr"/>
-          <a:lstStyle/>
-          <a:p>
-            <a:pPr algn="l" indent="0" marL="0">
-              <a:buNone/>
-            </a:pPr>
-            <a:r>
-              <a:rPr lang="en-US" sz="1200" dirty="0">
-                <a:solidFill>
-                  <a:srgbClr val="1A1A1A"/>
-                </a:solidFill>
-                <a:latin typeface="Pretendard" pitchFamily="34" charset="0"/>
-                <a:ea typeface="Pretendard" pitchFamily="34" charset="-122"/>
-                <a:cs typeface="Pretendard" pitchFamily="34" charset="-120"/>
-              </a:rPr>
-              <a:t>디지털 (PC · 메신저)</a:t>
-            </a:r>
-            <a:endParaRPr lang="en-US" sz="1200" dirty="0"/>
-          </a:p>
-        </p:txBody>
-      </p:sp>
-      <p:sp>
-        <p:nvSpPr>
-          <p:cNvPr id="34" name="o157"/>
-          <p:cNvSpPr txBox="1"/>
-          <p:nvPr/>
-        </p:nvSpPr>
-        <p:spPr>
-          <a:xfrm>
-            <a:off x="4373118" y="4552950"/>
-            <a:ext cx="2465832" cy="323850"/>
-          </a:xfrm>
-          <a:prstGeom prst="rect">
-            <a:avLst/>
-          </a:prstGeom>
-          <a:noFill/>
-          <a:ln/>
-        </p:spPr>
-        <p:txBody>
-          <a:bodyPr wrap="square" lIns="0" tIns="0" rIns="0" bIns="0" rtlCol="0" anchor="ctr"/>
-          <a:lstStyle/>
-          <a:p>
-            <a:pPr algn="l" indent="0" marL="0">
-              <a:buNone/>
-            </a:pPr>
-            <a:r>
-              <a:rPr lang="en-US" sz="1200" dirty="0">
-                <a:solidFill>
-                  <a:srgbClr val="1A1A1A"/>
-                </a:solidFill>
-                <a:latin typeface="Pretendard" pitchFamily="34" charset="0"/>
-                <a:ea typeface="Pretendard" pitchFamily="34" charset="-122"/>
-                <a:cs typeface="Pretendard" pitchFamily="34" charset="-120"/>
-              </a:rPr>
-              <a:t>같은 양식 반복 작성</a:t>
-            </a:r>
-            <a:endParaRPr lang="en-US" sz="1200" dirty="0"/>
-          </a:p>
-        </p:txBody>
-      </p:sp>
-      <p:sp>
-        <p:nvSpPr>
-          <p:cNvPr id="35" name="o158"/>
+          <p:cNvPr id="21" name="o144"/>
+          <p:cNvSpPr txBox="1"/>
+          <p:nvPr/>
+        </p:nvSpPr>
+        <p:spPr>
+          <a:xfrm>
+            <a:off x="4556760" y="4248150"/>
+            <a:ext cx="3078480" cy="476250"/>
+          </a:xfrm>
+          <a:prstGeom prst="rect">
+            <a:avLst/>
+          </a:prstGeom>
+          <a:noFill/>
+          <a:ln/>
+        </p:spPr>
+        <p:txBody>
+          <a:bodyPr wrap="square" lIns="0" tIns="0" rIns="0" bIns="0" rtlCol="0" anchor="t"/>
+          <a:lstStyle/>
+          <a:p>
+            <a:pPr indent="0" marL="0">
+              <a:buNone/>
+            </a:pPr>
+            <a:r>
+              <a:rPr lang="en-US" sz="2000" b="1" dirty="0">
+                <a:solidFill>
+                  <a:srgbClr val="177B57"/>
+                </a:solidFill>
+                <a:latin typeface="IBM Plex Sans" pitchFamily="34" charset="0"/>
+                <a:ea typeface="IBM Plex Sans" pitchFamily="34" charset="-122"/>
+                <a:cs typeface="IBM Plex Sans" pitchFamily="34" charset="-120"/>
+              </a:rPr>
+              <a:t>건당 최대 33:48</a:t>
+            </a:r>
+            <a:endParaRPr lang="en-US" sz="2000" dirty="0"/>
+          </a:p>
+        </p:txBody>
+      </p:sp>
+      <p:sp>
+        <p:nvSpPr>
+          <p:cNvPr id="22" name="o145"/>
           <p:cNvSpPr/>
           <p:nvPr/>
         </p:nvSpPr>
         <p:spPr>
           <a:xfrm>
-            <a:off x="609600" y="4876800"/>
-            <a:ext cx="6324600" cy="0"/>
-          </a:xfrm>
-          <a:prstGeom prst="line">
-            <a:avLst/>
-          </a:prstGeom>
-          <a:noFill/>
+            <a:off x="8046720" y="2057400"/>
+            <a:ext cx="3535680" cy="2857500"/>
+          </a:xfrm>
+          <a:prstGeom prst="rect">
+            <a:avLst/>
+          </a:prstGeom>
+          <a:solidFill>
+            <a:srgbClr val="FFFFFF"/>
+          </a:solidFill>
           <a:ln w="9525">
             <a:solidFill>
               <a:srgbClr val="D6DAD8"/>
@@ -16013,14 +15460,39 @@
       </p:sp>
       <p:sp>
         <p:nvSpPr>
-          <p:cNvPr id="36" name="o159"/>
-          <p:cNvSpPr txBox="1"/>
-          <p:nvPr/>
-        </p:nvSpPr>
-        <p:spPr>
-          <a:xfrm>
-            <a:off x="704850" y="4876800"/>
-            <a:ext cx="1327404" cy="323850"/>
+          <p:cNvPr id="23" name="o146"/>
+          <p:cNvSpPr/>
+          <p:nvPr/>
+        </p:nvSpPr>
+        <p:spPr>
+          <a:xfrm>
+            <a:off x="8275320" y="2286000"/>
+            <a:ext cx="323850" cy="323850"/>
+          </a:xfrm>
+          <a:prstGeom prst="ellipse">
+            <a:avLst/>
+          </a:prstGeom>
+          <a:solidFill>
+            <a:srgbClr val="FFFFFF"/>
+          </a:solidFill>
+          <a:ln w="15875">
+            <a:solidFill>
+              <a:srgbClr val="177B57"/>
+            </a:solidFill>
+            <a:prstDash val="solid"/>
+          </a:ln>
+        </p:spPr>
+      </p:sp>
+      <p:sp>
+        <p:nvSpPr>
+          <p:cNvPr id="24" name="o147"/>
+          <p:cNvSpPr txBox="1"/>
+          <p:nvPr/>
+        </p:nvSpPr>
+        <p:spPr>
+          <a:xfrm>
+            <a:off x="8275320" y="2286000"/>
+            <a:ext cx="323850" cy="323850"/>
           </a:xfrm>
           <a:prstGeom prst="rect">
             <a:avLst/>
@@ -16032,11 +15504,50 @@
           <a:bodyPr wrap="square" lIns="0" tIns="0" rIns="0" bIns="0" rtlCol="0" anchor="ctr"/>
           <a:lstStyle/>
           <a:p>
-            <a:pPr algn="l" indent="0" marL="0">
-              <a:buNone/>
-            </a:pPr>
-            <a:r>
-              <a:rPr lang="en-US" sz="1200" dirty="0">
+            <a:pPr algn="ctr" indent="0" marL="0">
+              <a:buNone/>
+            </a:pPr>
+            <a:r>
+              <a:rPr lang="en-US" sz="1000" b="1" dirty="0">
+                <a:solidFill>
+                  <a:srgbClr val="177B57"/>
+                </a:solidFill>
+                <a:latin typeface="IBM Plex Mono" pitchFamily="34" charset="0"/>
+                <a:ea typeface="IBM Plex Mono" pitchFamily="34" charset="-122"/>
+                <a:cs typeface="IBM Plex Mono" pitchFamily="34" charset="-120"/>
+              </a:rPr>
+              <a:t>3</a:t>
+            </a:r>
+            <a:endParaRPr lang="en-US" sz="1000" dirty="0"/>
+          </a:p>
+        </p:txBody>
+      </p:sp>
+      <p:sp>
+        <p:nvSpPr>
+          <p:cNvPr id="25" name="o148"/>
+          <p:cNvSpPr txBox="1"/>
+          <p:nvPr/>
+        </p:nvSpPr>
+        <p:spPr>
+          <a:xfrm>
+            <a:off x="8732520" y="2305050"/>
+            <a:ext cx="2621280" cy="285750"/>
+          </a:xfrm>
+          <a:prstGeom prst="rect">
+            <a:avLst/>
+          </a:prstGeom>
+          <a:noFill/>
+          <a:ln/>
+        </p:spPr>
+        <p:txBody>
+          <a:bodyPr wrap="square" lIns="0" tIns="0" rIns="0" bIns="0" rtlCol="0" anchor="ctr"/>
+          <a:lstStyle/>
+          <a:p>
+            <a:pPr indent="0" marL="0">
+              <a:buNone/>
+            </a:pPr>
+            <a:r>
+              <a:rPr lang="en-US" sz="1800" b="1" dirty="0">
                 <a:solidFill>
                   <a:srgbClr val="1A1A1A"/>
                 </a:solidFill>
@@ -16044,38 +15555,41 @@
                 <a:ea typeface="Pretendard" pitchFamily="34" charset="-122"/>
                 <a:cs typeface="Pretendard" pitchFamily="34" charset="-120"/>
               </a:rPr>
-              <a:t>서명 · 제출</a:t>
-            </a:r>
-            <a:endParaRPr lang="en-US" sz="1200" dirty="0"/>
-          </a:p>
-        </p:txBody>
-      </p:sp>
-      <p:sp>
-        <p:nvSpPr>
-          <p:cNvPr id="37" name="o160"/>
-          <p:cNvSpPr txBox="1"/>
-          <p:nvPr/>
-        </p:nvSpPr>
-        <p:spPr>
-          <a:xfrm>
-            <a:off x="2222754" y="4876800"/>
-            <a:ext cx="1959864" cy="323850"/>
-          </a:xfrm>
-          <a:prstGeom prst="rect">
-            <a:avLst/>
-          </a:prstGeom>
-          <a:noFill/>
-          <a:ln/>
-        </p:spPr>
-        <p:txBody>
-          <a:bodyPr wrap="square" lIns="0" tIns="0" rIns="0" bIns="0" rtlCol="0" anchor="ctr"/>
-          <a:lstStyle/>
-          <a:p>
-            <a:pPr algn="l" indent="0" marL="0">
-              <a:buNone/>
-            </a:pPr>
-            <a:r>
-              <a:rPr lang="en-US" sz="1200" dirty="0">
+              <a:t>경영 (ESG)</a:t>
+            </a:r>
+            <a:endParaRPr lang="en-US" sz="1800" dirty="0"/>
+          </a:p>
+        </p:txBody>
+      </p:sp>
+      <p:sp>
+        <p:nvSpPr>
+          <p:cNvPr id="26" name="o149"/>
+          <p:cNvSpPr txBox="1"/>
+          <p:nvPr/>
+        </p:nvSpPr>
+        <p:spPr>
+          <a:xfrm>
+            <a:off x="8275320" y="2857500"/>
+            <a:ext cx="3078480" cy="1047750"/>
+          </a:xfrm>
+          <a:prstGeom prst="rect">
+            <a:avLst/>
+          </a:prstGeom>
+          <a:noFill/>
+          <a:ln/>
+        </p:spPr>
+        <p:txBody>
+          <a:bodyPr wrap="square" lIns="0" tIns="0" rIns="0" bIns="0" rtlCol="0" anchor="t"/>
+          <a:lstStyle/>
+          <a:p>
+            <a:pPr indent="0" marL="0">
+              <a:lnSpc>
+                <a:spcPct val="160000"/>
+              </a:lnSpc>
+              <a:buNone/>
+            </a:pPr>
+            <a:r>
+              <a:rPr lang="en-US" sz="1400" dirty="0">
                 <a:solidFill>
                   <a:srgbClr val="1A1A1A"/>
                 </a:solidFill>
@@ -16083,38 +15597,19 @@
                 <a:ea typeface="Pretendard" pitchFamily="34" charset="-122"/>
                 <a:cs typeface="Pretendard" pitchFamily="34" charset="-120"/>
               </a:rPr>
-              <a:t>종이 · 직접 방문</a:t>
-            </a:r>
-            <a:endParaRPr lang="en-US" sz="1200" dirty="0"/>
-          </a:p>
-        </p:txBody>
-      </p:sp>
-      <p:sp>
-        <p:nvSpPr>
-          <p:cNvPr id="38" name="o161"/>
-          <p:cNvSpPr txBox="1"/>
-          <p:nvPr/>
-        </p:nvSpPr>
-        <p:spPr>
-          <a:xfrm>
-            <a:off x="4373118" y="4876800"/>
-            <a:ext cx="2465832" cy="323850"/>
-          </a:xfrm>
-          <a:prstGeom prst="rect">
-            <a:avLst/>
-          </a:prstGeom>
-          <a:noFill/>
-          <a:ln/>
-        </p:spPr>
-        <p:txBody>
-          <a:bodyPr wrap="square" lIns="0" tIns="0" rIns="0" bIns="0" rtlCol="0" anchor="ctr"/>
-          <a:lstStyle/>
-          <a:p>
-            <a:pPr algn="l" indent="0" marL="0">
-              <a:buNone/>
-            </a:pPr>
-            <a:r>
-              <a:rPr lang="en-US" sz="1200" dirty="0">
+              <a:t>연 94건 종이 출력 · 보관</a:t>
+            </a:r>
+            <a:endParaRPr lang="en-US" sz="1400" dirty="0"/>
+          </a:p>
+          <a:p>
+            <a:pPr indent="0" marL="0">
+              <a:lnSpc>
+                <a:spcPct val="160000"/>
+              </a:lnSpc>
+              <a:buNone/>
+            </a:pPr>
+            <a:r>
+              <a:rPr lang="en-US" sz="1400" dirty="0">
                 <a:solidFill>
                   <a:srgbClr val="1A1A1A"/>
                 </a:solidFill>
@@ -16122,22 +15617,42 @@
                 <a:ea typeface="Pretendard" pitchFamily="34" charset="-122"/>
                 <a:cs typeface="Pretendard" pitchFamily="34" charset="-120"/>
               </a:rPr>
-              <a:t>이동 7분 · 채널 이원화</a:t>
-            </a:r>
-            <a:endParaRPr lang="en-US" sz="1200" dirty="0"/>
-          </a:p>
-        </p:txBody>
-      </p:sp>
-      <p:sp>
-        <p:nvSpPr>
-          <p:cNvPr id="39" name="o162"/>
+              <a:t>친환경 경영 방향과 불일치</a:t>
+            </a:r>
+            <a:endParaRPr lang="en-US" sz="1400" dirty="0"/>
+          </a:p>
+          <a:p>
+            <a:pPr indent="0" marL="0">
+              <a:lnSpc>
+                <a:spcPct val="160000"/>
+              </a:lnSpc>
+              <a:buNone/>
+            </a:pPr>
+            <a:r>
+              <a:rPr lang="en-US" sz="1400" dirty="0">
+                <a:solidFill>
+                  <a:srgbClr val="1A1A1A"/>
+                </a:solidFill>
+                <a:latin typeface="Pretendard" pitchFamily="34" charset="0"/>
+                <a:ea typeface="Pretendard" pitchFamily="34" charset="-122"/>
+                <a:cs typeface="Pretendard" pitchFamily="34" charset="-120"/>
+              </a:rPr>
+              <a:t>MSDS 개정본 비치 확인 어려움</a:t>
+            </a:r>
+            <a:endParaRPr lang="en-US" sz="1400" dirty="0"/>
+          </a:p>
+        </p:txBody>
+      </p:sp>
+      <p:sp>
+        <p:nvSpPr>
+          <p:cNvPr id="27" name="o150"/>
           <p:cNvSpPr/>
           <p:nvPr/>
         </p:nvSpPr>
         <p:spPr>
           <a:xfrm>
-            <a:off x="609600" y="5200650"/>
-            <a:ext cx="6324600" cy="0"/>
+            <a:off x="8275320" y="4114800"/>
+            <a:ext cx="3078480" cy="0"/>
           </a:xfrm>
           <a:prstGeom prst="line">
             <a:avLst/>
@@ -16153,139 +15668,61 @@
       </p:sp>
       <p:sp>
         <p:nvSpPr>
-          <p:cNvPr id="40" name="o163"/>
-          <p:cNvSpPr txBox="1"/>
-          <p:nvPr/>
-        </p:nvSpPr>
-        <p:spPr>
-          <a:xfrm>
-            <a:off x="704850" y="5200650"/>
-            <a:ext cx="1327404" cy="323850"/>
-          </a:xfrm>
-          <a:prstGeom prst="rect">
-            <a:avLst/>
-          </a:prstGeom>
-          <a:noFill/>
-          <a:ln/>
-        </p:spPr>
-        <p:txBody>
-          <a:bodyPr wrap="square" lIns="0" tIns="0" rIns="0" bIns="0" rtlCol="0" anchor="ctr"/>
-          <a:lstStyle/>
-          <a:p>
-            <a:pPr algn="l" indent="0" marL="0">
-              <a:buNone/>
-            </a:pPr>
-            <a:r>
-              <a:rPr lang="en-US" sz="1200" dirty="0">
+          <p:cNvPr id="28" name="o151"/>
+          <p:cNvSpPr txBox="1"/>
+          <p:nvPr/>
+        </p:nvSpPr>
+        <p:spPr>
+          <a:xfrm>
+            <a:off x="8275320" y="4248150"/>
+            <a:ext cx="3078480" cy="476250"/>
+          </a:xfrm>
+          <a:prstGeom prst="rect">
+            <a:avLst/>
+          </a:prstGeom>
+          <a:noFill/>
+          <a:ln/>
+        </p:spPr>
+        <p:txBody>
+          <a:bodyPr wrap="square" lIns="0" tIns="0" rIns="0" bIns="0" rtlCol="0" anchor="t"/>
+          <a:lstStyle/>
+          <a:p>
+            <a:pPr indent="0" marL="0">
+              <a:buNone/>
+            </a:pPr>
+            <a:r>
+              <a:rPr lang="en-US" sz="2000" b="1" dirty="0">
                 <a:solidFill>
                   <a:srgbClr val="1A1A1A"/>
                 </a:solidFill>
-                <a:latin typeface="Pretendard" pitchFamily="34" charset="0"/>
-                <a:ea typeface="Pretendard" pitchFamily="34" charset="-122"/>
-                <a:cs typeface="Pretendard" pitchFamily="34" charset="-120"/>
-              </a:rPr>
-              <a:t>결재 · 보관</a:t>
-            </a:r>
-            <a:endParaRPr lang="en-US" sz="1200" dirty="0"/>
-          </a:p>
-        </p:txBody>
-      </p:sp>
-      <p:sp>
-        <p:nvSpPr>
-          <p:cNvPr id="41" name="o164"/>
-          <p:cNvSpPr txBox="1"/>
-          <p:nvPr/>
-        </p:nvSpPr>
-        <p:spPr>
-          <a:xfrm>
-            <a:off x="2222754" y="5200650"/>
-            <a:ext cx="1959864" cy="323850"/>
-          </a:xfrm>
-          <a:prstGeom prst="rect">
-            <a:avLst/>
-          </a:prstGeom>
-          <a:noFill/>
-          <a:ln/>
-        </p:spPr>
-        <p:txBody>
-          <a:bodyPr wrap="square" lIns="0" tIns="0" rIns="0" bIns="0" rtlCol="0" anchor="ctr"/>
-          <a:lstStyle/>
-          <a:p>
-            <a:pPr algn="l" indent="0" marL="0">
-              <a:buNone/>
-            </a:pPr>
-            <a:r>
-              <a:rPr lang="en-US" sz="1200" dirty="0">
-                <a:solidFill>
-                  <a:srgbClr val="1A1A1A"/>
-                </a:solidFill>
-                <a:latin typeface="Pretendard" pitchFamily="34" charset="0"/>
-                <a:ea typeface="Pretendard" pitchFamily="34" charset="-122"/>
-                <a:cs typeface="Pretendard" pitchFamily="34" charset="-120"/>
-              </a:rPr>
-              <a:t>종이 · 바인더</a:t>
-            </a:r>
-            <a:endParaRPr lang="en-US" sz="1200" dirty="0"/>
-          </a:p>
-        </p:txBody>
-      </p:sp>
-      <p:sp>
-        <p:nvSpPr>
-          <p:cNvPr id="42" name="o165"/>
-          <p:cNvSpPr txBox="1"/>
-          <p:nvPr/>
-        </p:nvSpPr>
-        <p:spPr>
-          <a:xfrm>
-            <a:off x="4373118" y="5200650"/>
-            <a:ext cx="2465832" cy="323850"/>
-          </a:xfrm>
-          <a:prstGeom prst="rect">
-            <a:avLst/>
-          </a:prstGeom>
-          <a:noFill/>
-          <a:ln/>
-        </p:spPr>
-        <p:txBody>
-          <a:bodyPr wrap="square" lIns="0" tIns="0" rIns="0" bIns="0" rtlCol="0" anchor="ctr"/>
-          <a:lstStyle/>
-          <a:p>
-            <a:pPr algn="l" indent="0" marL="0">
-              <a:buNone/>
-            </a:pPr>
-            <a:r>
-              <a:rPr lang="en-US" sz="1200" dirty="0">
-                <a:solidFill>
-                  <a:srgbClr val="1A1A1A"/>
-                </a:solidFill>
-                <a:latin typeface="Pretendard" pitchFamily="34" charset="0"/>
-                <a:ea typeface="Pretendard" pitchFamily="34" charset="-122"/>
-                <a:cs typeface="Pretendard" pitchFamily="34" charset="-120"/>
-              </a:rPr>
-              <a:t>대기 19분 24초 · 검색 불가</a:t>
-            </a:r>
-            <a:endParaRPr lang="en-US" sz="1200" dirty="0"/>
-          </a:p>
-        </p:txBody>
-      </p:sp>
-      <p:sp>
-        <p:nvSpPr>
-          <p:cNvPr id="43" name="o166"/>
+                <a:latin typeface="IBM Plex Sans" pitchFamily="34" charset="0"/>
+                <a:ea typeface="IBM Plex Sans" pitchFamily="34" charset="-122"/>
+                <a:cs typeface="IBM Plex Sans" pitchFamily="34" charset="-120"/>
+              </a:rPr>
+              <a:t>연 94건 출력</a:t>
+            </a:r>
+            <a:endParaRPr lang="en-US" sz="2000" dirty="0"/>
+          </a:p>
+        </p:txBody>
+      </p:sp>
+      <p:sp>
+        <p:nvSpPr>
+          <p:cNvPr id="29" name="o152"/>
           <p:cNvSpPr/>
           <p:nvPr/>
         </p:nvSpPr>
         <p:spPr>
           <a:xfrm>
-            <a:off x="609600" y="5524500"/>
-            <a:ext cx="6324600" cy="0"/>
+            <a:off x="2377440" y="4914900"/>
+            <a:ext cx="0" cy="266700"/>
           </a:xfrm>
           <a:prstGeom prst="line">
             <a:avLst/>
           </a:prstGeom>
           <a:noFill/>
-          <a:ln w="9525">
+          <a:ln w="12700">
             <a:solidFill>
-              <a:srgbClr val="D6DAD8"/>
+              <a:srgbClr val="5B636E"/>
             </a:solidFill>
             <a:prstDash val="solid"/>
           </a:ln>
@@ -16293,139 +15730,22 @@
       </p:sp>
       <p:sp>
         <p:nvSpPr>
-          <p:cNvPr id="44" name="o167"/>
-          <p:cNvSpPr txBox="1"/>
-          <p:nvPr/>
-        </p:nvSpPr>
-        <p:spPr>
-          <a:xfrm>
-            <a:off x="704850" y="5524500"/>
-            <a:ext cx="1327404" cy="323850"/>
-          </a:xfrm>
-          <a:prstGeom prst="rect">
-            <a:avLst/>
-          </a:prstGeom>
-          <a:noFill/>
-          <a:ln/>
-        </p:spPr>
-        <p:txBody>
-          <a:bodyPr wrap="square" lIns="0" tIns="0" rIns="0" bIns="0" rtlCol="0" anchor="ctr"/>
-          <a:lstStyle/>
-          <a:p>
-            <a:pPr algn="l" indent="0" marL="0">
-              <a:buNone/>
-            </a:pPr>
-            <a:r>
-              <a:rPr lang="en-US" sz="1200" dirty="0">
-                <a:solidFill>
-                  <a:srgbClr val="1A1A1A"/>
-                </a:solidFill>
-                <a:latin typeface="Pretendard" pitchFamily="34" charset="0"/>
-                <a:ea typeface="Pretendard" pitchFamily="34" charset="-122"/>
-                <a:cs typeface="Pretendard" pitchFamily="34" charset="-120"/>
-              </a:rPr>
-              <a:t>현황 확인</a:t>
-            </a:r>
-            <a:endParaRPr lang="en-US" sz="1200" dirty="0"/>
-          </a:p>
-        </p:txBody>
-      </p:sp>
-      <p:sp>
-        <p:nvSpPr>
-          <p:cNvPr id="45" name="o168"/>
-          <p:cNvSpPr txBox="1"/>
-          <p:nvPr/>
-        </p:nvSpPr>
-        <p:spPr>
-          <a:xfrm>
-            <a:off x="2222754" y="5524500"/>
-            <a:ext cx="1959864" cy="323850"/>
-          </a:xfrm>
-          <a:prstGeom prst="rect">
-            <a:avLst/>
-          </a:prstGeom>
-          <a:noFill/>
-          <a:ln/>
-        </p:spPr>
-        <p:txBody>
-          <a:bodyPr wrap="square" lIns="0" tIns="0" rIns="0" bIns="0" rtlCol="0" anchor="ctr"/>
-          <a:lstStyle/>
-          <a:p>
-            <a:pPr algn="l" indent="0" marL="0">
-              <a:buNone/>
-            </a:pPr>
-            <a:r>
-              <a:rPr lang="en-US" sz="1200" dirty="0">
-                <a:solidFill>
-                  <a:srgbClr val="1A1A1A"/>
-                </a:solidFill>
-                <a:latin typeface="Pretendard" pitchFamily="34" charset="0"/>
-                <a:ea typeface="Pretendard" pitchFamily="34" charset="-122"/>
-                <a:cs typeface="Pretendard" pitchFamily="34" charset="-120"/>
-              </a:rPr>
-              <a:t>없음 (수작업 대조)</a:t>
-            </a:r>
-            <a:endParaRPr lang="en-US" sz="1200" dirty="0"/>
-          </a:p>
-        </p:txBody>
-      </p:sp>
-      <p:sp>
-        <p:nvSpPr>
-          <p:cNvPr id="46" name="o169"/>
-          <p:cNvSpPr txBox="1"/>
-          <p:nvPr/>
-        </p:nvSpPr>
-        <p:spPr>
-          <a:xfrm>
-            <a:off x="4373118" y="5524500"/>
-            <a:ext cx="2465832" cy="323850"/>
-          </a:xfrm>
-          <a:prstGeom prst="rect">
-            <a:avLst/>
-          </a:prstGeom>
-          <a:noFill/>
-          <a:ln/>
-        </p:spPr>
-        <p:txBody>
-          <a:bodyPr wrap="square" lIns="0" tIns="0" rIns="0" bIns="0" rtlCol="0" anchor="ctr"/>
-          <a:lstStyle/>
-          <a:p>
-            <a:pPr algn="l" indent="0" marL="0">
-              <a:buNone/>
-            </a:pPr>
-            <a:r>
-              <a:rPr lang="en-US" sz="1200" dirty="0">
-                <a:solidFill>
-                  <a:srgbClr val="1A1A1A"/>
-                </a:solidFill>
-                <a:latin typeface="Pretendard" pitchFamily="34" charset="0"/>
-                <a:ea typeface="Pretendard" pitchFamily="34" charset="-122"/>
-                <a:cs typeface="Pretendard" pitchFamily="34" charset="-120"/>
-              </a:rPr>
-              <a:t>실시간 누락 확인 불가</a:t>
-            </a:r>
-            <a:endParaRPr lang="en-US" sz="1200" dirty="0"/>
-          </a:p>
-        </p:txBody>
-      </p:sp>
-      <p:sp>
-        <p:nvSpPr>
-          <p:cNvPr id="47" name="o170"/>
+          <p:cNvPr id="30" name="o153"/>
           <p:cNvSpPr/>
           <p:nvPr/>
         </p:nvSpPr>
         <p:spPr>
           <a:xfrm>
-            <a:off x="609600" y="5848350"/>
-            <a:ext cx="6324600" cy="0"/>
+            <a:off x="6096000" y="4914900"/>
+            <a:ext cx="0" cy="266700"/>
           </a:xfrm>
           <a:prstGeom prst="line">
             <a:avLst/>
           </a:prstGeom>
           <a:noFill/>
-          <a:ln w="9525">
+          <a:ln w="12700">
             <a:solidFill>
-              <a:srgbClr val="D6DAD8"/>
+              <a:srgbClr val="5B636E"/>
             </a:solidFill>
             <a:prstDash val="solid"/>
           </a:ln>
@@ -16433,22 +15753,22 @@
       </p:sp>
       <p:sp>
         <p:nvSpPr>
-          <p:cNvPr id="48" name="o171"/>
+          <p:cNvPr id="31" name="o154"/>
           <p:cNvSpPr/>
           <p:nvPr/>
         </p:nvSpPr>
         <p:spPr>
           <a:xfrm>
-            <a:off x="609600" y="4229100"/>
-            <a:ext cx="6324600" cy="0"/>
+            <a:off x="9814560" y="4914900"/>
+            <a:ext cx="0" cy="266700"/>
           </a:xfrm>
           <a:prstGeom prst="line">
             <a:avLst/>
           </a:prstGeom>
           <a:noFill/>
-          <a:ln w="9525">
+          <a:ln w="12700">
             <a:solidFill>
-              <a:srgbClr val="D6DAD8"/>
+              <a:srgbClr val="5B636E"/>
             </a:solidFill>
             <a:prstDash val="solid"/>
           </a:ln>
@@ -16456,14 +15776,14 @@
       </p:sp>
       <p:sp>
         <p:nvSpPr>
-          <p:cNvPr id="49" name="o172"/>
+          <p:cNvPr id="32" name="o155"/>
           <p:cNvSpPr/>
           <p:nvPr/>
         </p:nvSpPr>
         <p:spPr>
           <a:xfrm>
-            <a:off x="7117080" y="4229100"/>
-            <a:ext cx="4465320" cy="1619250"/>
+            <a:off x="609600" y="5181600"/>
+            <a:ext cx="10972800" cy="762000"/>
           </a:xfrm>
           <a:prstGeom prst="rect">
             <a:avLst/>
@@ -16476,14 +15796,14 @@
       </p:sp>
       <p:sp>
         <p:nvSpPr>
-          <p:cNvPr id="50" name="o173"/>
+          <p:cNvPr id="33" name="o156"/>
           <p:cNvSpPr/>
           <p:nvPr/>
         </p:nvSpPr>
         <p:spPr>
           <a:xfrm>
-            <a:off x="7117080" y="4229100"/>
-            <a:ext cx="91440" cy="1619250"/>
+            <a:off x="609600" y="5181600"/>
+            <a:ext cx="91440" cy="762000"/>
           </a:xfrm>
           <a:prstGeom prst="rect">
             <a:avLst/>
@@ -16496,14 +15816,14 @@
       </p:sp>
       <p:sp>
         <p:nvSpPr>
-          <p:cNvPr id="51" name="o174"/>
-          <p:cNvSpPr txBox="1"/>
-          <p:nvPr/>
-        </p:nvSpPr>
-        <p:spPr>
-          <a:xfrm>
-            <a:off x="7351395" y="4371975"/>
-            <a:ext cx="4088130" cy="1333500"/>
+          <p:cNvPr id="34" name="o157"/>
+          <p:cNvSpPr txBox="1"/>
+          <p:nvPr/>
+        </p:nvSpPr>
+        <p:spPr>
+          <a:xfrm>
+            <a:off x="952500" y="5181600"/>
+            <a:ext cx="10287000" cy="762000"/>
           </a:xfrm>
           <a:prstGeom prst="rect">
             <a:avLst/>
@@ -16516,13 +15836,10 @@
           <a:lstStyle/>
           <a:p>
             <a:pPr indent="0" marL="0">
-              <a:lnSpc>
-                <a:spcPct val="130000"/>
-              </a:lnSpc>
-              <a:buNone/>
-            </a:pPr>
-            <a:r>
-              <a:rPr lang="en-US" sz="1400" b="1" dirty="0">
+              <a:buNone/>
+            </a:pPr>
+            <a:r>
+              <a:rPr lang="en-US" sz="2000" b="1" dirty="0">
                 <a:solidFill>
                   <a:srgbClr val="1A1A1A"/>
                 </a:solidFill>
@@ -16530,29 +15847,9 @@
                 <a:ea typeface="Pretendard" pitchFamily="34" charset="-122"/>
                 <a:cs typeface="Pretendard" pitchFamily="34" charset="-120"/>
               </a:rPr>
-              <a:t>디지털 → 종이 → 디지털로 매체가 세 번 바뀌는 구조가 누락과 대기의 공통 원인이었다.</a:t>
-            </a:r>
-            <a:endParaRPr lang="en-US" sz="1400" dirty="0"/>
-          </a:p>
-          <a:p>
-            <a:pPr indent="0" marL="0">
-              <a:lnSpc>
-                <a:spcPct val="130000"/>
-              </a:lnSpc>
-              <a:buNone/>
-            </a:pPr>
-            <a:r>
-              <a:rPr lang="en-US" sz="1400" b="1" dirty="0">
-                <a:solidFill>
-                  <a:srgbClr val="1A1A1A"/>
-                </a:solidFill>
-                <a:latin typeface="Pretendard" pitchFamily="34" charset="0"/>
-                <a:ea typeface="Pretendard" pitchFamily="34" charset="-122"/>
-                <a:cs typeface="Pretendard" pitchFamily="34" charset="-120"/>
-              </a:rPr>
-              <a:t>그래서 모바일 기반 통합 체계를 목표로 잡았다.</a:t>
-            </a:r>
-            <a:endParaRPr lang="en-US" sz="1400" dirty="0"/>
+              <a:t>→  모바일 기반 통합 디지털 안전보건 체계가 필요했다</a:t>
+            </a:r>
+            <a:endParaRPr lang="en-US" sz="2000" dirty="0"/>
           </a:p>
         </p:txBody>
       </p:sp>
@@ -16583,7 +15880,7 @@
       </p:grpSpPr>
       <p:sp>
         <p:nvSpPr>
-          <p:cNvPr id="2" name="o175"/>
+          <p:cNvPr id="2" name="o158"/>
           <p:cNvSpPr txBox="1"/>
           <p:nvPr/>
         </p:nvSpPr>
@@ -16622,7 +15919,7 @@
       </p:sp>
       <p:sp>
         <p:nvSpPr>
-          <p:cNvPr id="3" name="o176"/>
+          <p:cNvPr id="3" name="o159"/>
           <p:cNvSpPr txBox="1"/>
           <p:nvPr/>
         </p:nvSpPr>
@@ -16656,7 +15953,7 @@
                 <a:ea typeface="Pretendard" pitchFamily="34" charset="-122"/>
                 <a:cs typeface="Pretendard" pitchFamily="34" charset="-120"/>
               </a:rPr>
-              <a:t>행정시간의 78%가 이동 · 대기였고, 그 사이 신규 입사자 교육 6건 중 1건이 누락됐다</a:t>
+              <a:t>행정시간의 78%는 이동 · 대기였고, 교육 6건 중 1건은 누락됐다</a:t>
             </a:r>
             <a:endParaRPr lang="en-US" sz="2800" dirty="0"/>
           </a:p>
@@ -16664,7 +15961,7 @@
       </p:sp>
       <p:sp>
         <p:nvSpPr>
-          <p:cNvPr id="4" name="o177"/>
+          <p:cNvPr id="4" name="o160"/>
           <p:cNvSpPr txBox="1"/>
           <p:nvPr/>
         </p:nvSpPr>
@@ -16703,7 +16000,7 @@
       </p:sp>
       <p:sp>
         <p:nvSpPr>
-          <p:cNvPr id="5" name="o178"/>
+          <p:cNvPr id="5" name="o161"/>
           <p:cNvSpPr/>
           <p:nvPr/>
         </p:nvSpPr>
@@ -16726,7 +16023,7 @@
       </p:sp>
       <p:sp>
         <p:nvSpPr>
-          <p:cNvPr id="6" name="o179"/>
+          <p:cNvPr id="6" name="o162"/>
           <p:cNvSpPr txBox="1"/>
           <p:nvPr/>
         </p:nvSpPr>
@@ -16765,7 +16062,7 @@
       </p:sp>
       <p:sp>
         <p:nvSpPr>
-          <p:cNvPr id="7" name="o180"/>
+          <p:cNvPr id="7" name="o163"/>
           <p:cNvSpPr txBox="1"/>
           <p:nvPr/>
         </p:nvSpPr>
@@ -16804,7 +16101,7 @@
       </p:sp>
       <p:sp>
         <p:nvSpPr>
-          <p:cNvPr id="8" name="o181"/>
+          <p:cNvPr id="8" name="o164"/>
           <p:cNvSpPr txBox="1"/>
           <p:nvPr/>
         </p:nvSpPr>
@@ -16843,7 +16140,7 @@
       </p:sp>
       <p:sp>
         <p:nvSpPr>
-          <p:cNvPr id="9" name="o182"/>
+          <p:cNvPr id="9" name="o165"/>
           <p:cNvSpPr txBox="1"/>
           <p:nvPr/>
         </p:nvSpPr>
@@ -16882,7 +16179,7 @@
       </p:sp>
       <p:graphicFrame>
         <p:nvGraphicFramePr>
-          <p:cNvPr id="10" name="o183" descr=""/>
+          <p:cNvPr id="10" name="o166" descr=""/>
           <p:cNvGraphicFramePr/>
           <p:nvPr/>
         </p:nvGraphicFramePr>
@@ -16898,7 +16195,7 @@
       </p:graphicFrame>
       <p:sp>
         <p:nvSpPr>
-          <p:cNvPr id="11" name="o184"/>
+          <p:cNvPr id="11" name="o167"/>
           <p:cNvSpPr txBox="1"/>
           <p:nvPr/>
         </p:nvSpPr>
@@ -16937,7 +16234,7 @@
       </p:sp>
       <p:sp>
         <p:nvSpPr>
-          <p:cNvPr id="12" name="o185"/>
+          <p:cNvPr id="12" name="o168"/>
           <p:cNvSpPr txBox="1"/>
           <p:nvPr/>
         </p:nvSpPr>
@@ -16976,7 +16273,7 @@
       </p:sp>
       <p:sp>
         <p:nvSpPr>
-          <p:cNvPr id="13" name="o186"/>
+          <p:cNvPr id="13" name="o169"/>
           <p:cNvSpPr/>
           <p:nvPr/>
         </p:nvSpPr>
@@ -16996,7 +16293,7 @@
       </p:sp>
       <p:sp>
         <p:nvSpPr>
-          <p:cNvPr id="14" name="o187"/>
+          <p:cNvPr id="14" name="o170"/>
           <p:cNvSpPr txBox="1"/>
           <p:nvPr/>
         </p:nvSpPr>
@@ -17035,7 +16332,7 @@
       </p:sp>
       <p:sp>
         <p:nvSpPr>
-          <p:cNvPr id="15" name="o188"/>
+          <p:cNvPr id="15" name="o171"/>
           <p:cNvSpPr txBox="1"/>
           <p:nvPr/>
         </p:nvSpPr>
@@ -17074,7 +16371,7 @@
       </p:sp>
       <p:sp>
         <p:nvSpPr>
-          <p:cNvPr id="16" name="o189"/>
+          <p:cNvPr id="16" name="o172"/>
           <p:cNvSpPr txBox="1"/>
           <p:nvPr/>
         </p:nvSpPr>
@@ -17113,7 +16410,7 @@
       </p:sp>
       <p:sp>
         <p:nvSpPr>
-          <p:cNvPr id="17" name="o190"/>
+          <p:cNvPr id="17" name="o173"/>
           <p:cNvSpPr txBox="1"/>
           <p:nvPr/>
         </p:nvSpPr>
@@ -17152,7 +16449,7 @@
       </p:sp>
       <p:sp>
         <p:nvSpPr>
-          <p:cNvPr id="18" name="o191"/>
+          <p:cNvPr id="18" name="o174"/>
           <p:cNvSpPr txBox="1"/>
           <p:nvPr/>
         </p:nvSpPr>
@@ -17191,7 +16488,7 @@
       </p:sp>
       <p:sp>
         <p:nvSpPr>
-          <p:cNvPr id="19" name="o192"/>
+          <p:cNvPr id="19" name="o175"/>
           <p:cNvSpPr/>
           <p:nvPr/>
         </p:nvSpPr>
@@ -17214,7 +16511,7 @@
       </p:sp>
       <p:sp>
         <p:nvSpPr>
-          <p:cNvPr id="20" name="o193"/>
+          <p:cNvPr id="20" name="o176"/>
           <p:cNvSpPr txBox="1"/>
           <p:nvPr/>
         </p:nvSpPr>
@@ -17253,7 +16550,7 @@
       </p:sp>
       <p:sp>
         <p:nvSpPr>
-          <p:cNvPr id="21" name="o194"/>
+          <p:cNvPr id="21" name="o177"/>
           <p:cNvSpPr txBox="1"/>
           <p:nvPr/>
         </p:nvSpPr>
@@ -17292,7 +16589,7 @@
       </p:sp>
       <p:sp>
         <p:nvSpPr>
-          <p:cNvPr id="22" name="o195"/>
+          <p:cNvPr id="22" name="o178"/>
           <p:cNvSpPr txBox="1"/>
           <p:nvPr/>
         </p:nvSpPr>
@@ -17331,7 +16628,7 @@
       </p:sp>
       <p:sp>
         <p:nvSpPr>
-          <p:cNvPr id="23" name="o196"/>
+          <p:cNvPr id="23" name="o179"/>
           <p:cNvSpPr txBox="1"/>
           <p:nvPr/>
         </p:nvSpPr>
@@ -17370,7 +16667,7 @@
       </p:sp>
       <p:sp>
         <p:nvSpPr>
-          <p:cNvPr id="24" name="o197"/>
+          <p:cNvPr id="24" name="o180"/>
           <p:cNvSpPr txBox="1"/>
           <p:nvPr/>
         </p:nvSpPr>
@@ -17409,7 +16706,7 @@
       </p:sp>
       <p:sp>
         <p:nvSpPr>
-          <p:cNvPr id="25" name="o198"/>
+          <p:cNvPr id="25" name="o181"/>
           <p:cNvSpPr/>
           <p:nvPr/>
         </p:nvSpPr>
@@ -17432,7 +16729,7 @@
       </p:sp>
       <p:sp>
         <p:nvSpPr>
-          <p:cNvPr id="26" name="o199"/>
+          <p:cNvPr id="26" name="o182"/>
           <p:cNvSpPr txBox="1"/>
           <p:nvPr/>
         </p:nvSpPr>
@@ -17471,7 +16768,7 @@
       </p:sp>
       <p:sp>
         <p:nvSpPr>
-          <p:cNvPr id="27" name="o200"/>
+          <p:cNvPr id="27" name="o183"/>
           <p:cNvSpPr txBox="1"/>
           <p:nvPr/>
         </p:nvSpPr>
@@ -17510,7 +16807,7 @@
       </p:sp>
       <p:sp>
         <p:nvSpPr>
-          <p:cNvPr id="28" name="o201"/>
+          <p:cNvPr id="28" name="o184"/>
           <p:cNvSpPr txBox="1"/>
           <p:nvPr/>
         </p:nvSpPr>
@@ -17549,7 +16846,7 @@
       </p:sp>
       <p:sp>
         <p:nvSpPr>
-          <p:cNvPr id="29" name="o202"/>
+          <p:cNvPr id="29" name="o185"/>
           <p:cNvSpPr txBox="1"/>
           <p:nvPr/>
         </p:nvSpPr>
@@ -17588,7 +16885,7 @@
       </p:sp>
       <p:sp>
         <p:nvSpPr>
-          <p:cNvPr id="30" name="o203"/>
+          <p:cNvPr id="30" name="o186"/>
           <p:cNvSpPr txBox="1"/>
           <p:nvPr/>
         </p:nvSpPr>
@@ -17627,7 +16924,7 @@
       </p:sp>
       <p:sp>
         <p:nvSpPr>
-          <p:cNvPr id="31" name="o204"/>
+          <p:cNvPr id="31" name="o187"/>
           <p:cNvSpPr/>
           <p:nvPr/>
         </p:nvSpPr>
@@ -17650,7 +16947,7 @@
       </p:sp>
       <p:sp>
         <p:nvSpPr>
-          <p:cNvPr id="32" name="o205"/>
+          <p:cNvPr id="32" name="o188"/>
           <p:cNvSpPr/>
           <p:nvPr/>
         </p:nvSpPr>
@@ -17673,7 +16970,7 @@
       </p:sp>
       <p:sp>
         <p:nvSpPr>
-          <p:cNvPr id="33" name="o206"/>
+          <p:cNvPr id="33" name="o189"/>
           <p:cNvSpPr txBox="1"/>
           <p:nvPr/>
         </p:nvSpPr>
@@ -17712,7 +17009,7 @@
       </p:sp>
       <p:sp>
         <p:nvSpPr>
-          <p:cNvPr id="34" name="o207"/>
+          <p:cNvPr id="34" name="o190"/>
           <p:cNvSpPr/>
           <p:nvPr/>
         </p:nvSpPr>
@@ -17732,7 +17029,7 @@
       </p:sp>
       <p:sp>
         <p:nvSpPr>
-          <p:cNvPr id="35" name="o208"/>
+          <p:cNvPr id="35" name="o191"/>
           <p:cNvSpPr txBox="1"/>
           <p:nvPr/>
         </p:nvSpPr>
@@ -17771,7 +17068,7 @@
       </p:sp>
       <p:sp>
         <p:nvSpPr>
-          <p:cNvPr id="36" name="o209"/>
+          <p:cNvPr id="36" name="o192"/>
           <p:cNvSpPr txBox="1"/>
           <p:nvPr/>
         </p:nvSpPr>
@@ -17810,7 +17107,7 @@
       </p:sp>
       <p:sp>
         <p:nvSpPr>
-          <p:cNvPr id="37" name="o210"/>
+          <p:cNvPr id="37" name="o193"/>
           <p:cNvSpPr/>
           <p:nvPr/>
         </p:nvSpPr>
@@ -17833,7 +17130,7 @@
       </p:sp>
       <p:sp>
         <p:nvSpPr>
-          <p:cNvPr id="38" name="o211"/>
+          <p:cNvPr id="38" name="o194"/>
           <p:cNvSpPr/>
           <p:nvPr/>
         </p:nvSpPr>
@@ -17853,7 +17150,7 @@
       </p:sp>
       <p:sp>
         <p:nvSpPr>
-          <p:cNvPr id="39" name="o212"/>
+          <p:cNvPr id="39" name="o195"/>
           <p:cNvSpPr txBox="1"/>
           <p:nvPr/>
         </p:nvSpPr>
@@ -17892,7 +17189,7 @@
       </p:sp>
       <p:sp>
         <p:nvSpPr>
-          <p:cNvPr id="40" name="o213"/>
+          <p:cNvPr id="40" name="o196"/>
           <p:cNvSpPr txBox="1"/>
           <p:nvPr/>
         </p:nvSpPr>
@@ -17931,7 +17228,7 @@
       </p:sp>
       <p:sp>
         <p:nvSpPr>
-          <p:cNvPr id="41" name="o214"/>
+          <p:cNvPr id="41" name="o197"/>
           <p:cNvSpPr/>
           <p:nvPr/>
         </p:nvSpPr>
@@ -17954,7 +17251,7 @@
       </p:sp>
       <p:sp>
         <p:nvSpPr>
-          <p:cNvPr id="42" name="o215"/>
+          <p:cNvPr id="42" name="o198"/>
           <p:cNvSpPr/>
           <p:nvPr/>
         </p:nvSpPr>
@@ -17974,7 +17271,7 @@
       </p:sp>
       <p:sp>
         <p:nvSpPr>
-          <p:cNvPr id="43" name="o216"/>
+          <p:cNvPr id="43" name="o199"/>
           <p:cNvSpPr txBox="1"/>
           <p:nvPr/>
         </p:nvSpPr>
@@ -18013,7 +17310,7 @@
       </p:sp>
       <p:sp>
         <p:nvSpPr>
-          <p:cNvPr id="44" name="o217"/>
+          <p:cNvPr id="44" name="o200"/>
           <p:cNvSpPr txBox="1"/>
           <p:nvPr/>
         </p:nvSpPr>
@@ -18052,7 +17349,7 @@
       </p:sp>
       <p:sp>
         <p:nvSpPr>
-          <p:cNvPr id="45" name="o218"/>
+          <p:cNvPr id="45" name="o201"/>
           <p:cNvSpPr/>
           <p:nvPr/>
         </p:nvSpPr>
@@ -18075,7 +17372,7 @@
       </p:sp>
       <p:sp>
         <p:nvSpPr>
-          <p:cNvPr id="46" name="o219"/>
+          <p:cNvPr id="46" name="o202"/>
           <p:cNvSpPr/>
           <p:nvPr/>
         </p:nvSpPr>
@@ -18095,7 +17392,7 @@
       </p:sp>
       <p:sp>
         <p:nvSpPr>
-          <p:cNvPr id="47" name="o220"/>
+          <p:cNvPr id="47" name="o203"/>
           <p:cNvSpPr txBox="1"/>
           <p:nvPr/>
         </p:nvSpPr>
@@ -18134,7 +17431,7 @@
       </p:sp>
       <p:sp>
         <p:nvSpPr>
-          <p:cNvPr id="48" name="o221"/>
+          <p:cNvPr id="48" name="o204"/>
           <p:cNvSpPr txBox="1"/>
           <p:nvPr/>
         </p:nvSpPr>
@@ -18173,7 +17470,7 @@
       </p:sp>
       <p:sp>
         <p:nvSpPr>
-          <p:cNvPr id="49" name="o222"/>
+          <p:cNvPr id="49" name="o205"/>
           <p:cNvSpPr/>
           <p:nvPr/>
         </p:nvSpPr>
@@ -18196,7 +17493,7 @@
       </p:sp>
       <p:sp>
         <p:nvSpPr>
-          <p:cNvPr id="50" name="o223"/>
+          <p:cNvPr id="50" name="o206"/>
           <p:cNvSpPr/>
           <p:nvPr/>
         </p:nvSpPr>
@@ -18216,7 +17513,7 @@
       </p:sp>
       <p:sp>
         <p:nvSpPr>
-          <p:cNvPr id="51" name="o224"/>
+          <p:cNvPr id="51" name="o207"/>
           <p:cNvSpPr txBox="1"/>
           <p:nvPr/>
         </p:nvSpPr>
@@ -18255,7 +17552,7 @@
       </p:sp>
       <p:sp>
         <p:nvSpPr>
-          <p:cNvPr id="52" name="o225"/>
+          <p:cNvPr id="52" name="o208"/>
           <p:cNvSpPr txBox="1"/>
           <p:nvPr/>
         </p:nvSpPr>
@@ -18294,7 +17591,7 @@
       </p:sp>
       <p:sp>
         <p:nvSpPr>
-          <p:cNvPr id="53" name="o226"/>
+          <p:cNvPr id="53" name="o209"/>
           <p:cNvSpPr/>
           <p:nvPr/>
         </p:nvSpPr>
@@ -18317,7 +17614,7 @@
       </p:sp>
       <p:sp>
         <p:nvSpPr>
-          <p:cNvPr id="54" name="o227"/>
+          <p:cNvPr id="54" name="o210"/>
           <p:cNvSpPr/>
           <p:nvPr/>
         </p:nvSpPr>
@@ -18337,7 +17634,7 @@
       </p:sp>
       <p:sp>
         <p:nvSpPr>
-          <p:cNvPr id="55" name="o228"/>
+          <p:cNvPr id="55" name="o211"/>
           <p:cNvSpPr txBox="1"/>
           <p:nvPr/>
         </p:nvSpPr>
@@ -18376,7 +17673,7 @@
       </p:sp>
       <p:sp>
         <p:nvSpPr>
-          <p:cNvPr id="56" name="o229"/>
+          <p:cNvPr id="56" name="o212"/>
           <p:cNvSpPr txBox="1"/>
           <p:nvPr/>
         </p:nvSpPr>
@@ -18415,7 +17712,7 @@
       </p:sp>
       <p:sp>
         <p:nvSpPr>
-          <p:cNvPr id="57" name="o230"/>
+          <p:cNvPr id="57" name="o213"/>
           <p:cNvSpPr/>
           <p:nvPr/>
         </p:nvSpPr>
@@ -18438,7 +17735,7 @@
       </p:sp>
       <p:sp>
         <p:nvSpPr>
-          <p:cNvPr id="58" name="o231"/>
+          <p:cNvPr id="58" name="o214"/>
           <p:cNvSpPr/>
           <p:nvPr/>
         </p:nvSpPr>
@@ -18458,7 +17755,7 @@
       </p:sp>
       <p:sp>
         <p:nvSpPr>
-          <p:cNvPr id="59" name="o232"/>
+          <p:cNvPr id="59" name="o215"/>
           <p:cNvSpPr txBox="1"/>
           <p:nvPr/>
         </p:nvSpPr>
@@ -18497,7 +17794,7 @@
       </p:sp>
       <p:sp>
         <p:nvSpPr>
-          <p:cNvPr id="60" name="o233"/>
+          <p:cNvPr id="60" name="o216"/>
           <p:cNvSpPr txBox="1"/>
           <p:nvPr/>
         </p:nvSpPr>
@@ -18536,7 +17833,7 @@
       </p:sp>
       <p:sp>
         <p:nvSpPr>
-          <p:cNvPr id="61" name="o234"/>
+          <p:cNvPr id="61" name="o217"/>
           <p:cNvSpPr/>
           <p:nvPr/>
         </p:nvSpPr>
@@ -18556,7 +17853,7 @@
       </p:sp>
       <p:sp>
         <p:nvSpPr>
-          <p:cNvPr id="62" name="o235"/>
+          <p:cNvPr id="62" name="o218"/>
           <p:cNvSpPr txBox="1"/>
           <p:nvPr/>
         </p:nvSpPr>
@@ -18595,7 +17892,7 @@
       </p:sp>
       <p:sp>
         <p:nvSpPr>
-          <p:cNvPr id="63" name="o236"/>
+          <p:cNvPr id="63" name="o219"/>
           <p:cNvSpPr txBox="1"/>
           <p:nvPr/>
         </p:nvSpPr>
@@ -18634,7 +17931,7 @@
       </p:sp>
       <p:sp>
         <p:nvSpPr>
-          <p:cNvPr id="64" name="o237"/>
+          <p:cNvPr id="64" name="o220"/>
           <p:cNvSpPr/>
           <p:nvPr/>
         </p:nvSpPr>
@@ -18657,7 +17954,7 @@
       </p:sp>
       <p:sp>
         <p:nvSpPr>
-          <p:cNvPr id="65" name="o238"/>
+          <p:cNvPr id="65" name="o221"/>
           <p:cNvSpPr txBox="1"/>
           <p:nvPr/>
         </p:nvSpPr>
@@ -18696,7 +17993,7 @@
       </p:sp>
       <p:sp>
         <p:nvSpPr>
-          <p:cNvPr id="66" name="o239"/>
+          <p:cNvPr id="66" name="o222"/>
           <p:cNvSpPr/>
           <p:nvPr/>
         </p:nvSpPr>
@@ -18721,7 +18018,7 @@
       </p:sp>
       <p:sp>
         <p:nvSpPr>
-          <p:cNvPr id="67" name="o240"/>
+          <p:cNvPr id="67" name="o223"/>
           <p:cNvSpPr txBox="1"/>
           <p:nvPr/>
         </p:nvSpPr>
@@ -18760,7 +18057,7 @@
       </p:sp>
       <p:sp>
         <p:nvSpPr>
-          <p:cNvPr id="68" name="o241"/>
+          <p:cNvPr id="68" name="o224"/>
           <p:cNvSpPr txBox="1"/>
           <p:nvPr/>
         </p:nvSpPr>
@@ -18799,7 +18096,7 @@
       </p:sp>
       <p:sp>
         <p:nvSpPr>
-          <p:cNvPr id="69" name="o242"/>
+          <p:cNvPr id="69" name="o225"/>
           <p:cNvSpPr txBox="1"/>
           <p:nvPr/>
         </p:nvSpPr>
@@ -18838,7 +18135,7 @@
       </p:sp>
       <p:sp>
         <p:nvSpPr>
-          <p:cNvPr id="70" name="o243"/>
+          <p:cNvPr id="70" name="o226"/>
           <p:cNvSpPr/>
           <p:nvPr/>
         </p:nvSpPr>
@@ -18863,7 +18160,7 @@
       </p:sp>
       <p:sp>
         <p:nvSpPr>
-          <p:cNvPr id="71" name="o244"/>
+          <p:cNvPr id="71" name="o227"/>
           <p:cNvSpPr txBox="1"/>
           <p:nvPr/>
         </p:nvSpPr>
@@ -18902,7 +18199,7 @@
       </p:sp>
       <p:sp>
         <p:nvSpPr>
-          <p:cNvPr id="72" name="o245"/>
+          <p:cNvPr id="72" name="o228"/>
           <p:cNvSpPr txBox="1"/>
           <p:nvPr/>
         </p:nvSpPr>
@@ -18941,7 +18238,7 @@
       </p:sp>
       <p:sp>
         <p:nvSpPr>
-          <p:cNvPr id="73" name="o246"/>
+          <p:cNvPr id="73" name="o229"/>
           <p:cNvSpPr txBox="1"/>
           <p:nvPr/>
         </p:nvSpPr>
@@ -18980,7 +18277,7 @@
       </p:sp>
       <p:sp>
         <p:nvSpPr>
-          <p:cNvPr id="74" name="o247"/>
+          <p:cNvPr id="74" name="o230"/>
           <p:cNvSpPr/>
           <p:nvPr/>
         </p:nvSpPr>
@@ -19005,7 +18302,7 @@
       </p:sp>
       <p:sp>
         <p:nvSpPr>
-          <p:cNvPr id="75" name="o248"/>
+          <p:cNvPr id="75" name="o231"/>
           <p:cNvSpPr txBox="1"/>
           <p:nvPr/>
         </p:nvSpPr>
@@ -19044,7 +18341,7 @@
       </p:sp>
       <p:sp>
         <p:nvSpPr>
-          <p:cNvPr id="76" name="o249"/>
+          <p:cNvPr id="76" name="o232"/>
           <p:cNvSpPr txBox="1"/>
           <p:nvPr/>
         </p:nvSpPr>
@@ -19083,7 +18380,7 @@
       </p:sp>
       <p:sp>
         <p:nvSpPr>
-          <p:cNvPr id="77" name="o250"/>
+          <p:cNvPr id="77" name="o233"/>
           <p:cNvSpPr txBox="1"/>
           <p:nvPr/>
         </p:nvSpPr>
@@ -19122,7 +18419,7 @@
       </p:sp>
       <p:sp>
         <p:nvSpPr>
-          <p:cNvPr id="78" name="o251"/>
+          <p:cNvPr id="78" name="o234"/>
           <p:cNvSpPr/>
           <p:nvPr/>
         </p:nvSpPr>
@@ -19142,7 +18439,7 @@
       </p:sp>
       <p:sp>
         <p:nvSpPr>
-          <p:cNvPr id="79" name="o252"/>
+          <p:cNvPr id="79" name="o235"/>
           <p:cNvSpPr/>
           <p:nvPr/>
         </p:nvSpPr>
@@ -19162,7 +18459,7 @@
       </p:sp>
       <p:sp>
         <p:nvSpPr>
-          <p:cNvPr id="80" name="o253"/>
+          <p:cNvPr id="80" name="o236"/>
           <p:cNvSpPr txBox="1"/>
           <p:nvPr/>
         </p:nvSpPr>
@@ -19229,7 +18526,7 @@
       </p:grpSpPr>
       <p:sp>
         <p:nvSpPr>
-          <p:cNvPr id="2" name="o254"/>
+          <p:cNvPr id="2" name="o237"/>
           <p:cNvSpPr txBox="1"/>
           <p:nvPr/>
         </p:nvSpPr>
@@ -19268,7 +18565,7 @@
       </p:sp>
       <p:sp>
         <p:nvSpPr>
-          <p:cNvPr id="3" name="o255"/>
+          <p:cNvPr id="3" name="o238"/>
           <p:cNvSpPr txBox="1"/>
           <p:nvPr/>
         </p:nvSpPr>
@@ -19310,7 +18607,7 @@
       </p:sp>
       <p:sp>
         <p:nvSpPr>
-          <p:cNvPr id="4" name="o256"/>
+          <p:cNvPr id="4" name="o239"/>
           <p:cNvSpPr txBox="1"/>
           <p:nvPr/>
         </p:nvSpPr>
@@ -19349,7 +18646,7 @@
       </p:sp>
       <p:sp>
         <p:nvSpPr>
-          <p:cNvPr id="5" name="o257"/>
+          <p:cNvPr id="5" name="o240"/>
           <p:cNvSpPr/>
           <p:nvPr/>
         </p:nvSpPr>
@@ -19372,7 +18669,7 @@
       </p:sp>
       <p:sp>
         <p:nvSpPr>
-          <p:cNvPr id="6" name="o258"/>
+          <p:cNvPr id="6" name="o241"/>
           <p:cNvSpPr txBox="1"/>
           <p:nvPr/>
         </p:nvSpPr>
@@ -19411,7 +18708,7 @@
       </p:sp>
       <p:sp>
         <p:nvSpPr>
-          <p:cNvPr id="7" name="o259"/>
+          <p:cNvPr id="7" name="o242"/>
           <p:cNvSpPr txBox="1"/>
           <p:nvPr/>
         </p:nvSpPr>
@@ -19450,7 +18747,7 @@
       </p:sp>
       <p:sp>
         <p:nvSpPr>
-          <p:cNvPr id="8" name="o260"/>
+          <p:cNvPr id="8" name="o243"/>
           <p:cNvSpPr txBox="1"/>
           <p:nvPr/>
         </p:nvSpPr>
@@ -19489,7 +18786,7 @@
       </p:sp>
       <p:sp>
         <p:nvSpPr>
-          <p:cNvPr id="9" name="o261"/>
+          <p:cNvPr id="9" name="o244"/>
           <p:cNvSpPr/>
           <p:nvPr/>
         </p:nvSpPr>
@@ -19509,7 +18806,7 @@
       </p:sp>
       <p:sp>
         <p:nvSpPr>
-          <p:cNvPr id="10" name="o262"/>
+          <p:cNvPr id="10" name="o245"/>
           <p:cNvSpPr txBox="1"/>
           <p:nvPr/>
         </p:nvSpPr>
@@ -19548,7 +18845,7 @@
       </p:sp>
       <p:sp>
         <p:nvSpPr>
-          <p:cNvPr id="11" name="o263"/>
+          <p:cNvPr id="11" name="o246"/>
           <p:cNvSpPr txBox="1"/>
           <p:nvPr/>
         </p:nvSpPr>
@@ -19587,7 +18884,7 @@
       </p:sp>
       <p:sp>
         <p:nvSpPr>
-          <p:cNvPr id="12" name="o264"/>
+          <p:cNvPr id="12" name="o247"/>
           <p:cNvSpPr txBox="1"/>
           <p:nvPr/>
         </p:nvSpPr>
@@ -19626,7 +18923,7 @@
       </p:sp>
       <p:sp>
         <p:nvSpPr>
-          <p:cNvPr id="13" name="o265"/>
+          <p:cNvPr id="13" name="o248"/>
           <p:cNvSpPr txBox="1"/>
           <p:nvPr/>
         </p:nvSpPr>
@@ -19665,7 +18962,7 @@
       </p:sp>
       <p:sp>
         <p:nvSpPr>
-          <p:cNvPr id="14" name="o266"/>
+          <p:cNvPr id="14" name="o249"/>
           <p:cNvSpPr txBox="1"/>
           <p:nvPr/>
         </p:nvSpPr>
@@ -19704,7 +19001,7 @@
       </p:sp>
       <p:sp>
         <p:nvSpPr>
-          <p:cNvPr id="15" name="o267"/>
+          <p:cNvPr id="15" name="o250"/>
           <p:cNvSpPr/>
           <p:nvPr/>
         </p:nvSpPr>
@@ -19727,7 +19024,7 @@
       </p:sp>
       <p:sp>
         <p:nvSpPr>
-          <p:cNvPr id="16" name="o268"/>
+          <p:cNvPr id="16" name="o251"/>
           <p:cNvSpPr txBox="1"/>
           <p:nvPr/>
         </p:nvSpPr>
@@ -19766,7 +19063,7 @@
       </p:sp>
       <p:sp>
         <p:nvSpPr>
-          <p:cNvPr id="17" name="o269"/>
+          <p:cNvPr id="17" name="o252"/>
           <p:cNvSpPr txBox="1"/>
           <p:nvPr/>
         </p:nvSpPr>
@@ -19805,7 +19102,7 @@
       </p:sp>
       <p:sp>
         <p:nvSpPr>
-          <p:cNvPr id="18" name="o270"/>
+          <p:cNvPr id="18" name="o253"/>
           <p:cNvSpPr txBox="1"/>
           <p:nvPr/>
         </p:nvSpPr>
@@ -19844,7 +19141,7 @@
       </p:sp>
       <p:sp>
         <p:nvSpPr>
-          <p:cNvPr id="19" name="o271"/>
+          <p:cNvPr id="19" name="o254"/>
           <p:cNvSpPr txBox="1"/>
           <p:nvPr/>
         </p:nvSpPr>
@@ -19883,7 +19180,7 @@
       </p:sp>
       <p:sp>
         <p:nvSpPr>
-          <p:cNvPr id="20" name="o272"/>
+          <p:cNvPr id="20" name="o255"/>
           <p:cNvSpPr txBox="1"/>
           <p:nvPr/>
         </p:nvSpPr>
@@ -19922,7 +19219,7 @@
       </p:sp>
       <p:sp>
         <p:nvSpPr>
-          <p:cNvPr id="21" name="o273"/>
+          <p:cNvPr id="21" name="o256"/>
           <p:cNvSpPr/>
           <p:nvPr/>
         </p:nvSpPr>
@@ -19945,7 +19242,7 @@
       </p:sp>
       <p:sp>
         <p:nvSpPr>
-          <p:cNvPr id="22" name="o274"/>
+          <p:cNvPr id="22" name="o257"/>
           <p:cNvSpPr txBox="1"/>
           <p:nvPr/>
         </p:nvSpPr>
@@ -19984,7 +19281,7 @@
       </p:sp>
       <p:sp>
         <p:nvSpPr>
-          <p:cNvPr id="23" name="o275"/>
+          <p:cNvPr id="23" name="o258"/>
           <p:cNvSpPr txBox="1"/>
           <p:nvPr/>
         </p:nvSpPr>
@@ -20023,7 +19320,7 @@
       </p:sp>
       <p:sp>
         <p:nvSpPr>
-          <p:cNvPr id="24" name="o276"/>
+          <p:cNvPr id="24" name="o259"/>
           <p:cNvSpPr txBox="1"/>
           <p:nvPr/>
         </p:nvSpPr>
@@ -20062,7 +19359,7 @@
       </p:sp>
       <p:sp>
         <p:nvSpPr>
-          <p:cNvPr id="25" name="o277"/>
+          <p:cNvPr id="25" name="o260"/>
           <p:cNvSpPr txBox="1"/>
           <p:nvPr/>
         </p:nvSpPr>
@@ -20101,7 +19398,7 @@
       </p:sp>
       <p:sp>
         <p:nvSpPr>
-          <p:cNvPr id="26" name="o278"/>
+          <p:cNvPr id="26" name="o261"/>
           <p:cNvSpPr txBox="1"/>
           <p:nvPr/>
         </p:nvSpPr>
@@ -20140,7 +19437,7 @@
       </p:sp>
       <p:sp>
         <p:nvSpPr>
-          <p:cNvPr id="27" name="o279"/>
+          <p:cNvPr id="27" name="o262"/>
           <p:cNvSpPr/>
           <p:nvPr/>
         </p:nvSpPr>
@@ -20163,7 +19460,7 @@
       </p:sp>
       <p:sp>
         <p:nvSpPr>
-          <p:cNvPr id="28" name="o280"/>
+          <p:cNvPr id="28" name="o263"/>
           <p:cNvSpPr txBox="1"/>
           <p:nvPr/>
         </p:nvSpPr>
@@ -20202,7 +19499,7 @@
       </p:sp>
       <p:sp>
         <p:nvSpPr>
-          <p:cNvPr id="29" name="o281"/>
+          <p:cNvPr id="29" name="o264"/>
           <p:cNvSpPr txBox="1"/>
           <p:nvPr/>
         </p:nvSpPr>
@@ -20241,7 +19538,7 @@
       </p:sp>
       <p:sp>
         <p:nvSpPr>
-          <p:cNvPr id="30" name="o282"/>
+          <p:cNvPr id="30" name="o265"/>
           <p:cNvSpPr txBox="1"/>
           <p:nvPr/>
         </p:nvSpPr>
@@ -20280,7 +19577,7 @@
       </p:sp>
       <p:sp>
         <p:nvSpPr>
-          <p:cNvPr id="31" name="o283"/>
+          <p:cNvPr id="31" name="o266"/>
           <p:cNvSpPr txBox="1"/>
           <p:nvPr/>
         </p:nvSpPr>
@@ -20319,7 +19616,7 @@
       </p:sp>
       <p:sp>
         <p:nvSpPr>
-          <p:cNvPr id="32" name="o284"/>
+          <p:cNvPr id="32" name="o267"/>
           <p:cNvSpPr txBox="1"/>
           <p:nvPr/>
         </p:nvSpPr>
@@ -20358,7 +19655,7 @@
       </p:sp>
       <p:sp>
         <p:nvSpPr>
-          <p:cNvPr id="33" name="o285"/>
+          <p:cNvPr id="33" name="o268"/>
           <p:cNvSpPr/>
           <p:nvPr/>
         </p:nvSpPr>
@@ -20381,7 +19678,7 @@
       </p:sp>
       <p:sp>
         <p:nvSpPr>
-          <p:cNvPr id="34" name="o286"/>
+          <p:cNvPr id="34" name="o269"/>
           <p:cNvSpPr txBox="1"/>
           <p:nvPr/>
         </p:nvSpPr>
@@ -20420,7 +19717,7 @@
       </p:sp>
       <p:sp>
         <p:nvSpPr>
-          <p:cNvPr id="35" name="o287"/>
+          <p:cNvPr id="35" name="o270"/>
           <p:cNvSpPr txBox="1"/>
           <p:nvPr/>
         </p:nvSpPr>
@@ -20459,7 +19756,7 @@
       </p:sp>
       <p:sp>
         <p:nvSpPr>
-          <p:cNvPr id="36" name="o288"/>
+          <p:cNvPr id="36" name="o271"/>
           <p:cNvSpPr txBox="1"/>
           <p:nvPr/>
         </p:nvSpPr>
@@ -20498,7 +19795,7 @@
       </p:sp>
       <p:sp>
         <p:nvSpPr>
-          <p:cNvPr id="37" name="o289"/>
+          <p:cNvPr id="37" name="o272"/>
           <p:cNvSpPr txBox="1"/>
           <p:nvPr/>
         </p:nvSpPr>
@@ -20537,7 +19834,7 @@
       </p:sp>
       <p:sp>
         <p:nvSpPr>
-          <p:cNvPr id="38" name="o290"/>
+          <p:cNvPr id="38" name="o273"/>
           <p:cNvSpPr txBox="1"/>
           <p:nvPr/>
         </p:nvSpPr>
@@ -20576,7 +19873,7 @@
       </p:sp>
       <p:sp>
         <p:nvSpPr>
-          <p:cNvPr id="39" name="o291"/>
+          <p:cNvPr id="39" name="o274"/>
           <p:cNvSpPr/>
           <p:nvPr/>
         </p:nvSpPr>
@@ -20599,7 +19896,7 @@
       </p:sp>
       <p:sp>
         <p:nvSpPr>
-          <p:cNvPr id="40" name="o292"/>
+          <p:cNvPr id="40" name="o275"/>
           <p:cNvSpPr/>
           <p:nvPr/>
         </p:nvSpPr>
@@ -20622,7 +19919,7 @@
       </p:sp>
       <p:sp>
         <p:nvSpPr>
-          <p:cNvPr id="41" name="o293"/>
+          <p:cNvPr id="41" name="o276"/>
           <p:cNvSpPr/>
           <p:nvPr/>
         </p:nvSpPr>
@@ -20647,7 +19944,7 @@
       </p:sp>
       <p:sp>
         <p:nvSpPr>
-          <p:cNvPr id="42" name="o294"/>
+          <p:cNvPr id="42" name="o277"/>
           <p:cNvSpPr txBox="1"/>
           <p:nvPr/>
         </p:nvSpPr>
@@ -20686,7 +19983,7 @@
       </p:sp>
       <p:sp>
         <p:nvSpPr>
-          <p:cNvPr id="43" name="o295"/>
+          <p:cNvPr id="43" name="o278"/>
           <p:cNvSpPr txBox="1"/>
           <p:nvPr/>
         </p:nvSpPr>
@@ -20725,7 +20022,7 @@
       </p:sp>
       <p:sp>
         <p:nvSpPr>
-          <p:cNvPr id="44" name="o296"/>
+          <p:cNvPr id="44" name="o279"/>
           <p:cNvSpPr txBox="1"/>
           <p:nvPr/>
         </p:nvSpPr>
@@ -20764,7 +20061,7 @@
       </p:sp>
       <p:sp>
         <p:nvSpPr>
-          <p:cNvPr id="45" name="o297"/>
+          <p:cNvPr id="45" name="o280"/>
           <p:cNvSpPr/>
           <p:nvPr/>
         </p:nvSpPr>
@@ -20789,7 +20086,7 @@
       </p:sp>
       <p:sp>
         <p:nvSpPr>
-          <p:cNvPr id="46" name="o298"/>
+          <p:cNvPr id="46" name="o281"/>
           <p:cNvSpPr txBox="1"/>
           <p:nvPr/>
         </p:nvSpPr>
@@ -20828,7 +20125,7 @@
       </p:sp>
       <p:sp>
         <p:nvSpPr>
-          <p:cNvPr id="47" name="o299"/>
+          <p:cNvPr id="47" name="o282"/>
           <p:cNvSpPr txBox="1"/>
           <p:nvPr/>
         </p:nvSpPr>
@@ -20867,7 +20164,7 @@
       </p:sp>
       <p:sp>
         <p:nvSpPr>
-          <p:cNvPr id="48" name="o300"/>
+          <p:cNvPr id="48" name="o283"/>
           <p:cNvSpPr txBox="1"/>
           <p:nvPr/>
         </p:nvSpPr>
@@ -20906,7 +20203,7 @@
       </p:sp>
       <p:sp>
         <p:nvSpPr>
-          <p:cNvPr id="49" name="o301"/>
+          <p:cNvPr id="49" name="o284"/>
           <p:cNvSpPr/>
           <p:nvPr/>
         </p:nvSpPr>
@@ -20931,7 +20228,7 @@
       </p:sp>
       <p:sp>
         <p:nvSpPr>
-          <p:cNvPr id="50" name="o302"/>
+          <p:cNvPr id="50" name="o285"/>
           <p:cNvSpPr txBox="1"/>
           <p:nvPr/>
         </p:nvSpPr>
@@ -20970,7 +20267,7 @@
       </p:sp>
       <p:sp>
         <p:nvSpPr>
-          <p:cNvPr id="51" name="o303"/>
+          <p:cNvPr id="51" name="o286"/>
           <p:cNvSpPr txBox="1"/>
           <p:nvPr/>
         </p:nvSpPr>
@@ -21009,7 +20306,7 @@
       </p:sp>
       <p:sp>
         <p:nvSpPr>
-          <p:cNvPr id="52" name="o304"/>
+          <p:cNvPr id="52" name="o287"/>
           <p:cNvSpPr txBox="1"/>
           <p:nvPr/>
         </p:nvSpPr>
@@ -21048,7 +20345,7 @@
       </p:sp>
       <p:sp>
         <p:nvSpPr>
-          <p:cNvPr id="53" name="o305"/>
+          <p:cNvPr id="53" name="o288"/>
           <p:cNvSpPr/>
           <p:nvPr/>
         </p:nvSpPr>
@@ -21068,7 +20365,7 @@
       </p:sp>
       <p:sp>
         <p:nvSpPr>
-          <p:cNvPr id="54" name="o306"/>
+          <p:cNvPr id="54" name="o289"/>
           <p:cNvSpPr/>
           <p:nvPr/>
         </p:nvSpPr>
@@ -21088,7 +20385,7 @@
       </p:sp>
       <p:sp>
         <p:nvSpPr>
-          <p:cNvPr id="55" name="o307"/>
+          <p:cNvPr id="55" name="o290"/>
           <p:cNvSpPr txBox="1"/>
           <p:nvPr/>
         </p:nvSpPr>
@@ -21155,7 +20452,7 @@
       </p:grpSpPr>
       <p:sp>
         <p:nvSpPr>
-          <p:cNvPr id="2" name="o308"/>
+          <p:cNvPr id="2" name="o291"/>
           <p:cNvSpPr txBox="1"/>
           <p:nvPr/>
         </p:nvSpPr>
@@ -21194,7 +20491,7 @@
       </p:sp>
       <p:sp>
         <p:nvSpPr>
-          <p:cNvPr id="3" name="o309"/>
+          <p:cNvPr id="3" name="o292"/>
           <p:cNvSpPr txBox="1"/>
           <p:nvPr/>
         </p:nvSpPr>
@@ -21236,7 +20533,7 @@
       </p:sp>
       <p:sp>
         <p:nvSpPr>
-          <p:cNvPr id="4" name="o310"/>
+          <p:cNvPr id="4" name="o293"/>
           <p:cNvSpPr txBox="1"/>
           <p:nvPr/>
         </p:nvSpPr>
@@ -21275,7 +20572,7 @@
       </p:sp>
       <p:sp>
         <p:nvSpPr>
-          <p:cNvPr id="5" name="o311"/>
+          <p:cNvPr id="5" name="o294"/>
           <p:cNvSpPr/>
           <p:nvPr/>
         </p:nvSpPr>
@@ -21298,7 +20595,7 @@
       </p:sp>
       <p:sp>
         <p:nvSpPr>
-          <p:cNvPr id="6" name="o312"/>
+          <p:cNvPr id="6" name="o295"/>
           <p:cNvSpPr txBox="1"/>
           <p:nvPr/>
         </p:nvSpPr>
@@ -21337,7 +20634,7 @@
       </p:sp>
       <p:sp>
         <p:nvSpPr>
-          <p:cNvPr id="7" name="o313"/>
+          <p:cNvPr id="7" name="o296"/>
           <p:cNvSpPr txBox="1"/>
           <p:nvPr/>
         </p:nvSpPr>
@@ -21376,7 +20673,7 @@
       </p:sp>
       <p:sp>
         <p:nvSpPr>
-          <p:cNvPr id="8" name="o314"/>
+          <p:cNvPr id="8" name="o297"/>
           <p:cNvSpPr txBox="1"/>
           <p:nvPr/>
         </p:nvSpPr>
@@ -21415,7 +20712,7 @@
       </p:sp>
       <p:sp>
         <p:nvSpPr>
-          <p:cNvPr id="9" name="o315"/>
+          <p:cNvPr id="9" name="o298"/>
           <p:cNvSpPr/>
           <p:nvPr/>
         </p:nvSpPr>
@@ -21435,7 +20732,7 @@
       </p:sp>
       <p:sp>
         <p:nvSpPr>
-          <p:cNvPr id="10" name="o316"/>
+          <p:cNvPr id="10" name="o299"/>
           <p:cNvSpPr txBox="1"/>
           <p:nvPr/>
         </p:nvSpPr>
@@ -21474,7 +20771,7 @@
       </p:sp>
       <p:sp>
         <p:nvSpPr>
-          <p:cNvPr id="11" name="o317"/>
+          <p:cNvPr id="11" name="o300"/>
           <p:cNvSpPr txBox="1"/>
           <p:nvPr/>
         </p:nvSpPr>
@@ -21513,7 +20810,7 @@
       </p:sp>
       <p:sp>
         <p:nvSpPr>
-          <p:cNvPr id="12" name="o318"/>
+          <p:cNvPr id="12" name="o301"/>
           <p:cNvSpPr txBox="1"/>
           <p:nvPr/>
         </p:nvSpPr>
@@ -21552,7 +20849,7 @@
       </p:sp>
       <p:sp>
         <p:nvSpPr>
-          <p:cNvPr id="13" name="o319"/>
+          <p:cNvPr id="13" name="o302"/>
           <p:cNvSpPr/>
           <p:nvPr/>
         </p:nvSpPr>
@@ -21575,7 +20872,7 @@
       </p:sp>
       <p:sp>
         <p:nvSpPr>
-          <p:cNvPr id="14" name="o320"/>
+          <p:cNvPr id="14" name="o303"/>
           <p:cNvSpPr txBox="1"/>
           <p:nvPr/>
         </p:nvSpPr>
@@ -21614,7 +20911,7 @@
       </p:sp>
       <p:sp>
         <p:nvSpPr>
-          <p:cNvPr id="15" name="o321"/>
+          <p:cNvPr id="15" name="o304"/>
           <p:cNvSpPr txBox="1"/>
           <p:nvPr/>
         </p:nvSpPr>
@@ -21653,7 +20950,7 @@
       </p:sp>
       <p:sp>
         <p:nvSpPr>
-          <p:cNvPr id="16" name="o322"/>
+          <p:cNvPr id="16" name="o305"/>
           <p:cNvSpPr txBox="1"/>
           <p:nvPr/>
         </p:nvSpPr>
@@ -21692,7 +20989,7 @@
       </p:sp>
       <p:sp>
         <p:nvSpPr>
-          <p:cNvPr id="17" name="o323"/>
+          <p:cNvPr id="17" name="o306"/>
           <p:cNvSpPr/>
           <p:nvPr/>
         </p:nvSpPr>
@@ -21715,7 +21012,7 @@
       </p:sp>
       <p:sp>
         <p:nvSpPr>
-          <p:cNvPr id="18" name="o324"/>
+          <p:cNvPr id="18" name="o307"/>
           <p:cNvSpPr txBox="1"/>
           <p:nvPr/>
         </p:nvSpPr>
@@ -21754,7 +21051,7 @@
       </p:sp>
       <p:sp>
         <p:nvSpPr>
-          <p:cNvPr id="19" name="o325"/>
+          <p:cNvPr id="19" name="o308"/>
           <p:cNvSpPr txBox="1"/>
           <p:nvPr/>
         </p:nvSpPr>
@@ -21793,7 +21090,7 @@
       </p:sp>
       <p:sp>
         <p:nvSpPr>
-          <p:cNvPr id="20" name="o326"/>
+          <p:cNvPr id="20" name="o309"/>
           <p:cNvSpPr txBox="1"/>
           <p:nvPr/>
         </p:nvSpPr>
@@ -21832,7 +21129,7 @@
       </p:sp>
       <p:sp>
         <p:nvSpPr>
-          <p:cNvPr id="21" name="o327"/>
+          <p:cNvPr id="21" name="o310"/>
           <p:cNvSpPr/>
           <p:nvPr/>
         </p:nvSpPr>
@@ -21855,7 +21152,7 @@
       </p:sp>
       <p:sp>
         <p:nvSpPr>
-          <p:cNvPr id="22" name="o328"/>
+          <p:cNvPr id="22" name="o311"/>
           <p:cNvSpPr/>
           <p:nvPr/>
         </p:nvSpPr>
@@ -21875,7 +21172,7 @@
       </p:sp>
       <p:sp>
         <p:nvSpPr>
-          <p:cNvPr id="23" name="o329"/>
+          <p:cNvPr id="23" name="o312"/>
           <p:cNvSpPr/>
           <p:nvPr/>
         </p:nvSpPr>
@@ -21895,7 +21192,7 @@
       </p:sp>
       <p:sp>
         <p:nvSpPr>
-          <p:cNvPr id="24" name="o330"/>
+          <p:cNvPr id="24" name="o313"/>
           <p:cNvSpPr txBox="1"/>
           <p:nvPr/>
         </p:nvSpPr>
@@ -21934,7 +21231,7 @@
       </p:sp>
       <p:sp>
         <p:nvSpPr>
-          <p:cNvPr id="25" name="o331"/>
+          <p:cNvPr id="25" name="o314"/>
           <p:cNvSpPr txBox="1"/>
           <p:nvPr/>
         </p:nvSpPr>
@@ -21973,7 +21270,7 @@
       </p:sp>
       <p:sp>
         <p:nvSpPr>
-          <p:cNvPr id="26" name="o332"/>
+          <p:cNvPr id="26" name="o315"/>
           <p:cNvSpPr txBox="1"/>
           <p:nvPr/>
         </p:nvSpPr>
@@ -22012,7 +21309,7 @@
       </p:sp>
       <p:sp>
         <p:nvSpPr>
-          <p:cNvPr id="27" name="o333"/>
+          <p:cNvPr id="27" name="o316"/>
           <p:cNvSpPr/>
           <p:nvPr/>
         </p:nvSpPr>
@@ -22035,7 +21332,7 @@
       </p:sp>
       <p:sp>
         <p:nvSpPr>
-          <p:cNvPr id="28" name="o334"/>
+          <p:cNvPr id="28" name="o317"/>
           <p:cNvSpPr txBox="1"/>
           <p:nvPr/>
         </p:nvSpPr>
@@ -22074,7 +21371,7 @@
       </p:sp>
       <p:sp>
         <p:nvSpPr>
-          <p:cNvPr id="29" name="o335"/>
+          <p:cNvPr id="29" name="o318"/>
           <p:cNvSpPr txBox="1"/>
           <p:nvPr/>
         </p:nvSpPr>
@@ -22113,7 +21410,7 @@
       </p:sp>
       <p:sp>
         <p:nvSpPr>
-          <p:cNvPr id="30" name="o336"/>
+          <p:cNvPr id="30" name="o319"/>
           <p:cNvSpPr txBox="1"/>
           <p:nvPr/>
         </p:nvSpPr>
@@ -22152,7 +21449,7 @@
       </p:sp>
       <p:sp>
         <p:nvSpPr>
-          <p:cNvPr id="31" name="o337"/>
+          <p:cNvPr id="31" name="o320"/>
           <p:cNvSpPr/>
           <p:nvPr/>
         </p:nvSpPr>
@@ -22175,7 +21472,7 @@
       </p:sp>
       <p:sp>
         <p:nvSpPr>
-          <p:cNvPr id="32" name="o338"/>
+          <p:cNvPr id="32" name="o321"/>
           <p:cNvSpPr txBox="1"/>
           <p:nvPr/>
         </p:nvSpPr>
@@ -22214,7 +21511,7 @@
       </p:sp>
       <p:sp>
         <p:nvSpPr>
-          <p:cNvPr id="33" name="o339"/>
+          <p:cNvPr id="33" name="o322"/>
           <p:cNvSpPr txBox="1"/>
           <p:nvPr/>
         </p:nvSpPr>
@@ -22253,7 +21550,7 @@
       </p:sp>
       <p:sp>
         <p:nvSpPr>
-          <p:cNvPr id="34" name="o340"/>
+          <p:cNvPr id="34" name="o323"/>
           <p:cNvSpPr txBox="1"/>
           <p:nvPr/>
         </p:nvSpPr>
@@ -22292,7 +21589,7 @@
       </p:sp>
       <p:sp>
         <p:nvSpPr>
-          <p:cNvPr id="35" name="o341"/>
+          <p:cNvPr id="35" name="o324"/>
           <p:cNvSpPr/>
           <p:nvPr/>
         </p:nvSpPr>
@@ -22315,7 +21612,7 @@
       </p:sp>
       <p:sp>
         <p:nvSpPr>
-          <p:cNvPr id="36" name="o342"/>
+          <p:cNvPr id="36" name="o325"/>
           <p:cNvSpPr txBox="1"/>
           <p:nvPr/>
         </p:nvSpPr>
@@ -22354,7 +21651,7 @@
       </p:sp>
       <p:sp>
         <p:nvSpPr>
-          <p:cNvPr id="37" name="o343"/>
+          <p:cNvPr id="37" name="o326"/>
           <p:cNvSpPr txBox="1"/>
           <p:nvPr/>
         </p:nvSpPr>
@@ -22393,7 +21690,7 @@
       </p:sp>
       <p:sp>
         <p:nvSpPr>
-          <p:cNvPr id="38" name="o344"/>
+          <p:cNvPr id="38" name="o327"/>
           <p:cNvSpPr txBox="1"/>
           <p:nvPr/>
         </p:nvSpPr>
@@ -22432,7 +21729,7 @@
       </p:sp>
       <p:sp>
         <p:nvSpPr>
-          <p:cNvPr id="39" name="o345"/>
+          <p:cNvPr id="39" name="o328"/>
           <p:cNvSpPr/>
           <p:nvPr/>
         </p:nvSpPr>
@@ -22455,7 +21752,7 @@
       </p:sp>
       <p:sp>
         <p:nvSpPr>
-          <p:cNvPr id="40" name="o346"/>
+          <p:cNvPr id="40" name="o329"/>
           <p:cNvSpPr/>
           <p:nvPr/>
         </p:nvSpPr>
@@ -22478,7 +21775,7 @@
       </p:sp>
       <p:sp>
         <p:nvSpPr>
-          <p:cNvPr id="41" name="o347"/>
+          <p:cNvPr id="41" name="o330"/>
           <p:cNvSpPr txBox="1"/>
           <p:nvPr/>
         </p:nvSpPr>
@@ -22517,7 +21814,7 @@
       </p:sp>
       <p:sp>
         <p:nvSpPr>
-          <p:cNvPr id="42" name="o348"/>
+          <p:cNvPr id="42" name="o331"/>
           <p:cNvSpPr/>
           <p:nvPr/>
         </p:nvSpPr>
@@ -22540,7 +21837,7 @@
       </p:sp>
       <p:sp>
         <p:nvSpPr>
-          <p:cNvPr id="43" name="o349"/>
+          <p:cNvPr id="43" name="o332"/>
           <p:cNvSpPr/>
           <p:nvPr/>
         </p:nvSpPr>
@@ -22563,7 +21860,7 @@
       </p:sp>
       <p:sp>
         <p:nvSpPr>
-          <p:cNvPr id="44" name="o350"/>
+          <p:cNvPr id="44" name="o333"/>
           <p:cNvSpPr/>
           <p:nvPr/>
         </p:nvSpPr>
@@ -22585,7 +21882,7 @@
       </p:sp>
       <p:sp>
         <p:nvSpPr>
-          <p:cNvPr id="45" name="o351"/>
+          <p:cNvPr id="45" name="o334"/>
           <p:cNvSpPr txBox="1"/>
           <p:nvPr/>
         </p:nvSpPr>
@@ -22624,7 +21921,7 @@
       </p:sp>
       <p:sp>
         <p:nvSpPr>
-          <p:cNvPr id="46" name="o352"/>
+          <p:cNvPr id="46" name="o335"/>
           <p:cNvSpPr txBox="1"/>
           <p:nvPr/>
         </p:nvSpPr>
@@ -22663,7 +21960,7 @@
       </p:sp>
       <p:sp>
         <p:nvSpPr>
-          <p:cNvPr id="47" name="o353"/>
+          <p:cNvPr id="47" name="o336"/>
           <p:cNvSpPr txBox="1"/>
           <p:nvPr/>
         </p:nvSpPr>
@@ -22702,7 +21999,7 @@
       </p:sp>
       <p:sp>
         <p:nvSpPr>
-          <p:cNvPr id="48" name="o354"/>
+          <p:cNvPr id="48" name="o337"/>
           <p:cNvSpPr txBox="1"/>
           <p:nvPr/>
         </p:nvSpPr>
@@ -22741,7 +22038,7 @@
       </p:sp>
       <p:sp>
         <p:nvSpPr>
-          <p:cNvPr id="49" name="o355"/>
+          <p:cNvPr id="49" name="o338"/>
           <p:cNvSpPr/>
           <p:nvPr/>
         </p:nvSpPr>
@@ -22766,7 +22063,7 @@
       </p:sp>
       <p:sp>
         <p:nvSpPr>
-          <p:cNvPr id="50" name="o356"/>
+          <p:cNvPr id="50" name="o339"/>
           <p:cNvSpPr txBox="1"/>
           <p:nvPr/>
         </p:nvSpPr>
@@ -22805,7 +22102,7 @@
       </p:sp>
       <p:sp>
         <p:nvSpPr>
-          <p:cNvPr id="51" name="o357"/>
+          <p:cNvPr id="51" name="o340"/>
           <p:cNvSpPr/>
           <p:nvPr/>
         </p:nvSpPr>
@@ -22830,7 +22127,7 @@
       </p:sp>
       <p:sp>
         <p:nvSpPr>
-          <p:cNvPr id="52" name="o358"/>
+          <p:cNvPr id="52" name="o341"/>
           <p:cNvSpPr txBox="1"/>
           <p:nvPr/>
         </p:nvSpPr>
@@ -22869,7 +22166,7 @@
       </p:sp>
       <p:sp>
         <p:nvSpPr>
-          <p:cNvPr id="53" name="o359"/>
+          <p:cNvPr id="53" name="o342"/>
           <p:cNvSpPr/>
           <p:nvPr/>
         </p:nvSpPr>
@@ -22894,7 +22191,7 @@
       </p:sp>
       <p:sp>
         <p:nvSpPr>
-          <p:cNvPr id="54" name="o360"/>
+          <p:cNvPr id="54" name="o343"/>
           <p:cNvSpPr txBox="1"/>
           <p:nvPr/>
         </p:nvSpPr>
@@ -22933,7 +22230,7 @@
       </p:sp>
       <p:sp>
         <p:nvSpPr>
-          <p:cNvPr id="55" name="o361"/>
+          <p:cNvPr id="55" name="o344"/>
           <p:cNvSpPr/>
           <p:nvPr/>
         </p:nvSpPr>
@@ -22958,7 +22255,7 @@
       </p:sp>
       <p:sp>
         <p:nvSpPr>
-          <p:cNvPr id="56" name="o362"/>
+          <p:cNvPr id="56" name="o345"/>
           <p:cNvSpPr txBox="1"/>
           <p:nvPr/>
         </p:nvSpPr>
@@ -22997,7 +22294,7 @@
       </p:sp>
       <p:sp>
         <p:nvSpPr>
-          <p:cNvPr id="57" name="o363"/>
+          <p:cNvPr id="57" name="o346"/>
           <p:cNvSpPr/>
           <p:nvPr/>
         </p:nvSpPr>
@@ -23022,7 +22319,7 @@
       </p:sp>
       <p:sp>
         <p:nvSpPr>
-          <p:cNvPr id="58" name="o364"/>
+          <p:cNvPr id="58" name="o347"/>
           <p:cNvSpPr txBox="1"/>
           <p:nvPr/>
         </p:nvSpPr>
@@ -23061,7 +22358,7 @@
       </p:sp>
       <p:sp>
         <p:nvSpPr>
-          <p:cNvPr id="59" name="o365"/>
+          <p:cNvPr id="59" name="o348"/>
           <p:cNvSpPr/>
           <p:nvPr/>
         </p:nvSpPr>
@@ -23086,7 +22383,7 @@
       </p:sp>
       <p:sp>
         <p:nvSpPr>
-          <p:cNvPr id="60" name="o366"/>
+          <p:cNvPr id="60" name="o349"/>
           <p:cNvSpPr txBox="1"/>
           <p:nvPr/>
         </p:nvSpPr>
@@ -23125,7 +22422,7 @@
       </p:sp>
       <p:sp>
         <p:nvSpPr>
-          <p:cNvPr id="61" name="o367"/>
+          <p:cNvPr id="61" name="o350"/>
           <p:cNvSpPr/>
           <p:nvPr/>
         </p:nvSpPr>
@@ -23150,7 +22447,7 @@
       </p:sp>
       <p:sp>
         <p:nvSpPr>
-          <p:cNvPr id="62" name="o368"/>
+          <p:cNvPr id="62" name="o351"/>
           <p:cNvSpPr txBox="1"/>
           <p:nvPr/>
         </p:nvSpPr>
@@ -23189,7 +22486,7 @@
       </p:sp>
       <p:sp>
         <p:nvSpPr>
-          <p:cNvPr id="63" name="o369"/>
+          <p:cNvPr id="63" name="o352"/>
           <p:cNvSpPr/>
           <p:nvPr/>
         </p:nvSpPr>
@@ -23214,7 +22511,7 @@
       </p:sp>
       <p:sp>
         <p:nvSpPr>
-          <p:cNvPr id="64" name="o370"/>
+          <p:cNvPr id="64" name="o353"/>
           <p:cNvSpPr txBox="1"/>
           <p:nvPr/>
         </p:nvSpPr>
@@ -23253,7 +22550,7 @@
       </p:sp>
       <p:sp>
         <p:nvSpPr>
-          <p:cNvPr id="65" name="o371"/>
+          <p:cNvPr id="65" name="o354"/>
           <p:cNvSpPr/>
           <p:nvPr/>
         </p:nvSpPr>
@@ -23278,7 +22575,7 @@
       </p:sp>
       <p:sp>
         <p:nvSpPr>
-          <p:cNvPr id="66" name="o372"/>
+          <p:cNvPr id="66" name="o355"/>
           <p:cNvSpPr txBox="1"/>
           <p:nvPr/>
         </p:nvSpPr>
@@ -23317,7 +22614,7 @@
       </p:sp>
       <p:sp>
         <p:nvSpPr>
-          <p:cNvPr id="67" name="o373"/>
+          <p:cNvPr id="67" name="o356"/>
           <p:cNvSpPr txBox="1"/>
           <p:nvPr/>
         </p:nvSpPr>
@@ -23356,7 +22653,7 @@
       </p:sp>
       <p:sp>
         <p:nvSpPr>
-          <p:cNvPr id="68" name="o374"/>
+          <p:cNvPr id="68" name="o357"/>
           <p:cNvSpPr/>
           <p:nvPr/>
         </p:nvSpPr>
@@ -23376,7 +22673,7 @@
       </p:sp>
       <p:sp>
         <p:nvSpPr>
-          <p:cNvPr id="69" name="o375"/>
+          <p:cNvPr id="69" name="o358"/>
           <p:cNvSpPr/>
           <p:nvPr/>
         </p:nvSpPr>
@@ -23396,7 +22693,7 @@
       </p:sp>
       <p:sp>
         <p:nvSpPr>
-          <p:cNvPr id="70" name="o376"/>
+          <p:cNvPr id="70" name="o359"/>
           <p:cNvSpPr txBox="1"/>
           <p:nvPr/>
         </p:nvSpPr>
@@ -23463,7 +22760,7 @@
       </p:grpSpPr>
       <p:sp>
         <p:nvSpPr>
-          <p:cNvPr id="2" name="o377"/>
+          <p:cNvPr id="2" name="o360"/>
           <p:cNvSpPr txBox="1"/>
           <p:nvPr/>
         </p:nvSpPr>
@@ -23502,7 +22799,7 @@
       </p:sp>
       <p:sp>
         <p:nvSpPr>
-          <p:cNvPr id="3" name="o378"/>
+          <p:cNvPr id="3" name="o361"/>
           <p:cNvSpPr txBox="1"/>
           <p:nvPr/>
         </p:nvSpPr>
@@ -23544,7 +22841,7 @@
       </p:sp>
       <p:sp>
         <p:nvSpPr>
-          <p:cNvPr id="4" name="o379"/>
+          <p:cNvPr id="4" name="o362"/>
           <p:cNvSpPr txBox="1"/>
           <p:nvPr/>
         </p:nvSpPr>
@@ -23583,7 +22880,7 @@
       </p:sp>
       <p:sp>
         <p:nvSpPr>
-          <p:cNvPr id="5" name="o380"/>
+          <p:cNvPr id="5" name="o363"/>
           <p:cNvSpPr/>
           <p:nvPr/>
         </p:nvSpPr>
@@ -23606,7 +22903,7 @@
       </p:sp>
       <p:sp>
         <p:nvSpPr>
-          <p:cNvPr id="6" name="o381"/>
+          <p:cNvPr id="6" name="o364"/>
           <p:cNvSpPr txBox="1"/>
           <p:nvPr/>
         </p:nvSpPr>
@@ -23645,7 +22942,7 @@
       </p:sp>
       <p:sp>
         <p:nvSpPr>
-          <p:cNvPr id="7" name="o382"/>
+          <p:cNvPr id="7" name="o365"/>
           <p:cNvSpPr txBox="1"/>
           <p:nvPr/>
         </p:nvSpPr>
@@ -23684,7 +22981,7 @@
       </p:sp>
       <p:sp>
         <p:nvSpPr>
-          <p:cNvPr id="8" name="o383"/>
+          <p:cNvPr id="8" name="o366"/>
           <p:cNvSpPr txBox="1"/>
           <p:nvPr/>
         </p:nvSpPr>
@@ -23723,7 +23020,7 @@
       </p:sp>
       <p:sp>
         <p:nvSpPr>
-          <p:cNvPr id="9" name="o384"/>
+          <p:cNvPr id="9" name="o367"/>
           <p:cNvSpPr/>
           <p:nvPr/>
         </p:nvSpPr>
@@ -23743,7 +23040,7 @@
       </p:sp>
       <p:sp>
         <p:nvSpPr>
-          <p:cNvPr id="10" name="o385"/>
+          <p:cNvPr id="10" name="o368"/>
           <p:cNvSpPr txBox="1"/>
           <p:nvPr/>
         </p:nvSpPr>
@@ -23782,7 +23079,7 @@
       </p:sp>
       <p:sp>
         <p:nvSpPr>
-          <p:cNvPr id="11" name="o386"/>
+          <p:cNvPr id="11" name="o369"/>
           <p:cNvSpPr txBox="1"/>
           <p:nvPr/>
         </p:nvSpPr>
@@ -23821,7 +23118,7 @@
       </p:sp>
       <p:sp>
         <p:nvSpPr>
-          <p:cNvPr id="12" name="o387"/>
+          <p:cNvPr id="12" name="o370"/>
           <p:cNvSpPr/>
           <p:nvPr/>
         </p:nvSpPr>
@@ -23844,7 +23141,7 @@
       </p:sp>
       <p:sp>
         <p:nvSpPr>
-          <p:cNvPr id="13" name="o388"/>
+          <p:cNvPr id="13" name="o371"/>
           <p:cNvSpPr/>
           <p:nvPr/>
         </p:nvSpPr>
@@ -23864,7 +23161,7 @@
       </p:sp>
       <p:sp>
         <p:nvSpPr>
-          <p:cNvPr id="14" name="o389"/>
+          <p:cNvPr id="14" name="o372"/>
           <p:cNvSpPr txBox="1"/>
           <p:nvPr/>
         </p:nvSpPr>
@@ -23903,7 +23200,7 @@
       </p:sp>
       <p:sp>
         <p:nvSpPr>
-          <p:cNvPr id="15" name="o390"/>
+          <p:cNvPr id="15" name="o373"/>
           <p:cNvSpPr txBox="1"/>
           <p:nvPr/>
         </p:nvSpPr>
@@ -23942,7 +23239,7 @@
       </p:sp>
       <p:sp>
         <p:nvSpPr>
-          <p:cNvPr id="16" name="o391"/>
+          <p:cNvPr id="16" name="o374"/>
           <p:cNvSpPr txBox="1"/>
           <p:nvPr/>
         </p:nvSpPr>
@@ -23981,7 +23278,7 @@
       </p:sp>
       <p:sp>
         <p:nvSpPr>
-          <p:cNvPr id="17" name="o392"/>
+          <p:cNvPr id="17" name="o375"/>
           <p:cNvSpPr/>
           <p:nvPr/>
         </p:nvSpPr>
@@ -24001,7 +23298,7 @@
       </p:sp>
       <p:sp>
         <p:nvSpPr>
-          <p:cNvPr id="18" name="o393"/>
+          <p:cNvPr id="18" name="o376"/>
           <p:cNvSpPr txBox="1"/>
           <p:nvPr/>
         </p:nvSpPr>
@@ -24040,7 +23337,7 @@
       </p:sp>
       <p:sp>
         <p:nvSpPr>
-          <p:cNvPr id="19" name="o394"/>
+          <p:cNvPr id="19" name="o377"/>
           <p:cNvSpPr txBox="1"/>
           <p:nvPr/>
         </p:nvSpPr>
@@ -24079,7 +23376,7 @@
       </p:sp>
       <p:sp>
         <p:nvSpPr>
-          <p:cNvPr id="20" name="o395"/>
+          <p:cNvPr id="20" name="o378"/>
           <p:cNvSpPr txBox="1"/>
           <p:nvPr/>
         </p:nvSpPr>
@@ -24118,7 +23415,7 @@
       </p:sp>
       <p:sp>
         <p:nvSpPr>
-          <p:cNvPr id="21" name="o396"/>
+          <p:cNvPr id="21" name="o379"/>
           <p:cNvSpPr/>
           <p:nvPr/>
         </p:nvSpPr>
@@ -24138,7 +23435,7 @@
       </p:sp>
       <p:sp>
         <p:nvSpPr>
-          <p:cNvPr id="22" name="o397"/>
+          <p:cNvPr id="22" name="o380"/>
           <p:cNvSpPr txBox="1"/>
           <p:nvPr/>
         </p:nvSpPr>
@@ -24177,7 +23474,7 @@
       </p:sp>
       <p:sp>
         <p:nvSpPr>
-          <p:cNvPr id="23" name="o398"/>
+          <p:cNvPr id="23" name="o381"/>
           <p:cNvSpPr txBox="1"/>
           <p:nvPr/>
         </p:nvSpPr>
@@ -24216,7 +23513,7 @@
       </p:sp>
       <p:sp>
         <p:nvSpPr>
-          <p:cNvPr id="24" name="o399"/>
+          <p:cNvPr id="24" name="o382"/>
           <p:cNvSpPr txBox="1"/>
           <p:nvPr/>
         </p:nvSpPr>
@@ -24255,7 +23552,7 @@
       </p:sp>
       <p:sp>
         <p:nvSpPr>
-          <p:cNvPr id="25" name="o400"/>
+          <p:cNvPr id="25" name="o383"/>
           <p:cNvSpPr/>
           <p:nvPr/>
         </p:nvSpPr>
@@ -24275,7 +23572,7 @@
       </p:sp>
       <p:sp>
         <p:nvSpPr>
-          <p:cNvPr id="26" name="o401"/>
+          <p:cNvPr id="26" name="o384"/>
           <p:cNvSpPr txBox="1"/>
           <p:nvPr/>
         </p:nvSpPr>
@@ -24314,7 +23611,7 @@
       </p:sp>
       <p:sp>
         <p:nvSpPr>
-          <p:cNvPr id="27" name="o402"/>
+          <p:cNvPr id="27" name="o385"/>
           <p:cNvSpPr txBox="1"/>
           <p:nvPr/>
         </p:nvSpPr>
@@ -24353,7 +23650,7 @@
       </p:sp>
       <p:sp>
         <p:nvSpPr>
-          <p:cNvPr id="28" name="o403"/>
+          <p:cNvPr id="28" name="o386"/>
           <p:cNvSpPr txBox="1"/>
           <p:nvPr/>
         </p:nvSpPr>
@@ -24392,7 +23689,7 @@
       </p:sp>
       <p:sp>
         <p:nvSpPr>
-          <p:cNvPr id="29" name="o404"/>
+          <p:cNvPr id="29" name="o387"/>
           <p:cNvSpPr txBox="1"/>
           <p:nvPr/>
         </p:nvSpPr>
@@ -24431,7 +23728,7 @@
       </p:sp>
       <p:sp>
         <p:nvSpPr>
-          <p:cNvPr id="30" name="o405"/>
+          <p:cNvPr id="30" name="o388"/>
           <p:cNvSpPr/>
           <p:nvPr/>
         </p:nvSpPr>
@@ -24456,7 +23753,7 @@
       </p:sp>
       <p:sp>
         <p:nvSpPr>
-          <p:cNvPr id="31" name="o406"/>
+          <p:cNvPr id="31" name="o389"/>
           <p:cNvSpPr/>
           <p:nvPr/>
         </p:nvSpPr>
@@ -24481,7 +23778,7 @@
       </p:sp>
       <p:sp>
         <p:nvSpPr>
-          <p:cNvPr id="32" name="o407"/>
+          <p:cNvPr id="32" name="o390"/>
           <p:cNvSpPr txBox="1"/>
           <p:nvPr/>
         </p:nvSpPr>
@@ -24520,7 +23817,7 @@
       </p:sp>
       <p:sp>
         <p:nvSpPr>
-          <p:cNvPr id="33" name="o408"/>
+          <p:cNvPr id="33" name="o391"/>
           <p:cNvSpPr txBox="1"/>
           <p:nvPr/>
         </p:nvSpPr>
@@ -24559,7 +23856,7 @@
       </p:sp>
       <p:sp>
         <p:nvSpPr>
-          <p:cNvPr id="34" name="o409"/>
+          <p:cNvPr id="34" name="o392"/>
           <p:cNvSpPr txBox="1"/>
           <p:nvPr/>
         </p:nvSpPr>
@@ -24598,7 +23895,7 @@
       </p:sp>
       <p:sp>
         <p:nvSpPr>
-          <p:cNvPr id="35" name="o410"/>
+          <p:cNvPr id="35" name="o393"/>
           <p:cNvSpPr/>
           <p:nvPr/>
         </p:nvSpPr>
@@ -24622,7 +23919,7 @@
       </p:sp>
       <p:sp>
         <p:nvSpPr>
-          <p:cNvPr id="36" name="o411"/>
+          <p:cNvPr id="36" name="o394"/>
           <p:cNvSpPr/>
           <p:nvPr/>
         </p:nvSpPr>
@@ -24647,7 +23944,7 @@
       </p:sp>
       <p:sp>
         <p:nvSpPr>
-          <p:cNvPr id="37" name="o412"/>
+          <p:cNvPr id="37" name="o395"/>
           <p:cNvSpPr/>
           <p:nvPr/>
         </p:nvSpPr>
@@ -24672,7 +23969,7 @@
       </p:sp>
       <p:sp>
         <p:nvSpPr>
-          <p:cNvPr id="38" name="o413"/>
+          <p:cNvPr id="38" name="o396"/>
           <p:cNvSpPr txBox="1"/>
           <p:nvPr/>
         </p:nvSpPr>
@@ -24711,7 +24008,7 @@
       </p:sp>
       <p:sp>
         <p:nvSpPr>
-          <p:cNvPr id="39" name="o414"/>
+          <p:cNvPr id="39" name="o397"/>
           <p:cNvSpPr txBox="1"/>
           <p:nvPr/>
         </p:nvSpPr>
@@ -24750,7 +24047,7 @@
       </p:sp>
       <p:sp>
         <p:nvSpPr>
-          <p:cNvPr id="40" name="o415"/>
+          <p:cNvPr id="40" name="o398"/>
           <p:cNvSpPr txBox="1"/>
           <p:nvPr/>
         </p:nvSpPr>
@@ -24789,7 +24086,7 @@
       </p:sp>
       <p:sp>
         <p:nvSpPr>
-          <p:cNvPr id="41" name="o416"/>
+          <p:cNvPr id="41" name="o399"/>
           <p:cNvSpPr/>
           <p:nvPr/>
         </p:nvSpPr>
@@ -24813,7 +24110,7 @@
       </p:sp>
       <p:sp>
         <p:nvSpPr>
-          <p:cNvPr id="42" name="o417"/>
+          <p:cNvPr id="42" name="o400"/>
           <p:cNvSpPr/>
           <p:nvPr/>
         </p:nvSpPr>
@@ -24838,7 +24135,7 @@
       </p:sp>
       <p:sp>
         <p:nvSpPr>
-          <p:cNvPr id="43" name="o418"/>
+          <p:cNvPr id="43" name="o401"/>
           <p:cNvSpPr/>
           <p:nvPr/>
         </p:nvSpPr>
@@ -24863,7 +24160,7 @@
       </p:sp>
       <p:sp>
         <p:nvSpPr>
-          <p:cNvPr id="44" name="o419"/>
+          <p:cNvPr id="44" name="o402"/>
           <p:cNvSpPr txBox="1"/>
           <p:nvPr/>
         </p:nvSpPr>
@@ -24902,7 +24199,7 @@
       </p:sp>
       <p:sp>
         <p:nvSpPr>
-          <p:cNvPr id="45" name="o420"/>
+          <p:cNvPr id="45" name="o403"/>
           <p:cNvSpPr txBox="1"/>
           <p:nvPr/>
         </p:nvSpPr>
@@ -24941,7 +24238,7 @@
       </p:sp>
       <p:sp>
         <p:nvSpPr>
-          <p:cNvPr id="46" name="o421"/>
+          <p:cNvPr id="46" name="o404"/>
           <p:cNvSpPr txBox="1"/>
           <p:nvPr/>
         </p:nvSpPr>
@@ -24980,7 +24277,7 @@
       </p:sp>
       <p:sp>
         <p:nvSpPr>
-          <p:cNvPr id="47" name="o422"/>
+          <p:cNvPr id="47" name="o405"/>
           <p:cNvSpPr/>
           <p:nvPr/>
         </p:nvSpPr>
@@ -25004,7 +24301,7 @@
       </p:sp>
       <p:sp>
         <p:nvSpPr>
-          <p:cNvPr id="48" name="o423"/>
+          <p:cNvPr id="48" name="o406"/>
           <p:cNvSpPr/>
           <p:nvPr/>
         </p:nvSpPr>
@@ -25029,7 +24326,7 @@
       </p:sp>
       <p:sp>
         <p:nvSpPr>
-          <p:cNvPr id="49" name="o424"/>
+          <p:cNvPr id="49" name="o407"/>
           <p:cNvSpPr/>
           <p:nvPr/>
         </p:nvSpPr>
@@ -25049,7 +24346,7 @@
       </p:sp>
       <p:sp>
         <p:nvSpPr>
-          <p:cNvPr id="50" name="o425"/>
+          <p:cNvPr id="50" name="o408"/>
           <p:cNvSpPr/>
           <p:nvPr/>
         </p:nvSpPr>
@@ -25074,7 +24371,7 @@
       </p:sp>
       <p:sp>
         <p:nvSpPr>
-          <p:cNvPr id="51" name="o426"/>
+          <p:cNvPr id="51" name="o409"/>
           <p:cNvSpPr txBox="1"/>
           <p:nvPr/>
         </p:nvSpPr>
@@ -25113,7 +24410,7 @@
       </p:sp>
       <p:sp>
         <p:nvSpPr>
-          <p:cNvPr id="52" name="o427"/>
+          <p:cNvPr id="52" name="o410"/>
           <p:cNvSpPr txBox="1"/>
           <p:nvPr/>
         </p:nvSpPr>
@@ -25152,7 +24449,7 @@
       </p:sp>
       <p:sp>
         <p:nvSpPr>
-          <p:cNvPr id="53" name="o428"/>
+          <p:cNvPr id="53" name="o411"/>
           <p:cNvSpPr txBox="1"/>
           <p:nvPr/>
         </p:nvSpPr>
@@ -25191,7 +24488,7 @@
       </p:sp>
       <p:sp>
         <p:nvSpPr>
-          <p:cNvPr id="54" name="o429"/>
+          <p:cNvPr id="54" name="o412"/>
           <p:cNvSpPr/>
           <p:nvPr/>
         </p:nvSpPr>
@@ -25215,7 +24512,7 @@
       </p:sp>
       <p:sp>
         <p:nvSpPr>
-          <p:cNvPr id="55" name="o430"/>
+          <p:cNvPr id="55" name="o413"/>
           <p:cNvSpPr/>
           <p:nvPr/>
         </p:nvSpPr>
@@ -25240,7 +24537,7 @@
       </p:sp>
       <p:sp>
         <p:nvSpPr>
-          <p:cNvPr id="56" name="o431"/>
+          <p:cNvPr id="56" name="o414"/>
           <p:cNvSpPr/>
           <p:nvPr/>
         </p:nvSpPr>
@@ -25265,7 +24562,7 @@
       </p:sp>
       <p:sp>
         <p:nvSpPr>
-          <p:cNvPr id="57" name="o432"/>
+          <p:cNvPr id="57" name="o415"/>
           <p:cNvSpPr txBox="1"/>
           <p:nvPr/>
         </p:nvSpPr>
@@ -25304,7 +24601,7 @@
       </p:sp>
       <p:sp>
         <p:nvSpPr>
-          <p:cNvPr id="58" name="o433"/>
+          <p:cNvPr id="58" name="o416"/>
           <p:cNvSpPr txBox="1"/>
           <p:nvPr/>
         </p:nvSpPr>
@@ -25343,7 +24640,7 @@
       </p:sp>
       <p:sp>
         <p:nvSpPr>
-          <p:cNvPr id="59" name="o434"/>
+          <p:cNvPr id="59" name="o417"/>
           <p:cNvSpPr txBox="1"/>
           <p:nvPr/>
         </p:nvSpPr>
@@ -25382,7 +24679,7 @@
       </p:sp>
       <p:sp>
         <p:nvSpPr>
-          <p:cNvPr id="60" name="o435"/>
+          <p:cNvPr id="60" name="o418"/>
           <p:cNvSpPr/>
           <p:nvPr/>
         </p:nvSpPr>
@@ -25402,7 +24699,7 @@
       </p:sp>
       <p:sp>
         <p:nvSpPr>
-          <p:cNvPr id="61" name="o436"/>
+          <p:cNvPr id="61" name="o419"/>
           <p:cNvSpPr/>
           <p:nvPr/>
         </p:nvSpPr>
@@ -25422,7 +24719,7 @@
       </p:sp>
       <p:sp>
         <p:nvSpPr>
-          <p:cNvPr id="62" name="o437"/>
+          <p:cNvPr id="62" name="o420"/>
           <p:cNvSpPr txBox="1"/>
           <p:nvPr/>
         </p:nvSpPr>
@@ -25489,7 +24786,7 @@
       </p:grpSpPr>
       <p:sp>
         <p:nvSpPr>
-          <p:cNvPr id="2" name="o438"/>
+          <p:cNvPr id="2" name="o421"/>
           <p:cNvSpPr txBox="1"/>
           <p:nvPr/>
         </p:nvSpPr>
@@ -25528,7 +24825,7 @@
       </p:sp>
       <p:sp>
         <p:nvSpPr>
-          <p:cNvPr id="3" name="o439"/>
+          <p:cNvPr id="3" name="o422"/>
           <p:cNvSpPr txBox="1"/>
           <p:nvPr/>
         </p:nvSpPr>
@@ -25570,7 +24867,7 @@
       </p:sp>
       <p:sp>
         <p:nvSpPr>
-          <p:cNvPr id="4" name="o440"/>
+          <p:cNvPr id="4" name="o423"/>
           <p:cNvSpPr txBox="1"/>
           <p:nvPr/>
         </p:nvSpPr>
@@ -25609,7 +24906,7 @@
       </p:sp>
       <p:sp>
         <p:nvSpPr>
-          <p:cNvPr id="5" name="o441"/>
+          <p:cNvPr id="5" name="o424"/>
           <p:cNvSpPr/>
           <p:nvPr/>
         </p:nvSpPr>
@@ -25632,7 +24929,7 @@
       </p:sp>
       <p:sp>
         <p:nvSpPr>
-          <p:cNvPr id="6" name="o442"/>
+          <p:cNvPr id="6" name="o425"/>
           <p:cNvSpPr txBox="1"/>
           <p:nvPr/>
         </p:nvSpPr>
@@ -25671,7 +24968,7 @@
       </p:sp>
       <p:sp>
         <p:nvSpPr>
-          <p:cNvPr id="7" name="o443"/>
+          <p:cNvPr id="7" name="o426"/>
           <p:cNvSpPr txBox="1"/>
           <p:nvPr/>
         </p:nvSpPr>
@@ -25710,7 +25007,7 @@
       </p:sp>
       <p:sp>
         <p:nvSpPr>
-          <p:cNvPr id="8" name="o444"/>
+          <p:cNvPr id="8" name="o427"/>
           <p:cNvSpPr txBox="1"/>
           <p:nvPr/>
         </p:nvSpPr>
@@ -25749,7 +25046,7 @@
       </p:sp>
       <p:sp>
         <p:nvSpPr>
-          <p:cNvPr id="9" name="o445"/>
+          <p:cNvPr id="9" name="o428"/>
           <p:cNvSpPr txBox="1"/>
           <p:nvPr/>
         </p:nvSpPr>
@@ -25788,7 +25085,7 @@
       </p:sp>
       <p:graphicFrame>
         <p:nvGraphicFramePr>
-          <p:cNvPr id="10" name="o446" descr=""/>
+          <p:cNvPr id="10" name="o429" descr=""/>
           <p:cNvGraphicFramePr/>
           <p:nvPr/>
         </p:nvGraphicFramePr>
@@ -25804,7 +25101,7 @@
       </p:graphicFrame>
       <p:sp>
         <p:nvSpPr>
-          <p:cNvPr id="11" name="o447"/>
+          <p:cNvPr id="11" name="o430"/>
           <p:cNvSpPr txBox="1"/>
           <p:nvPr/>
         </p:nvSpPr>
@@ -25843,7 +25140,7 @@
       </p:sp>
       <p:sp>
         <p:nvSpPr>
-          <p:cNvPr id="12" name="o448"/>
+          <p:cNvPr id="12" name="o431"/>
           <p:cNvSpPr txBox="1"/>
           <p:nvPr/>
         </p:nvSpPr>
@@ -25882,7 +25179,7 @@
       </p:sp>
       <p:sp>
         <p:nvSpPr>
-          <p:cNvPr id="13" name="o449"/>
+          <p:cNvPr id="13" name="o432"/>
           <p:cNvSpPr/>
           <p:nvPr/>
         </p:nvSpPr>
@@ -25902,7 +25199,7 @@
       </p:sp>
       <p:sp>
         <p:nvSpPr>
-          <p:cNvPr id="14" name="o450"/>
+          <p:cNvPr id="14" name="o433"/>
           <p:cNvSpPr/>
           <p:nvPr/>
         </p:nvSpPr>
@@ -25922,7 +25219,7 @@
       </p:sp>
       <p:sp>
         <p:nvSpPr>
-          <p:cNvPr id="15" name="o451"/>
+          <p:cNvPr id="15" name="o434"/>
           <p:cNvSpPr txBox="1"/>
           <p:nvPr/>
         </p:nvSpPr>
@@ -25964,7 +25261,7 @@
       </p:sp>
       <p:sp>
         <p:nvSpPr>
-          <p:cNvPr id="16" name="o452"/>
+          <p:cNvPr id="16" name="o435"/>
           <p:cNvSpPr/>
           <p:nvPr/>
         </p:nvSpPr>
@@ -25989,7 +25286,7 @@
       </p:sp>
       <p:sp>
         <p:nvSpPr>
-          <p:cNvPr id="17" name="o453"/>
+          <p:cNvPr id="17" name="o436"/>
           <p:cNvSpPr txBox="1"/>
           <p:nvPr/>
         </p:nvSpPr>
@@ -26028,7 +25325,7 @@
       </p:sp>
       <p:sp>
         <p:nvSpPr>
-          <p:cNvPr id="18" name="o454"/>
+          <p:cNvPr id="18" name="o437"/>
           <p:cNvSpPr txBox="1"/>
           <p:nvPr/>
         </p:nvSpPr>
@@ -26067,7 +25364,7 @@
       </p:sp>
       <p:sp>
         <p:nvSpPr>
-          <p:cNvPr id="19" name="o455"/>
+          <p:cNvPr id="19" name="o438"/>
           <p:cNvSpPr txBox="1"/>
           <p:nvPr/>
         </p:nvSpPr>
@@ -26106,7 +25403,7 @@
       </p:sp>
       <p:sp>
         <p:nvSpPr>
-          <p:cNvPr id="20" name="o456"/>
+          <p:cNvPr id="20" name="o439"/>
           <p:cNvSpPr/>
           <p:nvPr/>
         </p:nvSpPr>
@@ -26131,7 +25428,7 @@
       </p:sp>
       <p:sp>
         <p:nvSpPr>
-          <p:cNvPr id="21" name="o457"/>
+          <p:cNvPr id="21" name="o440"/>
           <p:cNvSpPr txBox="1"/>
           <p:nvPr/>
         </p:nvSpPr>
@@ -26170,7 +25467,7 @@
       </p:sp>
       <p:sp>
         <p:nvSpPr>
-          <p:cNvPr id="22" name="o458"/>
+          <p:cNvPr id="22" name="o441"/>
           <p:cNvSpPr txBox="1"/>
           <p:nvPr/>
         </p:nvSpPr>
@@ -26209,7 +25506,7 @@
       </p:sp>
       <p:sp>
         <p:nvSpPr>
-          <p:cNvPr id="23" name="o459"/>
+          <p:cNvPr id="23" name="o442"/>
           <p:cNvSpPr txBox="1"/>
           <p:nvPr/>
         </p:nvSpPr>
@@ -26248,7 +25545,7 @@
       </p:sp>
       <p:sp>
         <p:nvSpPr>
-          <p:cNvPr id="24" name="o460"/>
+          <p:cNvPr id="24" name="o443"/>
           <p:cNvSpPr/>
           <p:nvPr/>
         </p:nvSpPr>
@@ -26273,7 +25570,7 @@
       </p:sp>
       <p:sp>
         <p:nvSpPr>
-          <p:cNvPr id="25" name="o461"/>
+          <p:cNvPr id="25" name="o444"/>
           <p:cNvSpPr txBox="1"/>
           <p:nvPr/>
         </p:nvSpPr>
@@ -26312,7 +25609,7 @@
       </p:sp>
       <p:sp>
         <p:nvSpPr>
-          <p:cNvPr id="26" name="o462"/>
+          <p:cNvPr id="26" name="o445"/>
           <p:cNvSpPr txBox="1"/>
           <p:nvPr/>
         </p:nvSpPr>
@@ -26351,7 +25648,7 @@
       </p:sp>
       <p:sp>
         <p:nvSpPr>
-          <p:cNvPr id="27" name="o463"/>
+          <p:cNvPr id="27" name="o446"/>
           <p:cNvSpPr txBox="1"/>
           <p:nvPr/>
         </p:nvSpPr>
@@ -26390,7 +25687,7 @@
       </p:sp>
       <p:sp>
         <p:nvSpPr>
-          <p:cNvPr id="28" name="o464"/>
+          <p:cNvPr id="28" name="o447"/>
           <p:cNvSpPr txBox="1"/>
           <p:nvPr/>
         </p:nvSpPr>
@@ -26429,7 +25726,7 @@
       </p:sp>
       <p:sp>
         <p:nvSpPr>
-          <p:cNvPr id="29" name="o465"/>
+          <p:cNvPr id="29" name="o448"/>
           <p:cNvSpPr/>
           <p:nvPr/>
         </p:nvSpPr>
@@ -26449,7 +25746,7 @@
       </p:sp>
       <p:sp>
         <p:nvSpPr>
-          <p:cNvPr id="30" name="o466"/>
+          <p:cNvPr id="30" name="o449"/>
           <p:cNvSpPr txBox="1"/>
           <p:nvPr/>
         </p:nvSpPr>
@@ -26488,7 +25785,7 @@
       </p:sp>
       <p:sp>
         <p:nvSpPr>
-          <p:cNvPr id="31" name="o467"/>
+          <p:cNvPr id="31" name="o450"/>
           <p:cNvSpPr txBox="1"/>
           <p:nvPr/>
         </p:nvSpPr>
@@ -26527,7 +25824,7 @@
       </p:sp>
       <p:sp>
         <p:nvSpPr>
-          <p:cNvPr id="32" name="o468"/>
+          <p:cNvPr id="32" name="o451"/>
           <p:cNvSpPr txBox="1"/>
           <p:nvPr/>
         </p:nvSpPr>
@@ -26566,7 +25863,7 @@
       </p:sp>
       <p:sp>
         <p:nvSpPr>
-          <p:cNvPr id="33" name="o469"/>
+          <p:cNvPr id="33" name="o452"/>
           <p:cNvSpPr txBox="1"/>
           <p:nvPr/>
         </p:nvSpPr>
@@ -26605,7 +25902,7 @@
       </p:sp>
       <p:sp>
         <p:nvSpPr>
-          <p:cNvPr id="34" name="o470"/>
+          <p:cNvPr id="34" name="o453"/>
           <p:cNvSpPr txBox="1"/>
           <p:nvPr/>
         </p:nvSpPr>
@@ -26644,7 +25941,7 @@
       </p:sp>
       <p:sp>
         <p:nvSpPr>
-          <p:cNvPr id="35" name="o471"/>
+          <p:cNvPr id="35" name="o454"/>
           <p:cNvSpPr/>
           <p:nvPr/>
         </p:nvSpPr>
@@ -26667,7 +25964,7 @@
       </p:sp>
       <p:sp>
         <p:nvSpPr>
-          <p:cNvPr id="36" name="o472"/>
+          <p:cNvPr id="36" name="o455"/>
           <p:cNvSpPr txBox="1"/>
           <p:nvPr/>
         </p:nvSpPr>
@@ -26706,7 +26003,7 @@
       </p:sp>
       <p:sp>
         <p:nvSpPr>
-          <p:cNvPr id="37" name="o473"/>
+          <p:cNvPr id="37" name="o456"/>
           <p:cNvSpPr txBox="1"/>
           <p:nvPr/>
         </p:nvSpPr>
@@ -26745,7 +26042,7 @@
       </p:sp>
       <p:sp>
         <p:nvSpPr>
-          <p:cNvPr id="38" name="o474"/>
+          <p:cNvPr id="38" name="o457"/>
           <p:cNvSpPr txBox="1"/>
           <p:nvPr/>
         </p:nvSpPr>
@@ -26784,7 +26081,7 @@
       </p:sp>
       <p:sp>
         <p:nvSpPr>
-          <p:cNvPr id="39" name="o475"/>
+          <p:cNvPr id="39" name="o458"/>
           <p:cNvSpPr txBox="1"/>
           <p:nvPr/>
         </p:nvSpPr>
@@ -26823,7 +26120,7 @@
       </p:sp>
       <p:sp>
         <p:nvSpPr>
-          <p:cNvPr id="40" name="o476"/>
+          <p:cNvPr id="40" name="o459"/>
           <p:cNvSpPr txBox="1"/>
           <p:nvPr/>
         </p:nvSpPr>
@@ -26862,7 +26159,7 @@
       </p:sp>
       <p:sp>
         <p:nvSpPr>
-          <p:cNvPr id="41" name="o477"/>
+          <p:cNvPr id="41" name="o460"/>
           <p:cNvSpPr/>
           <p:nvPr/>
         </p:nvSpPr>
@@ -26885,7 +26182,7 @@
       </p:sp>
       <p:sp>
         <p:nvSpPr>
-          <p:cNvPr id="42" name="o478"/>
+          <p:cNvPr id="42" name="o461"/>
           <p:cNvSpPr txBox="1"/>
           <p:nvPr/>
         </p:nvSpPr>
@@ -26924,7 +26221,7 @@
       </p:sp>
       <p:sp>
         <p:nvSpPr>
-          <p:cNvPr id="43" name="o479"/>
+          <p:cNvPr id="43" name="o462"/>
           <p:cNvSpPr txBox="1"/>
           <p:nvPr/>
         </p:nvSpPr>
@@ -26963,7 +26260,7 @@
       </p:sp>
       <p:sp>
         <p:nvSpPr>
-          <p:cNvPr id="44" name="o480"/>
+          <p:cNvPr id="44" name="o463"/>
           <p:cNvSpPr txBox="1"/>
           <p:nvPr/>
         </p:nvSpPr>
@@ -27002,7 +26299,7 @@
       </p:sp>
       <p:sp>
         <p:nvSpPr>
-          <p:cNvPr id="45" name="o481"/>
+          <p:cNvPr id="45" name="o464"/>
           <p:cNvSpPr txBox="1"/>
           <p:nvPr/>
         </p:nvSpPr>
@@ -27041,7 +26338,7 @@
       </p:sp>
       <p:sp>
         <p:nvSpPr>
-          <p:cNvPr id="46" name="o482"/>
+          <p:cNvPr id="46" name="o465"/>
           <p:cNvSpPr txBox="1"/>
           <p:nvPr/>
         </p:nvSpPr>
@@ -27080,7 +26377,7 @@
       </p:sp>
       <p:sp>
         <p:nvSpPr>
-          <p:cNvPr id="47" name="o483"/>
+          <p:cNvPr id="47" name="o466"/>
           <p:cNvSpPr/>
           <p:nvPr/>
         </p:nvSpPr>
@@ -27103,7 +26400,7 @@
       </p:sp>
       <p:sp>
         <p:nvSpPr>
-          <p:cNvPr id="48" name="o484"/>
+          <p:cNvPr id="48" name="o467"/>
           <p:cNvSpPr txBox="1"/>
           <p:nvPr/>
         </p:nvSpPr>
@@ -27142,7 +26439,7 @@
       </p:sp>
       <p:sp>
         <p:nvSpPr>
-          <p:cNvPr id="49" name="o485"/>
+          <p:cNvPr id="49" name="o468"/>
           <p:cNvSpPr txBox="1"/>
           <p:nvPr/>
         </p:nvSpPr>
@@ -27181,7 +26478,7 @@
       </p:sp>
       <p:sp>
         <p:nvSpPr>
-          <p:cNvPr id="50" name="o486"/>
+          <p:cNvPr id="50" name="o469"/>
           <p:cNvSpPr txBox="1"/>
           <p:nvPr/>
         </p:nvSpPr>
@@ -27220,7 +26517,7 @@
       </p:sp>
       <p:sp>
         <p:nvSpPr>
-          <p:cNvPr id="51" name="o487"/>
+          <p:cNvPr id="51" name="o470"/>
           <p:cNvSpPr txBox="1"/>
           <p:nvPr/>
         </p:nvSpPr>
@@ -27259,7 +26556,7 @@
       </p:sp>
       <p:sp>
         <p:nvSpPr>
-          <p:cNvPr id="52" name="o488"/>
+          <p:cNvPr id="52" name="o471"/>
           <p:cNvSpPr txBox="1"/>
           <p:nvPr/>
         </p:nvSpPr>
@@ -27298,7 +26595,7 @@
       </p:sp>
       <p:sp>
         <p:nvSpPr>
-          <p:cNvPr id="53" name="o489"/>
+          <p:cNvPr id="53" name="o472"/>
           <p:cNvSpPr/>
           <p:nvPr/>
         </p:nvSpPr>
@@ -27321,7 +26618,7 @@
       </p:sp>
       <p:sp>
         <p:nvSpPr>
-          <p:cNvPr id="54" name="o490"/>
+          <p:cNvPr id="54" name="o473"/>
           <p:cNvSpPr txBox="1"/>
           <p:nvPr/>
         </p:nvSpPr>
@@ -27360,7 +26657,7 @@
       </p:sp>
       <p:sp>
         <p:nvSpPr>
-          <p:cNvPr id="55" name="o491"/>
+          <p:cNvPr id="55" name="o474"/>
           <p:cNvSpPr txBox="1"/>
           <p:nvPr/>
         </p:nvSpPr>
@@ -27399,7 +26696,7 @@
       </p:sp>
       <p:sp>
         <p:nvSpPr>
-          <p:cNvPr id="56" name="o492"/>
+          <p:cNvPr id="56" name="o475"/>
           <p:cNvSpPr txBox="1"/>
           <p:nvPr/>
         </p:nvSpPr>
@@ -27438,7 +26735,7 @@
       </p:sp>
       <p:sp>
         <p:nvSpPr>
-          <p:cNvPr id="57" name="o493"/>
+          <p:cNvPr id="57" name="o476"/>
           <p:cNvSpPr txBox="1"/>
           <p:nvPr/>
         </p:nvSpPr>
@@ -27477,7 +26774,7 @@
       </p:sp>
       <p:sp>
         <p:nvSpPr>
-          <p:cNvPr id="58" name="o494"/>
+          <p:cNvPr id="58" name="o477"/>
           <p:cNvSpPr txBox="1"/>
           <p:nvPr/>
         </p:nvSpPr>
@@ -27516,7 +26813,7 @@
       </p:sp>
       <p:sp>
         <p:nvSpPr>
-          <p:cNvPr id="59" name="o495"/>
+          <p:cNvPr id="59" name="o478"/>
           <p:cNvSpPr/>
           <p:nvPr/>
         </p:nvSpPr>
@@ -27539,7 +26836,7 @@
       </p:sp>
       <p:sp>
         <p:nvSpPr>
-          <p:cNvPr id="60" name="o496"/>
+          <p:cNvPr id="60" name="o479"/>
           <p:cNvSpPr/>
           <p:nvPr/>
         </p:nvSpPr>
@@ -27562,7 +26859,7 @@
       </p:sp>
       <p:sp>
         <p:nvSpPr>
-          <p:cNvPr id="61" name="o497"/>
+          <p:cNvPr id="61" name="o480"/>
           <p:cNvSpPr txBox="1"/>
           <p:nvPr/>
         </p:nvSpPr>
